--- a/decks/01_1限_基本原則.pptx
+++ b/decks/01_1限_基本原則.pptx
@@ -15,9 +15,10 @@
     <p:sldId id="263" r:id="rId9"/>
     <p:sldId id="264" r:id="rId10"/>
     <p:sldId id="265" r:id="rId11"/>
+    <p:sldId id="266" r:id="rId12"/>
   </p:sldIdLst>
   <p:notesMasterIdLst>
-    <p:notesMasterId r:id="rId12"/>
+    <p:notesMasterId r:id="rId13"/>
   </p:notesMasterIdLst>
   <p:sldSz cx="12192000" cy="6858000"/>
   <p:notesSz cx="6858000" cy="12192000"/>
@@ -623,6 +624,94 @@
             <a:fld id="{F7021451-1387-4CA6-816F-3879F97B5CBC}" type="slidenum">
               <a:rPr lang="en-US"/>
               <a:t>10</a:t>
+            </a:fld>
+            <a:endParaRPr lang="en-US"/>
+          </a:p>
+        </p:txBody>
+      </p:sp>
+    </p:spTree>
+    <p:extLst>
+      <p:ext uri="{BB962C8B-B14F-4D97-AF65-F5344CB8AC3E}">
+        <p14:creationId xmlns:p14="http://schemas.microsoft.com/office/powerpoint/2010/main" val="1024086991"/>
+      </p:ext>
+    </p:extLst>
+  </p:cSld>
+  <p:clrMapOvr>
+    <a:masterClrMapping/>
+  </p:clrMapOvr>
+</p:notes>
+</file>
+
+<file path=ppt/notesSlides/notesSlide11.xml><?xml version="1.0" encoding="utf-8"?>
+<p:notes xmlns:a="http://schemas.openxmlformats.org/drawingml/2006/main" xmlns:r="http://schemas.openxmlformats.org/officeDocument/2006/relationships" xmlns:p="http://schemas.openxmlformats.org/presentationml/2006/main">
+  <p:cSld>
+    <p:spTree>
+      <p:nvGrpSpPr>
+        <p:cNvPr id="1" name=""/>
+        <p:cNvGrpSpPr/>
+        <p:nvPr/>
+      </p:nvGrpSpPr>
+      <p:grpSpPr>
+        <a:xfrm>
+          <a:off x="0" y="0"/>
+          <a:ext cx="0" cy="0"/>
+          <a:chOff x="0" y="0"/>
+          <a:chExt cx="0" cy="0"/>
+        </a:xfrm>
+      </p:grpSpPr>
+      <p:sp>
+        <p:nvSpPr>
+          <p:cNvPr id="2" name="Slide Image Placeholder 1"/>
+          <p:cNvSpPr>
+            <a:spLocks noGrp="1" noRot="1" noChangeAspect="1"/>
+          </p:cNvSpPr>
+          <p:nvPr>
+            <p:ph type="sldImg"/>
+          </p:nvPr>
+        </p:nvSpPr>
+        <p:spPr/>
+      </p:sp>
+      <p:sp>
+        <p:nvSpPr>
+          <p:cNvPr id="3" name="Notes Placeholder 2"/>
+          <p:cNvSpPr>
+            <a:spLocks noGrp="1"/>
+          </p:cNvSpPr>
+          <p:nvPr>
+            <p:ph type="body" idx="1"/>
+          </p:nvPr>
+        </p:nvSpPr>
+        <p:spPr/>
+        <p:txBody>
+          <a:bodyPr/>
+          <a:lstStyle/>
+          <a:p>
+            <a:r>
+              <a:rPr lang="en-US" dirty="0"/>
+              <a:t/>
+            </a:r>
+            <a:endParaRPr lang="en-US" dirty="0"/>
+          </a:p>
+        </p:txBody>
+      </p:sp>
+      <p:sp>
+        <p:nvSpPr>
+          <p:cNvPr id="4" name="Slide Number Placeholder 3"/>
+          <p:cNvSpPr>
+            <a:spLocks noGrp="1"/>
+          </p:cNvSpPr>
+          <p:nvPr>
+            <p:ph type="sldNum" sz="quarter" idx="10"/>
+          </p:nvPr>
+        </p:nvSpPr>
+        <p:spPr/>
+        <p:txBody>
+          <a:bodyPr/>
+          <a:lstStyle/>
+          <a:p>
+            <a:fld id="{F7021451-1387-4CA6-816F-3879F97B5CBC}" type="slidenum">
+              <a:rPr lang="en-US"/>
+              <a:t>11</a:t>
             </a:fld>
             <a:endParaRPr lang="en-US"/>
           </a:p>
@@ -1658,7 +1747,7 @@
     <p:bg>
       <p:bgPr>
         <a:solidFill>
-          <a:srgbClr val="0F2D52"/>
+          <a:srgbClr val="093259"/>
         </a:solidFill>
       </p:bgPr>
     </p:bg>
@@ -1698,9 +1787,33 @@
           <a:ln/>
         </p:spPr>
       </p:sp>
-      <p:sp>
-        <p:nvSpPr>
-          <p:cNvPr id="3" name="Text 1"/>
+      <p:pic>
+        <p:nvPicPr>
+          <p:cNvPr id="3" name="Image 0" descr="/home/user/Training-/assets/logo.png">    </p:cNvPr>
+          <p:cNvPicPr>
+            <a:picLocks noChangeAspect="1"/>
+          </p:cNvPicPr>
+          <p:nvPr/>
+        </p:nvPicPr>
+        <p:blipFill>
+          <a:blip r:embed="rId1"/>
+          <a:stretch>
+            <a:fillRect/>
+          </a:stretch>
+        </p:blipFill>
+        <p:spPr>
+          <a:xfrm>
+            <a:off x="10765231" y="332912"/>
+            <a:ext cx="786384" cy="742353"/>
+          </a:xfrm>
+          <a:prstGeom prst="rect">
+            <a:avLst/>
+          </a:prstGeom>
+        </p:spPr>
+      </p:pic>
+      <p:sp>
+        <p:nvSpPr>
+          <p:cNvPr id="4" name="Text 1"/>
           <p:cNvSpPr/>
           <p:nvPr/>
         </p:nvSpPr>
@@ -1725,7 +1838,7 @@
             <a:r>
               <a:rPr lang="en-US" sz="1300" b="1" dirty="0">
                 <a:solidFill>
-                  <a:srgbClr val="17AF98"/>
+                  <a:srgbClr val="12B198"/>
                 </a:solidFill>
                 <a:latin typeface="Yu Gothic" pitchFamily="34" charset="0"/>
                 <a:ea typeface="Yu Gothic" pitchFamily="34" charset="-122"/>
@@ -1756,7 +1869,7 @@
       </p:sp>
       <p:sp>
         <p:nvSpPr>
-          <p:cNvPr id="4" name="Text 2"/>
+          <p:cNvPr id="5" name="Text 2"/>
           <p:cNvSpPr/>
           <p:nvPr/>
         </p:nvSpPr>
@@ -1798,7 +1911,7 @@
       </p:sp>
       <p:sp>
         <p:nvSpPr>
-          <p:cNvPr id="5" name="Text 3"/>
+          <p:cNvPr id="6" name="Text 3"/>
           <p:cNvSpPr/>
           <p:nvPr/>
         </p:nvSpPr>
@@ -1837,7 +1950,7 @@
       </p:sp>
       <p:sp>
         <p:nvSpPr>
-          <p:cNvPr id="6" name="Shape 4"/>
+          <p:cNvPr id="7" name="Shape 4"/>
           <p:cNvSpPr/>
           <p:nvPr/>
         </p:nvSpPr>
@@ -1850,14 +1963,14 @@
             <a:avLst/>
           </a:prstGeom>
           <a:solidFill>
-            <a:srgbClr val="17AF98"/>
+            <a:srgbClr val="12B198"/>
           </a:solidFill>
           <a:ln/>
         </p:spPr>
       </p:sp>
       <p:sp>
         <p:nvSpPr>
-          <p:cNvPr id="7" name="Text 5"/>
+          <p:cNvPr id="8" name="Text 5"/>
           <p:cNvSpPr/>
           <p:nvPr/>
         </p:nvSpPr>
@@ -1925,7 +2038,7 @@
     <p:bg>
       <p:bgPr>
         <a:solidFill>
-          <a:srgbClr val="0F2D52"/>
+          <a:srgbClr val="FFFFFF"/>
         </a:solidFill>
       </p:bgPr>
     </p:bg>
@@ -1943,6 +2056,993 @@
           <a:chExt cx="0" cy="0"/>
         </a:xfrm>
       </p:grpSpPr>
+      <p:pic>
+        <p:nvPicPr>
+          <p:cNvPr id="2" name="Image 0" descr="/home/user/Training-/assets/logo.png">    </p:cNvPr>
+          <p:cNvPicPr>
+            <a:picLocks noChangeAspect="1"/>
+          </p:cNvPicPr>
+          <p:nvPr/>
+        </p:nvPicPr>
+        <p:blipFill>
+          <a:blip r:embed="rId1"/>
+          <a:stretch>
+            <a:fillRect/>
+          </a:stretch>
+        </p:blipFill>
+        <p:spPr>
+          <a:xfrm>
+            <a:off x="10765231" y="332912"/>
+            <a:ext cx="786384" cy="742353"/>
+          </a:xfrm>
+          <a:prstGeom prst="rect">
+            <a:avLst/>
+          </a:prstGeom>
+        </p:spPr>
+      </p:pic>
+      <p:sp>
+        <p:nvSpPr>
+          <p:cNvPr id="3" name="Text 0"/>
+          <p:cNvSpPr/>
+          <p:nvPr/>
+        </p:nvSpPr>
+        <p:spPr>
+          <a:xfrm>
+            <a:off x="640080" y="475488"/>
+            <a:ext cx="9805111" cy="960120"/>
+          </a:xfrm>
+          <a:prstGeom prst="rect">
+            <a:avLst/>
+          </a:prstGeom>
+          <a:noFill/>
+          <a:ln/>
+        </p:spPr>
+        <p:txBody>
+          <a:bodyPr wrap="square" lIns="0" tIns="0" rIns="0" bIns="0" rtlCol="0" anchor="t"/>
+          <a:lstStyle/>
+          <a:p>
+            <a:pPr indent="0" marL="0">
+              <a:lnSpc>
+                <a:spcPct val="94000"/>
+              </a:lnSpc>
+              <a:buNone/>
+            </a:pPr>
+            <a:r>
+              <a:rPr lang="en-US" sz="2700" b="1" dirty="0">
+                <a:solidFill>
+                  <a:srgbClr val="093259"/>
+                </a:solidFill>
+                <a:latin typeface="Yu Gothic" pitchFamily="34" charset="0"/>
+                <a:ea typeface="Yu Gothic" pitchFamily="34" charset="-122"/>
+                <a:cs typeface="Yu Gothic" pitchFamily="34" charset="-120"/>
+              </a:rPr>
+              <a:t>ミニTTX ― 解答と根拠の示し方</a:t>
+            </a:r>
+            <a:endParaRPr lang="en-US" sz="2700" dirty="0"/>
+          </a:p>
+          <a:p>
+            <a:pPr indent="0" marL="0">
+              <a:lnSpc>
+                <a:spcPct val="94000"/>
+              </a:lnSpc>
+              <a:buNone/>
+            </a:pPr>
+            <a:r>
+              <a:rPr lang="en-US" sz="1250" i="1" dirty="0">
+                <a:solidFill>
+                  <a:srgbClr val="12B198"/>
+                </a:solidFill>
+                <a:latin typeface="Calibri" pitchFamily="34" charset="0"/>
+                <a:ea typeface="Calibri" pitchFamily="34" charset="-122"/>
+                <a:cs typeface="Calibri" pitchFamily="34" charset="-120"/>
+              </a:rPr>
+              <a:t>Mini TTX — Answers and How to State Your Reasoning</a:t>
+            </a:r>
+            <a:endParaRPr lang="en-US" sz="2700" dirty="0"/>
+          </a:p>
+        </p:txBody>
+      </p:sp>
+      <p:sp>
+        <p:nvSpPr>
+          <p:cNvPr id="4" name="Text 1"/>
+          <p:cNvSpPr/>
+          <p:nvPr/>
+        </p:nvSpPr>
+        <p:spPr>
+          <a:xfrm>
+            <a:off x="640080" y="1536192"/>
+            <a:ext cx="10911535" cy="566928"/>
+          </a:xfrm>
+          <a:prstGeom prst="rect">
+            <a:avLst/>
+          </a:prstGeom>
+          <a:noFill/>
+          <a:ln/>
+        </p:spPr>
+        <p:txBody>
+          <a:bodyPr wrap="square" lIns="0" tIns="0" rIns="0" bIns="0" rtlCol="0" anchor="t"/>
+          <a:lstStyle/>
+          <a:p>
+            <a:pPr algn="l" indent="0" marL="0">
+              <a:lnSpc>
+                <a:spcPct val="92000"/>
+              </a:lnSpc>
+              <a:buNone/>
+            </a:pPr>
+            <a:r>
+              <a:rPr lang="en-US" sz="1300" dirty="0">
+                <a:solidFill>
+                  <a:srgbClr val="093259"/>
+                </a:solidFill>
+                <a:latin typeface="Yu Gothic" pitchFamily="34" charset="0"/>
+                <a:ea typeface="Yu Gothic" pitchFamily="34" charset="-122"/>
+                <a:cs typeface="Yu Gothic" pitchFamily="34" charset="-120"/>
+              </a:rPr>
+              <a:t>解答　1 ×　2 ○　3 ×　4 ○　5 ×　6 ○　7 ×　8 ×</a:t>
+            </a:r>
+            <a:endParaRPr lang="en-US" sz="1300" dirty="0"/>
+          </a:p>
+          <a:p>
+            <a:pPr algn="l" indent="0" marL="0">
+              <a:lnSpc>
+                <a:spcPct val="92000"/>
+              </a:lnSpc>
+              <a:buNone/>
+            </a:pPr>
+            <a:r>
+              <a:rPr lang="en-US" sz="1000" i="1" dirty="0">
+                <a:solidFill>
+                  <a:srgbClr val="5F7183"/>
+                </a:solidFill>
+                <a:latin typeface="Calibri" pitchFamily="34" charset="0"/>
+                <a:ea typeface="Calibri" pitchFamily="34" charset="-122"/>
+                <a:cs typeface="Calibri" pitchFamily="34" charset="-120"/>
+              </a:rPr>
+              <a:t>Answers:  1 No · 2 Yes · 3 No · 4 Yes · 5 No · 6 Yes · 7 No · 8 No</a:t>
+            </a:r>
+            <a:endParaRPr lang="en-US" sz="1300" dirty="0"/>
+          </a:p>
+        </p:txBody>
+      </p:sp>
+      <p:sp>
+        <p:nvSpPr>
+          <p:cNvPr id="5" name="Shape 2"/>
+          <p:cNvSpPr/>
+          <p:nvPr/>
+        </p:nvSpPr>
+        <p:spPr>
+          <a:xfrm>
+            <a:off x="640080" y="2286000"/>
+            <a:ext cx="10911535" cy="702259"/>
+          </a:xfrm>
+          <a:prstGeom prst="roundRect">
+            <a:avLst>
+              <a:gd name="adj" fmla="val 6510"/>
+            </a:avLst>
+          </a:prstGeom>
+          <a:solidFill>
+            <a:srgbClr val="EFF4F8"/>
+          </a:solidFill>
+          <a:ln/>
+        </p:spPr>
+      </p:sp>
+      <p:sp>
+        <p:nvSpPr>
+          <p:cNvPr id="6" name="Shape 3"/>
+          <p:cNvSpPr/>
+          <p:nvPr/>
+        </p:nvSpPr>
+        <p:spPr>
+          <a:xfrm>
+            <a:off x="896112" y="2445106"/>
+            <a:ext cx="384048" cy="384048"/>
+          </a:xfrm>
+          <a:prstGeom prst="ellipse">
+            <a:avLst/>
+          </a:prstGeom>
+          <a:solidFill>
+            <a:srgbClr val="12B198"/>
+          </a:solidFill>
+          <a:ln/>
+        </p:spPr>
+      </p:sp>
+      <p:sp>
+        <p:nvSpPr>
+          <p:cNvPr id="7" name="Text 4"/>
+          <p:cNvSpPr/>
+          <p:nvPr/>
+        </p:nvSpPr>
+        <p:spPr>
+          <a:xfrm>
+            <a:off x="896112" y="2445106"/>
+            <a:ext cx="384048" cy="384048"/>
+          </a:xfrm>
+          <a:prstGeom prst="rect">
+            <a:avLst/>
+          </a:prstGeom>
+          <a:noFill/>
+          <a:ln/>
+        </p:spPr>
+        <p:txBody>
+          <a:bodyPr wrap="square" lIns="0" tIns="0" rIns="0" bIns="0" rtlCol="0" anchor="ctr"/>
+          <a:lstStyle/>
+          <a:p>
+            <a:pPr algn="ctr" indent="0" marL="0">
+              <a:buNone/>
+            </a:pPr>
+            <a:r>
+              <a:rPr lang="en-US" sz="1400" b="1" dirty="0">
+                <a:solidFill>
+                  <a:srgbClr val="FFFFFF"/>
+                </a:solidFill>
+                <a:latin typeface="Calibri" pitchFamily="34" charset="0"/>
+                <a:ea typeface="Calibri" pitchFamily="34" charset="-122"/>
+                <a:cs typeface="Calibri" pitchFamily="34" charset="-120"/>
+              </a:rPr>
+              <a:t>1</a:t>
+            </a:r>
+            <a:endParaRPr lang="en-US" sz="1400" dirty="0"/>
+          </a:p>
+        </p:txBody>
+      </p:sp>
+      <p:sp>
+        <p:nvSpPr>
+          <p:cNvPr id="8" name="Text 5"/>
+          <p:cNvSpPr/>
+          <p:nvPr/>
+        </p:nvSpPr>
+        <p:spPr>
+          <a:xfrm>
+            <a:off x="1499616" y="2395728"/>
+            <a:ext cx="9777679" cy="519379"/>
+          </a:xfrm>
+          <a:prstGeom prst="rect">
+            <a:avLst/>
+          </a:prstGeom>
+          <a:noFill/>
+          <a:ln/>
+        </p:spPr>
+        <p:txBody>
+          <a:bodyPr wrap="square" lIns="0" tIns="0" rIns="0" bIns="0" rtlCol="0" anchor="ctr"/>
+          <a:lstStyle/>
+          <a:p>
+            <a:pPr indent="0" marL="0">
+              <a:lnSpc>
+                <a:spcPct val="92000"/>
+              </a:lnSpc>
+              <a:buNone/>
+            </a:pPr>
+            <a:r>
+              <a:rPr lang="en-US" sz="1450" b="1" dirty="0">
+                <a:solidFill>
+                  <a:srgbClr val="1B2733"/>
+                </a:solidFill>
+                <a:latin typeface="Yu Gothic" pitchFamily="34" charset="0"/>
+                <a:ea typeface="Yu Gothic" pitchFamily="34" charset="-122"/>
+                <a:cs typeface="Yu Gothic" pitchFamily="34" charset="-120"/>
+              </a:rPr>
+              <a:t>×の多くは、委ねられていないことを行っています。</a:t>
+            </a:r>
+            <a:endParaRPr lang="en-US" sz="1450" dirty="0"/>
+          </a:p>
+          <a:p>
+            <a:pPr indent="0" marL="0">
+              <a:lnSpc>
+                <a:spcPct val="92000"/>
+              </a:lnSpc>
+              <a:buNone/>
+            </a:pPr>
+            <a:r>
+              <a:rPr lang="en-US" sz="1050" i="1" dirty="0">
+                <a:solidFill>
+                  <a:srgbClr val="5F7183"/>
+                </a:solidFill>
+                <a:latin typeface="Calibri" pitchFamily="34" charset="0"/>
+                <a:ea typeface="Calibri" pitchFamily="34" charset="-122"/>
+                <a:cs typeface="Calibri" pitchFamily="34" charset="-120"/>
+              </a:rPr>
+              <a:t>Most of the "No" answers do something that was never delegated to you.</a:t>
+            </a:r>
+            <a:endParaRPr lang="en-US" sz="1450" dirty="0"/>
+          </a:p>
+        </p:txBody>
+      </p:sp>
+      <p:sp>
+        <p:nvSpPr>
+          <p:cNvPr id="9" name="Shape 6"/>
+          <p:cNvSpPr/>
+          <p:nvPr/>
+        </p:nvSpPr>
+        <p:spPr>
+          <a:xfrm>
+            <a:off x="640080" y="3097987"/>
+            <a:ext cx="10911535" cy="702259"/>
+          </a:xfrm>
+          <a:prstGeom prst="roundRect">
+            <a:avLst>
+              <a:gd name="adj" fmla="val 6510"/>
+            </a:avLst>
+          </a:prstGeom>
+          <a:solidFill>
+            <a:srgbClr val="F7FAFC"/>
+          </a:solidFill>
+          <a:ln/>
+        </p:spPr>
+      </p:sp>
+      <p:sp>
+        <p:nvSpPr>
+          <p:cNvPr id="10" name="Shape 7"/>
+          <p:cNvSpPr/>
+          <p:nvPr/>
+        </p:nvSpPr>
+        <p:spPr>
+          <a:xfrm>
+            <a:off x="896112" y="3257093"/>
+            <a:ext cx="384048" cy="384048"/>
+          </a:xfrm>
+          <a:prstGeom prst="ellipse">
+            <a:avLst/>
+          </a:prstGeom>
+          <a:solidFill>
+            <a:srgbClr val="12B198"/>
+          </a:solidFill>
+          <a:ln/>
+        </p:spPr>
+      </p:sp>
+      <p:sp>
+        <p:nvSpPr>
+          <p:cNvPr id="11" name="Text 8"/>
+          <p:cNvSpPr/>
+          <p:nvPr/>
+        </p:nvSpPr>
+        <p:spPr>
+          <a:xfrm>
+            <a:off x="896112" y="3257093"/>
+            <a:ext cx="384048" cy="384048"/>
+          </a:xfrm>
+          <a:prstGeom prst="rect">
+            <a:avLst/>
+          </a:prstGeom>
+          <a:noFill/>
+          <a:ln/>
+        </p:spPr>
+        <p:txBody>
+          <a:bodyPr wrap="square" lIns="0" tIns="0" rIns="0" bIns="0" rtlCol="0" anchor="ctr"/>
+          <a:lstStyle/>
+          <a:p>
+            <a:pPr algn="ctr" indent="0" marL="0">
+              <a:buNone/>
+            </a:pPr>
+            <a:r>
+              <a:rPr lang="en-US" sz="1400" b="1" dirty="0">
+                <a:solidFill>
+                  <a:srgbClr val="FFFFFF"/>
+                </a:solidFill>
+                <a:latin typeface="Calibri" pitchFamily="34" charset="0"/>
+                <a:ea typeface="Calibri" pitchFamily="34" charset="-122"/>
+                <a:cs typeface="Calibri" pitchFamily="34" charset="-120"/>
+              </a:rPr>
+              <a:t>2</a:t>
+            </a:r>
+            <a:endParaRPr lang="en-US" sz="1400" dirty="0"/>
+          </a:p>
+        </p:txBody>
+      </p:sp>
+      <p:sp>
+        <p:nvSpPr>
+          <p:cNvPr id="12" name="Text 9"/>
+          <p:cNvSpPr/>
+          <p:nvPr/>
+        </p:nvSpPr>
+        <p:spPr>
+          <a:xfrm>
+            <a:off x="1499616" y="3207715"/>
+            <a:ext cx="9777679" cy="519379"/>
+          </a:xfrm>
+          <a:prstGeom prst="rect">
+            <a:avLst/>
+          </a:prstGeom>
+          <a:noFill/>
+          <a:ln/>
+        </p:spPr>
+        <p:txBody>
+          <a:bodyPr wrap="square" lIns="0" tIns="0" rIns="0" bIns="0" rtlCol="0" anchor="ctr"/>
+          <a:lstStyle/>
+          <a:p>
+            <a:pPr indent="0" marL="0">
+              <a:lnSpc>
+                <a:spcPct val="92000"/>
+              </a:lnSpc>
+              <a:buNone/>
+            </a:pPr>
+            <a:r>
+              <a:rPr lang="en-US" sz="1450" b="1" dirty="0">
+                <a:solidFill>
+                  <a:srgbClr val="1B2733"/>
+                </a:solidFill>
+                <a:latin typeface="Yu Gothic" pitchFamily="34" charset="0"/>
+                <a:ea typeface="Yu Gothic" pitchFamily="34" charset="-122"/>
+                <a:cs typeface="Yu Gothic" pitchFamily="34" charset="-120"/>
+              </a:rPr>
+              <a:t>○は、「誰でもできること」か「委ねられたこと」のどちらかに収まっています。</a:t>
+            </a:r>
+            <a:endParaRPr lang="en-US" sz="1450" dirty="0"/>
+          </a:p>
+          <a:p>
+            <a:pPr indent="0" marL="0">
+              <a:lnSpc>
+                <a:spcPct val="92000"/>
+              </a:lnSpc>
+              <a:buNone/>
+            </a:pPr>
+            <a:r>
+              <a:rPr lang="en-US" sz="1050" i="1" dirty="0">
+                <a:solidFill>
+                  <a:srgbClr val="5F7183"/>
+                </a:solidFill>
+                <a:latin typeface="Calibri" pitchFamily="34" charset="0"/>
+                <a:ea typeface="Calibri" pitchFamily="34" charset="-122"/>
+                <a:cs typeface="Calibri" pitchFamily="34" charset="-120"/>
+              </a:rPr>
+              <a:t>Each "Yes" fits into source 1 or source 2.</a:t>
+            </a:r>
+            <a:endParaRPr lang="en-US" sz="1450" dirty="0"/>
+          </a:p>
+        </p:txBody>
+      </p:sp>
+      <p:sp>
+        <p:nvSpPr>
+          <p:cNvPr id="13" name="Shape 10"/>
+          <p:cNvSpPr/>
+          <p:nvPr/>
+        </p:nvSpPr>
+        <p:spPr>
+          <a:xfrm>
+            <a:off x="640080" y="3909974"/>
+            <a:ext cx="10911535" cy="702259"/>
+          </a:xfrm>
+          <a:prstGeom prst="roundRect">
+            <a:avLst>
+              <a:gd name="adj" fmla="val 6510"/>
+            </a:avLst>
+          </a:prstGeom>
+          <a:solidFill>
+            <a:srgbClr val="EFF4F8"/>
+          </a:solidFill>
+          <a:ln/>
+        </p:spPr>
+      </p:sp>
+      <p:sp>
+        <p:nvSpPr>
+          <p:cNvPr id="14" name="Shape 11"/>
+          <p:cNvSpPr/>
+          <p:nvPr/>
+        </p:nvSpPr>
+        <p:spPr>
+          <a:xfrm>
+            <a:off x="896112" y="4069080"/>
+            <a:ext cx="384048" cy="384048"/>
+          </a:xfrm>
+          <a:prstGeom prst="ellipse">
+            <a:avLst/>
+          </a:prstGeom>
+          <a:solidFill>
+            <a:srgbClr val="12B198"/>
+          </a:solidFill>
+          <a:ln/>
+        </p:spPr>
+      </p:sp>
+      <p:sp>
+        <p:nvSpPr>
+          <p:cNvPr id="15" name="Text 12"/>
+          <p:cNvSpPr/>
+          <p:nvPr/>
+        </p:nvSpPr>
+        <p:spPr>
+          <a:xfrm>
+            <a:off x="896112" y="4069080"/>
+            <a:ext cx="384048" cy="384048"/>
+          </a:xfrm>
+          <a:prstGeom prst="rect">
+            <a:avLst/>
+          </a:prstGeom>
+          <a:noFill/>
+          <a:ln/>
+        </p:spPr>
+        <p:txBody>
+          <a:bodyPr wrap="square" lIns="0" tIns="0" rIns="0" bIns="0" rtlCol="0" anchor="ctr"/>
+          <a:lstStyle/>
+          <a:p>
+            <a:pPr algn="ctr" indent="0" marL="0">
+              <a:buNone/>
+            </a:pPr>
+            <a:r>
+              <a:rPr lang="en-US" sz="1400" b="1" dirty="0">
+                <a:solidFill>
+                  <a:srgbClr val="FFFFFF"/>
+                </a:solidFill>
+                <a:latin typeface="Calibri" pitchFamily="34" charset="0"/>
+                <a:ea typeface="Calibri" pitchFamily="34" charset="-122"/>
+                <a:cs typeface="Calibri" pitchFamily="34" charset="-120"/>
+              </a:rPr>
+              <a:t>3</a:t>
+            </a:r>
+            <a:endParaRPr lang="en-US" sz="1400" dirty="0"/>
+          </a:p>
+        </p:txBody>
+      </p:sp>
+      <p:sp>
+        <p:nvSpPr>
+          <p:cNvPr id="16" name="Text 13"/>
+          <p:cNvSpPr/>
+          <p:nvPr/>
+        </p:nvSpPr>
+        <p:spPr>
+          <a:xfrm>
+            <a:off x="1499616" y="4019702"/>
+            <a:ext cx="9777679" cy="519379"/>
+          </a:xfrm>
+          <a:prstGeom prst="rect">
+            <a:avLst/>
+          </a:prstGeom>
+          <a:noFill/>
+          <a:ln/>
+        </p:spPr>
+        <p:txBody>
+          <a:bodyPr wrap="square" lIns="0" tIns="0" rIns="0" bIns="0" rtlCol="0" anchor="ctr"/>
+          <a:lstStyle/>
+          <a:p>
+            <a:pPr indent="0" marL="0">
+              <a:lnSpc>
+                <a:spcPct val="92000"/>
+              </a:lnSpc>
+              <a:buNone/>
+            </a:pPr>
+            <a:r>
+              <a:rPr lang="en-US" sz="1450" b="1" dirty="0">
+                <a:solidFill>
+                  <a:srgbClr val="1B2733"/>
+                </a:solidFill>
+                <a:latin typeface="Yu Gothic" pitchFamily="34" charset="0"/>
+                <a:ea typeface="Yu Gothic" pitchFamily="34" charset="-122"/>
+                <a:cs typeface="Yu Gothic" pitchFamily="34" charset="-120"/>
+              </a:rPr>
+              <a:t>設問5は終期の問題です。侵害が終われば、正当防衛も終わります。</a:t>
+            </a:r>
+            <a:endParaRPr lang="en-US" sz="1450" dirty="0"/>
+          </a:p>
+          <a:p>
+            <a:pPr indent="0" marL="0">
+              <a:lnSpc>
+                <a:spcPct val="92000"/>
+              </a:lnSpc>
+              <a:buNone/>
+            </a:pPr>
+            <a:r>
+              <a:rPr lang="en-US" sz="1050" i="1" dirty="0">
+                <a:solidFill>
+                  <a:srgbClr val="5F7183"/>
+                </a:solidFill>
+                <a:latin typeface="Calibri" pitchFamily="34" charset="0"/>
+                <a:ea typeface="Calibri" pitchFamily="34" charset="-122"/>
+                <a:cs typeface="Calibri" pitchFamily="34" charset="-120"/>
+              </a:rPr>
+              <a:t>Item 5 is about when it ends. When the attack stops, the right to defend stops.</a:t>
+            </a:r>
+            <a:endParaRPr lang="en-US" sz="1450" dirty="0"/>
+          </a:p>
+        </p:txBody>
+      </p:sp>
+      <p:sp>
+        <p:nvSpPr>
+          <p:cNvPr id="17" name="Shape 14"/>
+          <p:cNvSpPr/>
+          <p:nvPr/>
+        </p:nvSpPr>
+        <p:spPr>
+          <a:xfrm>
+            <a:off x="640080" y="4721962"/>
+            <a:ext cx="10911535" cy="702259"/>
+          </a:xfrm>
+          <a:prstGeom prst="roundRect">
+            <a:avLst>
+              <a:gd name="adj" fmla="val 6510"/>
+            </a:avLst>
+          </a:prstGeom>
+          <a:solidFill>
+            <a:srgbClr val="F7FAFC"/>
+          </a:solidFill>
+          <a:ln/>
+        </p:spPr>
+      </p:sp>
+      <p:sp>
+        <p:nvSpPr>
+          <p:cNvPr id="18" name="Shape 15"/>
+          <p:cNvSpPr/>
+          <p:nvPr/>
+        </p:nvSpPr>
+        <p:spPr>
+          <a:xfrm>
+            <a:off x="896112" y="4881067"/>
+            <a:ext cx="384048" cy="384048"/>
+          </a:xfrm>
+          <a:prstGeom prst="ellipse">
+            <a:avLst/>
+          </a:prstGeom>
+          <a:solidFill>
+            <a:srgbClr val="12B198"/>
+          </a:solidFill>
+          <a:ln/>
+        </p:spPr>
+      </p:sp>
+      <p:sp>
+        <p:nvSpPr>
+          <p:cNvPr id="19" name="Text 16"/>
+          <p:cNvSpPr/>
+          <p:nvPr/>
+        </p:nvSpPr>
+        <p:spPr>
+          <a:xfrm>
+            <a:off x="896112" y="4881067"/>
+            <a:ext cx="384048" cy="384048"/>
+          </a:xfrm>
+          <a:prstGeom prst="rect">
+            <a:avLst/>
+          </a:prstGeom>
+          <a:noFill/>
+          <a:ln/>
+        </p:spPr>
+        <p:txBody>
+          <a:bodyPr wrap="square" lIns="0" tIns="0" rIns="0" bIns="0" rtlCol="0" anchor="ctr"/>
+          <a:lstStyle/>
+          <a:p>
+            <a:pPr algn="ctr" indent="0" marL="0">
+              <a:buNone/>
+            </a:pPr>
+            <a:r>
+              <a:rPr lang="en-US" sz="1400" b="1" dirty="0">
+                <a:solidFill>
+                  <a:srgbClr val="FFFFFF"/>
+                </a:solidFill>
+                <a:latin typeface="Calibri" pitchFamily="34" charset="0"/>
+                <a:ea typeface="Calibri" pitchFamily="34" charset="-122"/>
+                <a:cs typeface="Calibri" pitchFamily="34" charset="-120"/>
+              </a:rPr>
+              <a:t>4</a:t>
+            </a:r>
+            <a:endParaRPr lang="en-US" sz="1400" dirty="0"/>
+          </a:p>
+        </p:txBody>
+      </p:sp>
+      <p:sp>
+        <p:nvSpPr>
+          <p:cNvPr id="20" name="Text 17"/>
+          <p:cNvSpPr/>
+          <p:nvPr/>
+        </p:nvSpPr>
+        <p:spPr>
+          <a:xfrm>
+            <a:off x="1499616" y="4831690"/>
+            <a:ext cx="9777679" cy="519379"/>
+          </a:xfrm>
+          <a:prstGeom prst="rect">
+            <a:avLst/>
+          </a:prstGeom>
+          <a:noFill/>
+          <a:ln/>
+        </p:spPr>
+        <p:txBody>
+          <a:bodyPr wrap="square" lIns="0" tIns="0" rIns="0" bIns="0" rtlCol="0" anchor="ctr"/>
+          <a:lstStyle/>
+          <a:p>
+            <a:pPr indent="0" marL="0">
+              <a:lnSpc>
+                <a:spcPct val="92000"/>
+              </a:lnSpc>
+              <a:buNone/>
+            </a:pPr>
+            <a:r>
+              <a:rPr lang="en-US" sz="1450" b="1" dirty="0">
+                <a:solidFill>
+                  <a:srgbClr val="1B2733"/>
+                </a:solidFill>
+                <a:latin typeface="Yu Gothic" pitchFamily="34" charset="0"/>
+                <a:ea typeface="Yu Gothic" pitchFamily="34" charset="-122"/>
+                <a:cs typeface="Yu Gothic" pitchFamily="34" charset="-120"/>
+              </a:rPr>
+              <a:t>設問8は Asset の問題です。書類は情報資産です。廃棄すると証跡が残りません。</a:t>
+            </a:r>
+            <a:endParaRPr lang="en-US" sz="1450" dirty="0"/>
+          </a:p>
+          <a:p>
+            <a:pPr indent="0" marL="0">
+              <a:lnSpc>
+                <a:spcPct val="92000"/>
+              </a:lnSpc>
+              <a:buNone/>
+            </a:pPr>
+            <a:r>
+              <a:rPr lang="en-US" sz="1050" i="1" dirty="0">
+                <a:solidFill>
+                  <a:srgbClr val="5F7183"/>
+                </a:solidFill>
+                <a:latin typeface="Calibri" pitchFamily="34" charset="0"/>
+                <a:ea typeface="Calibri" pitchFamily="34" charset="-122"/>
+                <a:cs typeface="Calibri" pitchFamily="34" charset="-120"/>
+              </a:rPr>
+              <a:t>Item 8 is an Asset question. A document is an information asset. Binning it destroys the record.</a:t>
+            </a:r>
+            <a:endParaRPr lang="en-US" sz="1450" dirty="0"/>
+          </a:p>
+        </p:txBody>
+      </p:sp>
+      <p:sp>
+        <p:nvSpPr>
+          <p:cNvPr id="21" name="Shape 18"/>
+          <p:cNvSpPr/>
+          <p:nvPr/>
+        </p:nvSpPr>
+        <p:spPr>
+          <a:xfrm>
+            <a:off x="640080" y="5533949"/>
+            <a:ext cx="10911535" cy="702259"/>
+          </a:xfrm>
+          <a:prstGeom prst="roundRect">
+            <a:avLst>
+              <a:gd name="adj" fmla="val 6510"/>
+            </a:avLst>
+          </a:prstGeom>
+          <a:solidFill>
+            <a:srgbClr val="EFF4F8"/>
+          </a:solidFill>
+          <a:ln/>
+        </p:spPr>
+      </p:sp>
+      <p:sp>
+        <p:nvSpPr>
+          <p:cNvPr id="22" name="Shape 19"/>
+          <p:cNvSpPr/>
+          <p:nvPr/>
+        </p:nvSpPr>
+        <p:spPr>
+          <a:xfrm>
+            <a:off x="896112" y="5693054"/>
+            <a:ext cx="384048" cy="384048"/>
+          </a:xfrm>
+          <a:prstGeom prst="ellipse">
+            <a:avLst/>
+          </a:prstGeom>
+          <a:solidFill>
+            <a:srgbClr val="12B198"/>
+          </a:solidFill>
+          <a:ln/>
+        </p:spPr>
+      </p:sp>
+      <p:sp>
+        <p:nvSpPr>
+          <p:cNvPr id="23" name="Text 20"/>
+          <p:cNvSpPr/>
+          <p:nvPr/>
+        </p:nvSpPr>
+        <p:spPr>
+          <a:xfrm>
+            <a:off x="896112" y="5693054"/>
+            <a:ext cx="384048" cy="384048"/>
+          </a:xfrm>
+          <a:prstGeom prst="rect">
+            <a:avLst/>
+          </a:prstGeom>
+          <a:noFill/>
+          <a:ln/>
+        </p:spPr>
+        <p:txBody>
+          <a:bodyPr wrap="square" lIns="0" tIns="0" rIns="0" bIns="0" rtlCol="0" anchor="ctr"/>
+          <a:lstStyle/>
+          <a:p>
+            <a:pPr algn="ctr" indent="0" marL="0">
+              <a:buNone/>
+            </a:pPr>
+            <a:r>
+              <a:rPr lang="en-US" sz="1400" b="1" dirty="0">
+                <a:solidFill>
+                  <a:srgbClr val="FFFFFF"/>
+                </a:solidFill>
+                <a:latin typeface="Calibri" pitchFamily="34" charset="0"/>
+                <a:ea typeface="Calibri" pitchFamily="34" charset="-122"/>
+                <a:cs typeface="Calibri" pitchFamily="34" charset="-120"/>
+              </a:rPr>
+              <a:t>5</a:t>
+            </a:r>
+            <a:endParaRPr lang="en-US" sz="1400" dirty="0"/>
+          </a:p>
+        </p:txBody>
+      </p:sp>
+      <p:sp>
+        <p:nvSpPr>
+          <p:cNvPr id="24" name="Text 21"/>
+          <p:cNvSpPr/>
+          <p:nvPr/>
+        </p:nvSpPr>
+        <p:spPr>
+          <a:xfrm>
+            <a:off x="1499616" y="5643677"/>
+            <a:ext cx="9777679" cy="519379"/>
+          </a:xfrm>
+          <a:prstGeom prst="rect">
+            <a:avLst/>
+          </a:prstGeom>
+          <a:noFill/>
+          <a:ln/>
+        </p:spPr>
+        <p:txBody>
+          <a:bodyPr wrap="square" lIns="0" tIns="0" rIns="0" bIns="0" rtlCol="0" anchor="ctr"/>
+          <a:lstStyle/>
+          <a:p>
+            <a:pPr indent="0" marL="0">
+              <a:lnSpc>
+                <a:spcPct val="92000"/>
+              </a:lnSpc>
+              <a:buNone/>
+            </a:pPr>
+            <a:r>
+              <a:rPr lang="en-US" sz="1300" b="1" dirty="0">
+                <a:solidFill>
+                  <a:srgbClr val="1B2733"/>
+                </a:solidFill>
+                <a:latin typeface="Yu Gothic" pitchFamily="34" charset="0"/>
+                <a:ea typeface="Yu Gothic" pitchFamily="34" charset="-122"/>
+                <a:cs typeface="Yu Gothic" pitchFamily="34" charset="-120"/>
+              </a:rPr>
+              <a:t>根拠の示し方：「〔私人／補助者〕として、〔目的〕のため、〔手段〕を取った」</a:t>
+            </a:r>
+            <a:endParaRPr lang="en-US" sz="1300" dirty="0"/>
+          </a:p>
+          <a:p>
+            <a:pPr indent="0" marL="0">
+              <a:lnSpc>
+                <a:spcPct val="92000"/>
+              </a:lnSpc>
+              <a:buNone/>
+            </a:pPr>
+            <a:r>
+              <a:rPr lang="en-US" sz="950" i="1" dirty="0">
+                <a:solidFill>
+                  <a:srgbClr val="5F7183"/>
+                </a:solidFill>
+                <a:latin typeface="Calibri" pitchFamily="34" charset="0"/>
+                <a:ea typeface="Calibri" pitchFamily="34" charset="-122"/>
+                <a:cs typeface="Calibri" pitchFamily="34" charset="-120"/>
+              </a:rPr>
+              <a:t>State it this way: "As a [citizen / delegated agent], I took [action] for [purpose]."</a:t>
+            </a:r>
+            <a:endParaRPr lang="en-US" sz="1300" dirty="0"/>
+          </a:p>
+        </p:txBody>
+      </p:sp>
+      <p:sp>
+        <p:nvSpPr>
+          <p:cNvPr id="25" name="Text 22"/>
+          <p:cNvSpPr/>
+          <p:nvPr/>
+        </p:nvSpPr>
+        <p:spPr>
+          <a:xfrm>
+            <a:off x="640080" y="6382512"/>
+            <a:ext cx="8778240" cy="292608"/>
+          </a:xfrm>
+          <a:prstGeom prst="rect">
+            <a:avLst/>
+          </a:prstGeom>
+          <a:noFill/>
+          <a:ln/>
+        </p:spPr>
+        <p:txBody>
+          <a:bodyPr wrap="square" lIns="0" tIns="0" rIns="0" bIns="0" rtlCol="0" anchor="ctr"/>
+          <a:lstStyle/>
+          <a:p>
+            <a:pPr indent="0" marL="0">
+              <a:buNone/>
+            </a:pPr>
+            <a:r>
+              <a:rPr lang="en-US" sz="900" dirty="0">
+                <a:solidFill>
+                  <a:srgbClr val="5F7183"/>
+                </a:solidFill>
+                <a:latin typeface="Yu Gothic" pitchFamily="34" charset="0"/>
+                <a:ea typeface="Yu Gothic" pitchFamily="34" charset="-122"/>
+                <a:cs typeface="Yu Gothic" pitchFamily="34" charset="-120"/>
+              </a:rPr>
+              <a:t>第1時限｜基本教育1 警備業務実施の基本原則  </a:t>
+            </a:r>
+            <a:pPr indent="0" marL="0">
+              <a:buNone/>
+            </a:pPr>
+            <a:r>
+              <a:rPr lang="en-US" sz="850" i="1" dirty="0">
+                <a:solidFill>
+                  <a:srgbClr val="D6E0E9"/>
+                </a:solidFill>
+                <a:latin typeface="Calibri" pitchFamily="34" charset="0"/>
+                <a:ea typeface="Calibri" pitchFamily="34" charset="-122"/>
+                <a:cs typeface="Calibri" pitchFamily="34" charset="-120"/>
+              </a:rPr>
+              <a:t>Period 1 | Basic Training 1 — Fundamental Principles</a:t>
+            </a:r>
+            <a:endParaRPr lang="en-US" sz="900" dirty="0"/>
+          </a:p>
+        </p:txBody>
+      </p:sp>
+      <p:sp>
+        <p:nvSpPr>
+          <p:cNvPr id="26" name="Text 23"/>
+          <p:cNvSpPr/>
+          <p:nvPr/>
+        </p:nvSpPr>
+        <p:spPr>
+          <a:xfrm>
+            <a:off x="10637215" y="6382512"/>
+            <a:ext cx="914400" cy="292608"/>
+          </a:xfrm>
+          <a:prstGeom prst="rect">
+            <a:avLst/>
+          </a:prstGeom>
+          <a:noFill/>
+          <a:ln/>
+        </p:spPr>
+        <p:txBody>
+          <a:bodyPr wrap="square" lIns="0" tIns="0" rIns="0" bIns="0" rtlCol="0" anchor="ctr"/>
+          <a:lstStyle/>
+          <a:p>
+            <a:pPr algn="r" indent="0" marL="0">
+              <a:buNone/>
+            </a:pPr>
+            <a:r>
+              <a:rPr lang="en-US" sz="1000" dirty="0">
+                <a:solidFill>
+                  <a:srgbClr val="5F7183"/>
+                </a:solidFill>
+                <a:latin typeface="Calibri" pitchFamily="34" charset="0"/>
+                <a:ea typeface="Calibri" pitchFamily="34" charset="-122"/>
+                <a:cs typeface="Calibri" pitchFamily="34" charset="-120"/>
+              </a:rPr>
+              <a:t>10</a:t>
+            </a:r>
+            <a:endParaRPr lang="en-US" sz="1000" dirty="0"/>
+          </a:p>
+        </p:txBody>
+      </p:sp>
+    </p:spTree>
+  </p:cSld>
+  <p:clrMapOvr>
+    <a:masterClrMapping/>
+  </p:clrMapOvr>
+</p:sld>
+</file>
+
+<file path=ppt/slides/slide11.xml><?xml version="1.0" encoding="utf-8"?>
+<p:sld xmlns:a="http://schemas.openxmlformats.org/drawingml/2006/main" xmlns:r="http://schemas.openxmlformats.org/officeDocument/2006/relationships" xmlns:p="http://schemas.openxmlformats.org/presentationml/2006/main">
+  <p:cSld name="Slide 11">
+    <p:bg>
+      <p:bgPr>
+        <a:solidFill>
+          <a:srgbClr val="093259"/>
+        </a:solidFill>
+      </p:bgPr>
+    </p:bg>
+    <p:spTree>
+      <p:nvGrpSpPr>
+        <p:cNvPr id="1" name=""/>
+        <p:cNvGrpSpPr/>
+        <p:nvPr/>
+      </p:nvGrpSpPr>
+      <p:grpSpPr>
+        <a:xfrm>
+          <a:off x="0" y="0"/>
+          <a:ext cx="0" cy="0"/>
+          <a:chOff x="0" y="0"/>
+          <a:chExt cx="0" cy="0"/>
+        </a:xfrm>
+      </p:grpSpPr>
       <p:sp>
         <p:nvSpPr>
           <p:cNvPr id="2" name="Shape 0"/>
@@ -1965,9 +3065,33 @@
           <a:ln/>
         </p:spPr>
       </p:sp>
-      <p:sp>
-        <p:nvSpPr>
-          <p:cNvPr id="3" name="Text 1"/>
+      <p:pic>
+        <p:nvPicPr>
+          <p:cNvPr id="3" name="Image 0" descr="/home/user/Training-/assets/logo.png">    </p:cNvPr>
+          <p:cNvPicPr>
+            <a:picLocks noChangeAspect="1"/>
+          </p:cNvPicPr>
+          <p:nvPr/>
+        </p:nvPicPr>
+        <p:blipFill>
+          <a:blip r:embed="rId1"/>
+          <a:stretch>
+            <a:fillRect/>
+          </a:stretch>
+        </p:blipFill>
+        <p:spPr>
+          <a:xfrm>
+            <a:off x="10765231" y="332912"/>
+            <a:ext cx="786384" cy="742353"/>
+          </a:xfrm>
+          <a:prstGeom prst="rect">
+            <a:avLst/>
+          </a:prstGeom>
+        </p:spPr>
+      </p:pic>
+      <p:sp>
+        <p:nvSpPr>
+          <p:cNvPr id="4" name="Text 1"/>
           <p:cNvSpPr/>
           <p:nvPr/>
         </p:nvSpPr>
@@ -2021,7 +3145,7 @@
                 <a:ea typeface="Calibri" pitchFamily="34" charset="-122"/>
                 <a:cs typeface="Calibri" pitchFamily="34" charset="-120"/>
               </a:rPr>
-              <a:t>Period 1 — Recap</a:t>
+              <a:t>Period 1 — Summary</a:t>
             </a:r>
             <a:endParaRPr lang="en-US" sz="3000" dirty="0"/>
           </a:p>
@@ -2029,55 +3153,55 @@
       </p:sp>
       <p:sp>
         <p:nvSpPr>
-          <p:cNvPr id="4" name="Shape 2"/>
+          <p:cNvPr id="5" name="Shape 2"/>
           <p:cNvSpPr/>
           <p:nvPr/>
         </p:nvSpPr>
         <p:spPr>
           <a:xfrm>
             <a:off x="640080" y="2084832"/>
-            <a:ext cx="10911535" cy="969264"/>
+            <a:ext cx="10911535" cy="676656"/>
           </a:xfrm>
           <a:prstGeom prst="roundRect">
             <a:avLst>
-              <a:gd name="adj" fmla="val 4717"/>
+              <a:gd name="adj" fmla="val 6757"/>
             </a:avLst>
           </a:prstGeom>
           <a:solidFill>
-            <a:srgbClr val="0A2039"/>
+            <a:srgbClr val="06223D"/>
           </a:solidFill>
           <a:ln/>
         </p:spPr>
       </p:sp>
       <p:sp>
         <p:nvSpPr>
-          <p:cNvPr id="5" name="Shape 3"/>
-          <p:cNvSpPr/>
-          <p:nvPr/>
-        </p:nvSpPr>
-        <p:spPr>
-          <a:xfrm>
-            <a:off x="914400" y="2377440"/>
+          <p:cNvPr id="6" name="Shape 3"/>
+          <p:cNvSpPr/>
+          <p:nvPr/>
+        </p:nvSpPr>
+        <p:spPr>
+          <a:xfrm>
+            <a:off x="914400" y="2231136"/>
             <a:ext cx="384048" cy="384048"/>
           </a:xfrm>
           <a:prstGeom prst="ellipse">
             <a:avLst/>
           </a:prstGeom>
           <a:solidFill>
-            <a:srgbClr val="17AF98"/>
+            <a:srgbClr val="12B198"/>
           </a:solidFill>
           <a:ln/>
         </p:spPr>
       </p:sp>
       <p:sp>
         <p:nvSpPr>
-          <p:cNvPr id="6" name="Text 4"/>
-          <p:cNvSpPr/>
-          <p:nvPr/>
-        </p:nvSpPr>
-        <p:spPr>
-          <a:xfrm>
-            <a:off x="914400" y="2377440"/>
+          <p:cNvPr id="7" name="Text 4"/>
+          <p:cNvSpPr/>
+          <p:nvPr/>
+        </p:nvSpPr>
+        <p:spPr>
+          <a:xfrm>
+            <a:off x="914400" y="2231136"/>
             <a:ext cx="384048" cy="384048"/>
           </a:xfrm>
           <a:prstGeom prst="rect">
@@ -2110,14 +3234,14 @@
       </p:sp>
       <p:sp>
         <p:nvSpPr>
-          <p:cNvPr id="7" name="Text 5"/>
+          <p:cNvPr id="8" name="Text 5"/>
           <p:cNvSpPr/>
           <p:nvPr/>
         </p:nvSpPr>
         <p:spPr>
           <a:xfrm>
             <a:off x="1517904" y="2176272"/>
-            <a:ext cx="9722815" cy="786384"/>
+            <a:ext cx="9722815" cy="493776"/>
           </a:xfrm>
           <a:prstGeom prst="rect">
             <a:avLst/>
@@ -2144,7 +3268,7 @@
                 <a:ea typeface="Yu Gothic" pitchFamily="34" charset="-122"/>
                 <a:cs typeface="Yu Gothic" pitchFamily="34" charset="-120"/>
               </a:rPr>
-              <a:t>守る対象は People / Asset / Reputation。情報は Asset の中。</a:t>
+              <a:t>守る対象は People / Asset / Reputation。情報は Asset に含む。</a:t>
             </a:r>
             <a:endParaRPr lang="en-US" sz="1500" dirty="0"/>
           </a:p>
@@ -2164,7 +3288,7 @@
                 <a:ea typeface="Calibri" pitchFamily="34" charset="-122"/>
                 <a:cs typeface="Calibri" pitchFamily="34" charset="-120"/>
               </a:rPr>
-              <a:t>People, Assets, Reputation — with information inside Asset.</a:t>
+              <a:t>People, Assets, Reputation. Information is part of Asset.</a:t>
             </a:r>
             <a:endParaRPr lang="en-US" sz="1500" dirty="0"/>
           </a:p>
@@ -2172,55 +3296,55 @@
       </p:sp>
       <p:sp>
         <p:nvSpPr>
-          <p:cNvPr id="8" name="Shape 6"/>
-          <p:cNvSpPr/>
-          <p:nvPr/>
-        </p:nvSpPr>
-        <p:spPr>
-          <a:xfrm>
-            <a:off x="640080" y="3255264"/>
-            <a:ext cx="10911535" cy="969264"/>
+          <p:cNvPr id="9" name="Shape 6"/>
+          <p:cNvSpPr/>
+          <p:nvPr/>
+        </p:nvSpPr>
+        <p:spPr>
+          <a:xfrm>
+            <a:off x="640080" y="2962656"/>
+            <a:ext cx="10911535" cy="676656"/>
           </a:xfrm>
           <a:prstGeom prst="roundRect">
             <a:avLst>
-              <a:gd name="adj" fmla="val 4717"/>
+              <a:gd name="adj" fmla="val 6757"/>
             </a:avLst>
           </a:prstGeom>
           <a:solidFill>
-            <a:srgbClr val="0A2039"/>
+            <a:srgbClr val="06223D"/>
           </a:solidFill>
           <a:ln/>
         </p:spPr>
       </p:sp>
       <p:sp>
         <p:nvSpPr>
-          <p:cNvPr id="9" name="Shape 7"/>
-          <p:cNvSpPr/>
-          <p:nvPr/>
-        </p:nvSpPr>
-        <p:spPr>
-          <a:xfrm>
-            <a:off x="914400" y="3547872"/>
+          <p:cNvPr id="10" name="Shape 7"/>
+          <p:cNvSpPr/>
+          <p:nvPr/>
+        </p:nvSpPr>
+        <p:spPr>
+          <a:xfrm>
+            <a:off x="914400" y="3108960"/>
             <a:ext cx="384048" cy="384048"/>
           </a:xfrm>
           <a:prstGeom prst="ellipse">
             <a:avLst/>
           </a:prstGeom>
           <a:solidFill>
-            <a:srgbClr val="17AF98"/>
+            <a:srgbClr val="12B198"/>
           </a:solidFill>
           <a:ln/>
         </p:spPr>
       </p:sp>
       <p:sp>
         <p:nvSpPr>
-          <p:cNvPr id="10" name="Text 8"/>
-          <p:cNvSpPr/>
-          <p:nvPr/>
-        </p:nvSpPr>
-        <p:spPr>
-          <a:xfrm>
-            <a:off x="914400" y="3547872"/>
+          <p:cNvPr id="11" name="Text 8"/>
+          <p:cNvSpPr/>
+          <p:nvPr/>
+        </p:nvSpPr>
+        <p:spPr>
+          <a:xfrm>
+            <a:off x="914400" y="3108960"/>
             <a:ext cx="384048" cy="384048"/>
           </a:xfrm>
           <a:prstGeom prst="rect">
@@ -2253,14 +3377,14 @@
       </p:sp>
       <p:sp>
         <p:nvSpPr>
-          <p:cNvPr id="11" name="Text 9"/>
-          <p:cNvSpPr/>
-          <p:nvPr/>
-        </p:nvSpPr>
-        <p:spPr>
-          <a:xfrm>
-            <a:off x="1517904" y="3346704"/>
-            <a:ext cx="9722815" cy="786384"/>
+          <p:cNvPr id="12" name="Text 9"/>
+          <p:cNvSpPr/>
+          <p:nvPr/>
+        </p:nvSpPr>
+        <p:spPr>
+          <a:xfrm>
+            <a:off x="1517904" y="3054096"/>
+            <a:ext cx="9722815" cy="493776"/>
           </a:xfrm>
           <a:prstGeom prst="rect">
             <a:avLst/>
@@ -2307,7 +3431,7 @@
                 <a:ea typeface="Calibri" pitchFamily="34" charset="-122"/>
                 <a:cs typeface="Calibri" pitchFamily="34" charset="-120"/>
               </a:rPr>
-              <a:t>Article 15 — no special authority is conferred. You act as a private citizen.</a:t>
+              <a:t>Article 15 — no special authority. You act as a private citizen.</a:t>
             </a:r>
             <a:endParaRPr lang="en-US" sz="1500" dirty="0"/>
           </a:p>
@@ -2315,55 +3439,55 @@
       </p:sp>
       <p:sp>
         <p:nvSpPr>
-          <p:cNvPr id="12" name="Shape 10"/>
-          <p:cNvSpPr/>
-          <p:nvPr/>
-        </p:nvSpPr>
-        <p:spPr>
-          <a:xfrm>
-            <a:off x="640080" y="4425696"/>
-            <a:ext cx="10911535" cy="969264"/>
+          <p:cNvPr id="13" name="Shape 10"/>
+          <p:cNvSpPr/>
+          <p:nvPr/>
+        </p:nvSpPr>
+        <p:spPr>
+          <a:xfrm>
+            <a:off x="640080" y="3840480"/>
+            <a:ext cx="10911535" cy="676656"/>
           </a:xfrm>
           <a:prstGeom prst="roundRect">
             <a:avLst>
-              <a:gd name="adj" fmla="val 4717"/>
+              <a:gd name="adj" fmla="val 6757"/>
             </a:avLst>
           </a:prstGeom>
           <a:solidFill>
-            <a:srgbClr val="0A2039"/>
+            <a:srgbClr val="06223D"/>
           </a:solidFill>
           <a:ln/>
         </p:spPr>
       </p:sp>
       <p:sp>
         <p:nvSpPr>
-          <p:cNvPr id="13" name="Shape 11"/>
-          <p:cNvSpPr/>
-          <p:nvPr/>
-        </p:nvSpPr>
-        <p:spPr>
-          <a:xfrm>
-            <a:off x="914400" y="4718304"/>
+          <p:cNvPr id="14" name="Shape 11"/>
+          <p:cNvSpPr/>
+          <p:nvPr/>
+        </p:nvSpPr>
+        <p:spPr>
+          <a:xfrm>
+            <a:off x="914400" y="3986784"/>
             <a:ext cx="384048" cy="384048"/>
           </a:xfrm>
           <a:prstGeom prst="ellipse">
             <a:avLst/>
           </a:prstGeom>
           <a:solidFill>
-            <a:srgbClr val="17AF98"/>
+            <a:srgbClr val="12B198"/>
           </a:solidFill>
           <a:ln/>
         </p:spPr>
       </p:sp>
       <p:sp>
         <p:nvSpPr>
-          <p:cNvPr id="14" name="Text 12"/>
-          <p:cNvSpPr/>
-          <p:nvPr/>
-        </p:nvSpPr>
-        <p:spPr>
-          <a:xfrm>
-            <a:off x="914400" y="4718304"/>
+          <p:cNvPr id="15" name="Text 12"/>
+          <p:cNvSpPr/>
+          <p:nvPr/>
+        </p:nvSpPr>
+        <p:spPr>
+          <a:xfrm>
+            <a:off x="914400" y="3986784"/>
             <a:ext cx="384048" cy="384048"/>
           </a:xfrm>
           <a:prstGeom prst="rect">
@@ -2396,14 +3520,14 @@
       </p:sp>
       <p:sp>
         <p:nvSpPr>
-          <p:cNvPr id="15" name="Text 13"/>
-          <p:cNvSpPr/>
-          <p:nvPr/>
-        </p:nvSpPr>
-        <p:spPr>
-          <a:xfrm>
-            <a:off x="1517904" y="4517136"/>
-            <a:ext cx="9722815" cy="786384"/>
+          <p:cNvPr id="16" name="Text 13"/>
+          <p:cNvSpPr/>
+          <p:nvPr/>
+        </p:nvSpPr>
+        <p:spPr>
+          <a:xfrm>
+            <a:off x="1517904" y="3931920"/>
+            <a:ext cx="9722815" cy="493776"/>
           </a:xfrm>
           <a:prstGeom prst="rect">
             <a:avLst/>
@@ -2430,7 +3554,7 @@
                 <a:ea typeface="Yu Gothic" pitchFamily="34" charset="-122"/>
                 <a:cs typeface="Yu Gothic" pitchFamily="34" charset="-120"/>
               </a:rPr>
-              <a:t>できるのは「誰でもできること」と「委ねられたこと」の2つだけ。</a:t>
+              <a:t>警察官にある権限は、警備員にはない。服装も区別が求められる。</a:t>
             </a:r>
             <a:endParaRPr lang="en-US" sz="1500" dirty="0"/>
           </a:p>
@@ -2450,7 +3574,7 @@
                 <a:ea typeface="Calibri" pitchFamily="34" charset="-122"/>
                 <a:cs typeface="Calibri" pitchFamily="34" charset="-120"/>
               </a:rPr>
-              <a:t>Only two sources of authority: what anyone may do, and what was delegated.</a:t>
+              <a:t>Police powers do not extend to guards. Uniforms must also be distinguishable.</a:t>
             </a:r>
             <a:endParaRPr lang="en-US" sz="1500" dirty="0"/>
           </a:p>
@@ -2458,38 +3582,181 @@
       </p:sp>
       <p:sp>
         <p:nvSpPr>
-          <p:cNvPr id="16" name="Text 14"/>
-          <p:cNvSpPr/>
-          <p:nvPr/>
-        </p:nvSpPr>
-        <p:spPr>
-          <a:xfrm>
-            <a:off x="640080" y="5596128"/>
-            <a:ext cx="10911535" cy="603504"/>
-          </a:xfrm>
-          <a:prstGeom prst="rect">
-            <a:avLst/>
-          </a:prstGeom>
-          <a:noFill/>
-          <a:ln/>
-        </p:spPr>
-        <p:txBody>
-          <a:bodyPr wrap="square" lIns="0" tIns="0" rIns="0" bIns="0" rtlCol="0" anchor="t"/>
-          <a:lstStyle/>
-          <a:p>
-            <a:pPr indent="0" marL="0">
-              <a:buNone/>
-            </a:pPr>
-            <a:r>
-              <a:rPr lang="en-US" sz="1200" b="1" dirty="0">
-                <a:solidFill>
-                  <a:srgbClr val="17AF98"/>
+          <p:cNvPr id="17" name="Shape 14"/>
+          <p:cNvSpPr/>
+          <p:nvPr/>
+        </p:nvSpPr>
+        <p:spPr>
+          <a:xfrm>
+            <a:off x="640080" y="4718304"/>
+            <a:ext cx="10911535" cy="676656"/>
+          </a:xfrm>
+          <a:prstGeom prst="roundRect">
+            <a:avLst>
+              <a:gd name="adj" fmla="val 6757"/>
+            </a:avLst>
+          </a:prstGeom>
+          <a:solidFill>
+            <a:srgbClr val="06223D"/>
+          </a:solidFill>
+          <a:ln/>
+        </p:spPr>
+      </p:sp>
+      <p:sp>
+        <p:nvSpPr>
+          <p:cNvPr id="18" name="Shape 15"/>
+          <p:cNvSpPr/>
+          <p:nvPr/>
+        </p:nvSpPr>
+        <p:spPr>
+          <a:xfrm>
+            <a:off x="914400" y="4864608"/>
+            <a:ext cx="384048" cy="384048"/>
+          </a:xfrm>
+          <a:prstGeom prst="ellipse">
+            <a:avLst/>
+          </a:prstGeom>
+          <a:solidFill>
+            <a:srgbClr val="12B198"/>
+          </a:solidFill>
+          <a:ln/>
+        </p:spPr>
+      </p:sp>
+      <p:sp>
+        <p:nvSpPr>
+          <p:cNvPr id="19" name="Text 16"/>
+          <p:cNvSpPr/>
+          <p:nvPr/>
+        </p:nvSpPr>
+        <p:spPr>
+          <a:xfrm>
+            <a:off x="914400" y="4864608"/>
+            <a:ext cx="384048" cy="384048"/>
+          </a:xfrm>
+          <a:prstGeom prst="rect">
+            <a:avLst/>
+          </a:prstGeom>
+          <a:noFill/>
+          <a:ln/>
+        </p:spPr>
+        <p:txBody>
+          <a:bodyPr wrap="square" lIns="0" tIns="0" rIns="0" bIns="0" rtlCol="0" anchor="ctr"/>
+          <a:lstStyle/>
+          <a:p>
+            <a:pPr algn="ctr" indent="0" marL="0">
+              <a:buNone/>
+            </a:pPr>
+            <a:r>
+              <a:rPr lang="en-US" sz="1400" b="1" dirty="0">
+                <a:solidFill>
+                  <a:srgbClr val="FFFFFF"/>
+                </a:solidFill>
+                <a:latin typeface="Calibri" pitchFamily="34" charset="0"/>
+                <a:ea typeface="Calibri" pitchFamily="34" charset="-122"/>
+                <a:cs typeface="Calibri" pitchFamily="34" charset="-120"/>
+              </a:rPr>
+              <a:t>4</a:t>
+            </a:r>
+            <a:endParaRPr lang="en-US" sz="1400" dirty="0"/>
+          </a:p>
+        </p:txBody>
+      </p:sp>
+      <p:sp>
+        <p:nvSpPr>
+          <p:cNvPr id="20" name="Text 17"/>
+          <p:cNvSpPr/>
+          <p:nvPr/>
+        </p:nvSpPr>
+        <p:spPr>
+          <a:xfrm>
+            <a:off x="1517904" y="4809744"/>
+            <a:ext cx="9722815" cy="493776"/>
+          </a:xfrm>
+          <a:prstGeom prst="rect">
+            <a:avLst/>
+          </a:prstGeom>
+          <a:noFill/>
+          <a:ln/>
+        </p:spPr>
+        <p:txBody>
+          <a:bodyPr wrap="square" lIns="0" tIns="0" rIns="0" bIns="0" rtlCol="0" anchor="ctr"/>
+          <a:lstStyle/>
+          <a:p>
+            <a:pPr indent="0" marL="0">
+              <a:lnSpc>
+                <a:spcPct val="92000"/>
+              </a:lnSpc>
+              <a:buNone/>
+            </a:pPr>
+            <a:r>
+              <a:rPr lang="en-US" sz="1500" b="1" dirty="0">
+                <a:solidFill>
+                  <a:srgbClr val="FFFFFF"/>
                 </a:solidFill>
                 <a:latin typeface="Yu Gothic" pitchFamily="34" charset="0"/>
                 <a:ea typeface="Yu Gothic" pitchFamily="34" charset="-122"/>
                 <a:cs typeface="Yu Gothic" pitchFamily="34" charset="-120"/>
               </a:rPr>
-              <a:t>次は第2時限 ― 権限の限界を、条文と罪名で具体的に押さえます。</a:t>
+              <a:t>権限の根拠は「誰でもできること」と「委ねられたこと」の2つ。</a:t>
+            </a:r>
+            <a:endParaRPr lang="en-US" sz="1500" dirty="0"/>
+          </a:p>
+          <a:p>
+            <a:pPr indent="0" marL="0">
+              <a:lnSpc>
+                <a:spcPct val="92000"/>
+              </a:lnSpc>
+              <a:buNone/>
+            </a:pPr>
+            <a:r>
+              <a:rPr lang="en-US" sz="1050" i="1" dirty="0">
+                <a:solidFill>
+                  <a:srgbClr val="9FB6CB"/>
+                </a:solidFill>
+                <a:latin typeface="Calibri" pitchFamily="34" charset="0"/>
+                <a:ea typeface="Calibri" pitchFamily="34" charset="-122"/>
+                <a:cs typeface="Calibri" pitchFamily="34" charset="-120"/>
+              </a:rPr>
+              <a:t>Two sources only: what anyone may do, and what was delegated.</a:t>
+            </a:r>
+            <a:endParaRPr lang="en-US" sz="1500" dirty="0"/>
+          </a:p>
+        </p:txBody>
+      </p:sp>
+      <p:sp>
+        <p:nvSpPr>
+          <p:cNvPr id="21" name="Text 18"/>
+          <p:cNvSpPr/>
+          <p:nvPr/>
+        </p:nvSpPr>
+        <p:spPr>
+          <a:xfrm>
+            <a:off x="640080" y="5596128"/>
+            <a:ext cx="10911535" cy="603504"/>
+          </a:xfrm>
+          <a:prstGeom prst="rect">
+            <a:avLst/>
+          </a:prstGeom>
+          <a:noFill/>
+          <a:ln/>
+        </p:spPr>
+        <p:txBody>
+          <a:bodyPr wrap="square" lIns="0" tIns="0" rIns="0" bIns="0" rtlCol="0" anchor="t"/>
+          <a:lstStyle/>
+          <a:p>
+            <a:pPr indent="0" marL="0">
+              <a:buNone/>
+            </a:pPr>
+            <a:r>
+              <a:rPr lang="en-US" sz="1200" b="1" dirty="0">
+                <a:solidFill>
+                  <a:srgbClr val="12B198"/>
+                </a:solidFill>
+                <a:latin typeface="Yu Gothic" pitchFamily="34" charset="0"/>
+                <a:ea typeface="Yu Gothic" pitchFamily="34" charset="-122"/>
+                <a:cs typeface="Yu Gothic" pitchFamily="34" charset="-120"/>
+              </a:rPr>
+              <a:t>第2時限 ― その限界を、条文と罪名で確認します。</a:t>
             </a:r>
             <a:endParaRPr lang="en-US" sz="1200" dirty="0"/>
           </a:p>
@@ -2506,7 +3773,7 @@
                 <a:ea typeface="Calibri" pitchFamily="34" charset="-122"/>
                 <a:cs typeface="Calibri" pitchFamily="34" charset="-120"/>
               </a:rPr>
-              <a:t>Next, Period 2 — the limits of that authority, in statutes and offence names.</a:t>
+              <a:t>Period 2 — those limits, in statutes and offence names.</a:t>
             </a:r>
             <a:endParaRPr lang="en-US" sz="1200" dirty="0"/>
           </a:p>
@@ -2544,9 +3811,33 @@
           <a:chExt cx="0" cy="0"/>
         </a:xfrm>
       </p:grpSpPr>
-      <p:sp>
-        <p:nvSpPr>
-          <p:cNvPr id="2" name="Text 0"/>
+      <p:pic>
+        <p:nvPicPr>
+          <p:cNvPr id="2" name="Image 0" descr="/home/user/Training-/assets/logo.png">    </p:cNvPr>
+          <p:cNvPicPr>
+            <a:picLocks noChangeAspect="1"/>
+          </p:cNvPicPr>
+          <p:nvPr/>
+        </p:nvPicPr>
+        <p:blipFill>
+          <a:blip r:embed="rId1"/>
+          <a:stretch>
+            <a:fillRect/>
+          </a:stretch>
+        </p:blipFill>
+        <p:spPr>
+          <a:xfrm>
+            <a:off x="10765231" y="332912"/>
+            <a:ext cx="786384" cy="742353"/>
+          </a:xfrm>
+          <a:prstGeom prst="rect">
+            <a:avLst/>
+          </a:prstGeom>
+        </p:spPr>
+      </p:pic>
+      <p:sp>
+        <p:nvSpPr>
+          <p:cNvPr id="3" name="Text 0"/>
           <p:cNvSpPr/>
           <p:nvPr/>
         </p:nvSpPr>
@@ -2574,13 +3865,13 @@
             <a:r>
               <a:rPr lang="en-US" sz="2700" b="1" dirty="0">
                 <a:solidFill>
-                  <a:srgbClr val="0F2D52"/>
+                  <a:srgbClr val="093259"/>
                 </a:solidFill>
                 <a:latin typeface="Yu Gothic" pitchFamily="34" charset="0"/>
                 <a:ea typeface="Yu Gothic" pitchFamily="34" charset="-122"/>
                 <a:cs typeface="Yu Gothic" pitchFamily="34" charset="-120"/>
               </a:rPr>
-              <a:t>本日の縦串 ― 3つの問い</a:t>
+              <a:t>本日の3つの問い</a:t>
             </a:r>
             <a:endParaRPr lang="en-US" sz="2700" dirty="0"/>
           </a:p>
@@ -2594,13 +3885,13 @@
             <a:r>
               <a:rPr lang="en-US" sz="1250" i="1" dirty="0">
                 <a:solidFill>
-                  <a:srgbClr val="17AF98"/>
-                </a:solidFill>
-                <a:latin typeface="Calibri" pitchFamily="34" charset="0"/>
-                <a:ea typeface="Calibri" pitchFamily="34" charset="-122"/>
-                <a:cs typeface="Calibri" pitchFamily="34" charset="-120"/>
-              </a:rPr>
-              <a:t>The Three Questions — our thread through every session today</a:t>
+                  <a:srgbClr val="12B198"/>
+                </a:solidFill>
+                <a:latin typeface="Calibri" pitchFamily="34" charset="0"/>
+                <a:ea typeface="Calibri" pitchFamily="34" charset="-122"/>
+                <a:cs typeface="Calibri" pitchFamily="34" charset="-120"/>
+              </a:rPr>
+              <a:t>Three Questions for Today</a:t>
             </a:r>
             <a:endParaRPr lang="en-US" sz="2700" dirty="0"/>
           </a:p>
@@ -2608,7 +3899,7 @@
       </p:sp>
       <p:sp>
         <p:nvSpPr>
-          <p:cNvPr id="3" name="Text 1"/>
+          <p:cNvPr id="4" name="Text 1"/>
           <p:cNvSpPr/>
           <p:nvPr/>
         </p:nvSpPr>
@@ -2636,13 +3927,13 @@
             <a:r>
               <a:rPr lang="en-US" sz="1300" dirty="0">
                 <a:solidFill>
-                  <a:srgbClr val="0F2D52"/>
+                  <a:srgbClr val="093259"/>
                 </a:solidFill>
                 <a:latin typeface="Yu Gothic" pitchFamily="34" charset="0"/>
                 <a:ea typeface="Yu Gothic" pitchFamily="34" charset="-122"/>
                 <a:cs typeface="Yu Gothic" pitchFamily="34" charset="-120"/>
               </a:rPr>
-              <a:t>この3問は、本日私が担当する全コマで繰り返します。答えではなく、根拠を言えるようになることが目標です。</a:t>
+              <a:t>この3問は、本日私が担当する全コマで使います。判断の根拠を、この3つで説明してください。</a:t>
             </a:r>
             <a:endParaRPr lang="en-US" sz="1300" dirty="0"/>
           </a:p>
@@ -2662,7 +3953,7 @@
                 <a:ea typeface="Calibri" pitchFamily="34" charset="-122"/>
                 <a:cs typeface="Calibri" pitchFamily="34" charset="-120"/>
               </a:rPr>
-              <a:t>We will return to these in every session I lead today. The goal is not the answer — it is being able to state your reasoning.</a:t>
+              <a:t>We use these three questions in every session I lead today. Explain your decisions with them.</a:t>
             </a:r>
             <a:endParaRPr lang="en-US" sz="1300" dirty="0"/>
           </a:p>
@@ -2670,7 +3961,7 @@
       </p:sp>
       <p:sp>
         <p:nvSpPr>
-          <p:cNvPr id="4" name="Shape 2"/>
+          <p:cNvPr id="5" name="Shape 2"/>
           <p:cNvSpPr/>
           <p:nvPr/>
         </p:nvSpPr>
@@ -2692,7 +3983,7 @@
       </p:sp>
       <p:sp>
         <p:nvSpPr>
-          <p:cNvPr id="5" name="Shape 3"/>
+          <p:cNvPr id="6" name="Shape 3"/>
           <p:cNvSpPr/>
           <p:nvPr/>
         </p:nvSpPr>
@@ -2705,14 +3996,14 @@
             <a:avLst/>
           </a:prstGeom>
           <a:solidFill>
-            <a:srgbClr val="17AF98"/>
+            <a:srgbClr val="12B198"/>
           </a:solidFill>
           <a:ln/>
         </p:spPr>
       </p:sp>
       <p:sp>
         <p:nvSpPr>
-          <p:cNvPr id="6" name="Text 4"/>
+          <p:cNvPr id="7" name="Text 4"/>
           <p:cNvSpPr/>
           <p:nvPr/>
         </p:nvSpPr>
@@ -2751,7 +4042,7 @@
       </p:sp>
       <p:sp>
         <p:nvSpPr>
-          <p:cNvPr id="7" name="Text 5"/>
+          <p:cNvPr id="8" name="Text 5"/>
           <p:cNvSpPr/>
           <p:nvPr/>
         </p:nvSpPr>
@@ -2785,7 +4076,7 @@
                 <a:ea typeface="Yu Gothic" pitchFamily="34" charset="-122"/>
                 <a:cs typeface="Yu Gothic" pitchFamily="34" charset="-120"/>
               </a:rPr>
-              <a:t>何を守っているのか？ ― People / Asset / Reputation のどれか。</a:t>
+              <a:t>何を守っているのか。― People / Asset / Reputation のどれか。</a:t>
             </a:r>
             <a:endParaRPr lang="en-US" sz="1450" dirty="0"/>
           </a:p>
@@ -2805,7 +4096,7 @@
                 <a:ea typeface="Calibri" pitchFamily="34" charset="-122"/>
                 <a:cs typeface="Calibri" pitchFamily="34" charset="-120"/>
               </a:rPr>
-              <a:t>What am I protecting? — People, Assets, or Reputation.</a:t>
+              <a:t>What am I protecting? People, Assets, or Reputation.</a:t>
             </a:r>
             <a:endParaRPr lang="en-US" sz="1450" dirty="0"/>
           </a:p>
@@ -2813,7 +4104,7 @@
       </p:sp>
       <p:sp>
         <p:nvSpPr>
-          <p:cNvPr id="8" name="Shape 6"/>
+          <p:cNvPr id="9" name="Shape 6"/>
           <p:cNvSpPr/>
           <p:nvPr/>
         </p:nvSpPr>
@@ -2835,7 +4126,7 @@
       </p:sp>
       <p:sp>
         <p:nvSpPr>
-          <p:cNvPr id="9" name="Shape 7"/>
+          <p:cNvPr id="10" name="Shape 7"/>
           <p:cNvSpPr/>
           <p:nvPr/>
         </p:nvSpPr>
@@ -2848,14 +4139,14 @@
             <a:avLst/>
           </a:prstGeom>
           <a:solidFill>
-            <a:srgbClr val="17AF98"/>
+            <a:srgbClr val="12B198"/>
           </a:solidFill>
           <a:ln/>
         </p:spPr>
       </p:sp>
       <p:sp>
         <p:nvSpPr>
-          <p:cNvPr id="10" name="Text 8"/>
+          <p:cNvPr id="11" name="Text 8"/>
           <p:cNvSpPr/>
           <p:nvPr/>
         </p:nvSpPr>
@@ -2894,7 +4185,7 @@
       </p:sp>
       <p:sp>
         <p:nvSpPr>
-          <p:cNvPr id="11" name="Text 9"/>
+          <p:cNvPr id="12" name="Text 9"/>
           <p:cNvSpPr/>
           <p:nvPr/>
         </p:nvSpPr>
@@ -2928,7 +4219,7 @@
                 <a:ea typeface="Yu Gothic" pitchFamily="34" charset="-122"/>
                 <a:cs typeface="Yu Gothic" pitchFamily="34" charset="-120"/>
               </a:rPr>
-              <a:t>私はいまどの立場で動くのか？ ―「私人」か、「管理権者の補助者」か。</a:t>
+              <a:t>どの立場で動くのか。―「私人」か、「管理権者の補助者」か。</a:t>
             </a:r>
             <a:endParaRPr lang="en-US" sz="1450" dirty="0"/>
           </a:p>
@@ -2948,7 +4239,7 @@
                 <a:ea typeface="Calibri" pitchFamily="34" charset="-122"/>
                 <a:cs typeface="Calibri" pitchFamily="34" charset="-120"/>
               </a:rPr>
-              <a:t>In what capacity am I acting? — As a private citizen, or as an agent of the site's authority.</a:t>
+              <a:t>In what capacity am I acting? As a private citizen, or for the site authority.</a:t>
             </a:r>
             <a:endParaRPr lang="en-US" sz="1450" dirty="0"/>
           </a:p>
@@ -2956,7 +4247,7 @@
       </p:sp>
       <p:sp>
         <p:nvSpPr>
-          <p:cNvPr id="12" name="Shape 10"/>
+          <p:cNvPr id="13" name="Shape 10"/>
           <p:cNvSpPr/>
           <p:nvPr/>
         </p:nvSpPr>
@@ -2978,7 +4269,7 @@
       </p:sp>
       <p:sp>
         <p:nvSpPr>
-          <p:cNvPr id="13" name="Shape 11"/>
+          <p:cNvPr id="14" name="Shape 11"/>
           <p:cNvSpPr/>
           <p:nvPr/>
         </p:nvSpPr>
@@ -2991,14 +4282,14 @@
             <a:avLst/>
           </a:prstGeom>
           <a:solidFill>
-            <a:srgbClr val="17AF98"/>
+            <a:srgbClr val="12B198"/>
           </a:solidFill>
           <a:ln/>
         </p:spPr>
       </p:sp>
       <p:sp>
         <p:nvSpPr>
-          <p:cNvPr id="14" name="Text 12"/>
+          <p:cNvPr id="15" name="Text 12"/>
           <p:cNvSpPr/>
           <p:nvPr/>
         </p:nvSpPr>
@@ -3037,7 +4328,7 @@
       </p:sp>
       <p:sp>
         <p:nvSpPr>
-          <p:cNvPr id="15" name="Text 13"/>
+          <p:cNvPr id="16" name="Text 13"/>
           <p:cNvSpPr/>
           <p:nvPr/>
         </p:nvSpPr>
@@ -3071,7 +4362,7 @@
                 <a:ea typeface="Yu Gothic" pitchFamily="34" charset="-122"/>
                 <a:cs typeface="Yu Gothic" pitchFamily="34" charset="-120"/>
               </a:rPr>
-              <a:t>その手段は目的に対して最小限か？ ― 越えたら、それは何になるか。</a:t>
+              <a:t>その手段は最小限か。― 越えた場合、何の罪に当たるか。</a:t>
             </a:r>
             <a:endParaRPr lang="en-US" sz="1450" dirty="0"/>
           </a:p>
@@ -3091,7 +4382,7 @@
                 <a:ea typeface="Calibri" pitchFamily="34" charset="-122"/>
                 <a:cs typeface="Calibri" pitchFamily="34" charset="-120"/>
               </a:rPr>
-              <a:t>Is this the minimum necessary? — And if I go beyond it, what does it become?</a:t>
+              <a:t>Is this the minimum action? If I go beyond it, what offence does it become?</a:t>
             </a:r>
             <a:endParaRPr lang="en-US" sz="1450" dirty="0"/>
           </a:p>
@@ -3099,7 +4390,7 @@
       </p:sp>
       <p:sp>
         <p:nvSpPr>
-          <p:cNvPr id="16" name="Text 14"/>
+          <p:cNvPr id="17" name="Text 14"/>
           <p:cNvSpPr/>
           <p:nvPr/>
         </p:nvSpPr>
@@ -3152,7 +4443,7 @@
       </p:sp>
       <p:sp>
         <p:nvSpPr>
-          <p:cNvPr id="17" name="Text 15"/>
+          <p:cNvPr id="18" name="Text 15"/>
           <p:cNvSpPr/>
           <p:nvPr/>
         </p:nvSpPr>
@@ -3221,9 +4512,33 @@
           <a:chExt cx="0" cy="0"/>
         </a:xfrm>
       </p:grpSpPr>
-      <p:sp>
-        <p:nvSpPr>
-          <p:cNvPr id="2" name="Text 0"/>
+      <p:pic>
+        <p:nvPicPr>
+          <p:cNvPr id="2" name="Image 0" descr="/home/user/Training-/assets/logo.png">    </p:cNvPr>
+          <p:cNvPicPr>
+            <a:picLocks noChangeAspect="1"/>
+          </p:cNvPicPr>
+          <p:nvPr/>
+        </p:nvPicPr>
+        <p:blipFill>
+          <a:blip r:embed="rId1"/>
+          <a:stretch>
+            <a:fillRect/>
+          </a:stretch>
+        </p:blipFill>
+        <p:spPr>
+          <a:xfrm>
+            <a:off x="10765231" y="332912"/>
+            <a:ext cx="786384" cy="742353"/>
+          </a:xfrm>
+          <a:prstGeom prst="rect">
+            <a:avLst/>
+          </a:prstGeom>
+        </p:spPr>
+      </p:pic>
+      <p:sp>
+        <p:nvSpPr>
+          <p:cNvPr id="3" name="Text 0"/>
           <p:cNvSpPr/>
           <p:nvPr/>
         </p:nvSpPr>
@@ -3251,7 +4566,7 @@
             <a:r>
               <a:rPr lang="en-US" sz="2700" b="1" dirty="0">
                 <a:solidFill>
-                  <a:srgbClr val="0F2D52"/>
+                  <a:srgbClr val="093259"/>
                 </a:solidFill>
                 <a:latin typeface="Yu Gothic" pitchFamily="34" charset="0"/>
                 <a:ea typeface="Yu Gothic" pitchFamily="34" charset="-122"/>
@@ -3271,7 +4586,7 @@
             <a:r>
               <a:rPr lang="en-US" sz="1250" i="1" dirty="0">
                 <a:solidFill>
-                  <a:srgbClr val="17AF98"/>
+                  <a:srgbClr val="12B198"/>
                 </a:solidFill>
                 <a:latin typeface="Calibri" pitchFamily="34" charset="0"/>
                 <a:ea typeface="Calibri" pitchFamily="34" charset="-122"/>
@@ -3285,7 +4600,7 @@
       </p:sp>
       <p:sp>
         <p:nvSpPr>
-          <p:cNvPr id="3" name="Text 1"/>
+          <p:cNvPr id="4" name="Text 1"/>
           <p:cNvSpPr/>
           <p:nvPr/>
         </p:nvSpPr>
@@ -3313,13 +4628,13 @@
             <a:r>
               <a:rPr lang="en-US" sz="1300" dirty="0">
                 <a:solidFill>
-                  <a:srgbClr val="0F2D52"/>
+                  <a:srgbClr val="093259"/>
                 </a:solidFill>
                 <a:latin typeface="Yu Gothic" pitchFamily="34" charset="0"/>
                 <a:ea typeface="Yu Gothic" pitchFamily="34" charset="-122"/>
                 <a:cs typeface="Yu Gothic" pitchFamily="34" charset="-120"/>
               </a:rPr>
-              <a:t>守る対象は3つ。情報は「Asset」の中に含みます。</a:t>
+              <a:t>守る対象は3つ。情報は Asset に含みます。</a:t>
             </a:r>
             <a:endParaRPr lang="en-US" sz="1300" dirty="0"/>
           </a:p>
@@ -3339,7 +4654,7 @@
                 <a:ea typeface="Calibri" pitchFamily="34" charset="-122"/>
                 <a:cs typeface="Calibri" pitchFamily="34" charset="-120"/>
               </a:rPr>
-              <a:t>Three categories. Information sits inside Asset.</a:t>
+              <a:t>Three categories. Information is part of Asset.</a:t>
             </a:r>
             <a:endParaRPr lang="en-US" sz="1300" dirty="0"/>
           </a:p>
@@ -3347,7 +4662,7 @@
       </p:sp>
       <p:sp>
         <p:nvSpPr>
-          <p:cNvPr id="4" name="Shape 2"/>
+          <p:cNvPr id="5" name="Shape 2"/>
           <p:cNvSpPr/>
           <p:nvPr/>
         </p:nvSpPr>
@@ -3369,7 +4684,7 @@
       </p:sp>
       <p:sp>
         <p:nvSpPr>
-          <p:cNvPr id="5" name="Shape 3"/>
+          <p:cNvPr id="6" name="Shape 3"/>
           <p:cNvSpPr/>
           <p:nvPr/>
         </p:nvSpPr>
@@ -3382,14 +4697,14 @@
             <a:avLst/>
           </a:prstGeom>
           <a:solidFill>
-            <a:srgbClr val="0F2D52"/>
+            <a:srgbClr val="093259"/>
           </a:solidFill>
           <a:ln/>
         </p:spPr>
       </p:sp>
       <p:sp>
         <p:nvSpPr>
-          <p:cNvPr id="6" name="Text 4"/>
+          <p:cNvPr id="7" name="Text 4"/>
           <p:cNvSpPr/>
           <p:nvPr/>
         </p:nvSpPr>
@@ -3428,7 +4743,7 @@
       </p:sp>
       <p:sp>
         <p:nvSpPr>
-          <p:cNvPr id="7" name="Text 5"/>
+          <p:cNvPr id="8" name="Text 5"/>
           <p:cNvSpPr/>
           <p:nvPr/>
         </p:nvSpPr>
@@ -3456,7 +4771,7 @@
             <a:r>
               <a:rPr lang="en-US" sz="1600" b="1" dirty="0">
                 <a:solidFill>
-                  <a:srgbClr val="0F2D52"/>
+                  <a:srgbClr val="093259"/>
                 </a:solidFill>
                 <a:latin typeface="Yu Gothic" pitchFamily="34" charset="0"/>
                 <a:ea typeface="Yu Gothic" pitchFamily="34" charset="-122"/>
@@ -3476,7 +4791,7 @@
             <a:r>
               <a:rPr lang="en-US" sz="1000" i="1" dirty="0">
                 <a:solidFill>
-                  <a:srgbClr val="17AF98"/>
+                  <a:srgbClr val="12B198"/>
                 </a:solidFill>
                 <a:latin typeface="Calibri" pitchFamily="34" charset="0"/>
                 <a:ea typeface="Calibri" pitchFamily="34" charset="-122"/>
@@ -3490,7 +4805,7 @@
       </p:sp>
       <p:sp>
         <p:nvSpPr>
-          <p:cNvPr id="8" name="Text 6"/>
+          <p:cNvPr id="9" name="Text 6"/>
           <p:cNvSpPr/>
           <p:nvPr/>
         </p:nvSpPr>
@@ -3524,7 +4839,7 @@
                 <a:ea typeface="Yu Gothic" pitchFamily="34" charset="-122"/>
                 <a:cs typeface="Yu Gothic" pitchFamily="34" charset="-120"/>
               </a:rPr>
-              <a:t>従業員・来訪者・役員、そして警備員自身。負傷や事件の当事者になりうる全員。</a:t>
+              <a:t>従業員、来訪者、役員、警備員自身。負傷や事件の当事者になりうる者。</a:t>
             </a:r>
             <a:endParaRPr lang="en-US" sz="1250" dirty="0"/>
           </a:p>
@@ -3544,7 +4859,7 @@
                 <a:ea typeface="Calibri" pitchFamily="34" charset="-122"/>
                 <a:cs typeface="Calibri" pitchFamily="34" charset="-120"/>
               </a:rPr>
-              <a:t>Employees, visitors, executives — and you. Everyone who can become a casualty or a party to an incident.</a:t>
+              <a:t>Employees, visitors, executives, and guards. Anyone who can be injured or involved.</a:t>
             </a:r>
             <a:endParaRPr lang="en-US" sz="1250" dirty="0"/>
           </a:p>
@@ -3552,7 +4867,7 @@
       </p:sp>
       <p:sp>
         <p:nvSpPr>
-          <p:cNvPr id="9" name="Shape 7"/>
+          <p:cNvPr id="10" name="Shape 7"/>
           <p:cNvSpPr/>
           <p:nvPr/>
         </p:nvSpPr>
@@ -3574,7 +4889,7 @@
       </p:sp>
       <p:sp>
         <p:nvSpPr>
-          <p:cNvPr id="10" name="Shape 8"/>
+          <p:cNvPr id="11" name="Shape 8"/>
           <p:cNvSpPr/>
           <p:nvPr/>
         </p:nvSpPr>
@@ -3587,14 +4902,14 @@
             <a:avLst/>
           </a:prstGeom>
           <a:solidFill>
-            <a:srgbClr val="17AF98"/>
+            <a:srgbClr val="12B198"/>
           </a:solidFill>
           <a:ln/>
         </p:spPr>
       </p:sp>
       <p:sp>
         <p:nvSpPr>
-          <p:cNvPr id="11" name="Text 9"/>
+          <p:cNvPr id="12" name="Text 9"/>
           <p:cNvSpPr/>
           <p:nvPr/>
         </p:nvSpPr>
@@ -3633,7 +4948,7 @@
       </p:sp>
       <p:sp>
         <p:nvSpPr>
-          <p:cNvPr id="12" name="Text 10"/>
+          <p:cNvPr id="13" name="Text 10"/>
           <p:cNvSpPr/>
           <p:nvPr/>
         </p:nvSpPr>
@@ -3661,7 +4976,7 @@
             <a:r>
               <a:rPr lang="en-US" sz="1600" b="1" dirty="0">
                 <a:solidFill>
-                  <a:srgbClr val="0F2D52"/>
+                  <a:srgbClr val="093259"/>
                 </a:solidFill>
                 <a:latin typeface="Yu Gothic" pitchFamily="34" charset="0"/>
                 <a:ea typeface="Yu Gothic" pitchFamily="34" charset="-122"/>
@@ -3681,13 +4996,13 @@
             <a:r>
               <a:rPr lang="en-US" sz="1000" i="1" dirty="0">
                 <a:solidFill>
-                  <a:srgbClr val="17AF98"/>
-                </a:solidFill>
-                <a:latin typeface="Calibri" pitchFamily="34" charset="0"/>
-                <a:ea typeface="Calibri" pitchFamily="34" charset="-122"/>
-                <a:cs typeface="Calibri" pitchFamily="34" charset="-120"/>
-              </a:rPr>
-              <a:t>資産（物的＋情報）</a:t>
+                  <a:srgbClr val="12B198"/>
+                </a:solidFill>
+                <a:latin typeface="Calibri" pitchFamily="34" charset="0"/>
+                <a:ea typeface="Calibri" pitchFamily="34" charset="-122"/>
+                <a:cs typeface="Calibri" pitchFamily="34" charset="-120"/>
+              </a:rPr>
+              <a:t>資産（物的・情報）</a:t>
             </a:r>
             <a:endParaRPr lang="en-US" sz="1600" dirty="0"/>
           </a:p>
@@ -3695,7 +5010,7 @@
       </p:sp>
       <p:sp>
         <p:nvSpPr>
-          <p:cNvPr id="13" name="Text 11"/>
+          <p:cNvPr id="14" name="Text 11"/>
           <p:cNvSpPr/>
           <p:nvPr/>
         </p:nvSpPr>
@@ -3729,7 +5044,7 @@
                 <a:ea typeface="Yu Gothic" pitchFamily="34" charset="-122"/>
                 <a:cs typeface="Yu Gothic" pitchFamily="34" charset="-120"/>
               </a:rPr>
-              <a:t>建物・設備・現金といった物的資産と、書類・データ・ログといった情報資産の両方。</a:t>
+              <a:t>建物、設備、現金などの物的資産。書類、データ、ログなどの情報資産。</a:t>
             </a:r>
             <a:endParaRPr lang="en-US" sz="1250" dirty="0"/>
           </a:p>
@@ -3749,7 +5064,7 @@
                 <a:ea typeface="Calibri" pitchFamily="34" charset="-122"/>
                 <a:cs typeface="Calibri" pitchFamily="34" charset="-120"/>
               </a:rPr>
-              <a:t>Physical assets such as buildings, equipment and cash — and information assets such as documents, data and logs.</a:t>
+              <a:t>Physical assets such as buildings, equipment and cash. Information assets such as documents, data and logs.</a:t>
             </a:r>
             <a:endParaRPr lang="en-US" sz="1250" dirty="0"/>
           </a:p>
@@ -3757,7 +5072,7 @@
       </p:sp>
       <p:sp>
         <p:nvSpPr>
-          <p:cNvPr id="14" name="Shape 12"/>
+          <p:cNvPr id="15" name="Shape 12"/>
           <p:cNvSpPr/>
           <p:nvPr/>
         </p:nvSpPr>
@@ -3779,7 +5094,7 @@
       </p:sp>
       <p:sp>
         <p:nvSpPr>
-          <p:cNvPr id="15" name="Shape 13"/>
+          <p:cNvPr id="16" name="Shape 13"/>
           <p:cNvSpPr/>
           <p:nvPr/>
         </p:nvSpPr>
@@ -3792,14 +5107,14 @@
             <a:avLst/>
           </a:prstGeom>
           <a:solidFill>
-            <a:srgbClr val="0F2D52"/>
+            <a:srgbClr val="093259"/>
           </a:solidFill>
           <a:ln/>
         </p:spPr>
       </p:sp>
       <p:sp>
         <p:nvSpPr>
-          <p:cNvPr id="16" name="Text 14"/>
+          <p:cNvPr id="17" name="Text 14"/>
           <p:cNvSpPr/>
           <p:nvPr/>
         </p:nvSpPr>
@@ -3838,7 +5153,7 @@
       </p:sp>
       <p:sp>
         <p:nvSpPr>
-          <p:cNvPr id="17" name="Text 15"/>
+          <p:cNvPr id="18" name="Text 15"/>
           <p:cNvSpPr/>
           <p:nvPr/>
         </p:nvSpPr>
@@ -3866,7 +5181,7 @@
             <a:r>
               <a:rPr lang="en-US" sz="1600" b="1" dirty="0">
                 <a:solidFill>
-                  <a:srgbClr val="0F2D52"/>
+                  <a:srgbClr val="093259"/>
                 </a:solidFill>
                 <a:latin typeface="Yu Gothic" pitchFamily="34" charset="0"/>
                 <a:ea typeface="Yu Gothic" pitchFamily="34" charset="-122"/>
@@ -3886,7 +5201,7 @@
             <a:r>
               <a:rPr lang="en-US" sz="1000" i="1" dirty="0">
                 <a:solidFill>
-                  <a:srgbClr val="17AF98"/>
+                  <a:srgbClr val="12B198"/>
                 </a:solidFill>
                 <a:latin typeface="Calibri" pitchFamily="34" charset="0"/>
                 <a:ea typeface="Calibri" pitchFamily="34" charset="-122"/>
@@ -3900,7 +5215,7 @@
       </p:sp>
       <p:sp>
         <p:nvSpPr>
-          <p:cNvPr id="18" name="Text 16"/>
+          <p:cNvPr id="19" name="Text 16"/>
           <p:cNvSpPr/>
           <p:nvPr/>
         </p:nvSpPr>
@@ -3934,7 +5249,7 @@
                 <a:ea typeface="Yu Gothic" pitchFamily="34" charset="-122"/>
                 <a:cs typeface="Yu Gothic" pitchFamily="34" charset="-120"/>
               </a:rPr>
-              <a:t>企業の信頼・ブランド・対外的な評価。失うと最も戻りにくい。</a:t>
+              <a:t>企業の信頼、ブランド、対外的な評価。</a:t>
             </a:r>
             <a:endParaRPr lang="en-US" sz="1250" dirty="0"/>
           </a:p>
@@ -3954,7 +5269,7 @@
                 <a:ea typeface="Calibri" pitchFamily="34" charset="-122"/>
                 <a:cs typeface="Calibri" pitchFamily="34" charset="-120"/>
               </a:rPr>
-              <a:t>Trust, brand and public standing. The hardest of the three to recover.</a:t>
+              <a:t>Company trust, brand, and public standing.</a:t>
             </a:r>
             <a:endParaRPr lang="en-US" sz="1250" dirty="0"/>
           </a:p>
@@ -3962,7 +5277,7 @@
       </p:sp>
       <p:sp>
         <p:nvSpPr>
-          <p:cNvPr id="19" name="Text 17"/>
+          <p:cNvPr id="20" name="Text 17"/>
           <p:cNvSpPr/>
           <p:nvPr/>
         </p:nvSpPr>
@@ -4015,7 +5330,7 @@
       </p:sp>
       <p:sp>
         <p:nvSpPr>
-          <p:cNvPr id="20" name="Text 18"/>
+          <p:cNvPr id="21" name="Text 18"/>
           <p:cNvSpPr/>
           <p:nvPr/>
         </p:nvSpPr>
@@ -4084,9 +5399,33 @@
           <a:chExt cx="0" cy="0"/>
         </a:xfrm>
       </p:grpSpPr>
-      <p:sp>
-        <p:nvSpPr>
-          <p:cNvPr id="2" name="Text 0"/>
+      <p:pic>
+        <p:nvPicPr>
+          <p:cNvPr id="2" name="Image 0" descr="/home/user/Training-/assets/logo.png">    </p:cNvPr>
+          <p:cNvPicPr>
+            <a:picLocks noChangeAspect="1"/>
+          </p:cNvPicPr>
+          <p:nvPr/>
+        </p:nvPicPr>
+        <p:blipFill>
+          <a:blip r:embed="rId1"/>
+          <a:stretch>
+            <a:fillRect/>
+          </a:stretch>
+        </p:blipFill>
+        <p:spPr>
+          <a:xfrm>
+            <a:off x="10765231" y="332912"/>
+            <a:ext cx="786384" cy="742353"/>
+          </a:xfrm>
+          <a:prstGeom prst="rect">
+            <a:avLst/>
+          </a:prstGeom>
+        </p:spPr>
+      </p:pic>
+      <p:sp>
+        <p:nvSpPr>
+          <p:cNvPr id="3" name="Text 0"/>
           <p:cNvSpPr/>
           <p:nvPr/>
         </p:nvSpPr>
@@ -4114,13 +5453,13 @@
             <a:r>
               <a:rPr lang="en-US" sz="2700" b="1" dirty="0">
                 <a:solidFill>
-                  <a:srgbClr val="0F2D52"/>
+                  <a:srgbClr val="093259"/>
                 </a:solidFill>
                 <a:latin typeface="Yu Gothic" pitchFamily="34" charset="0"/>
                 <a:ea typeface="Yu Gothic" pitchFamily="34" charset="-122"/>
                 <a:cs typeface="Yu Gothic" pitchFamily="34" charset="-120"/>
               </a:rPr>
-              <a:t>Asset の内訳 ― 情報も「資産」</a:t>
+              <a:t>Asset の内訳</a:t>
             </a:r>
             <a:endParaRPr lang="en-US" sz="2700" dirty="0"/>
           </a:p>
@@ -4134,13 +5473,13 @@
             <a:r>
               <a:rPr lang="en-US" sz="1250" i="1" dirty="0">
                 <a:solidFill>
-                  <a:srgbClr val="17AF98"/>
-                </a:solidFill>
-                <a:latin typeface="Calibri" pitchFamily="34" charset="0"/>
-                <a:ea typeface="Calibri" pitchFamily="34" charset="-122"/>
-                <a:cs typeface="Calibri" pitchFamily="34" charset="-120"/>
-              </a:rPr>
-              <a:t>Inside Asset — Information Is an Asset Too</a:t>
+                  <a:srgbClr val="12B198"/>
+                </a:solidFill>
+                <a:latin typeface="Calibri" pitchFamily="34" charset="0"/>
+                <a:ea typeface="Calibri" pitchFamily="34" charset="-122"/>
+                <a:cs typeface="Calibri" pitchFamily="34" charset="-120"/>
+              </a:rPr>
+              <a:t>What Counts as an Asset</a:t>
             </a:r>
             <a:endParaRPr lang="en-US" sz="2700" dirty="0"/>
           </a:p>
@@ -4148,7 +5487,7 @@
       </p:sp>
       <p:sp>
         <p:nvSpPr>
-          <p:cNvPr id="3" name="Shape 1"/>
+          <p:cNvPr id="4" name="Shape 1"/>
           <p:cNvSpPr/>
           <p:nvPr/>
         </p:nvSpPr>
@@ -4170,7 +5509,7 @@
       </p:sp>
       <p:sp>
         <p:nvSpPr>
-          <p:cNvPr id="4" name="Text 2"/>
+          <p:cNvPr id="5" name="Text 2"/>
           <p:cNvSpPr/>
           <p:nvPr/>
         </p:nvSpPr>
@@ -4198,7 +5537,7 @@
             <a:r>
               <a:rPr lang="en-US" sz="1600" b="1" dirty="0">
                 <a:solidFill>
-                  <a:srgbClr val="0F2D52"/>
+                  <a:srgbClr val="093259"/>
                 </a:solidFill>
                 <a:latin typeface="Yu Gothic" pitchFamily="34" charset="0"/>
                 <a:ea typeface="Yu Gothic" pitchFamily="34" charset="-122"/>
@@ -4224,7 +5563,7 @@
                 <a:ea typeface="Calibri" pitchFamily="34" charset="-122"/>
                 <a:cs typeface="Calibri" pitchFamily="34" charset="-120"/>
               </a:rPr>
-              <a:t>Physical Assets</a:t>
+              <a:t>Physical assets</a:t>
             </a:r>
             <a:endParaRPr lang="en-US" sz="1600" dirty="0"/>
           </a:p>
@@ -4232,7 +5571,7 @@
       </p:sp>
       <p:sp>
         <p:nvSpPr>
-          <p:cNvPr id="5" name="Text 3"/>
+          <p:cNvPr id="6" name="Text 3"/>
           <p:cNvSpPr/>
           <p:nvPr/>
         </p:nvSpPr>
@@ -4269,7 +5608,7 @@
                 <a:ea typeface="Yu Gothic" pitchFamily="34" charset="-122"/>
                 <a:cs typeface="Yu Gothic" pitchFamily="34" charset="-120"/>
               </a:rPr>
-              <a:t>・建物・設備・電源・空調</a:t>
+              <a:t>・建物、設備、電源、空調</a:t>
             </a:r>
             <a:endParaRPr lang="en-US" sz="1250" dirty="0"/>
           </a:p>
@@ -4292,7 +5631,7 @@
                 <a:ea typeface="Calibri" pitchFamily="34" charset="-122"/>
                 <a:cs typeface="Calibri" pitchFamily="34" charset="-120"/>
               </a:rPr>
-              <a:t>　 Buildings, equipment, power, HVAC</a:t>
+              <a:t>　 Buildings, equipment, power, air conditioning</a:t>
             </a:r>
             <a:endParaRPr lang="en-US" sz="1250" dirty="0"/>
           </a:p>
@@ -4315,7 +5654,7 @@
                 <a:ea typeface="Yu Gothic" pitchFamily="34" charset="-122"/>
                 <a:cs typeface="Yu Gothic" pitchFamily="34" charset="-120"/>
               </a:rPr>
-              <a:t>・現金・金券・什器</a:t>
+              <a:t>・現金、金券、什器</a:t>
             </a:r>
             <a:endParaRPr lang="en-US" sz="1250" dirty="0"/>
           </a:p>
@@ -4361,7 +5700,7 @@
                 <a:ea typeface="Yu Gothic" pitchFamily="34" charset="-122"/>
                 <a:cs typeface="Yu Gothic" pitchFamily="34" charset="-120"/>
               </a:rPr>
-              <a:t>・在庫・原材料・製品</a:t>
+              <a:t>・在庫、原材料、製品</a:t>
             </a:r>
             <a:endParaRPr lang="en-US" sz="1250" dirty="0"/>
           </a:p>
@@ -4407,7 +5746,7 @@
                 <a:ea typeface="Yu Gothic" pitchFamily="34" charset="-122"/>
                 <a:cs typeface="Yu Gothic" pitchFamily="34" charset="-120"/>
               </a:rPr>
-              <a:t>・車両・鍵・カード類</a:t>
+              <a:t>・車両、鍵、カード類</a:t>
             </a:r>
             <a:endParaRPr lang="en-US" sz="1250" dirty="0"/>
           </a:p>
@@ -4438,7 +5777,7 @@
       </p:sp>
       <p:sp>
         <p:nvSpPr>
-          <p:cNvPr id="6" name="Shape 4"/>
+          <p:cNvPr id="7" name="Shape 4"/>
           <p:cNvSpPr/>
           <p:nvPr/>
         </p:nvSpPr>
@@ -4460,7 +5799,7 @@
       </p:sp>
       <p:sp>
         <p:nvSpPr>
-          <p:cNvPr id="7" name="Text 5"/>
+          <p:cNvPr id="8" name="Text 5"/>
           <p:cNvSpPr/>
           <p:nvPr/>
         </p:nvSpPr>
@@ -4488,7 +5827,7 @@
             <a:r>
               <a:rPr lang="en-US" sz="1600" b="1" dirty="0">
                 <a:solidFill>
-                  <a:srgbClr val="0E8C79"/>
+                  <a:srgbClr val="0D8A76"/>
                 </a:solidFill>
                 <a:latin typeface="Yu Gothic" pitchFamily="34" charset="0"/>
                 <a:ea typeface="Yu Gothic" pitchFamily="34" charset="-122"/>
@@ -4514,7 +5853,7 @@
                 <a:ea typeface="Calibri" pitchFamily="34" charset="-122"/>
                 <a:cs typeface="Calibri" pitchFamily="34" charset="-120"/>
               </a:rPr>
-              <a:t>Information Assets</a:t>
+              <a:t>Information assets</a:t>
             </a:r>
             <a:endParaRPr lang="en-US" sz="1600" dirty="0"/>
           </a:p>
@@ -4522,7 +5861,7 @@
       </p:sp>
       <p:sp>
         <p:nvSpPr>
-          <p:cNvPr id="8" name="Text 6"/>
+          <p:cNvPr id="9" name="Text 6"/>
           <p:cNvSpPr/>
           <p:nvPr/>
         </p:nvSpPr>
@@ -4559,7 +5898,7 @@
                 <a:ea typeface="Yu Gothic" pitchFamily="34" charset="-122"/>
                 <a:cs typeface="Yu Gothic" pitchFamily="34" charset="-120"/>
               </a:rPr>
-              <a:t>・書類・図面・契約書</a:t>
+              <a:t>・書類、図面、契約書</a:t>
             </a:r>
             <a:endParaRPr lang="en-US" sz="1250" dirty="0"/>
           </a:p>
@@ -4605,7 +5944,7 @@
                 <a:ea typeface="Yu Gothic" pitchFamily="34" charset="-122"/>
                 <a:cs typeface="Yu Gothic" pitchFamily="34" charset="-120"/>
               </a:rPr>
-              <a:t>・データ・端末・記録媒体</a:t>
+              <a:t>・データ、端末、記録媒体</a:t>
             </a:r>
             <a:endParaRPr lang="en-US" sz="1250" dirty="0"/>
           </a:p>
@@ -4651,7 +5990,7 @@
                 <a:ea typeface="Yu Gothic" pitchFamily="34" charset="-122"/>
                 <a:cs typeface="Yu Gothic" pitchFamily="34" charset="-120"/>
               </a:rPr>
-              <a:t>・顧客情報・人事情報</a:t>
+              <a:t>・顧客情報、人事情報</a:t>
             </a:r>
             <a:endParaRPr lang="en-US" sz="1250" dirty="0"/>
           </a:p>
@@ -4674,7 +6013,7 @@
                 <a:ea typeface="Calibri" pitchFamily="34" charset="-122"/>
                 <a:cs typeface="Calibri" pitchFamily="34" charset="-120"/>
               </a:rPr>
-              <a:t>　 Customer and HR information</a:t>
+              <a:t>　 Customer data, HR data</a:t>
             </a:r>
             <a:endParaRPr lang="en-US" sz="1250" dirty="0"/>
           </a:p>
@@ -4697,7 +6036,7 @@
                 <a:ea typeface="Yu Gothic" pitchFamily="34" charset="-122"/>
                 <a:cs typeface="Yu Gothic" pitchFamily="34" charset="-120"/>
               </a:rPr>
-              <a:t>・入退室ログ・カメラ画像</a:t>
+              <a:t>・入退室ログ、カメラ画像</a:t>
             </a:r>
             <a:endParaRPr lang="en-US" sz="1250" dirty="0"/>
           </a:p>
@@ -4720,7 +6059,7 @@
                 <a:ea typeface="Calibri" pitchFamily="34" charset="-122"/>
                 <a:cs typeface="Calibri" pitchFamily="34" charset="-120"/>
               </a:rPr>
-              <a:t>　 Access logs and camera footage</a:t>
+              <a:t>　 Access logs, camera footage</a:t>
             </a:r>
             <a:endParaRPr lang="en-US" sz="1250" dirty="0"/>
           </a:p>
@@ -4728,7 +6067,7 @@
       </p:sp>
       <p:sp>
         <p:nvSpPr>
-          <p:cNvPr id="9" name="Text 7"/>
+          <p:cNvPr id="10" name="Text 7"/>
           <p:cNvSpPr/>
           <p:nvPr/>
         </p:nvSpPr>
@@ -4756,13 +6095,13 @@
             <a:r>
               <a:rPr lang="en-US" sz="1300" b="1" dirty="0">
                 <a:solidFill>
-                  <a:srgbClr val="0E8C79"/>
+                  <a:srgbClr val="0D8A76"/>
                 </a:solidFill>
                 <a:latin typeface="Yu Gothic" pitchFamily="34" charset="0"/>
                 <a:ea typeface="Yu Gothic" pitchFamily="34" charset="-122"/>
                 <a:cs typeface="Yu Gothic" pitchFamily="34" charset="-120"/>
               </a:rPr>
-              <a:t>施錠されたサーバ室も、机上に放置された1枚の書類も、同じ「Asset」です。</a:t>
+              <a:t>施錠されたサーバ室も、机上に放置された書類も、同じ Asset として扱います。</a:t>
             </a:r>
             <a:endParaRPr lang="en-US" sz="1300" dirty="0"/>
           </a:p>
@@ -4782,7 +6121,7 @@
                 <a:ea typeface="Calibri" pitchFamily="34" charset="-122"/>
                 <a:cs typeface="Calibri" pitchFamily="34" charset="-120"/>
               </a:rPr>
-              <a:t>A locked server room and a single sheet left on a desk fall into the same category.</a:t>
+              <a:t>A locked server room and a document left on a desk are both Assets.</a:t>
             </a:r>
             <a:endParaRPr lang="en-US" sz="1300" dirty="0"/>
           </a:p>
@@ -4790,7 +6129,7 @@
       </p:sp>
       <p:sp>
         <p:nvSpPr>
-          <p:cNvPr id="10" name="Text 8"/>
+          <p:cNvPr id="11" name="Text 8"/>
           <p:cNvSpPr/>
           <p:nvPr/>
         </p:nvSpPr>
@@ -4843,7 +6182,7 @@
       </p:sp>
       <p:sp>
         <p:nvSpPr>
-          <p:cNvPr id="11" name="Text 9"/>
+          <p:cNvPr id="12" name="Text 9"/>
           <p:cNvSpPr/>
           <p:nvPr/>
         </p:nvSpPr>
@@ -4912,9 +6251,33 @@
           <a:chExt cx="0" cy="0"/>
         </a:xfrm>
       </p:grpSpPr>
-      <p:sp>
-        <p:nvSpPr>
-          <p:cNvPr id="2" name="Text 0"/>
+      <p:pic>
+        <p:nvPicPr>
+          <p:cNvPr id="2" name="Image 0" descr="/home/user/Training-/assets/logo.png">    </p:cNvPr>
+          <p:cNvPicPr>
+            <a:picLocks noChangeAspect="1"/>
+          </p:cNvPicPr>
+          <p:nvPr/>
+        </p:nvPicPr>
+        <p:blipFill>
+          <a:blip r:embed="rId1"/>
+          <a:stretch>
+            <a:fillRect/>
+          </a:stretch>
+        </p:blipFill>
+        <p:spPr>
+          <a:xfrm>
+            <a:off x="10765231" y="332912"/>
+            <a:ext cx="786384" cy="742353"/>
+          </a:xfrm>
+          <a:prstGeom prst="rect">
+            <a:avLst/>
+          </a:prstGeom>
+        </p:spPr>
+      </p:pic>
+      <p:sp>
+        <p:nvSpPr>
+          <p:cNvPr id="3" name="Text 0"/>
           <p:cNvSpPr/>
           <p:nvPr/>
         </p:nvSpPr>
@@ -4942,13 +6305,13 @@
             <a:r>
               <a:rPr lang="en-US" sz="2700" b="1" dirty="0">
                 <a:solidFill>
-                  <a:srgbClr val="0F2D52"/>
+                  <a:srgbClr val="093259"/>
                 </a:solidFill>
                 <a:latin typeface="Yu Gothic" pitchFamily="34" charset="0"/>
                 <a:ea typeface="Yu Gothic" pitchFamily="34" charset="-122"/>
                 <a:cs typeface="Yu Gothic" pitchFamily="34" charset="-120"/>
               </a:rPr>
-              <a:t>最も戻らない損失は Reputation</a:t>
+              <a:t>Reputation への影響</a:t>
             </a:r>
             <a:endParaRPr lang="en-US" sz="2700" dirty="0"/>
           </a:p>
@@ -4962,13 +6325,13 @@
             <a:r>
               <a:rPr lang="en-US" sz="1250" i="1" dirty="0">
                 <a:solidFill>
-                  <a:srgbClr val="17AF98"/>
-                </a:solidFill>
-                <a:latin typeface="Calibri" pitchFamily="34" charset="0"/>
-                <a:ea typeface="Calibri" pitchFamily="34" charset="-122"/>
-                <a:cs typeface="Calibri" pitchFamily="34" charset="-120"/>
-              </a:rPr>
-              <a:t>The Loss That Does Not Come Back</a:t>
+                  <a:srgbClr val="12B198"/>
+                </a:solidFill>
+                <a:latin typeface="Calibri" pitchFamily="34" charset="0"/>
+                <a:ea typeface="Calibri" pitchFamily="34" charset="-122"/>
+                <a:cs typeface="Calibri" pitchFamily="34" charset="-120"/>
+              </a:rPr>
+              <a:t>Impact on Reputation</a:t>
             </a:r>
             <a:endParaRPr lang="en-US" sz="2700" dirty="0"/>
           </a:p>
@@ -4976,7 +6339,7 @@
       </p:sp>
       <p:sp>
         <p:nvSpPr>
-          <p:cNvPr id="3" name="Shape 1"/>
+          <p:cNvPr id="4" name="Shape 1"/>
           <p:cNvSpPr/>
           <p:nvPr/>
         </p:nvSpPr>
@@ -4991,14 +6354,14 @@
             </a:avLst>
           </a:prstGeom>
           <a:solidFill>
-            <a:srgbClr val="0F2D52"/>
+            <a:srgbClr val="093259"/>
           </a:solidFill>
           <a:ln/>
         </p:spPr>
       </p:sp>
       <p:sp>
         <p:nvSpPr>
-          <p:cNvPr id="4" name="Text 2"/>
+          <p:cNvPr id="5" name="Text 2"/>
           <p:cNvSpPr/>
           <p:nvPr/>
         </p:nvSpPr>
@@ -5024,7 +6387,7 @@
               <a:buNone/>
             </a:pPr>
             <a:r>
-              <a:rPr lang="en-US" sz="2000" b="1" dirty="0">
+              <a:rPr lang="en-US" sz="1700" b="1" dirty="0">
                 <a:solidFill>
                   <a:srgbClr val="FFFFFF"/>
                 </a:solidFill>
@@ -5032,9 +6395,9 @@
                 <a:ea typeface="Yu Gothic" pitchFamily="34" charset="-122"/>
                 <a:cs typeface="Yu Gothic" pitchFamily="34" charset="-120"/>
               </a:rPr>
-              <a:t>物と情報の損失は、金額で埋め合わせられることがある。</a:t>
-            </a:r>
-            <a:endParaRPr lang="en-US" sz="2000" dirty="0"/>
+              <a:t>信用の毀損は、物的損害と異なり、回復に長期を要します。</a:t>
+            </a:r>
+            <a:endParaRPr lang="en-US" sz="1700" dirty="0"/>
           </a:p>
           <a:p>
             <a:pPr indent="0" marL="0">
@@ -5044,7 +6407,7 @@
               <a:buNone/>
             </a:pPr>
             <a:r>
-              <a:rPr lang="en-US" sz="2000" b="1" dirty="0">
+              <a:rPr lang="en-US" sz="1700" b="1" dirty="0">
                 <a:solidFill>
                   <a:srgbClr val="FFFFFF"/>
                 </a:solidFill>
@@ -5052,15 +6415,15 @@
                 <a:ea typeface="Yu Gothic" pitchFamily="34" charset="-122"/>
                 <a:cs typeface="Yu Gothic" pitchFamily="34" charset="-120"/>
               </a:rPr>
-              <a:t>信用は、金額では戻らない。</a:t>
-            </a:r>
-            <a:endParaRPr lang="en-US" sz="2000" dirty="0"/>
-          </a:p>
-        </p:txBody>
-      </p:sp>
-      <p:sp>
-        <p:nvSpPr>
-          <p:cNvPr id="5" name="Text 3"/>
+              <a:t>現場の対応がそのまま企業の評価になります。</a:t>
+            </a:r>
+            <a:endParaRPr lang="en-US" sz="1700" dirty="0"/>
+          </a:p>
+        </p:txBody>
+      </p:sp>
+      <p:sp>
+        <p:nvSpPr>
+          <p:cNvPr id="6" name="Text 3"/>
           <p:cNvSpPr/>
           <p:nvPr/>
         </p:nvSpPr>
@@ -5086,7 +6449,7 @@
               <a:buNone/>
             </a:pPr>
             <a:r>
-              <a:rPr lang="en-US" sz="1300" i="1" dirty="0">
+              <a:rPr lang="en-US" sz="1150" i="1" dirty="0">
                 <a:solidFill>
                   <a:srgbClr val="9FD8CD"/>
                 </a:solidFill>
@@ -5094,9 +6457,9 @@
                 <a:ea typeface="Calibri" pitchFamily="34" charset="-122"/>
                 <a:cs typeface="Calibri" pitchFamily="34" charset="-120"/>
               </a:rPr>
-              <a:t>A loss of property or information can sometimes be repaid.</a:t>
-            </a:r>
-            <a:endParaRPr lang="en-US" sz="1300" dirty="0"/>
+              <a:t>Damage to reputation takes a long time to repair, unlike physical loss.</a:t>
+            </a:r>
+            <a:endParaRPr lang="en-US" sz="1150" dirty="0"/>
           </a:p>
           <a:p>
             <a:pPr indent="0" marL="0">
@@ -5106,7 +6469,7 @@
               <a:buNone/>
             </a:pPr>
             <a:r>
-              <a:rPr lang="en-US" sz="1300" i="1" dirty="0">
+              <a:rPr lang="en-US" sz="1150" i="1" dirty="0">
                 <a:solidFill>
                   <a:srgbClr val="9FD8CD"/>
                 </a:solidFill>
@@ -5114,15 +6477,15 @@
                 <a:ea typeface="Calibri" pitchFamily="34" charset="-122"/>
                 <a:cs typeface="Calibri" pitchFamily="34" charset="-120"/>
               </a:rPr>
-              <a:t>A loss of reputation cannot.</a:t>
-            </a:r>
-            <a:endParaRPr lang="en-US" sz="1300" dirty="0"/>
-          </a:p>
-        </p:txBody>
-      </p:sp>
-      <p:sp>
-        <p:nvSpPr>
-          <p:cNvPr id="6" name="Shape 4"/>
+              <a:t>How you act on site becomes how the company is judged.</a:t>
+            </a:r>
+            <a:endParaRPr lang="en-US" sz="1150" dirty="0"/>
+          </a:p>
+        </p:txBody>
+      </p:sp>
+      <p:sp>
+        <p:nvSpPr>
+          <p:cNvPr id="7" name="Shape 4"/>
           <p:cNvSpPr/>
           <p:nvPr/>
         </p:nvSpPr>
@@ -5144,7 +6507,7 @@
       </p:sp>
       <p:sp>
         <p:nvSpPr>
-          <p:cNvPr id="7" name="Shape 5"/>
+          <p:cNvPr id="8" name="Shape 5"/>
           <p:cNvSpPr/>
           <p:nvPr/>
         </p:nvSpPr>
@@ -5157,14 +6520,14 @@
             <a:avLst/>
           </a:prstGeom>
           <a:solidFill>
-            <a:srgbClr val="17AF98"/>
+            <a:srgbClr val="12B198"/>
           </a:solidFill>
           <a:ln/>
         </p:spPr>
       </p:sp>
       <p:sp>
         <p:nvSpPr>
-          <p:cNvPr id="8" name="Text 6"/>
+          <p:cNvPr id="9" name="Text 6"/>
           <p:cNvSpPr/>
           <p:nvPr/>
         </p:nvSpPr>
@@ -5203,7 +6566,7 @@
       </p:sp>
       <p:sp>
         <p:nvSpPr>
-          <p:cNvPr id="9" name="Text 7"/>
+          <p:cNvPr id="10" name="Text 7"/>
           <p:cNvSpPr/>
           <p:nvPr/>
         </p:nvSpPr>
@@ -5231,13 +6594,13 @@
             <a:r>
               <a:rPr lang="en-US" sz="1450" b="1" dirty="0">
                 <a:solidFill>
-                  <a:srgbClr val="0F2D52"/>
+                  <a:srgbClr val="093259"/>
                 </a:solidFill>
                 <a:latin typeface="Yu Gothic" pitchFamily="34" charset="0"/>
                 <a:ea typeface="Yu Gothic" pitchFamily="34" charset="-122"/>
                 <a:cs typeface="Yu Gothic" pitchFamily="34" charset="-120"/>
               </a:rPr>
-              <a:t>現場の一言、過剰な有形力、放置された書類 ― どれも「企業の事件」に変わりうる。</a:t>
+              <a:t>過剰な有形力、断定的な発言、情報の放置。いずれも企業全体の問題になりえます。</a:t>
             </a:r>
             <a:endParaRPr lang="en-US" sz="1450" dirty="0"/>
           </a:p>
@@ -5251,13 +6614,13 @@
             <a:r>
               <a:rPr lang="en-US" sz="1000" i="1" dirty="0">
                 <a:solidFill>
-                  <a:srgbClr val="0E8C79"/>
-                </a:solidFill>
-                <a:latin typeface="Calibri" pitchFamily="34" charset="0"/>
-                <a:ea typeface="Calibri" pitchFamily="34" charset="-122"/>
-                <a:cs typeface="Calibri" pitchFamily="34" charset="-120"/>
-              </a:rPr>
-              <a:t>A single remark, an excessive use of force, an unattended document — any of these can become a company-level incident.</a:t>
+                  <a:srgbClr val="0D8A76"/>
+                </a:solidFill>
+                <a:latin typeface="Calibri" pitchFamily="34" charset="0"/>
+                <a:ea typeface="Calibri" pitchFamily="34" charset="-122"/>
+                <a:cs typeface="Calibri" pitchFamily="34" charset="-120"/>
+              </a:rPr>
+              <a:t>Excessive force, statements you cannot support, and unattended information can all become company-level problems.</a:t>
             </a:r>
             <a:endParaRPr lang="en-US" sz="1450" dirty="0"/>
           </a:p>
@@ -5265,7 +6628,7 @@
       </p:sp>
       <p:sp>
         <p:nvSpPr>
-          <p:cNvPr id="10" name="Text 8"/>
+          <p:cNvPr id="11" name="Text 8"/>
           <p:cNvSpPr/>
           <p:nvPr/>
         </p:nvSpPr>
@@ -5318,7 +6681,7 @@
       </p:sp>
       <p:sp>
         <p:nvSpPr>
-          <p:cNvPr id="11" name="Text 9"/>
+          <p:cNvPr id="12" name="Text 9"/>
           <p:cNvSpPr/>
           <p:nvPr/>
         </p:nvSpPr>
@@ -5387,9 +6750,33 @@
           <a:chExt cx="0" cy="0"/>
         </a:xfrm>
       </p:grpSpPr>
-      <p:sp>
-        <p:nvSpPr>
-          <p:cNvPr id="2" name="Text 0"/>
+      <p:pic>
+        <p:nvPicPr>
+          <p:cNvPr id="2" name="Image 0" descr="/home/user/Training-/assets/logo.png">    </p:cNvPr>
+          <p:cNvPicPr>
+            <a:picLocks noChangeAspect="1"/>
+          </p:cNvPicPr>
+          <p:nvPr/>
+        </p:nvPicPr>
+        <p:blipFill>
+          <a:blip r:embed="rId1"/>
+          <a:stretch>
+            <a:fillRect/>
+          </a:stretch>
+        </p:blipFill>
+        <p:spPr>
+          <a:xfrm>
+            <a:off x="10765231" y="332912"/>
+            <a:ext cx="786384" cy="742353"/>
+          </a:xfrm>
+          <a:prstGeom prst="rect">
+            <a:avLst/>
+          </a:prstGeom>
+        </p:spPr>
+      </p:pic>
+      <p:sp>
+        <p:nvSpPr>
+          <p:cNvPr id="3" name="Text 0"/>
           <p:cNvSpPr/>
           <p:nvPr/>
         </p:nvSpPr>
@@ -5417,13 +6804,13 @@
             <a:r>
               <a:rPr lang="en-US" sz="2700" b="1" dirty="0">
                 <a:solidFill>
-                  <a:srgbClr val="0F2D52"/>
+                  <a:srgbClr val="093259"/>
                 </a:solidFill>
                 <a:latin typeface="Yu Gothic" pitchFamily="34" charset="0"/>
                 <a:ea typeface="Yu Gothic" pitchFamily="34" charset="-122"/>
                 <a:cs typeface="Yu Gothic" pitchFamily="34" charset="-120"/>
               </a:rPr>
-              <a:t>警備業法 第15条 ― 本日の背骨</a:t>
+              <a:t>警備業法 第15条</a:t>
             </a:r>
             <a:endParaRPr lang="en-US" sz="2700" dirty="0"/>
           </a:p>
@@ -5437,13 +6824,13 @@
             <a:r>
               <a:rPr lang="en-US" sz="1250" i="1" dirty="0">
                 <a:solidFill>
-                  <a:srgbClr val="17AF98"/>
-                </a:solidFill>
-                <a:latin typeface="Calibri" pitchFamily="34" charset="0"/>
-                <a:ea typeface="Calibri" pitchFamily="34" charset="-122"/>
-                <a:cs typeface="Calibri" pitchFamily="34" charset="-120"/>
-              </a:rPr>
-              <a:t>Security Services Act, Article 15 — the backbone of today</a:t>
+                  <a:srgbClr val="12B198"/>
+                </a:solidFill>
+                <a:latin typeface="Calibri" pitchFamily="34" charset="0"/>
+                <a:ea typeface="Calibri" pitchFamily="34" charset="-122"/>
+                <a:cs typeface="Calibri" pitchFamily="34" charset="-120"/>
+              </a:rPr>
+              <a:t>Security Services Act, Article 15</a:t>
             </a:r>
             <a:endParaRPr lang="en-US" sz="2700" dirty="0"/>
           </a:p>
@@ -5451,7 +6838,7 @@
       </p:sp>
       <p:sp>
         <p:nvSpPr>
-          <p:cNvPr id="3" name="Shape 1"/>
+          <p:cNvPr id="4" name="Shape 1"/>
           <p:cNvSpPr/>
           <p:nvPr/>
         </p:nvSpPr>
@@ -5466,14 +6853,14 @@
             </a:avLst>
           </a:prstGeom>
           <a:solidFill>
-            <a:srgbClr val="0F2D52"/>
+            <a:srgbClr val="093259"/>
           </a:solidFill>
           <a:ln/>
         </p:spPr>
       </p:sp>
       <p:sp>
         <p:nvSpPr>
-          <p:cNvPr id="4" name="Text 2"/>
+          <p:cNvPr id="5" name="Text 2"/>
           <p:cNvSpPr/>
           <p:nvPr/>
         </p:nvSpPr>
@@ -5515,7 +6902,7 @@
       </p:sp>
       <p:sp>
         <p:nvSpPr>
-          <p:cNvPr id="5" name="Text 3"/>
+          <p:cNvPr id="6" name="Text 3"/>
           <p:cNvSpPr/>
           <p:nvPr/>
         </p:nvSpPr>
@@ -5549,7 +6936,7 @@
                 <a:ea typeface="Calibri" pitchFamily="34" charset="-122"/>
                 <a:cs typeface="Calibri" pitchFamily="34" charset="-120"/>
               </a:rPr>
-              <a:t>In carrying out security operations, security businesses and security guards must bear in mind that this Act confers upon them no special authority, and must not infringe upon the rights and freedoms of others, nor interfere with the legitimate activities of any individual or organisation.</a:t>
+              <a:t>When carrying out security operations, security businesses and guards must remember that this Act gives them no special authority. They must not infringe the rights or freedoms of others, and must not interfere with lawful activities.</a:t>
             </a:r>
             <a:endParaRPr lang="en-US" sz="1050" dirty="0"/>
           </a:p>
@@ -5557,7 +6944,7 @@
       </p:sp>
       <p:sp>
         <p:nvSpPr>
-          <p:cNvPr id="6" name="Text 4"/>
+          <p:cNvPr id="7" name="Text 4"/>
           <p:cNvSpPr/>
           <p:nvPr/>
         </p:nvSpPr>
@@ -5582,7 +6969,7 @@
             <a:r>
               <a:rPr lang="en-US" sz="1000" dirty="0">
                 <a:solidFill>
-                  <a:srgbClr val="17AF98"/>
+                  <a:srgbClr val="12B198"/>
                 </a:solidFill>
                 <a:latin typeface="Calibri" pitchFamily="34" charset="0"/>
                 <a:ea typeface="Calibri" pitchFamily="34" charset="-122"/>
@@ -5596,7 +6983,7 @@
       </p:sp>
       <p:sp>
         <p:nvSpPr>
-          <p:cNvPr id="7" name="Shape 5"/>
+          <p:cNvPr id="8" name="Shape 5"/>
           <p:cNvSpPr/>
           <p:nvPr/>
         </p:nvSpPr>
@@ -5618,7 +7005,7 @@
       </p:sp>
       <p:sp>
         <p:nvSpPr>
-          <p:cNvPr id="8" name="Shape 6"/>
+          <p:cNvPr id="9" name="Shape 6"/>
           <p:cNvSpPr/>
           <p:nvPr/>
         </p:nvSpPr>
@@ -5631,14 +7018,14 @@
             <a:avLst/>
           </a:prstGeom>
           <a:solidFill>
-            <a:srgbClr val="17AF98"/>
+            <a:srgbClr val="12B198"/>
           </a:solidFill>
           <a:ln/>
         </p:spPr>
       </p:sp>
       <p:sp>
         <p:nvSpPr>
-          <p:cNvPr id="9" name="Text 7"/>
+          <p:cNvPr id="10" name="Text 7"/>
           <p:cNvSpPr/>
           <p:nvPr/>
         </p:nvSpPr>
@@ -5677,7 +7064,7 @@
       </p:sp>
       <p:sp>
         <p:nvSpPr>
-          <p:cNvPr id="10" name="Text 8"/>
+          <p:cNvPr id="11" name="Text 8"/>
           <p:cNvSpPr/>
           <p:nvPr/>
         </p:nvSpPr>
@@ -5705,13 +7092,13 @@
             <a:r>
               <a:rPr lang="en-US" sz="1450" b="1" dirty="0">
                 <a:solidFill>
-                  <a:srgbClr val="0F2D52"/>
+                  <a:srgbClr val="093259"/>
                 </a:solidFill>
                 <a:latin typeface="Yu Gothic" pitchFamily="34" charset="0"/>
                 <a:ea typeface="Yu Gothic" pitchFamily="34" charset="-122"/>
                 <a:cs typeface="Yu Gothic" pitchFamily="34" charset="-120"/>
               </a:rPr>
-              <a:t>制服を着ていても、あなたの法的な立場は通行人と同じ「私人」です。</a:t>
+              <a:t>警備員の法的な立場は私人です。制服により権限が加わることはありません。</a:t>
             </a:r>
             <a:endParaRPr lang="en-US" sz="1450" dirty="0"/>
           </a:p>
@@ -5725,13 +7112,13 @@
             <a:r>
               <a:rPr lang="en-US" sz="1000" i="1" dirty="0">
                 <a:solidFill>
-                  <a:srgbClr val="0E8C79"/>
-                </a:solidFill>
-                <a:latin typeface="Calibri" pitchFamily="34" charset="0"/>
-                <a:ea typeface="Calibri" pitchFamily="34" charset="-122"/>
-                <a:cs typeface="Calibri" pitchFamily="34" charset="-120"/>
-              </a:rPr>
-              <a:t>Even in uniform, your legal standing is exactly that of a passer-by: a private citizen.</a:t>
+                  <a:srgbClr val="0D8A76"/>
+                </a:solidFill>
+                <a:latin typeface="Calibri" pitchFamily="34" charset="0"/>
+                <a:ea typeface="Calibri" pitchFamily="34" charset="-122"/>
+                <a:cs typeface="Calibri" pitchFamily="34" charset="-120"/>
+              </a:rPr>
+              <a:t>A security guard is a private citizen in law. The uniform adds no legal authority.</a:t>
             </a:r>
             <a:endParaRPr lang="en-US" sz="1450" dirty="0"/>
           </a:p>
@@ -5739,7 +7126,7 @@
       </p:sp>
       <p:sp>
         <p:nvSpPr>
-          <p:cNvPr id="11" name="Text 9"/>
+          <p:cNvPr id="12" name="Text 9"/>
           <p:cNvSpPr/>
           <p:nvPr/>
         </p:nvSpPr>
@@ -5792,7 +7179,7 @@
       </p:sp>
       <p:sp>
         <p:nvSpPr>
-          <p:cNvPr id="12" name="Text 10"/>
+          <p:cNvPr id="13" name="Text 10"/>
           <p:cNvSpPr/>
           <p:nvPr/>
         </p:nvSpPr>
@@ -5861,9 +7248,33 @@
           <a:chExt cx="0" cy="0"/>
         </a:xfrm>
       </p:grpSpPr>
-      <p:sp>
-        <p:nvSpPr>
-          <p:cNvPr id="2" name="Text 0"/>
+      <p:pic>
+        <p:nvPicPr>
+          <p:cNvPr id="2" name="Image 0" descr="/home/user/Training-/assets/logo.png">    </p:cNvPr>
+          <p:cNvPicPr>
+            <a:picLocks noChangeAspect="1"/>
+          </p:cNvPicPr>
+          <p:nvPr/>
+        </p:nvPicPr>
+        <p:blipFill>
+          <a:blip r:embed="rId1"/>
+          <a:stretch>
+            <a:fillRect/>
+          </a:stretch>
+        </p:blipFill>
+        <p:spPr>
+          <a:xfrm>
+            <a:off x="10765231" y="332912"/>
+            <a:ext cx="786384" cy="742353"/>
+          </a:xfrm>
+          <a:prstGeom prst="rect">
+            <a:avLst/>
+          </a:prstGeom>
+        </p:spPr>
+      </p:pic>
+      <p:sp>
+        <p:nvSpPr>
+          <p:cNvPr id="3" name="Text 0"/>
           <p:cNvSpPr/>
           <p:nvPr/>
         </p:nvSpPr>
@@ -5891,13 +7302,13 @@
             <a:r>
               <a:rPr lang="en-US" sz="2700" b="1" dirty="0">
                 <a:solidFill>
-                  <a:srgbClr val="0F2D52"/>
+                  <a:srgbClr val="093259"/>
                 </a:solidFill>
                 <a:latin typeface="Yu Gothic" pitchFamily="34" charset="0"/>
                 <a:ea typeface="Yu Gothic" pitchFamily="34" charset="-122"/>
                 <a:cs typeface="Yu Gothic" pitchFamily="34" charset="-120"/>
               </a:rPr>
-              <a:t>できることは、2つだけ</a:t>
+              <a:t>警察官と警備員 ― 権限の違い</a:t>
             </a:r>
             <a:endParaRPr lang="en-US" sz="2700" dirty="0"/>
           </a:p>
@@ -5911,13 +7322,13 @@
             <a:r>
               <a:rPr lang="en-US" sz="1250" i="1" dirty="0">
                 <a:solidFill>
-                  <a:srgbClr val="17AF98"/>
-                </a:solidFill>
-                <a:latin typeface="Calibri" pitchFamily="34" charset="0"/>
-                <a:ea typeface="Calibri" pitchFamily="34" charset="-122"/>
-                <a:cs typeface="Calibri" pitchFamily="34" charset="-120"/>
-              </a:rPr>
-              <a:t>You Have Exactly Two Sources of Authority</a:t>
+                  <a:srgbClr val="12B198"/>
+                </a:solidFill>
+                <a:latin typeface="Calibri" pitchFamily="34" charset="0"/>
+                <a:ea typeface="Calibri" pitchFamily="34" charset="-122"/>
+                <a:cs typeface="Calibri" pitchFamily="34" charset="-120"/>
+              </a:rPr>
+              <a:t>Police Officers and Security Guards — Different Powers</a:t>
             </a:r>
             <a:endParaRPr lang="en-US" sz="2700" dirty="0"/>
           </a:p>
@@ -5925,18 +7336,80 @@
       </p:sp>
       <p:sp>
         <p:nvSpPr>
-          <p:cNvPr id="3" name="Shape 1"/>
-          <p:cNvSpPr/>
-          <p:nvPr/>
-        </p:nvSpPr>
-        <p:spPr>
-          <a:xfrm>
-            <a:off x="640080" y="2446020"/>
-            <a:ext cx="5318608" cy="2971800"/>
+          <p:cNvPr id="4" name="Text 1"/>
+          <p:cNvSpPr/>
+          <p:nvPr/>
+        </p:nvSpPr>
+        <p:spPr>
+          <a:xfrm>
+            <a:off x="640080" y="1517904"/>
+            <a:ext cx="10911535" cy="530352"/>
+          </a:xfrm>
+          <a:prstGeom prst="rect">
+            <a:avLst/>
+          </a:prstGeom>
+          <a:noFill/>
+          <a:ln/>
+        </p:spPr>
+        <p:txBody>
+          <a:bodyPr wrap="square" lIns="0" tIns="0" rIns="0" bIns="0" rtlCol="0" anchor="t"/>
+          <a:lstStyle/>
+          <a:p>
+            <a:pPr algn="l" indent="0" marL="0">
+              <a:lnSpc>
+                <a:spcPct val="92000"/>
+              </a:lnSpc>
+              <a:buNone/>
+            </a:pPr>
+            <a:r>
+              <a:rPr lang="en-US" sz="1300" dirty="0">
+                <a:solidFill>
+                  <a:srgbClr val="093259"/>
+                </a:solidFill>
+                <a:latin typeface="Yu Gothic" pitchFamily="34" charset="0"/>
+                <a:ea typeface="Yu Gothic" pitchFamily="34" charset="-122"/>
+                <a:cs typeface="Yu Gothic" pitchFamily="34" charset="-120"/>
+              </a:rPr>
+              <a:t>警察官には法律で与えられた権限があります。警備員にはありません。</a:t>
+            </a:r>
+            <a:endParaRPr lang="en-US" sz="1300" dirty="0"/>
+          </a:p>
+          <a:p>
+            <a:pPr algn="l" indent="0" marL="0">
+              <a:lnSpc>
+                <a:spcPct val="92000"/>
+              </a:lnSpc>
+              <a:buNone/>
+            </a:pPr>
+            <a:r>
+              <a:rPr lang="en-US" sz="1000" i="1" dirty="0">
+                <a:solidFill>
+                  <a:srgbClr val="5F7183"/>
+                </a:solidFill>
+                <a:latin typeface="Calibri" pitchFamily="34" charset="0"/>
+                <a:ea typeface="Calibri" pitchFamily="34" charset="-122"/>
+                <a:cs typeface="Calibri" pitchFamily="34" charset="-120"/>
+              </a:rPr>
+              <a:t>Police officers have powers granted by law. Security guards do not.</a:t>
+            </a:r>
+            <a:endParaRPr lang="en-US" sz="1300" dirty="0"/>
+          </a:p>
+        </p:txBody>
+      </p:sp>
+      <p:sp>
+        <p:nvSpPr>
+          <p:cNvPr id="5" name="Shape 2"/>
+          <p:cNvSpPr/>
+          <p:nvPr/>
+        </p:nvSpPr>
+        <p:spPr>
+          <a:xfrm>
+            <a:off x="640080" y="2231136"/>
+            <a:ext cx="5300320" cy="3163824"/>
           </a:xfrm>
           <a:prstGeom prst="roundRect">
             <a:avLst>
-              <a:gd name="adj" fmla="val 1538"/>
+              <a:gd name="adj" fmla="val 1445"/>
             </a:avLst>
           </a:prstGeom>
           <a:solidFill>
@@ -5947,73 +7420,14 @@
       </p:sp>
       <p:sp>
         <p:nvSpPr>
-          <p:cNvPr id="4" name="Shape 2"/>
-          <p:cNvSpPr/>
-          <p:nvPr/>
-        </p:nvSpPr>
-        <p:spPr>
-          <a:xfrm>
-            <a:off x="877824" y="2683764"/>
-            <a:ext cx="384048" cy="384048"/>
-          </a:xfrm>
-          <a:prstGeom prst="ellipse">
-            <a:avLst/>
-          </a:prstGeom>
-          <a:solidFill>
-            <a:srgbClr val="0F2D52"/>
-          </a:solidFill>
-          <a:ln/>
-        </p:spPr>
-      </p:sp>
-      <p:sp>
-        <p:nvSpPr>
-          <p:cNvPr id="5" name="Text 3"/>
-          <p:cNvSpPr/>
-          <p:nvPr/>
-        </p:nvSpPr>
-        <p:spPr>
-          <a:xfrm>
-            <a:off x="877824" y="2683764"/>
-            <a:ext cx="384048" cy="384048"/>
-          </a:xfrm>
-          <a:prstGeom prst="rect">
-            <a:avLst/>
-          </a:prstGeom>
-          <a:noFill/>
-          <a:ln/>
-        </p:spPr>
-        <p:txBody>
-          <a:bodyPr wrap="square" lIns="0" tIns="0" rIns="0" bIns="0" rtlCol="0" anchor="ctr"/>
-          <a:lstStyle/>
-          <a:p>
-            <a:pPr algn="ctr" indent="0" marL="0">
-              <a:buNone/>
-            </a:pPr>
-            <a:r>
-              <a:rPr lang="en-US" sz="1400" b="1" dirty="0">
-                <a:solidFill>
-                  <a:srgbClr val="FFFFFF"/>
-                </a:solidFill>
-                <a:latin typeface="Calibri" pitchFamily="34" charset="0"/>
-                <a:ea typeface="Calibri" pitchFamily="34" charset="-122"/>
-                <a:cs typeface="Calibri" pitchFamily="34" charset="-120"/>
-              </a:rPr>
-              <a:t>1</a:t>
-            </a:r>
-            <a:endParaRPr lang="en-US" sz="1400" dirty="0"/>
-          </a:p>
-        </p:txBody>
-      </p:sp>
-      <p:sp>
-        <p:nvSpPr>
-          <p:cNvPr id="6" name="Text 4"/>
-          <p:cNvSpPr/>
-          <p:nvPr/>
-        </p:nvSpPr>
-        <p:spPr>
-          <a:xfrm>
-            <a:off x="1389888" y="2665476"/>
-            <a:ext cx="4331056" cy="658368"/>
+          <p:cNvPr id="6" name="Text 3"/>
+          <p:cNvSpPr/>
+          <p:nvPr/>
+        </p:nvSpPr>
+        <p:spPr>
+          <a:xfrm>
+            <a:off x="914400" y="2450592"/>
+            <a:ext cx="4751680" cy="676656"/>
           </a:xfrm>
           <a:prstGeom prst="rect">
             <a:avLst/>
@@ -6034,13 +7448,13 @@
             <a:r>
               <a:rPr lang="en-US" sz="1600" b="1" dirty="0">
                 <a:solidFill>
-                  <a:srgbClr val="0F2D52"/>
+                  <a:srgbClr val="093259"/>
                 </a:solidFill>
                 <a:latin typeface="Yu Gothic" pitchFamily="34" charset="0"/>
                 <a:ea typeface="Yu Gothic" pitchFamily="34" charset="-122"/>
                 <a:cs typeface="Yu Gothic" pitchFamily="34" charset="-120"/>
               </a:rPr>
-              <a:t>誰でもできること</a:t>
+              <a:t>警察官にある権限</a:t>
             </a:r>
             <a:endParaRPr lang="en-US" sz="1600" dirty="0"/>
           </a:p>
@@ -6054,13 +7468,13 @@
             <a:r>
               <a:rPr lang="en-US" sz="1000" i="1" dirty="0">
                 <a:solidFill>
-                  <a:srgbClr val="17AF98"/>
-                </a:solidFill>
-                <a:latin typeface="Calibri" pitchFamily="34" charset="0"/>
-                <a:ea typeface="Calibri" pitchFamily="34" charset="-122"/>
-                <a:cs typeface="Calibri" pitchFamily="34" charset="-120"/>
-              </a:rPr>
-              <a:t>What anyone may lawfully do</a:t>
+                  <a:srgbClr val="5F7183"/>
+                </a:solidFill>
+                <a:latin typeface="Calibri" pitchFamily="34" charset="0"/>
+                <a:ea typeface="Calibri" pitchFamily="34" charset="-122"/>
+                <a:cs typeface="Calibri" pitchFamily="34" charset="-120"/>
+              </a:rPr>
+              <a:t>Police powers (Police Duties Execution Act)</a:t>
             </a:r>
             <a:endParaRPr lang="en-US" sz="1600" dirty="0"/>
           </a:p>
@@ -6068,14 +7482,14 @@
       </p:sp>
       <p:sp>
         <p:nvSpPr>
-          <p:cNvPr id="7" name="Text 5"/>
-          <p:cNvSpPr/>
-          <p:nvPr/>
-        </p:nvSpPr>
-        <p:spPr>
-          <a:xfrm>
-            <a:off x="896112" y="3415284"/>
-            <a:ext cx="4806544" cy="1801368"/>
+          <p:cNvPr id="7" name="Text 4"/>
+          <p:cNvSpPr/>
+          <p:nvPr/>
+        </p:nvSpPr>
+        <p:spPr>
+          <a:xfrm>
+            <a:off x="914400" y="3218688"/>
+            <a:ext cx="4751680" cy="1938528"/>
           </a:xfrm>
           <a:prstGeom prst="rect">
             <a:avLst/>
@@ -6089,12 +7503,15 @@
           <a:p>
             <a:pPr indent="0" marL="0">
               <a:lnSpc>
-                <a:spcPct val="95000"/>
-              </a:lnSpc>
-              <a:buNone/>
-            </a:pPr>
-            <a:r>
-              <a:rPr lang="en-US" sz="1250" dirty="0">
+                <a:spcPct val="94000"/>
+              </a:lnSpc>
+              <a:spcAft>
+                <a:spcPts val="300"/>
+              </a:spcAft>
+              <a:buNone/>
+            </a:pPr>
+            <a:r>
+              <a:rPr lang="en-US" sz="1250" b="1" dirty="0">
                 <a:solidFill>
                   <a:srgbClr val="1B2733"/>
                 </a:solidFill>
@@ -6102,19 +7519,45 @@
                 <a:ea typeface="Yu Gothic" pitchFamily="34" charset="-122"/>
                 <a:cs typeface="Yu Gothic" pitchFamily="34" charset="-120"/>
               </a:rPr>
-              <a:t>現行犯逮捕、正当防衛、緊急避難。</a:t>
+              <a:t>・職務質問（第2条）</a:t>
             </a:r>
             <a:endParaRPr lang="en-US" sz="1250" dirty="0"/>
           </a:p>
           <a:p>
             <a:pPr indent="0" marL="0">
               <a:lnSpc>
-                <a:spcPct val="95000"/>
-              </a:lnSpc>
-              <a:buNone/>
-            </a:pPr>
-            <a:r>
-              <a:rPr lang="en-US" sz="1250" dirty="0">
+                <a:spcPct val="94000"/>
+              </a:lnSpc>
+              <a:spcAft>
+                <a:spcPts val="300"/>
+              </a:spcAft>
+              <a:buNone/>
+            </a:pPr>
+            <a:r>
+              <a:rPr lang="en-US" sz="950" i="1" dirty="0">
+                <a:solidFill>
+                  <a:srgbClr val="5F7183"/>
+                </a:solidFill>
+                <a:latin typeface="Calibri" pitchFamily="34" charset="0"/>
+                <a:ea typeface="Calibri" pitchFamily="34" charset="-122"/>
+                <a:cs typeface="Calibri" pitchFamily="34" charset="-120"/>
+              </a:rPr>
+              <a:t>　 Stop and question a person (Art. 2)</a:t>
+            </a:r>
+            <a:endParaRPr lang="en-US" sz="1250" dirty="0"/>
+          </a:p>
+          <a:p>
+            <a:pPr indent="0" marL="0">
+              <a:lnSpc>
+                <a:spcPct val="94000"/>
+              </a:lnSpc>
+              <a:spcAft>
+                <a:spcPts val="300"/>
+              </a:spcAft>
+              <a:buNone/>
+            </a:pPr>
+            <a:r>
+              <a:rPr lang="en-US" sz="1250" b="1" dirty="0">
                 <a:solidFill>
                   <a:srgbClr val="1B2733"/>
                 </a:solidFill>
@@ -6122,15 +7565,18 @@
                 <a:ea typeface="Yu Gothic" pitchFamily="34" charset="-122"/>
                 <a:cs typeface="Yu Gothic" pitchFamily="34" charset="-120"/>
               </a:rPr>
-              <a:t>これらは「警備員だから」ではなく、私人だからできることです。相手が誰であっても要件は変わりません。</a:t>
+              <a:t>・保護（第3条）、避難等の措置（第4条）</a:t>
             </a:r>
             <a:endParaRPr lang="en-US" sz="1250" dirty="0"/>
           </a:p>
           <a:p>
             <a:pPr indent="0" marL="0">
               <a:lnSpc>
-                <a:spcPct val="95000"/>
-              </a:lnSpc>
+                <a:spcPct val="94000"/>
+              </a:lnSpc>
+              <a:spcAft>
+                <a:spcPts val="300"/>
+              </a:spcAft>
               <a:buNone/>
             </a:pPr>
             <a:r>
@@ -6142,26 +7588,164 @@
                 <a:ea typeface="Calibri" pitchFamily="34" charset="-122"/>
                 <a:cs typeface="Calibri" pitchFamily="34" charset="-120"/>
               </a:rPr>
-              <a:t>Citizen's arrest, self-defence, necessity. These are available to you as a private citizen — not because you are a guard. The legal tests do not change.</a:t>
+              <a:t>　 Protective custody (Art. 3). Order evacuation (Art. 4)</a:t>
             </a:r>
             <a:endParaRPr lang="en-US" sz="1250" dirty="0"/>
           </a:p>
-        </p:txBody>
-      </p:sp>
-      <p:sp>
-        <p:nvSpPr>
-          <p:cNvPr id="8" name="Shape 6"/>
-          <p:cNvSpPr/>
-          <p:nvPr/>
-        </p:nvSpPr>
-        <p:spPr>
-          <a:xfrm>
-            <a:off x="6233008" y="2446020"/>
-            <a:ext cx="5318608" cy="2971800"/>
+          <a:p>
+            <a:pPr indent="0" marL="0">
+              <a:lnSpc>
+                <a:spcPct val="94000"/>
+              </a:lnSpc>
+              <a:spcAft>
+                <a:spcPts val="300"/>
+              </a:spcAft>
+              <a:buNone/>
+            </a:pPr>
+            <a:r>
+              <a:rPr lang="en-US" sz="1250" b="1" dirty="0">
+                <a:solidFill>
+                  <a:srgbClr val="1B2733"/>
+                </a:solidFill>
+                <a:latin typeface="Yu Gothic" pitchFamily="34" charset="0"/>
+                <a:ea typeface="Yu Gothic" pitchFamily="34" charset="-122"/>
+                <a:cs typeface="Yu Gothic" pitchFamily="34" charset="-120"/>
+              </a:rPr>
+              <a:t>・犯罪の予防及び制止（第5条）</a:t>
+            </a:r>
+            <a:endParaRPr lang="en-US" sz="1250" dirty="0"/>
+          </a:p>
+          <a:p>
+            <a:pPr indent="0" marL="0">
+              <a:lnSpc>
+                <a:spcPct val="94000"/>
+              </a:lnSpc>
+              <a:spcAft>
+                <a:spcPts val="300"/>
+              </a:spcAft>
+              <a:buNone/>
+            </a:pPr>
+            <a:r>
+              <a:rPr lang="en-US" sz="950" i="1" dirty="0">
+                <a:solidFill>
+                  <a:srgbClr val="5F7183"/>
+                </a:solidFill>
+                <a:latin typeface="Calibri" pitchFamily="34" charset="0"/>
+                <a:ea typeface="Calibri" pitchFamily="34" charset="-122"/>
+                <a:cs typeface="Calibri" pitchFamily="34" charset="-120"/>
+              </a:rPr>
+              <a:t>　 Prevent and stop a crime (Art. 5)</a:t>
+            </a:r>
+            <a:endParaRPr lang="en-US" sz="1250" dirty="0"/>
+          </a:p>
+          <a:p>
+            <a:pPr indent="0" marL="0">
+              <a:lnSpc>
+                <a:spcPct val="94000"/>
+              </a:lnSpc>
+              <a:spcAft>
+                <a:spcPts val="300"/>
+              </a:spcAft>
+              <a:buNone/>
+            </a:pPr>
+            <a:r>
+              <a:rPr lang="en-US" sz="1250" b="1" dirty="0">
+                <a:solidFill>
+                  <a:srgbClr val="1B2733"/>
+                </a:solidFill>
+                <a:latin typeface="Yu Gothic" pitchFamily="34" charset="0"/>
+                <a:ea typeface="Yu Gothic" pitchFamily="34" charset="-122"/>
+                <a:cs typeface="Yu Gothic" pitchFamily="34" charset="-120"/>
+              </a:rPr>
+              <a:t>・立入（第6条）、武器の使用（第7条）</a:t>
+            </a:r>
+            <a:endParaRPr lang="en-US" sz="1250" dirty="0"/>
+          </a:p>
+          <a:p>
+            <a:pPr indent="0" marL="0">
+              <a:lnSpc>
+                <a:spcPct val="94000"/>
+              </a:lnSpc>
+              <a:spcAft>
+                <a:spcPts val="300"/>
+              </a:spcAft>
+              <a:buNone/>
+            </a:pPr>
+            <a:r>
+              <a:rPr lang="en-US" sz="950" i="1" dirty="0">
+                <a:solidFill>
+                  <a:srgbClr val="5F7183"/>
+                </a:solidFill>
+                <a:latin typeface="Calibri" pitchFamily="34" charset="0"/>
+                <a:ea typeface="Calibri" pitchFamily="34" charset="-122"/>
+                <a:cs typeface="Calibri" pitchFamily="34" charset="-120"/>
+              </a:rPr>
+              <a:t>　 Enter premises (Art. 6). Use weapons (Art. 7)</a:t>
+            </a:r>
+            <a:endParaRPr lang="en-US" sz="1250" dirty="0"/>
+          </a:p>
+          <a:p>
+            <a:pPr indent="0" marL="0">
+              <a:lnSpc>
+                <a:spcPct val="94000"/>
+              </a:lnSpc>
+              <a:spcAft>
+                <a:spcPts val="300"/>
+              </a:spcAft>
+              <a:buNone/>
+            </a:pPr>
+            <a:r>
+              <a:rPr lang="en-US" sz="1250" b="1" dirty="0">
+                <a:solidFill>
+                  <a:srgbClr val="1B2733"/>
+                </a:solidFill>
+                <a:latin typeface="Yu Gothic" pitchFamily="34" charset="0"/>
+                <a:ea typeface="Yu Gothic" pitchFamily="34" charset="-122"/>
+                <a:cs typeface="Yu Gothic" pitchFamily="34" charset="-120"/>
+              </a:rPr>
+              <a:t>・逮捕状による逮捕、取り調べ</a:t>
+            </a:r>
+            <a:endParaRPr lang="en-US" sz="1250" dirty="0"/>
+          </a:p>
+          <a:p>
+            <a:pPr indent="0" marL="0">
+              <a:lnSpc>
+                <a:spcPct val="94000"/>
+              </a:lnSpc>
+              <a:spcAft>
+                <a:spcPts val="300"/>
+              </a:spcAft>
+              <a:buNone/>
+            </a:pPr>
+            <a:r>
+              <a:rPr lang="en-US" sz="950" i="1" dirty="0">
+                <a:solidFill>
+                  <a:srgbClr val="5F7183"/>
+                </a:solidFill>
+                <a:latin typeface="Calibri" pitchFamily="34" charset="0"/>
+                <a:ea typeface="Calibri" pitchFamily="34" charset="-122"/>
+                <a:cs typeface="Calibri" pitchFamily="34" charset="-120"/>
+              </a:rPr>
+              <a:t>　 Arrest by warrant. Interrogation</a:t>
+            </a:r>
+            <a:endParaRPr lang="en-US" sz="1250" dirty="0"/>
+          </a:p>
+        </p:txBody>
+      </p:sp>
+      <p:sp>
+        <p:nvSpPr>
+          <p:cNvPr id="8" name="Shape 5"/>
+          <p:cNvSpPr/>
+          <p:nvPr/>
+        </p:nvSpPr>
+        <p:spPr>
+          <a:xfrm>
+            <a:off x="6251296" y="2231136"/>
+            <a:ext cx="5300320" cy="3163824"/>
           </a:xfrm>
           <a:prstGeom prst="roundRect">
             <a:avLst>
-              <a:gd name="adj" fmla="val 1538"/>
+              <a:gd name="adj" fmla="val 1445"/>
             </a:avLst>
           </a:prstGeom>
           <a:solidFill>
@@ -6172,73 +7756,14 @@
       </p:sp>
       <p:sp>
         <p:nvSpPr>
-          <p:cNvPr id="9" name="Shape 7"/>
-          <p:cNvSpPr/>
-          <p:nvPr/>
-        </p:nvSpPr>
-        <p:spPr>
-          <a:xfrm>
-            <a:off x="6470752" y="2683764"/>
-            <a:ext cx="384048" cy="384048"/>
-          </a:xfrm>
-          <a:prstGeom prst="ellipse">
-            <a:avLst/>
-          </a:prstGeom>
-          <a:solidFill>
-            <a:srgbClr val="17AF98"/>
-          </a:solidFill>
-          <a:ln/>
-        </p:spPr>
-      </p:sp>
-      <p:sp>
-        <p:nvSpPr>
-          <p:cNvPr id="10" name="Text 8"/>
-          <p:cNvSpPr/>
-          <p:nvPr/>
-        </p:nvSpPr>
-        <p:spPr>
-          <a:xfrm>
-            <a:off x="6470752" y="2683764"/>
-            <a:ext cx="384048" cy="384048"/>
-          </a:xfrm>
-          <a:prstGeom prst="rect">
-            <a:avLst/>
-          </a:prstGeom>
-          <a:noFill/>
-          <a:ln/>
-        </p:spPr>
-        <p:txBody>
-          <a:bodyPr wrap="square" lIns="0" tIns="0" rIns="0" bIns="0" rtlCol="0" anchor="ctr"/>
-          <a:lstStyle/>
-          <a:p>
-            <a:pPr algn="ctr" indent="0" marL="0">
-              <a:buNone/>
-            </a:pPr>
-            <a:r>
-              <a:rPr lang="en-US" sz="1400" b="1" dirty="0">
-                <a:solidFill>
-                  <a:srgbClr val="FFFFFF"/>
-                </a:solidFill>
-                <a:latin typeface="Calibri" pitchFamily="34" charset="0"/>
-                <a:ea typeface="Calibri" pitchFamily="34" charset="-122"/>
-                <a:cs typeface="Calibri" pitchFamily="34" charset="-120"/>
-              </a:rPr>
-              <a:t>2</a:t>
-            </a:r>
-            <a:endParaRPr lang="en-US" sz="1400" dirty="0"/>
-          </a:p>
-        </p:txBody>
-      </p:sp>
-      <p:sp>
-        <p:nvSpPr>
-          <p:cNvPr id="11" name="Text 9"/>
-          <p:cNvSpPr/>
-          <p:nvPr/>
-        </p:nvSpPr>
-        <p:spPr>
-          <a:xfrm>
-            <a:off x="6982816" y="2665476"/>
-            <a:ext cx="4331056" cy="658368"/>
+          <p:cNvPr id="9" name="Text 6"/>
+          <p:cNvSpPr/>
+          <p:nvPr/>
+        </p:nvSpPr>
+        <p:spPr>
+          <a:xfrm>
+            <a:off x="6525616" y="2450592"/>
+            <a:ext cx="4751680" cy="676656"/>
           </a:xfrm>
           <a:prstGeom prst="rect">
             <a:avLst/>
@@ -6259,13 +7784,13 @@
             <a:r>
               <a:rPr lang="en-US" sz="1600" b="1" dirty="0">
                 <a:solidFill>
-                  <a:srgbClr val="0F2D52"/>
+                  <a:srgbClr val="0D8A76"/>
                 </a:solidFill>
                 <a:latin typeface="Yu Gothic" pitchFamily="34" charset="0"/>
                 <a:ea typeface="Yu Gothic" pitchFamily="34" charset="-122"/>
                 <a:cs typeface="Yu Gothic" pitchFamily="34" charset="-120"/>
               </a:rPr>
-              <a:t>管理権者から委ねられたこと</a:t>
+              <a:t>警備員にある権限</a:t>
             </a:r>
             <a:endParaRPr lang="en-US" sz="1600" dirty="0"/>
           </a:p>
@@ -6279,13 +7804,13 @@
             <a:r>
               <a:rPr lang="en-US" sz="1000" i="1" dirty="0">
                 <a:solidFill>
-                  <a:srgbClr val="17AF98"/>
-                </a:solidFill>
-                <a:latin typeface="Calibri" pitchFamily="34" charset="0"/>
-                <a:ea typeface="Calibri" pitchFamily="34" charset="-122"/>
-                <a:cs typeface="Calibri" pitchFamily="34" charset="-120"/>
-              </a:rPr>
-              <a:t>What the site's authority has delegated</a:t>
+                  <a:srgbClr val="5F7183"/>
+                </a:solidFill>
+                <a:latin typeface="Calibri" pitchFamily="34" charset="0"/>
+                <a:ea typeface="Calibri" pitchFamily="34" charset="-122"/>
+                <a:cs typeface="Calibri" pitchFamily="34" charset="-120"/>
+              </a:rPr>
+              <a:t>What a security guard has</a:t>
             </a:r>
             <a:endParaRPr lang="en-US" sz="1600" dirty="0"/>
           </a:p>
@@ -6293,14 +7818,14 @@
       </p:sp>
       <p:sp>
         <p:nvSpPr>
-          <p:cNvPr id="12" name="Text 10"/>
-          <p:cNvSpPr/>
-          <p:nvPr/>
-        </p:nvSpPr>
-        <p:spPr>
-          <a:xfrm>
-            <a:off x="6489040" y="3415284"/>
-            <a:ext cx="4806544" cy="1801368"/>
+          <p:cNvPr id="10" name="Text 7"/>
+          <p:cNvSpPr/>
+          <p:nvPr/>
+        </p:nvSpPr>
+        <p:spPr>
+          <a:xfrm>
+            <a:off x="6525616" y="3218688"/>
+            <a:ext cx="4751680" cy="1938528"/>
           </a:xfrm>
           <a:prstGeom prst="rect">
             <a:avLst/>
@@ -6314,12 +7839,15 @@
           <a:p>
             <a:pPr indent="0" marL="0">
               <a:lnSpc>
-                <a:spcPct val="95000"/>
-              </a:lnSpc>
-              <a:buNone/>
-            </a:pPr>
-            <a:r>
-              <a:rPr lang="en-US" sz="1250" dirty="0">
+                <a:spcPct val="94000"/>
+              </a:lnSpc>
+              <a:spcAft>
+                <a:spcPts val="300"/>
+              </a:spcAft>
+              <a:buNone/>
+            </a:pPr>
+            <a:r>
+              <a:rPr lang="en-US" sz="1250" b="1" dirty="0">
                 <a:solidFill>
                   <a:srgbClr val="1B2733"/>
                 </a:solidFill>
@@ -6327,19 +7855,45 @@
                 <a:ea typeface="Yu Gothic" pitchFamily="34" charset="-122"/>
                 <a:cs typeface="Yu Gothic" pitchFamily="34" charset="-120"/>
               </a:rPr>
-              <a:t>入館の可否、退去の要請、立入制限、記録。</a:t>
+              <a:t>・左の権限は、いずれもありません</a:t>
             </a:r>
             <a:endParaRPr lang="en-US" sz="1250" dirty="0"/>
           </a:p>
           <a:p>
             <a:pPr indent="0" marL="0">
               <a:lnSpc>
-                <a:spcPct val="95000"/>
-              </a:lnSpc>
-              <a:buNone/>
-            </a:pPr>
-            <a:r>
-              <a:rPr lang="en-US" sz="1250" dirty="0">
+                <a:spcPct val="94000"/>
+              </a:lnSpc>
+              <a:spcAft>
+                <a:spcPts val="300"/>
+              </a:spcAft>
+              <a:buNone/>
+            </a:pPr>
+            <a:r>
+              <a:rPr lang="en-US" sz="950" i="1" dirty="0">
+                <a:solidFill>
+                  <a:srgbClr val="5F7183"/>
+                </a:solidFill>
+                <a:latin typeface="Calibri" pitchFamily="34" charset="0"/>
+                <a:ea typeface="Calibri" pitchFamily="34" charset="-122"/>
+                <a:cs typeface="Calibri" pitchFamily="34" charset="-120"/>
+              </a:rPr>
+              <a:t>　 None of the powers on the left</a:t>
+            </a:r>
+            <a:endParaRPr lang="en-US" sz="1250" dirty="0"/>
+          </a:p>
+          <a:p>
+            <a:pPr indent="0" marL="0">
+              <a:lnSpc>
+                <a:spcPct val="94000"/>
+              </a:lnSpc>
+              <a:spcAft>
+                <a:spcPts val="300"/>
+              </a:spcAft>
+              <a:buNone/>
+            </a:pPr>
+            <a:r>
+              <a:rPr lang="en-US" sz="1250" b="1" dirty="0">
                 <a:solidFill>
                   <a:srgbClr val="1B2733"/>
                 </a:solidFill>
@@ -6347,15 +7901,18 @@
                 <a:ea typeface="Yu Gothic" pitchFamily="34" charset="-122"/>
                 <a:cs typeface="Yu Gothic" pitchFamily="34" charset="-120"/>
               </a:rPr>
-              <a:t>委ねられた範囲を超えることはできません。範囲は契約と指令書で決まります。</a:t>
+              <a:t>・現行犯逮捕（刑訴法213条）― 誰でもできる</a:t>
             </a:r>
             <a:endParaRPr lang="en-US" sz="1250" dirty="0"/>
           </a:p>
           <a:p>
             <a:pPr indent="0" marL="0">
               <a:lnSpc>
-                <a:spcPct val="95000"/>
-              </a:lnSpc>
+                <a:spcPct val="94000"/>
+              </a:lnSpc>
+              <a:spcAft>
+                <a:spcPts val="300"/>
+              </a:spcAft>
               <a:buNone/>
             </a:pPr>
             <a:r>
@@ -6367,45 +7924,245 @@
                 <a:ea typeface="Calibri" pitchFamily="34" charset="-122"/>
                 <a:cs typeface="Calibri" pitchFamily="34" charset="-120"/>
               </a:rPr>
-              <a:t>Admission, requests to leave, access restriction, record-keeping. You cannot exceed what was delegated — and the scope is set by the contract and post orders.</a:t>
+              <a:t>　 Arrest of a flagrant offender — anyone may do this</a:t>
             </a:r>
             <a:endParaRPr lang="en-US" sz="1250" dirty="0"/>
           </a:p>
-        </p:txBody>
-      </p:sp>
-      <p:sp>
-        <p:nvSpPr>
-          <p:cNvPr id="13" name="Text 11"/>
-          <p:cNvSpPr/>
-          <p:nvPr/>
-        </p:nvSpPr>
-        <p:spPr>
-          <a:xfrm>
-            <a:off x="640080" y="6382512"/>
-            <a:ext cx="8778240" cy="292608"/>
-          </a:xfrm>
-          <a:prstGeom prst="rect">
-            <a:avLst/>
-          </a:prstGeom>
-          <a:noFill/>
-          <a:ln/>
-        </p:spPr>
-        <p:txBody>
-          <a:bodyPr wrap="square" lIns="0" tIns="0" rIns="0" bIns="0" rtlCol="0" anchor="ctr"/>
-          <a:lstStyle/>
-          <a:p>
-            <a:pPr indent="0" marL="0">
-              <a:buNone/>
-            </a:pPr>
-            <a:r>
-              <a:rPr lang="en-US" sz="900" dirty="0">
-                <a:solidFill>
-                  <a:srgbClr val="5F7183"/>
+          <a:p>
+            <a:pPr indent="0" marL="0">
+              <a:lnSpc>
+                <a:spcPct val="94000"/>
+              </a:lnSpc>
+              <a:spcAft>
+                <a:spcPts val="300"/>
+              </a:spcAft>
+              <a:buNone/>
+            </a:pPr>
+            <a:r>
+              <a:rPr lang="en-US" sz="1250" b="1" dirty="0">
+                <a:solidFill>
+                  <a:srgbClr val="1B2733"/>
                 </a:solidFill>
                 <a:latin typeface="Yu Gothic" pitchFamily="34" charset="0"/>
                 <a:ea typeface="Yu Gothic" pitchFamily="34" charset="-122"/>
                 <a:cs typeface="Yu Gothic" pitchFamily="34" charset="-120"/>
               </a:rPr>
+              <a:t>・正当防衛（刑法36条）、緊急避難（37条）― 誰でもできる</a:t>
+            </a:r>
+            <a:endParaRPr lang="en-US" sz="1250" dirty="0"/>
+          </a:p>
+          <a:p>
+            <a:pPr indent="0" marL="0">
+              <a:lnSpc>
+                <a:spcPct val="94000"/>
+              </a:lnSpc>
+              <a:spcAft>
+                <a:spcPts val="300"/>
+              </a:spcAft>
+              <a:buNone/>
+            </a:pPr>
+            <a:r>
+              <a:rPr lang="en-US" sz="950" i="1" dirty="0">
+                <a:solidFill>
+                  <a:srgbClr val="5F7183"/>
+                </a:solidFill>
+                <a:latin typeface="Calibri" pitchFamily="34" charset="0"/>
+                <a:ea typeface="Calibri" pitchFamily="34" charset="-122"/>
+                <a:cs typeface="Calibri" pitchFamily="34" charset="-120"/>
+              </a:rPr>
+              <a:t>　 Self-defence and necessity — anyone may do this</a:t>
+            </a:r>
+            <a:endParaRPr lang="en-US" sz="1250" dirty="0"/>
+          </a:p>
+          <a:p>
+            <a:pPr indent="0" marL="0">
+              <a:lnSpc>
+                <a:spcPct val="94000"/>
+              </a:lnSpc>
+              <a:spcAft>
+                <a:spcPts val="300"/>
+              </a:spcAft>
+              <a:buNone/>
+            </a:pPr>
+            <a:r>
+              <a:rPr lang="en-US" sz="1250" b="1" dirty="0">
+                <a:solidFill>
+                  <a:srgbClr val="1B2733"/>
+                </a:solidFill>
+                <a:latin typeface="Yu Gothic" pitchFamily="34" charset="0"/>
+                <a:ea typeface="Yu Gothic" pitchFamily="34" charset="-122"/>
+                <a:cs typeface="Yu Gothic" pitchFamily="34" charset="-120"/>
+              </a:rPr>
+              <a:t>・管理権者から委ねられた範囲</a:t>
+            </a:r>
+            <a:endParaRPr lang="en-US" sz="1250" dirty="0"/>
+          </a:p>
+          <a:p>
+            <a:pPr indent="0" marL="0">
+              <a:lnSpc>
+                <a:spcPct val="94000"/>
+              </a:lnSpc>
+              <a:spcAft>
+                <a:spcPts val="300"/>
+              </a:spcAft>
+              <a:buNone/>
+            </a:pPr>
+            <a:r>
+              <a:rPr lang="en-US" sz="950" i="1" dirty="0">
+                <a:solidFill>
+                  <a:srgbClr val="5F7183"/>
+                </a:solidFill>
+                <a:latin typeface="Calibri" pitchFamily="34" charset="0"/>
+                <a:ea typeface="Calibri" pitchFamily="34" charset="-122"/>
+                <a:cs typeface="Calibri" pitchFamily="34" charset="-120"/>
+              </a:rPr>
+              <a:t>　 What the site authority has delegated</a:t>
+            </a:r>
+            <a:endParaRPr lang="en-US" sz="1250" dirty="0"/>
+          </a:p>
+          <a:p>
+            <a:pPr indent="0" marL="0">
+              <a:lnSpc>
+                <a:spcPct val="94000"/>
+              </a:lnSpc>
+              <a:spcAft>
+                <a:spcPts val="300"/>
+              </a:spcAft>
+              <a:buNone/>
+            </a:pPr>
+            <a:r>
+              <a:rPr lang="en-US" sz="1250" b="1" dirty="0">
+                <a:solidFill>
+                  <a:srgbClr val="1B2733"/>
+                </a:solidFill>
+                <a:latin typeface="Yu Gothic" pitchFamily="34" charset="0"/>
+                <a:ea typeface="Yu Gothic" pitchFamily="34" charset="-122"/>
+                <a:cs typeface="Yu Gothic" pitchFamily="34" charset="-120"/>
+              </a:rPr>
+              <a:t>・その範囲は契約と警備指令書で決まります</a:t>
+            </a:r>
+            <a:endParaRPr lang="en-US" sz="1250" dirty="0"/>
+          </a:p>
+          <a:p>
+            <a:pPr indent="0" marL="0">
+              <a:lnSpc>
+                <a:spcPct val="94000"/>
+              </a:lnSpc>
+              <a:spcAft>
+                <a:spcPts val="300"/>
+              </a:spcAft>
+              <a:buNone/>
+            </a:pPr>
+            <a:r>
+              <a:rPr lang="en-US" sz="950" i="1" dirty="0">
+                <a:solidFill>
+                  <a:srgbClr val="5F7183"/>
+                </a:solidFill>
+                <a:latin typeface="Calibri" pitchFamily="34" charset="0"/>
+                <a:ea typeface="Calibri" pitchFamily="34" charset="-122"/>
+                <a:cs typeface="Calibri" pitchFamily="34" charset="-120"/>
+              </a:rPr>
+              <a:t>　 That scope is set by the contract and the post orders</a:t>
+            </a:r>
+            <a:endParaRPr lang="en-US" sz="1250" dirty="0"/>
+          </a:p>
+        </p:txBody>
+      </p:sp>
+      <p:sp>
+        <p:nvSpPr>
+          <p:cNvPr id="11" name="Text 8"/>
+          <p:cNvSpPr/>
+          <p:nvPr/>
+        </p:nvSpPr>
+        <p:spPr>
+          <a:xfrm>
+            <a:off x="640080" y="5614416"/>
+            <a:ext cx="10911535" cy="621792"/>
+          </a:xfrm>
+          <a:prstGeom prst="rect">
+            <a:avLst/>
+          </a:prstGeom>
+          <a:noFill/>
+          <a:ln/>
+        </p:spPr>
+        <p:txBody>
+          <a:bodyPr wrap="square" lIns="0" tIns="0" rIns="0" bIns="0" rtlCol="0" anchor="t"/>
+          <a:lstStyle/>
+          <a:p>
+            <a:pPr algn="l" indent="0" marL="0">
+              <a:lnSpc>
+                <a:spcPct val="92000"/>
+              </a:lnSpc>
+              <a:buNone/>
+            </a:pPr>
+            <a:r>
+              <a:rPr lang="en-US" sz="1300" b="1" dirty="0">
+                <a:solidFill>
+                  <a:srgbClr val="0D8A76"/>
+                </a:solidFill>
+                <a:latin typeface="Yu Gothic" pitchFamily="34" charset="0"/>
+                <a:ea typeface="Yu Gothic" pitchFamily="34" charset="-122"/>
+                <a:cs typeface="Yu Gothic" pitchFamily="34" charset="-120"/>
+              </a:rPr>
+              <a:t>警備業法第16条 ― 警備員の服装は、警察官など公務員の制服と明確に識別できるものでなければなりません。</a:t>
+            </a:r>
+            <a:endParaRPr lang="en-US" sz="1300" dirty="0"/>
+          </a:p>
+          <a:p>
+            <a:pPr algn="l" indent="0" marL="0">
+              <a:lnSpc>
+                <a:spcPct val="92000"/>
+              </a:lnSpc>
+              <a:buNone/>
+            </a:pPr>
+            <a:r>
+              <a:rPr lang="en-US" sz="1000" i="1" dirty="0">
+                <a:solidFill>
+                  <a:srgbClr val="5F7183"/>
+                </a:solidFill>
+                <a:latin typeface="Calibri" pitchFamily="34" charset="0"/>
+                <a:ea typeface="Calibri" pitchFamily="34" charset="-122"/>
+                <a:cs typeface="Calibri" pitchFamily="34" charset="-120"/>
+              </a:rPr>
+              <a:t>Security Services Act Art. 16 — a guard's uniform must be clearly distinguishable from the uniform of a police officer or other public official.</a:t>
+            </a:r>
+            <a:endParaRPr lang="en-US" sz="1300" dirty="0"/>
+          </a:p>
+        </p:txBody>
+      </p:sp>
+      <p:sp>
+        <p:nvSpPr>
+          <p:cNvPr id="12" name="Text 9"/>
+          <p:cNvSpPr/>
+          <p:nvPr/>
+        </p:nvSpPr>
+        <p:spPr>
+          <a:xfrm>
+            <a:off x="640080" y="6382512"/>
+            <a:ext cx="8778240" cy="292608"/>
+          </a:xfrm>
+          <a:prstGeom prst="rect">
+            <a:avLst/>
+          </a:prstGeom>
+          <a:noFill/>
+          <a:ln/>
+        </p:spPr>
+        <p:txBody>
+          <a:bodyPr wrap="square" lIns="0" tIns="0" rIns="0" bIns="0" rtlCol="0" anchor="ctr"/>
+          <a:lstStyle/>
+          <a:p>
+            <a:pPr indent="0" marL="0">
+              <a:buNone/>
+            </a:pPr>
+            <a:r>
+              <a:rPr lang="en-US" sz="900" dirty="0">
+                <a:solidFill>
+                  <a:srgbClr val="5F7183"/>
+                </a:solidFill>
+                <a:latin typeface="Yu Gothic" pitchFamily="34" charset="0"/>
+                <a:ea typeface="Yu Gothic" pitchFamily="34" charset="-122"/>
+                <a:cs typeface="Yu Gothic" pitchFamily="34" charset="-120"/>
+              </a:rPr>
               <a:t>第1時限｜基本教育1 警備業務実施の基本原則  </a:t>
             </a:r>
             <a:pPr indent="0" marL="0">
@@ -6428,7 +8185,7 @@
       </p:sp>
       <p:sp>
         <p:nvSpPr>
-          <p:cNvPr id="14" name="Text 12"/>
+          <p:cNvPr id="13" name="Text 10"/>
           <p:cNvSpPr/>
           <p:nvPr/>
         </p:nvSpPr>
@@ -6497,9 +8254,33 @@
           <a:chExt cx="0" cy="0"/>
         </a:xfrm>
       </p:grpSpPr>
-      <p:sp>
-        <p:nvSpPr>
-          <p:cNvPr id="2" name="Text 0"/>
+      <p:pic>
+        <p:nvPicPr>
+          <p:cNvPr id="2" name="Image 0" descr="/home/user/Training-/assets/logo.png">    </p:cNvPr>
+          <p:cNvPicPr>
+            <a:picLocks noChangeAspect="1"/>
+          </p:cNvPicPr>
+          <p:nvPr/>
+        </p:nvPicPr>
+        <p:blipFill>
+          <a:blip r:embed="rId1"/>
+          <a:stretch>
+            <a:fillRect/>
+          </a:stretch>
+        </p:blipFill>
+        <p:spPr>
+          <a:xfrm>
+            <a:off x="10765231" y="332912"/>
+            <a:ext cx="786384" cy="742353"/>
+          </a:xfrm>
+          <a:prstGeom prst="rect">
+            <a:avLst/>
+          </a:prstGeom>
+        </p:spPr>
+      </p:pic>
+      <p:sp>
+        <p:nvSpPr>
+          <p:cNvPr id="3" name="Text 0"/>
           <p:cNvSpPr/>
           <p:nvPr/>
         </p:nvSpPr>
@@ -6527,13 +8308,13 @@
             <a:r>
               <a:rPr lang="en-US" sz="2700" b="1" dirty="0">
                 <a:solidFill>
-                  <a:srgbClr val="0F2D52"/>
+                  <a:srgbClr val="093259"/>
                 </a:solidFill>
                 <a:latin typeface="Yu Gothic" pitchFamily="34" charset="0"/>
                 <a:ea typeface="Yu Gothic" pitchFamily="34" charset="-122"/>
                 <a:cs typeface="Yu Gothic" pitchFamily="34" charset="-120"/>
               </a:rPr>
-              <a:t>ミニTTX ― ○か×か、根拠を一言で</a:t>
+              <a:t>権限の根拠は2つだけ</a:t>
             </a:r>
             <a:endParaRPr lang="en-US" sz="2700" dirty="0"/>
           </a:p>
@@ -6547,13 +8328,13 @@
             <a:r>
               <a:rPr lang="en-US" sz="1250" i="1" dirty="0">
                 <a:solidFill>
-                  <a:srgbClr val="17AF98"/>
-                </a:solidFill>
-                <a:latin typeface="Calibri" pitchFamily="34" charset="0"/>
-                <a:ea typeface="Calibri" pitchFamily="34" charset="-122"/>
-                <a:cs typeface="Calibri" pitchFamily="34" charset="-120"/>
-              </a:rPr>
-              <a:t>Mini TTX — Yes or No, and state your reason in one line</a:t>
+                  <a:srgbClr val="12B198"/>
+                </a:solidFill>
+                <a:latin typeface="Calibri" pitchFamily="34" charset="0"/>
+                <a:ea typeface="Calibri" pitchFamily="34" charset="-122"/>
+                <a:cs typeface="Calibri" pitchFamily="34" charset="-120"/>
+              </a:rPr>
+              <a:t>Your Authority Has Only Two Sources</a:t>
             </a:r>
             <a:endParaRPr lang="en-US" sz="2700" dirty="0"/>
           </a:p>
@@ -6561,14 +8342,95 @@
       </p:sp>
       <p:sp>
         <p:nvSpPr>
-          <p:cNvPr id="3" name="Text 1"/>
-          <p:cNvSpPr/>
-          <p:nvPr/>
-        </p:nvSpPr>
-        <p:spPr>
-          <a:xfrm>
-            <a:off x="640080" y="1499616"/>
-            <a:ext cx="10911535" cy="512064"/>
+          <p:cNvPr id="4" name="Shape 1"/>
+          <p:cNvSpPr/>
+          <p:nvPr/>
+        </p:nvSpPr>
+        <p:spPr>
+          <a:xfrm>
+            <a:off x="640080" y="2446020"/>
+            <a:ext cx="5318608" cy="2971800"/>
+          </a:xfrm>
+          <a:prstGeom prst="roundRect">
+            <a:avLst>
+              <a:gd name="adj" fmla="val 1538"/>
+            </a:avLst>
+          </a:prstGeom>
+          <a:solidFill>
+            <a:srgbClr val="EFF4F8"/>
+          </a:solidFill>
+          <a:ln/>
+        </p:spPr>
+      </p:sp>
+      <p:sp>
+        <p:nvSpPr>
+          <p:cNvPr id="5" name="Shape 2"/>
+          <p:cNvSpPr/>
+          <p:nvPr/>
+        </p:nvSpPr>
+        <p:spPr>
+          <a:xfrm>
+            <a:off x="877824" y="2683764"/>
+            <a:ext cx="384048" cy="384048"/>
+          </a:xfrm>
+          <a:prstGeom prst="ellipse">
+            <a:avLst/>
+          </a:prstGeom>
+          <a:solidFill>
+            <a:srgbClr val="093259"/>
+          </a:solidFill>
+          <a:ln/>
+        </p:spPr>
+      </p:sp>
+      <p:sp>
+        <p:nvSpPr>
+          <p:cNvPr id="6" name="Text 3"/>
+          <p:cNvSpPr/>
+          <p:nvPr/>
+        </p:nvSpPr>
+        <p:spPr>
+          <a:xfrm>
+            <a:off x="877824" y="2683764"/>
+            <a:ext cx="384048" cy="384048"/>
+          </a:xfrm>
+          <a:prstGeom prst="rect">
+            <a:avLst/>
+          </a:prstGeom>
+          <a:noFill/>
+          <a:ln/>
+        </p:spPr>
+        <p:txBody>
+          <a:bodyPr wrap="square" lIns="0" tIns="0" rIns="0" bIns="0" rtlCol="0" anchor="ctr"/>
+          <a:lstStyle/>
+          <a:p>
+            <a:pPr algn="ctr" indent="0" marL="0">
+              <a:buNone/>
+            </a:pPr>
+            <a:r>
+              <a:rPr lang="en-US" sz="1400" b="1" dirty="0">
+                <a:solidFill>
+                  <a:srgbClr val="FFFFFF"/>
+                </a:solidFill>
+                <a:latin typeface="Calibri" pitchFamily="34" charset="0"/>
+                <a:ea typeface="Calibri" pitchFamily="34" charset="-122"/>
+                <a:cs typeface="Calibri" pitchFamily="34" charset="-120"/>
+              </a:rPr>
+              <a:t>1</a:t>
+            </a:r>
+            <a:endParaRPr lang="en-US" sz="1400" dirty="0"/>
+          </a:p>
+        </p:txBody>
+      </p:sp>
+      <p:sp>
+        <p:nvSpPr>
+          <p:cNvPr id="7" name="Text 4"/>
+          <p:cNvSpPr/>
+          <p:nvPr/>
+        </p:nvSpPr>
+        <p:spPr>
+          <a:xfrm>
+            <a:off x="1389888" y="2665476"/>
+            <a:ext cx="4331056" cy="658368"/>
           </a:xfrm>
           <a:prstGeom prst="rect">
             <a:avLst/>
@@ -6580,157 +8442,76 @@
           <a:bodyPr wrap="square" lIns="0" tIns="0" rIns="0" bIns="0" rtlCol="0" anchor="t"/>
           <a:lstStyle/>
           <a:p>
-            <a:pPr algn="l" indent="0" marL="0">
-              <a:lnSpc>
-                <a:spcPct val="92000"/>
-              </a:lnSpc>
-              <a:buNone/>
-            </a:pPr>
-            <a:r>
-              <a:rPr lang="en-US" sz="1300" dirty="0">
-                <a:solidFill>
-                  <a:srgbClr val="0F2D52"/>
+            <a:pPr indent="0" marL="0">
+              <a:lnSpc>
+                <a:spcPct val="90000"/>
+              </a:lnSpc>
+              <a:buNone/>
+            </a:pPr>
+            <a:r>
+              <a:rPr lang="en-US" sz="1600" b="1" dirty="0">
+                <a:solidFill>
+                  <a:srgbClr val="093259"/>
                 </a:solidFill>
                 <a:latin typeface="Yu Gothic" pitchFamily="34" charset="0"/>
                 <a:ea typeface="Yu Gothic" pitchFamily="34" charset="-122"/>
                 <a:cs typeface="Yu Gothic" pitchFamily="34" charset="-120"/>
               </a:rPr>
-              <a:t>手元に○×と根拠を書いてください。挙手は求めません。指名します。</a:t>
-            </a:r>
-            <a:endParaRPr lang="en-US" sz="1300" dirty="0"/>
-          </a:p>
-          <a:p>
-            <a:pPr algn="l" indent="0" marL="0">
-              <a:lnSpc>
-                <a:spcPct val="92000"/>
+              <a:t>誰でもできること</a:t>
+            </a:r>
+            <a:endParaRPr lang="en-US" sz="1600" dirty="0"/>
+          </a:p>
+          <a:p>
+            <a:pPr indent="0" marL="0">
+              <a:lnSpc>
+                <a:spcPct val="90000"/>
               </a:lnSpc>
               <a:buNone/>
             </a:pPr>
             <a:r>
               <a:rPr lang="en-US" sz="1000" i="1" dirty="0">
                 <a:solidFill>
-                  <a:srgbClr val="5F7183"/>
-                </a:solidFill>
-                <a:latin typeface="Calibri" pitchFamily="34" charset="0"/>
-                <a:ea typeface="Calibri" pitchFamily="34" charset="-122"/>
-                <a:cs typeface="Calibri" pitchFamily="34" charset="-120"/>
-              </a:rPr>
-              <a:t>Write your answer and your reason. No hands needed — I will call on you.</a:t>
-            </a:r>
-            <a:endParaRPr lang="en-US" sz="1300" dirty="0"/>
-          </a:p>
-        </p:txBody>
-      </p:sp>
-      <p:sp>
-        <p:nvSpPr>
-          <p:cNvPr id="4" name="Shape 2"/>
-          <p:cNvSpPr/>
-          <p:nvPr/>
-        </p:nvSpPr>
-        <p:spPr>
-          <a:xfrm>
-            <a:off x="640080" y="2194560"/>
-            <a:ext cx="5318608" cy="900684"/>
-          </a:xfrm>
-          <a:prstGeom prst="roundRect">
-            <a:avLst>
-              <a:gd name="adj" fmla="val 4061"/>
-            </a:avLst>
-          </a:prstGeom>
-          <a:solidFill>
-            <a:srgbClr val="EFF4F8"/>
-          </a:solidFill>
-          <a:ln/>
-        </p:spPr>
-      </p:sp>
-      <p:sp>
-        <p:nvSpPr>
-          <p:cNvPr id="5" name="Shape 3"/>
-          <p:cNvSpPr/>
-          <p:nvPr/>
-        </p:nvSpPr>
-        <p:spPr>
-          <a:xfrm>
-            <a:off x="822960" y="2480310"/>
-            <a:ext cx="329184" cy="329184"/>
-          </a:xfrm>
-          <a:prstGeom prst="ellipse">
-            <a:avLst/>
-          </a:prstGeom>
-          <a:solidFill>
-            <a:srgbClr val="0F2D52"/>
-          </a:solidFill>
-          <a:ln/>
-        </p:spPr>
-      </p:sp>
-      <p:sp>
-        <p:nvSpPr>
-          <p:cNvPr id="6" name="Text 4"/>
-          <p:cNvSpPr/>
-          <p:nvPr/>
-        </p:nvSpPr>
-        <p:spPr>
-          <a:xfrm>
-            <a:off x="822960" y="2480310"/>
-            <a:ext cx="329184" cy="329184"/>
-          </a:xfrm>
-          <a:prstGeom prst="rect">
-            <a:avLst/>
-          </a:prstGeom>
-          <a:noFill/>
-          <a:ln/>
-        </p:spPr>
-        <p:txBody>
-          <a:bodyPr wrap="square" lIns="0" tIns="0" rIns="0" bIns="0" rtlCol="0" anchor="ctr"/>
-          <a:lstStyle/>
-          <a:p>
-            <a:pPr algn="ctr" indent="0" marL="0">
-              <a:buNone/>
-            </a:pPr>
-            <a:r>
-              <a:rPr lang="en-US" sz="1100" b="1" dirty="0">
-                <a:solidFill>
-                  <a:srgbClr val="FFFFFF"/>
-                </a:solidFill>
-                <a:latin typeface="Calibri" pitchFamily="34" charset="0"/>
-                <a:ea typeface="Calibri" pitchFamily="34" charset="-122"/>
-                <a:cs typeface="Calibri" pitchFamily="34" charset="-120"/>
-              </a:rPr>
-              <a:t>1</a:t>
-            </a:r>
-            <a:endParaRPr lang="en-US" sz="1100" dirty="0"/>
-          </a:p>
-        </p:txBody>
-      </p:sp>
-      <p:sp>
-        <p:nvSpPr>
-          <p:cNvPr id="7" name="Text 5"/>
-          <p:cNvSpPr/>
-          <p:nvPr/>
-        </p:nvSpPr>
-        <p:spPr>
-          <a:xfrm>
-            <a:off x="1243584" y="2267712"/>
-            <a:ext cx="4477360" cy="754380"/>
-          </a:xfrm>
-          <a:prstGeom prst="rect">
-            <a:avLst/>
-          </a:prstGeom>
-          <a:noFill/>
-          <a:ln/>
-        </p:spPr>
-        <p:txBody>
-          <a:bodyPr wrap="square" lIns="0" tIns="0" rIns="0" bIns="0" rtlCol="0" anchor="ctr"/>
-          <a:lstStyle/>
-          <a:p>
-            <a:pPr indent="0" marL="0">
-              <a:lnSpc>
-                <a:spcPct val="90000"/>
-              </a:lnSpc>
-              <a:buNone/>
-            </a:pPr>
-            <a:r>
-              <a:rPr lang="en-US" sz="1150" b="1" dirty="0">
+                  <a:srgbClr val="12B198"/>
+                </a:solidFill>
+                <a:latin typeface="Calibri" pitchFamily="34" charset="0"/>
+                <a:ea typeface="Calibri" pitchFamily="34" charset="-122"/>
+                <a:cs typeface="Calibri" pitchFamily="34" charset="-120"/>
+              </a:rPr>
+              <a:t>What any person may do</a:t>
+            </a:r>
+            <a:endParaRPr lang="en-US" sz="1600" dirty="0"/>
+          </a:p>
+        </p:txBody>
+      </p:sp>
+      <p:sp>
+        <p:nvSpPr>
+          <p:cNvPr id="8" name="Text 5"/>
+          <p:cNvSpPr/>
+          <p:nvPr/>
+        </p:nvSpPr>
+        <p:spPr>
+          <a:xfrm>
+            <a:off x="896112" y="3415284"/>
+            <a:ext cx="4806544" cy="1801368"/>
+          </a:xfrm>
+          <a:prstGeom prst="rect">
+            <a:avLst/>
+          </a:prstGeom>
+          <a:noFill/>
+          <a:ln/>
+        </p:spPr>
+        <p:txBody>
+          <a:bodyPr wrap="square" lIns="0" tIns="0" rIns="0" bIns="0" rtlCol="0" anchor="t"/>
+          <a:lstStyle/>
+          <a:p>
+            <a:pPr indent="0" marL="0">
+              <a:lnSpc>
+                <a:spcPct val="95000"/>
+              </a:lnSpc>
+              <a:buNone/>
+            </a:pPr>
+            <a:r>
+              <a:rPr lang="en-US" sz="1250" dirty="0">
                 <a:solidFill>
                   <a:srgbClr val="1B2733"/>
                 </a:solidFill>
@@ -6738,142 +8519,19 @@
                 <a:ea typeface="Yu Gothic" pitchFamily="34" charset="-122"/>
                 <a:cs typeface="Yu Gothic" pitchFamily="34" charset="-120"/>
               </a:rPr>
-              <a:t>制服を着ているので、来訪者のカバンを開けて確認した。</a:t>
-            </a:r>
-            <a:endParaRPr lang="en-US" sz="1150" dirty="0"/>
-          </a:p>
-          <a:p>
-            <a:pPr indent="0" marL="0">
-              <a:lnSpc>
-                <a:spcPct val="90000"/>
-              </a:lnSpc>
-              <a:buNone/>
-            </a:pPr>
-            <a:r>
-              <a:rPr lang="en-US" sz="900" i="1" dirty="0">
-                <a:solidFill>
-                  <a:srgbClr val="5F7183"/>
-                </a:solidFill>
-                <a:latin typeface="Calibri" pitchFamily="34" charset="0"/>
-                <a:ea typeface="Calibri" pitchFamily="34" charset="-122"/>
-                <a:cs typeface="Calibri" pitchFamily="34" charset="-120"/>
-              </a:rPr>
-              <a:t>In uniform, you open a visitor's bag to check it.</a:t>
-            </a:r>
-            <a:endParaRPr lang="en-US" sz="1150" dirty="0"/>
-          </a:p>
-        </p:txBody>
-      </p:sp>
-      <p:sp>
-        <p:nvSpPr>
-          <p:cNvPr id="8" name="Shape 6"/>
-          <p:cNvSpPr/>
-          <p:nvPr/>
-        </p:nvSpPr>
-        <p:spPr>
-          <a:xfrm>
-            <a:off x="6233008" y="2194560"/>
-            <a:ext cx="5318608" cy="900684"/>
-          </a:xfrm>
-          <a:prstGeom prst="roundRect">
-            <a:avLst>
-              <a:gd name="adj" fmla="val 4061"/>
-            </a:avLst>
-          </a:prstGeom>
-          <a:solidFill>
-            <a:srgbClr val="EFF4F8"/>
-          </a:solidFill>
-          <a:ln/>
-        </p:spPr>
-      </p:sp>
-      <p:sp>
-        <p:nvSpPr>
-          <p:cNvPr id="9" name="Shape 7"/>
-          <p:cNvSpPr/>
-          <p:nvPr/>
-        </p:nvSpPr>
-        <p:spPr>
-          <a:xfrm>
-            <a:off x="6415888" y="2480310"/>
-            <a:ext cx="329184" cy="329184"/>
-          </a:xfrm>
-          <a:prstGeom prst="ellipse">
-            <a:avLst/>
-          </a:prstGeom>
-          <a:solidFill>
-            <a:srgbClr val="0F2D52"/>
-          </a:solidFill>
-          <a:ln/>
-        </p:spPr>
-      </p:sp>
-      <p:sp>
-        <p:nvSpPr>
-          <p:cNvPr id="10" name="Text 8"/>
-          <p:cNvSpPr/>
-          <p:nvPr/>
-        </p:nvSpPr>
-        <p:spPr>
-          <a:xfrm>
-            <a:off x="6415888" y="2480310"/>
-            <a:ext cx="329184" cy="329184"/>
-          </a:xfrm>
-          <a:prstGeom prst="rect">
-            <a:avLst/>
-          </a:prstGeom>
-          <a:noFill/>
-          <a:ln/>
-        </p:spPr>
-        <p:txBody>
-          <a:bodyPr wrap="square" lIns="0" tIns="0" rIns="0" bIns="0" rtlCol="0" anchor="ctr"/>
-          <a:lstStyle/>
-          <a:p>
-            <a:pPr algn="ctr" indent="0" marL="0">
-              <a:buNone/>
-            </a:pPr>
-            <a:r>
-              <a:rPr lang="en-US" sz="1100" b="1" dirty="0">
-                <a:solidFill>
-                  <a:srgbClr val="FFFFFF"/>
-                </a:solidFill>
-                <a:latin typeface="Calibri" pitchFamily="34" charset="0"/>
-                <a:ea typeface="Calibri" pitchFamily="34" charset="-122"/>
-                <a:cs typeface="Calibri" pitchFamily="34" charset="-120"/>
-              </a:rPr>
-              <a:t>2</a:t>
-            </a:r>
-            <a:endParaRPr lang="en-US" sz="1100" dirty="0"/>
-          </a:p>
-        </p:txBody>
-      </p:sp>
-      <p:sp>
-        <p:nvSpPr>
-          <p:cNvPr id="11" name="Text 9"/>
-          <p:cNvSpPr/>
-          <p:nvPr/>
-        </p:nvSpPr>
-        <p:spPr>
-          <a:xfrm>
-            <a:off x="6836512" y="2267712"/>
-            <a:ext cx="4477360" cy="754380"/>
-          </a:xfrm>
-          <a:prstGeom prst="rect">
-            <a:avLst/>
-          </a:prstGeom>
-          <a:noFill/>
-          <a:ln/>
-        </p:spPr>
-        <p:txBody>
-          <a:bodyPr wrap="square" lIns="0" tIns="0" rIns="0" bIns="0" rtlCol="0" anchor="ctr"/>
-          <a:lstStyle/>
-          <a:p>
-            <a:pPr indent="0" marL="0">
-              <a:lnSpc>
-                <a:spcPct val="90000"/>
-              </a:lnSpc>
-              <a:buNone/>
-            </a:pPr>
-            <a:r>
-              <a:rPr lang="en-US" sz="1150" b="1" dirty="0">
+              <a:t>現行犯逮捕、正当防衛、緊急避難。</a:t>
+            </a:r>
+            <a:endParaRPr lang="en-US" sz="1250" dirty="0"/>
+          </a:p>
+          <a:p>
+            <a:pPr indent="0" marL="0">
+              <a:lnSpc>
+                <a:spcPct val="95000"/>
+              </a:lnSpc>
+              <a:buNone/>
+            </a:pPr>
+            <a:r>
+              <a:rPr lang="en-US" sz="1250" dirty="0">
                 <a:solidFill>
                   <a:srgbClr val="1B2733"/>
                 </a:solidFill>
@@ -6881,19 +8539,19 @@
                 <a:ea typeface="Yu Gothic" pitchFamily="34" charset="-122"/>
                 <a:cs typeface="Yu Gothic" pitchFamily="34" charset="-120"/>
               </a:rPr>
-              <a:t>目の前で商品を隠して出口を通過した者を取り押さえた。</a:t>
-            </a:r>
-            <a:endParaRPr lang="en-US" sz="1150" dirty="0"/>
-          </a:p>
-          <a:p>
-            <a:pPr indent="0" marL="0">
-              <a:lnSpc>
-                <a:spcPct val="90000"/>
-              </a:lnSpc>
-              <a:buNone/>
-            </a:pPr>
-            <a:r>
-              <a:rPr lang="en-US" sz="900" i="1" dirty="0">
+              <a:t>警備員だからできるのではありません。要件は誰に対しても同じです。</a:t>
+            </a:r>
+            <a:endParaRPr lang="en-US" sz="1250" dirty="0"/>
+          </a:p>
+          <a:p>
+            <a:pPr indent="0" marL="0">
+              <a:lnSpc>
+                <a:spcPct val="95000"/>
+              </a:lnSpc>
+              <a:buNone/>
+            </a:pPr>
+            <a:r>
+              <a:rPr lang="en-US" sz="950" i="1" dirty="0">
                 <a:solidFill>
                   <a:srgbClr val="5F7183"/>
                 </a:solidFill>
@@ -6901,64 +8559,64 @@
                 <a:ea typeface="Calibri" pitchFamily="34" charset="-122"/>
                 <a:cs typeface="Calibri" pitchFamily="34" charset="-120"/>
               </a:rPr>
-              <a:t>You detain someone who concealed goods and walked out.</a:t>
-            </a:r>
-            <a:endParaRPr lang="en-US" sz="1150" dirty="0"/>
-          </a:p>
-        </p:txBody>
-      </p:sp>
-      <p:sp>
-        <p:nvSpPr>
-          <p:cNvPr id="12" name="Shape 10"/>
-          <p:cNvSpPr/>
-          <p:nvPr/>
-        </p:nvSpPr>
-        <p:spPr>
-          <a:xfrm>
-            <a:off x="640080" y="3241548"/>
-            <a:ext cx="5318608" cy="900684"/>
+              <a:t>Citizen's arrest, self-defence, necessity. You have these as a person, not as a guard. The legal tests are the same for everyone.</a:t>
+            </a:r>
+            <a:endParaRPr lang="en-US" sz="1250" dirty="0"/>
+          </a:p>
+        </p:txBody>
+      </p:sp>
+      <p:sp>
+        <p:nvSpPr>
+          <p:cNvPr id="9" name="Shape 6"/>
+          <p:cNvSpPr/>
+          <p:nvPr/>
+        </p:nvSpPr>
+        <p:spPr>
+          <a:xfrm>
+            <a:off x="6233008" y="2446020"/>
+            <a:ext cx="5318608" cy="2971800"/>
           </a:xfrm>
           <a:prstGeom prst="roundRect">
             <a:avLst>
-              <a:gd name="adj" fmla="val 4061"/>
+              <a:gd name="adj" fmla="val 1538"/>
             </a:avLst>
           </a:prstGeom>
           <a:solidFill>
-            <a:srgbClr val="EFF4F8"/>
+            <a:srgbClr val="E4F4F0"/>
           </a:solidFill>
           <a:ln/>
         </p:spPr>
       </p:sp>
       <p:sp>
         <p:nvSpPr>
-          <p:cNvPr id="13" name="Shape 11"/>
-          <p:cNvSpPr/>
-          <p:nvPr/>
-        </p:nvSpPr>
-        <p:spPr>
-          <a:xfrm>
-            <a:off x="822960" y="3527298"/>
-            <a:ext cx="329184" cy="329184"/>
+          <p:cNvPr id="10" name="Shape 7"/>
+          <p:cNvSpPr/>
+          <p:nvPr/>
+        </p:nvSpPr>
+        <p:spPr>
+          <a:xfrm>
+            <a:off x="6470752" y="2683764"/>
+            <a:ext cx="384048" cy="384048"/>
           </a:xfrm>
           <a:prstGeom prst="ellipse">
             <a:avLst/>
           </a:prstGeom>
           <a:solidFill>
-            <a:srgbClr val="0F2D52"/>
+            <a:srgbClr val="12B198"/>
           </a:solidFill>
           <a:ln/>
         </p:spPr>
       </p:sp>
       <p:sp>
         <p:nvSpPr>
-          <p:cNvPr id="14" name="Text 12"/>
-          <p:cNvSpPr/>
-          <p:nvPr/>
-        </p:nvSpPr>
-        <p:spPr>
-          <a:xfrm>
-            <a:off x="822960" y="3527298"/>
-            <a:ext cx="329184" cy="329184"/>
+          <p:cNvPr id="11" name="Text 8"/>
+          <p:cNvSpPr/>
+          <p:nvPr/>
+        </p:nvSpPr>
+        <p:spPr>
+          <a:xfrm>
+            <a:off x="6470752" y="2683764"/>
+            <a:ext cx="384048" cy="384048"/>
           </a:xfrm>
           <a:prstGeom prst="rect">
             <a:avLst/>
@@ -6974,7 +8632,7 @@
               <a:buNone/>
             </a:pPr>
             <a:r>
-              <a:rPr lang="en-US" sz="1100" b="1" dirty="0">
+              <a:rPr lang="en-US" sz="1400" b="1" dirty="0">
                 <a:solidFill>
                   <a:srgbClr val="FFFFFF"/>
                 </a:solidFill>
@@ -6982,31 +8640,31 @@
                 <a:ea typeface="Calibri" pitchFamily="34" charset="-122"/>
                 <a:cs typeface="Calibri" pitchFamily="34" charset="-120"/>
               </a:rPr>
-              <a:t>3</a:t>
-            </a:r>
-            <a:endParaRPr lang="en-US" sz="1100" dirty="0"/>
-          </a:p>
-        </p:txBody>
-      </p:sp>
-      <p:sp>
-        <p:nvSpPr>
-          <p:cNvPr id="15" name="Text 13"/>
-          <p:cNvSpPr/>
-          <p:nvPr/>
-        </p:nvSpPr>
-        <p:spPr>
-          <a:xfrm>
-            <a:off x="1243584" y="3314700"/>
-            <a:ext cx="4477360" cy="754380"/>
-          </a:xfrm>
-          <a:prstGeom prst="rect">
-            <a:avLst/>
-          </a:prstGeom>
-          <a:noFill/>
-          <a:ln/>
-        </p:spPr>
-        <p:txBody>
-          <a:bodyPr wrap="square" lIns="0" tIns="0" rIns="0" bIns="0" rtlCol="0" anchor="ctr"/>
+              <a:t>2</a:t>
+            </a:r>
+            <a:endParaRPr lang="en-US" sz="1400" dirty="0"/>
+          </a:p>
+        </p:txBody>
+      </p:sp>
+      <p:sp>
+        <p:nvSpPr>
+          <p:cNvPr id="12" name="Text 9"/>
+          <p:cNvSpPr/>
+          <p:nvPr/>
+        </p:nvSpPr>
+        <p:spPr>
+          <a:xfrm>
+            <a:off x="6982816" y="2665476"/>
+            <a:ext cx="4331056" cy="658368"/>
+          </a:xfrm>
+          <a:prstGeom prst="rect">
+            <a:avLst/>
+          </a:prstGeom>
+          <a:noFill/>
+          <a:ln/>
+        </p:spPr>
+        <p:txBody>
+          <a:bodyPr wrap="square" lIns="0" tIns="0" rIns="0" bIns="0" rtlCol="0" anchor="t"/>
           <a:lstStyle/>
           <a:p>
             <a:pPr indent="0" marL="0">
@@ -7016,17 +8674,17 @@
               <a:buNone/>
             </a:pPr>
             <a:r>
-              <a:rPr lang="en-US" sz="1150" b="1" dirty="0">
-                <a:solidFill>
-                  <a:srgbClr val="1B2733"/>
+              <a:rPr lang="en-US" sz="1600" b="1" dirty="0">
+                <a:solidFill>
+                  <a:srgbClr val="093259"/>
                 </a:solidFill>
                 <a:latin typeface="Yu Gothic" pitchFamily="34" charset="0"/>
                 <a:ea typeface="Yu Gothic" pitchFamily="34" charset="-122"/>
                 <a:cs typeface="Yu Gothic" pitchFamily="34" charset="-120"/>
               </a:rPr>
-              <a:t>逮捕した相手から、事務所で30分間、事情を聞いた。</a:t>
-            </a:r>
-            <a:endParaRPr lang="en-US" sz="1150" dirty="0"/>
+              <a:t>管理権者から委ねられたこと</a:t>
+            </a:r>
+            <a:endParaRPr lang="en-US" sz="1600" dirty="0"/>
           </a:p>
           <a:p>
             <a:pPr indent="0" marL="0">
@@ -7036,130 +8694,49 @@
               <a:buNone/>
             </a:pPr>
             <a:r>
-              <a:rPr lang="en-US" sz="900" i="1" dirty="0">
-                <a:solidFill>
-                  <a:srgbClr val="5F7183"/>
-                </a:solidFill>
-                <a:latin typeface="Calibri" pitchFamily="34" charset="0"/>
-                <a:ea typeface="Calibri" pitchFamily="34" charset="-122"/>
-                <a:cs typeface="Calibri" pitchFamily="34" charset="-120"/>
-              </a:rPr>
-              <a:t>You question a detained person in the office for 30 minutes.</a:t>
-            </a:r>
-            <a:endParaRPr lang="en-US" sz="1150" dirty="0"/>
-          </a:p>
-        </p:txBody>
-      </p:sp>
-      <p:sp>
-        <p:nvSpPr>
-          <p:cNvPr id="16" name="Shape 14"/>
-          <p:cNvSpPr/>
-          <p:nvPr/>
-        </p:nvSpPr>
-        <p:spPr>
-          <a:xfrm>
-            <a:off x="6233008" y="3241548"/>
-            <a:ext cx="5318608" cy="900684"/>
-          </a:xfrm>
-          <a:prstGeom prst="roundRect">
-            <a:avLst>
-              <a:gd name="adj" fmla="val 4061"/>
-            </a:avLst>
-          </a:prstGeom>
-          <a:solidFill>
-            <a:srgbClr val="EFF4F8"/>
-          </a:solidFill>
-          <a:ln/>
-        </p:spPr>
-      </p:sp>
-      <p:sp>
-        <p:nvSpPr>
-          <p:cNvPr id="17" name="Shape 15"/>
-          <p:cNvSpPr/>
-          <p:nvPr/>
-        </p:nvSpPr>
-        <p:spPr>
-          <a:xfrm>
-            <a:off x="6415888" y="3527298"/>
-            <a:ext cx="329184" cy="329184"/>
-          </a:xfrm>
-          <a:prstGeom prst="ellipse">
-            <a:avLst/>
-          </a:prstGeom>
-          <a:solidFill>
-            <a:srgbClr val="0F2D52"/>
-          </a:solidFill>
-          <a:ln/>
-        </p:spPr>
-      </p:sp>
-      <p:sp>
-        <p:nvSpPr>
-          <p:cNvPr id="18" name="Text 16"/>
-          <p:cNvSpPr/>
-          <p:nvPr/>
-        </p:nvSpPr>
-        <p:spPr>
-          <a:xfrm>
-            <a:off x="6415888" y="3527298"/>
-            <a:ext cx="329184" cy="329184"/>
-          </a:xfrm>
-          <a:prstGeom prst="rect">
-            <a:avLst/>
-          </a:prstGeom>
-          <a:noFill/>
-          <a:ln/>
-        </p:spPr>
-        <p:txBody>
-          <a:bodyPr wrap="square" lIns="0" tIns="0" rIns="0" bIns="0" rtlCol="0" anchor="ctr"/>
-          <a:lstStyle/>
-          <a:p>
-            <a:pPr algn="ctr" indent="0" marL="0">
-              <a:buNone/>
-            </a:pPr>
-            <a:r>
-              <a:rPr lang="en-US" sz="1100" b="1" dirty="0">
-                <a:solidFill>
-                  <a:srgbClr val="FFFFFF"/>
-                </a:solidFill>
-                <a:latin typeface="Calibri" pitchFamily="34" charset="0"/>
-                <a:ea typeface="Calibri" pitchFamily="34" charset="-122"/>
-                <a:cs typeface="Calibri" pitchFamily="34" charset="-120"/>
-              </a:rPr>
-              <a:t>4</a:t>
-            </a:r>
-            <a:endParaRPr lang="en-US" sz="1100" dirty="0"/>
-          </a:p>
-        </p:txBody>
-      </p:sp>
-      <p:sp>
-        <p:nvSpPr>
-          <p:cNvPr id="19" name="Text 17"/>
-          <p:cNvSpPr/>
-          <p:nvPr/>
-        </p:nvSpPr>
-        <p:spPr>
-          <a:xfrm>
-            <a:off x="6836512" y="3314700"/>
-            <a:ext cx="4477360" cy="754380"/>
-          </a:xfrm>
-          <a:prstGeom prst="rect">
-            <a:avLst/>
-          </a:prstGeom>
-          <a:noFill/>
-          <a:ln/>
-        </p:spPr>
-        <p:txBody>
-          <a:bodyPr wrap="square" lIns="0" tIns="0" rIns="0" bIns="0" rtlCol="0" anchor="ctr"/>
-          <a:lstStyle/>
-          <a:p>
-            <a:pPr indent="0" marL="0">
-              <a:lnSpc>
-                <a:spcPct val="90000"/>
-              </a:lnSpc>
-              <a:buNone/>
-            </a:pPr>
-            <a:r>
-              <a:rPr lang="en-US" sz="1150" b="1" dirty="0">
+              <a:rPr lang="en-US" sz="1000" i="1" dirty="0">
+                <a:solidFill>
+                  <a:srgbClr val="12B198"/>
+                </a:solidFill>
+                <a:latin typeface="Calibri" pitchFamily="34" charset="0"/>
+                <a:ea typeface="Calibri" pitchFamily="34" charset="-122"/>
+                <a:cs typeface="Calibri" pitchFamily="34" charset="-120"/>
+              </a:rPr>
+              <a:t>What the site authority delegates</a:t>
+            </a:r>
+            <a:endParaRPr lang="en-US" sz="1600" dirty="0"/>
+          </a:p>
+        </p:txBody>
+      </p:sp>
+      <p:sp>
+        <p:nvSpPr>
+          <p:cNvPr id="13" name="Text 10"/>
+          <p:cNvSpPr/>
+          <p:nvPr/>
+        </p:nvSpPr>
+        <p:spPr>
+          <a:xfrm>
+            <a:off x="6489040" y="3415284"/>
+            <a:ext cx="4806544" cy="1801368"/>
+          </a:xfrm>
+          <a:prstGeom prst="rect">
+            <a:avLst/>
+          </a:prstGeom>
+          <a:noFill/>
+          <a:ln/>
+        </p:spPr>
+        <p:txBody>
+          <a:bodyPr wrap="square" lIns="0" tIns="0" rIns="0" bIns="0" rtlCol="0" anchor="t"/>
+          <a:lstStyle/>
+          <a:p>
+            <a:pPr indent="0" marL="0">
+              <a:lnSpc>
+                <a:spcPct val="95000"/>
+              </a:lnSpc>
+              <a:buNone/>
+            </a:pPr>
+            <a:r>
+              <a:rPr lang="en-US" sz="1250" dirty="0">
                 <a:solidFill>
                   <a:srgbClr val="1B2733"/>
                 </a:solidFill>
@@ -7167,142 +8744,19 @@
                 <a:ea typeface="Yu Gothic" pitchFamily="34" charset="-122"/>
                 <a:cs typeface="Yu Gothic" pitchFamily="34" charset="-120"/>
               </a:rPr>
-              <a:t>殴りかかってきた相手の腕を押さえて止めた。</a:t>
-            </a:r>
-            <a:endParaRPr lang="en-US" sz="1150" dirty="0"/>
-          </a:p>
-          <a:p>
-            <a:pPr indent="0" marL="0">
-              <a:lnSpc>
-                <a:spcPct val="90000"/>
-              </a:lnSpc>
-              <a:buNone/>
-            </a:pPr>
-            <a:r>
-              <a:rPr lang="en-US" sz="900" i="1" dirty="0">
-                <a:solidFill>
-                  <a:srgbClr val="5F7183"/>
-                </a:solidFill>
-                <a:latin typeface="Calibri" pitchFamily="34" charset="0"/>
-                <a:ea typeface="Calibri" pitchFamily="34" charset="-122"/>
-                <a:cs typeface="Calibri" pitchFamily="34" charset="-120"/>
-              </a:rPr>
-              <a:t>You block an incoming punch by holding the arm.</a:t>
-            </a:r>
-            <a:endParaRPr lang="en-US" sz="1150" dirty="0"/>
-          </a:p>
-        </p:txBody>
-      </p:sp>
-      <p:sp>
-        <p:nvSpPr>
-          <p:cNvPr id="20" name="Shape 18"/>
-          <p:cNvSpPr/>
-          <p:nvPr/>
-        </p:nvSpPr>
-        <p:spPr>
-          <a:xfrm>
-            <a:off x="640080" y="4288536"/>
-            <a:ext cx="5318608" cy="900684"/>
-          </a:xfrm>
-          <a:prstGeom prst="roundRect">
-            <a:avLst>
-              <a:gd name="adj" fmla="val 4061"/>
-            </a:avLst>
-          </a:prstGeom>
-          <a:solidFill>
-            <a:srgbClr val="EFF4F8"/>
-          </a:solidFill>
-          <a:ln/>
-        </p:spPr>
-      </p:sp>
-      <p:sp>
-        <p:nvSpPr>
-          <p:cNvPr id="21" name="Shape 19"/>
-          <p:cNvSpPr/>
-          <p:nvPr/>
-        </p:nvSpPr>
-        <p:spPr>
-          <a:xfrm>
-            <a:off x="822960" y="4574286"/>
-            <a:ext cx="329184" cy="329184"/>
-          </a:xfrm>
-          <a:prstGeom prst="ellipse">
-            <a:avLst/>
-          </a:prstGeom>
-          <a:solidFill>
-            <a:srgbClr val="0F2D52"/>
-          </a:solidFill>
-          <a:ln/>
-        </p:spPr>
-      </p:sp>
-      <p:sp>
-        <p:nvSpPr>
-          <p:cNvPr id="22" name="Text 20"/>
-          <p:cNvSpPr/>
-          <p:nvPr/>
-        </p:nvSpPr>
-        <p:spPr>
-          <a:xfrm>
-            <a:off x="822960" y="4574286"/>
-            <a:ext cx="329184" cy="329184"/>
-          </a:xfrm>
-          <a:prstGeom prst="rect">
-            <a:avLst/>
-          </a:prstGeom>
-          <a:noFill/>
-          <a:ln/>
-        </p:spPr>
-        <p:txBody>
-          <a:bodyPr wrap="square" lIns="0" tIns="0" rIns="0" bIns="0" rtlCol="0" anchor="ctr"/>
-          <a:lstStyle/>
-          <a:p>
-            <a:pPr algn="ctr" indent="0" marL="0">
-              <a:buNone/>
-            </a:pPr>
-            <a:r>
-              <a:rPr lang="en-US" sz="1100" b="1" dirty="0">
-                <a:solidFill>
-                  <a:srgbClr val="FFFFFF"/>
-                </a:solidFill>
-                <a:latin typeface="Calibri" pitchFamily="34" charset="0"/>
-                <a:ea typeface="Calibri" pitchFamily="34" charset="-122"/>
-                <a:cs typeface="Calibri" pitchFamily="34" charset="-120"/>
-              </a:rPr>
-              <a:t>5</a:t>
-            </a:r>
-            <a:endParaRPr lang="en-US" sz="1100" dirty="0"/>
-          </a:p>
-        </p:txBody>
-      </p:sp>
-      <p:sp>
-        <p:nvSpPr>
-          <p:cNvPr id="23" name="Text 21"/>
-          <p:cNvSpPr/>
-          <p:nvPr/>
-        </p:nvSpPr>
-        <p:spPr>
-          <a:xfrm>
-            <a:off x="1243584" y="4361688"/>
-            <a:ext cx="4477360" cy="754380"/>
-          </a:xfrm>
-          <a:prstGeom prst="rect">
-            <a:avLst/>
-          </a:prstGeom>
-          <a:noFill/>
-          <a:ln/>
-        </p:spPr>
-        <p:txBody>
-          <a:bodyPr wrap="square" lIns="0" tIns="0" rIns="0" bIns="0" rtlCol="0" anchor="ctr"/>
-          <a:lstStyle/>
-          <a:p>
-            <a:pPr indent="0" marL="0">
-              <a:lnSpc>
-                <a:spcPct val="90000"/>
-              </a:lnSpc>
-              <a:buNone/>
-            </a:pPr>
-            <a:r>
-              <a:rPr lang="en-US" sz="1150" b="1" dirty="0">
+              <a:t>入館の可否、退去の要請、立入制限、記録。</a:t>
+            </a:r>
+            <a:endParaRPr lang="en-US" sz="1250" dirty="0"/>
+          </a:p>
+          <a:p>
+            <a:pPr indent="0" marL="0">
+              <a:lnSpc>
+                <a:spcPct val="95000"/>
+              </a:lnSpc>
+              <a:buNone/>
+            </a:pPr>
+            <a:r>
+              <a:rPr lang="en-US" sz="1250" dirty="0">
                 <a:solidFill>
                   <a:srgbClr val="1B2733"/>
                 </a:solidFill>
@@ -7310,19 +8764,19 @@
                 <a:ea typeface="Yu Gothic" pitchFamily="34" charset="-122"/>
                 <a:cs typeface="Yu Gothic" pitchFamily="34" charset="-120"/>
               </a:rPr>
-              <a:t>相手が倒れた後も、念のため押さえ続けた。</a:t>
-            </a:r>
-            <a:endParaRPr lang="en-US" sz="1150" dirty="0"/>
-          </a:p>
-          <a:p>
-            <a:pPr indent="0" marL="0">
-              <a:lnSpc>
-                <a:spcPct val="90000"/>
-              </a:lnSpc>
-              <a:buNone/>
-            </a:pPr>
-            <a:r>
-              <a:rPr lang="en-US" sz="900" i="1" dirty="0">
+              <a:t>委ねられた範囲を超えることはできません。</a:t>
+            </a:r>
+            <a:endParaRPr lang="en-US" sz="1250" dirty="0"/>
+          </a:p>
+          <a:p>
+            <a:pPr indent="0" marL="0">
+              <a:lnSpc>
+                <a:spcPct val="95000"/>
+              </a:lnSpc>
+              <a:buNone/>
+            </a:pPr>
+            <a:r>
+              <a:rPr lang="en-US" sz="950" i="1" dirty="0">
                 <a:solidFill>
                   <a:srgbClr val="5F7183"/>
                 </a:solidFill>
@@ -7330,64 +8784,22 @@
                 <a:ea typeface="Calibri" pitchFamily="34" charset="-122"/>
                 <a:cs typeface="Calibri" pitchFamily="34" charset="-120"/>
               </a:rPr>
-              <a:t>You keep holding them down after they are already down.</a:t>
-            </a:r>
-            <a:endParaRPr lang="en-US" sz="1150" dirty="0"/>
-          </a:p>
-        </p:txBody>
-      </p:sp>
-      <p:sp>
-        <p:nvSpPr>
-          <p:cNvPr id="24" name="Shape 22"/>
-          <p:cNvSpPr/>
-          <p:nvPr/>
-        </p:nvSpPr>
-        <p:spPr>
-          <a:xfrm>
-            <a:off x="6233008" y="4288536"/>
-            <a:ext cx="5318608" cy="900684"/>
-          </a:xfrm>
-          <a:prstGeom prst="roundRect">
-            <a:avLst>
-              <a:gd name="adj" fmla="val 4061"/>
-            </a:avLst>
-          </a:prstGeom>
-          <a:solidFill>
-            <a:srgbClr val="EFF4F8"/>
-          </a:solidFill>
-          <a:ln/>
-        </p:spPr>
-      </p:sp>
-      <p:sp>
-        <p:nvSpPr>
-          <p:cNvPr id="25" name="Shape 23"/>
-          <p:cNvSpPr/>
-          <p:nvPr/>
-        </p:nvSpPr>
-        <p:spPr>
-          <a:xfrm>
-            <a:off x="6415888" y="4574286"/>
-            <a:ext cx="329184" cy="329184"/>
-          </a:xfrm>
-          <a:prstGeom prst="ellipse">
-            <a:avLst/>
-          </a:prstGeom>
-          <a:solidFill>
-            <a:srgbClr val="0F2D52"/>
-          </a:solidFill>
-          <a:ln/>
-        </p:spPr>
-      </p:sp>
-      <p:sp>
-        <p:nvSpPr>
-          <p:cNvPr id="26" name="Text 24"/>
-          <p:cNvSpPr/>
-          <p:nvPr/>
-        </p:nvSpPr>
-        <p:spPr>
-          <a:xfrm>
-            <a:off x="6415888" y="4574286"/>
-            <a:ext cx="329184" cy="329184"/>
+              <a:t>Admission, requests to leave, access restriction, record-keeping. You cannot go beyond what was delegated.</a:t>
+            </a:r>
+            <a:endParaRPr lang="en-US" sz="1250" dirty="0"/>
+          </a:p>
+        </p:txBody>
+      </p:sp>
+      <p:sp>
+        <p:nvSpPr>
+          <p:cNvPr id="14" name="Text 11"/>
+          <p:cNvSpPr/>
+          <p:nvPr/>
+        </p:nvSpPr>
+        <p:spPr>
+          <a:xfrm>
+            <a:off x="640080" y="6382512"/>
+            <a:ext cx="8778240" cy="292608"/>
           </a:xfrm>
           <a:prstGeom prst="rect">
             <a:avLst/>
@@ -7399,405 +8811,18 @@
           <a:bodyPr wrap="square" lIns="0" tIns="0" rIns="0" bIns="0" rtlCol="0" anchor="ctr"/>
           <a:lstStyle/>
           <a:p>
-            <a:pPr algn="ctr" indent="0" marL="0">
-              <a:buNone/>
-            </a:pPr>
-            <a:r>
-              <a:rPr lang="en-US" sz="1100" b="1" dirty="0">
-                <a:solidFill>
-                  <a:srgbClr val="FFFFFF"/>
-                </a:solidFill>
-                <a:latin typeface="Calibri" pitchFamily="34" charset="0"/>
-                <a:ea typeface="Calibri" pitchFamily="34" charset="-122"/>
-                <a:cs typeface="Calibri" pitchFamily="34" charset="-120"/>
-              </a:rPr>
-              <a:t>6</a:t>
-            </a:r>
-            <a:endParaRPr lang="en-US" sz="1100" dirty="0"/>
-          </a:p>
-        </p:txBody>
-      </p:sp>
-      <p:sp>
-        <p:nvSpPr>
-          <p:cNvPr id="27" name="Text 25"/>
-          <p:cNvSpPr/>
-          <p:nvPr/>
-        </p:nvSpPr>
-        <p:spPr>
-          <a:xfrm>
-            <a:off x="6836512" y="4361688"/>
-            <a:ext cx="4477360" cy="754380"/>
-          </a:xfrm>
-          <a:prstGeom prst="rect">
-            <a:avLst/>
-          </a:prstGeom>
-          <a:noFill/>
-          <a:ln/>
-        </p:spPr>
-        <p:txBody>
-          <a:bodyPr wrap="square" lIns="0" tIns="0" rIns="0" bIns="0" rtlCol="0" anchor="ctr"/>
-          <a:lstStyle/>
-          <a:p>
-            <a:pPr indent="0" marL="0">
-              <a:lnSpc>
-                <a:spcPct val="90000"/>
-              </a:lnSpc>
-              <a:buNone/>
-            </a:pPr>
-            <a:r>
-              <a:rPr lang="en-US" sz="1150" b="1" dirty="0">
-                <a:solidFill>
-                  <a:srgbClr val="1B2733"/>
+            <a:pPr indent="0" marL="0">
+              <a:buNone/>
+            </a:pPr>
+            <a:r>
+              <a:rPr lang="en-US" sz="900" dirty="0">
+                <a:solidFill>
+                  <a:srgbClr val="5F7183"/>
                 </a:solidFill>
                 <a:latin typeface="Yu Gothic" pitchFamily="34" charset="0"/>
                 <a:ea typeface="Yu Gothic" pitchFamily="34" charset="-122"/>
                 <a:cs typeface="Yu Gothic" pitchFamily="34" charset="-120"/>
               </a:rPr>
-              <a:t>管理権者の指示で、入館証のない者に退去を求めた。</a:t>
-            </a:r>
-            <a:endParaRPr lang="en-US" sz="1150" dirty="0"/>
-          </a:p>
-          <a:p>
-            <a:pPr indent="0" marL="0">
-              <a:lnSpc>
-                <a:spcPct val="90000"/>
-              </a:lnSpc>
-              <a:buNone/>
-            </a:pPr>
-            <a:r>
-              <a:rPr lang="en-US" sz="900" i="1" dirty="0">
-                <a:solidFill>
-                  <a:srgbClr val="5F7183"/>
-                </a:solidFill>
-                <a:latin typeface="Calibri" pitchFamily="34" charset="0"/>
-                <a:ea typeface="Calibri" pitchFamily="34" charset="-122"/>
-                <a:cs typeface="Calibri" pitchFamily="34" charset="-120"/>
-              </a:rPr>
-              <a:t>At the authority's instruction, you ask an unbadged person to leave.</a:t>
-            </a:r>
-            <a:endParaRPr lang="en-US" sz="1150" dirty="0"/>
-          </a:p>
-        </p:txBody>
-      </p:sp>
-      <p:sp>
-        <p:nvSpPr>
-          <p:cNvPr id="28" name="Shape 26"/>
-          <p:cNvSpPr/>
-          <p:nvPr/>
-        </p:nvSpPr>
-        <p:spPr>
-          <a:xfrm>
-            <a:off x="640080" y="5335524"/>
-            <a:ext cx="5318608" cy="900684"/>
-          </a:xfrm>
-          <a:prstGeom prst="roundRect">
-            <a:avLst>
-              <a:gd name="adj" fmla="val 4061"/>
-            </a:avLst>
-          </a:prstGeom>
-          <a:solidFill>
-            <a:srgbClr val="EFF4F8"/>
-          </a:solidFill>
-          <a:ln/>
-        </p:spPr>
-      </p:sp>
-      <p:sp>
-        <p:nvSpPr>
-          <p:cNvPr id="29" name="Shape 27"/>
-          <p:cNvSpPr/>
-          <p:nvPr/>
-        </p:nvSpPr>
-        <p:spPr>
-          <a:xfrm>
-            <a:off x="822960" y="5621274"/>
-            <a:ext cx="329184" cy="329184"/>
-          </a:xfrm>
-          <a:prstGeom prst="ellipse">
-            <a:avLst/>
-          </a:prstGeom>
-          <a:solidFill>
-            <a:srgbClr val="0F2D52"/>
-          </a:solidFill>
-          <a:ln/>
-        </p:spPr>
-      </p:sp>
-      <p:sp>
-        <p:nvSpPr>
-          <p:cNvPr id="30" name="Text 28"/>
-          <p:cNvSpPr/>
-          <p:nvPr/>
-        </p:nvSpPr>
-        <p:spPr>
-          <a:xfrm>
-            <a:off x="822960" y="5621274"/>
-            <a:ext cx="329184" cy="329184"/>
-          </a:xfrm>
-          <a:prstGeom prst="rect">
-            <a:avLst/>
-          </a:prstGeom>
-          <a:noFill/>
-          <a:ln/>
-        </p:spPr>
-        <p:txBody>
-          <a:bodyPr wrap="square" lIns="0" tIns="0" rIns="0" bIns="0" rtlCol="0" anchor="ctr"/>
-          <a:lstStyle/>
-          <a:p>
-            <a:pPr algn="ctr" indent="0" marL="0">
-              <a:buNone/>
-            </a:pPr>
-            <a:r>
-              <a:rPr lang="en-US" sz="1100" b="1" dirty="0">
-                <a:solidFill>
-                  <a:srgbClr val="FFFFFF"/>
-                </a:solidFill>
-                <a:latin typeface="Calibri" pitchFamily="34" charset="0"/>
-                <a:ea typeface="Calibri" pitchFamily="34" charset="-122"/>
-                <a:cs typeface="Calibri" pitchFamily="34" charset="-120"/>
-              </a:rPr>
-              <a:t>7</a:t>
-            </a:r>
-            <a:endParaRPr lang="en-US" sz="1100" dirty="0"/>
-          </a:p>
-        </p:txBody>
-      </p:sp>
-      <p:sp>
-        <p:nvSpPr>
-          <p:cNvPr id="31" name="Text 29"/>
-          <p:cNvSpPr/>
-          <p:nvPr/>
-        </p:nvSpPr>
-        <p:spPr>
-          <a:xfrm>
-            <a:off x="1243584" y="5408676"/>
-            <a:ext cx="4477360" cy="754380"/>
-          </a:xfrm>
-          <a:prstGeom prst="rect">
-            <a:avLst/>
-          </a:prstGeom>
-          <a:noFill/>
-          <a:ln/>
-        </p:spPr>
-        <p:txBody>
-          <a:bodyPr wrap="square" lIns="0" tIns="0" rIns="0" bIns="0" rtlCol="0" anchor="ctr"/>
-          <a:lstStyle/>
-          <a:p>
-            <a:pPr indent="0" marL="0">
-              <a:lnSpc>
-                <a:spcPct val="90000"/>
-              </a:lnSpc>
-              <a:buNone/>
-            </a:pPr>
-            <a:r>
-              <a:rPr lang="en-US" sz="1150" b="1" dirty="0">
-                <a:solidFill>
-                  <a:srgbClr val="1B2733"/>
-                </a:solidFill>
-                <a:latin typeface="Yu Gothic" pitchFamily="34" charset="0"/>
-                <a:ea typeface="Yu Gothic" pitchFamily="34" charset="-122"/>
-                <a:cs typeface="Yu Gothic" pitchFamily="34" charset="-120"/>
-              </a:rPr>
-              <a:t>「怪しい」と思ったので、相手の進路に立ちふさがった。</a:t>
-            </a:r>
-            <a:endParaRPr lang="en-US" sz="1150" dirty="0"/>
-          </a:p>
-          <a:p>
-            <a:pPr indent="0" marL="0">
-              <a:lnSpc>
-                <a:spcPct val="90000"/>
-              </a:lnSpc>
-              <a:buNone/>
-            </a:pPr>
-            <a:r>
-              <a:rPr lang="en-US" sz="900" i="1" dirty="0">
-                <a:solidFill>
-                  <a:srgbClr val="5F7183"/>
-                </a:solidFill>
-                <a:latin typeface="Calibri" pitchFamily="34" charset="0"/>
-                <a:ea typeface="Calibri" pitchFamily="34" charset="-122"/>
-                <a:cs typeface="Calibri" pitchFamily="34" charset="-120"/>
-              </a:rPr>
-              <a:t>You block someone's path because they look suspicious.</a:t>
-            </a:r>
-            <a:endParaRPr lang="en-US" sz="1150" dirty="0"/>
-          </a:p>
-        </p:txBody>
-      </p:sp>
-      <p:sp>
-        <p:nvSpPr>
-          <p:cNvPr id="32" name="Shape 30"/>
-          <p:cNvSpPr/>
-          <p:nvPr/>
-        </p:nvSpPr>
-        <p:spPr>
-          <a:xfrm>
-            <a:off x="6233008" y="5335524"/>
-            <a:ext cx="5318608" cy="900684"/>
-          </a:xfrm>
-          <a:prstGeom prst="roundRect">
-            <a:avLst>
-              <a:gd name="adj" fmla="val 4061"/>
-            </a:avLst>
-          </a:prstGeom>
-          <a:solidFill>
-            <a:srgbClr val="EFF4F8"/>
-          </a:solidFill>
-          <a:ln/>
-        </p:spPr>
-      </p:sp>
-      <p:sp>
-        <p:nvSpPr>
-          <p:cNvPr id="33" name="Shape 31"/>
-          <p:cNvSpPr/>
-          <p:nvPr/>
-        </p:nvSpPr>
-        <p:spPr>
-          <a:xfrm>
-            <a:off x="6415888" y="5621274"/>
-            <a:ext cx="329184" cy="329184"/>
-          </a:xfrm>
-          <a:prstGeom prst="ellipse">
-            <a:avLst/>
-          </a:prstGeom>
-          <a:solidFill>
-            <a:srgbClr val="0F2D52"/>
-          </a:solidFill>
-          <a:ln/>
-        </p:spPr>
-      </p:sp>
-      <p:sp>
-        <p:nvSpPr>
-          <p:cNvPr id="34" name="Text 32"/>
-          <p:cNvSpPr/>
-          <p:nvPr/>
-        </p:nvSpPr>
-        <p:spPr>
-          <a:xfrm>
-            <a:off x="6415888" y="5621274"/>
-            <a:ext cx="329184" cy="329184"/>
-          </a:xfrm>
-          <a:prstGeom prst="rect">
-            <a:avLst/>
-          </a:prstGeom>
-          <a:noFill/>
-          <a:ln/>
-        </p:spPr>
-        <p:txBody>
-          <a:bodyPr wrap="square" lIns="0" tIns="0" rIns="0" bIns="0" rtlCol="0" anchor="ctr"/>
-          <a:lstStyle/>
-          <a:p>
-            <a:pPr algn="ctr" indent="0" marL="0">
-              <a:buNone/>
-            </a:pPr>
-            <a:r>
-              <a:rPr lang="en-US" sz="1100" b="1" dirty="0">
-                <a:solidFill>
-                  <a:srgbClr val="FFFFFF"/>
-                </a:solidFill>
-                <a:latin typeface="Calibri" pitchFamily="34" charset="0"/>
-                <a:ea typeface="Calibri" pitchFamily="34" charset="-122"/>
-                <a:cs typeface="Calibri" pitchFamily="34" charset="-120"/>
-              </a:rPr>
-              <a:t>8</a:t>
-            </a:r>
-            <a:endParaRPr lang="en-US" sz="1100" dirty="0"/>
-          </a:p>
-        </p:txBody>
-      </p:sp>
-      <p:sp>
-        <p:nvSpPr>
-          <p:cNvPr id="35" name="Text 33"/>
-          <p:cNvSpPr/>
-          <p:nvPr/>
-        </p:nvSpPr>
-        <p:spPr>
-          <a:xfrm>
-            <a:off x="6836512" y="5408676"/>
-            <a:ext cx="4477360" cy="754380"/>
-          </a:xfrm>
-          <a:prstGeom prst="rect">
-            <a:avLst/>
-          </a:prstGeom>
-          <a:noFill/>
-          <a:ln/>
-        </p:spPr>
-        <p:txBody>
-          <a:bodyPr wrap="square" lIns="0" tIns="0" rIns="0" bIns="0" rtlCol="0" anchor="ctr"/>
-          <a:lstStyle/>
-          <a:p>
-            <a:pPr indent="0" marL="0">
-              <a:lnSpc>
-                <a:spcPct val="90000"/>
-              </a:lnSpc>
-              <a:buNone/>
-            </a:pPr>
-            <a:r>
-              <a:rPr lang="en-US" sz="1150" b="1" dirty="0">
-                <a:solidFill>
-                  <a:srgbClr val="1B2733"/>
-                </a:solidFill>
-                <a:latin typeface="Yu Gothic" pitchFamily="34" charset="0"/>
-                <a:ea typeface="Yu Gothic" pitchFamily="34" charset="-122"/>
-                <a:cs typeface="Yu Gothic" pitchFamily="34" charset="-120"/>
-              </a:rPr>
-              <a:t>落ちていた書類を拾い、そのままゴミ箱に捨てた。</a:t>
-            </a:r>
-            <a:endParaRPr lang="en-US" sz="1150" dirty="0"/>
-          </a:p>
-          <a:p>
-            <a:pPr indent="0" marL="0">
-              <a:lnSpc>
-                <a:spcPct val="90000"/>
-              </a:lnSpc>
-              <a:buNone/>
-            </a:pPr>
-            <a:r>
-              <a:rPr lang="en-US" sz="900" i="1" dirty="0">
-                <a:solidFill>
-                  <a:srgbClr val="5F7183"/>
-                </a:solidFill>
-                <a:latin typeface="Calibri" pitchFamily="34" charset="0"/>
-                <a:ea typeface="Calibri" pitchFamily="34" charset="-122"/>
-                <a:cs typeface="Calibri" pitchFamily="34" charset="-120"/>
-              </a:rPr>
-              <a:t>You pick up a stray document and drop it in the bin.</a:t>
-            </a:r>
-            <a:endParaRPr lang="en-US" sz="1150" dirty="0"/>
-          </a:p>
-        </p:txBody>
-      </p:sp>
-      <p:sp>
-        <p:nvSpPr>
-          <p:cNvPr id="36" name="Text 34"/>
-          <p:cNvSpPr/>
-          <p:nvPr/>
-        </p:nvSpPr>
-        <p:spPr>
-          <a:xfrm>
-            <a:off x="640080" y="6382512"/>
-            <a:ext cx="8778240" cy="292608"/>
-          </a:xfrm>
-          <a:prstGeom prst="rect">
-            <a:avLst/>
-          </a:prstGeom>
-          <a:noFill/>
-          <a:ln/>
-        </p:spPr>
-        <p:txBody>
-          <a:bodyPr wrap="square" lIns="0" tIns="0" rIns="0" bIns="0" rtlCol="0" anchor="ctr"/>
-          <a:lstStyle/>
-          <a:p>
-            <a:pPr indent="0" marL="0">
-              <a:buNone/>
-            </a:pPr>
-            <a:r>
-              <a:rPr lang="en-US" sz="900" dirty="0">
-                <a:solidFill>
-                  <a:srgbClr val="5F7183"/>
-                </a:solidFill>
-                <a:latin typeface="Yu Gothic" pitchFamily="34" charset="0"/>
-                <a:ea typeface="Yu Gothic" pitchFamily="34" charset="-122"/>
-                <a:cs typeface="Yu Gothic" pitchFamily="34" charset="-120"/>
-              </a:rPr>
               <a:t>第1時限｜基本教育1 警備業務実施の基本原則  </a:t>
             </a:r>
             <a:pPr indent="0" marL="0">
@@ -7820,7 +8845,7 @@
       </p:sp>
       <p:sp>
         <p:nvSpPr>
-          <p:cNvPr id="37" name="Text 35"/>
+          <p:cNvPr id="15" name="Text 12"/>
           <p:cNvSpPr/>
           <p:nvPr/>
         </p:nvSpPr>
@@ -7889,9 +8914,33 @@
           <a:chExt cx="0" cy="0"/>
         </a:xfrm>
       </p:grpSpPr>
-      <p:sp>
-        <p:nvSpPr>
-          <p:cNvPr id="2" name="Text 0"/>
+      <p:pic>
+        <p:nvPicPr>
+          <p:cNvPr id="2" name="Image 0" descr="/home/user/Training-/assets/logo.png">    </p:cNvPr>
+          <p:cNvPicPr>
+            <a:picLocks noChangeAspect="1"/>
+          </p:cNvPicPr>
+          <p:nvPr/>
+        </p:nvPicPr>
+        <p:blipFill>
+          <a:blip r:embed="rId1"/>
+          <a:stretch>
+            <a:fillRect/>
+          </a:stretch>
+        </p:blipFill>
+        <p:spPr>
+          <a:xfrm>
+            <a:off x="10765231" y="332912"/>
+            <a:ext cx="786384" cy="742353"/>
+          </a:xfrm>
+          <a:prstGeom prst="rect">
+            <a:avLst/>
+          </a:prstGeom>
+        </p:spPr>
+      </p:pic>
+      <p:sp>
+        <p:nvSpPr>
+          <p:cNvPr id="3" name="Text 0"/>
           <p:cNvSpPr/>
           <p:nvPr/>
         </p:nvSpPr>
@@ -7919,13 +8968,13 @@
             <a:r>
               <a:rPr lang="en-US" sz="2700" b="1" dirty="0">
                 <a:solidFill>
-                  <a:srgbClr val="0F2D52"/>
+                  <a:srgbClr val="093259"/>
                 </a:solidFill>
                 <a:latin typeface="Yu Gothic" pitchFamily="34" charset="0"/>
                 <a:ea typeface="Yu Gothic" pitchFamily="34" charset="-122"/>
                 <a:cs typeface="Yu Gothic" pitchFamily="34" charset="-120"/>
               </a:rPr>
-              <a:t>ミニTTX 解説 ― 覚えるのは答えではなく「根拠の型」</a:t>
+              <a:t>ミニTTX ― ○か×か、根拠を一言で</a:t>
             </a:r>
             <a:endParaRPr lang="en-US" sz="2700" dirty="0"/>
           </a:p>
@@ -7939,13 +8988,13 @@
             <a:r>
               <a:rPr lang="en-US" sz="1250" i="1" dirty="0">
                 <a:solidFill>
-                  <a:srgbClr val="17AF98"/>
-                </a:solidFill>
-                <a:latin typeface="Calibri" pitchFamily="34" charset="0"/>
-                <a:ea typeface="Calibri" pitchFamily="34" charset="-122"/>
-                <a:cs typeface="Calibri" pitchFamily="34" charset="-120"/>
-              </a:rPr>
-              <a:t>Debrief — Learn the reasoning pattern, not the answers</a:t>
+                  <a:srgbClr val="12B198"/>
+                </a:solidFill>
+                <a:latin typeface="Calibri" pitchFamily="34" charset="0"/>
+                <a:ea typeface="Calibri" pitchFamily="34" charset="-122"/>
+                <a:cs typeface="Calibri" pitchFamily="34" charset="-120"/>
+              </a:rPr>
+              <a:t>Mini TTX — Yes or No, with one line of reasoning</a:t>
             </a:r>
             <a:endParaRPr lang="en-US" sz="2700" dirty="0"/>
           </a:p>
@@ -7953,14 +9002,14 @@
       </p:sp>
       <p:sp>
         <p:nvSpPr>
-          <p:cNvPr id="3" name="Text 1"/>
-          <p:cNvSpPr/>
-          <p:nvPr/>
-        </p:nvSpPr>
-        <p:spPr>
-          <a:xfrm>
-            <a:off x="640080" y="1536192"/>
-            <a:ext cx="10911535" cy="566928"/>
+          <p:cNvPr id="4" name="Text 1"/>
+          <p:cNvSpPr/>
+          <p:nvPr/>
+        </p:nvSpPr>
+        <p:spPr>
+          <a:xfrm>
+            <a:off x="640080" y="1499616"/>
+            <a:ext cx="10911535" cy="512064"/>
           </a:xfrm>
           <a:prstGeom prst="rect">
             <a:avLst/>
@@ -7981,13 +9030,13 @@
             <a:r>
               <a:rPr lang="en-US" sz="1300" dirty="0">
                 <a:solidFill>
-                  <a:srgbClr val="0F2D52"/>
+                  <a:srgbClr val="093259"/>
                 </a:solidFill>
                 <a:latin typeface="Yu Gothic" pitchFamily="34" charset="0"/>
                 <a:ea typeface="Yu Gothic" pitchFamily="34" charset="-122"/>
                 <a:cs typeface="Yu Gothic" pitchFamily="34" charset="-120"/>
               </a:rPr>
-              <a:t>解答　1 ×　2 ○　3 ×　4 ○　5 ×　6 ○　7 ×　8 ×</a:t>
+              <a:t>手元に○×と根拠を書いてください。挙手は求めません。指名します。</a:t>
             </a:r>
             <a:endParaRPr lang="en-US" sz="1300" dirty="0"/>
           </a:p>
@@ -8007,7 +9056,7 @@
                 <a:ea typeface="Calibri" pitchFamily="34" charset="-122"/>
                 <a:cs typeface="Calibri" pitchFamily="34" charset="-120"/>
               </a:rPr>
-              <a:t>Answer key:  1 No · 2 Yes · 3 No · 4 Yes · 5 No · 6 Yes · 7 No · 8 No</a:t>
+              <a:t>Write your answer and your reason. No hands needed. I will call on you.</a:t>
             </a:r>
             <a:endParaRPr lang="en-US" sz="1300" dirty="0"/>
           </a:p>
@@ -8015,18 +9064,18 @@
       </p:sp>
       <p:sp>
         <p:nvSpPr>
-          <p:cNvPr id="4" name="Shape 2"/>
-          <p:cNvSpPr/>
-          <p:nvPr/>
-        </p:nvSpPr>
-        <p:spPr>
-          <a:xfrm>
-            <a:off x="640080" y="2286000"/>
-            <a:ext cx="10911535" cy="702259"/>
+          <p:cNvPr id="5" name="Shape 2"/>
+          <p:cNvSpPr/>
+          <p:nvPr/>
+        </p:nvSpPr>
+        <p:spPr>
+          <a:xfrm>
+            <a:off x="640080" y="2194560"/>
+            <a:ext cx="5318608" cy="900684"/>
           </a:xfrm>
           <a:prstGeom prst="roundRect">
             <a:avLst>
-              <a:gd name="adj" fmla="val 6510"/>
+              <a:gd name="adj" fmla="val 4061"/>
             </a:avLst>
           </a:prstGeom>
           <a:solidFill>
@@ -8037,34 +9086,34 @@
       </p:sp>
       <p:sp>
         <p:nvSpPr>
-          <p:cNvPr id="5" name="Shape 3"/>
-          <p:cNvSpPr/>
-          <p:nvPr/>
-        </p:nvSpPr>
-        <p:spPr>
-          <a:xfrm>
-            <a:off x="896112" y="2445106"/>
-            <a:ext cx="384048" cy="384048"/>
+          <p:cNvPr id="6" name="Shape 3"/>
+          <p:cNvSpPr/>
+          <p:nvPr/>
+        </p:nvSpPr>
+        <p:spPr>
+          <a:xfrm>
+            <a:off x="822960" y="2480310"/>
+            <a:ext cx="329184" cy="329184"/>
           </a:xfrm>
           <a:prstGeom prst="ellipse">
             <a:avLst/>
           </a:prstGeom>
           <a:solidFill>
-            <a:srgbClr val="17AF98"/>
+            <a:srgbClr val="093259"/>
           </a:solidFill>
           <a:ln/>
         </p:spPr>
       </p:sp>
       <p:sp>
         <p:nvSpPr>
-          <p:cNvPr id="6" name="Text 4"/>
-          <p:cNvSpPr/>
-          <p:nvPr/>
-        </p:nvSpPr>
-        <p:spPr>
-          <a:xfrm>
-            <a:off x="896112" y="2445106"/>
-            <a:ext cx="384048" cy="384048"/>
+          <p:cNvPr id="7" name="Text 4"/>
+          <p:cNvSpPr/>
+          <p:nvPr/>
+        </p:nvSpPr>
+        <p:spPr>
+          <a:xfrm>
+            <a:off x="822960" y="2480310"/>
+            <a:ext cx="329184" cy="329184"/>
           </a:xfrm>
           <a:prstGeom prst="rect">
             <a:avLst/>
@@ -8080,7 +9129,7 @@
               <a:buNone/>
             </a:pPr>
             <a:r>
-              <a:rPr lang="en-US" sz="1400" b="1" dirty="0">
+              <a:rPr lang="en-US" sz="1100" b="1" dirty="0">
                 <a:solidFill>
                   <a:srgbClr val="FFFFFF"/>
                 </a:solidFill>
@@ -8090,20 +9139,20 @@
               </a:rPr>
               <a:t>1</a:t>
             </a:r>
-            <a:endParaRPr lang="en-US" sz="1400" dirty="0"/>
-          </a:p>
-        </p:txBody>
-      </p:sp>
-      <p:sp>
-        <p:nvSpPr>
-          <p:cNvPr id="7" name="Text 5"/>
-          <p:cNvSpPr/>
-          <p:nvPr/>
-        </p:nvSpPr>
-        <p:spPr>
-          <a:xfrm>
-            <a:off x="1499616" y="2395728"/>
-            <a:ext cx="9777679" cy="519379"/>
+            <a:endParaRPr lang="en-US" sz="1100" dirty="0"/>
+          </a:p>
+        </p:txBody>
+      </p:sp>
+      <p:sp>
+        <p:nvSpPr>
+          <p:cNvPr id="8" name="Text 5"/>
+          <p:cNvSpPr/>
+          <p:nvPr/>
+        </p:nvSpPr>
+        <p:spPr>
+          <a:xfrm>
+            <a:off x="1243584" y="2267712"/>
+            <a:ext cx="4477360" cy="754380"/>
           </a:xfrm>
           <a:prstGeom prst="rect">
             <a:avLst/>
@@ -8117,12 +9166,12 @@
           <a:p>
             <a:pPr indent="0" marL="0">
               <a:lnSpc>
-                <a:spcPct val="92000"/>
-              </a:lnSpc>
-              <a:buNone/>
-            </a:pPr>
-            <a:r>
-              <a:rPr lang="en-US" sz="1450" b="1" dirty="0">
+                <a:spcPct val="90000"/>
+              </a:lnSpc>
+              <a:buNone/>
+            </a:pPr>
+            <a:r>
+              <a:rPr lang="en-US" sz="1150" b="1" dirty="0">
                 <a:solidFill>
                   <a:srgbClr val="1B2733"/>
                 </a:solidFill>
@@ -8130,19 +9179,19 @@
                 <a:ea typeface="Yu Gothic" pitchFamily="34" charset="-122"/>
                 <a:cs typeface="Yu Gothic" pitchFamily="34" charset="-120"/>
               </a:rPr>
-              <a:t>×の多くは、②の踏み外し ― 委ねられていないことをしている。</a:t>
-            </a:r>
-            <a:endParaRPr lang="en-US" sz="1450" dirty="0"/>
-          </a:p>
-          <a:p>
-            <a:pPr indent="0" marL="0">
-              <a:lnSpc>
-                <a:spcPct val="92000"/>
-              </a:lnSpc>
-              <a:buNone/>
-            </a:pPr>
-            <a:r>
-              <a:rPr lang="en-US" sz="1050" i="1" dirty="0">
+              <a:t>制服を着ているので、来訪者のカバンを開けて確認した。</a:t>
+            </a:r>
+            <a:endParaRPr lang="en-US" sz="1150" dirty="0"/>
+          </a:p>
+          <a:p>
+            <a:pPr indent="0" marL="0">
+              <a:lnSpc>
+                <a:spcPct val="90000"/>
+              </a:lnSpc>
+              <a:buNone/>
+            </a:pPr>
+            <a:r>
+              <a:rPr lang="en-US" sz="900" i="1" dirty="0">
                 <a:solidFill>
                   <a:srgbClr val="5F7183"/>
                 </a:solidFill>
@@ -8150,64 +9199,64 @@
                 <a:ea typeface="Calibri" pitchFamily="34" charset="-122"/>
                 <a:cs typeface="Calibri" pitchFamily="34" charset="-120"/>
               </a:rPr>
-              <a:t>Most of the "No" cases are overreach of source ②: doing something never delegated to you.</a:t>
-            </a:r>
-            <a:endParaRPr lang="en-US" sz="1450" dirty="0"/>
-          </a:p>
-        </p:txBody>
-      </p:sp>
-      <p:sp>
-        <p:nvSpPr>
-          <p:cNvPr id="8" name="Shape 6"/>
-          <p:cNvSpPr/>
-          <p:nvPr/>
-        </p:nvSpPr>
-        <p:spPr>
-          <a:xfrm>
-            <a:off x="640080" y="3097987"/>
-            <a:ext cx="10911535" cy="702259"/>
+              <a:t>In uniform, you open a visitor's bag to check it.</a:t>
+            </a:r>
+            <a:endParaRPr lang="en-US" sz="1150" dirty="0"/>
+          </a:p>
+        </p:txBody>
+      </p:sp>
+      <p:sp>
+        <p:nvSpPr>
+          <p:cNvPr id="9" name="Shape 6"/>
+          <p:cNvSpPr/>
+          <p:nvPr/>
+        </p:nvSpPr>
+        <p:spPr>
+          <a:xfrm>
+            <a:off x="6233008" y="2194560"/>
+            <a:ext cx="5318608" cy="900684"/>
           </a:xfrm>
           <a:prstGeom prst="roundRect">
             <a:avLst>
-              <a:gd name="adj" fmla="val 6510"/>
+              <a:gd name="adj" fmla="val 4061"/>
             </a:avLst>
           </a:prstGeom>
           <a:solidFill>
-            <a:srgbClr val="F7FAFC"/>
+            <a:srgbClr val="EFF4F8"/>
           </a:solidFill>
           <a:ln/>
         </p:spPr>
       </p:sp>
       <p:sp>
         <p:nvSpPr>
-          <p:cNvPr id="9" name="Shape 7"/>
-          <p:cNvSpPr/>
-          <p:nvPr/>
-        </p:nvSpPr>
-        <p:spPr>
-          <a:xfrm>
-            <a:off x="896112" y="3257093"/>
-            <a:ext cx="384048" cy="384048"/>
+          <p:cNvPr id="10" name="Shape 7"/>
+          <p:cNvSpPr/>
+          <p:nvPr/>
+        </p:nvSpPr>
+        <p:spPr>
+          <a:xfrm>
+            <a:off x="6415888" y="2480310"/>
+            <a:ext cx="329184" cy="329184"/>
           </a:xfrm>
           <a:prstGeom prst="ellipse">
             <a:avLst/>
           </a:prstGeom>
           <a:solidFill>
-            <a:srgbClr val="17AF98"/>
+            <a:srgbClr val="093259"/>
           </a:solidFill>
           <a:ln/>
         </p:spPr>
       </p:sp>
       <p:sp>
         <p:nvSpPr>
-          <p:cNvPr id="10" name="Text 8"/>
-          <p:cNvSpPr/>
-          <p:nvPr/>
-        </p:nvSpPr>
-        <p:spPr>
-          <a:xfrm>
-            <a:off x="896112" y="3257093"/>
-            <a:ext cx="384048" cy="384048"/>
+          <p:cNvPr id="11" name="Text 8"/>
+          <p:cNvSpPr/>
+          <p:nvPr/>
+        </p:nvSpPr>
+        <p:spPr>
+          <a:xfrm>
+            <a:off x="6415888" y="2480310"/>
+            <a:ext cx="329184" cy="329184"/>
           </a:xfrm>
           <a:prstGeom prst="rect">
             <a:avLst/>
@@ -8223,7 +9272,7 @@
               <a:buNone/>
             </a:pPr>
             <a:r>
-              <a:rPr lang="en-US" sz="1400" b="1" dirty="0">
+              <a:rPr lang="en-US" sz="1100" b="1" dirty="0">
                 <a:solidFill>
                   <a:srgbClr val="FFFFFF"/>
                 </a:solidFill>
@@ -8233,20 +9282,20 @@
               </a:rPr>
               <a:t>2</a:t>
             </a:r>
-            <a:endParaRPr lang="en-US" sz="1400" dirty="0"/>
-          </a:p>
-        </p:txBody>
-      </p:sp>
-      <p:sp>
-        <p:nvSpPr>
-          <p:cNvPr id="11" name="Text 9"/>
-          <p:cNvSpPr/>
-          <p:nvPr/>
-        </p:nvSpPr>
-        <p:spPr>
-          <a:xfrm>
-            <a:off x="1499616" y="3207715"/>
-            <a:ext cx="9777679" cy="519379"/>
+            <a:endParaRPr lang="en-US" sz="1100" dirty="0"/>
+          </a:p>
+        </p:txBody>
+      </p:sp>
+      <p:sp>
+        <p:nvSpPr>
+          <p:cNvPr id="12" name="Text 9"/>
+          <p:cNvSpPr/>
+          <p:nvPr/>
+        </p:nvSpPr>
+        <p:spPr>
+          <a:xfrm>
+            <a:off x="6836512" y="2267712"/>
+            <a:ext cx="4477360" cy="754380"/>
           </a:xfrm>
           <a:prstGeom prst="rect">
             <a:avLst/>
@@ -8260,12 +9309,12 @@
           <a:p>
             <a:pPr indent="0" marL="0">
               <a:lnSpc>
-                <a:spcPct val="92000"/>
-              </a:lnSpc>
-              <a:buNone/>
-            </a:pPr>
-            <a:r>
-              <a:rPr lang="en-US" sz="1450" b="1" dirty="0">
+                <a:spcPct val="90000"/>
+              </a:lnSpc>
+              <a:buNone/>
+            </a:pPr>
+            <a:r>
+              <a:rPr lang="en-US" sz="1150" b="1" dirty="0">
                 <a:solidFill>
                   <a:srgbClr val="1B2733"/>
                 </a:solidFill>
@@ -8273,19 +9322,19 @@
                 <a:ea typeface="Yu Gothic" pitchFamily="34" charset="-122"/>
                 <a:cs typeface="Yu Gothic" pitchFamily="34" charset="-120"/>
               </a:rPr>
-              <a:t>○は、①か②のどちらかに、きちんと収まっている。</a:t>
-            </a:r>
-            <a:endParaRPr lang="en-US" sz="1450" dirty="0"/>
-          </a:p>
-          <a:p>
-            <a:pPr indent="0" marL="0">
-              <a:lnSpc>
-                <a:spcPct val="92000"/>
-              </a:lnSpc>
-              <a:buNone/>
-            </a:pPr>
-            <a:r>
-              <a:rPr lang="en-US" sz="1050" i="1" dirty="0">
+              <a:t>目の前で商品を隠して出口を通過した者を取り押さえた。</a:t>
+            </a:r>
+            <a:endParaRPr lang="en-US" sz="1150" dirty="0"/>
+          </a:p>
+          <a:p>
+            <a:pPr indent="0" marL="0">
+              <a:lnSpc>
+                <a:spcPct val="90000"/>
+              </a:lnSpc>
+              <a:buNone/>
+            </a:pPr>
+            <a:r>
+              <a:rPr lang="en-US" sz="900" i="1" dirty="0">
                 <a:solidFill>
                   <a:srgbClr val="5F7183"/>
                 </a:solidFill>
@@ -8293,26 +9342,26 @@
                 <a:ea typeface="Calibri" pitchFamily="34" charset="-122"/>
                 <a:cs typeface="Calibri" pitchFamily="34" charset="-120"/>
               </a:rPr>
-              <a:t>Every "Yes" sits cleanly inside source ① or source ②.</a:t>
-            </a:r>
-            <a:endParaRPr lang="en-US" sz="1450" dirty="0"/>
-          </a:p>
-        </p:txBody>
-      </p:sp>
-      <p:sp>
-        <p:nvSpPr>
-          <p:cNvPr id="12" name="Shape 10"/>
-          <p:cNvSpPr/>
-          <p:nvPr/>
-        </p:nvSpPr>
-        <p:spPr>
-          <a:xfrm>
-            <a:off x="640080" y="3909974"/>
-            <a:ext cx="10911535" cy="702259"/>
+              <a:t>You detain someone who hid goods and walked out.</a:t>
+            </a:r>
+            <a:endParaRPr lang="en-US" sz="1150" dirty="0"/>
+          </a:p>
+        </p:txBody>
+      </p:sp>
+      <p:sp>
+        <p:nvSpPr>
+          <p:cNvPr id="13" name="Shape 10"/>
+          <p:cNvSpPr/>
+          <p:nvPr/>
+        </p:nvSpPr>
+        <p:spPr>
+          <a:xfrm>
+            <a:off x="640080" y="3241548"/>
+            <a:ext cx="5318608" cy="900684"/>
           </a:xfrm>
           <a:prstGeom prst="roundRect">
             <a:avLst>
-              <a:gd name="adj" fmla="val 6510"/>
+              <a:gd name="adj" fmla="val 4061"/>
             </a:avLst>
           </a:prstGeom>
           <a:solidFill>
@@ -8323,34 +9372,34 @@
       </p:sp>
       <p:sp>
         <p:nvSpPr>
-          <p:cNvPr id="13" name="Shape 11"/>
-          <p:cNvSpPr/>
-          <p:nvPr/>
-        </p:nvSpPr>
-        <p:spPr>
-          <a:xfrm>
-            <a:off x="896112" y="4069080"/>
-            <a:ext cx="384048" cy="384048"/>
+          <p:cNvPr id="14" name="Shape 11"/>
+          <p:cNvSpPr/>
+          <p:nvPr/>
+        </p:nvSpPr>
+        <p:spPr>
+          <a:xfrm>
+            <a:off x="822960" y="3527298"/>
+            <a:ext cx="329184" cy="329184"/>
           </a:xfrm>
           <a:prstGeom prst="ellipse">
             <a:avLst/>
           </a:prstGeom>
           <a:solidFill>
-            <a:srgbClr val="17AF98"/>
+            <a:srgbClr val="093259"/>
           </a:solidFill>
           <a:ln/>
         </p:spPr>
       </p:sp>
       <p:sp>
         <p:nvSpPr>
-          <p:cNvPr id="14" name="Text 12"/>
-          <p:cNvSpPr/>
-          <p:nvPr/>
-        </p:nvSpPr>
-        <p:spPr>
-          <a:xfrm>
-            <a:off x="896112" y="4069080"/>
-            <a:ext cx="384048" cy="384048"/>
+          <p:cNvPr id="15" name="Text 12"/>
+          <p:cNvSpPr/>
+          <p:nvPr/>
+        </p:nvSpPr>
+        <p:spPr>
+          <a:xfrm>
+            <a:off x="822960" y="3527298"/>
+            <a:ext cx="329184" cy="329184"/>
           </a:xfrm>
           <a:prstGeom prst="rect">
             <a:avLst/>
@@ -8366,7 +9415,7 @@
               <a:buNone/>
             </a:pPr>
             <a:r>
-              <a:rPr lang="en-US" sz="1400" b="1" dirty="0">
+              <a:rPr lang="en-US" sz="1100" b="1" dirty="0">
                 <a:solidFill>
                   <a:srgbClr val="FFFFFF"/>
                 </a:solidFill>
@@ -8376,20 +9425,20 @@
               </a:rPr>
               <a:t>3</a:t>
             </a:r>
-            <a:endParaRPr lang="en-US" sz="1400" dirty="0"/>
-          </a:p>
-        </p:txBody>
-      </p:sp>
-      <p:sp>
-        <p:nvSpPr>
-          <p:cNvPr id="15" name="Text 13"/>
-          <p:cNvSpPr/>
-          <p:nvPr/>
-        </p:nvSpPr>
-        <p:spPr>
-          <a:xfrm>
-            <a:off x="1499616" y="4019702"/>
-            <a:ext cx="9777679" cy="519379"/>
+            <a:endParaRPr lang="en-US" sz="1100" dirty="0"/>
+          </a:p>
+        </p:txBody>
+      </p:sp>
+      <p:sp>
+        <p:nvSpPr>
+          <p:cNvPr id="16" name="Text 13"/>
+          <p:cNvSpPr/>
+          <p:nvPr/>
+        </p:nvSpPr>
+        <p:spPr>
+          <a:xfrm>
+            <a:off x="1243584" y="3314700"/>
+            <a:ext cx="4477360" cy="754380"/>
           </a:xfrm>
           <a:prstGeom prst="rect">
             <a:avLst/>
@@ -8403,12 +9452,12 @@
           <a:p>
             <a:pPr indent="0" marL="0">
               <a:lnSpc>
-                <a:spcPct val="92000"/>
-              </a:lnSpc>
-              <a:buNone/>
-            </a:pPr>
-            <a:r>
-              <a:rPr lang="en-US" sz="1450" b="1" dirty="0">
+                <a:spcPct val="90000"/>
+              </a:lnSpc>
+              <a:buNone/>
+            </a:pPr>
+            <a:r>
+              <a:rPr lang="en-US" sz="1150" b="1" dirty="0">
                 <a:solidFill>
                   <a:srgbClr val="1B2733"/>
                 </a:solidFill>
@@ -8416,19 +9465,19 @@
                 <a:ea typeface="Yu Gothic" pitchFamily="34" charset="-122"/>
                 <a:cs typeface="Yu Gothic" pitchFamily="34" charset="-120"/>
               </a:rPr>
-              <a:t>設問5は「終期」の問題。侵害が終われば、正当防衛も終わります。</a:t>
-            </a:r>
-            <a:endParaRPr lang="en-US" sz="1450" dirty="0"/>
-          </a:p>
-          <a:p>
-            <a:pPr indent="0" marL="0">
-              <a:lnSpc>
-                <a:spcPct val="92000"/>
-              </a:lnSpc>
-              <a:buNone/>
-            </a:pPr>
-            <a:r>
-              <a:rPr lang="en-US" sz="1050" i="1" dirty="0">
+              <a:t>逮捕した相手から、事務所で30分間、事情を聞いた。</a:t>
+            </a:r>
+            <a:endParaRPr lang="en-US" sz="1150" dirty="0"/>
+          </a:p>
+          <a:p>
+            <a:pPr indent="0" marL="0">
+              <a:lnSpc>
+                <a:spcPct val="90000"/>
+              </a:lnSpc>
+              <a:buNone/>
+            </a:pPr>
+            <a:r>
+              <a:rPr lang="en-US" sz="900" i="1" dirty="0">
                 <a:solidFill>
                   <a:srgbClr val="5F7183"/>
                 </a:solidFill>
@@ -8436,64 +9485,64 @@
                 <a:ea typeface="Calibri" pitchFamily="34" charset="-122"/>
                 <a:cs typeface="Calibri" pitchFamily="34" charset="-120"/>
               </a:rPr>
-              <a:t>Item 5 is about when it ends: once the attack stops, so does the right to defend.</a:t>
-            </a:r>
-            <a:endParaRPr lang="en-US" sz="1450" dirty="0"/>
-          </a:p>
-        </p:txBody>
-      </p:sp>
-      <p:sp>
-        <p:nvSpPr>
-          <p:cNvPr id="16" name="Shape 14"/>
-          <p:cNvSpPr/>
-          <p:nvPr/>
-        </p:nvSpPr>
-        <p:spPr>
-          <a:xfrm>
-            <a:off x="640080" y="4721962"/>
-            <a:ext cx="10911535" cy="702259"/>
+              <a:t>You question a detained person in the office for 30 minutes.</a:t>
+            </a:r>
+            <a:endParaRPr lang="en-US" sz="1150" dirty="0"/>
+          </a:p>
+        </p:txBody>
+      </p:sp>
+      <p:sp>
+        <p:nvSpPr>
+          <p:cNvPr id="17" name="Shape 14"/>
+          <p:cNvSpPr/>
+          <p:nvPr/>
+        </p:nvSpPr>
+        <p:spPr>
+          <a:xfrm>
+            <a:off x="6233008" y="3241548"/>
+            <a:ext cx="5318608" cy="900684"/>
           </a:xfrm>
           <a:prstGeom prst="roundRect">
             <a:avLst>
-              <a:gd name="adj" fmla="val 6510"/>
+              <a:gd name="adj" fmla="val 4061"/>
             </a:avLst>
           </a:prstGeom>
           <a:solidFill>
-            <a:srgbClr val="F7FAFC"/>
+            <a:srgbClr val="EFF4F8"/>
           </a:solidFill>
           <a:ln/>
         </p:spPr>
       </p:sp>
       <p:sp>
         <p:nvSpPr>
-          <p:cNvPr id="17" name="Shape 15"/>
-          <p:cNvSpPr/>
-          <p:nvPr/>
-        </p:nvSpPr>
-        <p:spPr>
-          <a:xfrm>
-            <a:off x="896112" y="4881067"/>
-            <a:ext cx="384048" cy="384048"/>
+          <p:cNvPr id="18" name="Shape 15"/>
+          <p:cNvSpPr/>
+          <p:nvPr/>
+        </p:nvSpPr>
+        <p:spPr>
+          <a:xfrm>
+            <a:off x="6415888" y="3527298"/>
+            <a:ext cx="329184" cy="329184"/>
           </a:xfrm>
           <a:prstGeom prst="ellipse">
             <a:avLst/>
           </a:prstGeom>
           <a:solidFill>
-            <a:srgbClr val="17AF98"/>
+            <a:srgbClr val="093259"/>
           </a:solidFill>
           <a:ln/>
         </p:spPr>
       </p:sp>
       <p:sp>
         <p:nvSpPr>
-          <p:cNvPr id="18" name="Text 16"/>
-          <p:cNvSpPr/>
-          <p:nvPr/>
-        </p:nvSpPr>
-        <p:spPr>
-          <a:xfrm>
-            <a:off x="896112" y="4881067"/>
-            <a:ext cx="384048" cy="384048"/>
+          <p:cNvPr id="19" name="Text 16"/>
+          <p:cNvSpPr/>
+          <p:nvPr/>
+        </p:nvSpPr>
+        <p:spPr>
+          <a:xfrm>
+            <a:off x="6415888" y="3527298"/>
+            <a:ext cx="329184" cy="329184"/>
           </a:xfrm>
           <a:prstGeom prst="rect">
             <a:avLst/>
@@ -8509,7 +9558,7 @@
               <a:buNone/>
             </a:pPr>
             <a:r>
-              <a:rPr lang="en-US" sz="1400" b="1" dirty="0">
+              <a:rPr lang="en-US" sz="1100" b="1" dirty="0">
                 <a:solidFill>
                   <a:srgbClr val="FFFFFF"/>
                 </a:solidFill>
@@ -8519,20 +9568,20 @@
               </a:rPr>
               <a:t>4</a:t>
             </a:r>
-            <a:endParaRPr lang="en-US" sz="1400" dirty="0"/>
-          </a:p>
-        </p:txBody>
-      </p:sp>
-      <p:sp>
-        <p:nvSpPr>
-          <p:cNvPr id="19" name="Text 17"/>
-          <p:cNvSpPr/>
-          <p:nvPr/>
-        </p:nvSpPr>
-        <p:spPr>
-          <a:xfrm>
-            <a:off x="1499616" y="4831690"/>
-            <a:ext cx="9777679" cy="519379"/>
+            <a:endParaRPr lang="en-US" sz="1100" dirty="0"/>
+          </a:p>
+        </p:txBody>
+      </p:sp>
+      <p:sp>
+        <p:nvSpPr>
+          <p:cNvPr id="20" name="Text 17"/>
+          <p:cNvSpPr/>
+          <p:nvPr/>
+        </p:nvSpPr>
+        <p:spPr>
+          <a:xfrm>
+            <a:off x="6836512" y="3314700"/>
+            <a:ext cx="4477360" cy="754380"/>
           </a:xfrm>
           <a:prstGeom prst="rect">
             <a:avLst/>
@@ -8546,12 +9595,12 @@
           <a:p>
             <a:pPr indent="0" marL="0">
               <a:lnSpc>
-                <a:spcPct val="92000"/>
-              </a:lnSpc>
-              <a:buNone/>
-            </a:pPr>
-            <a:r>
-              <a:rPr lang="en-US" sz="1450" b="1" dirty="0">
+                <a:spcPct val="90000"/>
+              </a:lnSpc>
+              <a:buNone/>
+            </a:pPr>
+            <a:r>
+              <a:rPr lang="en-US" sz="1150" b="1" dirty="0">
                 <a:solidFill>
                   <a:srgbClr val="1B2733"/>
                 </a:solidFill>
@@ -8559,19 +9608,19 @@
                 <a:ea typeface="Yu Gothic" pitchFamily="34" charset="-122"/>
                 <a:cs typeface="Yu Gothic" pitchFamily="34" charset="-120"/>
               </a:rPr>
-              <a:t>設問8は Asset の問題。書類は情報資産です。捨てた時点で証跡が消えます。</a:t>
-            </a:r>
-            <a:endParaRPr lang="en-US" sz="1450" dirty="0"/>
-          </a:p>
-          <a:p>
-            <a:pPr indent="0" marL="0">
-              <a:lnSpc>
-                <a:spcPct val="92000"/>
-              </a:lnSpc>
-              <a:buNone/>
-            </a:pPr>
-            <a:r>
-              <a:rPr lang="en-US" sz="1050" i="1" dirty="0">
+              <a:t>殴りかかってきた相手の腕を押さえて止めた。</a:t>
+            </a:r>
+            <a:endParaRPr lang="en-US" sz="1150" dirty="0"/>
+          </a:p>
+          <a:p>
+            <a:pPr indent="0" marL="0">
+              <a:lnSpc>
+                <a:spcPct val="90000"/>
+              </a:lnSpc>
+              <a:buNone/>
+            </a:pPr>
+            <a:r>
+              <a:rPr lang="en-US" sz="900" i="1" dirty="0">
                 <a:solidFill>
                   <a:srgbClr val="5F7183"/>
                 </a:solidFill>
@@ -8579,26 +9628,26 @@
                 <a:ea typeface="Calibri" pitchFamily="34" charset="-122"/>
                 <a:cs typeface="Calibri" pitchFamily="34" charset="-120"/>
               </a:rPr>
-              <a:t>Item 8 is an Asset question. A document is an information asset — binning it destroys the record.</a:t>
-            </a:r>
-            <a:endParaRPr lang="en-US" sz="1450" dirty="0"/>
-          </a:p>
-        </p:txBody>
-      </p:sp>
-      <p:sp>
-        <p:nvSpPr>
-          <p:cNvPr id="20" name="Shape 18"/>
-          <p:cNvSpPr/>
-          <p:nvPr/>
-        </p:nvSpPr>
-        <p:spPr>
-          <a:xfrm>
-            <a:off x="640080" y="5533949"/>
-            <a:ext cx="10911535" cy="702259"/>
+              <a:t>You stop an incoming punch by holding the arm.</a:t>
+            </a:r>
+            <a:endParaRPr lang="en-US" sz="1150" dirty="0"/>
+          </a:p>
+        </p:txBody>
+      </p:sp>
+      <p:sp>
+        <p:nvSpPr>
+          <p:cNvPr id="21" name="Shape 18"/>
+          <p:cNvSpPr/>
+          <p:nvPr/>
+        </p:nvSpPr>
+        <p:spPr>
+          <a:xfrm>
+            <a:off x="640080" y="4288536"/>
+            <a:ext cx="5318608" cy="900684"/>
           </a:xfrm>
           <a:prstGeom prst="roundRect">
             <a:avLst>
-              <a:gd name="adj" fmla="val 6510"/>
+              <a:gd name="adj" fmla="val 4061"/>
             </a:avLst>
           </a:prstGeom>
           <a:solidFill>
@@ -8609,34 +9658,34 @@
       </p:sp>
       <p:sp>
         <p:nvSpPr>
-          <p:cNvPr id="21" name="Shape 19"/>
-          <p:cNvSpPr/>
-          <p:nvPr/>
-        </p:nvSpPr>
-        <p:spPr>
-          <a:xfrm>
-            <a:off x="896112" y="5693054"/>
-            <a:ext cx="384048" cy="384048"/>
+          <p:cNvPr id="22" name="Shape 19"/>
+          <p:cNvSpPr/>
+          <p:nvPr/>
+        </p:nvSpPr>
+        <p:spPr>
+          <a:xfrm>
+            <a:off x="822960" y="4574286"/>
+            <a:ext cx="329184" cy="329184"/>
           </a:xfrm>
           <a:prstGeom prst="ellipse">
             <a:avLst/>
           </a:prstGeom>
           <a:solidFill>
-            <a:srgbClr val="17AF98"/>
+            <a:srgbClr val="093259"/>
           </a:solidFill>
           <a:ln/>
         </p:spPr>
       </p:sp>
       <p:sp>
         <p:nvSpPr>
-          <p:cNvPr id="22" name="Text 20"/>
-          <p:cNvSpPr/>
-          <p:nvPr/>
-        </p:nvSpPr>
-        <p:spPr>
-          <a:xfrm>
-            <a:off x="896112" y="5693054"/>
-            <a:ext cx="384048" cy="384048"/>
+          <p:cNvPr id="23" name="Text 20"/>
+          <p:cNvSpPr/>
+          <p:nvPr/>
+        </p:nvSpPr>
+        <p:spPr>
+          <a:xfrm>
+            <a:off x="822960" y="4574286"/>
+            <a:ext cx="329184" cy="329184"/>
           </a:xfrm>
           <a:prstGeom prst="rect">
             <a:avLst/>
@@ -8652,7 +9701,7 @@
               <a:buNone/>
             </a:pPr>
             <a:r>
-              <a:rPr lang="en-US" sz="1400" b="1" dirty="0">
+              <a:rPr lang="en-US" sz="1100" b="1" dirty="0">
                 <a:solidFill>
                   <a:srgbClr val="FFFFFF"/>
                 </a:solidFill>
@@ -8662,20 +9711,20 @@
               </a:rPr>
               <a:t>5</a:t>
             </a:r>
-            <a:endParaRPr lang="en-US" sz="1400" dirty="0"/>
-          </a:p>
-        </p:txBody>
-      </p:sp>
-      <p:sp>
-        <p:nvSpPr>
-          <p:cNvPr id="23" name="Text 21"/>
-          <p:cNvSpPr/>
-          <p:nvPr/>
-        </p:nvSpPr>
-        <p:spPr>
-          <a:xfrm>
-            <a:off x="1499616" y="5643677"/>
-            <a:ext cx="9777679" cy="519379"/>
+            <a:endParaRPr lang="en-US" sz="1100" dirty="0"/>
+          </a:p>
+        </p:txBody>
+      </p:sp>
+      <p:sp>
+        <p:nvSpPr>
+          <p:cNvPr id="24" name="Text 21"/>
+          <p:cNvSpPr/>
+          <p:nvPr/>
+        </p:nvSpPr>
+        <p:spPr>
+          <a:xfrm>
+            <a:off x="1243584" y="4361688"/>
+            <a:ext cx="4477360" cy="754380"/>
           </a:xfrm>
           <a:prstGeom prst="rect">
             <a:avLst/>
@@ -8689,12 +9738,12 @@
           <a:p>
             <a:pPr indent="0" marL="0">
               <a:lnSpc>
-                <a:spcPct val="92000"/>
-              </a:lnSpc>
-              <a:buNone/>
-            </a:pPr>
-            <a:r>
-              <a:rPr lang="en-US" sz="1300" b="1" dirty="0">
+                <a:spcPct val="90000"/>
+              </a:lnSpc>
+              <a:buNone/>
+            </a:pPr>
+            <a:r>
+              <a:rPr lang="en-US" sz="1150" b="1" dirty="0">
                 <a:solidFill>
                   <a:srgbClr val="1B2733"/>
                 </a:solidFill>
@@ -8702,19 +9751,19 @@
                 <a:ea typeface="Yu Gothic" pitchFamily="34" charset="-122"/>
                 <a:cs typeface="Yu Gothic" pitchFamily="34" charset="-120"/>
               </a:rPr>
-              <a:t>根拠の型：「私は〔私人／補助者〕として、〔目的〕のため、〔最小限の手段〕を取った」</a:t>
-            </a:r>
-            <a:endParaRPr lang="en-US" sz="1300" dirty="0"/>
-          </a:p>
-          <a:p>
-            <a:pPr indent="0" marL="0">
-              <a:lnSpc>
-                <a:spcPct val="92000"/>
-              </a:lnSpc>
-              <a:buNone/>
-            </a:pPr>
-            <a:r>
-              <a:rPr lang="en-US" sz="950" i="1" dirty="0">
+              <a:t>相手が倒れた後も、念のため押さえ続けた。</a:t>
+            </a:r>
+            <a:endParaRPr lang="en-US" sz="1150" dirty="0"/>
+          </a:p>
+          <a:p>
+            <a:pPr indent="0" marL="0">
+              <a:lnSpc>
+                <a:spcPct val="90000"/>
+              </a:lnSpc>
+              <a:buNone/>
+            </a:pPr>
+            <a:r>
+              <a:rPr lang="en-US" sz="900" i="1" dirty="0">
                 <a:solidFill>
                   <a:srgbClr val="5F7183"/>
                 </a:solidFill>
@@ -8722,22 +9771,64 @@
                 <a:ea typeface="Calibri" pitchFamily="34" charset="-122"/>
                 <a:cs typeface="Calibri" pitchFamily="34" charset="-120"/>
               </a:rPr>
-              <a:t>The pattern: "As a [citizen / delegated agent], I took [the minimum action] in order to [purpose]."</a:t>
-            </a:r>
-            <a:endParaRPr lang="en-US" sz="1300" dirty="0"/>
-          </a:p>
-        </p:txBody>
-      </p:sp>
-      <p:sp>
-        <p:nvSpPr>
-          <p:cNvPr id="24" name="Text 22"/>
-          <p:cNvSpPr/>
-          <p:nvPr/>
-        </p:nvSpPr>
-        <p:spPr>
-          <a:xfrm>
-            <a:off x="640080" y="6382512"/>
-            <a:ext cx="8778240" cy="292608"/>
+              <a:t>You keep holding the person down after they are down.</a:t>
+            </a:r>
+            <a:endParaRPr lang="en-US" sz="1150" dirty="0"/>
+          </a:p>
+        </p:txBody>
+      </p:sp>
+      <p:sp>
+        <p:nvSpPr>
+          <p:cNvPr id="25" name="Shape 22"/>
+          <p:cNvSpPr/>
+          <p:nvPr/>
+        </p:nvSpPr>
+        <p:spPr>
+          <a:xfrm>
+            <a:off x="6233008" y="4288536"/>
+            <a:ext cx="5318608" cy="900684"/>
+          </a:xfrm>
+          <a:prstGeom prst="roundRect">
+            <a:avLst>
+              <a:gd name="adj" fmla="val 4061"/>
+            </a:avLst>
+          </a:prstGeom>
+          <a:solidFill>
+            <a:srgbClr val="EFF4F8"/>
+          </a:solidFill>
+          <a:ln/>
+        </p:spPr>
+      </p:sp>
+      <p:sp>
+        <p:nvSpPr>
+          <p:cNvPr id="26" name="Shape 23"/>
+          <p:cNvSpPr/>
+          <p:nvPr/>
+        </p:nvSpPr>
+        <p:spPr>
+          <a:xfrm>
+            <a:off x="6415888" y="4574286"/>
+            <a:ext cx="329184" cy="329184"/>
+          </a:xfrm>
+          <a:prstGeom prst="ellipse">
+            <a:avLst/>
+          </a:prstGeom>
+          <a:solidFill>
+            <a:srgbClr val="093259"/>
+          </a:solidFill>
+          <a:ln/>
+        </p:spPr>
+      </p:sp>
+      <p:sp>
+        <p:nvSpPr>
+          <p:cNvPr id="27" name="Text 24"/>
+          <p:cNvSpPr/>
+          <p:nvPr/>
+        </p:nvSpPr>
+        <p:spPr>
+          <a:xfrm>
+            <a:off x="6415888" y="4574286"/>
+            <a:ext cx="329184" cy="329184"/>
           </a:xfrm>
           <a:prstGeom prst="rect">
             <a:avLst/>
@@ -8749,18 +9840,405 @@
           <a:bodyPr wrap="square" lIns="0" tIns="0" rIns="0" bIns="0" rtlCol="0" anchor="ctr"/>
           <a:lstStyle/>
           <a:p>
-            <a:pPr indent="0" marL="0">
-              <a:buNone/>
-            </a:pPr>
-            <a:r>
-              <a:rPr lang="en-US" sz="900" dirty="0">
-                <a:solidFill>
-                  <a:srgbClr val="5F7183"/>
+            <a:pPr algn="ctr" indent="0" marL="0">
+              <a:buNone/>
+            </a:pPr>
+            <a:r>
+              <a:rPr lang="en-US" sz="1100" b="1" dirty="0">
+                <a:solidFill>
+                  <a:srgbClr val="FFFFFF"/>
+                </a:solidFill>
+                <a:latin typeface="Calibri" pitchFamily="34" charset="0"/>
+                <a:ea typeface="Calibri" pitchFamily="34" charset="-122"/>
+                <a:cs typeface="Calibri" pitchFamily="34" charset="-120"/>
+              </a:rPr>
+              <a:t>6</a:t>
+            </a:r>
+            <a:endParaRPr lang="en-US" sz="1100" dirty="0"/>
+          </a:p>
+        </p:txBody>
+      </p:sp>
+      <p:sp>
+        <p:nvSpPr>
+          <p:cNvPr id="28" name="Text 25"/>
+          <p:cNvSpPr/>
+          <p:nvPr/>
+        </p:nvSpPr>
+        <p:spPr>
+          <a:xfrm>
+            <a:off x="6836512" y="4361688"/>
+            <a:ext cx="4477360" cy="754380"/>
+          </a:xfrm>
+          <a:prstGeom prst="rect">
+            <a:avLst/>
+          </a:prstGeom>
+          <a:noFill/>
+          <a:ln/>
+        </p:spPr>
+        <p:txBody>
+          <a:bodyPr wrap="square" lIns="0" tIns="0" rIns="0" bIns="0" rtlCol="0" anchor="ctr"/>
+          <a:lstStyle/>
+          <a:p>
+            <a:pPr indent="0" marL="0">
+              <a:lnSpc>
+                <a:spcPct val="90000"/>
+              </a:lnSpc>
+              <a:buNone/>
+            </a:pPr>
+            <a:r>
+              <a:rPr lang="en-US" sz="1150" b="1" dirty="0">
+                <a:solidFill>
+                  <a:srgbClr val="1B2733"/>
                 </a:solidFill>
                 <a:latin typeface="Yu Gothic" pitchFamily="34" charset="0"/>
                 <a:ea typeface="Yu Gothic" pitchFamily="34" charset="-122"/>
                 <a:cs typeface="Yu Gothic" pitchFamily="34" charset="-120"/>
               </a:rPr>
+              <a:t>管理権者の指示で、入館証のない者に退去を求めた。</a:t>
+            </a:r>
+            <a:endParaRPr lang="en-US" sz="1150" dirty="0"/>
+          </a:p>
+          <a:p>
+            <a:pPr indent="0" marL="0">
+              <a:lnSpc>
+                <a:spcPct val="90000"/>
+              </a:lnSpc>
+              <a:buNone/>
+            </a:pPr>
+            <a:r>
+              <a:rPr lang="en-US" sz="900" i="1" dirty="0">
+                <a:solidFill>
+                  <a:srgbClr val="5F7183"/>
+                </a:solidFill>
+                <a:latin typeface="Calibri" pitchFamily="34" charset="0"/>
+                <a:ea typeface="Calibri" pitchFamily="34" charset="-122"/>
+                <a:cs typeface="Calibri" pitchFamily="34" charset="-120"/>
+              </a:rPr>
+              <a:t>On the authority's instruction, you ask an unbadged person to leave.</a:t>
+            </a:r>
+            <a:endParaRPr lang="en-US" sz="1150" dirty="0"/>
+          </a:p>
+        </p:txBody>
+      </p:sp>
+      <p:sp>
+        <p:nvSpPr>
+          <p:cNvPr id="29" name="Shape 26"/>
+          <p:cNvSpPr/>
+          <p:nvPr/>
+        </p:nvSpPr>
+        <p:spPr>
+          <a:xfrm>
+            <a:off x="640080" y="5335524"/>
+            <a:ext cx="5318608" cy="900684"/>
+          </a:xfrm>
+          <a:prstGeom prst="roundRect">
+            <a:avLst>
+              <a:gd name="adj" fmla="val 4061"/>
+            </a:avLst>
+          </a:prstGeom>
+          <a:solidFill>
+            <a:srgbClr val="EFF4F8"/>
+          </a:solidFill>
+          <a:ln/>
+        </p:spPr>
+      </p:sp>
+      <p:sp>
+        <p:nvSpPr>
+          <p:cNvPr id="30" name="Shape 27"/>
+          <p:cNvSpPr/>
+          <p:nvPr/>
+        </p:nvSpPr>
+        <p:spPr>
+          <a:xfrm>
+            <a:off x="822960" y="5621274"/>
+            <a:ext cx="329184" cy="329184"/>
+          </a:xfrm>
+          <a:prstGeom prst="ellipse">
+            <a:avLst/>
+          </a:prstGeom>
+          <a:solidFill>
+            <a:srgbClr val="093259"/>
+          </a:solidFill>
+          <a:ln/>
+        </p:spPr>
+      </p:sp>
+      <p:sp>
+        <p:nvSpPr>
+          <p:cNvPr id="31" name="Text 28"/>
+          <p:cNvSpPr/>
+          <p:nvPr/>
+        </p:nvSpPr>
+        <p:spPr>
+          <a:xfrm>
+            <a:off x="822960" y="5621274"/>
+            <a:ext cx="329184" cy="329184"/>
+          </a:xfrm>
+          <a:prstGeom prst="rect">
+            <a:avLst/>
+          </a:prstGeom>
+          <a:noFill/>
+          <a:ln/>
+        </p:spPr>
+        <p:txBody>
+          <a:bodyPr wrap="square" lIns="0" tIns="0" rIns="0" bIns="0" rtlCol="0" anchor="ctr"/>
+          <a:lstStyle/>
+          <a:p>
+            <a:pPr algn="ctr" indent="0" marL="0">
+              <a:buNone/>
+            </a:pPr>
+            <a:r>
+              <a:rPr lang="en-US" sz="1100" b="1" dirty="0">
+                <a:solidFill>
+                  <a:srgbClr val="FFFFFF"/>
+                </a:solidFill>
+                <a:latin typeface="Calibri" pitchFamily="34" charset="0"/>
+                <a:ea typeface="Calibri" pitchFamily="34" charset="-122"/>
+                <a:cs typeface="Calibri" pitchFamily="34" charset="-120"/>
+              </a:rPr>
+              <a:t>7</a:t>
+            </a:r>
+            <a:endParaRPr lang="en-US" sz="1100" dirty="0"/>
+          </a:p>
+        </p:txBody>
+      </p:sp>
+      <p:sp>
+        <p:nvSpPr>
+          <p:cNvPr id="32" name="Text 29"/>
+          <p:cNvSpPr/>
+          <p:nvPr/>
+        </p:nvSpPr>
+        <p:spPr>
+          <a:xfrm>
+            <a:off x="1243584" y="5408676"/>
+            <a:ext cx="4477360" cy="754380"/>
+          </a:xfrm>
+          <a:prstGeom prst="rect">
+            <a:avLst/>
+          </a:prstGeom>
+          <a:noFill/>
+          <a:ln/>
+        </p:spPr>
+        <p:txBody>
+          <a:bodyPr wrap="square" lIns="0" tIns="0" rIns="0" bIns="0" rtlCol="0" anchor="ctr"/>
+          <a:lstStyle/>
+          <a:p>
+            <a:pPr indent="0" marL="0">
+              <a:lnSpc>
+                <a:spcPct val="90000"/>
+              </a:lnSpc>
+              <a:buNone/>
+            </a:pPr>
+            <a:r>
+              <a:rPr lang="en-US" sz="1150" b="1" dirty="0">
+                <a:solidFill>
+                  <a:srgbClr val="1B2733"/>
+                </a:solidFill>
+                <a:latin typeface="Yu Gothic" pitchFamily="34" charset="0"/>
+                <a:ea typeface="Yu Gothic" pitchFamily="34" charset="-122"/>
+                <a:cs typeface="Yu Gothic" pitchFamily="34" charset="-120"/>
+              </a:rPr>
+              <a:t>「怪しい」と思ったので、相手の進路に立ちふさがった。</a:t>
+            </a:r>
+            <a:endParaRPr lang="en-US" sz="1150" dirty="0"/>
+          </a:p>
+          <a:p>
+            <a:pPr indent="0" marL="0">
+              <a:lnSpc>
+                <a:spcPct val="90000"/>
+              </a:lnSpc>
+              <a:buNone/>
+            </a:pPr>
+            <a:r>
+              <a:rPr lang="en-US" sz="900" i="1" dirty="0">
+                <a:solidFill>
+                  <a:srgbClr val="5F7183"/>
+                </a:solidFill>
+                <a:latin typeface="Calibri" pitchFamily="34" charset="0"/>
+                <a:ea typeface="Calibri" pitchFamily="34" charset="-122"/>
+                <a:cs typeface="Calibri" pitchFamily="34" charset="-120"/>
+              </a:rPr>
+              <a:t>You block a person's path because they look suspicious.</a:t>
+            </a:r>
+            <a:endParaRPr lang="en-US" sz="1150" dirty="0"/>
+          </a:p>
+        </p:txBody>
+      </p:sp>
+      <p:sp>
+        <p:nvSpPr>
+          <p:cNvPr id="33" name="Shape 30"/>
+          <p:cNvSpPr/>
+          <p:nvPr/>
+        </p:nvSpPr>
+        <p:spPr>
+          <a:xfrm>
+            <a:off x="6233008" y="5335524"/>
+            <a:ext cx="5318608" cy="900684"/>
+          </a:xfrm>
+          <a:prstGeom prst="roundRect">
+            <a:avLst>
+              <a:gd name="adj" fmla="val 4061"/>
+            </a:avLst>
+          </a:prstGeom>
+          <a:solidFill>
+            <a:srgbClr val="EFF4F8"/>
+          </a:solidFill>
+          <a:ln/>
+        </p:spPr>
+      </p:sp>
+      <p:sp>
+        <p:nvSpPr>
+          <p:cNvPr id="34" name="Shape 31"/>
+          <p:cNvSpPr/>
+          <p:nvPr/>
+        </p:nvSpPr>
+        <p:spPr>
+          <a:xfrm>
+            <a:off x="6415888" y="5621274"/>
+            <a:ext cx="329184" cy="329184"/>
+          </a:xfrm>
+          <a:prstGeom prst="ellipse">
+            <a:avLst/>
+          </a:prstGeom>
+          <a:solidFill>
+            <a:srgbClr val="093259"/>
+          </a:solidFill>
+          <a:ln/>
+        </p:spPr>
+      </p:sp>
+      <p:sp>
+        <p:nvSpPr>
+          <p:cNvPr id="35" name="Text 32"/>
+          <p:cNvSpPr/>
+          <p:nvPr/>
+        </p:nvSpPr>
+        <p:spPr>
+          <a:xfrm>
+            <a:off x="6415888" y="5621274"/>
+            <a:ext cx="329184" cy="329184"/>
+          </a:xfrm>
+          <a:prstGeom prst="rect">
+            <a:avLst/>
+          </a:prstGeom>
+          <a:noFill/>
+          <a:ln/>
+        </p:spPr>
+        <p:txBody>
+          <a:bodyPr wrap="square" lIns="0" tIns="0" rIns="0" bIns="0" rtlCol="0" anchor="ctr"/>
+          <a:lstStyle/>
+          <a:p>
+            <a:pPr algn="ctr" indent="0" marL="0">
+              <a:buNone/>
+            </a:pPr>
+            <a:r>
+              <a:rPr lang="en-US" sz="1100" b="1" dirty="0">
+                <a:solidFill>
+                  <a:srgbClr val="FFFFFF"/>
+                </a:solidFill>
+                <a:latin typeface="Calibri" pitchFamily="34" charset="0"/>
+                <a:ea typeface="Calibri" pitchFamily="34" charset="-122"/>
+                <a:cs typeface="Calibri" pitchFamily="34" charset="-120"/>
+              </a:rPr>
+              <a:t>8</a:t>
+            </a:r>
+            <a:endParaRPr lang="en-US" sz="1100" dirty="0"/>
+          </a:p>
+        </p:txBody>
+      </p:sp>
+      <p:sp>
+        <p:nvSpPr>
+          <p:cNvPr id="36" name="Text 33"/>
+          <p:cNvSpPr/>
+          <p:nvPr/>
+        </p:nvSpPr>
+        <p:spPr>
+          <a:xfrm>
+            <a:off x="6836512" y="5408676"/>
+            <a:ext cx="4477360" cy="754380"/>
+          </a:xfrm>
+          <a:prstGeom prst="rect">
+            <a:avLst/>
+          </a:prstGeom>
+          <a:noFill/>
+          <a:ln/>
+        </p:spPr>
+        <p:txBody>
+          <a:bodyPr wrap="square" lIns="0" tIns="0" rIns="0" bIns="0" rtlCol="0" anchor="ctr"/>
+          <a:lstStyle/>
+          <a:p>
+            <a:pPr indent="0" marL="0">
+              <a:lnSpc>
+                <a:spcPct val="90000"/>
+              </a:lnSpc>
+              <a:buNone/>
+            </a:pPr>
+            <a:r>
+              <a:rPr lang="en-US" sz="1150" b="1" dirty="0">
+                <a:solidFill>
+                  <a:srgbClr val="1B2733"/>
+                </a:solidFill>
+                <a:latin typeface="Yu Gothic" pitchFamily="34" charset="0"/>
+                <a:ea typeface="Yu Gothic" pitchFamily="34" charset="-122"/>
+                <a:cs typeface="Yu Gothic" pitchFamily="34" charset="-120"/>
+              </a:rPr>
+              <a:t>落ちていた書類を拾い、そのままゴミ箱に捨てた。</a:t>
+            </a:r>
+            <a:endParaRPr lang="en-US" sz="1150" dirty="0"/>
+          </a:p>
+          <a:p>
+            <a:pPr indent="0" marL="0">
+              <a:lnSpc>
+                <a:spcPct val="90000"/>
+              </a:lnSpc>
+              <a:buNone/>
+            </a:pPr>
+            <a:r>
+              <a:rPr lang="en-US" sz="900" i="1" dirty="0">
+                <a:solidFill>
+                  <a:srgbClr val="5F7183"/>
+                </a:solidFill>
+                <a:latin typeface="Calibri" pitchFamily="34" charset="0"/>
+                <a:ea typeface="Calibri" pitchFamily="34" charset="-122"/>
+                <a:cs typeface="Calibri" pitchFamily="34" charset="-120"/>
+              </a:rPr>
+              <a:t>You pick up a stray document and put it in the bin.</a:t>
+            </a:r>
+            <a:endParaRPr lang="en-US" sz="1150" dirty="0"/>
+          </a:p>
+        </p:txBody>
+      </p:sp>
+      <p:sp>
+        <p:nvSpPr>
+          <p:cNvPr id="37" name="Text 34"/>
+          <p:cNvSpPr/>
+          <p:nvPr/>
+        </p:nvSpPr>
+        <p:spPr>
+          <a:xfrm>
+            <a:off x="640080" y="6382512"/>
+            <a:ext cx="8778240" cy="292608"/>
+          </a:xfrm>
+          <a:prstGeom prst="rect">
+            <a:avLst/>
+          </a:prstGeom>
+          <a:noFill/>
+          <a:ln/>
+        </p:spPr>
+        <p:txBody>
+          <a:bodyPr wrap="square" lIns="0" tIns="0" rIns="0" bIns="0" rtlCol="0" anchor="ctr"/>
+          <a:lstStyle/>
+          <a:p>
+            <a:pPr indent="0" marL="0">
+              <a:buNone/>
+            </a:pPr>
+            <a:r>
+              <a:rPr lang="en-US" sz="900" dirty="0">
+                <a:solidFill>
+                  <a:srgbClr val="5F7183"/>
+                </a:solidFill>
+                <a:latin typeface="Yu Gothic" pitchFamily="34" charset="0"/>
+                <a:ea typeface="Yu Gothic" pitchFamily="34" charset="-122"/>
+                <a:cs typeface="Yu Gothic" pitchFamily="34" charset="-120"/>
+              </a:rPr>
               <a:t>第1時限｜基本教育1 警備業務実施の基本原則  </a:t>
             </a:r>
             <a:pPr indent="0" marL="0">
@@ -8783,7 +10261,7 @@
       </p:sp>
       <p:sp>
         <p:nvSpPr>
-          <p:cNvPr id="25" name="Text 23"/>
+          <p:cNvPr id="38" name="Text 35"/>
           <p:cNvSpPr/>
           <p:nvPr/>
         </p:nvSpPr>

--- a/decks/01_1限_基本原則.pptx
+++ b/decks/01_1限_基本原則.pptx
@@ -16,9 +16,11 @@
     <p:sldId id="264" r:id="rId10"/>
     <p:sldId id="265" r:id="rId11"/>
     <p:sldId id="266" r:id="rId12"/>
+    <p:sldId id="267" r:id="rId13"/>
+    <p:sldId id="268" r:id="rId14"/>
   </p:sldIdLst>
   <p:notesMasterIdLst>
-    <p:notesMasterId r:id="rId13"/>
+    <p:notesMasterId r:id="rId15"/>
   </p:notesMasterIdLst>
   <p:sldSz cx="12192000" cy="6858000"/>
   <p:notesSz cx="6858000" cy="12192000"/>
@@ -712,6 +714,182 @@
             <a:fld id="{F7021451-1387-4CA6-816F-3879F97B5CBC}" type="slidenum">
               <a:rPr lang="en-US"/>
               <a:t>11</a:t>
+            </a:fld>
+            <a:endParaRPr lang="en-US"/>
+          </a:p>
+        </p:txBody>
+      </p:sp>
+    </p:spTree>
+    <p:extLst>
+      <p:ext uri="{BB962C8B-B14F-4D97-AF65-F5344CB8AC3E}">
+        <p14:creationId xmlns:p14="http://schemas.microsoft.com/office/powerpoint/2010/main" val="1024086991"/>
+      </p:ext>
+    </p:extLst>
+  </p:cSld>
+  <p:clrMapOvr>
+    <a:masterClrMapping/>
+  </p:clrMapOvr>
+</p:notes>
+</file>
+
+<file path=ppt/notesSlides/notesSlide12.xml><?xml version="1.0" encoding="utf-8"?>
+<p:notes xmlns:a="http://schemas.openxmlformats.org/drawingml/2006/main" xmlns:r="http://schemas.openxmlformats.org/officeDocument/2006/relationships" xmlns:p="http://schemas.openxmlformats.org/presentationml/2006/main">
+  <p:cSld>
+    <p:spTree>
+      <p:nvGrpSpPr>
+        <p:cNvPr id="1" name=""/>
+        <p:cNvGrpSpPr/>
+        <p:nvPr/>
+      </p:nvGrpSpPr>
+      <p:grpSpPr>
+        <a:xfrm>
+          <a:off x="0" y="0"/>
+          <a:ext cx="0" cy="0"/>
+          <a:chOff x="0" y="0"/>
+          <a:chExt cx="0" cy="0"/>
+        </a:xfrm>
+      </p:grpSpPr>
+      <p:sp>
+        <p:nvSpPr>
+          <p:cNvPr id="2" name="Slide Image Placeholder 1"/>
+          <p:cNvSpPr>
+            <a:spLocks noGrp="1" noRot="1" noChangeAspect="1"/>
+          </p:cNvSpPr>
+          <p:nvPr>
+            <p:ph type="sldImg"/>
+          </p:nvPr>
+        </p:nvSpPr>
+        <p:spPr/>
+      </p:sp>
+      <p:sp>
+        <p:nvSpPr>
+          <p:cNvPr id="3" name="Notes Placeholder 2"/>
+          <p:cNvSpPr>
+            <a:spLocks noGrp="1"/>
+          </p:cNvSpPr>
+          <p:nvPr>
+            <p:ph type="body" idx="1"/>
+          </p:nvPr>
+        </p:nvSpPr>
+        <p:spPr/>
+        <p:txBody>
+          <a:bodyPr/>
+          <a:lstStyle/>
+          <a:p>
+            <a:r>
+              <a:rPr lang="en-US" dirty="0"/>
+              <a:t/>
+            </a:r>
+            <a:endParaRPr lang="en-US" dirty="0"/>
+          </a:p>
+        </p:txBody>
+      </p:sp>
+      <p:sp>
+        <p:nvSpPr>
+          <p:cNvPr id="4" name="Slide Number Placeholder 3"/>
+          <p:cNvSpPr>
+            <a:spLocks noGrp="1"/>
+          </p:cNvSpPr>
+          <p:nvPr>
+            <p:ph type="sldNum" sz="quarter" idx="10"/>
+          </p:nvPr>
+        </p:nvSpPr>
+        <p:spPr/>
+        <p:txBody>
+          <a:bodyPr/>
+          <a:lstStyle/>
+          <a:p>
+            <a:fld id="{F7021451-1387-4CA6-816F-3879F97B5CBC}" type="slidenum">
+              <a:rPr lang="en-US"/>
+              <a:t>12</a:t>
+            </a:fld>
+            <a:endParaRPr lang="en-US"/>
+          </a:p>
+        </p:txBody>
+      </p:sp>
+    </p:spTree>
+    <p:extLst>
+      <p:ext uri="{BB962C8B-B14F-4D97-AF65-F5344CB8AC3E}">
+        <p14:creationId xmlns:p14="http://schemas.microsoft.com/office/powerpoint/2010/main" val="1024086991"/>
+      </p:ext>
+    </p:extLst>
+  </p:cSld>
+  <p:clrMapOvr>
+    <a:masterClrMapping/>
+  </p:clrMapOvr>
+</p:notes>
+</file>
+
+<file path=ppt/notesSlides/notesSlide13.xml><?xml version="1.0" encoding="utf-8"?>
+<p:notes xmlns:a="http://schemas.openxmlformats.org/drawingml/2006/main" xmlns:r="http://schemas.openxmlformats.org/officeDocument/2006/relationships" xmlns:p="http://schemas.openxmlformats.org/presentationml/2006/main">
+  <p:cSld>
+    <p:spTree>
+      <p:nvGrpSpPr>
+        <p:cNvPr id="1" name=""/>
+        <p:cNvGrpSpPr/>
+        <p:nvPr/>
+      </p:nvGrpSpPr>
+      <p:grpSpPr>
+        <a:xfrm>
+          <a:off x="0" y="0"/>
+          <a:ext cx="0" cy="0"/>
+          <a:chOff x="0" y="0"/>
+          <a:chExt cx="0" cy="0"/>
+        </a:xfrm>
+      </p:grpSpPr>
+      <p:sp>
+        <p:nvSpPr>
+          <p:cNvPr id="2" name="Slide Image Placeholder 1"/>
+          <p:cNvSpPr>
+            <a:spLocks noGrp="1" noRot="1" noChangeAspect="1"/>
+          </p:cNvSpPr>
+          <p:nvPr>
+            <p:ph type="sldImg"/>
+          </p:nvPr>
+        </p:nvSpPr>
+        <p:spPr/>
+      </p:sp>
+      <p:sp>
+        <p:nvSpPr>
+          <p:cNvPr id="3" name="Notes Placeholder 2"/>
+          <p:cNvSpPr>
+            <a:spLocks noGrp="1"/>
+          </p:cNvSpPr>
+          <p:nvPr>
+            <p:ph type="body" idx="1"/>
+          </p:nvPr>
+        </p:nvSpPr>
+        <p:spPr/>
+        <p:txBody>
+          <a:bodyPr/>
+          <a:lstStyle/>
+          <a:p>
+            <a:r>
+              <a:rPr lang="en-US" dirty="0"/>
+              <a:t/>
+            </a:r>
+            <a:endParaRPr lang="en-US" dirty="0"/>
+          </a:p>
+        </p:txBody>
+      </p:sp>
+      <p:sp>
+        <p:nvSpPr>
+          <p:cNvPr id="4" name="Slide Number Placeholder 3"/>
+          <p:cNvSpPr>
+            <a:spLocks noGrp="1"/>
+          </p:cNvSpPr>
+          <p:nvPr>
+            <p:ph type="sldNum" sz="quarter" idx="10"/>
+          </p:nvPr>
+        </p:nvSpPr>
+        <p:spPr/>
+        <p:txBody>
+          <a:bodyPr/>
+          <a:lstStyle/>
+          <a:p>
+            <a:fld id="{F7021451-1387-4CA6-816F-3879F97B5CBC}" type="slidenum">
+              <a:rPr lang="en-US"/>
+              <a:t>13</a:t>
             </a:fld>
             <a:endParaRPr lang="en-US"/>
           </a:p>
@@ -2116,7 +2294,7 @@
                 <a:ea typeface="Yu Gothic" pitchFamily="34" charset="-122"/>
                 <a:cs typeface="Yu Gothic" pitchFamily="34" charset="-120"/>
               </a:rPr>
-              <a:t>TTX 1-B　役員フロアで撮影している人物</a:t>
+              <a:t>TTX 1-A 講評 ― 模範解答</a:t>
             </a:r>
             <a:endParaRPr lang="en-US" sz="2300" dirty="0"/>
           </a:p>
@@ -2136,7 +2314,7 @@
                 <a:ea typeface="Calibri" pitchFamily="34" charset="-122"/>
                 <a:cs typeface="Calibri" pitchFamily="34" charset="-120"/>
               </a:rPr>
-              <a:t>TTX 1-B — Someone Photographing on the Executive Floor</a:t>
+              <a:t>TTX 1-A Debrief — Model Answer</a:t>
             </a:r>
             <a:endParaRPr lang="en-US" sz="2300" dirty="0"/>
           </a:p>
@@ -2197,7 +2375,7 @@
                 <a:ea typeface="Calibri" pitchFamily="34" charset="-122"/>
                 <a:cs typeface="Calibri" pitchFamily="34" charset="-120"/>
               </a:rPr>
-              <a:t>CASE 1-B</a:t>
+              <a:t>DEBRIEF</a:t>
             </a:r>
             <a:endParaRPr lang="en-US" sz="1100" dirty="0"/>
           </a:p>
@@ -2205,18 +2383,721 @@
       </p:sp>
       <p:sp>
         <p:nvSpPr>
-          <p:cNvPr id="6" name="Shape 3"/>
+          <p:cNvPr id="6" name="Text 3"/>
           <p:cNvSpPr/>
           <p:nvPr/>
         </p:nvSpPr>
         <p:spPr>
           <a:xfrm>
             <a:off x="640080" y="1188720"/>
-            <a:ext cx="10911535" cy="1124712"/>
+            <a:ext cx="10911535" cy="530352"/>
+          </a:xfrm>
+          <a:prstGeom prst="rect">
+            <a:avLst/>
+          </a:prstGeom>
+          <a:noFill/>
+          <a:ln/>
+        </p:spPr>
+        <p:txBody>
+          <a:bodyPr wrap="square" lIns="0" tIns="0" rIns="0" bIns="0" rtlCol="0" anchor="t"/>
+          <a:lstStyle/>
+          <a:p>
+            <a:pPr indent="0" marL="0">
+              <a:lnSpc>
+                <a:spcPct val="90000"/>
+              </a:lnSpc>
+              <a:buNone/>
+            </a:pPr>
+            <a:r>
+              <a:rPr lang="en-US" sz="1000" b="1" dirty="0">
+                <a:solidFill>
+                  <a:srgbClr val="0D8A76"/>
+                </a:solidFill>
+                <a:latin typeface="Yu Gothic" pitchFamily="34" charset="0"/>
+                <a:ea typeface="Yu Gothic" pitchFamily="34" charset="-122"/>
+                <a:cs typeface="Yu Gothic" pitchFamily="34" charset="-120"/>
+              </a:rPr>
+              <a:t>狙い　</a:t>
+            </a:r>
+            <a:pPr indent="0" marL="0">
+              <a:lnSpc>
+                <a:spcPct val="90000"/>
+              </a:lnSpc>
+              <a:buNone/>
+            </a:pPr>
+            <a:r>
+              <a:rPr lang="en-US" sz="1150" b="1" dirty="0">
+                <a:solidFill>
+                  <a:srgbClr val="093259"/>
+                </a:solidFill>
+                <a:latin typeface="Yu Gothic" pitchFamily="34" charset="0"/>
+                <a:ea typeface="Yu Gothic" pitchFamily="34" charset="-122"/>
+                <a:cs typeface="Yu Gothic" pitchFamily="34" charset="-120"/>
+              </a:rPr>
+              <a:t>拾う行為と読む行為を分けられるか。情報資産の扱いの基本。</a:t>
+            </a:r>
+            <a:endParaRPr lang="en-US" sz="1000" dirty="0"/>
+          </a:p>
+          <a:p>
+            <a:pPr indent="0" marL="0">
+              <a:lnSpc>
+                <a:spcPct val="90000"/>
+              </a:lnSpc>
+              <a:buNone/>
+            </a:pPr>
+            <a:r>
+              <a:rPr lang="en-US" sz="850" i="1" dirty="0">
+                <a:solidFill>
+                  <a:srgbClr val="5F7183"/>
+                </a:solidFill>
+                <a:latin typeface="Calibri" pitchFamily="34" charset="0"/>
+                <a:ea typeface="Calibri" pitchFamily="34" charset="-122"/>
+                <a:cs typeface="Calibri" pitchFamily="34" charset="-120"/>
+              </a:rPr>
+              <a:t>Can you separate picking it up from reading it? This is the basis of handling information assets.</a:t>
+            </a:r>
+            <a:endParaRPr lang="en-US" sz="1000" dirty="0"/>
+          </a:p>
+        </p:txBody>
+      </p:sp>
+      <p:sp>
+        <p:nvSpPr>
+          <p:cNvPr id="7" name="Shape 4"/>
+          <p:cNvSpPr/>
+          <p:nvPr/>
+        </p:nvSpPr>
+        <p:spPr>
+          <a:xfrm>
+            <a:off x="640080" y="1773936"/>
+            <a:ext cx="5327752" cy="1091184"/>
           </a:xfrm>
           <a:prstGeom prst="roundRect">
             <a:avLst>
-              <a:gd name="adj" fmla="val 3252"/>
+              <a:gd name="adj" fmla="val 3352"/>
+            </a:avLst>
+          </a:prstGeom>
+          <a:solidFill>
+            <a:srgbClr val="EFF4F8"/>
+          </a:solidFill>
+          <a:ln/>
+        </p:spPr>
+      </p:sp>
+      <p:sp>
+        <p:nvSpPr>
+          <p:cNvPr id="8" name="Text 5"/>
+          <p:cNvSpPr/>
+          <p:nvPr/>
+        </p:nvSpPr>
+        <p:spPr>
+          <a:xfrm>
+            <a:off x="877824" y="1865376"/>
+            <a:ext cx="4852264" cy="908304"/>
+          </a:xfrm>
+          <a:prstGeom prst="rect">
+            <a:avLst/>
+          </a:prstGeom>
+          <a:noFill/>
+          <a:ln/>
+        </p:spPr>
+        <p:txBody>
+          <a:bodyPr wrap="square" lIns="0" tIns="0" rIns="0" bIns="0" rtlCol="0" anchor="t"/>
+          <a:lstStyle/>
+          <a:p>
+            <a:pPr indent="0" marL="0">
+              <a:lnSpc>
+                <a:spcPct val="90000"/>
+              </a:lnSpc>
+              <a:buNone/>
+            </a:pPr>
+            <a:r>
+              <a:rPr lang="en-US" sz="1050" b="1" dirty="0">
+                <a:solidFill>
+                  <a:srgbClr val="093259"/>
+                </a:solidFill>
+                <a:latin typeface="Yu Gothic" pitchFamily="34" charset="0"/>
+                <a:ea typeface="Yu Gothic" pitchFamily="34" charset="-122"/>
+                <a:cs typeface="Yu Gothic" pitchFamily="34" charset="-120"/>
+              </a:rPr>
+              <a:t>どの柱か</a:t>
+            </a:r>
+            <a:endParaRPr lang="en-US" sz="1050" dirty="0"/>
+          </a:p>
+          <a:p>
+            <a:pPr indent="0" marL="0">
+              <a:lnSpc>
+                <a:spcPct val="90000"/>
+              </a:lnSpc>
+              <a:buNone/>
+            </a:pPr>
+            <a:r>
+              <a:rPr lang="en-US" sz="1050" b="1" dirty="0">
+                <a:solidFill>
+                  <a:srgbClr val="1B2733"/>
+                </a:solidFill>
+                <a:latin typeface="Yu Gothic" pitchFamily="34" charset="0"/>
+                <a:ea typeface="Yu Gothic" pitchFamily="34" charset="-122"/>
+                <a:cs typeface="Yu Gothic" pitchFamily="34" charset="-120"/>
+              </a:rPr>
+              <a:t>Asset（情報資産）。外部に出れば Reputation にも及ぶ。</a:t>
+            </a:r>
+            <a:endParaRPr lang="en-US" sz="1050" dirty="0"/>
+          </a:p>
+          <a:p>
+            <a:pPr indent="0" marL="0">
+              <a:lnSpc>
+                <a:spcPct val="90000"/>
+              </a:lnSpc>
+              <a:buNone/>
+            </a:pPr>
+            <a:r>
+              <a:rPr lang="en-US" sz="800" i="1" dirty="0">
+                <a:solidFill>
+                  <a:srgbClr val="5F7183"/>
+                </a:solidFill>
+                <a:latin typeface="Calibri" pitchFamily="34" charset="0"/>
+                <a:ea typeface="Calibri" pitchFamily="34" charset="-122"/>
+                <a:cs typeface="Calibri" pitchFamily="34" charset="-120"/>
+              </a:rPr>
+              <a:t>Asset (information). If it leaves, it also becomes a Reputation issue.</a:t>
+            </a:r>
+            <a:endParaRPr lang="en-US" sz="1050" dirty="0"/>
+          </a:p>
+        </p:txBody>
+      </p:sp>
+      <p:sp>
+        <p:nvSpPr>
+          <p:cNvPr id="9" name="Shape 6"/>
+          <p:cNvSpPr/>
+          <p:nvPr/>
+        </p:nvSpPr>
+        <p:spPr>
+          <a:xfrm>
+            <a:off x="6223864" y="1773936"/>
+            <a:ext cx="5327752" cy="1091184"/>
+          </a:xfrm>
+          <a:prstGeom prst="roundRect">
+            <a:avLst>
+              <a:gd name="adj" fmla="val 3352"/>
+            </a:avLst>
+          </a:prstGeom>
+          <a:solidFill>
+            <a:srgbClr val="E4F4F0"/>
+          </a:solidFill>
+          <a:ln/>
+        </p:spPr>
+      </p:sp>
+      <p:sp>
+        <p:nvSpPr>
+          <p:cNvPr id="10" name="Text 7"/>
+          <p:cNvSpPr/>
+          <p:nvPr/>
+        </p:nvSpPr>
+        <p:spPr>
+          <a:xfrm>
+            <a:off x="6461608" y="1865376"/>
+            <a:ext cx="4852264" cy="908304"/>
+          </a:xfrm>
+          <a:prstGeom prst="rect">
+            <a:avLst/>
+          </a:prstGeom>
+          <a:noFill/>
+          <a:ln/>
+        </p:spPr>
+        <p:txBody>
+          <a:bodyPr wrap="square" lIns="0" tIns="0" rIns="0" bIns="0" rtlCol="0" anchor="t"/>
+          <a:lstStyle/>
+          <a:p>
+            <a:pPr indent="0" marL="0">
+              <a:lnSpc>
+                <a:spcPct val="90000"/>
+              </a:lnSpc>
+              <a:buNone/>
+            </a:pPr>
+            <a:r>
+              <a:rPr lang="en-US" sz="1050" b="1" dirty="0">
+                <a:solidFill>
+                  <a:srgbClr val="0D8A76"/>
+                </a:solidFill>
+                <a:latin typeface="Yu Gothic" pitchFamily="34" charset="0"/>
+                <a:ea typeface="Yu Gothic" pitchFamily="34" charset="-122"/>
+                <a:cs typeface="Yu Gothic" pitchFamily="34" charset="-120"/>
+              </a:rPr>
+              <a:t>拾ってよいか</a:t>
+            </a:r>
+            <a:endParaRPr lang="en-US" sz="1050" dirty="0"/>
+          </a:p>
+          <a:p>
+            <a:pPr indent="0" marL="0">
+              <a:lnSpc>
+                <a:spcPct val="90000"/>
+              </a:lnSpc>
+              <a:buNone/>
+            </a:pPr>
+            <a:r>
+              <a:rPr lang="en-US" sz="1050" b="1" dirty="0">
+                <a:solidFill>
+                  <a:srgbClr val="1B2733"/>
+                </a:solidFill>
+                <a:latin typeface="Yu Gothic" pitchFamily="34" charset="0"/>
+                <a:ea typeface="Yu Gothic" pitchFamily="34" charset="-122"/>
+                <a:cs typeface="Yu Gothic" pitchFamily="34" charset="-120"/>
+              </a:rPr>
+              <a:t>拾ってよい。ただし読んではいけない。表紙の分類表示までで判断する。</a:t>
+            </a:r>
+            <a:endParaRPr lang="en-US" sz="1050" dirty="0"/>
+          </a:p>
+          <a:p>
+            <a:pPr indent="0" marL="0">
+              <a:lnSpc>
+                <a:spcPct val="90000"/>
+              </a:lnSpc>
+              <a:buNone/>
+            </a:pPr>
+            <a:r>
+              <a:rPr lang="en-US" sz="800" i="1" dirty="0">
+                <a:solidFill>
+                  <a:srgbClr val="5F7183"/>
+                </a:solidFill>
+                <a:latin typeface="Calibri" pitchFamily="34" charset="0"/>
+                <a:ea typeface="Calibri" pitchFamily="34" charset="-122"/>
+                <a:cs typeface="Calibri" pitchFamily="34" charset="-120"/>
+              </a:rPr>
+              <a:t>Yes, pick it up. Do not read it. Judge from the cover classification only.</a:t>
+            </a:r>
+            <a:endParaRPr lang="en-US" sz="1050" dirty="0"/>
+          </a:p>
+        </p:txBody>
+      </p:sp>
+      <p:sp>
+        <p:nvSpPr>
+          <p:cNvPr id="11" name="Shape 8"/>
+          <p:cNvSpPr/>
+          <p:nvPr/>
+        </p:nvSpPr>
+        <p:spPr>
+          <a:xfrm>
+            <a:off x="640080" y="2993136"/>
+            <a:ext cx="5327752" cy="1091184"/>
+          </a:xfrm>
+          <a:prstGeom prst="roundRect">
+            <a:avLst>
+              <a:gd name="adj" fmla="val 3352"/>
+            </a:avLst>
+          </a:prstGeom>
+          <a:solidFill>
+            <a:srgbClr val="EFF4F8"/>
+          </a:solidFill>
+          <a:ln/>
+        </p:spPr>
+      </p:sp>
+      <p:sp>
+        <p:nvSpPr>
+          <p:cNvPr id="12" name="Text 9"/>
+          <p:cNvSpPr/>
+          <p:nvPr/>
+        </p:nvSpPr>
+        <p:spPr>
+          <a:xfrm>
+            <a:off x="877824" y="3084576"/>
+            <a:ext cx="4852264" cy="908304"/>
+          </a:xfrm>
+          <a:prstGeom prst="rect">
+            <a:avLst/>
+          </a:prstGeom>
+          <a:noFill/>
+          <a:ln/>
+        </p:spPr>
+        <p:txBody>
+          <a:bodyPr wrap="square" lIns="0" tIns="0" rIns="0" bIns="0" rtlCol="0" anchor="t"/>
+          <a:lstStyle/>
+          <a:p>
+            <a:pPr indent="0" marL="0">
+              <a:lnSpc>
+                <a:spcPct val="90000"/>
+              </a:lnSpc>
+              <a:buNone/>
+            </a:pPr>
+            <a:r>
+              <a:rPr lang="en-US" sz="1050" b="1" dirty="0">
+                <a:solidFill>
+                  <a:srgbClr val="093259"/>
+                </a:solidFill>
+                <a:latin typeface="Yu Gothic" pitchFamily="34" charset="0"/>
+                <a:ea typeface="Yu Gothic" pitchFamily="34" charset="-122"/>
+                <a:cs typeface="Yu Gothic" pitchFamily="34" charset="-120"/>
+              </a:rPr>
+              <a:t>なぜ読めないか</a:t>
+            </a:r>
+            <a:endParaRPr lang="en-US" sz="1050" dirty="0"/>
+          </a:p>
+          <a:p>
+            <a:pPr indent="0" marL="0">
+              <a:lnSpc>
+                <a:spcPct val="90000"/>
+              </a:lnSpc>
+              <a:buNone/>
+            </a:pPr>
+            <a:r>
+              <a:rPr lang="en-US" sz="1050" b="1" dirty="0">
+                <a:solidFill>
+                  <a:srgbClr val="1B2733"/>
+                </a:solidFill>
+                <a:latin typeface="Yu Gothic" pitchFamily="34" charset="0"/>
+                <a:ea typeface="Yu Gothic" pitchFamily="34" charset="-122"/>
+                <a:cs typeface="Yu Gothic" pitchFamily="34" charset="-120"/>
+              </a:rPr>
+              <a:t>業務上の必要がない。営業秘密に該当しうる。読んだ事実自体が問題になる。</a:t>
+            </a:r>
+            <a:endParaRPr lang="en-US" sz="1050" dirty="0"/>
+          </a:p>
+          <a:p>
+            <a:pPr indent="0" marL="0">
+              <a:lnSpc>
+                <a:spcPct val="90000"/>
+              </a:lnSpc>
+              <a:buNone/>
+            </a:pPr>
+            <a:r>
+              <a:rPr lang="en-US" sz="800" i="1" dirty="0">
+                <a:solidFill>
+                  <a:srgbClr val="5F7183"/>
+                </a:solidFill>
+                <a:latin typeface="Calibri" pitchFamily="34" charset="0"/>
+                <a:ea typeface="Calibri" pitchFamily="34" charset="-122"/>
+                <a:cs typeface="Calibri" pitchFamily="34" charset="-120"/>
+              </a:rPr>
+              <a:t>There is no operational need. It may be a trade secret. Reading it is itself the problem.</a:t>
+            </a:r>
+            <a:endParaRPr lang="en-US" sz="1050" dirty="0"/>
+          </a:p>
+        </p:txBody>
+      </p:sp>
+      <p:sp>
+        <p:nvSpPr>
+          <p:cNvPr id="13" name="Shape 10"/>
+          <p:cNvSpPr/>
+          <p:nvPr/>
+        </p:nvSpPr>
+        <p:spPr>
+          <a:xfrm>
+            <a:off x="6223864" y="2993136"/>
+            <a:ext cx="5327752" cy="1091184"/>
+          </a:xfrm>
+          <a:prstGeom prst="roundRect">
+            <a:avLst>
+              <a:gd name="adj" fmla="val 3352"/>
+            </a:avLst>
+          </a:prstGeom>
+          <a:solidFill>
+            <a:srgbClr val="EFF4F8"/>
+          </a:solidFill>
+          <a:ln/>
+        </p:spPr>
+      </p:sp>
+      <p:sp>
+        <p:nvSpPr>
+          <p:cNvPr id="14" name="Text 11"/>
+          <p:cNvSpPr/>
+          <p:nvPr/>
+        </p:nvSpPr>
+        <p:spPr>
+          <a:xfrm>
+            <a:off x="6461608" y="3084576"/>
+            <a:ext cx="4852264" cy="908304"/>
+          </a:xfrm>
+          <a:prstGeom prst="rect">
+            <a:avLst/>
+          </a:prstGeom>
+          <a:noFill/>
+          <a:ln/>
+        </p:spPr>
+        <p:txBody>
+          <a:bodyPr wrap="square" lIns="0" tIns="0" rIns="0" bIns="0" rtlCol="0" anchor="t"/>
+          <a:lstStyle/>
+          <a:p>
+            <a:pPr indent="0" marL="0">
+              <a:lnSpc>
+                <a:spcPct val="90000"/>
+              </a:lnSpc>
+              <a:buNone/>
+            </a:pPr>
+            <a:r>
+              <a:rPr lang="en-US" sz="1050" b="1" dirty="0">
+                <a:solidFill>
+                  <a:srgbClr val="093259"/>
+                </a:solidFill>
+                <a:latin typeface="Yu Gothic" pitchFamily="34" charset="0"/>
+                <a:ea typeface="Yu Gothic" pitchFamily="34" charset="-122"/>
+                <a:cs typeface="Yu Gothic" pitchFamily="34" charset="-120"/>
+              </a:rPr>
+              <a:t>深夜であること</a:t>
+            </a:r>
+            <a:endParaRPr lang="en-US" sz="1050" dirty="0"/>
+          </a:p>
+          <a:p>
+            <a:pPr indent="0" marL="0">
+              <a:lnSpc>
+                <a:spcPct val="90000"/>
+              </a:lnSpc>
+              <a:buNone/>
+            </a:pPr>
+            <a:r>
+              <a:rPr lang="en-US" sz="1050" b="1" dirty="0">
+                <a:solidFill>
+                  <a:srgbClr val="1B2733"/>
+                </a:solidFill>
+                <a:latin typeface="Yu Gothic" pitchFamily="34" charset="0"/>
+                <a:ea typeface="Yu Gothic" pitchFamily="34" charset="-122"/>
+                <a:cs typeface="Yu Gothic" pitchFamily="34" charset="-120"/>
+              </a:rPr>
+              <a:t>報告を翌朝に回さない。発見時刻が記録の価値を決める。</a:t>
+            </a:r>
+            <a:endParaRPr lang="en-US" sz="1050" dirty="0"/>
+          </a:p>
+          <a:p>
+            <a:pPr indent="0" marL="0">
+              <a:lnSpc>
+                <a:spcPct val="90000"/>
+              </a:lnSpc>
+              <a:buNone/>
+            </a:pPr>
+            <a:r>
+              <a:rPr lang="en-US" sz="800" i="1" dirty="0">
+                <a:solidFill>
+                  <a:srgbClr val="5F7183"/>
+                </a:solidFill>
+                <a:latin typeface="Calibri" pitchFamily="34" charset="0"/>
+                <a:ea typeface="Calibri" pitchFamily="34" charset="-122"/>
+                <a:cs typeface="Calibri" pitchFamily="34" charset="-120"/>
+              </a:rPr>
+              <a:t>Do not hold the report until morning. The time of discovery is what gives the record value.</a:t>
+            </a:r>
+            <a:endParaRPr lang="en-US" sz="1050" dirty="0"/>
+          </a:p>
+        </p:txBody>
+      </p:sp>
+      <p:sp>
+        <p:nvSpPr>
+          <p:cNvPr id="15" name="Shape 12"/>
+          <p:cNvSpPr/>
+          <p:nvPr/>
+        </p:nvSpPr>
+        <p:spPr>
+          <a:xfrm>
+            <a:off x="640080" y="4212336"/>
+            <a:ext cx="5327752" cy="1091184"/>
+          </a:xfrm>
+          <a:prstGeom prst="roundRect">
+            <a:avLst>
+              <a:gd name="adj" fmla="val 3352"/>
+            </a:avLst>
+          </a:prstGeom>
+          <a:solidFill>
+            <a:srgbClr val="EFF4F8"/>
+          </a:solidFill>
+          <a:ln/>
+        </p:spPr>
+      </p:sp>
+      <p:sp>
+        <p:nvSpPr>
+          <p:cNvPr id="16" name="Text 13"/>
+          <p:cNvSpPr/>
+          <p:nvPr/>
+        </p:nvSpPr>
+        <p:spPr>
+          <a:xfrm>
+            <a:off x="877824" y="4303776"/>
+            <a:ext cx="4852264" cy="908304"/>
+          </a:xfrm>
+          <a:prstGeom prst="rect">
+            <a:avLst/>
+          </a:prstGeom>
+          <a:noFill/>
+          <a:ln/>
+        </p:spPr>
+        <p:txBody>
+          <a:bodyPr wrap="square" lIns="0" tIns="0" rIns="0" bIns="0" rtlCol="0" anchor="t"/>
+          <a:lstStyle/>
+          <a:p>
+            <a:pPr indent="0" marL="0">
+              <a:lnSpc>
+                <a:spcPct val="90000"/>
+              </a:lnSpc>
+              <a:buNone/>
+            </a:pPr>
+            <a:r>
+              <a:rPr lang="en-US" sz="1050" b="1" dirty="0">
+                <a:solidFill>
+                  <a:srgbClr val="093259"/>
+                </a:solidFill>
+                <a:latin typeface="Yu Gothic" pitchFamily="34" charset="0"/>
+                <a:ea typeface="Yu Gothic" pitchFamily="34" charset="-122"/>
+                <a:cs typeface="Yu Gothic" pitchFamily="34" charset="-120"/>
+              </a:rPr>
+              <a:t>記録の書き方</a:t>
+            </a:r>
+            <a:endParaRPr lang="en-US" sz="1050" dirty="0"/>
+          </a:p>
+          <a:p>
+            <a:pPr indent="0" marL="0">
+              <a:lnSpc>
+                <a:spcPct val="90000"/>
+              </a:lnSpc>
+              <a:buNone/>
+            </a:pPr>
+            <a:r>
+              <a:rPr lang="en-US" sz="1050" b="1" dirty="0">
+                <a:solidFill>
+                  <a:srgbClr val="1B2733"/>
+                </a:solidFill>
+                <a:latin typeface="Yu Gothic" pitchFamily="34" charset="0"/>
+                <a:ea typeface="Yu Gothic" pitchFamily="34" charset="-122"/>
+                <a:cs typeface="Yu Gothic" pitchFamily="34" charset="-120"/>
+              </a:rPr>
+              <a:t>発見時刻、場所、分類表示、引渡し先を書く。内容は書かない。</a:t>
+            </a:r>
+            <a:endParaRPr lang="en-US" sz="1050" dirty="0"/>
+          </a:p>
+          <a:p>
+            <a:pPr indent="0" marL="0">
+              <a:lnSpc>
+                <a:spcPct val="90000"/>
+              </a:lnSpc>
+              <a:buNone/>
+            </a:pPr>
+            <a:r>
+              <a:rPr lang="en-US" sz="800" i="1" dirty="0">
+                <a:solidFill>
+                  <a:srgbClr val="5F7183"/>
+                </a:solidFill>
+                <a:latin typeface="Calibri" pitchFamily="34" charset="0"/>
+                <a:ea typeface="Calibri" pitchFamily="34" charset="-122"/>
+                <a:cs typeface="Calibri" pitchFamily="34" charset="-120"/>
+              </a:rPr>
+              <a:t>Record time, place, classification and who you handed it to. Never the contents.</a:t>
+            </a:r>
+            <a:endParaRPr lang="en-US" sz="1050" dirty="0"/>
+          </a:p>
+        </p:txBody>
+      </p:sp>
+      <p:sp>
+        <p:nvSpPr>
+          <p:cNvPr id="17" name="Shape 14"/>
+          <p:cNvSpPr/>
+          <p:nvPr/>
+        </p:nvSpPr>
+        <p:spPr>
+          <a:xfrm>
+            <a:off x="6223864" y="4212336"/>
+            <a:ext cx="5327752" cy="1091184"/>
+          </a:xfrm>
+          <a:prstGeom prst="roundRect">
+            <a:avLst>
+              <a:gd name="adj" fmla="val 3352"/>
+            </a:avLst>
+          </a:prstGeom>
+          <a:solidFill>
+            <a:srgbClr val="EFF4F8"/>
+          </a:solidFill>
+          <a:ln/>
+        </p:spPr>
+      </p:sp>
+      <p:sp>
+        <p:nvSpPr>
+          <p:cNvPr id="18" name="Text 15"/>
+          <p:cNvSpPr/>
+          <p:nvPr/>
+        </p:nvSpPr>
+        <p:spPr>
+          <a:xfrm>
+            <a:off x="6461608" y="4303776"/>
+            <a:ext cx="4852264" cy="908304"/>
+          </a:xfrm>
+          <a:prstGeom prst="rect">
+            <a:avLst/>
+          </a:prstGeom>
+          <a:noFill/>
+          <a:ln/>
+        </p:spPr>
+        <p:txBody>
+          <a:bodyPr wrap="square" lIns="0" tIns="0" rIns="0" bIns="0" rtlCol="0" anchor="t"/>
+          <a:lstStyle/>
+          <a:p>
+            <a:pPr indent="0" marL="0">
+              <a:lnSpc>
+                <a:spcPct val="90000"/>
+              </a:lnSpc>
+              <a:buNone/>
+            </a:pPr>
+            <a:r>
+              <a:rPr lang="en-US" sz="1050" b="1" dirty="0">
+                <a:solidFill>
+                  <a:srgbClr val="093259"/>
+                </a:solidFill>
+                <a:latin typeface="Yu Gothic" pitchFamily="34" charset="0"/>
+                <a:ea typeface="Yu Gothic" pitchFamily="34" charset="-122"/>
+                <a:cs typeface="Yu Gothic" pitchFamily="34" charset="-120"/>
+              </a:rPr>
+              <a:t>清掃員が入室</a:t>
+            </a:r>
+            <a:endParaRPr lang="en-US" sz="1050" dirty="0"/>
+          </a:p>
+          <a:p>
+            <a:pPr indent="0" marL="0">
+              <a:lnSpc>
+                <a:spcPct val="90000"/>
+              </a:lnSpc>
+              <a:buNone/>
+            </a:pPr>
+            <a:r>
+              <a:rPr lang="en-US" sz="1050" b="1" dirty="0">
+                <a:solidFill>
+                  <a:srgbClr val="1B2733"/>
+                </a:solidFill>
+                <a:latin typeface="Yu Gothic" pitchFamily="34" charset="0"/>
+                <a:ea typeface="Yu Gothic" pitchFamily="34" charset="-122"/>
+                <a:cs typeface="Yu Gothic" pitchFamily="34" charset="-120"/>
+              </a:rPr>
+              <a:t>面前で扱う。単独で処理しない。誰が見ていたかも記録する。</a:t>
+            </a:r>
+            <a:endParaRPr lang="en-US" sz="1050" dirty="0"/>
+          </a:p>
+          <a:p>
+            <a:pPr indent="0" marL="0">
+              <a:lnSpc>
+                <a:spcPct val="90000"/>
+              </a:lnSpc>
+              <a:buNone/>
+            </a:pPr>
+            <a:r>
+              <a:rPr lang="en-US" sz="800" i="1" dirty="0">
+                <a:solidFill>
+                  <a:srgbClr val="5F7183"/>
+                </a:solidFill>
+                <a:latin typeface="Calibri" pitchFamily="34" charset="0"/>
+                <a:ea typeface="Calibri" pitchFamily="34" charset="-122"/>
+                <a:cs typeface="Calibri" pitchFamily="34" charset="-120"/>
+              </a:rPr>
+              <a:t>Handle it in their presence. Do not process it alone. Record who witnessed it.</a:t>
+            </a:r>
+            <a:endParaRPr lang="en-US" sz="1050" dirty="0"/>
+          </a:p>
+        </p:txBody>
+      </p:sp>
+      <p:sp>
+        <p:nvSpPr>
+          <p:cNvPr id="19" name="Shape 16"/>
+          <p:cNvSpPr/>
+          <p:nvPr/>
+        </p:nvSpPr>
+        <p:spPr>
+          <a:xfrm>
+            <a:off x="640080" y="5358384"/>
+            <a:ext cx="10911535" cy="493776"/>
+          </a:xfrm>
+          <a:prstGeom prst="roundRect">
+            <a:avLst>
+              <a:gd name="adj" fmla="val 7407"/>
             </a:avLst>
           </a:prstGeom>
           <a:solidFill>
@@ -2227,28 +3108,28 @@
       </p:sp>
       <p:sp>
         <p:nvSpPr>
-          <p:cNvPr id="7" name="Text 4"/>
-          <p:cNvSpPr/>
-          <p:nvPr/>
-        </p:nvSpPr>
-        <p:spPr>
-          <a:xfrm>
-            <a:off x="950976" y="1316736"/>
-            <a:ext cx="10289743" cy="868680"/>
-          </a:xfrm>
-          <a:prstGeom prst="rect">
-            <a:avLst/>
-          </a:prstGeom>
-          <a:noFill/>
-          <a:ln/>
-        </p:spPr>
-        <p:txBody>
-          <a:bodyPr wrap="square" lIns="0" tIns="0" rIns="0" bIns="0" rtlCol="0" anchor="t"/>
-          <a:lstStyle/>
-          <a:p>
-            <a:pPr indent="0" marL="0">
-              <a:lnSpc>
-                <a:spcPct val="92000"/>
+          <p:cNvPr id="20" name="Text 17"/>
+          <p:cNvSpPr/>
+          <p:nvPr/>
+        </p:nvSpPr>
+        <p:spPr>
+          <a:xfrm>
+            <a:off x="877824" y="5404104"/>
+            <a:ext cx="10436047" cy="402336"/>
+          </a:xfrm>
+          <a:prstGeom prst="rect">
+            <a:avLst/>
+          </a:prstGeom>
+          <a:noFill/>
+          <a:ln/>
+        </p:spPr>
+        <p:txBody>
+          <a:bodyPr wrap="square" lIns="0" tIns="0" rIns="0" bIns="0" rtlCol="0" anchor="ctr"/>
+          <a:lstStyle/>
+          <a:p>
+            <a:pPr indent="0" marL="0">
+              <a:lnSpc>
+                <a:spcPct val="86000"/>
               </a:lnSpc>
               <a:buNone/>
             </a:pPr>
@@ -2261,824 +3142,52 @@
                 <a:ea typeface="Yu Gothic" pitchFamily="34" charset="-122"/>
                 <a:cs typeface="Yu Gothic" pitchFamily="34" charset="-120"/>
               </a:rPr>
-              <a:t>シナリオ　</a:t>
-            </a:r>
-            <a:pPr indent="0" marL="0">
-              <a:lnSpc>
-                <a:spcPct val="92000"/>
-              </a:lnSpc>
-              <a:buNone/>
-            </a:pPr>
-            <a:r>
-              <a:rPr lang="en-US" sz="800" dirty="0">
-                <a:solidFill>
-                  <a:srgbClr val="12B198"/>
-                </a:solidFill>
-                <a:latin typeface="Calibri" pitchFamily="34" charset="0"/>
-                <a:ea typeface="Calibri" pitchFamily="34" charset="-122"/>
-                <a:cs typeface="Calibri" pitchFamily="34" charset="-120"/>
-              </a:rPr>
-              <a:t>SCENARIO</a:t>
+              <a:t>割れる論点　</a:t>
+            </a:r>
+            <a:pPr indent="0" marL="0">
+              <a:lnSpc>
+                <a:spcPct val="86000"/>
+              </a:lnSpc>
+              <a:buNone/>
+            </a:pPr>
+            <a:r>
+              <a:rPr lang="en-US" sz="1100" b="1" dirty="0">
+                <a:solidFill>
+                  <a:srgbClr val="FFFFFF"/>
+                </a:solidFill>
+                <a:latin typeface="Yu Gothic" pitchFamily="34" charset="0"/>
+                <a:ea typeface="Yu Gothic" pitchFamily="34" charset="-122"/>
+                <a:cs typeface="Yu Gothic" pitchFamily="34" charset="-120"/>
+              </a:rPr>
+              <a:t>保管するか、その場に置いて報告するか。どちらも成り立つ。根拠を述べさせる。</a:t>
             </a:r>
             <a:endParaRPr lang="en-US" sz="950" dirty="0"/>
           </a:p>
           <a:p>
             <a:pPr indent="0" marL="0">
               <a:lnSpc>
-                <a:spcPct val="92000"/>
-              </a:lnSpc>
-              <a:buNone/>
-            </a:pPr>
-            <a:r>
-              <a:rPr lang="en-US" sz="1150" b="1" dirty="0">
-                <a:solidFill>
-                  <a:srgbClr val="FFFFFF"/>
-                </a:solidFill>
-                <a:latin typeface="Yu Gothic" pitchFamily="34" charset="0"/>
-                <a:ea typeface="Yu Gothic" pitchFamily="34" charset="-122"/>
-                <a:cs typeface="Yu Gothic" pitchFamily="34" charset="-120"/>
-              </a:rPr>
-              <a:t>平日19時、役員フロアの通路で、社員証を提げた人物がスマートフォンで壁面のホワイトボードを撮影している。ボードには組織図と数字が書かれている。声をかけると「自分の部署の資料だ」と答える。</a:t>
+                <a:spcPct val="86000"/>
+              </a:lnSpc>
+              <a:buNone/>
+            </a:pPr>
+            <a:r>
+              <a:rPr lang="en-US" sz="800" i="1" dirty="0">
+                <a:solidFill>
+                  <a:srgbClr val="9FD8CD"/>
+                </a:solidFill>
+                <a:latin typeface="Calibri" pitchFamily="34" charset="0"/>
+                <a:ea typeface="Calibri" pitchFamily="34" charset="-122"/>
+                <a:cs typeface="Calibri" pitchFamily="34" charset="-120"/>
+              </a:rPr>
+              <a:t>Secure it, or leave it and report? Both are defensible. Make them state the reasoning.</a:t>
             </a:r>
             <a:endParaRPr lang="en-US" sz="950" dirty="0"/>
           </a:p>
-          <a:p>
-            <a:pPr indent="0" marL="0">
-              <a:lnSpc>
-                <a:spcPct val="92000"/>
-              </a:lnSpc>
-              <a:buNone/>
-            </a:pPr>
-            <a:r>
-              <a:rPr lang="en-US" sz="800" i="1" dirty="0">
-                <a:solidFill>
-                  <a:srgbClr val="9FD8CD"/>
-                </a:solidFill>
-                <a:latin typeface="Calibri" pitchFamily="34" charset="0"/>
-                <a:ea typeface="Calibri" pitchFamily="34" charset="-122"/>
-                <a:cs typeface="Calibri" pitchFamily="34" charset="-120"/>
-              </a:rPr>
-              <a:t>19:00 on a weekday. On the executive floor, a person wearing an employee badge is photographing a whiteboard with a smartphone. The board shows an org chart and figures. Asked about it, they say "this is my own department's material."</a:t>
-            </a:r>
-            <a:endParaRPr lang="en-US" sz="950" dirty="0"/>
-          </a:p>
-        </p:txBody>
-      </p:sp>
-      <p:sp>
-        <p:nvSpPr>
-          <p:cNvPr id="8" name="Text 5"/>
-          <p:cNvSpPr/>
-          <p:nvPr/>
-        </p:nvSpPr>
-        <p:spPr>
-          <a:xfrm>
-            <a:off x="640080" y="2459736"/>
-            <a:ext cx="10911535" cy="566928"/>
-          </a:xfrm>
-          <a:prstGeom prst="rect">
-            <a:avLst/>
-          </a:prstGeom>
-          <a:noFill/>
-          <a:ln/>
-        </p:spPr>
-        <p:txBody>
-          <a:bodyPr wrap="square" lIns="0" tIns="0" rIns="0" bIns="0" rtlCol="0" anchor="t"/>
-          <a:lstStyle/>
-          <a:p>
-            <a:pPr indent="0" marL="0">
-              <a:lnSpc>
-                <a:spcPct val="90000"/>
-              </a:lnSpc>
-              <a:buNone/>
-            </a:pPr>
-            <a:r>
-              <a:rPr lang="en-US" sz="1000" b="1" dirty="0">
-                <a:solidFill>
-                  <a:srgbClr val="0D8A76"/>
-                </a:solidFill>
-                <a:latin typeface="Yu Gothic" pitchFamily="34" charset="0"/>
-                <a:ea typeface="Yu Gothic" pitchFamily="34" charset="-122"/>
-                <a:cs typeface="Yu Gothic" pitchFamily="34" charset="-120"/>
-              </a:rPr>
-              <a:t>問い　</a:t>
-            </a:r>
-            <a:pPr indent="0" marL="0">
-              <a:lnSpc>
-                <a:spcPct val="90000"/>
-              </a:lnSpc>
-              <a:buNone/>
-            </a:pPr>
-            <a:r>
-              <a:rPr lang="en-US" sz="1250" b="1" dirty="0">
-                <a:solidFill>
-                  <a:srgbClr val="093259"/>
-                </a:solidFill>
-                <a:latin typeface="Yu Gothic" pitchFamily="34" charset="0"/>
-                <a:ea typeface="Yu Gothic" pitchFamily="34" charset="-122"/>
-                <a:cs typeface="Yu Gothic" pitchFamily="34" charset="-120"/>
-              </a:rPr>
-              <a:t>あなたなら次の60秒、何をどう動きますか。</a:t>
-            </a:r>
-            <a:endParaRPr lang="en-US" sz="1000" dirty="0"/>
-          </a:p>
-          <a:p>
-            <a:pPr indent="0" marL="0">
-              <a:lnSpc>
-                <a:spcPct val="90000"/>
-              </a:lnSpc>
-              <a:buNone/>
-            </a:pPr>
-            <a:r>
-              <a:rPr lang="en-US" sz="850" i="1" dirty="0">
-                <a:solidFill>
-                  <a:srgbClr val="5F7183"/>
-                </a:solidFill>
-                <a:latin typeface="Calibri" pitchFamily="34" charset="0"/>
-                <a:ea typeface="Calibri" pitchFamily="34" charset="-122"/>
-                <a:cs typeface="Calibri" pitchFamily="34" charset="-120"/>
-              </a:rPr>
-              <a:t>What do you do in the next sixty seconds?</a:t>
-            </a:r>
-            <a:endParaRPr lang="en-US" sz="1000" dirty="0"/>
-          </a:p>
-        </p:txBody>
-      </p:sp>
-      <p:sp>
-        <p:nvSpPr>
-          <p:cNvPr id="9" name="Shape 6"/>
-          <p:cNvSpPr/>
-          <p:nvPr/>
-        </p:nvSpPr>
-        <p:spPr>
-          <a:xfrm>
-            <a:off x="640080" y="3081528"/>
-            <a:ext cx="5327752" cy="1074420"/>
-          </a:xfrm>
-          <a:prstGeom prst="roundRect">
-            <a:avLst>
-              <a:gd name="adj" fmla="val 3404"/>
-            </a:avLst>
-          </a:prstGeom>
-          <a:solidFill>
-            <a:srgbClr val="EFF4F8"/>
-          </a:solidFill>
-          <a:ln/>
-        </p:spPr>
-      </p:sp>
-      <p:sp>
-        <p:nvSpPr>
-          <p:cNvPr id="10" name="Shape 7"/>
-          <p:cNvSpPr/>
-          <p:nvPr/>
-        </p:nvSpPr>
-        <p:spPr>
-          <a:xfrm>
-            <a:off x="804672" y="3472434"/>
-            <a:ext cx="292608" cy="292608"/>
-          </a:xfrm>
-          <a:prstGeom prst="ellipse">
-            <a:avLst/>
-          </a:prstGeom>
-          <a:solidFill>
-            <a:srgbClr val="12B198"/>
-          </a:solidFill>
-          <a:ln/>
-        </p:spPr>
-      </p:sp>
-      <p:sp>
-        <p:nvSpPr>
-          <p:cNvPr id="11" name="Text 8"/>
-          <p:cNvSpPr/>
-          <p:nvPr/>
-        </p:nvSpPr>
-        <p:spPr>
-          <a:xfrm>
-            <a:off x="804672" y="3472434"/>
-            <a:ext cx="292608" cy="292608"/>
-          </a:xfrm>
-          <a:prstGeom prst="rect">
-            <a:avLst/>
-          </a:prstGeom>
-          <a:noFill/>
-          <a:ln/>
-        </p:spPr>
-        <p:txBody>
-          <a:bodyPr wrap="square" lIns="0" tIns="0" rIns="0" bIns="0" rtlCol="0" anchor="ctr"/>
-          <a:lstStyle/>
-          <a:p>
-            <a:pPr algn="ctr" indent="0" marL="0">
-              <a:buNone/>
-            </a:pPr>
-            <a:r>
-              <a:rPr lang="en-US" sz="1100" b="1" dirty="0">
-                <a:solidFill>
-                  <a:srgbClr val="FFFFFF"/>
-                </a:solidFill>
-                <a:latin typeface="Calibri" pitchFamily="34" charset="0"/>
-                <a:ea typeface="Calibri" pitchFamily="34" charset="-122"/>
-                <a:cs typeface="Calibri" pitchFamily="34" charset="-120"/>
-              </a:rPr>
-              <a:t>1</a:t>
-            </a:r>
-            <a:endParaRPr lang="en-US" sz="1100" dirty="0"/>
-          </a:p>
-        </p:txBody>
-      </p:sp>
-      <p:sp>
-        <p:nvSpPr>
-          <p:cNvPr id="12" name="Text 9"/>
-          <p:cNvSpPr/>
-          <p:nvPr/>
-        </p:nvSpPr>
-        <p:spPr>
-          <a:xfrm>
-            <a:off x="1188720" y="3136392"/>
-            <a:ext cx="4596232" cy="964692"/>
-          </a:xfrm>
-          <a:prstGeom prst="rect">
-            <a:avLst/>
-          </a:prstGeom>
-          <a:noFill/>
-          <a:ln/>
-        </p:spPr>
-        <p:txBody>
-          <a:bodyPr wrap="square" lIns="0" tIns="0" rIns="0" bIns="0" rtlCol="0" anchor="ctr"/>
-          <a:lstStyle/>
-          <a:p>
-            <a:pPr indent="0" marL="0">
-              <a:lnSpc>
-                <a:spcPct val="88000"/>
-              </a:lnSpc>
-              <a:buNone/>
-            </a:pPr>
-            <a:r>
-              <a:rPr lang="en-US" sz="1050" b="1" dirty="0">
-                <a:solidFill>
-                  <a:srgbClr val="1B2733"/>
-                </a:solidFill>
-                <a:latin typeface="Yu Gothic" pitchFamily="34" charset="0"/>
-                <a:ea typeface="Yu Gothic" pitchFamily="34" charset="-122"/>
-                <a:cs typeface="Yu Gothic" pitchFamily="34" charset="-120"/>
-              </a:rPr>
-              <a:t>社員証があることは、撮影してよい根拠になるか。</a:t>
-            </a:r>
-            <a:endParaRPr lang="en-US" sz="1050" dirty="0"/>
-          </a:p>
-          <a:p>
-            <a:pPr indent="0" marL="0">
-              <a:lnSpc>
-                <a:spcPct val="88000"/>
-              </a:lnSpc>
-              <a:buNone/>
-            </a:pPr>
-            <a:r>
-              <a:rPr lang="en-US" sz="800" i="1" dirty="0">
-                <a:solidFill>
-                  <a:srgbClr val="5F7183"/>
-                </a:solidFill>
-                <a:latin typeface="Calibri" pitchFamily="34" charset="0"/>
-                <a:ea typeface="Calibri" pitchFamily="34" charset="-122"/>
-                <a:cs typeface="Calibri" pitchFamily="34" charset="-120"/>
-              </a:rPr>
-              <a:t>Does the employee badge make the photography permissible?</a:t>
-            </a:r>
-            <a:endParaRPr lang="en-US" sz="1050" dirty="0"/>
-          </a:p>
-        </p:txBody>
-      </p:sp>
-      <p:sp>
-        <p:nvSpPr>
-          <p:cNvPr id="13" name="Shape 10"/>
-          <p:cNvSpPr/>
-          <p:nvPr/>
-        </p:nvSpPr>
-        <p:spPr>
-          <a:xfrm>
-            <a:off x="6223864" y="3081528"/>
-            <a:ext cx="5327752" cy="1074420"/>
-          </a:xfrm>
-          <a:prstGeom prst="roundRect">
-            <a:avLst>
-              <a:gd name="adj" fmla="val 3404"/>
-            </a:avLst>
-          </a:prstGeom>
-          <a:solidFill>
-            <a:srgbClr val="EFF4F8"/>
-          </a:solidFill>
-          <a:ln/>
-        </p:spPr>
-      </p:sp>
-      <p:sp>
-        <p:nvSpPr>
-          <p:cNvPr id="14" name="Shape 11"/>
-          <p:cNvSpPr/>
-          <p:nvPr/>
-        </p:nvSpPr>
-        <p:spPr>
-          <a:xfrm>
-            <a:off x="6388456" y="3472434"/>
-            <a:ext cx="292608" cy="292608"/>
-          </a:xfrm>
-          <a:prstGeom prst="ellipse">
-            <a:avLst/>
-          </a:prstGeom>
-          <a:solidFill>
-            <a:srgbClr val="12B198"/>
-          </a:solidFill>
-          <a:ln/>
-        </p:spPr>
-      </p:sp>
-      <p:sp>
-        <p:nvSpPr>
-          <p:cNvPr id="15" name="Text 12"/>
-          <p:cNvSpPr/>
-          <p:nvPr/>
-        </p:nvSpPr>
-        <p:spPr>
-          <a:xfrm>
-            <a:off x="6388456" y="3472434"/>
-            <a:ext cx="292608" cy="292608"/>
-          </a:xfrm>
-          <a:prstGeom prst="rect">
-            <a:avLst/>
-          </a:prstGeom>
-          <a:noFill/>
-          <a:ln/>
-        </p:spPr>
-        <p:txBody>
-          <a:bodyPr wrap="square" lIns="0" tIns="0" rIns="0" bIns="0" rtlCol="0" anchor="ctr"/>
-          <a:lstStyle/>
-          <a:p>
-            <a:pPr algn="ctr" indent="0" marL="0">
-              <a:buNone/>
-            </a:pPr>
-            <a:r>
-              <a:rPr lang="en-US" sz="1100" b="1" dirty="0">
-                <a:solidFill>
-                  <a:srgbClr val="FFFFFF"/>
-                </a:solidFill>
-                <a:latin typeface="Calibri" pitchFamily="34" charset="0"/>
-                <a:ea typeface="Calibri" pitchFamily="34" charset="-122"/>
-                <a:cs typeface="Calibri" pitchFamily="34" charset="-120"/>
-              </a:rPr>
-              <a:t>2</a:t>
-            </a:r>
-            <a:endParaRPr lang="en-US" sz="1100" dirty="0"/>
-          </a:p>
-        </p:txBody>
-      </p:sp>
-      <p:sp>
-        <p:nvSpPr>
-          <p:cNvPr id="16" name="Text 13"/>
-          <p:cNvSpPr/>
-          <p:nvPr/>
-        </p:nvSpPr>
-        <p:spPr>
-          <a:xfrm>
-            <a:off x="6772504" y="3136392"/>
-            <a:ext cx="4596232" cy="964692"/>
-          </a:xfrm>
-          <a:prstGeom prst="rect">
-            <a:avLst/>
-          </a:prstGeom>
-          <a:noFill/>
-          <a:ln/>
-        </p:spPr>
-        <p:txBody>
-          <a:bodyPr wrap="square" lIns="0" tIns="0" rIns="0" bIns="0" rtlCol="0" anchor="ctr"/>
-          <a:lstStyle/>
-          <a:p>
-            <a:pPr indent="0" marL="0">
-              <a:lnSpc>
-                <a:spcPct val="88000"/>
-              </a:lnSpc>
-              <a:buNone/>
-            </a:pPr>
-            <a:r>
-              <a:rPr lang="en-US" sz="1050" b="1" dirty="0">
-                <a:solidFill>
-                  <a:srgbClr val="1B2733"/>
-                </a:solidFill>
-                <a:latin typeface="Yu Gothic" pitchFamily="34" charset="0"/>
-                <a:ea typeface="Yu Gothic" pitchFamily="34" charset="-122"/>
-                <a:cs typeface="Yu Gothic" pitchFamily="34" charset="-120"/>
-              </a:rPr>
-              <a:t>撮影の中止を求められるか。求める根拠は何か。</a:t>
-            </a:r>
-            <a:endParaRPr lang="en-US" sz="1050" dirty="0"/>
-          </a:p>
-          <a:p>
-            <a:pPr indent="0" marL="0">
-              <a:lnSpc>
-                <a:spcPct val="88000"/>
-              </a:lnSpc>
-              <a:buNone/>
-            </a:pPr>
-            <a:r>
-              <a:rPr lang="en-US" sz="800" i="1" dirty="0">
-                <a:solidFill>
-                  <a:srgbClr val="5F7183"/>
-                </a:solidFill>
-                <a:latin typeface="Calibri" pitchFamily="34" charset="0"/>
-                <a:ea typeface="Calibri" pitchFamily="34" charset="-122"/>
-                <a:cs typeface="Calibri" pitchFamily="34" charset="-120"/>
-              </a:rPr>
-              <a:t>May you ask them to stop? On what basis?</a:t>
-            </a:r>
-            <a:endParaRPr lang="en-US" sz="1050" dirty="0"/>
-          </a:p>
-        </p:txBody>
-      </p:sp>
-      <p:sp>
-        <p:nvSpPr>
-          <p:cNvPr id="17" name="Shape 14"/>
-          <p:cNvSpPr/>
-          <p:nvPr/>
-        </p:nvSpPr>
-        <p:spPr>
-          <a:xfrm>
-            <a:off x="640080" y="4265676"/>
-            <a:ext cx="5327752" cy="1074420"/>
-          </a:xfrm>
-          <a:prstGeom prst="roundRect">
-            <a:avLst>
-              <a:gd name="adj" fmla="val 3404"/>
-            </a:avLst>
-          </a:prstGeom>
-          <a:solidFill>
-            <a:srgbClr val="EFF4F8"/>
-          </a:solidFill>
-          <a:ln/>
-        </p:spPr>
-      </p:sp>
-      <p:sp>
-        <p:nvSpPr>
-          <p:cNvPr id="18" name="Shape 15"/>
-          <p:cNvSpPr/>
-          <p:nvPr/>
-        </p:nvSpPr>
-        <p:spPr>
-          <a:xfrm>
-            <a:off x="804672" y="4656582"/>
-            <a:ext cx="292608" cy="292608"/>
-          </a:xfrm>
-          <a:prstGeom prst="ellipse">
-            <a:avLst/>
-          </a:prstGeom>
-          <a:solidFill>
-            <a:srgbClr val="12B198"/>
-          </a:solidFill>
-          <a:ln/>
-        </p:spPr>
-      </p:sp>
-      <p:sp>
-        <p:nvSpPr>
-          <p:cNvPr id="19" name="Text 16"/>
-          <p:cNvSpPr/>
-          <p:nvPr/>
-        </p:nvSpPr>
-        <p:spPr>
-          <a:xfrm>
-            <a:off x="804672" y="4656582"/>
-            <a:ext cx="292608" cy="292608"/>
-          </a:xfrm>
-          <a:prstGeom prst="rect">
-            <a:avLst/>
-          </a:prstGeom>
-          <a:noFill/>
-          <a:ln/>
-        </p:spPr>
-        <p:txBody>
-          <a:bodyPr wrap="square" lIns="0" tIns="0" rIns="0" bIns="0" rtlCol="0" anchor="ctr"/>
-          <a:lstStyle/>
-          <a:p>
-            <a:pPr algn="ctr" indent="0" marL="0">
-              <a:buNone/>
-            </a:pPr>
-            <a:r>
-              <a:rPr lang="en-US" sz="1100" b="1" dirty="0">
-                <a:solidFill>
-                  <a:srgbClr val="FFFFFF"/>
-                </a:solidFill>
-                <a:latin typeface="Calibri" pitchFamily="34" charset="0"/>
-                <a:ea typeface="Calibri" pitchFamily="34" charset="-122"/>
-                <a:cs typeface="Calibri" pitchFamily="34" charset="-120"/>
-              </a:rPr>
-              <a:t>3</a:t>
-            </a:r>
-            <a:endParaRPr lang="en-US" sz="1100" dirty="0"/>
-          </a:p>
-        </p:txBody>
-      </p:sp>
-      <p:sp>
-        <p:nvSpPr>
-          <p:cNvPr id="20" name="Text 17"/>
-          <p:cNvSpPr/>
-          <p:nvPr/>
-        </p:nvSpPr>
-        <p:spPr>
-          <a:xfrm>
-            <a:off x="1188720" y="4320540"/>
-            <a:ext cx="4596232" cy="964692"/>
-          </a:xfrm>
-          <a:prstGeom prst="rect">
-            <a:avLst/>
-          </a:prstGeom>
-          <a:noFill/>
-          <a:ln/>
-        </p:spPr>
-        <p:txBody>
-          <a:bodyPr wrap="square" lIns="0" tIns="0" rIns="0" bIns="0" rtlCol="0" anchor="ctr"/>
-          <a:lstStyle/>
-          <a:p>
-            <a:pPr indent="0" marL="0">
-              <a:lnSpc>
-                <a:spcPct val="88000"/>
-              </a:lnSpc>
-              <a:buNone/>
-            </a:pPr>
-            <a:r>
-              <a:rPr lang="en-US" sz="1050" b="1" dirty="0">
-                <a:solidFill>
-                  <a:srgbClr val="1B2733"/>
-                </a:solidFill>
-                <a:latin typeface="Yu Gothic" pitchFamily="34" charset="0"/>
-                <a:ea typeface="Yu Gothic" pitchFamily="34" charset="-122"/>
-                <a:cs typeface="Yu Gothic" pitchFamily="34" charset="-120"/>
-              </a:rPr>
-              <a:t>画像の削除を求めてよいか。応じない場合どうするか。</a:t>
-            </a:r>
-            <a:endParaRPr lang="en-US" sz="1050" dirty="0"/>
-          </a:p>
-          <a:p>
-            <a:pPr indent="0" marL="0">
-              <a:lnSpc>
-                <a:spcPct val="88000"/>
-              </a:lnSpc>
-              <a:buNone/>
-            </a:pPr>
-            <a:r>
-              <a:rPr lang="en-US" sz="800" i="1" dirty="0">
-                <a:solidFill>
-                  <a:srgbClr val="5F7183"/>
-                </a:solidFill>
-                <a:latin typeface="Calibri" pitchFamily="34" charset="0"/>
-                <a:ea typeface="Calibri" pitchFamily="34" charset="-122"/>
-                <a:cs typeface="Calibri" pitchFamily="34" charset="-120"/>
-              </a:rPr>
-              <a:t>May you ask them to delete the images? What if they refuse?</a:t>
-            </a:r>
-            <a:endParaRPr lang="en-US" sz="1050" dirty="0"/>
-          </a:p>
-        </p:txBody>
-      </p:sp>
-      <p:sp>
-        <p:nvSpPr>
-          <p:cNvPr id="21" name="Shape 18"/>
-          <p:cNvSpPr/>
-          <p:nvPr/>
-        </p:nvSpPr>
-        <p:spPr>
-          <a:xfrm>
-            <a:off x="6223864" y="4265676"/>
-            <a:ext cx="5327752" cy="1074420"/>
-          </a:xfrm>
-          <a:prstGeom prst="roundRect">
-            <a:avLst>
-              <a:gd name="adj" fmla="val 3404"/>
-            </a:avLst>
-          </a:prstGeom>
-          <a:solidFill>
-            <a:srgbClr val="EFF4F8"/>
-          </a:solidFill>
-          <a:ln/>
-        </p:spPr>
-      </p:sp>
-      <p:sp>
-        <p:nvSpPr>
-          <p:cNvPr id="22" name="Shape 19"/>
-          <p:cNvSpPr/>
-          <p:nvPr/>
-        </p:nvSpPr>
-        <p:spPr>
-          <a:xfrm>
-            <a:off x="6388456" y="4656582"/>
-            <a:ext cx="292608" cy="292608"/>
-          </a:xfrm>
-          <a:prstGeom prst="ellipse">
-            <a:avLst/>
-          </a:prstGeom>
-          <a:solidFill>
-            <a:srgbClr val="12B198"/>
-          </a:solidFill>
-          <a:ln/>
-        </p:spPr>
-      </p:sp>
-      <p:sp>
-        <p:nvSpPr>
-          <p:cNvPr id="23" name="Text 20"/>
-          <p:cNvSpPr/>
-          <p:nvPr/>
-        </p:nvSpPr>
-        <p:spPr>
-          <a:xfrm>
-            <a:off x="6388456" y="4656582"/>
-            <a:ext cx="292608" cy="292608"/>
-          </a:xfrm>
-          <a:prstGeom prst="rect">
-            <a:avLst/>
-          </a:prstGeom>
-          <a:noFill/>
-          <a:ln/>
-        </p:spPr>
-        <p:txBody>
-          <a:bodyPr wrap="square" lIns="0" tIns="0" rIns="0" bIns="0" rtlCol="0" anchor="ctr"/>
-          <a:lstStyle/>
-          <a:p>
-            <a:pPr algn="ctr" indent="0" marL="0">
-              <a:buNone/>
-            </a:pPr>
-            <a:r>
-              <a:rPr lang="en-US" sz="1100" b="1" dirty="0">
-                <a:solidFill>
-                  <a:srgbClr val="FFFFFF"/>
-                </a:solidFill>
-                <a:latin typeface="Calibri" pitchFamily="34" charset="0"/>
-                <a:ea typeface="Calibri" pitchFamily="34" charset="-122"/>
-                <a:cs typeface="Calibri" pitchFamily="34" charset="-120"/>
-              </a:rPr>
-              <a:t>4</a:t>
-            </a:r>
-            <a:endParaRPr lang="en-US" sz="1100" dirty="0"/>
-          </a:p>
-        </p:txBody>
-      </p:sp>
-      <p:sp>
-        <p:nvSpPr>
-          <p:cNvPr id="24" name="Text 21"/>
-          <p:cNvSpPr/>
-          <p:nvPr/>
-        </p:nvSpPr>
-        <p:spPr>
-          <a:xfrm>
-            <a:off x="6772504" y="4320540"/>
-            <a:ext cx="4596232" cy="964692"/>
-          </a:xfrm>
-          <a:prstGeom prst="rect">
-            <a:avLst/>
-          </a:prstGeom>
-          <a:noFill/>
-          <a:ln/>
-        </p:spPr>
-        <p:txBody>
-          <a:bodyPr wrap="square" lIns="0" tIns="0" rIns="0" bIns="0" rtlCol="0" anchor="ctr"/>
-          <a:lstStyle/>
-          <a:p>
-            <a:pPr indent="0" marL="0">
-              <a:lnSpc>
-                <a:spcPct val="88000"/>
-              </a:lnSpc>
-              <a:buNone/>
-            </a:pPr>
-            <a:r>
-              <a:rPr lang="en-US" sz="1050" b="1" dirty="0">
-                <a:solidFill>
-                  <a:srgbClr val="1B2733"/>
-                </a:solidFill>
-                <a:latin typeface="Yu Gothic" pitchFamily="34" charset="0"/>
-                <a:ea typeface="Yu Gothic" pitchFamily="34" charset="-122"/>
-                <a:cs typeface="Yu Gothic" pitchFamily="34" charset="-120"/>
-              </a:rPr>
-              <a:t>報告するか。するとすれば誰に、何を事実として書くか。</a:t>
-            </a:r>
-            <a:endParaRPr lang="en-US" sz="1050" dirty="0"/>
-          </a:p>
-          <a:p>
-            <a:pPr indent="0" marL="0">
-              <a:lnSpc>
-                <a:spcPct val="88000"/>
-              </a:lnSpc>
-              <a:buNone/>
-            </a:pPr>
-            <a:r>
-              <a:rPr lang="en-US" sz="800" i="1" dirty="0">
-                <a:solidFill>
-                  <a:srgbClr val="5F7183"/>
-                </a:solidFill>
-                <a:latin typeface="Calibri" pitchFamily="34" charset="0"/>
-                <a:ea typeface="Calibri" pitchFamily="34" charset="-122"/>
-                <a:cs typeface="Calibri" pitchFamily="34" charset="-120"/>
-              </a:rPr>
-              <a:t>Do you report it? To whom, and what do you record as fact?</a:t>
-            </a:r>
-            <a:endParaRPr lang="en-US" sz="1050" dirty="0"/>
-          </a:p>
-        </p:txBody>
-      </p:sp>
-      <p:sp>
-        <p:nvSpPr>
-          <p:cNvPr id="25" name="Shape 22"/>
-          <p:cNvSpPr/>
-          <p:nvPr/>
-        </p:nvSpPr>
-        <p:spPr>
-          <a:xfrm>
-            <a:off x="640080" y="5394960"/>
-            <a:ext cx="10911535" cy="457200"/>
-          </a:xfrm>
-          <a:prstGeom prst="roundRect">
-            <a:avLst>
-              <a:gd name="adj" fmla="val 8000"/>
-            </a:avLst>
-          </a:prstGeom>
-          <a:solidFill>
-            <a:srgbClr val="E4F4F0"/>
-          </a:solidFill>
-          <a:ln/>
-        </p:spPr>
-      </p:sp>
-      <p:sp>
-        <p:nvSpPr>
-          <p:cNvPr id="26" name="Text 23"/>
-          <p:cNvSpPr/>
-          <p:nvPr/>
-        </p:nvSpPr>
-        <p:spPr>
-          <a:xfrm>
-            <a:off x="877824" y="5431536"/>
-            <a:ext cx="10436047" cy="384048"/>
-          </a:xfrm>
-          <a:prstGeom prst="rect">
-            <a:avLst/>
-          </a:prstGeom>
-          <a:noFill/>
-          <a:ln/>
-        </p:spPr>
-        <p:txBody>
-          <a:bodyPr wrap="square" lIns="0" tIns="0" rIns="0" bIns="0" rtlCol="0" anchor="ctr"/>
-          <a:lstStyle/>
-          <a:p>
-            <a:pPr indent="0" marL="0">
-              <a:lnSpc>
-                <a:spcPct val="86000"/>
-              </a:lnSpc>
-              <a:buNone/>
-            </a:pPr>
-            <a:r>
-              <a:rPr lang="en-US" sz="850" b="1" dirty="0">
-                <a:solidFill>
-                  <a:srgbClr val="0D8A76"/>
-                </a:solidFill>
-                <a:latin typeface="Yu Gothic" pitchFamily="34" charset="0"/>
-                <a:ea typeface="Yu Gothic" pitchFamily="34" charset="-122"/>
-                <a:cs typeface="Yu Gothic" pitchFamily="34" charset="-120"/>
-              </a:rPr>
-              <a:t>追加付与　</a:t>
-            </a:r>
-            <a:pPr indent="0" marL="0">
-              <a:lnSpc>
-                <a:spcPct val="86000"/>
-              </a:lnSpc>
-              <a:buNone/>
-            </a:pPr>
-            <a:r>
-              <a:rPr lang="en-US" sz="1050" b="1" dirty="0">
-                <a:solidFill>
-                  <a:srgbClr val="1B2733"/>
-                </a:solidFill>
-                <a:latin typeface="Yu Gothic" pitchFamily="34" charset="0"/>
-                <a:ea typeface="Yu Gothic" pitchFamily="34" charset="-122"/>
-                <a:cs typeface="Yu Gothic" pitchFamily="34" charset="-120"/>
-              </a:rPr>
-              <a:t>相手が「上司に確認してくれ」と言い、その場を離れようとした。</a:t>
-            </a:r>
-            <a:endParaRPr lang="en-US" sz="850" dirty="0"/>
-          </a:p>
-          <a:p>
-            <a:pPr indent="0" marL="0">
-              <a:lnSpc>
-                <a:spcPct val="86000"/>
-              </a:lnSpc>
-              <a:buNone/>
-            </a:pPr>
-            <a:r>
-              <a:rPr lang="en-US" sz="750" i="1" dirty="0">
-                <a:solidFill>
-                  <a:srgbClr val="5F7183"/>
-                </a:solidFill>
-                <a:latin typeface="Calibri" pitchFamily="34" charset="0"/>
-                <a:ea typeface="Calibri" pitchFamily="34" charset="-122"/>
-                <a:cs typeface="Calibri" pitchFamily="34" charset="-120"/>
-              </a:rPr>
-              <a:t>They say "check with my manager" and start to walk away.</a:t>
-            </a:r>
-            <a:endParaRPr lang="en-US" sz="850" dirty="0"/>
-          </a:p>
-        </p:txBody>
-      </p:sp>
-      <p:sp>
-        <p:nvSpPr>
-          <p:cNvPr id="27" name="Text 24"/>
+        </p:txBody>
+      </p:sp>
+      <p:sp>
+        <p:nvSpPr>
+          <p:cNvPr id="21" name="Text 18"/>
           <p:cNvSpPr/>
           <p:nvPr/>
         </p:nvSpPr>
@@ -3129,7 +3238,7 @@
                 <a:ea typeface="Yu Gothic" pitchFamily="34" charset="-122"/>
                 <a:cs typeface="Yu Gothic" pitchFamily="34" charset="-120"/>
               </a:rPr>
-              <a:t>撮影の可否と、社員による撮影への対応は現場ごとに異なる。Site SOPを確認する。</a:t>
+              <a:t>模範解答は判断の型を示すものです。実際の手順は各現場のSite SOPと警備指令書が優先します。</a:t>
             </a:r>
             <a:endParaRPr lang="en-US" sz="900" dirty="0"/>
           </a:p>
@@ -3149,7 +3258,7 @@
                 <a:ea typeface="Calibri" pitchFamily="34" charset="-122"/>
                 <a:cs typeface="Calibri" pitchFamily="34" charset="-120"/>
               </a:rPr>
-              <a:t>Whether photography is allowed, and how to handle it by employees, differ by site. Check the Site SOP.</a:t>
+              <a:t>These answers show a pattern of reasoning. The Site SOP and post orders always take precedence.</a:t>
             </a:r>
             <a:endParaRPr lang="en-US" sz="900" dirty="0"/>
           </a:p>
@@ -3157,7 +3266,7 @@
       </p:sp>
       <p:sp>
         <p:nvSpPr>
-          <p:cNvPr id="28" name="Text 25"/>
+          <p:cNvPr id="22" name="Text 19"/>
           <p:cNvSpPr/>
           <p:nvPr/>
         </p:nvSpPr>
@@ -3210,7 +3319,7 @@
       </p:sp>
       <p:sp>
         <p:nvSpPr>
-          <p:cNvPr id="29" name="Text 26"/>
+          <p:cNvPr id="23" name="Text 20"/>
           <p:cNvSpPr/>
           <p:nvPr/>
         </p:nvSpPr>
@@ -3263,7 +3372,7 @@
       </p:sp>
       <p:sp>
         <p:nvSpPr>
-          <p:cNvPr id="30" name="Text 27"/>
+          <p:cNvPr id="24" name="Text 21"/>
           <p:cNvSpPr/>
           <p:nvPr/>
         </p:nvSpPr>
@@ -3311,6 +3420,2388 @@
 <file path=ppt/slides/slide11.xml><?xml version="1.0" encoding="utf-8"?>
 <p:sld xmlns:a="http://schemas.openxmlformats.org/drawingml/2006/main" xmlns:r="http://schemas.openxmlformats.org/officeDocument/2006/relationships" xmlns:p="http://schemas.openxmlformats.org/presentationml/2006/main">
   <p:cSld name="Slide 11">
+    <p:bg>
+      <p:bgPr>
+        <a:solidFill>
+          <a:srgbClr val="FFFFFF"/>
+        </a:solidFill>
+      </p:bgPr>
+    </p:bg>
+    <p:spTree>
+      <p:nvGrpSpPr>
+        <p:cNvPr id="1" name=""/>
+        <p:cNvGrpSpPr/>
+        <p:nvPr/>
+      </p:nvGrpSpPr>
+      <p:grpSpPr>
+        <a:xfrm>
+          <a:off x="0" y="0"/>
+          <a:ext cx="0" cy="0"/>
+          <a:chOff x="0" y="0"/>
+          <a:chExt cx="0" cy="0"/>
+        </a:xfrm>
+      </p:grpSpPr>
+      <p:pic>
+        <p:nvPicPr>
+          <p:cNvPr id="2" name="Image 0" descr="/home/user/Training-/assets/logo.png">    </p:cNvPr>
+          <p:cNvPicPr>
+            <a:picLocks noChangeAspect="1"/>
+          </p:cNvPicPr>
+          <p:nvPr/>
+        </p:nvPicPr>
+        <p:blipFill>
+          <a:blip r:embed="rId1"/>
+          <a:stretch>
+            <a:fillRect/>
+          </a:stretch>
+        </p:blipFill>
+        <p:spPr>
+          <a:xfrm>
+            <a:off x="10765231" y="332912"/>
+            <a:ext cx="786384" cy="742353"/>
+          </a:xfrm>
+          <a:prstGeom prst="rect">
+            <a:avLst/>
+          </a:prstGeom>
+        </p:spPr>
+      </p:pic>
+      <p:sp>
+        <p:nvSpPr>
+          <p:cNvPr id="3" name="Text 0"/>
+          <p:cNvSpPr/>
+          <p:nvPr/>
+        </p:nvSpPr>
+        <p:spPr>
+          <a:xfrm>
+            <a:off x="640080" y="384048"/>
+            <a:ext cx="8982151" cy="768096"/>
+          </a:xfrm>
+          <a:prstGeom prst="rect">
+            <a:avLst/>
+          </a:prstGeom>
+          <a:noFill/>
+          <a:ln/>
+        </p:spPr>
+        <p:txBody>
+          <a:bodyPr wrap="square" lIns="0" tIns="0" rIns="0" bIns="0" rtlCol="0" anchor="t"/>
+          <a:lstStyle/>
+          <a:p>
+            <a:pPr indent="0" marL="0">
+              <a:lnSpc>
+                <a:spcPct val="94000"/>
+              </a:lnSpc>
+              <a:buNone/>
+            </a:pPr>
+            <a:r>
+              <a:rPr lang="en-US" sz="2300" b="1" dirty="0">
+                <a:solidFill>
+                  <a:srgbClr val="093259"/>
+                </a:solidFill>
+                <a:latin typeface="Yu Gothic" pitchFamily="34" charset="0"/>
+                <a:ea typeface="Yu Gothic" pitchFamily="34" charset="-122"/>
+                <a:cs typeface="Yu Gothic" pitchFamily="34" charset="-120"/>
+              </a:rPr>
+              <a:t>TTX 1-B　役員フロアで撮影している人物</a:t>
+            </a:r>
+            <a:endParaRPr lang="en-US" sz="2300" dirty="0"/>
+          </a:p>
+          <a:p>
+            <a:pPr indent="0" marL="0">
+              <a:lnSpc>
+                <a:spcPct val="94000"/>
+              </a:lnSpc>
+              <a:buNone/>
+            </a:pPr>
+            <a:r>
+              <a:rPr lang="en-US" sz="1100" i="1" dirty="0">
+                <a:solidFill>
+                  <a:srgbClr val="12B198"/>
+                </a:solidFill>
+                <a:latin typeface="Calibri" pitchFamily="34" charset="0"/>
+                <a:ea typeface="Calibri" pitchFamily="34" charset="-122"/>
+                <a:cs typeface="Calibri" pitchFamily="34" charset="-120"/>
+              </a:rPr>
+              <a:t>TTX 1-B — Someone Photographing on the Executive Floor</a:t>
+            </a:r>
+            <a:endParaRPr lang="en-US" sz="2300" dirty="0"/>
+          </a:p>
+        </p:txBody>
+      </p:sp>
+      <p:sp>
+        <p:nvSpPr>
+          <p:cNvPr id="4" name="Shape 1"/>
+          <p:cNvSpPr/>
+          <p:nvPr/>
+        </p:nvSpPr>
+        <p:spPr>
+          <a:xfrm>
+            <a:off x="9686239" y="438912"/>
+            <a:ext cx="932688" cy="310896"/>
+          </a:xfrm>
+          <a:prstGeom prst="roundRect">
+            <a:avLst>
+              <a:gd name="adj" fmla="val 14706"/>
+            </a:avLst>
+          </a:prstGeom>
+          <a:solidFill>
+            <a:srgbClr val="093259"/>
+          </a:solidFill>
+          <a:ln/>
+        </p:spPr>
+      </p:sp>
+      <p:sp>
+        <p:nvSpPr>
+          <p:cNvPr id="5" name="Text 2"/>
+          <p:cNvSpPr/>
+          <p:nvPr/>
+        </p:nvSpPr>
+        <p:spPr>
+          <a:xfrm>
+            <a:off x="9686239" y="438912"/>
+            <a:ext cx="932688" cy="310896"/>
+          </a:xfrm>
+          <a:prstGeom prst="rect">
+            <a:avLst/>
+          </a:prstGeom>
+          <a:noFill/>
+          <a:ln/>
+        </p:spPr>
+        <p:txBody>
+          <a:bodyPr wrap="square" lIns="0" tIns="0" rIns="0" bIns="0" rtlCol="0" anchor="ctr"/>
+          <a:lstStyle/>
+          <a:p>
+            <a:pPr algn="ctr" indent="0" marL="0">
+              <a:buNone/>
+            </a:pPr>
+            <a:r>
+              <a:rPr lang="en-US" sz="1100" b="1" dirty="0">
+                <a:solidFill>
+                  <a:srgbClr val="FFFFFF"/>
+                </a:solidFill>
+                <a:latin typeface="Calibri" pitchFamily="34" charset="0"/>
+                <a:ea typeface="Calibri" pitchFamily="34" charset="-122"/>
+                <a:cs typeface="Calibri" pitchFamily="34" charset="-120"/>
+              </a:rPr>
+              <a:t>CASE 1-B</a:t>
+            </a:r>
+            <a:endParaRPr lang="en-US" sz="1100" dirty="0"/>
+          </a:p>
+        </p:txBody>
+      </p:sp>
+      <p:sp>
+        <p:nvSpPr>
+          <p:cNvPr id="6" name="Shape 3"/>
+          <p:cNvSpPr/>
+          <p:nvPr/>
+        </p:nvSpPr>
+        <p:spPr>
+          <a:xfrm>
+            <a:off x="640080" y="1188720"/>
+            <a:ext cx="10911535" cy="1124712"/>
+          </a:xfrm>
+          <a:prstGeom prst="roundRect">
+            <a:avLst>
+              <a:gd name="adj" fmla="val 3252"/>
+            </a:avLst>
+          </a:prstGeom>
+          <a:solidFill>
+            <a:srgbClr val="093259"/>
+          </a:solidFill>
+          <a:ln/>
+        </p:spPr>
+      </p:sp>
+      <p:sp>
+        <p:nvSpPr>
+          <p:cNvPr id="7" name="Text 4"/>
+          <p:cNvSpPr/>
+          <p:nvPr/>
+        </p:nvSpPr>
+        <p:spPr>
+          <a:xfrm>
+            <a:off x="950976" y="1316736"/>
+            <a:ext cx="10289743" cy="868680"/>
+          </a:xfrm>
+          <a:prstGeom prst="rect">
+            <a:avLst/>
+          </a:prstGeom>
+          <a:noFill/>
+          <a:ln/>
+        </p:spPr>
+        <p:txBody>
+          <a:bodyPr wrap="square" lIns="0" tIns="0" rIns="0" bIns="0" rtlCol="0" anchor="t"/>
+          <a:lstStyle/>
+          <a:p>
+            <a:pPr indent="0" marL="0">
+              <a:lnSpc>
+                <a:spcPct val="92000"/>
+              </a:lnSpc>
+              <a:buNone/>
+            </a:pPr>
+            <a:r>
+              <a:rPr lang="en-US" sz="950" b="1" dirty="0">
+                <a:solidFill>
+                  <a:srgbClr val="12B198"/>
+                </a:solidFill>
+                <a:latin typeface="Yu Gothic" pitchFamily="34" charset="0"/>
+                <a:ea typeface="Yu Gothic" pitchFamily="34" charset="-122"/>
+                <a:cs typeface="Yu Gothic" pitchFamily="34" charset="-120"/>
+              </a:rPr>
+              <a:t>シナリオ　</a:t>
+            </a:r>
+            <a:pPr indent="0" marL="0">
+              <a:lnSpc>
+                <a:spcPct val="92000"/>
+              </a:lnSpc>
+              <a:buNone/>
+            </a:pPr>
+            <a:r>
+              <a:rPr lang="en-US" sz="800" dirty="0">
+                <a:solidFill>
+                  <a:srgbClr val="12B198"/>
+                </a:solidFill>
+                <a:latin typeface="Calibri" pitchFamily="34" charset="0"/>
+                <a:ea typeface="Calibri" pitchFamily="34" charset="-122"/>
+                <a:cs typeface="Calibri" pitchFamily="34" charset="-120"/>
+              </a:rPr>
+              <a:t>SCENARIO</a:t>
+            </a:r>
+            <a:endParaRPr lang="en-US" sz="950" dirty="0"/>
+          </a:p>
+          <a:p>
+            <a:pPr indent="0" marL="0">
+              <a:lnSpc>
+                <a:spcPct val="92000"/>
+              </a:lnSpc>
+              <a:buNone/>
+            </a:pPr>
+            <a:r>
+              <a:rPr lang="en-US" sz="1150" b="1" dirty="0">
+                <a:solidFill>
+                  <a:srgbClr val="FFFFFF"/>
+                </a:solidFill>
+                <a:latin typeface="Yu Gothic" pitchFamily="34" charset="0"/>
+                <a:ea typeface="Yu Gothic" pitchFamily="34" charset="-122"/>
+                <a:cs typeface="Yu Gothic" pitchFamily="34" charset="-120"/>
+              </a:rPr>
+              <a:t>平日19時、役員フロアの通路で、社員証を提げた人物がスマートフォンで壁面のホワイトボードを撮影している。ボードには組織図と数字が書かれている。声をかけると「自分の部署の資料だ」と答える。</a:t>
+            </a:r>
+            <a:endParaRPr lang="en-US" sz="950" dirty="0"/>
+          </a:p>
+          <a:p>
+            <a:pPr indent="0" marL="0">
+              <a:lnSpc>
+                <a:spcPct val="92000"/>
+              </a:lnSpc>
+              <a:buNone/>
+            </a:pPr>
+            <a:r>
+              <a:rPr lang="en-US" sz="800" i="1" dirty="0">
+                <a:solidFill>
+                  <a:srgbClr val="9FD8CD"/>
+                </a:solidFill>
+                <a:latin typeface="Calibri" pitchFamily="34" charset="0"/>
+                <a:ea typeface="Calibri" pitchFamily="34" charset="-122"/>
+                <a:cs typeface="Calibri" pitchFamily="34" charset="-120"/>
+              </a:rPr>
+              <a:t>19:00 on a weekday. On the executive floor, a person wearing an employee badge is photographing a whiteboard with a smartphone. The board shows an org chart and figures. Asked about it, they say "this is my own department's material."</a:t>
+            </a:r>
+            <a:endParaRPr lang="en-US" sz="950" dirty="0"/>
+          </a:p>
+        </p:txBody>
+      </p:sp>
+      <p:sp>
+        <p:nvSpPr>
+          <p:cNvPr id="8" name="Text 5"/>
+          <p:cNvSpPr/>
+          <p:nvPr/>
+        </p:nvSpPr>
+        <p:spPr>
+          <a:xfrm>
+            <a:off x="640080" y="2459736"/>
+            <a:ext cx="10911535" cy="566928"/>
+          </a:xfrm>
+          <a:prstGeom prst="rect">
+            <a:avLst/>
+          </a:prstGeom>
+          <a:noFill/>
+          <a:ln/>
+        </p:spPr>
+        <p:txBody>
+          <a:bodyPr wrap="square" lIns="0" tIns="0" rIns="0" bIns="0" rtlCol="0" anchor="t"/>
+          <a:lstStyle/>
+          <a:p>
+            <a:pPr indent="0" marL="0">
+              <a:lnSpc>
+                <a:spcPct val="90000"/>
+              </a:lnSpc>
+              <a:buNone/>
+            </a:pPr>
+            <a:r>
+              <a:rPr lang="en-US" sz="1000" b="1" dirty="0">
+                <a:solidFill>
+                  <a:srgbClr val="0D8A76"/>
+                </a:solidFill>
+                <a:latin typeface="Yu Gothic" pitchFamily="34" charset="0"/>
+                <a:ea typeface="Yu Gothic" pitchFamily="34" charset="-122"/>
+                <a:cs typeface="Yu Gothic" pitchFamily="34" charset="-120"/>
+              </a:rPr>
+              <a:t>問い　</a:t>
+            </a:r>
+            <a:pPr indent="0" marL="0">
+              <a:lnSpc>
+                <a:spcPct val="90000"/>
+              </a:lnSpc>
+              <a:buNone/>
+            </a:pPr>
+            <a:r>
+              <a:rPr lang="en-US" sz="1250" b="1" dirty="0">
+                <a:solidFill>
+                  <a:srgbClr val="093259"/>
+                </a:solidFill>
+                <a:latin typeface="Yu Gothic" pitchFamily="34" charset="0"/>
+                <a:ea typeface="Yu Gothic" pitchFamily="34" charset="-122"/>
+                <a:cs typeface="Yu Gothic" pitchFamily="34" charset="-120"/>
+              </a:rPr>
+              <a:t>あなたなら次の60秒、何をどう動きますか。</a:t>
+            </a:r>
+            <a:endParaRPr lang="en-US" sz="1000" dirty="0"/>
+          </a:p>
+          <a:p>
+            <a:pPr indent="0" marL="0">
+              <a:lnSpc>
+                <a:spcPct val="90000"/>
+              </a:lnSpc>
+              <a:buNone/>
+            </a:pPr>
+            <a:r>
+              <a:rPr lang="en-US" sz="850" i="1" dirty="0">
+                <a:solidFill>
+                  <a:srgbClr val="5F7183"/>
+                </a:solidFill>
+                <a:latin typeface="Calibri" pitchFamily="34" charset="0"/>
+                <a:ea typeface="Calibri" pitchFamily="34" charset="-122"/>
+                <a:cs typeface="Calibri" pitchFamily="34" charset="-120"/>
+              </a:rPr>
+              <a:t>What do you do in the next sixty seconds?</a:t>
+            </a:r>
+            <a:endParaRPr lang="en-US" sz="1000" dirty="0"/>
+          </a:p>
+        </p:txBody>
+      </p:sp>
+      <p:sp>
+        <p:nvSpPr>
+          <p:cNvPr id="9" name="Shape 6"/>
+          <p:cNvSpPr/>
+          <p:nvPr/>
+        </p:nvSpPr>
+        <p:spPr>
+          <a:xfrm>
+            <a:off x="640080" y="3081528"/>
+            <a:ext cx="5327752" cy="1074420"/>
+          </a:xfrm>
+          <a:prstGeom prst="roundRect">
+            <a:avLst>
+              <a:gd name="adj" fmla="val 3404"/>
+            </a:avLst>
+          </a:prstGeom>
+          <a:solidFill>
+            <a:srgbClr val="EFF4F8"/>
+          </a:solidFill>
+          <a:ln/>
+        </p:spPr>
+      </p:sp>
+      <p:sp>
+        <p:nvSpPr>
+          <p:cNvPr id="10" name="Shape 7"/>
+          <p:cNvSpPr/>
+          <p:nvPr/>
+        </p:nvSpPr>
+        <p:spPr>
+          <a:xfrm>
+            <a:off x="804672" y="3472434"/>
+            <a:ext cx="292608" cy="292608"/>
+          </a:xfrm>
+          <a:prstGeom prst="ellipse">
+            <a:avLst/>
+          </a:prstGeom>
+          <a:solidFill>
+            <a:srgbClr val="12B198"/>
+          </a:solidFill>
+          <a:ln/>
+        </p:spPr>
+      </p:sp>
+      <p:sp>
+        <p:nvSpPr>
+          <p:cNvPr id="11" name="Text 8"/>
+          <p:cNvSpPr/>
+          <p:nvPr/>
+        </p:nvSpPr>
+        <p:spPr>
+          <a:xfrm>
+            <a:off x="804672" y="3472434"/>
+            <a:ext cx="292608" cy="292608"/>
+          </a:xfrm>
+          <a:prstGeom prst="rect">
+            <a:avLst/>
+          </a:prstGeom>
+          <a:noFill/>
+          <a:ln/>
+        </p:spPr>
+        <p:txBody>
+          <a:bodyPr wrap="square" lIns="0" tIns="0" rIns="0" bIns="0" rtlCol="0" anchor="ctr"/>
+          <a:lstStyle/>
+          <a:p>
+            <a:pPr algn="ctr" indent="0" marL="0">
+              <a:buNone/>
+            </a:pPr>
+            <a:r>
+              <a:rPr lang="en-US" sz="1100" b="1" dirty="0">
+                <a:solidFill>
+                  <a:srgbClr val="FFFFFF"/>
+                </a:solidFill>
+                <a:latin typeface="Calibri" pitchFamily="34" charset="0"/>
+                <a:ea typeface="Calibri" pitchFamily="34" charset="-122"/>
+                <a:cs typeface="Calibri" pitchFamily="34" charset="-120"/>
+              </a:rPr>
+              <a:t>1</a:t>
+            </a:r>
+            <a:endParaRPr lang="en-US" sz="1100" dirty="0"/>
+          </a:p>
+        </p:txBody>
+      </p:sp>
+      <p:sp>
+        <p:nvSpPr>
+          <p:cNvPr id="12" name="Text 9"/>
+          <p:cNvSpPr/>
+          <p:nvPr/>
+        </p:nvSpPr>
+        <p:spPr>
+          <a:xfrm>
+            <a:off x="1188720" y="3136392"/>
+            <a:ext cx="4596232" cy="964692"/>
+          </a:xfrm>
+          <a:prstGeom prst="rect">
+            <a:avLst/>
+          </a:prstGeom>
+          <a:noFill/>
+          <a:ln/>
+        </p:spPr>
+        <p:txBody>
+          <a:bodyPr wrap="square" lIns="0" tIns="0" rIns="0" bIns="0" rtlCol="0" anchor="ctr"/>
+          <a:lstStyle/>
+          <a:p>
+            <a:pPr indent="0" marL="0">
+              <a:lnSpc>
+                <a:spcPct val="88000"/>
+              </a:lnSpc>
+              <a:buNone/>
+            </a:pPr>
+            <a:r>
+              <a:rPr lang="en-US" sz="1050" b="1" dirty="0">
+                <a:solidFill>
+                  <a:srgbClr val="1B2733"/>
+                </a:solidFill>
+                <a:latin typeface="Yu Gothic" pitchFamily="34" charset="0"/>
+                <a:ea typeface="Yu Gothic" pitchFamily="34" charset="-122"/>
+                <a:cs typeface="Yu Gothic" pitchFamily="34" charset="-120"/>
+              </a:rPr>
+              <a:t>社員証があることは、撮影してよい根拠になるか。</a:t>
+            </a:r>
+            <a:endParaRPr lang="en-US" sz="1050" dirty="0"/>
+          </a:p>
+          <a:p>
+            <a:pPr indent="0" marL="0">
+              <a:lnSpc>
+                <a:spcPct val="88000"/>
+              </a:lnSpc>
+              <a:buNone/>
+            </a:pPr>
+            <a:r>
+              <a:rPr lang="en-US" sz="800" i="1" dirty="0">
+                <a:solidFill>
+                  <a:srgbClr val="5F7183"/>
+                </a:solidFill>
+                <a:latin typeface="Calibri" pitchFamily="34" charset="0"/>
+                <a:ea typeface="Calibri" pitchFamily="34" charset="-122"/>
+                <a:cs typeface="Calibri" pitchFamily="34" charset="-120"/>
+              </a:rPr>
+              <a:t>Does the employee badge make the photography permissible?</a:t>
+            </a:r>
+            <a:endParaRPr lang="en-US" sz="1050" dirty="0"/>
+          </a:p>
+        </p:txBody>
+      </p:sp>
+      <p:sp>
+        <p:nvSpPr>
+          <p:cNvPr id="13" name="Shape 10"/>
+          <p:cNvSpPr/>
+          <p:nvPr/>
+        </p:nvSpPr>
+        <p:spPr>
+          <a:xfrm>
+            <a:off x="6223864" y="3081528"/>
+            <a:ext cx="5327752" cy="1074420"/>
+          </a:xfrm>
+          <a:prstGeom prst="roundRect">
+            <a:avLst>
+              <a:gd name="adj" fmla="val 3404"/>
+            </a:avLst>
+          </a:prstGeom>
+          <a:solidFill>
+            <a:srgbClr val="EFF4F8"/>
+          </a:solidFill>
+          <a:ln/>
+        </p:spPr>
+      </p:sp>
+      <p:sp>
+        <p:nvSpPr>
+          <p:cNvPr id="14" name="Shape 11"/>
+          <p:cNvSpPr/>
+          <p:nvPr/>
+        </p:nvSpPr>
+        <p:spPr>
+          <a:xfrm>
+            <a:off x="6388456" y="3472434"/>
+            <a:ext cx="292608" cy="292608"/>
+          </a:xfrm>
+          <a:prstGeom prst="ellipse">
+            <a:avLst/>
+          </a:prstGeom>
+          <a:solidFill>
+            <a:srgbClr val="12B198"/>
+          </a:solidFill>
+          <a:ln/>
+        </p:spPr>
+      </p:sp>
+      <p:sp>
+        <p:nvSpPr>
+          <p:cNvPr id="15" name="Text 12"/>
+          <p:cNvSpPr/>
+          <p:nvPr/>
+        </p:nvSpPr>
+        <p:spPr>
+          <a:xfrm>
+            <a:off x="6388456" y="3472434"/>
+            <a:ext cx="292608" cy="292608"/>
+          </a:xfrm>
+          <a:prstGeom prst="rect">
+            <a:avLst/>
+          </a:prstGeom>
+          <a:noFill/>
+          <a:ln/>
+        </p:spPr>
+        <p:txBody>
+          <a:bodyPr wrap="square" lIns="0" tIns="0" rIns="0" bIns="0" rtlCol="0" anchor="ctr"/>
+          <a:lstStyle/>
+          <a:p>
+            <a:pPr algn="ctr" indent="0" marL="0">
+              <a:buNone/>
+            </a:pPr>
+            <a:r>
+              <a:rPr lang="en-US" sz="1100" b="1" dirty="0">
+                <a:solidFill>
+                  <a:srgbClr val="FFFFFF"/>
+                </a:solidFill>
+                <a:latin typeface="Calibri" pitchFamily="34" charset="0"/>
+                <a:ea typeface="Calibri" pitchFamily="34" charset="-122"/>
+                <a:cs typeface="Calibri" pitchFamily="34" charset="-120"/>
+              </a:rPr>
+              <a:t>2</a:t>
+            </a:r>
+            <a:endParaRPr lang="en-US" sz="1100" dirty="0"/>
+          </a:p>
+        </p:txBody>
+      </p:sp>
+      <p:sp>
+        <p:nvSpPr>
+          <p:cNvPr id="16" name="Text 13"/>
+          <p:cNvSpPr/>
+          <p:nvPr/>
+        </p:nvSpPr>
+        <p:spPr>
+          <a:xfrm>
+            <a:off x="6772504" y="3136392"/>
+            <a:ext cx="4596232" cy="964692"/>
+          </a:xfrm>
+          <a:prstGeom prst="rect">
+            <a:avLst/>
+          </a:prstGeom>
+          <a:noFill/>
+          <a:ln/>
+        </p:spPr>
+        <p:txBody>
+          <a:bodyPr wrap="square" lIns="0" tIns="0" rIns="0" bIns="0" rtlCol="0" anchor="ctr"/>
+          <a:lstStyle/>
+          <a:p>
+            <a:pPr indent="0" marL="0">
+              <a:lnSpc>
+                <a:spcPct val="88000"/>
+              </a:lnSpc>
+              <a:buNone/>
+            </a:pPr>
+            <a:r>
+              <a:rPr lang="en-US" sz="1050" b="1" dirty="0">
+                <a:solidFill>
+                  <a:srgbClr val="1B2733"/>
+                </a:solidFill>
+                <a:latin typeface="Yu Gothic" pitchFamily="34" charset="0"/>
+                <a:ea typeface="Yu Gothic" pitchFamily="34" charset="-122"/>
+                <a:cs typeface="Yu Gothic" pitchFamily="34" charset="-120"/>
+              </a:rPr>
+              <a:t>撮影の中止を求められるか。求める根拠は何か。</a:t>
+            </a:r>
+            <a:endParaRPr lang="en-US" sz="1050" dirty="0"/>
+          </a:p>
+          <a:p>
+            <a:pPr indent="0" marL="0">
+              <a:lnSpc>
+                <a:spcPct val="88000"/>
+              </a:lnSpc>
+              <a:buNone/>
+            </a:pPr>
+            <a:r>
+              <a:rPr lang="en-US" sz="800" i="1" dirty="0">
+                <a:solidFill>
+                  <a:srgbClr val="5F7183"/>
+                </a:solidFill>
+                <a:latin typeface="Calibri" pitchFamily="34" charset="0"/>
+                <a:ea typeface="Calibri" pitchFamily="34" charset="-122"/>
+                <a:cs typeface="Calibri" pitchFamily="34" charset="-120"/>
+              </a:rPr>
+              <a:t>May you ask them to stop? On what basis?</a:t>
+            </a:r>
+            <a:endParaRPr lang="en-US" sz="1050" dirty="0"/>
+          </a:p>
+        </p:txBody>
+      </p:sp>
+      <p:sp>
+        <p:nvSpPr>
+          <p:cNvPr id="17" name="Shape 14"/>
+          <p:cNvSpPr/>
+          <p:nvPr/>
+        </p:nvSpPr>
+        <p:spPr>
+          <a:xfrm>
+            <a:off x="640080" y="4265676"/>
+            <a:ext cx="5327752" cy="1074420"/>
+          </a:xfrm>
+          <a:prstGeom prst="roundRect">
+            <a:avLst>
+              <a:gd name="adj" fmla="val 3404"/>
+            </a:avLst>
+          </a:prstGeom>
+          <a:solidFill>
+            <a:srgbClr val="EFF4F8"/>
+          </a:solidFill>
+          <a:ln/>
+        </p:spPr>
+      </p:sp>
+      <p:sp>
+        <p:nvSpPr>
+          <p:cNvPr id="18" name="Shape 15"/>
+          <p:cNvSpPr/>
+          <p:nvPr/>
+        </p:nvSpPr>
+        <p:spPr>
+          <a:xfrm>
+            <a:off x="804672" y="4656582"/>
+            <a:ext cx="292608" cy="292608"/>
+          </a:xfrm>
+          <a:prstGeom prst="ellipse">
+            <a:avLst/>
+          </a:prstGeom>
+          <a:solidFill>
+            <a:srgbClr val="12B198"/>
+          </a:solidFill>
+          <a:ln/>
+        </p:spPr>
+      </p:sp>
+      <p:sp>
+        <p:nvSpPr>
+          <p:cNvPr id="19" name="Text 16"/>
+          <p:cNvSpPr/>
+          <p:nvPr/>
+        </p:nvSpPr>
+        <p:spPr>
+          <a:xfrm>
+            <a:off x="804672" y="4656582"/>
+            <a:ext cx="292608" cy="292608"/>
+          </a:xfrm>
+          <a:prstGeom prst="rect">
+            <a:avLst/>
+          </a:prstGeom>
+          <a:noFill/>
+          <a:ln/>
+        </p:spPr>
+        <p:txBody>
+          <a:bodyPr wrap="square" lIns="0" tIns="0" rIns="0" bIns="0" rtlCol="0" anchor="ctr"/>
+          <a:lstStyle/>
+          <a:p>
+            <a:pPr algn="ctr" indent="0" marL="0">
+              <a:buNone/>
+            </a:pPr>
+            <a:r>
+              <a:rPr lang="en-US" sz="1100" b="1" dirty="0">
+                <a:solidFill>
+                  <a:srgbClr val="FFFFFF"/>
+                </a:solidFill>
+                <a:latin typeface="Calibri" pitchFamily="34" charset="0"/>
+                <a:ea typeface="Calibri" pitchFamily="34" charset="-122"/>
+                <a:cs typeface="Calibri" pitchFamily="34" charset="-120"/>
+              </a:rPr>
+              <a:t>3</a:t>
+            </a:r>
+            <a:endParaRPr lang="en-US" sz="1100" dirty="0"/>
+          </a:p>
+        </p:txBody>
+      </p:sp>
+      <p:sp>
+        <p:nvSpPr>
+          <p:cNvPr id="20" name="Text 17"/>
+          <p:cNvSpPr/>
+          <p:nvPr/>
+        </p:nvSpPr>
+        <p:spPr>
+          <a:xfrm>
+            <a:off x="1188720" y="4320540"/>
+            <a:ext cx="4596232" cy="964692"/>
+          </a:xfrm>
+          <a:prstGeom prst="rect">
+            <a:avLst/>
+          </a:prstGeom>
+          <a:noFill/>
+          <a:ln/>
+        </p:spPr>
+        <p:txBody>
+          <a:bodyPr wrap="square" lIns="0" tIns="0" rIns="0" bIns="0" rtlCol="0" anchor="ctr"/>
+          <a:lstStyle/>
+          <a:p>
+            <a:pPr indent="0" marL="0">
+              <a:lnSpc>
+                <a:spcPct val="88000"/>
+              </a:lnSpc>
+              <a:buNone/>
+            </a:pPr>
+            <a:r>
+              <a:rPr lang="en-US" sz="1050" b="1" dirty="0">
+                <a:solidFill>
+                  <a:srgbClr val="1B2733"/>
+                </a:solidFill>
+                <a:latin typeface="Yu Gothic" pitchFamily="34" charset="0"/>
+                <a:ea typeface="Yu Gothic" pitchFamily="34" charset="-122"/>
+                <a:cs typeface="Yu Gothic" pitchFamily="34" charset="-120"/>
+              </a:rPr>
+              <a:t>画像の削除を求めてよいか。応じない場合どうするか。</a:t>
+            </a:r>
+            <a:endParaRPr lang="en-US" sz="1050" dirty="0"/>
+          </a:p>
+          <a:p>
+            <a:pPr indent="0" marL="0">
+              <a:lnSpc>
+                <a:spcPct val="88000"/>
+              </a:lnSpc>
+              <a:buNone/>
+            </a:pPr>
+            <a:r>
+              <a:rPr lang="en-US" sz="800" i="1" dirty="0">
+                <a:solidFill>
+                  <a:srgbClr val="5F7183"/>
+                </a:solidFill>
+                <a:latin typeface="Calibri" pitchFamily="34" charset="0"/>
+                <a:ea typeface="Calibri" pitchFamily="34" charset="-122"/>
+                <a:cs typeface="Calibri" pitchFamily="34" charset="-120"/>
+              </a:rPr>
+              <a:t>May you ask them to delete the images? What if they refuse?</a:t>
+            </a:r>
+            <a:endParaRPr lang="en-US" sz="1050" dirty="0"/>
+          </a:p>
+        </p:txBody>
+      </p:sp>
+      <p:sp>
+        <p:nvSpPr>
+          <p:cNvPr id="21" name="Shape 18"/>
+          <p:cNvSpPr/>
+          <p:nvPr/>
+        </p:nvSpPr>
+        <p:spPr>
+          <a:xfrm>
+            <a:off x="6223864" y="4265676"/>
+            <a:ext cx="5327752" cy="1074420"/>
+          </a:xfrm>
+          <a:prstGeom prst="roundRect">
+            <a:avLst>
+              <a:gd name="adj" fmla="val 3404"/>
+            </a:avLst>
+          </a:prstGeom>
+          <a:solidFill>
+            <a:srgbClr val="EFF4F8"/>
+          </a:solidFill>
+          <a:ln/>
+        </p:spPr>
+      </p:sp>
+      <p:sp>
+        <p:nvSpPr>
+          <p:cNvPr id="22" name="Shape 19"/>
+          <p:cNvSpPr/>
+          <p:nvPr/>
+        </p:nvSpPr>
+        <p:spPr>
+          <a:xfrm>
+            <a:off x="6388456" y="4656582"/>
+            <a:ext cx="292608" cy="292608"/>
+          </a:xfrm>
+          <a:prstGeom prst="ellipse">
+            <a:avLst/>
+          </a:prstGeom>
+          <a:solidFill>
+            <a:srgbClr val="12B198"/>
+          </a:solidFill>
+          <a:ln/>
+        </p:spPr>
+      </p:sp>
+      <p:sp>
+        <p:nvSpPr>
+          <p:cNvPr id="23" name="Text 20"/>
+          <p:cNvSpPr/>
+          <p:nvPr/>
+        </p:nvSpPr>
+        <p:spPr>
+          <a:xfrm>
+            <a:off x="6388456" y="4656582"/>
+            <a:ext cx="292608" cy="292608"/>
+          </a:xfrm>
+          <a:prstGeom prst="rect">
+            <a:avLst/>
+          </a:prstGeom>
+          <a:noFill/>
+          <a:ln/>
+        </p:spPr>
+        <p:txBody>
+          <a:bodyPr wrap="square" lIns="0" tIns="0" rIns="0" bIns="0" rtlCol="0" anchor="ctr"/>
+          <a:lstStyle/>
+          <a:p>
+            <a:pPr algn="ctr" indent="0" marL="0">
+              <a:buNone/>
+            </a:pPr>
+            <a:r>
+              <a:rPr lang="en-US" sz="1100" b="1" dirty="0">
+                <a:solidFill>
+                  <a:srgbClr val="FFFFFF"/>
+                </a:solidFill>
+                <a:latin typeface="Calibri" pitchFamily="34" charset="0"/>
+                <a:ea typeface="Calibri" pitchFamily="34" charset="-122"/>
+                <a:cs typeface="Calibri" pitchFamily="34" charset="-120"/>
+              </a:rPr>
+              <a:t>4</a:t>
+            </a:r>
+            <a:endParaRPr lang="en-US" sz="1100" dirty="0"/>
+          </a:p>
+        </p:txBody>
+      </p:sp>
+      <p:sp>
+        <p:nvSpPr>
+          <p:cNvPr id="24" name="Text 21"/>
+          <p:cNvSpPr/>
+          <p:nvPr/>
+        </p:nvSpPr>
+        <p:spPr>
+          <a:xfrm>
+            <a:off x="6772504" y="4320540"/>
+            <a:ext cx="4596232" cy="964692"/>
+          </a:xfrm>
+          <a:prstGeom prst="rect">
+            <a:avLst/>
+          </a:prstGeom>
+          <a:noFill/>
+          <a:ln/>
+        </p:spPr>
+        <p:txBody>
+          <a:bodyPr wrap="square" lIns="0" tIns="0" rIns="0" bIns="0" rtlCol="0" anchor="ctr"/>
+          <a:lstStyle/>
+          <a:p>
+            <a:pPr indent="0" marL="0">
+              <a:lnSpc>
+                <a:spcPct val="88000"/>
+              </a:lnSpc>
+              <a:buNone/>
+            </a:pPr>
+            <a:r>
+              <a:rPr lang="en-US" sz="1050" b="1" dirty="0">
+                <a:solidFill>
+                  <a:srgbClr val="1B2733"/>
+                </a:solidFill>
+                <a:latin typeface="Yu Gothic" pitchFamily="34" charset="0"/>
+                <a:ea typeface="Yu Gothic" pitchFamily="34" charset="-122"/>
+                <a:cs typeface="Yu Gothic" pitchFamily="34" charset="-120"/>
+              </a:rPr>
+              <a:t>報告するか。するとすれば誰に、何を事実として書くか。</a:t>
+            </a:r>
+            <a:endParaRPr lang="en-US" sz="1050" dirty="0"/>
+          </a:p>
+          <a:p>
+            <a:pPr indent="0" marL="0">
+              <a:lnSpc>
+                <a:spcPct val="88000"/>
+              </a:lnSpc>
+              <a:buNone/>
+            </a:pPr>
+            <a:r>
+              <a:rPr lang="en-US" sz="800" i="1" dirty="0">
+                <a:solidFill>
+                  <a:srgbClr val="5F7183"/>
+                </a:solidFill>
+                <a:latin typeface="Calibri" pitchFamily="34" charset="0"/>
+                <a:ea typeface="Calibri" pitchFamily="34" charset="-122"/>
+                <a:cs typeface="Calibri" pitchFamily="34" charset="-120"/>
+              </a:rPr>
+              <a:t>Do you report it? To whom, and what do you record as fact?</a:t>
+            </a:r>
+            <a:endParaRPr lang="en-US" sz="1050" dirty="0"/>
+          </a:p>
+        </p:txBody>
+      </p:sp>
+      <p:sp>
+        <p:nvSpPr>
+          <p:cNvPr id="25" name="Shape 22"/>
+          <p:cNvSpPr/>
+          <p:nvPr/>
+        </p:nvSpPr>
+        <p:spPr>
+          <a:xfrm>
+            <a:off x="640080" y="5394960"/>
+            <a:ext cx="10911535" cy="457200"/>
+          </a:xfrm>
+          <a:prstGeom prst="roundRect">
+            <a:avLst>
+              <a:gd name="adj" fmla="val 8000"/>
+            </a:avLst>
+          </a:prstGeom>
+          <a:solidFill>
+            <a:srgbClr val="E4F4F0"/>
+          </a:solidFill>
+          <a:ln/>
+        </p:spPr>
+      </p:sp>
+      <p:sp>
+        <p:nvSpPr>
+          <p:cNvPr id="26" name="Text 23"/>
+          <p:cNvSpPr/>
+          <p:nvPr/>
+        </p:nvSpPr>
+        <p:spPr>
+          <a:xfrm>
+            <a:off x="877824" y="5431536"/>
+            <a:ext cx="10436047" cy="384048"/>
+          </a:xfrm>
+          <a:prstGeom prst="rect">
+            <a:avLst/>
+          </a:prstGeom>
+          <a:noFill/>
+          <a:ln/>
+        </p:spPr>
+        <p:txBody>
+          <a:bodyPr wrap="square" lIns="0" tIns="0" rIns="0" bIns="0" rtlCol="0" anchor="ctr"/>
+          <a:lstStyle/>
+          <a:p>
+            <a:pPr indent="0" marL="0">
+              <a:lnSpc>
+                <a:spcPct val="86000"/>
+              </a:lnSpc>
+              <a:buNone/>
+            </a:pPr>
+            <a:r>
+              <a:rPr lang="en-US" sz="850" b="1" dirty="0">
+                <a:solidFill>
+                  <a:srgbClr val="0D8A76"/>
+                </a:solidFill>
+                <a:latin typeface="Yu Gothic" pitchFamily="34" charset="0"/>
+                <a:ea typeface="Yu Gothic" pitchFamily="34" charset="-122"/>
+                <a:cs typeface="Yu Gothic" pitchFamily="34" charset="-120"/>
+              </a:rPr>
+              <a:t>追加付与　</a:t>
+            </a:r>
+            <a:pPr indent="0" marL="0">
+              <a:lnSpc>
+                <a:spcPct val="86000"/>
+              </a:lnSpc>
+              <a:buNone/>
+            </a:pPr>
+            <a:r>
+              <a:rPr lang="en-US" sz="1050" b="1" dirty="0">
+                <a:solidFill>
+                  <a:srgbClr val="1B2733"/>
+                </a:solidFill>
+                <a:latin typeface="Yu Gothic" pitchFamily="34" charset="0"/>
+                <a:ea typeface="Yu Gothic" pitchFamily="34" charset="-122"/>
+                <a:cs typeface="Yu Gothic" pitchFamily="34" charset="-120"/>
+              </a:rPr>
+              <a:t>相手が「上司に確認してくれ」と言い、その場を離れようとした。</a:t>
+            </a:r>
+            <a:endParaRPr lang="en-US" sz="850" dirty="0"/>
+          </a:p>
+          <a:p>
+            <a:pPr indent="0" marL="0">
+              <a:lnSpc>
+                <a:spcPct val="86000"/>
+              </a:lnSpc>
+              <a:buNone/>
+            </a:pPr>
+            <a:r>
+              <a:rPr lang="en-US" sz="750" i="1" dirty="0">
+                <a:solidFill>
+                  <a:srgbClr val="5F7183"/>
+                </a:solidFill>
+                <a:latin typeface="Calibri" pitchFamily="34" charset="0"/>
+                <a:ea typeface="Calibri" pitchFamily="34" charset="-122"/>
+                <a:cs typeface="Calibri" pitchFamily="34" charset="-120"/>
+              </a:rPr>
+              <a:t>They say "check with my manager" and start to walk away.</a:t>
+            </a:r>
+            <a:endParaRPr lang="en-US" sz="850" dirty="0"/>
+          </a:p>
+        </p:txBody>
+      </p:sp>
+      <p:sp>
+        <p:nvSpPr>
+          <p:cNvPr id="27" name="Text 24"/>
+          <p:cNvSpPr/>
+          <p:nvPr/>
+        </p:nvSpPr>
+        <p:spPr>
+          <a:xfrm>
+            <a:off x="640080" y="5907024"/>
+            <a:ext cx="10911535" cy="310896"/>
+          </a:xfrm>
+          <a:prstGeom prst="rect">
+            <a:avLst/>
+          </a:prstGeom>
+          <a:noFill/>
+          <a:ln/>
+        </p:spPr>
+        <p:txBody>
+          <a:bodyPr wrap="square" lIns="0" tIns="0" rIns="0" bIns="0" rtlCol="0" anchor="t"/>
+          <a:lstStyle/>
+          <a:p>
+            <a:pPr indent="0" marL="0">
+              <a:lnSpc>
+                <a:spcPct val="88000"/>
+              </a:lnSpc>
+              <a:buNone/>
+            </a:pPr>
+            <a:r>
+              <a:rPr lang="en-US" sz="900" b="1" dirty="0">
+                <a:solidFill>
+                  <a:srgbClr val="0D8A76"/>
+                </a:solidFill>
+                <a:latin typeface="Yu Gothic" pitchFamily="34" charset="0"/>
+                <a:ea typeface="Yu Gothic" pitchFamily="34" charset="-122"/>
+                <a:cs typeface="Yu Gothic" pitchFamily="34" charset="-120"/>
+              </a:rPr>
+              <a:t>Site SOP優先　</a:t>
+            </a:r>
+            <a:pPr indent="0" marL="0">
+              <a:lnSpc>
+                <a:spcPct val="88000"/>
+              </a:lnSpc>
+              <a:buNone/>
+            </a:pPr>
+            <a:r>
+              <a:rPr lang="en-US" sz="900" dirty="0">
+                <a:solidFill>
+                  <a:srgbClr val="1B2733"/>
+                </a:solidFill>
+                <a:latin typeface="Yu Gothic" pitchFamily="34" charset="0"/>
+                <a:ea typeface="Yu Gothic" pitchFamily="34" charset="-122"/>
+                <a:cs typeface="Yu Gothic" pitchFamily="34" charset="-120"/>
+              </a:rPr>
+              <a:t>撮影の可否と、社員による撮影への対応は現場ごとに異なる。Site SOPを確認する。</a:t>
+            </a:r>
+            <a:endParaRPr lang="en-US" sz="900" dirty="0"/>
+          </a:p>
+          <a:p>
+            <a:pPr indent="0" marL="0">
+              <a:lnSpc>
+                <a:spcPct val="88000"/>
+              </a:lnSpc>
+              <a:buNone/>
+            </a:pPr>
+            <a:r>
+              <a:rPr lang="en-US" sz="750" i="1" dirty="0">
+                <a:solidFill>
+                  <a:srgbClr val="5F7183"/>
+                </a:solidFill>
+                <a:latin typeface="Calibri" pitchFamily="34" charset="0"/>
+                <a:ea typeface="Calibri" pitchFamily="34" charset="-122"/>
+                <a:cs typeface="Calibri" pitchFamily="34" charset="-120"/>
+              </a:rPr>
+              <a:t>Whether photography is allowed, and how to handle it by employees, differ by site. Check the Site SOP.</a:t>
+            </a:r>
+            <a:endParaRPr lang="en-US" sz="900" dirty="0"/>
+          </a:p>
+        </p:txBody>
+      </p:sp>
+      <p:sp>
+        <p:nvSpPr>
+          <p:cNvPr id="28" name="Text 25"/>
+          <p:cNvSpPr/>
+          <p:nvPr/>
+        </p:nvSpPr>
+        <p:spPr>
+          <a:xfrm>
+            <a:off x="640080" y="6272784"/>
+            <a:ext cx="9905695" cy="237744"/>
+          </a:xfrm>
+          <a:prstGeom prst="rect">
+            <a:avLst/>
+          </a:prstGeom>
+          <a:noFill/>
+          <a:ln/>
+        </p:spPr>
+        <p:txBody>
+          <a:bodyPr wrap="square" lIns="0" tIns="0" rIns="0" bIns="0" rtlCol="0" anchor="t"/>
+          <a:lstStyle/>
+          <a:p>
+            <a:pPr indent="0" marL="0">
+              <a:buNone/>
+            </a:pPr>
+            <a:r>
+              <a:rPr lang="en-US" sz="750" b="1" dirty="0">
+                <a:solidFill>
+                  <a:srgbClr val="D6E0E9"/>
+                </a:solidFill>
+                <a:latin typeface="Yu Gothic" pitchFamily="34" charset="0"/>
+                <a:ea typeface="Yu Gothic" pitchFamily="34" charset="-122"/>
+                <a:cs typeface="Yu Gothic" pitchFamily="34" charset="-120"/>
+              </a:rPr>
+              <a:t>ソース　</a:t>
+            </a:r>
+            <a:pPr indent="0" marL="0">
+              <a:buNone/>
+            </a:pPr>
+            <a:r>
+              <a:rPr lang="en-US" sz="750" dirty="0">
+                <a:solidFill>
+                  <a:srgbClr val="5F7183"/>
+                </a:solidFill>
+                <a:latin typeface="Yu Gothic" pitchFamily="34" charset="0"/>
+                <a:ea typeface="Yu Gothic" pitchFamily="34" charset="-122"/>
+                <a:cs typeface="Yu Gothic" pitchFamily="34" charset="-120"/>
+              </a:rPr>
+              <a:t>個人情報保護法、不正競争防止法、経済産業省「営業秘密管理指針」</a:t>
+            </a:r>
+            <a:endParaRPr lang="en-US" sz="750" dirty="0"/>
+          </a:p>
+        </p:txBody>
+      </p:sp>
+      <p:sp>
+        <p:nvSpPr>
+          <p:cNvPr id="29" name="Text 26"/>
+          <p:cNvSpPr/>
+          <p:nvPr/>
+        </p:nvSpPr>
+        <p:spPr>
+          <a:xfrm>
+            <a:off x="640080" y="6382512"/>
+            <a:ext cx="8778240" cy="292608"/>
+          </a:xfrm>
+          <a:prstGeom prst="rect">
+            <a:avLst/>
+          </a:prstGeom>
+          <a:noFill/>
+          <a:ln/>
+        </p:spPr>
+        <p:txBody>
+          <a:bodyPr wrap="square" lIns="0" tIns="0" rIns="0" bIns="0" rtlCol="0" anchor="ctr"/>
+          <a:lstStyle/>
+          <a:p>
+            <a:pPr indent="0" marL="0">
+              <a:buNone/>
+            </a:pPr>
+            <a:r>
+              <a:rPr lang="en-US" sz="900" dirty="0">
+                <a:solidFill>
+                  <a:srgbClr val="5F7183"/>
+                </a:solidFill>
+                <a:latin typeface="Yu Gothic" pitchFamily="34" charset="0"/>
+                <a:ea typeface="Yu Gothic" pitchFamily="34" charset="-122"/>
+                <a:cs typeface="Yu Gothic" pitchFamily="34" charset="-120"/>
+              </a:rPr>
+              <a:t>第1時限｜基本教育1 警備業務実施の基本原則  </a:t>
+            </a:r>
+            <a:pPr indent="0" marL="0">
+              <a:buNone/>
+            </a:pPr>
+            <a:r>
+              <a:rPr lang="en-US" sz="850" i="1" dirty="0">
+                <a:solidFill>
+                  <a:srgbClr val="D6E0E9"/>
+                </a:solidFill>
+                <a:latin typeface="Calibri" pitchFamily="34" charset="0"/>
+                <a:ea typeface="Calibri" pitchFamily="34" charset="-122"/>
+                <a:cs typeface="Calibri" pitchFamily="34" charset="-120"/>
+              </a:rPr>
+              <a:t>Period 1 | Basic Training 1 — Fundamental Principles</a:t>
+            </a:r>
+            <a:endParaRPr lang="en-US" sz="900" dirty="0"/>
+          </a:p>
+        </p:txBody>
+      </p:sp>
+      <p:sp>
+        <p:nvSpPr>
+          <p:cNvPr id="30" name="Text 27"/>
+          <p:cNvSpPr/>
+          <p:nvPr/>
+        </p:nvSpPr>
+        <p:spPr>
+          <a:xfrm>
+            <a:off x="10637215" y="6382512"/>
+            <a:ext cx="914400" cy="292608"/>
+          </a:xfrm>
+          <a:prstGeom prst="rect">
+            <a:avLst/>
+          </a:prstGeom>
+          <a:noFill/>
+          <a:ln/>
+        </p:spPr>
+        <p:txBody>
+          <a:bodyPr wrap="square" lIns="0" tIns="0" rIns="0" bIns="0" rtlCol="0" anchor="ctr"/>
+          <a:lstStyle/>
+          <a:p>
+            <a:pPr algn="r" indent="0" marL="0">
+              <a:buNone/>
+            </a:pPr>
+            <a:r>
+              <a:rPr lang="en-US" sz="1000" dirty="0">
+                <a:solidFill>
+                  <a:srgbClr val="5F7183"/>
+                </a:solidFill>
+                <a:latin typeface="Calibri" pitchFamily="34" charset="0"/>
+                <a:ea typeface="Calibri" pitchFamily="34" charset="-122"/>
+                <a:cs typeface="Calibri" pitchFamily="34" charset="-120"/>
+              </a:rPr>
+              <a:t>11</a:t>
+            </a:r>
+            <a:endParaRPr lang="en-US" sz="1000" dirty="0"/>
+          </a:p>
+        </p:txBody>
+      </p:sp>
+    </p:spTree>
+  </p:cSld>
+  <p:clrMapOvr>
+    <a:masterClrMapping/>
+  </p:clrMapOvr>
+</p:sld>
+</file>
+
+<file path=ppt/slides/slide12.xml><?xml version="1.0" encoding="utf-8"?>
+<p:sld xmlns:a="http://schemas.openxmlformats.org/drawingml/2006/main" xmlns:r="http://schemas.openxmlformats.org/officeDocument/2006/relationships" xmlns:p="http://schemas.openxmlformats.org/presentationml/2006/main">
+  <p:cSld name="Slide 12">
+    <p:bg>
+      <p:bgPr>
+        <a:solidFill>
+          <a:srgbClr val="FFFFFF"/>
+        </a:solidFill>
+      </p:bgPr>
+    </p:bg>
+    <p:spTree>
+      <p:nvGrpSpPr>
+        <p:cNvPr id="1" name=""/>
+        <p:cNvGrpSpPr/>
+        <p:nvPr/>
+      </p:nvGrpSpPr>
+      <p:grpSpPr>
+        <a:xfrm>
+          <a:off x="0" y="0"/>
+          <a:ext cx="0" cy="0"/>
+          <a:chOff x="0" y="0"/>
+          <a:chExt cx="0" cy="0"/>
+        </a:xfrm>
+      </p:grpSpPr>
+      <p:pic>
+        <p:nvPicPr>
+          <p:cNvPr id="2" name="Image 0" descr="/home/user/Training-/assets/logo.png">    </p:cNvPr>
+          <p:cNvPicPr>
+            <a:picLocks noChangeAspect="1"/>
+          </p:cNvPicPr>
+          <p:nvPr/>
+        </p:nvPicPr>
+        <p:blipFill>
+          <a:blip r:embed="rId1"/>
+          <a:stretch>
+            <a:fillRect/>
+          </a:stretch>
+        </p:blipFill>
+        <p:spPr>
+          <a:xfrm>
+            <a:off x="10765231" y="332912"/>
+            <a:ext cx="786384" cy="742353"/>
+          </a:xfrm>
+          <a:prstGeom prst="rect">
+            <a:avLst/>
+          </a:prstGeom>
+        </p:spPr>
+      </p:pic>
+      <p:sp>
+        <p:nvSpPr>
+          <p:cNvPr id="3" name="Text 0"/>
+          <p:cNvSpPr/>
+          <p:nvPr/>
+        </p:nvSpPr>
+        <p:spPr>
+          <a:xfrm>
+            <a:off x="640080" y="384048"/>
+            <a:ext cx="8982151" cy="768096"/>
+          </a:xfrm>
+          <a:prstGeom prst="rect">
+            <a:avLst/>
+          </a:prstGeom>
+          <a:noFill/>
+          <a:ln/>
+        </p:spPr>
+        <p:txBody>
+          <a:bodyPr wrap="square" lIns="0" tIns="0" rIns="0" bIns="0" rtlCol="0" anchor="t"/>
+          <a:lstStyle/>
+          <a:p>
+            <a:pPr indent="0" marL="0">
+              <a:lnSpc>
+                <a:spcPct val="94000"/>
+              </a:lnSpc>
+              <a:buNone/>
+            </a:pPr>
+            <a:r>
+              <a:rPr lang="en-US" sz="2300" b="1" dirty="0">
+                <a:solidFill>
+                  <a:srgbClr val="093259"/>
+                </a:solidFill>
+                <a:latin typeface="Yu Gothic" pitchFamily="34" charset="0"/>
+                <a:ea typeface="Yu Gothic" pitchFamily="34" charset="-122"/>
+                <a:cs typeface="Yu Gothic" pitchFamily="34" charset="-120"/>
+              </a:rPr>
+              <a:t>TTX 1-B 講評 ― 模範解答</a:t>
+            </a:r>
+            <a:endParaRPr lang="en-US" sz="2300" dirty="0"/>
+          </a:p>
+          <a:p>
+            <a:pPr indent="0" marL="0">
+              <a:lnSpc>
+                <a:spcPct val="94000"/>
+              </a:lnSpc>
+              <a:buNone/>
+            </a:pPr>
+            <a:r>
+              <a:rPr lang="en-US" sz="1100" i="1" dirty="0">
+                <a:solidFill>
+                  <a:srgbClr val="12B198"/>
+                </a:solidFill>
+                <a:latin typeface="Calibri" pitchFamily="34" charset="0"/>
+                <a:ea typeface="Calibri" pitchFamily="34" charset="-122"/>
+                <a:cs typeface="Calibri" pitchFamily="34" charset="-120"/>
+              </a:rPr>
+              <a:t>TTX 1-B Debrief — Model Answer</a:t>
+            </a:r>
+            <a:endParaRPr lang="en-US" sz="2300" dirty="0"/>
+          </a:p>
+        </p:txBody>
+      </p:sp>
+      <p:sp>
+        <p:nvSpPr>
+          <p:cNvPr id="4" name="Shape 1"/>
+          <p:cNvSpPr/>
+          <p:nvPr/>
+        </p:nvSpPr>
+        <p:spPr>
+          <a:xfrm>
+            <a:off x="9686239" y="438912"/>
+            <a:ext cx="932688" cy="310896"/>
+          </a:xfrm>
+          <a:prstGeom prst="roundRect">
+            <a:avLst>
+              <a:gd name="adj" fmla="val 14706"/>
+            </a:avLst>
+          </a:prstGeom>
+          <a:solidFill>
+            <a:srgbClr val="093259"/>
+          </a:solidFill>
+          <a:ln/>
+        </p:spPr>
+      </p:sp>
+      <p:sp>
+        <p:nvSpPr>
+          <p:cNvPr id="5" name="Text 2"/>
+          <p:cNvSpPr/>
+          <p:nvPr/>
+        </p:nvSpPr>
+        <p:spPr>
+          <a:xfrm>
+            <a:off x="9686239" y="438912"/>
+            <a:ext cx="932688" cy="310896"/>
+          </a:xfrm>
+          <a:prstGeom prst="rect">
+            <a:avLst/>
+          </a:prstGeom>
+          <a:noFill/>
+          <a:ln/>
+        </p:spPr>
+        <p:txBody>
+          <a:bodyPr wrap="square" lIns="0" tIns="0" rIns="0" bIns="0" rtlCol="0" anchor="ctr"/>
+          <a:lstStyle/>
+          <a:p>
+            <a:pPr algn="ctr" indent="0" marL="0">
+              <a:buNone/>
+            </a:pPr>
+            <a:r>
+              <a:rPr lang="en-US" sz="1100" b="1" dirty="0">
+                <a:solidFill>
+                  <a:srgbClr val="FFFFFF"/>
+                </a:solidFill>
+                <a:latin typeface="Calibri" pitchFamily="34" charset="0"/>
+                <a:ea typeface="Calibri" pitchFamily="34" charset="-122"/>
+                <a:cs typeface="Calibri" pitchFamily="34" charset="-120"/>
+              </a:rPr>
+              <a:t>DEBRIEF</a:t>
+            </a:r>
+            <a:endParaRPr lang="en-US" sz="1100" dirty="0"/>
+          </a:p>
+        </p:txBody>
+      </p:sp>
+      <p:sp>
+        <p:nvSpPr>
+          <p:cNvPr id="6" name="Text 3"/>
+          <p:cNvSpPr/>
+          <p:nvPr/>
+        </p:nvSpPr>
+        <p:spPr>
+          <a:xfrm>
+            <a:off x="640080" y="1188720"/>
+            <a:ext cx="10911535" cy="530352"/>
+          </a:xfrm>
+          <a:prstGeom prst="rect">
+            <a:avLst/>
+          </a:prstGeom>
+          <a:noFill/>
+          <a:ln/>
+        </p:spPr>
+        <p:txBody>
+          <a:bodyPr wrap="square" lIns="0" tIns="0" rIns="0" bIns="0" rtlCol="0" anchor="t"/>
+          <a:lstStyle/>
+          <a:p>
+            <a:pPr indent="0" marL="0">
+              <a:lnSpc>
+                <a:spcPct val="90000"/>
+              </a:lnSpc>
+              <a:buNone/>
+            </a:pPr>
+            <a:r>
+              <a:rPr lang="en-US" sz="1000" b="1" dirty="0">
+                <a:solidFill>
+                  <a:srgbClr val="0D8A76"/>
+                </a:solidFill>
+                <a:latin typeface="Yu Gothic" pitchFamily="34" charset="0"/>
+                <a:ea typeface="Yu Gothic" pitchFamily="34" charset="-122"/>
+                <a:cs typeface="Yu Gothic" pitchFamily="34" charset="-120"/>
+              </a:rPr>
+              <a:t>狙い　</a:t>
+            </a:r>
+            <a:pPr indent="0" marL="0">
+              <a:lnSpc>
+                <a:spcPct val="90000"/>
+              </a:lnSpc>
+              <a:buNone/>
+            </a:pPr>
+            <a:r>
+              <a:rPr lang="en-US" sz="1150" b="1" dirty="0">
+                <a:solidFill>
+                  <a:srgbClr val="093259"/>
+                </a:solidFill>
+                <a:latin typeface="Yu Gothic" pitchFamily="34" charset="0"/>
+                <a:ea typeface="Yu Gothic" pitchFamily="34" charset="-122"/>
+                <a:cs typeface="Yu Gothic" pitchFamily="34" charset="-120"/>
+              </a:rPr>
+              <a:t>「求められること」と「できないこと」の線引き。社員が相手でも権限は増えない。</a:t>
+            </a:r>
+            <a:endParaRPr lang="en-US" sz="1000" dirty="0"/>
+          </a:p>
+          <a:p>
+            <a:pPr indent="0" marL="0">
+              <a:lnSpc>
+                <a:spcPct val="90000"/>
+              </a:lnSpc>
+              <a:buNone/>
+            </a:pPr>
+            <a:r>
+              <a:rPr lang="en-US" sz="850" i="1" dirty="0">
+                <a:solidFill>
+                  <a:srgbClr val="5F7183"/>
+                </a:solidFill>
+                <a:latin typeface="Calibri" pitchFamily="34" charset="0"/>
+                <a:ea typeface="Calibri" pitchFamily="34" charset="-122"/>
+                <a:cs typeface="Calibri" pitchFamily="34" charset="-120"/>
+              </a:rPr>
+              <a:t>The line between what you may ask and what you cannot do. Being an employee changes nothing.</a:t>
+            </a:r>
+            <a:endParaRPr lang="en-US" sz="1000" dirty="0"/>
+          </a:p>
+        </p:txBody>
+      </p:sp>
+      <p:sp>
+        <p:nvSpPr>
+          <p:cNvPr id="7" name="Shape 4"/>
+          <p:cNvSpPr/>
+          <p:nvPr/>
+        </p:nvSpPr>
+        <p:spPr>
+          <a:xfrm>
+            <a:off x="640080" y="1773936"/>
+            <a:ext cx="5327752" cy="1274064"/>
+          </a:xfrm>
+          <a:prstGeom prst="roundRect">
+            <a:avLst>
+              <a:gd name="adj" fmla="val 2871"/>
+            </a:avLst>
+          </a:prstGeom>
+          <a:solidFill>
+            <a:srgbClr val="EFF4F8"/>
+          </a:solidFill>
+          <a:ln/>
+        </p:spPr>
+      </p:sp>
+      <p:sp>
+        <p:nvSpPr>
+          <p:cNvPr id="8" name="Text 5"/>
+          <p:cNvSpPr/>
+          <p:nvPr/>
+        </p:nvSpPr>
+        <p:spPr>
+          <a:xfrm>
+            <a:off x="877824" y="1865376"/>
+            <a:ext cx="4852264" cy="1091184"/>
+          </a:xfrm>
+          <a:prstGeom prst="rect">
+            <a:avLst/>
+          </a:prstGeom>
+          <a:noFill/>
+          <a:ln/>
+        </p:spPr>
+        <p:txBody>
+          <a:bodyPr wrap="square" lIns="0" tIns="0" rIns="0" bIns="0" rtlCol="0" anchor="t"/>
+          <a:lstStyle/>
+          <a:p>
+            <a:pPr indent="0" marL="0">
+              <a:lnSpc>
+                <a:spcPct val="90000"/>
+              </a:lnSpc>
+              <a:buNone/>
+            </a:pPr>
+            <a:r>
+              <a:rPr lang="en-US" sz="1050" b="1" dirty="0">
+                <a:solidFill>
+                  <a:srgbClr val="093259"/>
+                </a:solidFill>
+                <a:latin typeface="Yu Gothic" pitchFamily="34" charset="0"/>
+                <a:ea typeface="Yu Gothic" pitchFamily="34" charset="-122"/>
+                <a:cs typeface="Yu Gothic" pitchFamily="34" charset="-120"/>
+              </a:rPr>
+              <a:t>社員証の意味</a:t>
+            </a:r>
+            <a:endParaRPr lang="en-US" sz="1050" dirty="0"/>
+          </a:p>
+          <a:p>
+            <a:pPr indent="0" marL="0">
+              <a:lnSpc>
+                <a:spcPct val="90000"/>
+              </a:lnSpc>
+              <a:buNone/>
+            </a:pPr>
+            <a:r>
+              <a:rPr lang="en-US" sz="1050" b="1" dirty="0">
+                <a:solidFill>
+                  <a:srgbClr val="1B2733"/>
+                </a:solidFill>
+                <a:latin typeface="Yu Gothic" pitchFamily="34" charset="0"/>
+                <a:ea typeface="Yu Gothic" pitchFamily="34" charset="-122"/>
+                <a:cs typeface="Yu Gothic" pitchFamily="34" charset="-120"/>
+              </a:rPr>
+              <a:t>入館の資格を示すだけ。撮影の可否とは別の問題。</a:t>
+            </a:r>
+            <a:endParaRPr lang="en-US" sz="1050" dirty="0"/>
+          </a:p>
+          <a:p>
+            <a:pPr indent="0" marL="0">
+              <a:lnSpc>
+                <a:spcPct val="90000"/>
+              </a:lnSpc>
+              <a:buNone/>
+            </a:pPr>
+            <a:r>
+              <a:rPr lang="en-US" sz="800" i="1" dirty="0">
+                <a:solidFill>
+                  <a:srgbClr val="5F7183"/>
+                </a:solidFill>
+                <a:latin typeface="Calibri" pitchFamily="34" charset="0"/>
+                <a:ea typeface="Calibri" pitchFamily="34" charset="-122"/>
+                <a:cs typeface="Calibri" pitchFamily="34" charset="-120"/>
+              </a:rPr>
+              <a:t>It shows a right of entry only. Whether they may photograph is a separate question.</a:t>
+            </a:r>
+            <a:endParaRPr lang="en-US" sz="1050" dirty="0"/>
+          </a:p>
+        </p:txBody>
+      </p:sp>
+      <p:sp>
+        <p:nvSpPr>
+          <p:cNvPr id="9" name="Shape 6"/>
+          <p:cNvSpPr/>
+          <p:nvPr/>
+        </p:nvSpPr>
+        <p:spPr>
+          <a:xfrm>
+            <a:off x="6223864" y="1773936"/>
+            <a:ext cx="5327752" cy="1274064"/>
+          </a:xfrm>
+          <a:prstGeom prst="roundRect">
+            <a:avLst>
+              <a:gd name="adj" fmla="val 2871"/>
+            </a:avLst>
+          </a:prstGeom>
+          <a:solidFill>
+            <a:srgbClr val="EFF4F8"/>
+          </a:solidFill>
+          <a:ln/>
+        </p:spPr>
+      </p:sp>
+      <p:sp>
+        <p:nvSpPr>
+          <p:cNvPr id="10" name="Text 7"/>
+          <p:cNvSpPr/>
+          <p:nvPr/>
+        </p:nvSpPr>
+        <p:spPr>
+          <a:xfrm>
+            <a:off x="6461608" y="1865376"/>
+            <a:ext cx="4852264" cy="1091184"/>
+          </a:xfrm>
+          <a:prstGeom prst="rect">
+            <a:avLst/>
+          </a:prstGeom>
+          <a:noFill/>
+          <a:ln/>
+        </p:spPr>
+        <p:txBody>
+          <a:bodyPr wrap="square" lIns="0" tIns="0" rIns="0" bIns="0" rtlCol="0" anchor="t"/>
+          <a:lstStyle/>
+          <a:p>
+            <a:pPr indent="0" marL="0">
+              <a:lnSpc>
+                <a:spcPct val="90000"/>
+              </a:lnSpc>
+              <a:buNone/>
+            </a:pPr>
+            <a:r>
+              <a:rPr lang="en-US" sz="1050" b="1" dirty="0">
+                <a:solidFill>
+                  <a:srgbClr val="093259"/>
+                </a:solidFill>
+                <a:latin typeface="Yu Gothic" pitchFamily="34" charset="0"/>
+                <a:ea typeface="Yu Gothic" pitchFamily="34" charset="-122"/>
+                <a:cs typeface="Yu Gothic" pitchFamily="34" charset="-120"/>
+              </a:rPr>
+              <a:t>中止を求められるか</a:t>
+            </a:r>
+            <a:endParaRPr lang="en-US" sz="1050" dirty="0"/>
+          </a:p>
+          <a:p>
+            <a:pPr indent="0" marL="0">
+              <a:lnSpc>
+                <a:spcPct val="90000"/>
+              </a:lnSpc>
+              <a:buNone/>
+            </a:pPr>
+            <a:r>
+              <a:rPr lang="en-US" sz="1050" b="1" dirty="0">
+                <a:solidFill>
+                  <a:srgbClr val="1B2733"/>
+                </a:solidFill>
+                <a:latin typeface="Yu Gothic" pitchFamily="34" charset="0"/>
+                <a:ea typeface="Yu Gothic" pitchFamily="34" charset="-122"/>
+                <a:cs typeface="Yu Gothic" pitchFamily="34" charset="-120"/>
+              </a:rPr>
+              <a:t>求められる。根拠は管理権者から委ねられた撮影禁止の運用。</a:t>
+            </a:r>
+            <a:endParaRPr lang="en-US" sz="1050" dirty="0"/>
+          </a:p>
+          <a:p>
+            <a:pPr indent="0" marL="0">
+              <a:lnSpc>
+                <a:spcPct val="90000"/>
+              </a:lnSpc>
+              <a:buNone/>
+            </a:pPr>
+            <a:r>
+              <a:rPr lang="en-US" sz="800" i="1" dirty="0">
+                <a:solidFill>
+                  <a:srgbClr val="5F7183"/>
+                </a:solidFill>
+                <a:latin typeface="Calibri" pitchFamily="34" charset="0"/>
+                <a:ea typeface="Calibri" pitchFamily="34" charset="-122"/>
+                <a:cs typeface="Calibri" pitchFamily="34" charset="-120"/>
+              </a:rPr>
+              <a:t>Yes. The basis is the no-photography rule delegated by the site authority.</a:t>
+            </a:r>
+            <a:endParaRPr lang="en-US" sz="1050" dirty="0"/>
+          </a:p>
+        </p:txBody>
+      </p:sp>
+      <p:sp>
+        <p:nvSpPr>
+          <p:cNvPr id="11" name="Shape 8"/>
+          <p:cNvSpPr/>
+          <p:nvPr/>
+        </p:nvSpPr>
+        <p:spPr>
+          <a:xfrm>
+            <a:off x="640080" y="3176016"/>
+            <a:ext cx="5327752" cy="1274064"/>
+          </a:xfrm>
+          <a:prstGeom prst="roundRect">
+            <a:avLst>
+              <a:gd name="adj" fmla="val 2871"/>
+            </a:avLst>
+          </a:prstGeom>
+          <a:solidFill>
+            <a:srgbClr val="E4F4F0"/>
+          </a:solidFill>
+          <a:ln/>
+        </p:spPr>
+      </p:sp>
+      <p:sp>
+        <p:nvSpPr>
+          <p:cNvPr id="12" name="Text 9"/>
+          <p:cNvSpPr/>
+          <p:nvPr/>
+        </p:nvSpPr>
+        <p:spPr>
+          <a:xfrm>
+            <a:off x="877824" y="3267456"/>
+            <a:ext cx="4852264" cy="1091184"/>
+          </a:xfrm>
+          <a:prstGeom prst="rect">
+            <a:avLst/>
+          </a:prstGeom>
+          <a:noFill/>
+          <a:ln/>
+        </p:spPr>
+        <p:txBody>
+          <a:bodyPr wrap="square" lIns="0" tIns="0" rIns="0" bIns="0" rtlCol="0" anchor="t"/>
+          <a:lstStyle/>
+          <a:p>
+            <a:pPr indent="0" marL="0">
+              <a:lnSpc>
+                <a:spcPct val="90000"/>
+              </a:lnSpc>
+              <a:buNone/>
+            </a:pPr>
+            <a:r>
+              <a:rPr lang="en-US" sz="1050" b="1" dirty="0">
+                <a:solidFill>
+                  <a:srgbClr val="0D8A76"/>
+                </a:solidFill>
+                <a:latin typeface="Yu Gothic" pitchFamily="34" charset="0"/>
+                <a:ea typeface="Yu Gothic" pitchFamily="34" charset="-122"/>
+                <a:cs typeface="Yu Gothic" pitchFamily="34" charset="-120"/>
+              </a:rPr>
+              <a:t>削除を求められるか</a:t>
+            </a:r>
+            <a:endParaRPr lang="en-US" sz="1050" dirty="0"/>
+          </a:p>
+          <a:p>
+            <a:pPr indent="0" marL="0">
+              <a:lnSpc>
+                <a:spcPct val="90000"/>
+              </a:lnSpc>
+              <a:buNone/>
+            </a:pPr>
+            <a:r>
+              <a:rPr lang="en-US" sz="1050" b="1" dirty="0">
+                <a:solidFill>
+                  <a:srgbClr val="1B2733"/>
+                </a:solidFill>
+                <a:latin typeface="Yu Gothic" pitchFamily="34" charset="0"/>
+                <a:ea typeface="Yu Gothic" pitchFamily="34" charset="-122"/>
+                <a:cs typeface="Yu Gothic" pitchFamily="34" charset="-120"/>
+              </a:rPr>
+              <a:t>求められない。端末の中身は相手の管理下。有形力も使えない。</a:t>
+            </a:r>
+            <a:endParaRPr lang="en-US" sz="1050" dirty="0"/>
+          </a:p>
+          <a:p>
+            <a:pPr indent="0" marL="0">
+              <a:lnSpc>
+                <a:spcPct val="90000"/>
+              </a:lnSpc>
+              <a:buNone/>
+            </a:pPr>
+            <a:r>
+              <a:rPr lang="en-US" sz="800" i="1" dirty="0">
+                <a:solidFill>
+                  <a:srgbClr val="5F7183"/>
+                </a:solidFill>
+                <a:latin typeface="Calibri" pitchFamily="34" charset="0"/>
+                <a:ea typeface="Calibri" pitchFamily="34" charset="-122"/>
+                <a:cs typeface="Calibri" pitchFamily="34" charset="-120"/>
+              </a:rPr>
+              <a:t>No. The device is under their control, and you cannot use force.</a:t>
+            </a:r>
+            <a:endParaRPr lang="en-US" sz="1050" dirty="0"/>
+          </a:p>
+        </p:txBody>
+      </p:sp>
+      <p:sp>
+        <p:nvSpPr>
+          <p:cNvPr id="13" name="Shape 10"/>
+          <p:cNvSpPr/>
+          <p:nvPr/>
+        </p:nvSpPr>
+        <p:spPr>
+          <a:xfrm>
+            <a:off x="6223864" y="3176016"/>
+            <a:ext cx="5327752" cy="1274064"/>
+          </a:xfrm>
+          <a:prstGeom prst="roundRect">
+            <a:avLst>
+              <a:gd name="adj" fmla="val 2871"/>
+            </a:avLst>
+          </a:prstGeom>
+          <a:solidFill>
+            <a:srgbClr val="EFF4F8"/>
+          </a:solidFill>
+          <a:ln/>
+        </p:spPr>
+      </p:sp>
+      <p:sp>
+        <p:nvSpPr>
+          <p:cNvPr id="14" name="Text 11"/>
+          <p:cNvSpPr/>
+          <p:nvPr/>
+        </p:nvSpPr>
+        <p:spPr>
+          <a:xfrm>
+            <a:off x="6461608" y="3267456"/>
+            <a:ext cx="4852264" cy="1091184"/>
+          </a:xfrm>
+          <a:prstGeom prst="rect">
+            <a:avLst/>
+          </a:prstGeom>
+          <a:noFill/>
+          <a:ln/>
+        </p:spPr>
+        <p:txBody>
+          <a:bodyPr wrap="square" lIns="0" tIns="0" rIns="0" bIns="0" rtlCol="0" anchor="t"/>
+          <a:lstStyle/>
+          <a:p>
+            <a:pPr indent="0" marL="0">
+              <a:lnSpc>
+                <a:spcPct val="90000"/>
+              </a:lnSpc>
+              <a:buNone/>
+            </a:pPr>
+            <a:r>
+              <a:rPr lang="en-US" sz="1050" b="1" dirty="0">
+                <a:solidFill>
+                  <a:srgbClr val="093259"/>
+                </a:solidFill>
+                <a:latin typeface="Yu Gothic" pitchFamily="34" charset="0"/>
+                <a:ea typeface="Yu Gothic" pitchFamily="34" charset="-122"/>
+                <a:cs typeface="Yu Gothic" pitchFamily="34" charset="-120"/>
+              </a:rPr>
+              <a:t>応じない場合</a:t>
+            </a:r>
+            <a:endParaRPr lang="en-US" sz="1050" dirty="0"/>
+          </a:p>
+          <a:p>
+            <a:pPr indent="0" marL="0">
+              <a:lnSpc>
+                <a:spcPct val="90000"/>
+              </a:lnSpc>
+              <a:buNone/>
+            </a:pPr>
+            <a:r>
+              <a:rPr lang="en-US" sz="1050" b="1" dirty="0">
+                <a:solidFill>
+                  <a:srgbClr val="1B2733"/>
+                </a:solidFill>
+                <a:latin typeface="Yu Gothic" pitchFamily="34" charset="0"/>
+                <a:ea typeface="Yu Gothic" pitchFamily="34" charset="-122"/>
+                <a:cs typeface="Yu Gothic" pitchFamily="34" charset="-120"/>
+              </a:rPr>
+              <a:t>引き止めない。記録して報告する。判断は上長とクライアントが行う。</a:t>
+            </a:r>
+            <a:endParaRPr lang="en-US" sz="1050" dirty="0"/>
+          </a:p>
+          <a:p>
+            <a:pPr indent="0" marL="0">
+              <a:lnSpc>
+                <a:spcPct val="90000"/>
+              </a:lnSpc>
+              <a:buNone/>
+            </a:pPr>
+            <a:r>
+              <a:rPr lang="en-US" sz="800" i="1" dirty="0">
+                <a:solidFill>
+                  <a:srgbClr val="5F7183"/>
+                </a:solidFill>
+                <a:latin typeface="Calibri" pitchFamily="34" charset="0"/>
+                <a:ea typeface="Calibri" pitchFamily="34" charset="-122"/>
+                <a:cs typeface="Calibri" pitchFamily="34" charset="-120"/>
+              </a:rPr>
+              <a:t>Do not detain. Record and report. The supervisor and client decide.</a:t>
+            </a:r>
+            <a:endParaRPr lang="en-US" sz="1050" dirty="0"/>
+          </a:p>
+        </p:txBody>
+      </p:sp>
+      <p:sp>
+        <p:nvSpPr>
+          <p:cNvPr id="15" name="Shape 12"/>
+          <p:cNvSpPr/>
+          <p:nvPr/>
+        </p:nvSpPr>
+        <p:spPr>
+          <a:xfrm>
+            <a:off x="640080" y="4578096"/>
+            <a:ext cx="5327752" cy="1274064"/>
+          </a:xfrm>
+          <a:prstGeom prst="roundRect">
+            <a:avLst>
+              <a:gd name="adj" fmla="val 2871"/>
+            </a:avLst>
+          </a:prstGeom>
+          <a:solidFill>
+            <a:srgbClr val="EFF4F8"/>
+          </a:solidFill>
+          <a:ln/>
+        </p:spPr>
+      </p:sp>
+      <p:sp>
+        <p:nvSpPr>
+          <p:cNvPr id="16" name="Text 13"/>
+          <p:cNvSpPr/>
+          <p:nvPr/>
+        </p:nvSpPr>
+        <p:spPr>
+          <a:xfrm>
+            <a:off x="877824" y="4669536"/>
+            <a:ext cx="4852264" cy="1091184"/>
+          </a:xfrm>
+          <a:prstGeom prst="rect">
+            <a:avLst/>
+          </a:prstGeom>
+          <a:noFill/>
+          <a:ln/>
+        </p:spPr>
+        <p:txBody>
+          <a:bodyPr wrap="square" lIns="0" tIns="0" rIns="0" bIns="0" rtlCol="0" anchor="t"/>
+          <a:lstStyle/>
+          <a:p>
+            <a:pPr indent="0" marL="0">
+              <a:lnSpc>
+                <a:spcPct val="90000"/>
+              </a:lnSpc>
+              <a:buNone/>
+            </a:pPr>
+            <a:r>
+              <a:rPr lang="en-US" sz="1050" b="1" dirty="0">
+                <a:solidFill>
+                  <a:srgbClr val="093259"/>
+                </a:solidFill>
+                <a:latin typeface="Yu Gothic" pitchFamily="34" charset="0"/>
+                <a:ea typeface="Yu Gothic" pitchFamily="34" charset="-122"/>
+                <a:cs typeface="Yu Gothic" pitchFamily="34" charset="-120"/>
+              </a:rPr>
+              <a:t>離れようとしたら</a:t>
+            </a:r>
+            <a:endParaRPr lang="en-US" sz="1050" dirty="0"/>
+          </a:p>
+          <a:p>
+            <a:pPr indent="0" marL="0">
+              <a:lnSpc>
+                <a:spcPct val="90000"/>
+              </a:lnSpc>
+              <a:buNone/>
+            </a:pPr>
+            <a:r>
+              <a:rPr lang="en-US" sz="1050" b="1" dirty="0">
+                <a:solidFill>
+                  <a:srgbClr val="1B2733"/>
+                </a:solidFill>
+                <a:latin typeface="Yu Gothic" pitchFamily="34" charset="0"/>
+                <a:ea typeface="Yu Gothic" pitchFamily="34" charset="-122"/>
+                <a:cs typeface="Yu Gothic" pitchFamily="34" charset="-120"/>
+              </a:rPr>
+              <a:t>追わない。氏名と所属を確認できていれば足りる。</a:t>
+            </a:r>
+            <a:endParaRPr lang="en-US" sz="1050" dirty="0"/>
+          </a:p>
+          <a:p>
+            <a:pPr indent="0" marL="0">
+              <a:lnSpc>
+                <a:spcPct val="90000"/>
+              </a:lnSpc>
+              <a:buNone/>
+            </a:pPr>
+            <a:r>
+              <a:rPr lang="en-US" sz="800" i="1" dirty="0">
+                <a:solidFill>
+                  <a:srgbClr val="5F7183"/>
+                </a:solidFill>
+                <a:latin typeface="Calibri" pitchFamily="34" charset="0"/>
+                <a:ea typeface="Calibri" pitchFamily="34" charset="-122"/>
+                <a:cs typeface="Calibri" pitchFamily="34" charset="-120"/>
+              </a:rPr>
+              <a:t>Do not follow. Having their name and department is enough.</a:t>
+            </a:r>
+            <a:endParaRPr lang="en-US" sz="1050" dirty="0"/>
+          </a:p>
+        </p:txBody>
+      </p:sp>
+      <p:sp>
+        <p:nvSpPr>
+          <p:cNvPr id="17" name="Shape 14"/>
+          <p:cNvSpPr/>
+          <p:nvPr/>
+        </p:nvSpPr>
+        <p:spPr>
+          <a:xfrm>
+            <a:off x="6223864" y="4578096"/>
+            <a:ext cx="5327752" cy="1274064"/>
+          </a:xfrm>
+          <a:prstGeom prst="roundRect">
+            <a:avLst>
+              <a:gd name="adj" fmla="val 2871"/>
+            </a:avLst>
+          </a:prstGeom>
+          <a:solidFill>
+            <a:srgbClr val="EFF4F8"/>
+          </a:solidFill>
+          <a:ln/>
+        </p:spPr>
+      </p:sp>
+      <p:sp>
+        <p:nvSpPr>
+          <p:cNvPr id="18" name="Text 15"/>
+          <p:cNvSpPr/>
+          <p:nvPr/>
+        </p:nvSpPr>
+        <p:spPr>
+          <a:xfrm>
+            <a:off x="6461608" y="4669536"/>
+            <a:ext cx="4852264" cy="1091184"/>
+          </a:xfrm>
+          <a:prstGeom prst="rect">
+            <a:avLst/>
+          </a:prstGeom>
+          <a:noFill/>
+          <a:ln/>
+        </p:spPr>
+        <p:txBody>
+          <a:bodyPr wrap="square" lIns="0" tIns="0" rIns="0" bIns="0" rtlCol="0" anchor="t"/>
+          <a:lstStyle/>
+          <a:p>
+            <a:pPr indent="0" marL="0">
+              <a:lnSpc>
+                <a:spcPct val="90000"/>
+              </a:lnSpc>
+              <a:buNone/>
+            </a:pPr>
+            <a:r>
+              <a:rPr lang="en-US" sz="1050" b="1" dirty="0">
+                <a:solidFill>
+                  <a:srgbClr val="093259"/>
+                </a:solidFill>
+                <a:latin typeface="Yu Gothic" pitchFamily="34" charset="0"/>
+                <a:ea typeface="Yu Gothic" pitchFamily="34" charset="-122"/>
+                <a:cs typeface="Yu Gothic" pitchFamily="34" charset="-120"/>
+              </a:rPr>
+              <a:t>社員だと判明したら</a:t>
+            </a:r>
+            <a:endParaRPr lang="en-US" sz="1050" dirty="0"/>
+          </a:p>
+          <a:p>
+            <a:pPr indent="0" marL="0">
+              <a:lnSpc>
+                <a:spcPct val="90000"/>
+              </a:lnSpc>
+              <a:buNone/>
+            </a:pPr>
+            <a:r>
+              <a:rPr lang="en-US" sz="1050" b="1" dirty="0">
+                <a:solidFill>
+                  <a:srgbClr val="1B2733"/>
+                </a:solidFill>
+                <a:latin typeface="Yu Gothic" pitchFamily="34" charset="0"/>
+                <a:ea typeface="Yu Gothic" pitchFamily="34" charset="-122"/>
+                <a:cs typeface="Yu Gothic" pitchFamily="34" charset="-120"/>
+              </a:rPr>
+              <a:t>対応は誤りではない。確認は手続きであり、疑いではない。</a:t>
+            </a:r>
+            <a:endParaRPr lang="en-US" sz="1050" dirty="0"/>
+          </a:p>
+          <a:p>
+            <a:pPr indent="0" marL="0">
+              <a:lnSpc>
+                <a:spcPct val="90000"/>
+              </a:lnSpc>
+              <a:buNone/>
+            </a:pPr>
+            <a:r>
+              <a:rPr lang="en-US" sz="800" i="1" dirty="0">
+                <a:solidFill>
+                  <a:srgbClr val="5F7183"/>
+                </a:solidFill>
+                <a:latin typeface="Calibri" pitchFamily="34" charset="0"/>
+                <a:ea typeface="Calibri" pitchFamily="34" charset="-122"/>
+                <a:cs typeface="Calibri" pitchFamily="34" charset="-120"/>
+              </a:rPr>
+              <a:t>Your response was not wrong. Verifying is a procedure, not an accusation.</a:t>
+            </a:r>
+            <a:endParaRPr lang="en-US" sz="1050" dirty="0"/>
+          </a:p>
+        </p:txBody>
+      </p:sp>
+      <p:sp>
+        <p:nvSpPr>
+          <p:cNvPr id="19" name="Text 16"/>
+          <p:cNvSpPr/>
+          <p:nvPr/>
+        </p:nvSpPr>
+        <p:spPr>
+          <a:xfrm>
+            <a:off x="640080" y="5907024"/>
+            <a:ext cx="10911535" cy="310896"/>
+          </a:xfrm>
+          <a:prstGeom prst="rect">
+            <a:avLst/>
+          </a:prstGeom>
+          <a:noFill/>
+          <a:ln/>
+        </p:spPr>
+        <p:txBody>
+          <a:bodyPr wrap="square" lIns="0" tIns="0" rIns="0" bIns="0" rtlCol="0" anchor="t"/>
+          <a:lstStyle/>
+          <a:p>
+            <a:pPr indent="0" marL="0">
+              <a:lnSpc>
+                <a:spcPct val="88000"/>
+              </a:lnSpc>
+              <a:buNone/>
+            </a:pPr>
+            <a:r>
+              <a:rPr lang="en-US" sz="900" b="1" dirty="0">
+                <a:solidFill>
+                  <a:srgbClr val="0D8A76"/>
+                </a:solidFill>
+                <a:latin typeface="Yu Gothic" pitchFamily="34" charset="0"/>
+                <a:ea typeface="Yu Gothic" pitchFamily="34" charset="-122"/>
+                <a:cs typeface="Yu Gothic" pitchFamily="34" charset="-120"/>
+              </a:rPr>
+              <a:t>Site SOP優先　</a:t>
+            </a:r>
+            <a:pPr indent="0" marL="0">
+              <a:lnSpc>
+                <a:spcPct val="88000"/>
+              </a:lnSpc>
+              <a:buNone/>
+            </a:pPr>
+            <a:r>
+              <a:rPr lang="en-US" sz="900" dirty="0">
+                <a:solidFill>
+                  <a:srgbClr val="1B2733"/>
+                </a:solidFill>
+                <a:latin typeface="Yu Gothic" pitchFamily="34" charset="0"/>
+                <a:ea typeface="Yu Gothic" pitchFamily="34" charset="-122"/>
+                <a:cs typeface="Yu Gothic" pitchFamily="34" charset="-120"/>
+              </a:rPr>
+              <a:t>模範解答は判断の型を示すものです。実際の手順は各現場のSite SOPと警備指令書が優先します。</a:t>
+            </a:r>
+            <a:endParaRPr lang="en-US" sz="900" dirty="0"/>
+          </a:p>
+          <a:p>
+            <a:pPr indent="0" marL="0">
+              <a:lnSpc>
+                <a:spcPct val="88000"/>
+              </a:lnSpc>
+              <a:buNone/>
+            </a:pPr>
+            <a:r>
+              <a:rPr lang="en-US" sz="750" i="1" dirty="0">
+                <a:solidFill>
+                  <a:srgbClr val="5F7183"/>
+                </a:solidFill>
+                <a:latin typeface="Calibri" pitchFamily="34" charset="0"/>
+                <a:ea typeface="Calibri" pitchFamily="34" charset="-122"/>
+                <a:cs typeface="Calibri" pitchFamily="34" charset="-120"/>
+              </a:rPr>
+              <a:t>These answers show a pattern of reasoning. The Site SOP and post orders always take precedence.</a:t>
+            </a:r>
+            <a:endParaRPr lang="en-US" sz="900" dirty="0"/>
+          </a:p>
+        </p:txBody>
+      </p:sp>
+      <p:sp>
+        <p:nvSpPr>
+          <p:cNvPr id="20" name="Text 17"/>
+          <p:cNvSpPr/>
+          <p:nvPr/>
+        </p:nvSpPr>
+        <p:spPr>
+          <a:xfrm>
+            <a:off x="640080" y="6272784"/>
+            <a:ext cx="9905695" cy="237744"/>
+          </a:xfrm>
+          <a:prstGeom prst="rect">
+            <a:avLst/>
+          </a:prstGeom>
+          <a:noFill/>
+          <a:ln/>
+        </p:spPr>
+        <p:txBody>
+          <a:bodyPr wrap="square" lIns="0" tIns="0" rIns="0" bIns="0" rtlCol="0" anchor="t"/>
+          <a:lstStyle/>
+          <a:p>
+            <a:pPr indent="0" marL="0">
+              <a:buNone/>
+            </a:pPr>
+            <a:r>
+              <a:rPr lang="en-US" sz="750" b="1" dirty="0">
+                <a:solidFill>
+                  <a:srgbClr val="D6E0E9"/>
+                </a:solidFill>
+                <a:latin typeface="Yu Gothic" pitchFamily="34" charset="0"/>
+                <a:ea typeface="Yu Gothic" pitchFamily="34" charset="-122"/>
+                <a:cs typeface="Yu Gothic" pitchFamily="34" charset="-120"/>
+              </a:rPr>
+              <a:t>ソース　</a:t>
+            </a:r>
+            <a:pPr indent="0" marL="0">
+              <a:buNone/>
+            </a:pPr>
+            <a:r>
+              <a:rPr lang="en-US" sz="750" dirty="0">
+                <a:solidFill>
+                  <a:srgbClr val="5F7183"/>
+                </a:solidFill>
+                <a:latin typeface="Yu Gothic" pitchFamily="34" charset="0"/>
+                <a:ea typeface="Yu Gothic" pitchFamily="34" charset="-122"/>
+                <a:cs typeface="Yu Gothic" pitchFamily="34" charset="-120"/>
+              </a:rPr>
+              <a:t>警備業法、個人情報保護法、不正競争防止法</a:t>
+            </a:r>
+            <a:endParaRPr lang="en-US" sz="750" dirty="0"/>
+          </a:p>
+        </p:txBody>
+      </p:sp>
+      <p:sp>
+        <p:nvSpPr>
+          <p:cNvPr id="21" name="Text 18"/>
+          <p:cNvSpPr/>
+          <p:nvPr/>
+        </p:nvSpPr>
+        <p:spPr>
+          <a:xfrm>
+            <a:off x="640080" y="6382512"/>
+            <a:ext cx="8778240" cy="292608"/>
+          </a:xfrm>
+          <a:prstGeom prst="rect">
+            <a:avLst/>
+          </a:prstGeom>
+          <a:noFill/>
+          <a:ln/>
+        </p:spPr>
+        <p:txBody>
+          <a:bodyPr wrap="square" lIns="0" tIns="0" rIns="0" bIns="0" rtlCol="0" anchor="ctr"/>
+          <a:lstStyle/>
+          <a:p>
+            <a:pPr indent="0" marL="0">
+              <a:buNone/>
+            </a:pPr>
+            <a:r>
+              <a:rPr lang="en-US" sz="900" dirty="0">
+                <a:solidFill>
+                  <a:srgbClr val="5F7183"/>
+                </a:solidFill>
+                <a:latin typeface="Yu Gothic" pitchFamily="34" charset="0"/>
+                <a:ea typeface="Yu Gothic" pitchFamily="34" charset="-122"/>
+                <a:cs typeface="Yu Gothic" pitchFamily="34" charset="-120"/>
+              </a:rPr>
+              <a:t>第1時限｜基本教育1 警備業務実施の基本原則  </a:t>
+            </a:r>
+            <a:pPr indent="0" marL="0">
+              <a:buNone/>
+            </a:pPr>
+            <a:r>
+              <a:rPr lang="en-US" sz="850" i="1" dirty="0">
+                <a:solidFill>
+                  <a:srgbClr val="D6E0E9"/>
+                </a:solidFill>
+                <a:latin typeface="Calibri" pitchFamily="34" charset="0"/>
+                <a:ea typeface="Calibri" pitchFamily="34" charset="-122"/>
+                <a:cs typeface="Calibri" pitchFamily="34" charset="-120"/>
+              </a:rPr>
+              <a:t>Period 1 | Basic Training 1 — Fundamental Principles</a:t>
+            </a:r>
+            <a:endParaRPr lang="en-US" sz="900" dirty="0"/>
+          </a:p>
+        </p:txBody>
+      </p:sp>
+      <p:sp>
+        <p:nvSpPr>
+          <p:cNvPr id="22" name="Text 19"/>
+          <p:cNvSpPr/>
+          <p:nvPr/>
+        </p:nvSpPr>
+        <p:spPr>
+          <a:xfrm>
+            <a:off x="10637215" y="6382512"/>
+            <a:ext cx="914400" cy="292608"/>
+          </a:xfrm>
+          <a:prstGeom prst="rect">
+            <a:avLst/>
+          </a:prstGeom>
+          <a:noFill/>
+          <a:ln/>
+        </p:spPr>
+        <p:txBody>
+          <a:bodyPr wrap="square" lIns="0" tIns="0" rIns="0" bIns="0" rtlCol="0" anchor="ctr"/>
+          <a:lstStyle/>
+          <a:p>
+            <a:pPr algn="r" indent="0" marL="0">
+              <a:buNone/>
+            </a:pPr>
+            <a:r>
+              <a:rPr lang="en-US" sz="1000" dirty="0">
+                <a:solidFill>
+                  <a:srgbClr val="5F7183"/>
+                </a:solidFill>
+                <a:latin typeface="Calibri" pitchFamily="34" charset="0"/>
+                <a:ea typeface="Calibri" pitchFamily="34" charset="-122"/>
+                <a:cs typeface="Calibri" pitchFamily="34" charset="-120"/>
+              </a:rPr>
+              <a:t>12</a:t>
+            </a:r>
+            <a:endParaRPr lang="en-US" sz="1000" dirty="0"/>
+          </a:p>
+        </p:txBody>
+      </p:sp>
+    </p:spTree>
+  </p:cSld>
+  <p:clrMapOvr>
+    <a:masterClrMapping/>
+  </p:clrMapOvr>
+</p:sld>
+</file>
+
+<file path=ppt/slides/slide13.xml><?xml version="1.0" encoding="utf-8"?>
+<p:sld xmlns:a="http://schemas.openxmlformats.org/drawingml/2006/main" xmlns:r="http://schemas.openxmlformats.org/officeDocument/2006/relationships" xmlns:p="http://schemas.openxmlformats.org/presentationml/2006/main">
+  <p:cSld name="Slide 13">
     <p:bg>
       <p:bgPr>
         <a:solidFill>
@@ -4570,7 +7061,7 @@
                 <a:ea typeface="Calibri" pitchFamily="34" charset="-122"/>
                 <a:cs typeface="Calibri" pitchFamily="34" charset="-120"/>
               </a:rPr>
-              <a:t>　A form of Type-1 facility security, focused on stationed duty at corporate offices</a:t>
+              <a:t>  A form of Type-1 facility security, focused on stationed duty at corporate offices</a:t>
             </a:r>
             <a:endParaRPr lang="en-US" sz="950" dirty="0"/>
           </a:p>
@@ -4616,7 +7107,7 @@
                 <a:ea typeface="Calibri" pitchFamily="34" charset="-122"/>
                 <a:cs typeface="Calibri" pitchFamily="34" charset="-120"/>
               </a:rPr>
-              <a:t>　Differs from Types 2, 3 and 4 in purpose and in the standard of conduct required</a:t>
+              <a:t>  Differs from Types 2, 3 and 4 in purpose and in the standard of conduct required</a:t>
             </a:r>
             <a:endParaRPr lang="en-US" sz="950" dirty="0"/>
           </a:p>
@@ -4662,7 +7153,7 @@
                 <a:ea typeface="Calibri" pitchFamily="34" charset="-122"/>
                 <a:cs typeface="Calibri" pitchFamily="34" charset="-120"/>
               </a:rPr>
-              <a:t>　Unlike retail or hospitals, what is protected is the client's business activity itself</a:t>
+              <a:t>  Unlike retail or hospitals, what is protected is the client's business activity itself</a:t>
             </a:r>
             <a:endParaRPr lang="en-US" sz="950" dirty="0"/>
           </a:p>
@@ -4708,7 +7199,7 @@
                 <a:ea typeface="Calibri" pitchFamily="34" charset="-122"/>
                 <a:cs typeface="Calibri" pitchFamily="34" charset="-120"/>
               </a:rPr>
-              <a:t>　Conduct and confidentiality are themselves the quality of the service</a:t>
+              <a:t>  Conduct and confidentiality are themselves the quality of the service</a:t>
             </a:r>
             <a:endParaRPr lang="en-US" sz="950" dirty="0"/>
           </a:p>
@@ -4919,7 +7410,7 @@
                 <a:ea typeface="Calibri" pitchFamily="34" charset="-122"/>
                 <a:cs typeface="Calibri" pitchFamily="34" charset="-120"/>
               </a:rPr>
-              <a:t>　People: the safety of client staff, visitors, and yourself</a:t>
+              <a:t>  People: the safety of client staff, visitors, and yourself</a:t>
             </a:r>
             <a:endParaRPr lang="en-US" sz="950" dirty="0"/>
           </a:p>
@@ -4965,7 +7456,7 @@
                 <a:ea typeface="Calibri" pitchFamily="34" charset="-122"/>
                 <a:cs typeface="Calibri" pitchFamily="34" charset="-120"/>
               </a:rPr>
-              <a:t>　Asset: physical assets, and information assets such as documents, devices and data</a:t>
+              <a:t>  Asset: physical assets, and information assets such as documents, devices and data</a:t>
             </a:r>
             <a:endParaRPr lang="en-US" sz="950" dirty="0"/>
           </a:p>
@@ -5011,7 +7502,7 @@
                 <a:ea typeface="Calibri" pitchFamily="34" charset="-122"/>
                 <a:cs typeface="Calibri" pitchFamily="34" charset="-120"/>
               </a:rPr>
-              <a:t>　Reputation: the client's standing. Your conduct and confidentiality affect it directly</a:t>
+              <a:t>  Reputation: the client's standing. Your conduct and confidentiality affect it directly</a:t>
             </a:r>
             <a:endParaRPr lang="en-US" sz="950" dirty="0"/>
           </a:p>
@@ -5057,7 +7548,7 @@
                 <a:ea typeface="Calibri" pitchFamily="34" charset="-122"/>
                 <a:cs typeface="Calibri" pitchFamily="34" charset="-120"/>
               </a:rPr>
-              <a:t>　Even with zero physical loss, harming reputation is a failed mission</a:t>
+              <a:t>  Even with zero physical loss, harming reputation is a failed mission</a:t>
             </a:r>
             <a:endParaRPr lang="en-US" sz="950" dirty="0"/>
           </a:p>
@@ -5268,7 +7759,7 @@
                 <a:ea typeface="Calibri" pitchFamily="34" charset="-122"/>
                 <a:cs typeface="Calibri" pitchFamily="34" charset="-120"/>
               </a:rPr>
-              <a:t>　Our company: your employer, responsible for training and the chain of command</a:t>
+              <a:t>  Our company: your employer, responsible for training and the chain of command</a:t>
             </a:r>
             <a:endParaRPr lang="en-US" sz="950" dirty="0"/>
           </a:p>
@@ -5314,7 +7805,7 @@
                 <a:ea typeface="Calibri" pitchFamily="34" charset="-122"/>
                 <a:cs typeface="Calibri" pitchFamily="34" charset="-120"/>
               </a:rPr>
-              <a:t>　Building owner / facility manager: holds authority over the building itself</a:t>
+              <a:t>  Building owner / facility manager: holds authority over the building itself</a:t>
             </a:r>
             <a:endParaRPr lang="en-US" sz="950" dirty="0"/>
           </a:p>
@@ -5360,7 +7851,7 @@
                 <a:ea typeface="Calibri" pitchFamily="34" charset="-122"/>
                 <a:cs typeface="Calibri" pitchFamily="34" charset="-120"/>
               </a:rPr>
-              <a:t>　Client tenant: commissions the service and effectively defines the Site SOP</a:t>
+              <a:t>  Client tenant: commissions the service and effectively defines the Site SOP</a:t>
             </a:r>
             <a:endParaRPr lang="en-US" sz="950" dirty="0"/>
           </a:p>
@@ -5406,7 +7897,7 @@
                 <a:ea typeface="Calibri" pitchFamily="34" charset="-122"/>
                 <a:cs typeface="Calibri" pitchFamily="34" charset="-120"/>
               </a:rPr>
-              <a:t>　Report via the site leader to our company. Client matters go through your supervisor</a:t>
+              <a:t>  Report via the site leader to our company. Client matters go through your supervisor</a:t>
             </a:r>
             <a:endParaRPr lang="en-US" sz="950" dirty="0"/>
           </a:p>
@@ -5617,7 +8108,7 @@
                 <a:ea typeface="Calibri" pitchFamily="34" charset="-122"/>
                 <a:cs typeface="Calibri" pitchFamily="34" charset="-120"/>
               </a:rPr>
-              <a:t>　What am I protecting? People, Asset, or Reputation</a:t>
+              <a:t>  What am I protecting? People, Asset, or Reputation</a:t>
             </a:r>
             <a:endParaRPr lang="en-US" sz="950" dirty="0"/>
           </a:p>
@@ -5663,7 +8154,7 @@
                 <a:ea typeface="Calibri" pitchFamily="34" charset="-122"/>
                 <a:cs typeface="Calibri" pitchFamily="34" charset="-120"/>
               </a:rPr>
-              <a:t>　In what capacity am I acting? Private citizen, or agent for the site authority</a:t>
+              <a:t>  In what capacity am I acting? Private citizen, or agent for the site authority</a:t>
             </a:r>
             <a:endParaRPr lang="en-US" sz="950" dirty="0"/>
           </a:p>
@@ -5709,7 +8200,7 @@
                 <a:ea typeface="Calibri" pitchFamily="34" charset="-122"/>
                 <a:cs typeface="Calibri" pitchFamily="34" charset="-120"/>
               </a:rPr>
-              <a:t>　Is this the minimum action? If I exceed it, what offence does it become</a:t>
+              <a:t>  Is this the minimum action? If I exceed it, what offence does it become</a:t>
             </a:r>
             <a:endParaRPr lang="en-US" sz="950" dirty="0"/>
           </a:p>
@@ -5755,7 +8246,7 @@
                 <a:ea typeface="Calibri" pitchFamily="34" charset="-122"/>
                 <a:cs typeface="Calibri" pitchFamily="34" charset="-120"/>
               </a:rPr>
-              <a:t>　We use these in every session. State your reasoning, not just your conclusion</a:t>
+              <a:t>  We use these in every session. State your reasoning, not just your conclusion</a:t>
             </a:r>
             <a:endParaRPr lang="en-US" sz="950" dirty="0"/>
           </a:p>
@@ -6487,7 +8978,7 @@
                 <a:ea typeface="Calibri" pitchFamily="34" charset="-122"/>
                 <a:cs typeface="Calibri" pitchFamily="34" charset="-120"/>
               </a:rPr>
-              <a:t>　Floor layout, staff movements, visitors, incidents, equipment. None of it may be discussed</a:t>
+              <a:t>  Floor layout, staff movements, visitors, incidents, equipment. None of it may be discussed</a:t>
             </a:r>
             <a:endParaRPr lang="en-US" sz="950" dirty="0"/>
           </a:p>
@@ -6533,7 +9024,7 @@
                 <a:ea typeface="Calibri" pitchFamily="34" charset="-122"/>
                 <a:cs typeface="Calibri" pitchFamily="34" charset="-120"/>
               </a:rPr>
-              <a:t>　The same applies to family, colleagues, and guards at other sites</a:t>
+              <a:t>  The same applies to family, colleagues, and guards at other sites</a:t>
             </a:r>
             <a:endParaRPr lang="en-US" sz="950" dirty="0"/>
           </a:p>
@@ -6579,7 +9070,7 @@
                 <a:ea typeface="Calibri" pitchFamily="34" charset="-122"/>
                 <a:cs typeface="Calibri" pitchFamily="34" charset="-120"/>
               </a:rPr>
-              <a:t>　It applies to closed matters too. Time does not release the obligation</a:t>
+              <a:t>  It applies to closed matters too. Time does not release the obligation</a:t>
             </a:r>
             <a:endParaRPr lang="en-US" sz="950" dirty="0"/>
           </a:p>
@@ -6625,7 +9116,7 @@
                 <a:ea typeface="Calibri" pitchFamily="34" charset="-122"/>
                 <a:cs typeface="Calibri" pitchFamily="34" charset="-120"/>
               </a:rPr>
-              <a:t>　The obligation continues after you leave employment</a:t>
+              <a:t>  The obligation continues after you leave employment</a:t>
             </a:r>
             <a:endParaRPr lang="en-US" sz="950" dirty="0"/>
           </a:p>
@@ -6836,7 +9327,7 @@
                 <a:ea typeface="Calibri" pitchFamily="34" charset="-122"/>
                 <a:cs typeface="Calibri" pitchFamily="34" charset="-120"/>
               </a:rPr>
-              <a:t>　Photography on duty is prohibited as a rule, including anything showing uniform or insignia</a:t>
+              <a:t>  Photography on duty is prohibited as a rule, including anything showing uniform or insignia</a:t>
             </a:r>
             <a:endParaRPr lang="en-US" sz="950" dirty="0"/>
           </a:p>
@@ -6882,7 +9373,7 @@
                 <a:ea typeface="Calibri" pitchFamily="34" charset="-122"/>
                 <a:cs typeface="Calibri" pitchFamily="34" charset="-120"/>
               </a:rPr>
-              <a:t>　Do not post anything that identifies the site. Watch location metadata</a:t>
+              <a:t>  Do not post anything that identifies the site. Watch location metadata</a:t>
             </a:r>
             <a:endParaRPr lang="en-US" sz="950" dirty="0"/>
           </a:p>
@@ -6928,7 +9419,7 @@
                 <a:ea typeface="Calibri" pitchFamily="34" charset="-122"/>
                 <a:cs typeface="Calibri" pitchFamily="34" charset="-120"/>
               </a:rPr>
-              <a:t>　"Nobody will know" does not hold. Interiors and views identify a building</a:t>
+              <a:t>  "Nobody will know" does not hold. Interiors and views identify a building</a:t>
             </a:r>
             <a:endParaRPr lang="en-US" sz="950" dirty="0"/>
           </a:p>
@@ -6974,7 +9465,7 @@
                 <a:ea typeface="Calibri" pitchFamily="34" charset="-122"/>
                 <a:cs typeface="Calibri" pitchFamily="34" charset="-120"/>
               </a:rPr>
-              <a:t>　Do not move images from a work device to a personal one</a:t>
+              <a:t>  Do not move images from a work device to a personal one</a:t>
             </a:r>
             <a:endParaRPr lang="en-US" sz="950" dirty="0"/>
           </a:p>
@@ -7185,7 +9676,7 @@
                 <a:ea typeface="Calibri" pitchFamily="34" charset="-122"/>
                 <a:cs typeface="Calibri" pitchFamily="34" charset="-120"/>
               </a:rPr>
-              <a:t>　Managed as a secret</a:t>
+              <a:t>  Managed as a secret</a:t>
             </a:r>
             <a:endParaRPr lang="en-US" sz="950" dirty="0"/>
           </a:p>
@@ -7231,7 +9722,7 @@
                 <a:ea typeface="Calibri" pitchFamily="34" charset="-122"/>
                 <a:cs typeface="Calibri" pitchFamily="34" charset="-120"/>
               </a:rPr>
-              <a:t>　Useful to business activity, technically or commercially</a:t>
+              <a:t>  Useful to business activity, technically or commercially</a:t>
             </a:r>
             <a:endParaRPr lang="en-US" sz="950" dirty="0"/>
           </a:p>
@@ -7277,7 +9768,7 @@
                 <a:ea typeface="Calibri" pitchFamily="34" charset="-122"/>
                 <a:cs typeface="Calibri" pitchFamily="34" charset="-120"/>
               </a:rPr>
-              <a:t>　Not publicly known</a:t>
+              <a:t>  Not publicly known</a:t>
             </a:r>
             <a:endParaRPr lang="en-US" sz="950" dirty="0"/>
           </a:p>
@@ -7323,7 +9814,7 @@
                 <a:ea typeface="Calibri" pitchFamily="34" charset="-122"/>
                 <a:cs typeface="Calibri" pitchFamily="34" charset="-120"/>
               </a:rPr>
-              <a:t>　Infringing information that meets all three can carry criminal penalties</a:t>
+              <a:t>  Infringing information that meets all three can carry criminal penalties</a:t>
             </a:r>
             <a:endParaRPr lang="en-US" sz="950" dirty="0"/>
           </a:p>
@@ -7534,7 +10025,7 @@
                 <a:ea typeface="Calibri" pitchFamily="34" charset="-122"/>
                 <a:cs typeface="Calibri" pitchFamily="34" charset="-120"/>
               </a:rPr>
-              <a:t>　Do not read a document you find. Judge from the classification on the cover</a:t>
+              <a:t>  Do not read a document you find. Judge from the classification on the cover</a:t>
             </a:r>
             <a:endParaRPr lang="en-US" sz="950" dirty="0"/>
           </a:p>
@@ -7580,7 +10071,7 @@
                 <a:ea typeface="Calibri" pitchFamily="34" charset="-122"/>
                 <a:cs typeface="Calibri" pitchFamily="34" charset="-120"/>
               </a:rPr>
-              <a:t>　You cannot avoid overhearing. Do not carry what you heard out with you</a:t>
+              <a:t>  You cannot avoid overhearing. Do not carry what you heard out with you</a:t>
             </a:r>
             <a:endParaRPr lang="en-US" sz="950" dirty="0"/>
           </a:p>
@@ -7626,7 +10117,7 @@
                 <a:ea typeface="Calibri" pitchFamily="34" charset="-122"/>
                 <a:cs typeface="Calibri" pitchFamily="34" charset="-120"/>
               </a:rPr>
-              <a:t>　Do not look at visitor lists or access logs outside their purpose</a:t>
+              <a:t>  Do not look at visitor lists or access logs outside their purpose</a:t>
             </a:r>
             <a:endParaRPr lang="en-US" sz="950" dirty="0"/>
           </a:p>
@@ -7672,7 +10163,7 @@
                 <a:ea typeface="Calibri" pitchFamily="34" charset="-122"/>
                 <a:cs typeface="Calibri" pitchFamily="34" charset="-120"/>
               </a:rPr>
-              <a:t>　If unsure, ask your supervisor whether you may handle it, before you do</a:t>
+              <a:t>  If unsure, ask your supervisor whether you may handle it, before you do</a:t>
             </a:r>
             <a:endParaRPr lang="en-US" sz="950" dirty="0"/>
           </a:p>
@@ -8726,7 +11217,7 @@
                 <a:ea typeface="Calibri" pitchFamily="34" charset="-122"/>
                 <a:cs typeface="Calibri" pitchFamily="34" charset="-120"/>
               </a:rPr>
-              <a:t>　 Stop and question a person (Art. 2)</a:t>
+              <a:t>    Stop and question a person (Art. 2)</a:t>
             </a:r>
             <a:endParaRPr lang="en-US" sz="1250" dirty="0"/>
           </a:p>
@@ -8772,7 +11263,7 @@
                 <a:ea typeface="Calibri" pitchFamily="34" charset="-122"/>
                 <a:cs typeface="Calibri" pitchFamily="34" charset="-120"/>
               </a:rPr>
-              <a:t>　 Protective custody (Art. 3). Order evacuation (Art. 4)</a:t>
+              <a:t>    Protective custody (Art. 3). Order evacuation (Art. 4)</a:t>
             </a:r>
             <a:endParaRPr lang="en-US" sz="1250" dirty="0"/>
           </a:p>
@@ -8818,7 +11309,7 @@
                 <a:ea typeface="Calibri" pitchFamily="34" charset="-122"/>
                 <a:cs typeface="Calibri" pitchFamily="34" charset="-120"/>
               </a:rPr>
-              <a:t>　 Prevent and stop a crime (Art. 5)</a:t>
+              <a:t>    Prevent and stop a crime (Art. 5)</a:t>
             </a:r>
             <a:endParaRPr lang="en-US" sz="1250" dirty="0"/>
           </a:p>
@@ -8864,7 +11355,7 @@
                 <a:ea typeface="Calibri" pitchFamily="34" charset="-122"/>
                 <a:cs typeface="Calibri" pitchFamily="34" charset="-120"/>
               </a:rPr>
-              <a:t>　 Enter premises (Art. 6). Use weapons (Art. 7)</a:t>
+              <a:t>    Enter premises (Art. 6). Use weapons (Art. 7)</a:t>
             </a:r>
             <a:endParaRPr lang="en-US" sz="1250" dirty="0"/>
           </a:p>
@@ -8910,7 +11401,7 @@
                 <a:ea typeface="Calibri" pitchFamily="34" charset="-122"/>
                 <a:cs typeface="Calibri" pitchFamily="34" charset="-120"/>
               </a:rPr>
-              <a:t>　 Arrest by warrant. Interrogation</a:t>
+              <a:t>    Arrest by warrant. Interrogation</a:t>
             </a:r>
             <a:endParaRPr lang="en-US" sz="1250" dirty="0"/>
           </a:p>
@@ -9062,7 +11553,7 @@
                 <a:ea typeface="Calibri" pitchFamily="34" charset="-122"/>
                 <a:cs typeface="Calibri" pitchFamily="34" charset="-120"/>
               </a:rPr>
-              <a:t>　 None of the powers on the left</a:t>
+              <a:t>    None of the powers on the left</a:t>
             </a:r>
             <a:endParaRPr lang="en-US" sz="1250" dirty="0"/>
           </a:p>
@@ -9108,7 +11599,7 @@
                 <a:ea typeface="Calibri" pitchFamily="34" charset="-122"/>
                 <a:cs typeface="Calibri" pitchFamily="34" charset="-120"/>
               </a:rPr>
-              <a:t>　 Arrest of a flagrant offender — anyone may do this</a:t>
+              <a:t>    Arrest of a flagrant offender — anyone may do this</a:t>
             </a:r>
             <a:endParaRPr lang="en-US" sz="1250" dirty="0"/>
           </a:p>
@@ -9154,7 +11645,7 @@
                 <a:ea typeface="Calibri" pitchFamily="34" charset="-122"/>
                 <a:cs typeface="Calibri" pitchFamily="34" charset="-120"/>
               </a:rPr>
-              <a:t>　 Self-defence and necessity — anyone may do this</a:t>
+              <a:t>    Self-defence and necessity — anyone may do this</a:t>
             </a:r>
             <a:endParaRPr lang="en-US" sz="1250" dirty="0"/>
           </a:p>
@@ -9200,7 +11691,7 @@
                 <a:ea typeface="Calibri" pitchFamily="34" charset="-122"/>
                 <a:cs typeface="Calibri" pitchFamily="34" charset="-120"/>
               </a:rPr>
-              <a:t>　 What the site authority has delegated</a:t>
+              <a:t>    What the site authority has delegated</a:t>
             </a:r>
             <a:endParaRPr lang="en-US" sz="1250" dirty="0"/>
           </a:p>
@@ -9246,7 +11737,7 @@
                 <a:ea typeface="Calibri" pitchFamily="34" charset="-122"/>
                 <a:cs typeface="Calibri" pitchFamily="34" charset="-120"/>
               </a:rPr>
-              <a:t>　 That scope is set by the contract and the post orders</a:t>
+              <a:t>    That scope is set by the contract and the post orders</a:t>
             </a:r>
             <a:endParaRPr lang="en-US" sz="1250" dirty="0"/>
           </a:p>
@@ -9908,7 +12399,7 @@
                 <a:ea typeface="Calibri" pitchFamily="34" charset="-122"/>
                 <a:cs typeface="Calibri" pitchFamily="34" charset="-120"/>
               </a:rPr>
-              <a:t>　Citizen's arrest. It must be obvious, and immediate</a:t>
+              <a:t>  Citizen's arrest. It must be obvious, and immediate</a:t>
             </a:r>
             <a:endParaRPr lang="en-US" sz="950" dirty="0"/>
           </a:p>
@@ -9954,7 +12445,7 @@
                 <a:ea typeface="Calibri" pitchFamily="34" charset="-122"/>
                 <a:cs typeface="Calibri" pitchFamily="34" charset="-120"/>
               </a:rPr>
-              <a:t>　Self-defence. The right ends when the attack ends</a:t>
+              <a:t>  Self-defence. The right ends when the attack ends</a:t>
             </a:r>
             <a:endParaRPr lang="en-US" sz="950" dirty="0"/>
           </a:p>
@@ -10000,7 +12491,7 @@
                 <a:ea typeface="Calibri" pitchFamily="34" charset="-122"/>
                 <a:cs typeface="Calibri" pitchFamily="34" charset="-120"/>
               </a:rPr>
-              <a:t>　Necessity. Harm caused must not exceed harm avoided</a:t>
+              <a:t>  Necessity. Harm caused must not exceed harm avoided</a:t>
             </a:r>
             <a:endParaRPr lang="en-US" sz="950" dirty="0"/>
           </a:p>
@@ -10046,7 +12537,7 @@
                 <a:ea typeface="Calibri" pitchFamily="34" charset="-122"/>
                 <a:cs typeface="Calibri" pitchFamily="34" charset="-120"/>
               </a:rPr>
-              <a:t>　None of these come from being a guard. The tests are the same for everyone</a:t>
+              <a:t>  None of these come from being a guard. The tests are the same for everyone</a:t>
             </a:r>
             <a:endParaRPr lang="en-US" sz="950" dirty="0"/>
           </a:p>
@@ -10257,7 +12748,7 @@
                 <a:ea typeface="Calibri" pitchFamily="34" charset="-122"/>
                 <a:cs typeface="Calibri" pitchFamily="34" charset="-120"/>
               </a:rPr>
-              <a:t>　Deciding admission, according to the authority's criteria</a:t>
+              <a:t>  Deciding admission, according to the authority's criteria</a:t>
             </a:r>
             <a:endParaRPr lang="en-US" sz="950" dirty="0"/>
           </a:p>
@@ -10303,7 +12794,7 @@
                 <a:ea typeface="Calibri" pitchFamily="34" charset="-122"/>
                 <a:cs typeface="Calibri" pitchFamily="34" charset="-120"/>
               </a:rPr>
-              <a:t>　Requesting a person to leave, based on the authority's intent</a:t>
+              <a:t>  Requesting a person to leave, based on the authority's intent</a:t>
             </a:r>
             <a:endParaRPr lang="en-US" sz="950" dirty="0"/>
           </a:p>
@@ -10349,7 +12840,7 @@
                 <a:ea typeface="Calibri" pitchFamily="34" charset="-122"/>
                 <a:cs typeface="Calibri" pitchFamily="34" charset="-120"/>
               </a:rPr>
-              <a:t>　Restricting access, key control, and record-keeping</a:t>
+              <a:t>  Restricting access, key control, and record-keeping</a:t>
             </a:r>
             <a:endParaRPr lang="en-US" sz="950" dirty="0"/>
           </a:p>
@@ -10395,7 +12886,7 @@
                 <a:ea typeface="Calibri" pitchFamily="34" charset="-122"/>
                 <a:cs typeface="Calibri" pitchFamily="34" charset="-120"/>
               </a:rPr>
-              <a:t>　The scope is set by contract and post orders. You cannot widen it yourself</a:t>
+              <a:t>  The scope is set by contract and post orders. You cannot widen it yourself</a:t>
             </a:r>
             <a:endParaRPr lang="en-US" sz="950" dirty="0"/>
           </a:p>
@@ -10606,7 +13097,7 @@
                 <a:ea typeface="Calibri" pitchFamily="34" charset="-122"/>
                 <a:cs typeface="Calibri" pitchFamily="34" charset="-120"/>
               </a:rPr>
-              <a:t>　Forcing a bag search. Not possible without consent</a:t>
+              <a:t>  Forcing a bag search. Not possible without consent</a:t>
             </a:r>
             <a:endParaRPr lang="en-US" sz="950" dirty="0"/>
           </a:p>
@@ -10652,7 +13143,7 @@
                 <a:ea typeface="Calibri" pitchFamily="34" charset="-122"/>
                 <a:cs typeface="Calibri" pitchFamily="34" charset="-120"/>
               </a:rPr>
-              <a:t>　Interrogation, including questioning a person you have detained</a:t>
+              <a:t>  Interrogation, including questioning a person you have detained</a:t>
             </a:r>
             <a:endParaRPr lang="en-US" sz="950" dirty="0"/>
           </a:p>
@@ -10698,7 +13189,7 @@
                 <a:ea typeface="Calibri" pitchFamily="34" charset="-122"/>
                 <a:cs typeface="Calibri" pitchFamily="34" charset="-120"/>
               </a:rPr>
-              <a:t>　Recovering property by force. Not permitted as a rule</a:t>
+              <a:t>  Recovering property by force. Not permitted as a rule</a:t>
             </a:r>
             <a:endParaRPr lang="en-US" sz="950" dirty="0"/>
           </a:p>
@@ -10744,7 +13235,7 @@
                 <a:ea typeface="Calibri" pitchFamily="34" charset="-122"/>
                 <a:cs typeface="Calibri" pitchFamily="34" charset="-120"/>
               </a:rPr>
-              <a:t>　Restraining a person, except incidental to self-defence or a lawful arrest</a:t>
+              <a:t>  Restraining a person, except incidental to self-defence or a lawful arrest</a:t>
             </a:r>
             <a:endParaRPr lang="en-US" sz="950" dirty="0"/>
           </a:p>
@@ -10955,7 +13446,7 @@
                 <a:ea typeface="Calibri" pitchFamily="34" charset="-122"/>
                 <a:cs typeface="Calibri" pitchFamily="34" charset="-120"/>
               </a:rPr>
-              <a:t>　Unlawful confinement, assault, injury, coercion</a:t>
+              <a:t>  Unlawful confinement, assault, injury, coercion</a:t>
             </a:r>
             <a:endParaRPr lang="en-US" sz="950" dirty="0"/>
           </a:p>
@@ -11001,7 +13492,7 @@
                 <a:ea typeface="Calibri" pitchFamily="34" charset="-122"/>
                 <a:cs typeface="Calibri" pitchFamily="34" charset="-120"/>
               </a:rPr>
-              <a:t>　The company can lose the contract, and the client loses reputation</a:t>
+              <a:t>  The company can lose the contract, and the client loses reputation</a:t>
             </a:r>
             <a:endParaRPr lang="en-US" sz="950" dirty="0"/>
           </a:p>
@@ -11047,7 +13538,7 @@
                 <a:ea typeface="Calibri" pitchFamily="34" charset="-122"/>
                 <a:cs typeface="Calibri" pitchFamily="34" charset="-120"/>
               </a:rPr>
-              <a:t>　You may face criminal liability and civil damages</a:t>
+              <a:t>  You may face criminal liability and civil damages</a:t>
             </a:r>
             <a:endParaRPr lang="en-US" sz="950" dirty="0"/>
           </a:p>
@@ -11093,7 +13584,7 @@
                 <a:ea typeface="Calibri" pitchFamily="34" charset="-122"/>
                 <a:cs typeface="Calibri" pitchFamily="34" charset="-120"/>
               </a:rPr>
-              <a:t>　"I meant well" is not a defence</a:t>
+              <a:t>  "I meant well" is not a defence</a:t>
             </a:r>
             <a:endParaRPr lang="en-US" sz="950" dirty="0"/>
           </a:p>

--- a/decks/01_1限_基本原則.pptx
+++ b/decks/01_1限_基本原則.pptx
@@ -2294,7 +2294,7 @@
                 <a:ea typeface="Yu Gothic" pitchFamily="34" charset="-122"/>
                 <a:cs typeface="Yu Gothic" pitchFamily="34" charset="-120"/>
               </a:rPr>
-              <a:t>TTX 1-A 講評 ― 模範解答</a:t>
+              <a:t>TTX 1-A 模範解答</a:t>
             </a:r>
             <a:endParaRPr lang="en-US" sz="2300" dirty="0"/>
           </a:p>
@@ -2314,7 +2314,7 @@
                 <a:ea typeface="Calibri" pitchFamily="34" charset="-122"/>
                 <a:cs typeface="Calibri" pitchFamily="34" charset="-120"/>
               </a:rPr>
-              <a:t>TTX 1-A Debrief — Model Answer</a:t>
+              <a:t>TTX 1-A — Model Answers</a:t>
             </a:r>
             <a:endParaRPr lang="en-US" sz="2300" dirty="0"/>
           </a:p>
@@ -2383,97 +2383,18 @@
       </p:sp>
       <p:sp>
         <p:nvSpPr>
-          <p:cNvPr id="6" name="Text 3"/>
+          <p:cNvPr id="6" name="Shape 3"/>
           <p:cNvSpPr/>
           <p:nvPr/>
         </p:nvSpPr>
         <p:spPr>
           <a:xfrm>
             <a:off x="640080" y="1188720"/>
-            <a:ext cx="10911535" cy="530352"/>
-          </a:xfrm>
-          <a:prstGeom prst="rect">
-            <a:avLst/>
-          </a:prstGeom>
-          <a:noFill/>
-          <a:ln/>
-        </p:spPr>
-        <p:txBody>
-          <a:bodyPr wrap="square" lIns="0" tIns="0" rIns="0" bIns="0" rtlCol="0" anchor="t"/>
-          <a:lstStyle/>
-          <a:p>
-            <a:pPr indent="0" marL="0">
-              <a:lnSpc>
-                <a:spcPct val="90000"/>
-              </a:lnSpc>
-              <a:buNone/>
-            </a:pPr>
-            <a:r>
-              <a:rPr lang="en-US" sz="1000" b="1" dirty="0">
-                <a:solidFill>
-                  <a:srgbClr val="0D8A76"/>
-                </a:solidFill>
-                <a:latin typeface="Yu Gothic" pitchFamily="34" charset="0"/>
-                <a:ea typeface="Yu Gothic" pitchFamily="34" charset="-122"/>
-                <a:cs typeface="Yu Gothic" pitchFamily="34" charset="-120"/>
-              </a:rPr>
-              <a:t>狙い　</a:t>
-            </a:r>
-            <a:pPr indent="0" marL="0">
-              <a:lnSpc>
-                <a:spcPct val="90000"/>
-              </a:lnSpc>
-              <a:buNone/>
-            </a:pPr>
-            <a:r>
-              <a:rPr lang="en-US" sz="1150" b="1" dirty="0">
-                <a:solidFill>
-                  <a:srgbClr val="093259"/>
-                </a:solidFill>
-                <a:latin typeface="Yu Gothic" pitchFamily="34" charset="0"/>
-                <a:ea typeface="Yu Gothic" pitchFamily="34" charset="-122"/>
-                <a:cs typeface="Yu Gothic" pitchFamily="34" charset="-120"/>
-              </a:rPr>
-              <a:t>拾う行為と読む行為を分けられるか。情報資産の扱いの基本。</a:t>
-            </a:r>
-            <a:endParaRPr lang="en-US" sz="1000" dirty="0"/>
-          </a:p>
-          <a:p>
-            <a:pPr indent="0" marL="0">
-              <a:lnSpc>
-                <a:spcPct val="90000"/>
-              </a:lnSpc>
-              <a:buNone/>
-            </a:pPr>
-            <a:r>
-              <a:rPr lang="en-US" sz="850" i="1" dirty="0">
-                <a:solidFill>
-                  <a:srgbClr val="5F7183"/>
-                </a:solidFill>
-                <a:latin typeface="Calibri" pitchFamily="34" charset="0"/>
-                <a:ea typeface="Calibri" pitchFamily="34" charset="-122"/>
-                <a:cs typeface="Calibri" pitchFamily="34" charset="-120"/>
-              </a:rPr>
-              <a:t>Can you separate picking it up from reading it? This is the basis of handling information assets.</a:t>
-            </a:r>
-            <a:endParaRPr lang="en-US" sz="1000" dirty="0"/>
-          </a:p>
-        </p:txBody>
-      </p:sp>
-      <p:sp>
-        <p:nvSpPr>
-          <p:cNvPr id="7" name="Shape 4"/>
-          <p:cNvSpPr/>
-          <p:nvPr/>
-        </p:nvSpPr>
-        <p:spPr>
-          <a:xfrm>
-            <a:off x="640080" y="1773936"/>
-            <a:ext cx="5327752" cy="1091184"/>
+            <a:ext cx="10911535" cy="683514"/>
           </a:xfrm>
           <a:prstGeom prst="roundRect">
             <a:avLst>
-              <a:gd name="adj" fmla="val 3352"/>
+              <a:gd name="adj" fmla="val 5351"/>
             </a:avLst>
           </a:prstGeom>
           <a:solidFill>
@@ -2484,53 +2405,112 @@
       </p:sp>
       <p:sp>
         <p:nvSpPr>
+          <p:cNvPr id="7" name="Shape 4"/>
+          <p:cNvSpPr/>
+          <p:nvPr/>
+        </p:nvSpPr>
+        <p:spPr>
+          <a:xfrm>
+            <a:off x="841248" y="1356741"/>
+            <a:ext cx="347472" cy="347472"/>
+          </a:xfrm>
+          <a:prstGeom prst="ellipse">
+            <a:avLst/>
+          </a:prstGeom>
+          <a:solidFill>
+            <a:srgbClr val="12B198"/>
+          </a:solidFill>
+          <a:ln/>
+        </p:spPr>
+      </p:sp>
+      <p:sp>
+        <p:nvSpPr>
           <p:cNvPr id="8" name="Text 5"/>
           <p:cNvSpPr/>
           <p:nvPr/>
         </p:nvSpPr>
         <p:spPr>
           <a:xfrm>
-            <a:off x="877824" y="1865376"/>
-            <a:ext cx="4852264" cy="908304"/>
-          </a:xfrm>
-          <a:prstGeom prst="rect">
-            <a:avLst/>
-          </a:prstGeom>
-          <a:noFill/>
-          <a:ln/>
-        </p:spPr>
-        <p:txBody>
-          <a:bodyPr wrap="square" lIns="0" tIns="0" rIns="0" bIns="0" rtlCol="0" anchor="t"/>
-          <a:lstStyle/>
-          <a:p>
-            <a:pPr indent="0" marL="0">
-              <a:lnSpc>
-                <a:spcPct val="90000"/>
-              </a:lnSpc>
-              <a:buNone/>
-            </a:pPr>
-            <a:r>
-              <a:rPr lang="en-US" sz="1050" b="1" dirty="0">
-                <a:solidFill>
-                  <a:srgbClr val="093259"/>
-                </a:solidFill>
-                <a:latin typeface="Yu Gothic" pitchFamily="34" charset="0"/>
-                <a:ea typeface="Yu Gothic" pitchFamily="34" charset="-122"/>
-                <a:cs typeface="Yu Gothic" pitchFamily="34" charset="-120"/>
-              </a:rPr>
-              <a:t>どの柱か</a:t>
-            </a:r>
-            <a:endParaRPr lang="en-US" sz="1050" dirty="0"/>
-          </a:p>
-          <a:p>
-            <a:pPr indent="0" marL="0">
-              <a:lnSpc>
-                <a:spcPct val="90000"/>
-              </a:lnSpc>
-              <a:buNone/>
-            </a:pPr>
-            <a:r>
-              <a:rPr lang="en-US" sz="1050" b="1" dirty="0">
+            <a:off x="841248" y="1356741"/>
+            <a:ext cx="347472" cy="347472"/>
+          </a:xfrm>
+          <a:prstGeom prst="rect">
+            <a:avLst/>
+          </a:prstGeom>
+          <a:noFill/>
+          <a:ln/>
+        </p:spPr>
+        <p:txBody>
+          <a:bodyPr wrap="square" lIns="0" tIns="0" rIns="0" bIns="0" rtlCol="0" anchor="ctr"/>
+          <a:lstStyle/>
+          <a:p>
+            <a:pPr algn="ctr" indent="0" marL="0">
+              <a:buNone/>
+            </a:pPr>
+            <a:r>
+              <a:rPr lang="en-US" sz="1100" b="1" dirty="0">
+                <a:solidFill>
+                  <a:srgbClr val="FFFFFF"/>
+                </a:solidFill>
+                <a:latin typeface="Calibri" pitchFamily="34" charset="0"/>
+                <a:ea typeface="Calibri" pitchFamily="34" charset="-122"/>
+                <a:cs typeface="Calibri" pitchFamily="34" charset="-120"/>
+              </a:rPr>
+              <a:t>1</a:t>
+            </a:r>
+            <a:endParaRPr lang="en-US" sz="1100" dirty="0"/>
+          </a:p>
+        </p:txBody>
+      </p:sp>
+      <p:sp>
+        <p:nvSpPr>
+          <p:cNvPr id="9" name="Text 6"/>
+          <p:cNvSpPr/>
+          <p:nvPr/>
+        </p:nvSpPr>
+        <p:spPr>
+          <a:xfrm>
+            <a:off x="1280160" y="1252728"/>
+            <a:ext cx="10033711" cy="555498"/>
+          </a:xfrm>
+          <a:prstGeom prst="rect">
+            <a:avLst/>
+          </a:prstGeom>
+          <a:noFill/>
+          <a:ln/>
+        </p:spPr>
+        <p:txBody>
+          <a:bodyPr wrap="square" lIns="0" tIns="0" rIns="0" bIns="0" rtlCol="0" anchor="ctr"/>
+          <a:lstStyle/>
+          <a:p>
+            <a:pPr indent="0" marL="0">
+              <a:lnSpc>
+                <a:spcPct val="88000"/>
+              </a:lnSpc>
+              <a:buNone/>
+            </a:pPr>
+            <a:r>
+              <a:rPr lang="en-US" sz="900" dirty="0">
+                <a:solidFill>
+                  <a:srgbClr val="5F7183"/>
+                </a:solidFill>
+                <a:latin typeface="Yu Gothic" pitchFamily="34" charset="0"/>
+                <a:ea typeface="Yu Gothic" pitchFamily="34" charset="-122"/>
+                <a:cs typeface="Yu Gothic" pitchFamily="34" charset="-120"/>
+              </a:rPr>
+              <a:t>問1　どの柱に関わるか</a:t>
+            </a:r>
+            <a:endParaRPr lang="en-US" sz="900" dirty="0"/>
+          </a:p>
+          <a:p>
+            <a:pPr indent="0" marL="0">
+              <a:lnSpc>
+                <a:spcPct val="88000"/>
+              </a:lnSpc>
+              <a:buNone/>
+            </a:pPr>
+            <a:r>
+              <a:rPr lang="en-US" sz="1200" b="1" dirty="0">
                 <a:solidFill>
                   <a:srgbClr val="1B2733"/>
                 </a:solidFill>
@@ -2540,12 +2520,12 @@
               </a:rPr>
               <a:t>Asset（情報資産）。外部に出れば Reputation にも及ぶ。</a:t>
             </a:r>
-            <a:endParaRPr lang="en-US" sz="1050" dirty="0"/>
-          </a:p>
-          <a:p>
-            <a:pPr indent="0" marL="0">
-              <a:lnSpc>
-                <a:spcPct val="90000"/>
+            <a:endParaRPr lang="en-US" sz="900" dirty="0"/>
+          </a:p>
+          <a:p>
+            <a:pPr indent="0" marL="0">
+              <a:lnSpc>
+                <a:spcPct val="88000"/>
               </a:lnSpc>
               <a:buNone/>
             </a:pPr>
@@ -2558,26 +2538,26 @@
                 <a:ea typeface="Calibri" pitchFamily="34" charset="-122"/>
                 <a:cs typeface="Calibri" pitchFamily="34" charset="-120"/>
               </a:rPr>
-              <a:t>Asset (information). If it leaves, it also becomes a Reputation issue.</a:t>
-            </a:r>
-            <a:endParaRPr lang="en-US" sz="1050" dirty="0"/>
-          </a:p>
-        </p:txBody>
-      </p:sp>
-      <p:sp>
-        <p:nvSpPr>
-          <p:cNvPr id="9" name="Shape 6"/>
-          <p:cNvSpPr/>
-          <p:nvPr/>
-        </p:nvSpPr>
-        <p:spPr>
-          <a:xfrm>
-            <a:off x="6223864" y="1773936"/>
-            <a:ext cx="5327752" cy="1091184"/>
+              <a:t>Asset — information. If it leaves the building it becomes Reputation as well.</a:t>
+            </a:r>
+            <a:endParaRPr lang="en-US" sz="900" dirty="0"/>
+          </a:p>
+        </p:txBody>
+      </p:sp>
+      <p:sp>
+        <p:nvSpPr>
+          <p:cNvPr id="10" name="Shape 7"/>
+          <p:cNvSpPr/>
+          <p:nvPr/>
+        </p:nvSpPr>
+        <p:spPr>
+          <a:xfrm>
+            <a:off x="640080" y="1972818"/>
+            <a:ext cx="10911535" cy="683514"/>
           </a:xfrm>
           <a:prstGeom prst="roundRect">
             <a:avLst>
-              <a:gd name="adj" fmla="val 3352"/>
+              <a:gd name="adj" fmla="val 5351"/>
             </a:avLst>
           </a:prstGeom>
           <a:solidFill>
@@ -2588,53 +2568,112 @@
       </p:sp>
       <p:sp>
         <p:nvSpPr>
-          <p:cNvPr id="10" name="Text 7"/>
-          <p:cNvSpPr/>
-          <p:nvPr/>
-        </p:nvSpPr>
-        <p:spPr>
-          <a:xfrm>
-            <a:off x="6461608" y="1865376"/>
-            <a:ext cx="4852264" cy="908304"/>
-          </a:xfrm>
-          <a:prstGeom prst="rect">
-            <a:avLst/>
-          </a:prstGeom>
-          <a:noFill/>
-          <a:ln/>
-        </p:spPr>
-        <p:txBody>
-          <a:bodyPr wrap="square" lIns="0" tIns="0" rIns="0" bIns="0" rtlCol="0" anchor="t"/>
-          <a:lstStyle/>
-          <a:p>
-            <a:pPr indent="0" marL="0">
-              <a:lnSpc>
-                <a:spcPct val="90000"/>
-              </a:lnSpc>
-              <a:buNone/>
-            </a:pPr>
-            <a:r>
-              <a:rPr lang="en-US" sz="1050" b="1" dirty="0">
-                <a:solidFill>
-                  <a:srgbClr val="0D8A76"/>
-                </a:solidFill>
-                <a:latin typeface="Yu Gothic" pitchFamily="34" charset="0"/>
-                <a:ea typeface="Yu Gothic" pitchFamily="34" charset="-122"/>
-                <a:cs typeface="Yu Gothic" pitchFamily="34" charset="-120"/>
-              </a:rPr>
-              <a:t>拾ってよいか</a:t>
-            </a:r>
-            <a:endParaRPr lang="en-US" sz="1050" dirty="0"/>
-          </a:p>
-          <a:p>
-            <a:pPr indent="0" marL="0">
-              <a:lnSpc>
-                <a:spcPct val="90000"/>
-              </a:lnSpc>
-              <a:buNone/>
-            </a:pPr>
-            <a:r>
-              <a:rPr lang="en-US" sz="1050" b="1" dirty="0">
+          <p:cNvPr id="11" name="Shape 8"/>
+          <p:cNvSpPr/>
+          <p:nvPr/>
+        </p:nvSpPr>
+        <p:spPr>
+          <a:xfrm>
+            <a:off x="841248" y="2140839"/>
+            <a:ext cx="347472" cy="347472"/>
+          </a:xfrm>
+          <a:prstGeom prst="ellipse">
+            <a:avLst/>
+          </a:prstGeom>
+          <a:solidFill>
+            <a:srgbClr val="12B198"/>
+          </a:solidFill>
+          <a:ln/>
+        </p:spPr>
+      </p:sp>
+      <p:sp>
+        <p:nvSpPr>
+          <p:cNvPr id="12" name="Text 9"/>
+          <p:cNvSpPr/>
+          <p:nvPr/>
+        </p:nvSpPr>
+        <p:spPr>
+          <a:xfrm>
+            <a:off x="841248" y="2140839"/>
+            <a:ext cx="347472" cy="347472"/>
+          </a:xfrm>
+          <a:prstGeom prst="rect">
+            <a:avLst/>
+          </a:prstGeom>
+          <a:noFill/>
+          <a:ln/>
+        </p:spPr>
+        <p:txBody>
+          <a:bodyPr wrap="square" lIns="0" tIns="0" rIns="0" bIns="0" rtlCol="0" anchor="ctr"/>
+          <a:lstStyle/>
+          <a:p>
+            <a:pPr algn="ctr" indent="0" marL="0">
+              <a:buNone/>
+            </a:pPr>
+            <a:r>
+              <a:rPr lang="en-US" sz="1100" b="1" dirty="0">
+                <a:solidFill>
+                  <a:srgbClr val="FFFFFF"/>
+                </a:solidFill>
+                <a:latin typeface="Calibri" pitchFamily="34" charset="0"/>
+                <a:ea typeface="Calibri" pitchFamily="34" charset="-122"/>
+                <a:cs typeface="Calibri" pitchFamily="34" charset="-120"/>
+              </a:rPr>
+              <a:t>2</a:t>
+            </a:r>
+            <a:endParaRPr lang="en-US" sz="1100" dirty="0"/>
+          </a:p>
+        </p:txBody>
+      </p:sp>
+      <p:sp>
+        <p:nvSpPr>
+          <p:cNvPr id="13" name="Text 10"/>
+          <p:cNvSpPr/>
+          <p:nvPr/>
+        </p:nvSpPr>
+        <p:spPr>
+          <a:xfrm>
+            <a:off x="1280160" y="2036826"/>
+            <a:ext cx="10033711" cy="555498"/>
+          </a:xfrm>
+          <a:prstGeom prst="rect">
+            <a:avLst/>
+          </a:prstGeom>
+          <a:noFill/>
+          <a:ln/>
+        </p:spPr>
+        <p:txBody>
+          <a:bodyPr wrap="square" lIns="0" tIns="0" rIns="0" bIns="0" rtlCol="0" anchor="ctr"/>
+          <a:lstStyle/>
+          <a:p>
+            <a:pPr indent="0" marL="0">
+              <a:lnSpc>
+                <a:spcPct val="88000"/>
+              </a:lnSpc>
+              <a:buNone/>
+            </a:pPr>
+            <a:r>
+              <a:rPr lang="en-US" sz="900" dirty="0">
+                <a:solidFill>
+                  <a:srgbClr val="5F7183"/>
+                </a:solidFill>
+                <a:latin typeface="Yu Gothic" pitchFamily="34" charset="0"/>
+                <a:ea typeface="Yu Gothic" pitchFamily="34" charset="-122"/>
+                <a:cs typeface="Yu Gothic" pitchFamily="34" charset="-120"/>
+              </a:rPr>
+              <a:t>問2　拾ってよいか。読んでよいか</a:t>
+            </a:r>
+            <a:endParaRPr lang="en-US" sz="900" dirty="0"/>
+          </a:p>
+          <a:p>
+            <a:pPr indent="0" marL="0">
+              <a:lnSpc>
+                <a:spcPct val="88000"/>
+              </a:lnSpc>
+              <a:buNone/>
+            </a:pPr>
+            <a:r>
+              <a:rPr lang="en-US" sz="1200" b="1" dirty="0">
                 <a:solidFill>
                   <a:srgbClr val="1B2733"/>
                 </a:solidFill>
@@ -2642,14 +2681,14 @@
                 <a:ea typeface="Yu Gothic" pitchFamily="34" charset="-122"/>
                 <a:cs typeface="Yu Gothic" pitchFamily="34" charset="-120"/>
               </a:rPr>
-              <a:t>拾ってよい。ただし読んではいけない。表紙の分類表示までで判断する。</a:t>
-            </a:r>
-            <a:endParaRPr lang="en-US" sz="1050" dirty="0"/>
-          </a:p>
-          <a:p>
-            <a:pPr indent="0" marL="0">
-              <a:lnSpc>
-                <a:spcPct val="90000"/>
+              <a:t>拾ってよい。読んではいけない。表紙の分類表示までで判断する。</a:t>
+            </a:r>
+            <a:endParaRPr lang="en-US" sz="900" dirty="0"/>
+          </a:p>
+          <a:p>
+            <a:pPr indent="0" marL="0">
+              <a:lnSpc>
+                <a:spcPct val="88000"/>
               </a:lnSpc>
               <a:buNone/>
             </a:pPr>
@@ -2662,26 +2701,26 @@
                 <a:ea typeface="Calibri" pitchFamily="34" charset="-122"/>
                 <a:cs typeface="Calibri" pitchFamily="34" charset="-120"/>
               </a:rPr>
-              <a:t>Yes, pick it up. Do not read it. Judge from the cover classification only.</a:t>
-            </a:r>
-            <a:endParaRPr lang="en-US" sz="1050" dirty="0"/>
-          </a:p>
-        </p:txBody>
-      </p:sp>
-      <p:sp>
-        <p:nvSpPr>
-          <p:cNvPr id="11" name="Shape 8"/>
-          <p:cNvSpPr/>
-          <p:nvPr/>
-        </p:nvSpPr>
-        <p:spPr>
-          <a:xfrm>
-            <a:off x="640080" y="2993136"/>
-            <a:ext cx="5327752" cy="1091184"/>
+              <a:t>Pick it up, yes. Do not read it. Judge from the cover classification only.</a:t>
+            </a:r>
+            <a:endParaRPr lang="en-US" sz="900" dirty="0"/>
+          </a:p>
+        </p:txBody>
+      </p:sp>
+      <p:sp>
+        <p:nvSpPr>
+          <p:cNvPr id="14" name="Shape 11"/>
+          <p:cNvSpPr/>
+          <p:nvPr/>
+        </p:nvSpPr>
+        <p:spPr>
+          <a:xfrm>
+            <a:off x="640080" y="2756916"/>
+            <a:ext cx="10911535" cy="683514"/>
           </a:xfrm>
           <a:prstGeom prst="roundRect">
             <a:avLst>
-              <a:gd name="adj" fmla="val 3352"/>
+              <a:gd name="adj" fmla="val 5351"/>
             </a:avLst>
           </a:prstGeom>
           <a:solidFill>
@@ -2692,53 +2731,112 @@
       </p:sp>
       <p:sp>
         <p:nvSpPr>
-          <p:cNvPr id="12" name="Text 9"/>
-          <p:cNvSpPr/>
-          <p:nvPr/>
-        </p:nvSpPr>
-        <p:spPr>
-          <a:xfrm>
-            <a:off x="877824" y="3084576"/>
-            <a:ext cx="4852264" cy="908304"/>
-          </a:xfrm>
-          <a:prstGeom prst="rect">
-            <a:avLst/>
-          </a:prstGeom>
-          <a:noFill/>
-          <a:ln/>
-        </p:spPr>
-        <p:txBody>
-          <a:bodyPr wrap="square" lIns="0" tIns="0" rIns="0" bIns="0" rtlCol="0" anchor="t"/>
-          <a:lstStyle/>
-          <a:p>
-            <a:pPr indent="0" marL="0">
-              <a:lnSpc>
-                <a:spcPct val="90000"/>
-              </a:lnSpc>
-              <a:buNone/>
-            </a:pPr>
-            <a:r>
-              <a:rPr lang="en-US" sz="1050" b="1" dirty="0">
-                <a:solidFill>
-                  <a:srgbClr val="093259"/>
-                </a:solidFill>
-                <a:latin typeface="Yu Gothic" pitchFamily="34" charset="0"/>
-                <a:ea typeface="Yu Gothic" pitchFamily="34" charset="-122"/>
-                <a:cs typeface="Yu Gothic" pitchFamily="34" charset="-120"/>
-              </a:rPr>
-              <a:t>なぜ読めないか</a:t>
-            </a:r>
-            <a:endParaRPr lang="en-US" sz="1050" dirty="0"/>
-          </a:p>
-          <a:p>
-            <a:pPr indent="0" marL="0">
-              <a:lnSpc>
-                <a:spcPct val="90000"/>
-              </a:lnSpc>
-              <a:buNone/>
-            </a:pPr>
-            <a:r>
-              <a:rPr lang="en-US" sz="1050" b="1" dirty="0">
+          <p:cNvPr id="15" name="Shape 12"/>
+          <p:cNvSpPr/>
+          <p:nvPr/>
+        </p:nvSpPr>
+        <p:spPr>
+          <a:xfrm>
+            <a:off x="841248" y="2924937"/>
+            <a:ext cx="347472" cy="347472"/>
+          </a:xfrm>
+          <a:prstGeom prst="ellipse">
+            <a:avLst/>
+          </a:prstGeom>
+          <a:solidFill>
+            <a:srgbClr val="12B198"/>
+          </a:solidFill>
+          <a:ln/>
+        </p:spPr>
+      </p:sp>
+      <p:sp>
+        <p:nvSpPr>
+          <p:cNvPr id="16" name="Text 13"/>
+          <p:cNvSpPr/>
+          <p:nvPr/>
+        </p:nvSpPr>
+        <p:spPr>
+          <a:xfrm>
+            <a:off x="841248" y="2924937"/>
+            <a:ext cx="347472" cy="347472"/>
+          </a:xfrm>
+          <a:prstGeom prst="rect">
+            <a:avLst/>
+          </a:prstGeom>
+          <a:noFill/>
+          <a:ln/>
+        </p:spPr>
+        <p:txBody>
+          <a:bodyPr wrap="square" lIns="0" tIns="0" rIns="0" bIns="0" rtlCol="0" anchor="ctr"/>
+          <a:lstStyle/>
+          <a:p>
+            <a:pPr algn="ctr" indent="0" marL="0">
+              <a:buNone/>
+            </a:pPr>
+            <a:r>
+              <a:rPr lang="en-US" sz="1100" b="1" dirty="0">
+                <a:solidFill>
+                  <a:srgbClr val="FFFFFF"/>
+                </a:solidFill>
+                <a:latin typeface="Calibri" pitchFamily="34" charset="0"/>
+                <a:ea typeface="Calibri" pitchFamily="34" charset="-122"/>
+                <a:cs typeface="Calibri" pitchFamily="34" charset="-120"/>
+              </a:rPr>
+              <a:t>3</a:t>
+            </a:r>
+            <a:endParaRPr lang="en-US" sz="1100" dirty="0"/>
+          </a:p>
+        </p:txBody>
+      </p:sp>
+      <p:sp>
+        <p:nvSpPr>
+          <p:cNvPr id="17" name="Text 14"/>
+          <p:cNvSpPr/>
+          <p:nvPr/>
+        </p:nvSpPr>
+        <p:spPr>
+          <a:xfrm>
+            <a:off x="1280160" y="2820924"/>
+            <a:ext cx="10033711" cy="555498"/>
+          </a:xfrm>
+          <a:prstGeom prst="rect">
+            <a:avLst/>
+          </a:prstGeom>
+          <a:noFill/>
+          <a:ln/>
+        </p:spPr>
+        <p:txBody>
+          <a:bodyPr wrap="square" lIns="0" tIns="0" rIns="0" bIns="0" rtlCol="0" anchor="ctr"/>
+          <a:lstStyle/>
+          <a:p>
+            <a:pPr indent="0" marL="0">
+              <a:lnSpc>
+                <a:spcPct val="88000"/>
+              </a:lnSpc>
+              <a:buNone/>
+            </a:pPr>
+            <a:r>
+              <a:rPr lang="en-US" sz="900" dirty="0">
+                <a:solidFill>
+                  <a:srgbClr val="5F7183"/>
+                </a:solidFill>
+                <a:latin typeface="Yu Gothic" pitchFamily="34" charset="0"/>
+                <a:ea typeface="Yu Gothic" pitchFamily="34" charset="-122"/>
+                <a:cs typeface="Yu Gothic" pitchFamily="34" charset="-120"/>
+              </a:rPr>
+              <a:t>問3　誰にいつ報告するか</a:t>
+            </a:r>
+            <a:endParaRPr lang="en-US" sz="900" dirty="0"/>
+          </a:p>
+          <a:p>
+            <a:pPr indent="0" marL="0">
+              <a:lnSpc>
+                <a:spcPct val="88000"/>
+              </a:lnSpc>
+              <a:buNone/>
+            </a:pPr>
+            <a:r>
+              <a:rPr lang="en-US" sz="1200" b="1" dirty="0">
                 <a:solidFill>
                   <a:srgbClr val="1B2733"/>
                 </a:solidFill>
@@ -2746,14 +2844,14 @@
                 <a:ea typeface="Yu Gothic" pitchFamily="34" charset="-122"/>
                 <a:cs typeface="Yu Gothic" pitchFamily="34" charset="-120"/>
               </a:rPr>
-              <a:t>業務上の必要がない。営業秘密に該当しうる。読んだ事実自体が問題になる。</a:t>
-            </a:r>
-            <a:endParaRPr lang="en-US" sz="1050" dirty="0"/>
-          </a:p>
-          <a:p>
-            <a:pPr indent="0" marL="0">
-              <a:lnSpc>
-                <a:spcPct val="90000"/>
+              <a:t>警備責任者へその場で。深夜でも翌朝に回さない。発見時刻が記録の価値を決める。</a:t>
+            </a:r>
+            <a:endParaRPr lang="en-US" sz="900" dirty="0"/>
+          </a:p>
+          <a:p>
+            <a:pPr indent="0" marL="0">
+              <a:lnSpc>
+                <a:spcPct val="88000"/>
               </a:lnSpc>
               <a:buNone/>
             </a:pPr>
@@ -2766,26 +2864,26 @@
                 <a:ea typeface="Calibri" pitchFamily="34" charset="-122"/>
                 <a:cs typeface="Calibri" pitchFamily="34" charset="-120"/>
               </a:rPr>
-              <a:t>There is no operational need. It may be a trade secret. Reading it is itself the problem.</a:t>
-            </a:r>
-            <a:endParaRPr lang="en-US" sz="1050" dirty="0"/>
-          </a:p>
-        </p:txBody>
-      </p:sp>
-      <p:sp>
-        <p:nvSpPr>
-          <p:cNvPr id="13" name="Shape 10"/>
-          <p:cNvSpPr/>
-          <p:nvPr/>
-        </p:nvSpPr>
-        <p:spPr>
-          <a:xfrm>
-            <a:off x="6223864" y="2993136"/>
-            <a:ext cx="5327752" cy="1091184"/>
+              <a:t>The security supervisor, immediately. Do not wait for morning — the time of discovery is what gives the record value.</a:t>
+            </a:r>
+            <a:endParaRPr lang="en-US" sz="900" dirty="0"/>
+          </a:p>
+        </p:txBody>
+      </p:sp>
+      <p:sp>
+        <p:nvSpPr>
+          <p:cNvPr id="18" name="Shape 15"/>
+          <p:cNvSpPr/>
+          <p:nvPr/>
+        </p:nvSpPr>
+        <p:spPr>
+          <a:xfrm>
+            <a:off x="640080" y="3541014"/>
+            <a:ext cx="10911535" cy="683514"/>
           </a:xfrm>
           <a:prstGeom prst="roundRect">
             <a:avLst>
-              <a:gd name="adj" fmla="val 3352"/>
+              <a:gd name="adj" fmla="val 5351"/>
             </a:avLst>
           </a:prstGeom>
           <a:solidFill>
@@ -2796,53 +2894,112 @@
       </p:sp>
       <p:sp>
         <p:nvSpPr>
-          <p:cNvPr id="14" name="Text 11"/>
-          <p:cNvSpPr/>
-          <p:nvPr/>
-        </p:nvSpPr>
-        <p:spPr>
-          <a:xfrm>
-            <a:off x="6461608" y="3084576"/>
-            <a:ext cx="4852264" cy="908304"/>
-          </a:xfrm>
-          <a:prstGeom prst="rect">
-            <a:avLst/>
-          </a:prstGeom>
-          <a:noFill/>
-          <a:ln/>
-        </p:spPr>
-        <p:txBody>
-          <a:bodyPr wrap="square" lIns="0" tIns="0" rIns="0" bIns="0" rtlCol="0" anchor="t"/>
-          <a:lstStyle/>
-          <a:p>
-            <a:pPr indent="0" marL="0">
-              <a:lnSpc>
-                <a:spcPct val="90000"/>
-              </a:lnSpc>
-              <a:buNone/>
-            </a:pPr>
-            <a:r>
-              <a:rPr lang="en-US" sz="1050" b="1" dirty="0">
-                <a:solidFill>
-                  <a:srgbClr val="093259"/>
-                </a:solidFill>
-                <a:latin typeface="Yu Gothic" pitchFamily="34" charset="0"/>
-                <a:ea typeface="Yu Gothic" pitchFamily="34" charset="-122"/>
-                <a:cs typeface="Yu Gothic" pitchFamily="34" charset="-120"/>
-              </a:rPr>
-              <a:t>深夜であること</a:t>
-            </a:r>
-            <a:endParaRPr lang="en-US" sz="1050" dirty="0"/>
-          </a:p>
-          <a:p>
-            <a:pPr indent="0" marL="0">
-              <a:lnSpc>
-                <a:spcPct val="90000"/>
-              </a:lnSpc>
-              <a:buNone/>
-            </a:pPr>
-            <a:r>
-              <a:rPr lang="en-US" sz="1050" b="1" dirty="0">
+          <p:cNvPr id="19" name="Shape 16"/>
+          <p:cNvSpPr/>
+          <p:nvPr/>
+        </p:nvSpPr>
+        <p:spPr>
+          <a:xfrm>
+            <a:off x="841248" y="3709035"/>
+            <a:ext cx="347472" cy="347472"/>
+          </a:xfrm>
+          <a:prstGeom prst="ellipse">
+            <a:avLst/>
+          </a:prstGeom>
+          <a:solidFill>
+            <a:srgbClr val="12B198"/>
+          </a:solidFill>
+          <a:ln/>
+        </p:spPr>
+      </p:sp>
+      <p:sp>
+        <p:nvSpPr>
+          <p:cNvPr id="20" name="Text 17"/>
+          <p:cNvSpPr/>
+          <p:nvPr/>
+        </p:nvSpPr>
+        <p:spPr>
+          <a:xfrm>
+            <a:off x="841248" y="3709035"/>
+            <a:ext cx="347472" cy="347472"/>
+          </a:xfrm>
+          <a:prstGeom prst="rect">
+            <a:avLst/>
+          </a:prstGeom>
+          <a:noFill/>
+          <a:ln/>
+        </p:spPr>
+        <p:txBody>
+          <a:bodyPr wrap="square" lIns="0" tIns="0" rIns="0" bIns="0" rtlCol="0" anchor="ctr"/>
+          <a:lstStyle/>
+          <a:p>
+            <a:pPr algn="ctr" indent="0" marL="0">
+              <a:buNone/>
+            </a:pPr>
+            <a:r>
+              <a:rPr lang="en-US" sz="1100" b="1" dirty="0">
+                <a:solidFill>
+                  <a:srgbClr val="FFFFFF"/>
+                </a:solidFill>
+                <a:latin typeface="Calibri" pitchFamily="34" charset="0"/>
+                <a:ea typeface="Calibri" pitchFamily="34" charset="-122"/>
+                <a:cs typeface="Calibri" pitchFamily="34" charset="-120"/>
+              </a:rPr>
+              <a:t>4</a:t>
+            </a:r>
+            <a:endParaRPr lang="en-US" sz="1100" dirty="0"/>
+          </a:p>
+        </p:txBody>
+      </p:sp>
+      <p:sp>
+        <p:nvSpPr>
+          <p:cNvPr id="21" name="Text 18"/>
+          <p:cNvSpPr/>
+          <p:nvPr/>
+        </p:nvSpPr>
+        <p:spPr>
+          <a:xfrm>
+            <a:off x="1280160" y="3605022"/>
+            <a:ext cx="10033711" cy="555498"/>
+          </a:xfrm>
+          <a:prstGeom prst="rect">
+            <a:avLst/>
+          </a:prstGeom>
+          <a:noFill/>
+          <a:ln/>
+        </p:spPr>
+        <p:txBody>
+          <a:bodyPr wrap="square" lIns="0" tIns="0" rIns="0" bIns="0" rtlCol="0" anchor="ctr"/>
+          <a:lstStyle/>
+          <a:p>
+            <a:pPr indent="0" marL="0">
+              <a:lnSpc>
+                <a:spcPct val="88000"/>
+              </a:lnSpc>
+              <a:buNone/>
+            </a:pPr>
+            <a:r>
+              <a:rPr lang="en-US" sz="900" dirty="0">
+                <a:solidFill>
+                  <a:srgbClr val="5F7183"/>
+                </a:solidFill>
+                <a:latin typeface="Yu Gothic" pitchFamily="34" charset="0"/>
+                <a:ea typeface="Yu Gothic" pitchFamily="34" charset="-122"/>
+                <a:cs typeface="Yu Gothic" pitchFamily="34" charset="-120"/>
+              </a:rPr>
+              <a:t>問4　日誌にどう書くか</a:t>
+            </a:r>
+            <a:endParaRPr lang="en-US" sz="900" dirty="0"/>
+          </a:p>
+          <a:p>
+            <a:pPr indent="0" marL="0">
+              <a:lnSpc>
+                <a:spcPct val="88000"/>
+              </a:lnSpc>
+              <a:buNone/>
+            </a:pPr>
+            <a:r>
+              <a:rPr lang="en-US" sz="1200" b="1" dirty="0">
                 <a:solidFill>
                   <a:srgbClr val="1B2733"/>
                 </a:solidFill>
@@ -2850,14 +3007,14 @@
                 <a:ea typeface="Yu Gothic" pitchFamily="34" charset="-122"/>
                 <a:cs typeface="Yu Gothic" pitchFamily="34" charset="-120"/>
               </a:rPr>
-              <a:t>報告を翌朝に回さない。発見時刻が記録の価値を決める。</a:t>
-            </a:r>
-            <a:endParaRPr lang="en-US" sz="1050" dirty="0"/>
-          </a:p>
-          <a:p>
-            <a:pPr indent="0" marL="0">
-              <a:lnSpc>
-                <a:spcPct val="90000"/>
+              <a:t>発見時刻、場所、分類表示、引渡し先を書く。中身は書かない。</a:t>
+            </a:r>
+            <a:endParaRPr lang="en-US" sz="900" dirty="0"/>
+          </a:p>
+          <a:p>
+            <a:pPr indent="0" marL="0">
+              <a:lnSpc>
+                <a:spcPct val="88000"/>
               </a:lnSpc>
               <a:buNone/>
             </a:pPr>
@@ -2870,83 +3027,97 @@
                 <a:ea typeface="Calibri" pitchFamily="34" charset="-122"/>
                 <a:cs typeface="Calibri" pitchFamily="34" charset="-120"/>
               </a:rPr>
-              <a:t>Do not hold the report until morning. The time of discovery is what gives the record value.</a:t>
-            </a:r>
-            <a:endParaRPr lang="en-US" sz="1050" dirty="0"/>
-          </a:p>
-        </p:txBody>
-      </p:sp>
-      <p:sp>
-        <p:nvSpPr>
-          <p:cNvPr id="15" name="Shape 12"/>
-          <p:cNvSpPr/>
-          <p:nvPr/>
-        </p:nvSpPr>
-        <p:spPr>
-          <a:xfrm>
-            <a:off x="640080" y="4212336"/>
-            <a:ext cx="5327752" cy="1091184"/>
+              <a:t>Time, place, classification, and who you handed it to. Never the contents.</a:t>
+            </a:r>
+            <a:endParaRPr lang="en-US" sz="900" dirty="0"/>
+          </a:p>
+        </p:txBody>
+      </p:sp>
+      <p:sp>
+        <p:nvSpPr>
+          <p:cNvPr id="22" name="Shape 19"/>
+          <p:cNvSpPr/>
+          <p:nvPr/>
+        </p:nvSpPr>
+        <p:spPr>
+          <a:xfrm>
+            <a:off x="640080" y="4334256"/>
+            <a:ext cx="10911535" cy="420624"/>
           </a:xfrm>
           <a:prstGeom prst="roundRect">
             <a:avLst>
-              <a:gd name="adj" fmla="val 3352"/>
+              <a:gd name="adj" fmla="val 8696"/>
             </a:avLst>
           </a:prstGeom>
           <a:solidFill>
-            <a:srgbClr val="EFF4F8"/>
+            <a:srgbClr val="EEF6FA"/>
           </a:solidFill>
           <a:ln/>
         </p:spPr>
       </p:sp>
       <p:sp>
         <p:nvSpPr>
-          <p:cNvPr id="16" name="Text 13"/>
-          <p:cNvSpPr/>
-          <p:nvPr/>
-        </p:nvSpPr>
-        <p:spPr>
-          <a:xfrm>
-            <a:off x="877824" y="4303776"/>
-            <a:ext cx="4852264" cy="908304"/>
-          </a:xfrm>
-          <a:prstGeom prst="rect">
-            <a:avLst/>
-          </a:prstGeom>
-          <a:noFill/>
-          <a:ln/>
-        </p:spPr>
-        <p:txBody>
-          <a:bodyPr wrap="square" lIns="0" tIns="0" rIns="0" bIns="0" rtlCol="0" anchor="t"/>
-          <a:lstStyle/>
-          <a:p>
-            <a:pPr indent="0" marL="0">
-              <a:lnSpc>
-                <a:spcPct val="90000"/>
-              </a:lnSpc>
-              <a:buNone/>
-            </a:pPr>
-            <a:r>
-              <a:rPr lang="en-US" sz="1050" b="1" dirty="0">
-                <a:solidFill>
-                  <a:srgbClr val="093259"/>
-                </a:solidFill>
-                <a:latin typeface="Yu Gothic" pitchFamily="34" charset="0"/>
-                <a:ea typeface="Yu Gothic" pitchFamily="34" charset="-122"/>
-                <a:cs typeface="Yu Gothic" pitchFamily="34" charset="-120"/>
-              </a:rPr>
-              <a:t>記録の書き方</a:t>
-            </a:r>
-            <a:endParaRPr lang="en-US" sz="1050" dirty="0"/>
-          </a:p>
-          <a:p>
-            <a:pPr indent="0" marL="0">
-              <a:lnSpc>
-                <a:spcPct val="90000"/>
-              </a:lnSpc>
-              <a:buNone/>
-            </a:pPr>
-            <a:r>
-              <a:rPr lang="en-US" sz="1050" b="1" dirty="0">
+          <p:cNvPr id="23" name="Text 20"/>
+          <p:cNvSpPr/>
+          <p:nvPr/>
+        </p:nvSpPr>
+        <p:spPr>
+          <a:xfrm>
+            <a:off x="859536" y="4361688"/>
+            <a:ext cx="10472623" cy="365760"/>
+          </a:xfrm>
+          <a:prstGeom prst="rect">
+            <a:avLst/>
+          </a:prstGeom>
+          <a:noFill/>
+          <a:ln/>
+        </p:spPr>
+        <p:txBody>
+          <a:bodyPr wrap="square" lIns="0" tIns="0" rIns="0" bIns="0" rtlCol="0" anchor="ctr"/>
+          <a:lstStyle/>
+          <a:p>
+            <a:pPr indent="0" marL="0">
+              <a:lnSpc>
+                <a:spcPct val="86000"/>
+              </a:lnSpc>
+              <a:buNone/>
+            </a:pPr>
+            <a:r>
+              <a:rPr lang="en-US" sz="850" b="1" dirty="0">
+                <a:solidFill>
+                  <a:srgbClr val="0D8A76"/>
+                </a:solidFill>
+                <a:latin typeface="Yu Gothic" pitchFamily="34" charset="0"/>
+                <a:ea typeface="Yu Gothic" pitchFamily="34" charset="-122"/>
+                <a:cs typeface="Yu Gothic" pitchFamily="34" charset="-120"/>
+              </a:rPr>
+              <a:t>追加付与①　</a:t>
+            </a:r>
+            <a:pPr indent="0" marL="0">
+              <a:lnSpc>
+                <a:spcPct val="86000"/>
+              </a:lnSpc>
+              <a:buNone/>
+            </a:pPr>
+            <a:r>
+              <a:rPr lang="en-US" sz="850" dirty="0">
+                <a:solidFill>
+                  <a:srgbClr val="5F7183"/>
+                </a:solidFill>
+                <a:latin typeface="Yu Gothic" pitchFamily="34" charset="0"/>
+                <a:ea typeface="Yu Gothic" pitchFamily="34" charset="-122"/>
+                <a:cs typeface="Yu Gothic" pitchFamily="34" charset="-120"/>
+              </a:rPr>
+              <a:t>清掃員が入室　→　</a:t>
+            </a:r>
+            <a:pPr indent="0" marL="0">
+              <a:lnSpc>
+                <a:spcPct val="86000"/>
+              </a:lnSpc>
+              <a:buNone/>
+            </a:pPr>
+            <a:r>
+              <a:rPr lang="en-US" sz="1100" b="1" dirty="0">
                 <a:solidFill>
                   <a:srgbClr val="1B2733"/>
                 </a:solidFill>
@@ -2954,19 +3125,19 @@
                 <a:ea typeface="Yu Gothic" pitchFamily="34" charset="-122"/>
                 <a:cs typeface="Yu Gothic" pitchFamily="34" charset="-120"/>
               </a:rPr>
-              <a:t>発見時刻、場所、分類表示、引渡し先を書く。内容は書かない。</a:t>
-            </a:r>
-            <a:endParaRPr lang="en-US" sz="1050" dirty="0"/>
-          </a:p>
-          <a:p>
-            <a:pPr indent="0" marL="0">
-              <a:lnSpc>
-                <a:spcPct val="90000"/>
-              </a:lnSpc>
-              <a:buNone/>
-            </a:pPr>
-            <a:r>
-              <a:rPr lang="en-US" sz="800" i="1" dirty="0">
+              <a:t>面前で扱う。単独で処理しない。誰が見ていたかも記録する。</a:t>
+            </a:r>
+            <a:endParaRPr lang="en-US" sz="850" dirty="0"/>
+          </a:p>
+          <a:p>
+            <a:pPr indent="0" marL="0">
+              <a:lnSpc>
+                <a:spcPct val="86000"/>
+              </a:lnSpc>
+              <a:buNone/>
+            </a:pPr>
+            <a:r>
+              <a:rPr lang="en-US" sz="750" i="1" dirty="0">
                 <a:solidFill>
                   <a:srgbClr val="5F7183"/>
                 </a:solidFill>
@@ -2974,83 +3145,97 @@
                 <a:ea typeface="Calibri" pitchFamily="34" charset="-122"/>
                 <a:cs typeface="Calibri" pitchFamily="34" charset="-120"/>
               </a:rPr>
-              <a:t>Record time, place, classification and who you handed it to. Never the contents.</a:t>
-            </a:r>
-            <a:endParaRPr lang="en-US" sz="1050" dirty="0"/>
-          </a:p>
-        </p:txBody>
-      </p:sp>
-      <p:sp>
-        <p:nvSpPr>
-          <p:cNvPr id="17" name="Shape 14"/>
-          <p:cNvSpPr/>
-          <p:nvPr/>
-        </p:nvSpPr>
-        <p:spPr>
-          <a:xfrm>
-            <a:off x="6223864" y="4212336"/>
-            <a:ext cx="5327752" cy="1091184"/>
+              <a:t>Handle it in their presence. Do not process it alone. Record who saw it.</a:t>
+            </a:r>
+            <a:endParaRPr lang="en-US" sz="850" dirty="0"/>
+          </a:p>
+        </p:txBody>
+      </p:sp>
+      <p:sp>
+        <p:nvSpPr>
+          <p:cNvPr id="24" name="Shape 21"/>
+          <p:cNvSpPr/>
+          <p:nvPr/>
+        </p:nvSpPr>
+        <p:spPr>
+          <a:xfrm>
+            <a:off x="640080" y="4828032"/>
+            <a:ext cx="10911535" cy="420624"/>
           </a:xfrm>
           <a:prstGeom prst="roundRect">
             <a:avLst>
-              <a:gd name="adj" fmla="val 3352"/>
+              <a:gd name="adj" fmla="val 8696"/>
             </a:avLst>
           </a:prstGeom>
           <a:solidFill>
-            <a:srgbClr val="EFF4F8"/>
+            <a:srgbClr val="EEF6FA"/>
           </a:solidFill>
           <a:ln/>
         </p:spPr>
       </p:sp>
       <p:sp>
         <p:nvSpPr>
-          <p:cNvPr id="18" name="Text 15"/>
-          <p:cNvSpPr/>
-          <p:nvPr/>
-        </p:nvSpPr>
-        <p:spPr>
-          <a:xfrm>
-            <a:off x="6461608" y="4303776"/>
-            <a:ext cx="4852264" cy="908304"/>
-          </a:xfrm>
-          <a:prstGeom prst="rect">
-            <a:avLst/>
-          </a:prstGeom>
-          <a:noFill/>
-          <a:ln/>
-        </p:spPr>
-        <p:txBody>
-          <a:bodyPr wrap="square" lIns="0" tIns="0" rIns="0" bIns="0" rtlCol="0" anchor="t"/>
-          <a:lstStyle/>
-          <a:p>
-            <a:pPr indent="0" marL="0">
-              <a:lnSpc>
-                <a:spcPct val="90000"/>
-              </a:lnSpc>
-              <a:buNone/>
-            </a:pPr>
-            <a:r>
-              <a:rPr lang="en-US" sz="1050" b="1" dirty="0">
-                <a:solidFill>
-                  <a:srgbClr val="093259"/>
-                </a:solidFill>
-                <a:latin typeface="Yu Gothic" pitchFamily="34" charset="0"/>
-                <a:ea typeface="Yu Gothic" pitchFamily="34" charset="-122"/>
-                <a:cs typeface="Yu Gothic" pitchFamily="34" charset="-120"/>
-              </a:rPr>
-              <a:t>清掃員が入室</a:t>
-            </a:r>
-            <a:endParaRPr lang="en-US" sz="1050" dirty="0"/>
-          </a:p>
-          <a:p>
-            <a:pPr indent="0" marL="0">
-              <a:lnSpc>
-                <a:spcPct val="90000"/>
-              </a:lnSpc>
-              <a:buNone/>
-            </a:pPr>
-            <a:r>
-              <a:rPr lang="en-US" sz="1050" b="1" dirty="0">
+          <p:cNvPr id="25" name="Text 22"/>
+          <p:cNvSpPr/>
+          <p:nvPr/>
+        </p:nvSpPr>
+        <p:spPr>
+          <a:xfrm>
+            <a:off x="859536" y="4855464"/>
+            <a:ext cx="10472623" cy="365760"/>
+          </a:xfrm>
+          <a:prstGeom prst="rect">
+            <a:avLst/>
+          </a:prstGeom>
+          <a:noFill/>
+          <a:ln/>
+        </p:spPr>
+        <p:txBody>
+          <a:bodyPr wrap="square" lIns="0" tIns="0" rIns="0" bIns="0" rtlCol="0" anchor="ctr"/>
+          <a:lstStyle/>
+          <a:p>
+            <a:pPr indent="0" marL="0">
+              <a:lnSpc>
+                <a:spcPct val="86000"/>
+              </a:lnSpc>
+              <a:buNone/>
+            </a:pPr>
+            <a:r>
+              <a:rPr lang="en-US" sz="850" b="1" dirty="0">
+                <a:solidFill>
+                  <a:srgbClr val="0D8A76"/>
+                </a:solidFill>
+                <a:latin typeface="Yu Gothic" pitchFamily="34" charset="0"/>
+                <a:ea typeface="Yu Gothic" pitchFamily="34" charset="-122"/>
+                <a:cs typeface="Yu Gothic" pitchFamily="34" charset="-120"/>
+              </a:rPr>
+              <a:t>追加付与②　</a:t>
+            </a:r>
+            <a:pPr indent="0" marL="0">
+              <a:lnSpc>
+                <a:spcPct val="86000"/>
+              </a:lnSpc>
+              <a:buNone/>
+            </a:pPr>
+            <a:r>
+              <a:rPr lang="en-US" sz="850" dirty="0">
+                <a:solidFill>
+                  <a:srgbClr val="5F7183"/>
+                </a:solidFill>
+                <a:latin typeface="Yu Gothic" pitchFamily="34" charset="0"/>
+                <a:ea typeface="Yu Gothic" pitchFamily="34" charset="-122"/>
+                <a:cs typeface="Yu Gothic" pitchFamily="34" charset="-120"/>
+              </a:rPr>
+              <a:t>翌朝「あの資料見なかった？」　→　</a:t>
+            </a:r>
+            <a:pPr indent="0" marL="0">
+              <a:lnSpc>
+                <a:spcPct val="86000"/>
+              </a:lnSpc>
+              <a:buNone/>
+            </a:pPr>
+            <a:r>
+              <a:rPr lang="en-US" sz="1100" b="1" dirty="0">
                 <a:solidFill>
                   <a:srgbClr val="1B2733"/>
                 </a:solidFill>
@@ -3058,19 +3243,19 @@
                 <a:ea typeface="Yu Gothic" pitchFamily="34" charset="-122"/>
                 <a:cs typeface="Yu Gothic" pitchFamily="34" charset="-120"/>
               </a:rPr>
-              <a:t>面前で扱う。単独で処理しない。誰が見ていたかも記録する。</a:t>
-            </a:r>
-            <a:endParaRPr lang="en-US" sz="1050" dirty="0"/>
-          </a:p>
-          <a:p>
-            <a:pPr indent="0" marL="0">
-              <a:lnSpc>
-                <a:spcPct val="90000"/>
-              </a:lnSpc>
-              <a:buNone/>
-            </a:pPr>
-            <a:r>
-              <a:rPr lang="en-US" sz="800" i="1" dirty="0">
+              <a:t>事実のみ答える。「拾って◯◯へ引き渡しました」。中身には触れない。</a:t>
+            </a:r>
+            <a:endParaRPr lang="en-US" sz="850" dirty="0"/>
+          </a:p>
+          <a:p>
+            <a:pPr indent="0" marL="0">
+              <a:lnSpc>
+                <a:spcPct val="86000"/>
+              </a:lnSpc>
+              <a:buNone/>
+            </a:pPr>
+            <a:r>
+              <a:rPr lang="en-US" sz="750" i="1" dirty="0">
                 <a:solidFill>
                   <a:srgbClr val="5F7183"/>
                 </a:solidFill>
@@ -3078,26 +3263,26 @@
                 <a:ea typeface="Calibri" pitchFamily="34" charset="-122"/>
                 <a:cs typeface="Calibri" pitchFamily="34" charset="-120"/>
               </a:rPr>
-              <a:t>Handle it in their presence. Do not process it alone. Record who witnessed it.</a:t>
-            </a:r>
-            <a:endParaRPr lang="en-US" sz="1050" dirty="0"/>
-          </a:p>
-        </p:txBody>
-      </p:sp>
-      <p:sp>
-        <p:nvSpPr>
-          <p:cNvPr id="19" name="Shape 16"/>
+              <a:t>Answer with fact only: you picked it up and handed it over. Say nothing of the contents.</a:t>
+            </a:r>
+            <a:endParaRPr lang="en-US" sz="850" dirty="0"/>
+          </a:p>
+        </p:txBody>
+      </p:sp>
+      <p:sp>
+        <p:nvSpPr>
+          <p:cNvPr id="26" name="Shape 23"/>
           <p:cNvSpPr/>
           <p:nvPr/>
         </p:nvSpPr>
         <p:spPr>
           <a:xfrm>
             <a:off x="640080" y="5358384"/>
-            <a:ext cx="10911535" cy="493776"/>
+            <a:ext cx="10911535" cy="457200"/>
           </a:xfrm>
           <a:prstGeom prst="roundRect">
             <a:avLst>
-              <a:gd name="adj" fmla="val 7407"/>
+              <a:gd name="adj" fmla="val 8000"/>
             </a:avLst>
           </a:prstGeom>
           <a:solidFill>
@@ -3108,14 +3293,14 @@
       </p:sp>
       <p:sp>
         <p:nvSpPr>
-          <p:cNvPr id="20" name="Text 17"/>
-          <p:cNvSpPr/>
-          <p:nvPr/>
-        </p:nvSpPr>
-        <p:spPr>
-          <a:xfrm>
-            <a:off x="877824" y="5404104"/>
-            <a:ext cx="10436047" cy="402336"/>
+          <p:cNvPr id="27" name="Text 24"/>
+          <p:cNvSpPr/>
+          <p:nvPr/>
+        </p:nvSpPr>
+        <p:spPr>
+          <a:xfrm>
+            <a:off x="859536" y="5385816"/>
+            <a:ext cx="10472623" cy="402336"/>
           </a:xfrm>
           <a:prstGeom prst="rect">
             <a:avLst/>
@@ -3134,7 +3319,7 @@
               <a:buNone/>
             </a:pPr>
             <a:r>
-              <a:rPr lang="en-US" sz="950" b="1" dirty="0">
+              <a:rPr lang="en-US" sz="900" b="1" dirty="0">
                 <a:solidFill>
                   <a:srgbClr val="12B198"/>
                 </a:solidFill>
@@ -3151,7 +3336,7 @@
               <a:buNone/>
             </a:pPr>
             <a:r>
-              <a:rPr lang="en-US" sz="1100" b="1" dirty="0">
+              <a:rPr lang="en-US" sz="1050" b="1" dirty="0">
                 <a:solidFill>
                   <a:srgbClr val="FFFFFF"/>
                 </a:solidFill>
@@ -3161,7 +3346,7 @@
               </a:rPr>
               <a:t>保管するか、その場に置いて報告するか。どちらも成り立つ。根拠を述べさせる。</a:t>
             </a:r>
-            <a:endParaRPr lang="en-US" sz="950" dirty="0"/>
+            <a:endParaRPr lang="en-US" sz="900" dirty="0"/>
           </a:p>
           <a:p>
             <a:pPr indent="0" marL="0">
@@ -3171,7 +3356,7 @@
               <a:buNone/>
             </a:pPr>
             <a:r>
-              <a:rPr lang="en-US" sz="800" i="1" dirty="0">
+              <a:rPr lang="en-US" sz="750" i="1" dirty="0">
                 <a:solidFill>
                   <a:srgbClr val="9FD8CD"/>
                 </a:solidFill>
@@ -3181,13 +3366,13 @@
               </a:rPr>
               <a:t>Secure it, or leave it and report? Both are defensible. Make them state the reasoning.</a:t>
             </a:r>
-            <a:endParaRPr lang="en-US" sz="950" dirty="0"/>
-          </a:p>
-        </p:txBody>
-      </p:sp>
-      <p:sp>
-        <p:nvSpPr>
-          <p:cNvPr id="21" name="Text 18"/>
+            <a:endParaRPr lang="en-US" sz="900" dirty="0"/>
+          </a:p>
+        </p:txBody>
+      </p:sp>
+      <p:sp>
+        <p:nvSpPr>
+          <p:cNvPr id="28" name="Text 25"/>
           <p:cNvSpPr/>
           <p:nvPr/>
         </p:nvSpPr>
@@ -3266,7 +3451,7 @@
       </p:sp>
       <p:sp>
         <p:nvSpPr>
-          <p:cNvPr id="22" name="Text 19"/>
+          <p:cNvPr id="29" name="Text 26"/>
           <p:cNvSpPr/>
           <p:nvPr/>
         </p:nvSpPr>
@@ -3319,7 +3504,7 @@
       </p:sp>
       <p:sp>
         <p:nvSpPr>
-          <p:cNvPr id="23" name="Text 20"/>
+          <p:cNvPr id="30" name="Text 27"/>
           <p:cNvSpPr/>
           <p:nvPr/>
         </p:nvSpPr>
@@ -3372,7 +3557,7 @@
       </p:sp>
       <p:sp>
         <p:nvSpPr>
-          <p:cNvPr id="24" name="Text 21"/>
+          <p:cNvPr id="31" name="Text 28"/>
           <p:cNvSpPr/>
           <p:nvPr/>
         </p:nvSpPr>
@@ -4777,7 +4962,7 @@
                 <a:ea typeface="Yu Gothic" pitchFamily="34" charset="-122"/>
                 <a:cs typeface="Yu Gothic" pitchFamily="34" charset="-120"/>
               </a:rPr>
-              <a:t>TTX 1-B 講評 ― 模範解答</a:t>
+              <a:t>TTX 1-B 模範解答</a:t>
             </a:r>
             <a:endParaRPr lang="en-US" sz="2300" dirty="0"/>
           </a:p>
@@ -4797,7 +4982,7 @@
                 <a:ea typeface="Calibri" pitchFamily="34" charset="-122"/>
                 <a:cs typeface="Calibri" pitchFamily="34" charset="-120"/>
               </a:rPr>
-              <a:t>TTX 1-B Debrief — Model Answer</a:t>
+              <a:t>TTX 1-B — Model Answers</a:t>
             </a:r>
             <a:endParaRPr lang="en-US" sz="2300" dirty="0"/>
           </a:p>
@@ -4866,97 +5051,18 @@
       </p:sp>
       <p:sp>
         <p:nvSpPr>
-          <p:cNvPr id="6" name="Text 3"/>
+          <p:cNvPr id="6" name="Shape 3"/>
           <p:cNvSpPr/>
           <p:nvPr/>
         </p:nvSpPr>
         <p:spPr>
           <a:xfrm>
             <a:off x="640080" y="1188720"/>
-            <a:ext cx="10911535" cy="530352"/>
-          </a:xfrm>
-          <a:prstGeom prst="rect">
-            <a:avLst/>
-          </a:prstGeom>
-          <a:noFill/>
-          <a:ln/>
-        </p:spPr>
-        <p:txBody>
-          <a:bodyPr wrap="square" lIns="0" tIns="0" rIns="0" bIns="0" rtlCol="0" anchor="t"/>
-          <a:lstStyle/>
-          <a:p>
-            <a:pPr indent="0" marL="0">
-              <a:lnSpc>
-                <a:spcPct val="90000"/>
-              </a:lnSpc>
-              <a:buNone/>
-            </a:pPr>
-            <a:r>
-              <a:rPr lang="en-US" sz="1000" b="1" dirty="0">
-                <a:solidFill>
-                  <a:srgbClr val="0D8A76"/>
-                </a:solidFill>
-                <a:latin typeface="Yu Gothic" pitchFamily="34" charset="0"/>
-                <a:ea typeface="Yu Gothic" pitchFamily="34" charset="-122"/>
-                <a:cs typeface="Yu Gothic" pitchFamily="34" charset="-120"/>
-              </a:rPr>
-              <a:t>狙い　</a:t>
-            </a:r>
-            <a:pPr indent="0" marL="0">
-              <a:lnSpc>
-                <a:spcPct val="90000"/>
-              </a:lnSpc>
-              <a:buNone/>
-            </a:pPr>
-            <a:r>
-              <a:rPr lang="en-US" sz="1150" b="1" dirty="0">
-                <a:solidFill>
-                  <a:srgbClr val="093259"/>
-                </a:solidFill>
-                <a:latin typeface="Yu Gothic" pitchFamily="34" charset="0"/>
-                <a:ea typeface="Yu Gothic" pitchFamily="34" charset="-122"/>
-                <a:cs typeface="Yu Gothic" pitchFamily="34" charset="-120"/>
-              </a:rPr>
-              <a:t>「求められること」と「できないこと」の線引き。社員が相手でも権限は増えない。</a:t>
-            </a:r>
-            <a:endParaRPr lang="en-US" sz="1000" dirty="0"/>
-          </a:p>
-          <a:p>
-            <a:pPr indent="0" marL="0">
-              <a:lnSpc>
-                <a:spcPct val="90000"/>
-              </a:lnSpc>
-              <a:buNone/>
-            </a:pPr>
-            <a:r>
-              <a:rPr lang="en-US" sz="850" i="1" dirty="0">
-                <a:solidFill>
-                  <a:srgbClr val="5F7183"/>
-                </a:solidFill>
-                <a:latin typeface="Calibri" pitchFamily="34" charset="0"/>
-                <a:ea typeface="Calibri" pitchFamily="34" charset="-122"/>
-                <a:cs typeface="Calibri" pitchFamily="34" charset="-120"/>
-              </a:rPr>
-              <a:t>The line between what you may ask and what you cannot do. Being an employee changes nothing.</a:t>
-            </a:r>
-            <a:endParaRPr lang="en-US" sz="1000" dirty="0"/>
-          </a:p>
-        </p:txBody>
-      </p:sp>
-      <p:sp>
-        <p:nvSpPr>
-          <p:cNvPr id="7" name="Shape 4"/>
-          <p:cNvSpPr/>
-          <p:nvPr/>
-        </p:nvSpPr>
-        <p:spPr>
-          <a:xfrm>
-            <a:off x="640080" y="1773936"/>
-            <a:ext cx="5327752" cy="1274064"/>
+            <a:ext cx="10911535" cy="825246"/>
           </a:xfrm>
           <a:prstGeom prst="roundRect">
             <a:avLst>
-              <a:gd name="adj" fmla="val 2871"/>
+              <a:gd name="adj" fmla="val 4432"/>
             </a:avLst>
           </a:prstGeom>
           <a:solidFill>
@@ -4967,53 +5073,112 @@
       </p:sp>
       <p:sp>
         <p:nvSpPr>
+          <p:cNvPr id="7" name="Shape 4"/>
+          <p:cNvSpPr/>
+          <p:nvPr/>
+        </p:nvSpPr>
+        <p:spPr>
+          <a:xfrm>
+            <a:off x="841248" y="1427607"/>
+            <a:ext cx="347472" cy="347472"/>
+          </a:xfrm>
+          <a:prstGeom prst="ellipse">
+            <a:avLst/>
+          </a:prstGeom>
+          <a:solidFill>
+            <a:srgbClr val="12B198"/>
+          </a:solidFill>
+          <a:ln/>
+        </p:spPr>
+      </p:sp>
+      <p:sp>
+        <p:nvSpPr>
           <p:cNvPr id="8" name="Text 5"/>
           <p:cNvSpPr/>
           <p:nvPr/>
         </p:nvSpPr>
         <p:spPr>
           <a:xfrm>
-            <a:off x="877824" y="1865376"/>
-            <a:ext cx="4852264" cy="1091184"/>
-          </a:xfrm>
-          <a:prstGeom prst="rect">
-            <a:avLst/>
-          </a:prstGeom>
-          <a:noFill/>
-          <a:ln/>
-        </p:spPr>
-        <p:txBody>
-          <a:bodyPr wrap="square" lIns="0" tIns="0" rIns="0" bIns="0" rtlCol="0" anchor="t"/>
-          <a:lstStyle/>
-          <a:p>
-            <a:pPr indent="0" marL="0">
-              <a:lnSpc>
-                <a:spcPct val="90000"/>
-              </a:lnSpc>
-              <a:buNone/>
-            </a:pPr>
-            <a:r>
-              <a:rPr lang="en-US" sz="1050" b="1" dirty="0">
-                <a:solidFill>
-                  <a:srgbClr val="093259"/>
-                </a:solidFill>
-                <a:latin typeface="Yu Gothic" pitchFamily="34" charset="0"/>
-                <a:ea typeface="Yu Gothic" pitchFamily="34" charset="-122"/>
-                <a:cs typeface="Yu Gothic" pitchFamily="34" charset="-120"/>
-              </a:rPr>
-              <a:t>社員証の意味</a:t>
-            </a:r>
-            <a:endParaRPr lang="en-US" sz="1050" dirty="0"/>
-          </a:p>
-          <a:p>
-            <a:pPr indent="0" marL="0">
-              <a:lnSpc>
-                <a:spcPct val="90000"/>
-              </a:lnSpc>
-              <a:buNone/>
-            </a:pPr>
-            <a:r>
-              <a:rPr lang="en-US" sz="1050" b="1" dirty="0">
+            <a:off x="841248" y="1427607"/>
+            <a:ext cx="347472" cy="347472"/>
+          </a:xfrm>
+          <a:prstGeom prst="rect">
+            <a:avLst/>
+          </a:prstGeom>
+          <a:noFill/>
+          <a:ln/>
+        </p:spPr>
+        <p:txBody>
+          <a:bodyPr wrap="square" lIns="0" tIns="0" rIns="0" bIns="0" rtlCol="0" anchor="ctr"/>
+          <a:lstStyle/>
+          <a:p>
+            <a:pPr algn="ctr" indent="0" marL="0">
+              <a:buNone/>
+            </a:pPr>
+            <a:r>
+              <a:rPr lang="en-US" sz="1100" b="1" dirty="0">
+                <a:solidFill>
+                  <a:srgbClr val="FFFFFF"/>
+                </a:solidFill>
+                <a:latin typeface="Calibri" pitchFamily="34" charset="0"/>
+                <a:ea typeface="Calibri" pitchFamily="34" charset="-122"/>
+                <a:cs typeface="Calibri" pitchFamily="34" charset="-120"/>
+              </a:rPr>
+              <a:t>1</a:t>
+            </a:r>
+            <a:endParaRPr lang="en-US" sz="1100" dirty="0"/>
+          </a:p>
+        </p:txBody>
+      </p:sp>
+      <p:sp>
+        <p:nvSpPr>
+          <p:cNvPr id="9" name="Text 6"/>
+          <p:cNvSpPr/>
+          <p:nvPr/>
+        </p:nvSpPr>
+        <p:spPr>
+          <a:xfrm>
+            <a:off x="1280160" y="1252728"/>
+            <a:ext cx="10033711" cy="697230"/>
+          </a:xfrm>
+          <a:prstGeom prst="rect">
+            <a:avLst/>
+          </a:prstGeom>
+          <a:noFill/>
+          <a:ln/>
+        </p:spPr>
+        <p:txBody>
+          <a:bodyPr wrap="square" lIns="0" tIns="0" rIns="0" bIns="0" rtlCol="0" anchor="ctr"/>
+          <a:lstStyle/>
+          <a:p>
+            <a:pPr indent="0" marL="0">
+              <a:lnSpc>
+                <a:spcPct val="88000"/>
+              </a:lnSpc>
+              <a:buNone/>
+            </a:pPr>
+            <a:r>
+              <a:rPr lang="en-US" sz="900" dirty="0">
+                <a:solidFill>
+                  <a:srgbClr val="5F7183"/>
+                </a:solidFill>
+                <a:latin typeface="Yu Gothic" pitchFamily="34" charset="0"/>
+                <a:ea typeface="Yu Gothic" pitchFamily="34" charset="-122"/>
+                <a:cs typeface="Yu Gothic" pitchFamily="34" charset="-120"/>
+              </a:rPr>
+              <a:t>問1　社員証は撮影の根拠になるか</a:t>
+            </a:r>
+            <a:endParaRPr lang="en-US" sz="900" dirty="0"/>
+          </a:p>
+          <a:p>
+            <a:pPr indent="0" marL="0">
+              <a:lnSpc>
+                <a:spcPct val="88000"/>
+              </a:lnSpc>
+              <a:buNone/>
+            </a:pPr>
+            <a:r>
+              <a:rPr lang="en-US" sz="1200" b="1" dirty="0">
                 <a:solidFill>
                   <a:srgbClr val="1B2733"/>
                 </a:solidFill>
@@ -5021,14 +5186,14 @@
                 <a:ea typeface="Yu Gothic" pitchFamily="34" charset="-122"/>
                 <a:cs typeface="Yu Gothic" pitchFamily="34" charset="-120"/>
               </a:rPr>
-              <a:t>入館の資格を示すだけ。撮影の可否とは別の問題。</a:t>
-            </a:r>
-            <a:endParaRPr lang="en-US" sz="1050" dirty="0"/>
-          </a:p>
-          <a:p>
-            <a:pPr indent="0" marL="0">
-              <a:lnSpc>
-                <a:spcPct val="90000"/>
+              <a:t>ならない。社員証は入館の資格を示すだけで、撮影の可否とは別の問題。</a:t>
+            </a:r>
+            <a:endParaRPr lang="en-US" sz="900" dirty="0"/>
+          </a:p>
+          <a:p>
+            <a:pPr indent="0" marL="0">
+              <a:lnSpc>
+                <a:spcPct val="88000"/>
               </a:lnSpc>
               <a:buNone/>
             </a:pPr>
@@ -5041,26 +5206,26 @@
                 <a:ea typeface="Calibri" pitchFamily="34" charset="-122"/>
                 <a:cs typeface="Calibri" pitchFamily="34" charset="-120"/>
               </a:rPr>
-              <a:t>It shows a right of entry only. Whether they may photograph is a separate question.</a:t>
-            </a:r>
-            <a:endParaRPr lang="en-US" sz="1050" dirty="0"/>
-          </a:p>
-        </p:txBody>
-      </p:sp>
-      <p:sp>
-        <p:nvSpPr>
-          <p:cNvPr id="9" name="Shape 6"/>
-          <p:cNvSpPr/>
-          <p:nvPr/>
-        </p:nvSpPr>
-        <p:spPr>
-          <a:xfrm>
-            <a:off x="6223864" y="1773936"/>
-            <a:ext cx="5327752" cy="1274064"/>
+              <a:t>No. A badge shows a right of entry. Whether they may photograph is separate.</a:t>
+            </a:r>
+            <a:endParaRPr lang="en-US" sz="900" dirty="0"/>
+          </a:p>
+        </p:txBody>
+      </p:sp>
+      <p:sp>
+        <p:nvSpPr>
+          <p:cNvPr id="10" name="Shape 7"/>
+          <p:cNvSpPr/>
+          <p:nvPr/>
+        </p:nvSpPr>
+        <p:spPr>
+          <a:xfrm>
+            <a:off x="640080" y="2114550"/>
+            <a:ext cx="10911535" cy="825246"/>
           </a:xfrm>
           <a:prstGeom prst="roundRect">
             <a:avLst>
-              <a:gd name="adj" fmla="val 2871"/>
+              <a:gd name="adj" fmla="val 4432"/>
             </a:avLst>
           </a:prstGeom>
           <a:solidFill>
@@ -5071,53 +5236,112 @@
       </p:sp>
       <p:sp>
         <p:nvSpPr>
-          <p:cNvPr id="10" name="Text 7"/>
-          <p:cNvSpPr/>
-          <p:nvPr/>
-        </p:nvSpPr>
-        <p:spPr>
-          <a:xfrm>
-            <a:off x="6461608" y="1865376"/>
-            <a:ext cx="4852264" cy="1091184"/>
-          </a:xfrm>
-          <a:prstGeom prst="rect">
-            <a:avLst/>
-          </a:prstGeom>
-          <a:noFill/>
-          <a:ln/>
-        </p:spPr>
-        <p:txBody>
-          <a:bodyPr wrap="square" lIns="0" tIns="0" rIns="0" bIns="0" rtlCol="0" anchor="t"/>
-          <a:lstStyle/>
-          <a:p>
-            <a:pPr indent="0" marL="0">
-              <a:lnSpc>
-                <a:spcPct val="90000"/>
-              </a:lnSpc>
-              <a:buNone/>
-            </a:pPr>
-            <a:r>
-              <a:rPr lang="en-US" sz="1050" b="1" dirty="0">
-                <a:solidFill>
-                  <a:srgbClr val="093259"/>
-                </a:solidFill>
-                <a:latin typeface="Yu Gothic" pitchFamily="34" charset="0"/>
-                <a:ea typeface="Yu Gothic" pitchFamily="34" charset="-122"/>
-                <a:cs typeface="Yu Gothic" pitchFamily="34" charset="-120"/>
-              </a:rPr>
-              <a:t>中止を求められるか</a:t>
-            </a:r>
-            <a:endParaRPr lang="en-US" sz="1050" dirty="0"/>
-          </a:p>
-          <a:p>
-            <a:pPr indent="0" marL="0">
-              <a:lnSpc>
-                <a:spcPct val="90000"/>
-              </a:lnSpc>
-              <a:buNone/>
-            </a:pPr>
-            <a:r>
-              <a:rPr lang="en-US" sz="1050" b="1" dirty="0">
+          <p:cNvPr id="11" name="Shape 8"/>
+          <p:cNvSpPr/>
+          <p:nvPr/>
+        </p:nvSpPr>
+        <p:spPr>
+          <a:xfrm>
+            <a:off x="841248" y="2353437"/>
+            <a:ext cx="347472" cy="347472"/>
+          </a:xfrm>
+          <a:prstGeom prst="ellipse">
+            <a:avLst/>
+          </a:prstGeom>
+          <a:solidFill>
+            <a:srgbClr val="12B198"/>
+          </a:solidFill>
+          <a:ln/>
+        </p:spPr>
+      </p:sp>
+      <p:sp>
+        <p:nvSpPr>
+          <p:cNvPr id="12" name="Text 9"/>
+          <p:cNvSpPr/>
+          <p:nvPr/>
+        </p:nvSpPr>
+        <p:spPr>
+          <a:xfrm>
+            <a:off x="841248" y="2353437"/>
+            <a:ext cx="347472" cy="347472"/>
+          </a:xfrm>
+          <a:prstGeom prst="rect">
+            <a:avLst/>
+          </a:prstGeom>
+          <a:noFill/>
+          <a:ln/>
+        </p:spPr>
+        <p:txBody>
+          <a:bodyPr wrap="square" lIns="0" tIns="0" rIns="0" bIns="0" rtlCol="0" anchor="ctr"/>
+          <a:lstStyle/>
+          <a:p>
+            <a:pPr algn="ctr" indent="0" marL="0">
+              <a:buNone/>
+            </a:pPr>
+            <a:r>
+              <a:rPr lang="en-US" sz="1100" b="1" dirty="0">
+                <a:solidFill>
+                  <a:srgbClr val="FFFFFF"/>
+                </a:solidFill>
+                <a:latin typeface="Calibri" pitchFamily="34" charset="0"/>
+                <a:ea typeface="Calibri" pitchFamily="34" charset="-122"/>
+                <a:cs typeface="Calibri" pitchFamily="34" charset="-120"/>
+              </a:rPr>
+              <a:t>2</a:t>
+            </a:r>
+            <a:endParaRPr lang="en-US" sz="1100" dirty="0"/>
+          </a:p>
+        </p:txBody>
+      </p:sp>
+      <p:sp>
+        <p:nvSpPr>
+          <p:cNvPr id="13" name="Text 10"/>
+          <p:cNvSpPr/>
+          <p:nvPr/>
+        </p:nvSpPr>
+        <p:spPr>
+          <a:xfrm>
+            <a:off x="1280160" y="2178558"/>
+            <a:ext cx="10033711" cy="697230"/>
+          </a:xfrm>
+          <a:prstGeom prst="rect">
+            <a:avLst/>
+          </a:prstGeom>
+          <a:noFill/>
+          <a:ln/>
+        </p:spPr>
+        <p:txBody>
+          <a:bodyPr wrap="square" lIns="0" tIns="0" rIns="0" bIns="0" rtlCol="0" anchor="ctr"/>
+          <a:lstStyle/>
+          <a:p>
+            <a:pPr indent="0" marL="0">
+              <a:lnSpc>
+                <a:spcPct val="88000"/>
+              </a:lnSpc>
+              <a:buNone/>
+            </a:pPr>
+            <a:r>
+              <a:rPr lang="en-US" sz="900" dirty="0">
+                <a:solidFill>
+                  <a:srgbClr val="5F7183"/>
+                </a:solidFill>
+                <a:latin typeface="Yu Gothic" pitchFamily="34" charset="0"/>
+                <a:ea typeface="Yu Gothic" pitchFamily="34" charset="-122"/>
+                <a:cs typeface="Yu Gothic" pitchFamily="34" charset="-120"/>
+              </a:rPr>
+              <a:t>問2　中止を求められるか</a:t>
+            </a:r>
+            <a:endParaRPr lang="en-US" sz="900" dirty="0"/>
+          </a:p>
+          <a:p>
+            <a:pPr indent="0" marL="0">
+              <a:lnSpc>
+                <a:spcPct val="88000"/>
+              </a:lnSpc>
+              <a:buNone/>
+            </a:pPr>
+            <a:r>
+              <a:rPr lang="en-US" sz="1200" b="1" dirty="0">
                 <a:solidFill>
                   <a:srgbClr val="1B2733"/>
                 </a:solidFill>
@@ -5127,12 +5351,12 @@
               </a:rPr>
               <a:t>求められる。根拠は管理権者から委ねられた撮影禁止の運用。</a:t>
             </a:r>
-            <a:endParaRPr lang="en-US" sz="1050" dirty="0"/>
-          </a:p>
-          <a:p>
-            <a:pPr indent="0" marL="0">
-              <a:lnSpc>
-                <a:spcPct val="90000"/>
+            <a:endParaRPr lang="en-US" sz="900" dirty="0"/>
+          </a:p>
+          <a:p>
+            <a:pPr indent="0" marL="0">
+              <a:lnSpc>
+                <a:spcPct val="88000"/>
               </a:lnSpc>
               <a:buNone/>
             </a:pPr>
@@ -5147,24 +5371,24 @@
               </a:rPr>
               <a:t>Yes. The basis is the no-photography rule delegated by the site authority.</a:t>
             </a:r>
-            <a:endParaRPr lang="en-US" sz="1050" dirty="0"/>
-          </a:p>
-        </p:txBody>
-      </p:sp>
-      <p:sp>
-        <p:nvSpPr>
-          <p:cNvPr id="11" name="Shape 8"/>
-          <p:cNvSpPr/>
-          <p:nvPr/>
-        </p:nvSpPr>
-        <p:spPr>
-          <a:xfrm>
-            <a:off x="640080" y="3176016"/>
-            <a:ext cx="5327752" cy="1274064"/>
+            <a:endParaRPr lang="en-US" sz="900" dirty="0"/>
+          </a:p>
+        </p:txBody>
+      </p:sp>
+      <p:sp>
+        <p:nvSpPr>
+          <p:cNvPr id="14" name="Shape 11"/>
+          <p:cNvSpPr/>
+          <p:nvPr/>
+        </p:nvSpPr>
+        <p:spPr>
+          <a:xfrm>
+            <a:off x="640080" y="3040380"/>
+            <a:ext cx="10911535" cy="825246"/>
           </a:xfrm>
           <a:prstGeom prst="roundRect">
             <a:avLst>
-              <a:gd name="adj" fmla="val 2871"/>
+              <a:gd name="adj" fmla="val 4432"/>
             </a:avLst>
           </a:prstGeom>
           <a:solidFill>
@@ -5175,53 +5399,112 @@
       </p:sp>
       <p:sp>
         <p:nvSpPr>
-          <p:cNvPr id="12" name="Text 9"/>
-          <p:cNvSpPr/>
-          <p:nvPr/>
-        </p:nvSpPr>
-        <p:spPr>
-          <a:xfrm>
-            <a:off x="877824" y="3267456"/>
-            <a:ext cx="4852264" cy="1091184"/>
-          </a:xfrm>
-          <a:prstGeom prst="rect">
-            <a:avLst/>
-          </a:prstGeom>
-          <a:noFill/>
-          <a:ln/>
-        </p:spPr>
-        <p:txBody>
-          <a:bodyPr wrap="square" lIns="0" tIns="0" rIns="0" bIns="0" rtlCol="0" anchor="t"/>
-          <a:lstStyle/>
-          <a:p>
-            <a:pPr indent="0" marL="0">
-              <a:lnSpc>
-                <a:spcPct val="90000"/>
-              </a:lnSpc>
-              <a:buNone/>
-            </a:pPr>
-            <a:r>
-              <a:rPr lang="en-US" sz="1050" b="1" dirty="0">
-                <a:solidFill>
-                  <a:srgbClr val="0D8A76"/>
-                </a:solidFill>
-                <a:latin typeface="Yu Gothic" pitchFamily="34" charset="0"/>
-                <a:ea typeface="Yu Gothic" pitchFamily="34" charset="-122"/>
-                <a:cs typeface="Yu Gothic" pitchFamily="34" charset="-120"/>
-              </a:rPr>
-              <a:t>削除を求められるか</a:t>
-            </a:r>
-            <a:endParaRPr lang="en-US" sz="1050" dirty="0"/>
-          </a:p>
-          <a:p>
-            <a:pPr indent="0" marL="0">
-              <a:lnSpc>
-                <a:spcPct val="90000"/>
-              </a:lnSpc>
-              <a:buNone/>
-            </a:pPr>
-            <a:r>
-              <a:rPr lang="en-US" sz="1050" b="1" dirty="0">
+          <p:cNvPr id="15" name="Shape 12"/>
+          <p:cNvSpPr/>
+          <p:nvPr/>
+        </p:nvSpPr>
+        <p:spPr>
+          <a:xfrm>
+            <a:off x="841248" y="3279267"/>
+            <a:ext cx="347472" cy="347472"/>
+          </a:xfrm>
+          <a:prstGeom prst="ellipse">
+            <a:avLst/>
+          </a:prstGeom>
+          <a:solidFill>
+            <a:srgbClr val="12B198"/>
+          </a:solidFill>
+          <a:ln/>
+        </p:spPr>
+      </p:sp>
+      <p:sp>
+        <p:nvSpPr>
+          <p:cNvPr id="16" name="Text 13"/>
+          <p:cNvSpPr/>
+          <p:nvPr/>
+        </p:nvSpPr>
+        <p:spPr>
+          <a:xfrm>
+            <a:off x="841248" y="3279267"/>
+            <a:ext cx="347472" cy="347472"/>
+          </a:xfrm>
+          <a:prstGeom prst="rect">
+            <a:avLst/>
+          </a:prstGeom>
+          <a:noFill/>
+          <a:ln/>
+        </p:spPr>
+        <p:txBody>
+          <a:bodyPr wrap="square" lIns="0" tIns="0" rIns="0" bIns="0" rtlCol="0" anchor="ctr"/>
+          <a:lstStyle/>
+          <a:p>
+            <a:pPr algn="ctr" indent="0" marL="0">
+              <a:buNone/>
+            </a:pPr>
+            <a:r>
+              <a:rPr lang="en-US" sz="1100" b="1" dirty="0">
+                <a:solidFill>
+                  <a:srgbClr val="FFFFFF"/>
+                </a:solidFill>
+                <a:latin typeface="Calibri" pitchFamily="34" charset="0"/>
+                <a:ea typeface="Calibri" pitchFamily="34" charset="-122"/>
+                <a:cs typeface="Calibri" pitchFamily="34" charset="-120"/>
+              </a:rPr>
+              <a:t>3</a:t>
+            </a:r>
+            <a:endParaRPr lang="en-US" sz="1100" dirty="0"/>
+          </a:p>
+        </p:txBody>
+      </p:sp>
+      <p:sp>
+        <p:nvSpPr>
+          <p:cNvPr id="17" name="Text 14"/>
+          <p:cNvSpPr/>
+          <p:nvPr/>
+        </p:nvSpPr>
+        <p:spPr>
+          <a:xfrm>
+            <a:off x="1280160" y="3104388"/>
+            <a:ext cx="10033711" cy="697230"/>
+          </a:xfrm>
+          <a:prstGeom prst="rect">
+            <a:avLst/>
+          </a:prstGeom>
+          <a:noFill/>
+          <a:ln/>
+        </p:spPr>
+        <p:txBody>
+          <a:bodyPr wrap="square" lIns="0" tIns="0" rIns="0" bIns="0" rtlCol="0" anchor="ctr"/>
+          <a:lstStyle/>
+          <a:p>
+            <a:pPr indent="0" marL="0">
+              <a:lnSpc>
+                <a:spcPct val="88000"/>
+              </a:lnSpc>
+              <a:buNone/>
+            </a:pPr>
+            <a:r>
+              <a:rPr lang="en-US" sz="900" dirty="0">
+                <a:solidFill>
+                  <a:srgbClr val="5F7183"/>
+                </a:solidFill>
+                <a:latin typeface="Yu Gothic" pitchFamily="34" charset="0"/>
+                <a:ea typeface="Yu Gothic" pitchFamily="34" charset="-122"/>
+                <a:cs typeface="Yu Gothic" pitchFamily="34" charset="-120"/>
+              </a:rPr>
+              <a:t>問3　削除を求めてよいか</a:t>
+            </a:r>
+            <a:endParaRPr lang="en-US" sz="900" dirty="0"/>
+          </a:p>
+          <a:p>
+            <a:pPr indent="0" marL="0">
+              <a:lnSpc>
+                <a:spcPct val="88000"/>
+              </a:lnSpc>
+              <a:buNone/>
+            </a:pPr>
+            <a:r>
+              <a:rPr lang="en-US" sz="1200" b="1" dirty="0">
                 <a:solidFill>
                   <a:srgbClr val="1B2733"/>
                 </a:solidFill>
@@ -5229,14 +5512,14 @@
                 <a:ea typeface="Yu Gothic" pitchFamily="34" charset="-122"/>
                 <a:cs typeface="Yu Gothic" pitchFamily="34" charset="-120"/>
               </a:rPr>
-              <a:t>求められない。端末の中身は相手の管理下。有形力も使えない。</a:t>
-            </a:r>
-            <a:endParaRPr lang="en-US" sz="1050" dirty="0"/>
-          </a:p>
-          <a:p>
-            <a:pPr indent="0" marL="0">
-              <a:lnSpc>
-                <a:spcPct val="90000"/>
+              <a:t>求められない。端末の中身は相手の管理下。応じない場合も引き止めない。</a:t>
+            </a:r>
+            <a:endParaRPr lang="en-US" sz="900" dirty="0"/>
+          </a:p>
+          <a:p>
+            <a:pPr indent="0" marL="0">
+              <a:lnSpc>
+                <a:spcPct val="88000"/>
               </a:lnSpc>
               <a:buNone/>
             </a:pPr>
@@ -5249,26 +5532,26 @@
                 <a:ea typeface="Calibri" pitchFamily="34" charset="-122"/>
                 <a:cs typeface="Calibri" pitchFamily="34" charset="-120"/>
               </a:rPr>
-              <a:t>No. The device is under their control, and you cannot use force.</a:t>
-            </a:r>
-            <a:endParaRPr lang="en-US" sz="1050" dirty="0"/>
-          </a:p>
-        </p:txBody>
-      </p:sp>
-      <p:sp>
-        <p:nvSpPr>
-          <p:cNvPr id="13" name="Shape 10"/>
-          <p:cNvSpPr/>
-          <p:nvPr/>
-        </p:nvSpPr>
-        <p:spPr>
-          <a:xfrm>
-            <a:off x="6223864" y="3176016"/>
-            <a:ext cx="5327752" cy="1274064"/>
+              <a:t>No. The device is theirs. If they refuse, do not detain them.</a:t>
+            </a:r>
+            <a:endParaRPr lang="en-US" sz="900" dirty="0"/>
+          </a:p>
+        </p:txBody>
+      </p:sp>
+      <p:sp>
+        <p:nvSpPr>
+          <p:cNvPr id="18" name="Shape 15"/>
+          <p:cNvSpPr/>
+          <p:nvPr/>
+        </p:nvSpPr>
+        <p:spPr>
+          <a:xfrm>
+            <a:off x="640080" y="3966210"/>
+            <a:ext cx="10911535" cy="825246"/>
           </a:xfrm>
           <a:prstGeom prst="roundRect">
             <a:avLst>
-              <a:gd name="adj" fmla="val 2871"/>
+              <a:gd name="adj" fmla="val 4432"/>
             </a:avLst>
           </a:prstGeom>
           <a:solidFill>
@@ -5279,53 +5562,112 @@
       </p:sp>
       <p:sp>
         <p:nvSpPr>
-          <p:cNvPr id="14" name="Text 11"/>
-          <p:cNvSpPr/>
-          <p:nvPr/>
-        </p:nvSpPr>
-        <p:spPr>
-          <a:xfrm>
-            <a:off x="6461608" y="3267456"/>
-            <a:ext cx="4852264" cy="1091184"/>
-          </a:xfrm>
-          <a:prstGeom prst="rect">
-            <a:avLst/>
-          </a:prstGeom>
-          <a:noFill/>
-          <a:ln/>
-        </p:spPr>
-        <p:txBody>
-          <a:bodyPr wrap="square" lIns="0" tIns="0" rIns="0" bIns="0" rtlCol="0" anchor="t"/>
-          <a:lstStyle/>
-          <a:p>
-            <a:pPr indent="0" marL="0">
-              <a:lnSpc>
-                <a:spcPct val="90000"/>
-              </a:lnSpc>
-              <a:buNone/>
-            </a:pPr>
-            <a:r>
-              <a:rPr lang="en-US" sz="1050" b="1" dirty="0">
-                <a:solidFill>
-                  <a:srgbClr val="093259"/>
-                </a:solidFill>
-                <a:latin typeface="Yu Gothic" pitchFamily="34" charset="0"/>
-                <a:ea typeface="Yu Gothic" pitchFamily="34" charset="-122"/>
-                <a:cs typeface="Yu Gothic" pitchFamily="34" charset="-120"/>
-              </a:rPr>
-              <a:t>応じない場合</a:t>
-            </a:r>
-            <a:endParaRPr lang="en-US" sz="1050" dirty="0"/>
-          </a:p>
-          <a:p>
-            <a:pPr indent="0" marL="0">
-              <a:lnSpc>
-                <a:spcPct val="90000"/>
-              </a:lnSpc>
-              <a:buNone/>
-            </a:pPr>
-            <a:r>
-              <a:rPr lang="en-US" sz="1050" b="1" dirty="0">
+          <p:cNvPr id="19" name="Shape 16"/>
+          <p:cNvSpPr/>
+          <p:nvPr/>
+        </p:nvSpPr>
+        <p:spPr>
+          <a:xfrm>
+            <a:off x="841248" y="4205097"/>
+            <a:ext cx="347472" cy="347472"/>
+          </a:xfrm>
+          <a:prstGeom prst="ellipse">
+            <a:avLst/>
+          </a:prstGeom>
+          <a:solidFill>
+            <a:srgbClr val="12B198"/>
+          </a:solidFill>
+          <a:ln/>
+        </p:spPr>
+      </p:sp>
+      <p:sp>
+        <p:nvSpPr>
+          <p:cNvPr id="20" name="Text 17"/>
+          <p:cNvSpPr/>
+          <p:nvPr/>
+        </p:nvSpPr>
+        <p:spPr>
+          <a:xfrm>
+            <a:off x="841248" y="4205097"/>
+            <a:ext cx="347472" cy="347472"/>
+          </a:xfrm>
+          <a:prstGeom prst="rect">
+            <a:avLst/>
+          </a:prstGeom>
+          <a:noFill/>
+          <a:ln/>
+        </p:spPr>
+        <p:txBody>
+          <a:bodyPr wrap="square" lIns="0" tIns="0" rIns="0" bIns="0" rtlCol="0" anchor="ctr"/>
+          <a:lstStyle/>
+          <a:p>
+            <a:pPr algn="ctr" indent="0" marL="0">
+              <a:buNone/>
+            </a:pPr>
+            <a:r>
+              <a:rPr lang="en-US" sz="1100" b="1" dirty="0">
+                <a:solidFill>
+                  <a:srgbClr val="FFFFFF"/>
+                </a:solidFill>
+                <a:latin typeface="Calibri" pitchFamily="34" charset="0"/>
+                <a:ea typeface="Calibri" pitchFamily="34" charset="-122"/>
+                <a:cs typeface="Calibri" pitchFamily="34" charset="-120"/>
+              </a:rPr>
+              <a:t>4</a:t>
+            </a:r>
+            <a:endParaRPr lang="en-US" sz="1100" dirty="0"/>
+          </a:p>
+        </p:txBody>
+      </p:sp>
+      <p:sp>
+        <p:nvSpPr>
+          <p:cNvPr id="21" name="Text 18"/>
+          <p:cNvSpPr/>
+          <p:nvPr/>
+        </p:nvSpPr>
+        <p:spPr>
+          <a:xfrm>
+            <a:off x="1280160" y="4030218"/>
+            <a:ext cx="10033711" cy="697230"/>
+          </a:xfrm>
+          <a:prstGeom prst="rect">
+            <a:avLst/>
+          </a:prstGeom>
+          <a:noFill/>
+          <a:ln/>
+        </p:spPr>
+        <p:txBody>
+          <a:bodyPr wrap="square" lIns="0" tIns="0" rIns="0" bIns="0" rtlCol="0" anchor="ctr"/>
+          <a:lstStyle/>
+          <a:p>
+            <a:pPr indent="0" marL="0">
+              <a:lnSpc>
+                <a:spcPct val="88000"/>
+              </a:lnSpc>
+              <a:buNone/>
+            </a:pPr>
+            <a:r>
+              <a:rPr lang="en-US" sz="900" dirty="0">
+                <a:solidFill>
+                  <a:srgbClr val="5F7183"/>
+                </a:solidFill>
+                <a:latin typeface="Yu Gothic" pitchFamily="34" charset="0"/>
+                <a:ea typeface="Yu Gothic" pitchFamily="34" charset="-122"/>
+                <a:cs typeface="Yu Gothic" pitchFamily="34" charset="-120"/>
+              </a:rPr>
+              <a:t>問4　報告するか。何を書くか</a:t>
+            </a:r>
+            <a:endParaRPr lang="en-US" sz="900" dirty="0"/>
+          </a:p>
+          <a:p>
+            <a:pPr indent="0" marL="0">
+              <a:lnSpc>
+                <a:spcPct val="88000"/>
+              </a:lnSpc>
+              <a:buNone/>
+            </a:pPr>
+            <a:r>
+              <a:rPr lang="en-US" sz="1200" b="1" dirty="0">
                 <a:solidFill>
                   <a:srgbClr val="1B2733"/>
                 </a:solidFill>
@@ -5333,14 +5675,14 @@
                 <a:ea typeface="Yu Gothic" pitchFamily="34" charset="-122"/>
                 <a:cs typeface="Yu Gothic" pitchFamily="34" charset="-120"/>
               </a:rPr>
-              <a:t>引き止めない。記録して報告する。判断は上長とクライアントが行う。</a:t>
-            </a:r>
-            <a:endParaRPr lang="en-US" sz="1050" dirty="0"/>
-          </a:p>
-          <a:p>
-            <a:pPr indent="0" marL="0">
-              <a:lnSpc>
-                <a:spcPct val="90000"/>
+              <a:t>報告する。時刻、場所、撮影対象、社員証の氏名、発言をそのまま記録する。</a:t>
+            </a:r>
+            <a:endParaRPr lang="en-US" sz="900" dirty="0"/>
+          </a:p>
+          <a:p>
+            <a:pPr indent="0" marL="0">
+              <a:lnSpc>
+                <a:spcPct val="88000"/>
               </a:lnSpc>
               <a:buNone/>
             </a:pPr>
@@ -5353,83 +5695,97 @@
                 <a:ea typeface="Calibri" pitchFamily="34" charset="-122"/>
                 <a:cs typeface="Calibri" pitchFamily="34" charset="-120"/>
               </a:rPr>
-              <a:t>Do not detain. Record and report. The supervisor and client decide.</a:t>
-            </a:r>
-            <a:endParaRPr lang="en-US" sz="1050" dirty="0"/>
-          </a:p>
-        </p:txBody>
-      </p:sp>
-      <p:sp>
-        <p:nvSpPr>
-          <p:cNvPr id="15" name="Shape 12"/>
-          <p:cNvSpPr/>
-          <p:nvPr/>
-        </p:nvSpPr>
-        <p:spPr>
-          <a:xfrm>
-            <a:off x="640080" y="4578096"/>
-            <a:ext cx="5327752" cy="1274064"/>
+              <a:t>Yes. Record the time, place, what was photographed, the name on the badge, and their words verbatim.</a:t>
+            </a:r>
+            <a:endParaRPr lang="en-US" sz="900" dirty="0"/>
+          </a:p>
+        </p:txBody>
+      </p:sp>
+      <p:sp>
+        <p:nvSpPr>
+          <p:cNvPr id="22" name="Shape 19"/>
+          <p:cNvSpPr/>
+          <p:nvPr/>
+        </p:nvSpPr>
+        <p:spPr>
+          <a:xfrm>
+            <a:off x="640080" y="4901184"/>
+            <a:ext cx="10911535" cy="420624"/>
           </a:xfrm>
           <a:prstGeom prst="roundRect">
             <a:avLst>
-              <a:gd name="adj" fmla="val 2871"/>
+              <a:gd name="adj" fmla="val 8696"/>
             </a:avLst>
           </a:prstGeom>
           <a:solidFill>
-            <a:srgbClr val="EFF4F8"/>
+            <a:srgbClr val="EEF6FA"/>
           </a:solidFill>
           <a:ln/>
         </p:spPr>
       </p:sp>
       <p:sp>
         <p:nvSpPr>
-          <p:cNvPr id="16" name="Text 13"/>
-          <p:cNvSpPr/>
-          <p:nvPr/>
-        </p:nvSpPr>
-        <p:spPr>
-          <a:xfrm>
-            <a:off x="877824" y="4669536"/>
-            <a:ext cx="4852264" cy="1091184"/>
-          </a:xfrm>
-          <a:prstGeom prst="rect">
-            <a:avLst/>
-          </a:prstGeom>
-          <a:noFill/>
-          <a:ln/>
-        </p:spPr>
-        <p:txBody>
-          <a:bodyPr wrap="square" lIns="0" tIns="0" rIns="0" bIns="0" rtlCol="0" anchor="t"/>
-          <a:lstStyle/>
-          <a:p>
-            <a:pPr indent="0" marL="0">
-              <a:lnSpc>
-                <a:spcPct val="90000"/>
-              </a:lnSpc>
-              <a:buNone/>
-            </a:pPr>
-            <a:r>
-              <a:rPr lang="en-US" sz="1050" b="1" dirty="0">
-                <a:solidFill>
-                  <a:srgbClr val="093259"/>
-                </a:solidFill>
-                <a:latin typeface="Yu Gothic" pitchFamily="34" charset="0"/>
-                <a:ea typeface="Yu Gothic" pitchFamily="34" charset="-122"/>
-                <a:cs typeface="Yu Gothic" pitchFamily="34" charset="-120"/>
-              </a:rPr>
-              <a:t>離れようとしたら</a:t>
-            </a:r>
-            <a:endParaRPr lang="en-US" sz="1050" dirty="0"/>
-          </a:p>
-          <a:p>
-            <a:pPr indent="0" marL="0">
-              <a:lnSpc>
-                <a:spcPct val="90000"/>
-              </a:lnSpc>
-              <a:buNone/>
-            </a:pPr>
-            <a:r>
-              <a:rPr lang="en-US" sz="1050" b="1" dirty="0">
+          <p:cNvPr id="23" name="Text 20"/>
+          <p:cNvSpPr/>
+          <p:nvPr/>
+        </p:nvSpPr>
+        <p:spPr>
+          <a:xfrm>
+            <a:off x="859536" y="4928616"/>
+            <a:ext cx="10472623" cy="365760"/>
+          </a:xfrm>
+          <a:prstGeom prst="rect">
+            <a:avLst/>
+          </a:prstGeom>
+          <a:noFill/>
+          <a:ln/>
+        </p:spPr>
+        <p:txBody>
+          <a:bodyPr wrap="square" lIns="0" tIns="0" rIns="0" bIns="0" rtlCol="0" anchor="ctr"/>
+          <a:lstStyle/>
+          <a:p>
+            <a:pPr indent="0" marL="0">
+              <a:lnSpc>
+                <a:spcPct val="86000"/>
+              </a:lnSpc>
+              <a:buNone/>
+            </a:pPr>
+            <a:r>
+              <a:rPr lang="en-US" sz="850" b="1" dirty="0">
+                <a:solidFill>
+                  <a:srgbClr val="0D8A76"/>
+                </a:solidFill>
+                <a:latin typeface="Yu Gothic" pitchFamily="34" charset="0"/>
+                <a:ea typeface="Yu Gothic" pitchFamily="34" charset="-122"/>
+                <a:cs typeface="Yu Gothic" pitchFamily="34" charset="-120"/>
+              </a:rPr>
+              <a:t>追加付与①　</a:t>
+            </a:r>
+            <a:pPr indent="0" marL="0">
+              <a:lnSpc>
+                <a:spcPct val="86000"/>
+              </a:lnSpc>
+              <a:buNone/>
+            </a:pPr>
+            <a:r>
+              <a:rPr lang="en-US" sz="850" dirty="0">
+                <a:solidFill>
+                  <a:srgbClr val="5F7183"/>
+                </a:solidFill>
+                <a:latin typeface="Yu Gothic" pitchFamily="34" charset="0"/>
+                <a:ea typeface="Yu Gothic" pitchFamily="34" charset="-122"/>
+                <a:cs typeface="Yu Gothic" pitchFamily="34" charset="-120"/>
+              </a:rPr>
+              <a:t>「上司に確認してくれ」と離脱　→　</a:t>
+            </a:r>
+            <a:pPr indent="0" marL="0">
+              <a:lnSpc>
+                <a:spcPct val="86000"/>
+              </a:lnSpc>
+              <a:buNone/>
+            </a:pPr>
+            <a:r>
+              <a:rPr lang="en-US" sz="1100" b="1" dirty="0">
                 <a:solidFill>
                   <a:srgbClr val="1B2733"/>
                 </a:solidFill>
@@ -5439,17 +5795,17 @@
               </a:rPr>
               <a:t>追わない。氏名と所属を確認できていれば足りる。</a:t>
             </a:r>
-            <a:endParaRPr lang="en-US" sz="1050" dirty="0"/>
-          </a:p>
-          <a:p>
-            <a:pPr indent="0" marL="0">
-              <a:lnSpc>
-                <a:spcPct val="90000"/>
-              </a:lnSpc>
-              <a:buNone/>
-            </a:pPr>
-            <a:r>
-              <a:rPr lang="en-US" sz="800" i="1" dirty="0">
+            <a:endParaRPr lang="en-US" sz="850" dirty="0"/>
+          </a:p>
+          <a:p>
+            <a:pPr indent="0" marL="0">
+              <a:lnSpc>
+                <a:spcPct val="86000"/>
+              </a:lnSpc>
+              <a:buNone/>
+            </a:pPr>
+            <a:r>
+              <a:rPr lang="en-US" sz="750" i="1" dirty="0">
                 <a:solidFill>
                   <a:srgbClr val="5F7183"/>
                 </a:solidFill>
@@ -5457,83 +5813,97 @@
                 <a:ea typeface="Calibri" pitchFamily="34" charset="-122"/>
                 <a:cs typeface="Calibri" pitchFamily="34" charset="-120"/>
               </a:rPr>
-              <a:t>Do not follow. Having their name and department is enough.</a:t>
-            </a:r>
-            <a:endParaRPr lang="en-US" sz="1050" dirty="0"/>
-          </a:p>
-        </p:txBody>
-      </p:sp>
-      <p:sp>
-        <p:nvSpPr>
-          <p:cNvPr id="17" name="Shape 14"/>
-          <p:cNvSpPr/>
-          <p:nvPr/>
-        </p:nvSpPr>
-        <p:spPr>
-          <a:xfrm>
-            <a:off x="6223864" y="4578096"/>
-            <a:ext cx="5327752" cy="1274064"/>
+              <a:t>Do not follow. Having the name and department is enough.</a:t>
+            </a:r>
+            <a:endParaRPr lang="en-US" sz="850" dirty="0"/>
+          </a:p>
+        </p:txBody>
+      </p:sp>
+      <p:sp>
+        <p:nvSpPr>
+          <p:cNvPr id="24" name="Shape 21"/>
+          <p:cNvSpPr/>
+          <p:nvPr/>
+        </p:nvSpPr>
+        <p:spPr>
+          <a:xfrm>
+            <a:off x="640080" y="5394960"/>
+            <a:ext cx="10911535" cy="420624"/>
           </a:xfrm>
           <a:prstGeom prst="roundRect">
             <a:avLst>
-              <a:gd name="adj" fmla="val 2871"/>
+              <a:gd name="adj" fmla="val 8696"/>
             </a:avLst>
           </a:prstGeom>
           <a:solidFill>
-            <a:srgbClr val="EFF4F8"/>
+            <a:srgbClr val="EEF6FA"/>
           </a:solidFill>
           <a:ln/>
         </p:spPr>
       </p:sp>
       <p:sp>
         <p:nvSpPr>
-          <p:cNvPr id="18" name="Text 15"/>
-          <p:cNvSpPr/>
-          <p:nvPr/>
-        </p:nvSpPr>
-        <p:spPr>
-          <a:xfrm>
-            <a:off x="6461608" y="4669536"/>
-            <a:ext cx="4852264" cy="1091184"/>
-          </a:xfrm>
-          <a:prstGeom prst="rect">
-            <a:avLst/>
-          </a:prstGeom>
-          <a:noFill/>
-          <a:ln/>
-        </p:spPr>
-        <p:txBody>
-          <a:bodyPr wrap="square" lIns="0" tIns="0" rIns="0" bIns="0" rtlCol="0" anchor="t"/>
-          <a:lstStyle/>
-          <a:p>
-            <a:pPr indent="0" marL="0">
-              <a:lnSpc>
-                <a:spcPct val="90000"/>
-              </a:lnSpc>
-              <a:buNone/>
-            </a:pPr>
-            <a:r>
-              <a:rPr lang="en-US" sz="1050" b="1" dirty="0">
-                <a:solidFill>
-                  <a:srgbClr val="093259"/>
-                </a:solidFill>
-                <a:latin typeface="Yu Gothic" pitchFamily="34" charset="0"/>
-                <a:ea typeface="Yu Gothic" pitchFamily="34" charset="-122"/>
-                <a:cs typeface="Yu Gothic" pitchFamily="34" charset="-120"/>
-              </a:rPr>
-              <a:t>社員だと判明したら</a:t>
-            </a:r>
-            <a:endParaRPr lang="en-US" sz="1050" dirty="0"/>
-          </a:p>
-          <a:p>
-            <a:pPr indent="0" marL="0">
-              <a:lnSpc>
-                <a:spcPct val="90000"/>
-              </a:lnSpc>
-              <a:buNone/>
-            </a:pPr>
-            <a:r>
-              <a:rPr lang="en-US" sz="1050" b="1" dirty="0">
+          <p:cNvPr id="25" name="Text 22"/>
+          <p:cNvSpPr/>
+          <p:nvPr/>
+        </p:nvSpPr>
+        <p:spPr>
+          <a:xfrm>
+            <a:off x="859536" y="5422392"/>
+            <a:ext cx="10472623" cy="365760"/>
+          </a:xfrm>
+          <a:prstGeom prst="rect">
+            <a:avLst/>
+          </a:prstGeom>
+          <a:noFill/>
+          <a:ln/>
+        </p:spPr>
+        <p:txBody>
+          <a:bodyPr wrap="square" lIns="0" tIns="0" rIns="0" bIns="0" rtlCol="0" anchor="ctr"/>
+          <a:lstStyle/>
+          <a:p>
+            <a:pPr indent="0" marL="0">
+              <a:lnSpc>
+                <a:spcPct val="86000"/>
+              </a:lnSpc>
+              <a:buNone/>
+            </a:pPr>
+            <a:r>
+              <a:rPr lang="en-US" sz="850" b="1" dirty="0">
+                <a:solidFill>
+                  <a:srgbClr val="0D8A76"/>
+                </a:solidFill>
+                <a:latin typeface="Yu Gothic" pitchFamily="34" charset="0"/>
+                <a:ea typeface="Yu Gothic" pitchFamily="34" charset="-122"/>
+                <a:cs typeface="Yu Gothic" pitchFamily="34" charset="-120"/>
+              </a:rPr>
+              <a:t>追加付与②　</a:t>
+            </a:r>
+            <a:pPr indent="0" marL="0">
+              <a:lnSpc>
+                <a:spcPct val="86000"/>
+              </a:lnSpc>
+              <a:buNone/>
+            </a:pPr>
+            <a:r>
+              <a:rPr lang="en-US" sz="850" dirty="0">
+                <a:solidFill>
+                  <a:srgbClr val="5F7183"/>
+                </a:solidFill>
+                <a:latin typeface="Yu Gothic" pitchFamily="34" charset="0"/>
+                <a:ea typeface="Yu Gothic" pitchFamily="34" charset="-122"/>
+                <a:cs typeface="Yu Gothic" pitchFamily="34" charset="-120"/>
+              </a:rPr>
+              <a:t>翌日、本当に当該部署の社員と判明　→　</a:t>
+            </a:r>
+            <a:pPr indent="0" marL="0">
+              <a:lnSpc>
+                <a:spcPct val="86000"/>
+              </a:lnSpc>
+              <a:buNone/>
+            </a:pPr>
+            <a:r>
+              <a:rPr lang="en-US" sz="1100" b="1" dirty="0">
                 <a:solidFill>
                   <a:srgbClr val="1B2733"/>
                 </a:solidFill>
@@ -5543,17 +5913,17 @@
               </a:rPr>
               <a:t>対応は誤りではない。確認は手続きであり、疑いではない。</a:t>
             </a:r>
-            <a:endParaRPr lang="en-US" sz="1050" dirty="0"/>
-          </a:p>
-          <a:p>
-            <a:pPr indent="0" marL="0">
-              <a:lnSpc>
-                <a:spcPct val="90000"/>
-              </a:lnSpc>
-              <a:buNone/>
-            </a:pPr>
-            <a:r>
-              <a:rPr lang="en-US" sz="800" i="1" dirty="0">
+            <a:endParaRPr lang="en-US" sz="850" dirty="0"/>
+          </a:p>
+          <a:p>
+            <a:pPr indent="0" marL="0">
+              <a:lnSpc>
+                <a:spcPct val="86000"/>
+              </a:lnSpc>
+              <a:buNone/>
+            </a:pPr>
+            <a:r>
+              <a:rPr lang="en-US" sz="750" i="1" dirty="0">
                 <a:solidFill>
                   <a:srgbClr val="5F7183"/>
                 </a:solidFill>
@@ -5563,13 +5933,13 @@
               </a:rPr>
               <a:t>Your response was not wrong. Verifying is a procedure, not an accusation.</a:t>
             </a:r>
-            <a:endParaRPr lang="en-US" sz="1050" dirty="0"/>
-          </a:p>
-        </p:txBody>
-      </p:sp>
-      <p:sp>
-        <p:nvSpPr>
-          <p:cNvPr id="19" name="Text 16"/>
+            <a:endParaRPr lang="en-US" sz="850" dirty="0"/>
+          </a:p>
+        </p:txBody>
+      </p:sp>
+      <p:sp>
+        <p:nvSpPr>
+          <p:cNvPr id="26" name="Text 23"/>
           <p:cNvSpPr/>
           <p:nvPr/>
         </p:nvSpPr>
@@ -5648,7 +6018,7 @@
       </p:sp>
       <p:sp>
         <p:nvSpPr>
-          <p:cNvPr id="20" name="Text 17"/>
+          <p:cNvPr id="27" name="Text 24"/>
           <p:cNvSpPr/>
           <p:nvPr/>
         </p:nvSpPr>
@@ -5701,7 +6071,7 @@
       </p:sp>
       <p:sp>
         <p:nvSpPr>
-          <p:cNvPr id="21" name="Text 18"/>
+          <p:cNvPr id="28" name="Text 25"/>
           <p:cNvSpPr/>
           <p:nvPr/>
         </p:nvSpPr>
@@ -5754,7 +6124,7 @@
       </p:sp>
       <p:sp>
         <p:nvSpPr>
-          <p:cNvPr id="22" name="Text 19"/>
+          <p:cNvPr id="29" name="Text 26"/>
           <p:cNvSpPr/>
           <p:nvPr/>
         </p:nvSpPr>

--- a/decks/01_1限_基本原則.pptx
+++ b/decks/01_1限_基本原則.pptx
@@ -3406,7 +3406,7 @@
                 <a:ea typeface="Yu Gothic" pitchFamily="34" charset="-122"/>
                 <a:cs typeface="Yu Gothic" pitchFamily="34" charset="-120"/>
               </a:rPr>
-              <a:t>Site SOP優先　</a:t>
+              <a:t>注記　</a:t>
             </a:r>
             <a:pPr indent="0" marL="0">
               <a:lnSpc>
@@ -3982,11 +3982,11 @@
         <p:spPr>
           <a:xfrm>
             <a:off x="640080" y="3081528"/>
-            <a:ext cx="5327752" cy="1074420"/>
+            <a:ext cx="5327752" cy="836676"/>
           </a:xfrm>
           <a:prstGeom prst="roundRect">
             <a:avLst>
-              <a:gd name="adj" fmla="val 3404"/>
+              <a:gd name="adj" fmla="val 4372"/>
             </a:avLst>
           </a:prstGeom>
           <a:solidFill>
@@ -4003,7 +4003,7 @@
         </p:nvSpPr>
         <p:spPr>
           <a:xfrm>
-            <a:off x="804672" y="3472434"/>
+            <a:off x="804672" y="3353562"/>
             <a:ext cx="292608" cy="292608"/>
           </a:xfrm>
           <a:prstGeom prst="ellipse">
@@ -4023,7 +4023,7 @@
         </p:nvSpPr>
         <p:spPr>
           <a:xfrm>
-            <a:off x="804672" y="3472434"/>
+            <a:off x="804672" y="3353562"/>
             <a:ext cx="292608" cy="292608"/>
           </a:xfrm>
           <a:prstGeom prst="rect">
@@ -4063,7 +4063,7 @@
         <p:spPr>
           <a:xfrm>
             <a:off x="1188720" y="3136392"/>
-            <a:ext cx="4596232" cy="964692"/>
+            <a:ext cx="4596232" cy="726948"/>
           </a:xfrm>
           <a:prstGeom prst="rect">
             <a:avLst/>
@@ -4125,11 +4125,11 @@
         <p:spPr>
           <a:xfrm>
             <a:off x="6223864" y="3081528"/>
-            <a:ext cx="5327752" cy="1074420"/>
+            <a:ext cx="5327752" cy="836676"/>
           </a:xfrm>
           <a:prstGeom prst="roundRect">
             <a:avLst>
-              <a:gd name="adj" fmla="val 3404"/>
+              <a:gd name="adj" fmla="val 4372"/>
             </a:avLst>
           </a:prstGeom>
           <a:solidFill>
@@ -4146,7 +4146,7 @@
         </p:nvSpPr>
         <p:spPr>
           <a:xfrm>
-            <a:off x="6388456" y="3472434"/>
+            <a:off x="6388456" y="3353562"/>
             <a:ext cx="292608" cy="292608"/>
           </a:xfrm>
           <a:prstGeom prst="ellipse">
@@ -4166,7 +4166,7 @@
         </p:nvSpPr>
         <p:spPr>
           <a:xfrm>
-            <a:off x="6388456" y="3472434"/>
+            <a:off x="6388456" y="3353562"/>
             <a:ext cx="292608" cy="292608"/>
           </a:xfrm>
           <a:prstGeom prst="rect">
@@ -4206,7 +4206,7 @@
         <p:spPr>
           <a:xfrm>
             <a:off x="6772504" y="3136392"/>
-            <a:ext cx="4596232" cy="964692"/>
+            <a:ext cx="4596232" cy="726948"/>
           </a:xfrm>
           <a:prstGeom prst="rect">
             <a:avLst/>
@@ -4267,12 +4267,12 @@
         </p:nvSpPr>
         <p:spPr>
           <a:xfrm>
-            <a:off x="640080" y="4265676"/>
-            <a:ext cx="5327752" cy="1074420"/>
+            <a:off x="640080" y="4027932"/>
+            <a:ext cx="5327752" cy="836676"/>
           </a:xfrm>
           <a:prstGeom prst="roundRect">
             <a:avLst>
-              <a:gd name="adj" fmla="val 3404"/>
+              <a:gd name="adj" fmla="val 4372"/>
             </a:avLst>
           </a:prstGeom>
           <a:solidFill>
@@ -4289,7 +4289,7 @@
         </p:nvSpPr>
         <p:spPr>
           <a:xfrm>
-            <a:off x="804672" y="4656582"/>
+            <a:off x="804672" y="4299966"/>
             <a:ext cx="292608" cy="292608"/>
           </a:xfrm>
           <a:prstGeom prst="ellipse">
@@ -4309,7 +4309,7 @@
         </p:nvSpPr>
         <p:spPr>
           <a:xfrm>
-            <a:off x="804672" y="4656582"/>
+            <a:off x="804672" y="4299966"/>
             <a:ext cx="292608" cy="292608"/>
           </a:xfrm>
           <a:prstGeom prst="rect">
@@ -4348,8 +4348,8 @@
         </p:nvSpPr>
         <p:spPr>
           <a:xfrm>
-            <a:off x="1188720" y="4320540"/>
-            <a:ext cx="4596232" cy="964692"/>
+            <a:off x="1188720" y="4082796"/>
+            <a:ext cx="4596232" cy="726948"/>
           </a:xfrm>
           <a:prstGeom prst="rect">
             <a:avLst/>
@@ -4410,12 +4410,12 @@
         </p:nvSpPr>
         <p:spPr>
           <a:xfrm>
-            <a:off x="6223864" y="4265676"/>
-            <a:ext cx="5327752" cy="1074420"/>
+            <a:off x="6223864" y="4027932"/>
+            <a:ext cx="5327752" cy="836676"/>
           </a:xfrm>
           <a:prstGeom prst="roundRect">
             <a:avLst>
-              <a:gd name="adj" fmla="val 3404"/>
+              <a:gd name="adj" fmla="val 4372"/>
             </a:avLst>
           </a:prstGeom>
           <a:solidFill>
@@ -4432,7 +4432,7 @@
         </p:nvSpPr>
         <p:spPr>
           <a:xfrm>
-            <a:off x="6388456" y="4656582"/>
+            <a:off x="6388456" y="4299966"/>
             <a:ext cx="292608" cy="292608"/>
           </a:xfrm>
           <a:prstGeom prst="ellipse">
@@ -4452,7 +4452,7 @@
         </p:nvSpPr>
         <p:spPr>
           <a:xfrm>
-            <a:off x="6388456" y="4656582"/>
+            <a:off x="6388456" y="4299966"/>
             <a:ext cx="292608" cy="292608"/>
           </a:xfrm>
           <a:prstGeom prst="rect">
@@ -4491,8 +4491,8 @@
         </p:nvSpPr>
         <p:spPr>
           <a:xfrm>
-            <a:off x="6772504" y="4320540"/>
-            <a:ext cx="4596232" cy="964692"/>
+            <a:off x="6772504" y="4082796"/>
+            <a:ext cx="4596232" cy="726948"/>
           </a:xfrm>
           <a:prstGeom prst="rect">
             <a:avLst/>
@@ -4553,12 +4553,12 @@
         </p:nvSpPr>
         <p:spPr>
           <a:xfrm>
-            <a:off x="640080" y="5394960"/>
-            <a:ext cx="10911535" cy="457200"/>
+            <a:off x="640080" y="4919472"/>
+            <a:ext cx="10911535" cy="420624"/>
           </a:xfrm>
           <a:prstGeom prst="roundRect">
             <a:avLst>
-              <a:gd name="adj" fmla="val 8000"/>
+              <a:gd name="adj" fmla="val 8696"/>
             </a:avLst>
           </a:prstGeom>
           <a:solidFill>
@@ -4575,8 +4575,8 @@
         </p:nvSpPr>
         <p:spPr>
           <a:xfrm>
-            <a:off x="877824" y="5431536"/>
-            <a:ext cx="10436047" cy="384048"/>
+            <a:off x="877824" y="4946904"/>
+            <a:ext cx="10436047" cy="365760"/>
           </a:xfrm>
           <a:prstGeom prst="rect">
             <a:avLst/>
@@ -4603,7 +4603,7 @@
                 <a:ea typeface="Yu Gothic" pitchFamily="34" charset="-122"/>
                 <a:cs typeface="Yu Gothic" pitchFamily="34" charset="-120"/>
               </a:rPr>
-              <a:t>追加付与　</a:t>
+              <a:t>追加付与①　</a:t>
             </a:r>
             <a:pPr indent="0" marL="0">
               <a:lnSpc>
@@ -4648,7 +4648,108 @@
       </p:sp>
       <p:sp>
         <p:nvSpPr>
-          <p:cNvPr id="27" name="Text 24"/>
+          <p:cNvPr id="27" name="Shape 24"/>
+          <p:cNvSpPr/>
+          <p:nvPr/>
+        </p:nvSpPr>
+        <p:spPr>
+          <a:xfrm>
+            <a:off x="640080" y="5394960"/>
+            <a:ext cx="10911535" cy="420624"/>
+          </a:xfrm>
+          <a:prstGeom prst="roundRect">
+            <a:avLst>
+              <a:gd name="adj" fmla="val 8696"/>
+            </a:avLst>
+          </a:prstGeom>
+          <a:solidFill>
+            <a:srgbClr val="E4F4F0"/>
+          </a:solidFill>
+          <a:ln/>
+        </p:spPr>
+      </p:sp>
+      <p:sp>
+        <p:nvSpPr>
+          <p:cNvPr id="28" name="Text 25"/>
+          <p:cNvSpPr/>
+          <p:nvPr/>
+        </p:nvSpPr>
+        <p:spPr>
+          <a:xfrm>
+            <a:off x="877824" y="5422392"/>
+            <a:ext cx="10436047" cy="365760"/>
+          </a:xfrm>
+          <a:prstGeom prst="rect">
+            <a:avLst/>
+          </a:prstGeom>
+          <a:noFill/>
+          <a:ln/>
+        </p:spPr>
+        <p:txBody>
+          <a:bodyPr wrap="square" lIns="0" tIns="0" rIns="0" bIns="0" rtlCol="0" anchor="ctr"/>
+          <a:lstStyle/>
+          <a:p>
+            <a:pPr indent="0" marL="0">
+              <a:lnSpc>
+                <a:spcPct val="86000"/>
+              </a:lnSpc>
+              <a:buNone/>
+            </a:pPr>
+            <a:r>
+              <a:rPr lang="en-US" sz="850" b="1" dirty="0">
+                <a:solidFill>
+                  <a:srgbClr val="0D8A76"/>
+                </a:solidFill>
+                <a:latin typeface="Yu Gothic" pitchFamily="34" charset="0"/>
+                <a:ea typeface="Yu Gothic" pitchFamily="34" charset="-122"/>
+                <a:cs typeface="Yu Gothic" pitchFamily="34" charset="-120"/>
+              </a:rPr>
+              <a:t>追加付与②　</a:t>
+            </a:r>
+            <a:pPr indent="0" marL="0">
+              <a:lnSpc>
+                <a:spcPct val="86000"/>
+              </a:lnSpc>
+              <a:buNone/>
+            </a:pPr>
+            <a:r>
+              <a:rPr lang="en-US" sz="1050" b="1" dirty="0">
+                <a:solidFill>
+                  <a:srgbClr val="1B2733"/>
+                </a:solidFill>
+                <a:latin typeface="Yu Gothic" pitchFamily="34" charset="0"/>
+                <a:ea typeface="Yu Gothic" pitchFamily="34" charset="-122"/>
+                <a:cs typeface="Yu Gothic" pitchFamily="34" charset="-120"/>
+              </a:rPr>
+              <a:t>翌日、その人物が実際にその部署の社員だと判明した。</a:t>
+            </a:r>
+            <a:endParaRPr lang="en-US" sz="850" dirty="0"/>
+          </a:p>
+          <a:p>
+            <a:pPr indent="0" marL="0">
+              <a:lnSpc>
+                <a:spcPct val="86000"/>
+              </a:lnSpc>
+              <a:buNone/>
+            </a:pPr>
+            <a:r>
+              <a:rPr lang="en-US" sz="750" i="1" dirty="0">
+                <a:solidFill>
+                  <a:srgbClr val="5F7183"/>
+                </a:solidFill>
+                <a:latin typeface="Calibri" pitchFamily="34" charset="0"/>
+                <a:ea typeface="Calibri" pitchFamily="34" charset="-122"/>
+                <a:cs typeface="Calibri" pitchFamily="34" charset="-120"/>
+              </a:rPr>
+              <a:t>The next day it turns out they really do work in that department.</a:t>
+            </a:r>
+            <a:endParaRPr lang="en-US" sz="850" dirty="0"/>
+          </a:p>
+        </p:txBody>
+      </p:sp>
+      <p:sp>
+        <p:nvSpPr>
+          <p:cNvPr id="29" name="Text 26"/>
           <p:cNvSpPr/>
           <p:nvPr/>
         </p:nvSpPr>
@@ -4727,7 +4828,7 @@
       </p:sp>
       <p:sp>
         <p:nvSpPr>
-          <p:cNvPr id="28" name="Text 25"/>
+          <p:cNvPr id="30" name="Text 27"/>
           <p:cNvSpPr/>
           <p:nvPr/>
         </p:nvSpPr>
@@ -4780,7 +4881,7 @@
       </p:sp>
       <p:sp>
         <p:nvSpPr>
-          <p:cNvPr id="29" name="Text 26"/>
+          <p:cNvPr id="31" name="Text 28"/>
           <p:cNvSpPr/>
           <p:nvPr/>
         </p:nvSpPr>
@@ -4833,7 +4934,7 @@
       </p:sp>
       <p:sp>
         <p:nvSpPr>
-          <p:cNvPr id="30" name="Text 27"/>
+          <p:cNvPr id="32" name="Text 29"/>
           <p:cNvSpPr/>
           <p:nvPr/>
         </p:nvSpPr>
@@ -5973,7 +6074,7 @@
                 <a:ea typeface="Yu Gothic" pitchFamily="34" charset="-122"/>
                 <a:cs typeface="Yu Gothic" pitchFamily="34" charset="-120"/>
               </a:rPr>
-              <a:t>Site SOP優先　</a:t>
+              <a:t>注記　</a:t>
             </a:r>
             <a:pPr indent="0" marL="0">
               <a:lnSpc>
@@ -16975,11 +17076,11 @@
         <p:spPr>
           <a:xfrm>
             <a:off x="640080" y="3081528"/>
-            <a:ext cx="5327752" cy="1074420"/>
+            <a:ext cx="5327752" cy="836676"/>
           </a:xfrm>
           <a:prstGeom prst="roundRect">
             <a:avLst>
-              <a:gd name="adj" fmla="val 3404"/>
+              <a:gd name="adj" fmla="val 4372"/>
             </a:avLst>
           </a:prstGeom>
           <a:solidFill>
@@ -16996,7 +17097,7 @@
         </p:nvSpPr>
         <p:spPr>
           <a:xfrm>
-            <a:off x="804672" y="3472434"/>
+            <a:off x="804672" y="3353562"/>
             <a:ext cx="292608" cy="292608"/>
           </a:xfrm>
           <a:prstGeom prst="ellipse">
@@ -17016,7 +17117,7 @@
         </p:nvSpPr>
         <p:spPr>
           <a:xfrm>
-            <a:off x="804672" y="3472434"/>
+            <a:off x="804672" y="3353562"/>
             <a:ext cx="292608" cy="292608"/>
           </a:xfrm>
           <a:prstGeom prst="rect">
@@ -17056,7 +17157,7 @@
         <p:spPr>
           <a:xfrm>
             <a:off x="1188720" y="3136392"/>
-            <a:ext cx="4596232" cy="964692"/>
+            <a:ext cx="4596232" cy="726948"/>
           </a:xfrm>
           <a:prstGeom prst="rect">
             <a:avLst/>
@@ -17118,11 +17219,11 @@
         <p:spPr>
           <a:xfrm>
             <a:off x="6223864" y="3081528"/>
-            <a:ext cx="5327752" cy="1074420"/>
+            <a:ext cx="5327752" cy="836676"/>
           </a:xfrm>
           <a:prstGeom prst="roundRect">
             <a:avLst>
-              <a:gd name="adj" fmla="val 3404"/>
+              <a:gd name="adj" fmla="val 4372"/>
             </a:avLst>
           </a:prstGeom>
           <a:solidFill>
@@ -17139,7 +17240,7 @@
         </p:nvSpPr>
         <p:spPr>
           <a:xfrm>
-            <a:off x="6388456" y="3472434"/>
+            <a:off x="6388456" y="3353562"/>
             <a:ext cx="292608" cy="292608"/>
           </a:xfrm>
           <a:prstGeom prst="ellipse">
@@ -17159,7 +17260,7 @@
         </p:nvSpPr>
         <p:spPr>
           <a:xfrm>
-            <a:off x="6388456" y="3472434"/>
+            <a:off x="6388456" y="3353562"/>
             <a:ext cx="292608" cy="292608"/>
           </a:xfrm>
           <a:prstGeom prst="rect">
@@ -17199,7 +17300,7 @@
         <p:spPr>
           <a:xfrm>
             <a:off x="6772504" y="3136392"/>
-            <a:ext cx="4596232" cy="964692"/>
+            <a:ext cx="4596232" cy="726948"/>
           </a:xfrm>
           <a:prstGeom prst="rect">
             <a:avLst/>
@@ -17260,12 +17361,12 @@
         </p:nvSpPr>
         <p:spPr>
           <a:xfrm>
-            <a:off x="640080" y="4265676"/>
-            <a:ext cx="5327752" cy="1074420"/>
+            <a:off x="640080" y="4027932"/>
+            <a:ext cx="5327752" cy="836676"/>
           </a:xfrm>
           <a:prstGeom prst="roundRect">
             <a:avLst>
-              <a:gd name="adj" fmla="val 3404"/>
+              <a:gd name="adj" fmla="val 4372"/>
             </a:avLst>
           </a:prstGeom>
           <a:solidFill>
@@ -17282,7 +17383,7 @@
         </p:nvSpPr>
         <p:spPr>
           <a:xfrm>
-            <a:off x="804672" y="4656582"/>
+            <a:off x="804672" y="4299966"/>
             <a:ext cx="292608" cy="292608"/>
           </a:xfrm>
           <a:prstGeom prst="ellipse">
@@ -17302,7 +17403,7 @@
         </p:nvSpPr>
         <p:spPr>
           <a:xfrm>
-            <a:off x="804672" y="4656582"/>
+            <a:off x="804672" y="4299966"/>
             <a:ext cx="292608" cy="292608"/>
           </a:xfrm>
           <a:prstGeom prst="rect">
@@ -17341,8 +17442,8 @@
         </p:nvSpPr>
         <p:spPr>
           <a:xfrm>
-            <a:off x="1188720" y="4320540"/>
-            <a:ext cx="4596232" cy="964692"/>
+            <a:off x="1188720" y="4082796"/>
+            <a:ext cx="4596232" cy="726948"/>
           </a:xfrm>
           <a:prstGeom prst="rect">
             <a:avLst/>
@@ -17403,12 +17504,12 @@
         </p:nvSpPr>
         <p:spPr>
           <a:xfrm>
-            <a:off x="6223864" y="4265676"/>
-            <a:ext cx="5327752" cy="1074420"/>
+            <a:off x="6223864" y="4027932"/>
+            <a:ext cx="5327752" cy="836676"/>
           </a:xfrm>
           <a:prstGeom prst="roundRect">
             <a:avLst>
-              <a:gd name="adj" fmla="val 3404"/>
+              <a:gd name="adj" fmla="val 4372"/>
             </a:avLst>
           </a:prstGeom>
           <a:solidFill>
@@ -17425,7 +17526,7 @@
         </p:nvSpPr>
         <p:spPr>
           <a:xfrm>
-            <a:off x="6388456" y="4656582"/>
+            <a:off x="6388456" y="4299966"/>
             <a:ext cx="292608" cy="292608"/>
           </a:xfrm>
           <a:prstGeom prst="ellipse">
@@ -17445,7 +17546,7 @@
         </p:nvSpPr>
         <p:spPr>
           <a:xfrm>
-            <a:off x="6388456" y="4656582"/>
+            <a:off x="6388456" y="4299966"/>
             <a:ext cx="292608" cy="292608"/>
           </a:xfrm>
           <a:prstGeom prst="rect">
@@ -17484,8 +17585,8 @@
         </p:nvSpPr>
         <p:spPr>
           <a:xfrm>
-            <a:off x="6772504" y="4320540"/>
-            <a:ext cx="4596232" cy="964692"/>
+            <a:off x="6772504" y="4082796"/>
+            <a:ext cx="4596232" cy="726948"/>
           </a:xfrm>
           <a:prstGeom prst="rect">
             <a:avLst/>
@@ -17546,12 +17647,12 @@
         </p:nvSpPr>
         <p:spPr>
           <a:xfrm>
-            <a:off x="640080" y="5394960"/>
-            <a:ext cx="10911535" cy="457200"/>
+            <a:off x="640080" y="4919472"/>
+            <a:ext cx="10911535" cy="420624"/>
           </a:xfrm>
           <a:prstGeom prst="roundRect">
             <a:avLst>
-              <a:gd name="adj" fmla="val 8000"/>
+              <a:gd name="adj" fmla="val 8696"/>
             </a:avLst>
           </a:prstGeom>
           <a:solidFill>
@@ -17568,8 +17669,8 @@
         </p:nvSpPr>
         <p:spPr>
           <a:xfrm>
-            <a:off x="877824" y="5431536"/>
-            <a:ext cx="10436047" cy="384048"/>
+            <a:off x="877824" y="4946904"/>
+            <a:ext cx="10436047" cy="365760"/>
           </a:xfrm>
           <a:prstGeom prst="rect">
             <a:avLst/>
@@ -17596,7 +17697,7 @@
                 <a:ea typeface="Yu Gothic" pitchFamily="34" charset="-122"/>
                 <a:cs typeface="Yu Gothic" pitchFamily="34" charset="-120"/>
               </a:rPr>
-              <a:t>追加付与　</a:t>
+              <a:t>追加付与①　</a:t>
             </a:r>
             <a:pPr indent="0" marL="0">
               <a:lnSpc>
@@ -17641,7 +17742,108 @@
       </p:sp>
       <p:sp>
         <p:nvSpPr>
-          <p:cNvPr id="27" name="Text 24"/>
+          <p:cNvPr id="27" name="Shape 24"/>
+          <p:cNvSpPr/>
+          <p:nvPr/>
+        </p:nvSpPr>
+        <p:spPr>
+          <a:xfrm>
+            <a:off x="640080" y="5394960"/>
+            <a:ext cx="10911535" cy="420624"/>
+          </a:xfrm>
+          <a:prstGeom prst="roundRect">
+            <a:avLst>
+              <a:gd name="adj" fmla="val 8696"/>
+            </a:avLst>
+          </a:prstGeom>
+          <a:solidFill>
+            <a:srgbClr val="E4F4F0"/>
+          </a:solidFill>
+          <a:ln/>
+        </p:spPr>
+      </p:sp>
+      <p:sp>
+        <p:nvSpPr>
+          <p:cNvPr id="28" name="Text 25"/>
+          <p:cNvSpPr/>
+          <p:nvPr/>
+        </p:nvSpPr>
+        <p:spPr>
+          <a:xfrm>
+            <a:off x="877824" y="5422392"/>
+            <a:ext cx="10436047" cy="365760"/>
+          </a:xfrm>
+          <a:prstGeom prst="rect">
+            <a:avLst/>
+          </a:prstGeom>
+          <a:noFill/>
+          <a:ln/>
+        </p:spPr>
+        <p:txBody>
+          <a:bodyPr wrap="square" lIns="0" tIns="0" rIns="0" bIns="0" rtlCol="0" anchor="ctr"/>
+          <a:lstStyle/>
+          <a:p>
+            <a:pPr indent="0" marL="0">
+              <a:lnSpc>
+                <a:spcPct val="86000"/>
+              </a:lnSpc>
+              <a:buNone/>
+            </a:pPr>
+            <a:r>
+              <a:rPr lang="en-US" sz="850" b="1" dirty="0">
+                <a:solidFill>
+                  <a:srgbClr val="0D8A76"/>
+                </a:solidFill>
+                <a:latin typeface="Yu Gothic" pitchFamily="34" charset="0"/>
+                <a:ea typeface="Yu Gothic" pitchFamily="34" charset="-122"/>
+                <a:cs typeface="Yu Gothic" pitchFamily="34" charset="-120"/>
+              </a:rPr>
+              <a:t>追加付与②　</a:t>
+            </a:r>
+            <a:pPr indent="0" marL="0">
+              <a:lnSpc>
+                <a:spcPct val="86000"/>
+              </a:lnSpc>
+              <a:buNone/>
+            </a:pPr>
+            <a:r>
+              <a:rPr lang="en-US" sz="1050" b="1" dirty="0">
+                <a:solidFill>
+                  <a:srgbClr val="1B2733"/>
+                </a:solidFill>
+                <a:latin typeface="Yu Gothic" pitchFamily="34" charset="0"/>
+                <a:ea typeface="Yu Gothic" pitchFamily="34" charset="-122"/>
+                <a:cs typeface="Yu Gothic" pitchFamily="34" charset="-120"/>
+              </a:rPr>
+              <a:t>翌朝、クライアントの社員から「昨夜あの資料を見なかったか」と聞かれた。</a:t>
+            </a:r>
+            <a:endParaRPr lang="en-US" sz="850" dirty="0"/>
+          </a:p>
+          <a:p>
+            <a:pPr indent="0" marL="0">
+              <a:lnSpc>
+                <a:spcPct val="86000"/>
+              </a:lnSpc>
+              <a:buNone/>
+            </a:pPr>
+            <a:r>
+              <a:rPr lang="en-US" sz="750" i="1" dirty="0">
+                <a:solidFill>
+                  <a:srgbClr val="5F7183"/>
+                </a:solidFill>
+                <a:latin typeface="Calibri" pitchFamily="34" charset="0"/>
+                <a:ea typeface="Calibri" pitchFamily="34" charset="-122"/>
+                <a:cs typeface="Calibri" pitchFamily="34" charset="-120"/>
+              </a:rPr>
+              <a:t>The next morning a client employee asks whether you saw that document last night.</a:t>
+            </a:r>
+            <a:endParaRPr lang="en-US" sz="850" dirty="0"/>
+          </a:p>
+        </p:txBody>
+      </p:sp>
+      <p:sp>
+        <p:nvSpPr>
+          <p:cNvPr id="29" name="Text 26"/>
           <p:cNvSpPr/>
           <p:nvPr/>
         </p:nvSpPr>
@@ -17720,7 +17922,7 @@
       </p:sp>
       <p:sp>
         <p:nvSpPr>
-          <p:cNvPr id="28" name="Text 25"/>
+          <p:cNvPr id="30" name="Text 27"/>
           <p:cNvSpPr/>
           <p:nvPr/>
         </p:nvSpPr>
@@ -17773,7 +17975,7 @@
       </p:sp>
       <p:sp>
         <p:nvSpPr>
-          <p:cNvPr id="29" name="Text 26"/>
+          <p:cNvPr id="31" name="Text 28"/>
           <p:cNvSpPr/>
           <p:nvPr/>
         </p:nvSpPr>
@@ -17826,7 +18028,7 @@
       </p:sp>
       <p:sp>
         <p:nvSpPr>
-          <p:cNvPr id="30" name="Text 27"/>
+          <p:cNvPr id="32" name="Text 29"/>
           <p:cNvSpPr/>
           <p:nvPr/>
         </p:nvSpPr>

--- a/decks/01_1限_基本原則.pptx
+++ b/decks/01_1限_基本原則.pptx
@@ -2031,7 +2031,7 @@
               <a:buNone/>
             </a:pPr>
             <a:r>
-              <a:rPr lang="en-US" sz="1050" i="1" dirty="0">
+              <a:rPr lang="en-US" sz="1050" dirty="0">
                 <a:solidFill>
                   <a:srgbClr val="A9BCCE"/>
                 </a:solidFill>
@@ -2188,7 +2188,7 @@
               <a:buNone/>
             </a:pPr>
             <a:r>
-              <a:rPr lang="en-US" sz="1000" i="1" dirty="0">
+              <a:rPr lang="en-US" sz="1000" dirty="0">
                 <a:solidFill>
                   <a:srgbClr val="8EA3B7"/>
                 </a:solidFill>
@@ -2266,8 +2266,8 @@
         </p:nvSpPr>
         <p:spPr>
           <a:xfrm>
-            <a:off x="640080" y="384048"/>
-            <a:ext cx="8982151" cy="768096"/>
+            <a:off x="640080" y="365760"/>
+            <a:ext cx="8982151" cy="749808"/>
           </a:xfrm>
           <a:prstGeom prst="rect">
             <a:avLst/>
@@ -2306,7 +2306,7 @@
               <a:buNone/>
             </a:pPr>
             <a:r>
-              <a:rPr lang="en-US" sz="1100" i="1" dirty="0">
+              <a:rPr lang="en-US" sz="1100" dirty="0">
                 <a:solidFill>
                   <a:srgbClr val="12B198"/>
                 </a:solidFill>
@@ -2328,7 +2328,7 @@
         </p:nvSpPr>
         <p:spPr>
           <a:xfrm>
-            <a:off x="9686239" y="438912"/>
+            <a:off x="9686239" y="420624"/>
             <a:ext cx="932688" cy="310896"/>
           </a:xfrm>
           <a:prstGeom prst="roundRect">
@@ -2350,7 +2350,7 @@
         </p:nvSpPr>
         <p:spPr>
           <a:xfrm>
-            <a:off x="9686239" y="438912"/>
+            <a:off x="9686239" y="420624"/>
             <a:ext cx="932688" cy="310896"/>
           </a:xfrm>
           <a:prstGeom prst="rect">
@@ -2389,12 +2389,12 @@
         </p:nvSpPr>
         <p:spPr>
           <a:xfrm>
-            <a:off x="640080" y="1188720"/>
-            <a:ext cx="10911535" cy="683514"/>
+            <a:off x="640080" y="1115568"/>
+            <a:ext cx="10911535" cy="715518"/>
           </a:xfrm>
           <a:prstGeom prst="roundRect">
             <a:avLst>
-              <a:gd name="adj" fmla="val 5351"/>
+              <a:gd name="adj" fmla="val 5112"/>
             </a:avLst>
           </a:prstGeom>
           <a:solidFill>
@@ -2411,7 +2411,7 @@
         </p:nvSpPr>
         <p:spPr>
           <a:xfrm>
-            <a:off x="841248" y="1356741"/>
+            <a:off x="841248" y="1299591"/>
             <a:ext cx="347472" cy="347472"/>
           </a:xfrm>
           <a:prstGeom prst="ellipse">
@@ -2431,7 +2431,7 @@
         </p:nvSpPr>
         <p:spPr>
           <a:xfrm>
-            <a:off x="841248" y="1356741"/>
+            <a:off x="841248" y="1299591"/>
             <a:ext cx="347472" cy="347472"/>
           </a:xfrm>
           <a:prstGeom prst="rect">
@@ -2470,8 +2470,8 @@
         </p:nvSpPr>
         <p:spPr>
           <a:xfrm>
-            <a:off x="1280160" y="1252728"/>
-            <a:ext cx="10033711" cy="555498"/>
+            <a:off x="1280160" y="1179576"/>
+            <a:ext cx="10033711" cy="587502"/>
           </a:xfrm>
           <a:prstGeom prst="rect">
             <a:avLst/>
@@ -2490,7 +2490,7 @@
               <a:buNone/>
             </a:pPr>
             <a:r>
-              <a:rPr lang="en-US" sz="900" dirty="0">
+              <a:rPr lang="en-US" sz="950" dirty="0">
                 <a:solidFill>
                   <a:srgbClr val="5F7183"/>
                 </a:solidFill>
@@ -2500,7 +2500,7 @@
               </a:rPr>
               <a:t>問1　どの柱に関わるか</a:t>
             </a:r>
-            <a:endParaRPr lang="en-US" sz="900" dirty="0"/>
+            <a:endParaRPr lang="en-US" sz="950" dirty="0"/>
           </a:p>
           <a:p>
             <a:pPr indent="0" marL="0">
@@ -2520,7 +2520,7 @@
               </a:rPr>
               <a:t>Asset（情報資産）。外部に出れば Reputation にも及ぶ。</a:t>
             </a:r>
-            <a:endParaRPr lang="en-US" sz="900" dirty="0"/>
+            <a:endParaRPr lang="en-US" sz="950" dirty="0"/>
           </a:p>
           <a:p>
             <a:pPr indent="0" marL="0">
@@ -2530,9 +2530,9 @@
               <a:buNone/>
             </a:pPr>
             <a:r>
-              <a:rPr lang="en-US" sz="800" i="1" dirty="0">
-                <a:solidFill>
-                  <a:srgbClr val="5F7183"/>
+              <a:rPr lang="en-US" sz="1100" dirty="0">
+                <a:solidFill>
+                  <a:srgbClr val="1B2733"/>
                 </a:solidFill>
                 <a:latin typeface="Calibri" pitchFamily="34" charset="0"/>
                 <a:ea typeface="Calibri" pitchFamily="34" charset="-122"/>
@@ -2540,7 +2540,7 @@
               </a:rPr>
               <a:t>Asset — information. If it leaves the building it becomes Reputation as well.</a:t>
             </a:r>
-            <a:endParaRPr lang="en-US" sz="900" dirty="0"/>
+            <a:endParaRPr lang="en-US" sz="950" dirty="0"/>
           </a:p>
         </p:txBody>
       </p:sp>
@@ -2552,12 +2552,12 @@
         </p:nvSpPr>
         <p:spPr>
           <a:xfrm>
-            <a:off x="640080" y="1972818"/>
-            <a:ext cx="10911535" cy="683514"/>
+            <a:off x="640080" y="1931670"/>
+            <a:ext cx="10911535" cy="715518"/>
           </a:xfrm>
           <a:prstGeom prst="roundRect">
             <a:avLst>
-              <a:gd name="adj" fmla="val 5351"/>
+              <a:gd name="adj" fmla="val 5112"/>
             </a:avLst>
           </a:prstGeom>
           <a:solidFill>
@@ -2574,7 +2574,7 @@
         </p:nvSpPr>
         <p:spPr>
           <a:xfrm>
-            <a:off x="841248" y="2140839"/>
+            <a:off x="841248" y="2115693"/>
             <a:ext cx="347472" cy="347472"/>
           </a:xfrm>
           <a:prstGeom prst="ellipse">
@@ -2594,7 +2594,7 @@
         </p:nvSpPr>
         <p:spPr>
           <a:xfrm>
-            <a:off x="841248" y="2140839"/>
+            <a:off x="841248" y="2115693"/>
             <a:ext cx="347472" cy="347472"/>
           </a:xfrm>
           <a:prstGeom prst="rect">
@@ -2633,8 +2633,8 @@
         </p:nvSpPr>
         <p:spPr>
           <a:xfrm>
-            <a:off x="1280160" y="2036826"/>
-            <a:ext cx="10033711" cy="555498"/>
+            <a:off x="1280160" y="1995678"/>
+            <a:ext cx="10033711" cy="587502"/>
           </a:xfrm>
           <a:prstGeom prst="rect">
             <a:avLst/>
@@ -2653,7 +2653,7 @@
               <a:buNone/>
             </a:pPr>
             <a:r>
-              <a:rPr lang="en-US" sz="900" dirty="0">
+              <a:rPr lang="en-US" sz="950" dirty="0">
                 <a:solidFill>
                   <a:srgbClr val="5F7183"/>
                 </a:solidFill>
@@ -2663,7 +2663,7 @@
               </a:rPr>
               <a:t>問2　拾ってよいか。読んでよいか</a:t>
             </a:r>
-            <a:endParaRPr lang="en-US" sz="900" dirty="0"/>
+            <a:endParaRPr lang="en-US" sz="950" dirty="0"/>
           </a:p>
           <a:p>
             <a:pPr indent="0" marL="0">
@@ -2683,7 +2683,7 @@
               </a:rPr>
               <a:t>拾ってよい。読んではいけない。表紙の分類表示までで判断する。</a:t>
             </a:r>
-            <a:endParaRPr lang="en-US" sz="900" dirty="0"/>
+            <a:endParaRPr lang="en-US" sz="950" dirty="0"/>
           </a:p>
           <a:p>
             <a:pPr indent="0" marL="0">
@@ -2693,9 +2693,9 @@
               <a:buNone/>
             </a:pPr>
             <a:r>
-              <a:rPr lang="en-US" sz="800" i="1" dirty="0">
-                <a:solidFill>
-                  <a:srgbClr val="5F7183"/>
+              <a:rPr lang="en-US" sz="1100" dirty="0">
+                <a:solidFill>
+                  <a:srgbClr val="1B2733"/>
                 </a:solidFill>
                 <a:latin typeface="Calibri" pitchFamily="34" charset="0"/>
                 <a:ea typeface="Calibri" pitchFamily="34" charset="-122"/>
@@ -2703,7 +2703,7 @@
               </a:rPr>
               <a:t>Pick it up, yes. Do not read it. Judge from the cover classification only.</a:t>
             </a:r>
-            <a:endParaRPr lang="en-US" sz="900" dirty="0"/>
+            <a:endParaRPr lang="en-US" sz="950" dirty="0"/>
           </a:p>
         </p:txBody>
       </p:sp>
@@ -2715,12 +2715,12 @@
         </p:nvSpPr>
         <p:spPr>
           <a:xfrm>
-            <a:off x="640080" y="2756916"/>
-            <a:ext cx="10911535" cy="683514"/>
+            <a:off x="640080" y="2747772"/>
+            <a:ext cx="10911535" cy="715518"/>
           </a:xfrm>
           <a:prstGeom prst="roundRect">
             <a:avLst>
-              <a:gd name="adj" fmla="val 5351"/>
+              <a:gd name="adj" fmla="val 5112"/>
             </a:avLst>
           </a:prstGeom>
           <a:solidFill>
@@ -2737,7 +2737,7 @@
         </p:nvSpPr>
         <p:spPr>
           <a:xfrm>
-            <a:off x="841248" y="2924937"/>
+            <a:off x="841248" y="2931795"/>
             <a:ext cx="347472" cy="347472"/>
           </a:xfrm>
           <a:prstGeom prst="ellipse">
@@ -2757,7 +2757,7 @@
         </p:nvSpPr>
         <p:spPr>
           <a:xfrm>
-            <a:off x="841248" y="2924937"/>
+            <a:off x="841248" y="2931795"/>
             <a:ext cx="347472" cy="347472"/>
           </a:xfrm>
           <a:prstGeom prst="rect">
@@ -2796,8 +2796,8 @@
         </p:nvSpPr>
         <p:spPr>
           <a:xfrm>
-            <a:off x="1280160" y="2820924"/>
-            <a:ext cx="10033711" cy="555498"/>
+            <a:off x="1280160" y="2811780"/>
+            <a:ext cx="10033711" cy="587502"/>
           </a:xfrm>
           <a:prstGeom prst="rect">
             <a:avLst/>
@@ -2816,7 +2816,7 @@
               <a:buNone/>
             </a:pPr>
             <a:r>
-              <a:rPr lang="en-US" sz="900" dirty="0">
+              <a:rPr lang="en-US" sz="950" dirty="0">
                 <a:solidFill>
                   <a:srgbClr val="5F7183"/>
                 </a:solidFill>
@@ -2826,7 +2826,7 @@
               </a:rPr>
               <a:t>問3　誰にいつ報告するか</a:t>
             </a:r>
-            <a:endParaRPr lang="en-US" sz="900" dirty="0"/>
+            <a:endParaRPr lang="en-US" sz="950" dirty="0"/>
           </a:p>
           <a:p>
             <a:pPr indent="0" marL="0">
@@ -2846,7 +2846,7 @@
               </a:rPr>
               <a:t>警備責任者へその場で。深夜でも翌朝に回さない。発見時刻が記録の価値を決める。</a:t>
             </a:r>
-            <a:endParaRPr lang="en-US" sz="900" dirty="0"/>
+            <a:endParaRPr lang="en-US" sz="950" dirty="0"/>
           </a:p>
           <a:p>
             <a:pPr indent="0" marL="0">
@@ -2856,9 +2856,9 @@
               <a:buNone/>
             </a:pPr>
             <a:r>
-              <a:rPr lang="en-US" sz="800" i="1" dirty="0">
-                <a:solidFill>
-                  <a:srgbClr val="5F7183"/>
+              <a:rPr lang="en-US" sz="1100" dirty="0">
+                <a:solidFill>
+                  <a:srgbClr val="1B2733"/>
                 </a:solidFill>
                 <a:latin typeface="Calibri" pitchFamily="34" charset="0"/>
                 <a:ea typeface="Calibri" pitchFamily="34" charset="-122"/>
@@ -2866,7 +2866,7 @@
               </a:rPr>
               <a:t>The security supervisor, immediately. Do not wait for morning — the time of discovery is what gives the record value.</a:t>
             </a:r>
-            <a:endParaRPr lang="en-US" sz="900" dirty="0"/>
+            <a:endParaRPr lang="en-US" sz="950" dirty="0"/>
           </a:p>
         </p:txBody>
       </p:sp>
@@ -2878,12 +2878,12 @@
         </p:nvSpPr>
         <p:spPr>
           <a:xfrm>
-            <a:off x="640080" y="3541014"/>
-            <a:ext cx="10911535" cy="683514"/>
+            <a:off x="640080" y="3563874"/>
+            <a:ext cx="10911535" cy="715518"/>
           </a:xfrm>
           <a:prstGeom prst="roundRect">
             <a:avLst>
-              <a:gd name="adj" fmla="val 5351"/>
+              <a:gd name="adj" fmla="val 5112"/>
             </a:avLst>
           </a:prstGeom>
           <a:solidFill>
@@ -2900,7 +2900,7 @@
         </p:nvSpPr>
         <p:spPr>
           <a:xfrm>
-            <a:off x="841248" y="3709035"/>
+            <a:off x="841248" y="3747897"/>
             <a:ext cx="347472" cy="347472"/>
           </a:xfrm>
           <a:prstGeom prst="ellipse">
@@ -2920,7 +2920,7 @@
         </p:nvSpPr>
         <p:spPr>
           <a:xfrm>
-            <a:off x="841248" y="3709035"/>
+            <a:off x="841248" y="3747897"/>
             <a:ext cx="347472" cy="347472"/>
           </a:xfrm>
           <a:prstGeom prst="rect">
@@ -2959,8 +2959,8 @@
         </p:nvSpPr>
         <p:spPr>
           <a:xfrm>
-            <a:off x="1280160" y="3605022"/>
-            <a:ext cx="10033711" cy="555498"/>
+            <a:off x="1280160" y="3627882"/>
+            <a:ext cx="10033711" cy="587502"/>
           </a:xfrm>
           <a:prstGeom prst="rect">
             <a:avLst/>
@@ -2979,7 +2979,7 @@
               <a:buNone/>
             </a:pPr>
             <a:r>
-              <a:rPr lang="en-US" sz="900" dirty="0">
+              <a:rPr lang="en-US" sz="950" dirty="0">
                 <a:solidFill>
                   <a:srgbClr val="5F7183"/>
                 </a:solidFill>
@@ -2989,7 +2989,7 @@
               </a:rPr>
               <a:t>問4　日誌にどう書くか</a:t>
             </a:r>
-            <a:endParaRPr lang="en-US" sz="900" dirty="0"/>
+            <a:endParaRPr lang="en-US" sz="950" dirty="0"/>
           </a:p>
           <a:p>
             <a:pPr indent="0" marL="0">
@@ -3009,7 +3009,7 @@
               </a:rPr>
               <a:t>発見時刻、場所、分類表示、引渡し先を書く。中身は書かない。</a:t>
             </a:r>
-            <a:endParaRPr lang="en-US" sz="900" dirty="0"/>
+            <a:endParaRPr lang="en-US" sz="950" dirty="0"/>
           </a:p>
           <a:p>
             <a:pPr indent="0" marL="0">
@@ -3019,9 +3019,9 @@
               <a:buNone/>
             </a:pPr>
             <a:r>
-              <a:rPr lang="en-US" sz="800" i="1" dirty="0">
-                <a:solidFill>
-                  <a:srgbClr val="5F7183"/>
+              <a:rPr lang="en-US" sz="1100" dirty="0">
+                <a:solidFill>
+                  <a:srgbClr val="1B2733"/>
                 </a:solidFill>
                 <a:latin typeface="Calibri" pitchFamily="34" charset="0"/>
                 <a:ea typeface="Calibri" pitchFamily="34" charset="-122"/>
@@ -3029,7 +3029,7 @@
               </a:rPr>
               <a:t>Time, place, classification, and who you handed it to. Never the contents.</a:t>
             </a:r>
-            <a:endParaRPr lang="en-US" sz="900" dirty="0"/>
+            <a:endParaRPr lang="en-US" sz="950" dirty="0"/>
           </a:p>
         </p:txBody>
       </p:sp>
@@ -3041,7 +3041,7 @@
         </p:nvSpPr>
         <p:spPr>
           <a:xfrm>
-            <a:off x="640080" y="4334256"/>
+            <a:off x="640080" y="4389120"/>
             <a:ext cx="10911535" cy="420624"/>
           </a:xfrm>
           <a:prstGeom prst="roundRect">
@@ -3063,7 +3063,7 @@
         </p:nvSpPr>
         <p:spPr>
           <a:xfrm>
-            <a:off x="859536" y="4361688"/>
+            <a:off x="859536" y="4416552"/>
             <a:ext cx="10472623" cy="365760"/>
           </a:xfrm>
           <a:prstGeom prst="rect">
@@ -3137,9 +3137,9 @@
               <a:buNone/>
             </a:pPr>
             <a:r>
-              <a:rPr lang="en-US" sz="750" i="1" dirty="0">
-                <a:solidFill>
-                  <a:srgbClr val="5F7183"/>
+              <a:rPr lang="en-US" sz="950" dirty="0">
+                <a:solidFill>
+                  <a:srgbClr val="1B2733"/>
                 </a:solidFill>
                 <a:latin typeface="Calibri" pitchFamily="34" charset="0"/>
                 <a:ea typeface="Calibri" pitchFamily="34" charset="-122"/>
@@ -3159,7 +3159,7 @@
         </p:nvSpPr>
         <p:spPr>
           <a:xfrm>
-            <a:off x="640080" y="4828032"/>
+            <a:off x="640080" y="4882896"/>
             <a:ext cx="10911535" cy="420624"/>
           </a:xfrm>
           <a:prstGeom prst="roundRect">
@@ -3181,7 +3181,7 @@
         </p:nvSpPr>
         <p:spPr>
           <a:xfrm>
-            <a:off x="859536" y="4855464"/>
+            <a:off x="859536" y="4910328"/>
             <a:ext cx="10472623" cy="365760"/>
           </a:xfrm>
           <a:prstGeom prst="rect">
@@ -3255,9 +3255,9 @@
               <a:buNone/>
             </a:pPr>
             <a:r>
-              <a:rPr lang="en-US" sz="750" i="1" dirty="0">
-                <a:solidFill>
-                  <a:srgbClr val="5F7183"/>
+              <a:rPr lang="en-US" sz="950" dirty="0">
+                <a:solidFill>
+                  <a:srgbClr val="1B2733"/>
                 </a:solidFill>
                 <a:latin typeface="Calibri" pitchFamily="34" charset="0"/>
                 <a:ea typeface="Calibri" pitchFamily="34" charset="-122"/>
@@ -3277,7 +3277,7 @@
         </p:nvSpPr>
         <p:spPr>
           <a:xfrm>
-            <a:off x="640080" y="5358384"/>
+            <a:off x="640080" y="5413248"/>
             <a:ext cx="10911535" cy="457200"/>
           </a:xfrm>
           <a:prstGeom prst="roundRect">
@@ -3299,7 +3299,7 @@
         </p:nvSpPr>
         <p:spPr>
           <a:xfrm>
-            <a:off x="859536" y="5385816"/>
+            <a:off x="859536" y="5440680"/>
             <a:ext cx="10472623" cy="402336"/>
           </a:xfrm>
           <a:prstGeom prst="rect">
@@ -3356,9 +3356,9 @@
               <a:buNone/>
             </a:pPr>
             <a:r>
-              <a:rPr lang="en-US" sz="750" i="1" dirty="0">
-                <a:solidFill>
-                  <a:srgbClr val="9FD8CD"/>
+              <a:rPr lang="en-US" sz="950" dirty="0">
+                <a:solidFill>
+                  <a:srgbClr val="DCEFEB"/>
                 </a:solidFill>
                 <a:latin typeface="Calibri" pitchFamily="34" charset="0"/>
                 <a:ea typeface="Calibri" pitchFamily="34" charset="-122"/>
@@ -3378,8 +3378,8 @@
         </p:nvSpPr>
         <p:spPr>
           <a:xfrm>
-            <a:off x="640080" y="5907024"/>
-            <a:ext cx="10911535" cy="310896"/>
+            <a:off x="640080" y="5961888"/>
+            <a:ext cx="10911535" cy="292608"/>
           </a:xfrm>
           <a:prstGeom prst="rect">
             <a:avLst/>
@@ -3435,7 +3435,7 @@
               <a:buNone/>
             </a:pPr>
             <a:r>
-              <a:rPr lang="en-US" sz="750" i="1" dirty="0">
+              <a:rPr lang="en-US" sz="800" i="1" dirty="0">
                 <a:solidFill>
                   <a:srgbClr val="5F7183"/>
                 </a:solidFill>
@@ -3458,7 +3458,7 @@
         <p:spPr>
           <a:xfrm>
             <a:off x="640080" y="6272784"/>
-            <a:ext cx="9905695" cy="237744"/>
+            <a:ext cx="9905695" cy="219456"/>
           </a:xfrm>
           <a:prstGeom prst="rect">
             <a:avLst/>
@@ -3510,7 +3510,7 @@
         </p:nvSpPr>
         <p:spPr>
           <a:xfrm>
-            <a:off x="640080" y="6382512"/>
+            <a:off x="640080" y="6492240"/>
             <a:ext cx="8778240" cy="292608"/>
           </a:xfrm>
           <a:prstGeom prst="rect">
@@ -3563,7 +3563,7 @@
         </p:nvSpPr>
         <p:spPr>
           <a:xfrm>
-            <a:off x="10637215" y="6382512"/>
+            <a:off x="10637215" y="6492240"/>
             <a:ext cx="914400" cy="292608"/>
           </a:xfrm>
           <a:prstGeom prst="rect">
@@ -3658,8 +3658,8 @@
         </p:nvSpPr>
         <p:spPr>
           <a:xfrm>
-            <a:off x="640080" y="384048"/>
-            <a:ext cx="8982151" cy="768096"/>
+            <a:off x="640080" y="365760"/>
+            <a:ext cx="8982151" cy="749808"/>
           </a:xfrm>
           <a:prstGeom prst="rect">
             <a:avLst/>
@@ -3698,7 +3698,7 @@
               <a:buNone/>
             </a:pPr>
             <a:r>
-              <a:rPr lang="en-US" sz="1100" i="1" dirty="0">
+              <a:rPr lang="en-US" sz="1100" dirty="0">
                 <a:solidFill>
                   <a:srgbClr val="12B198"/>
                 </a:solidFill>
@@ -3720,7 +3720,7 @@
         </p:nvSpPr>
         <p:spPr>
           <a:xfrm>
-            <a:off x="9686239" y="438912"/>
+            <a:off x="9686239" y="420624"/>
             <a:ext cx="932688" cy="310896"/>
           </a:xfrm>
           <a:prstGeom prst="roundRect">
@@ -3742,7 +3742,7 @@
         </p:nvSpPr>
         <p:spPr>
           <a:xfrm>
-            <a:off x="9686239" y="438912"/>
+            <a:off x="9686239" y="420624"/>
             <a:ext cx="932688" cy="310896"/>
           </a:xfrm>
           <a:prstGeom prst="rect">
@@ -3781,7 +3781,7 @@
         </p:nvSpPr>
         <p:spPr>
           <a:xfrm>
-            <a:off x="640080" y="1188720"/>
+            <a:off x="640080" y="1115568"/>
             <a:ext cx="10911535" cy="1124712"/>
           </a:xfrm>
           <a:prstGeom prst="roundRect">
@@ -3803,7 +3803,7 @@
         </p:nvSpPr>
         <p:spPr>
           <a:xfrm>
-            <a:off x="950976" y="1316736"/>
+            <a:off x="950976" y="1243584"/>
             <a:ext cx="10289743" cy="868680"/>
           </a:xfrm>
           <a:prstGeom prst="rect">
@@ -3880,9 +3880,9 @@
               <a:buNone/>
             </a:pPr>
             <a:r>
-              <a:rPr lang="en-US" sz="800" i="1" dirty="0">
-                <a:solidFill>
-                  <a:srgbClr val="9FD8CD"/>
+              <a:rPr lang="en-US" sz="1000" dirty="0">
+                <a:solidFill>
+                  <a:srgbClr val="DCEFEB"/>
                 </a:solidFill>
                 <a:latin typeface="Calibri" pitchFamily="34" charset="0"/>
                 <a:ea typeface="Calibri" pitchFamily="34" charset="-122"/>
@@ -3902,7 +3902,7 @@
         </p:nvSpPr>
         <p:spPr>
           <a:xfrm>
-            <a:off x="640080" y="2459736"/>
+            <a:off x="640080" y="2386584"/>
             <a:ext cx="10911535" cy="566928"/>
           </a:xfrm>
           <a:prstGeom prst="rect">
@@ -3959,9 +3959,9 @@
               <a:buNone/>
             </a:pPr>
             <a:r>
-              <a:rPr lang="en-US" sz="850" i="1" dirty="0">
-                <a:solidFill>
-                  <a:srgbClr val="5F7183"/>
+              <a:rPr lang="en-US" sz="1050" dirty="0">
+                <a:solidFill>
+                  <a:srgbClr val="1B2733"/>
                 </a:solidFill>
                 <a:latin typeface="Calibri" pitchFamily="34" charset="0"/>
                 <a:ea typeface="Calibri" pitchFamily="34" charset="-122"/>
@@ -3981,12 +3981,12 @@
         </p:nvSpPr>
         <p:spPr>
           <a:xfrm>
-            <a:off x="640080" y="3081528"/>
-            <a:ext cx="5327752" cy="836676"/>
+            <a:off x="640080" y="3008376"/>
+            <a:ext cx="5327752" cy="900684"/>
           </a:xfrm>
           <a:prstGeom prst="roundRect">
             <a:avLst>
-              <a:gd name="adj" fmla="val 4372"/>
+              <a:gd name="adj" fmla="val 4061"/>
             </a:avLst>
           </a:prstGeom>
           <a:solidFill>
@@ -4003,7 +4003,7 @@
         </p:nvSpPr>
         <p:spPr>
           <a:xfrm>
-            <a:off x="804672" y="3353562"/>
+            <a:off x="804672" y="3312414"/>
             <a:ext cx="292608" cy="292608"/>
           </a:xfrm>
           <a:prstGeom prst="ellipse">
@@ -4023,7 +4023,7 @@
         </p:nvSpPr>
         <p:spPr>
           <a:xfrm>
-            <a:off x="804672" y="3353562"/>
+            <a:off x="804672" y="3312414"/>
             <a:ext cx="292608" cy="292608"/>
           </a:xfrm>
           <a:prstGeom prst="rect">
@@ -4062,8 +4062,8 @@
         </p:nvSpPr>
         <p:spPr>
           <a:xfrm>
-            <a:off x="1188720" y="3136392"/>
-            <a:ext cx="4596232" cy="726948"/>
+            <a:off x="1188720" y="3063240"/>
+            <a:ext cx="4596232" cy="790956"/>
           </a:xfrm>
           <a:prstGeom prst="rect">
             <a:avLst/>
@@ -4102,9 +4102,9 @@
               <a:buNone/>
             </a:pPr>
             <a:r>
-              <a:rPr lang="en-US" sz="800" i="1" dirty="0">
-                <a:solidFill>
-                  <a:srgbClr val="5F7183"/>
+              <a:rPr lang="en-US" sz="1050" dirty="0">
+                <a:solidFill>
+                  <a:srgbClr val="1B2733"/>
                 </a:solidFill>
                 <a:latin typeface="Calibri" pitchFamily="34" charset="0"/>
                 <a:ea typeface="Calibri" pitchFamily="34" charset="-122"/>
@@ -4124,12 +4124,12 @@
         </p:nvSpPr>
         <p:spPr>
           <a:xfrm>
-            <a:off x="6223864" y="3081528"/>
-            <a:ext cx="5327752" cy="836676"/>
+            <a:off x="6223864" y="3008376"/>
+            <a:ext cx="5327752" cy="900684"/>
           </a:xfrm>
           <a:prstGeom prst="roundRect">
             <a:avLst>
-              <a:gd name="adj" fmla="val 4372"/>
+              <a:gd name="adj" fmla="val 4061"/>
             </a:avLst>
           </a:prstGeom>
           <a:solidFill>
@@ -4146,7 +4146,7 @@
         </p:nvSpPr>
         <p:spPr>
           <a:xfrm>
-            <a:off x="6388456" y="3353562"/>
+            <a:off x="6388456" y="3312414"/>
             <a:ext cx="292608" cy="292608"/>
           </a:xfrm>
           <a:prstGeom prst="ellipse">
@@ -4166,7 +4166,7 @@
         </p:nvSpPr>
         <p:spPr>
           <a:xfrm>
-            <a:off x="6388456" y="3353562"/>
+            <a:off x="6388456" y="3312414"/>
             <a:ext cx="292608" cy="292608"/>
           </a:xfrm>
           <a:prstGeom prst="rect">
@@ -4205,8 +4205,8 @@
         </p:nvSpPr>
         <p:spPr>
           <a:xfrm>
-            <a:off x="6772504" y="3136392"/>
-            <a:ext cx="4596232" cy="726948"/>
+            <a:off x="6772504" y="3063240"/>
+            <a:ext cx="4596232" cy="790956"/>
           </a:xfrm>
           <a:prstGeom prst="rect">
             <a:avLst/>
@@ -4245,9 +4245,9 @@
               <a:buNone/>
             </a:pPr>
             <a:r>
-              <a:rPr lang="en-US" sz="800" i="1" dirty="0">
-                <a:solidFill>
-                  <a:srgbClr val="5F7183"/>
+              <a:rPr lang="en-US" sz="1050" dirty="0">
+                <a:solidFill>
+                  <a:srgbClr val="1B2733"/>
                 </a:solidFill>
                 <a:latin typeface="Calibri" pitchFamily="34" charset="0"/>
                 <a:ea typeface="Calibri" pitchFamily="34" charset="-122"/>
@@ -4267,12 +4267,12 @@
         </p:nvSpPr>
         <p:spPr>
           <a:xfrm>
-            <a:off x="640080" y="4027932"/>
-            <a:ext cx="5327752" cy="836676"/>
+            <a:off x="640080" y="4018788"/>
+            <a:ext cx="5327752" cy="900684"/>
           </a:xfrm>
           <a:prstGeom prst="roundRect">
             <a:avLst>
-              <a:gd name="adj" fmla="val 4372"/>
+              <a:gd name="adj" fmla="val 4061"/>
             </a:avLst>
           </a:prstGeom>
           <a:solidFill>
@@ -4289,7 +4289,7 @@
         </p:nvSpPr>
         <p:spPr>
           <a:xfrm>
-            <a:off x="804672" y="4299966"/>
+            <a:off x="804672" y="4322826"/>
             <a:ext cx="292608" cy="292608"/>
           </a:xfrm>
           <a:prstGeom prst="ellipse">
@@ -4309,7 +4309,7 @@
         </p:nvSpPr>
         <p:spPr>
           <a:xfrm>
-            <a:off x="804672" y="4299966"/>
+            <a:off x="804672" y="4322826"/>
             <a:ext cx="292608" cy="292608"/>
           </a:xfrm>
           <a:prstGeom prst="rect">
@@ -4348,8 +4348,8 @@
         </p:nvSpPr>
         <p:spPr>
           <a:xfrm>
-            <a:off x="1188720" y="4082796"/>
-            <a:ext cx="4596232" cy="726948"/>
+            <a:off x="1188720" y="4073652"/>
+            <a:ext cx="4596232" cy="790956"/>
           </a:xfrm>
           <a:prstGeom prst="rect">
             <a:avLst/>
@@ -4388,9 +4388,9 @@
               <a:buNone/>
             </a:pPr>
             <a:r>
-              <a:rPr lang="en-US" sz="800" i="1" dirty="0">
-                <a:solidFill>
-                  <a:srgbClr val="5F7183"/>
+              <a:rPr lang="en-US" sz="1050" dirty="0">
+                <a:solidFill>
+                  <a:srgbClr val="1B2733"/>
                 </a:solidFill>
                 <a:latin typeface="Calibri" pitchFamily="34" charset="0"/>
                 <a:ea typeface="Calibri" pitchFamily="34" charset="-122"/>
@@ -4410,12 +4410,12 @@
         </p:nvSpPr>
         <p:spPr>
           <a:xfrm>
-            <a:off x="6223864" y="4027932"/>
-            <a:ext cx="5327752" cy="836676"/>
+            <a:off x="6223864" y="4018788"/>
+            <a:ext cx="5327752" cy="900684"/>
           </a:xfrm>
           <a:prstGeom prst="roundRect">
             <a:avLst>
-              <a:gd name="adj" fmla="val 4372"/>
+              <a:gd name="adj" fmla="val 4061"/>
             </a:avLst>
           </a:prstGeom>
           <a:solidFill>
@@ -4432,7 +4432,7 @@
         </p:nvSpPr>
         <p:spPr>
           <a:xfrm>
-            <a:off x="6388456" y="4299966"/>
+            <a:off x="6388456" y="4322826"/>
             <a:ext cx="292608" cy="292608"/>
           </a:xfrm>
           <a:prstGeom prst="ellipse">
@@ -4452,7 +4452,7 @@
         </p:nvSpPr>
         <p:spPr>
           <a:xfrm>
-            <a:off x="6388456" y="4299966"/>
+            <a:off x="6388456" y="4322826"/>
             <a:ext cx="292608" cy="292608"/>
           </a:xfrm>
           <a:prstGeom prst="rect">
@@ -4491,8 +4491,8 @@
         </p:nvSpPr>
         <p:spPr>
           <a:xfrm>
-            <a:off x="6772504" y="4082796"/>
-            <a:ext cx="4596232" cy="726948"/>
+            <a:off x="6772504" y="4073652"/>
+            <a:ext cx="4596232" cy="790956"/>
           </a:xfrm>
           <a:prstGeom prst="rect">
             <a:avLst/>
@@ -4531,9 +4531,9 @@
               <a:buNone/>
             </a:pPr>
             <a:r>
-              <a:rPr lang="en-US" sz="800" i="1" dirty="0">
-                <a:solidFill>
-                  <a:srgbClr val="5F7183"/>
+              <a:rPr lang="en-US" sz="1050" dirty="0">
+                <a:solidFill>
+                  <a:srgbClr val="1B2733"/>
                 </a:solidFill>
                 <a:latin typeface="Calibri" pitchFamily="34" charset="0"/>
                 <a:ea typeface="Calibri" pitchFamily="34" charset="-122"/>
@@ -4553,7 +4553,7 @@
         </p:nvSpPr>
         <p:spPr>
           <a:xfrm>
-            <a:off x="640080" y="4919472"/>
+            <a:off x="640080" y="4974336"/>
             <a:ext cx="10911535" cy="420624"/>
           </a:xfrm>
           <a:prstGeom prst="roundRect">
@@ -4575,7 +4575,7 @@
         </p:nvSpPr>
         <p:spPr>
           <a:xfrm>
-            <a:off x="877824" y="4946904"/>
+            <a:off x="877824" y="5001768"/>
             <a:ext cx="10436047" cy="365760"/>
           </a:xfrm>
           <a:prstGeom prst="rect">
@@ -4632,9 +4632,9 @@
               <a:buNone/>
             </a:pPr>
             <a:r>
-              <a:rPr lang="en-US" sz="750" i="1" dirty="0">
-                <a:solidFill>
-                  <a:srgbClr val="5F7183"/>
+              <a:rPr lang="en-US" sz="950" dirty="0">
+                <a:solidFill>
+                  <a:srgbClr val="1B2733"/>
                 </a:solidFill>
                 <a:latin typeface="Calibri" pitchFamily="34" charset="0"/>
                 <a:ea typeface="Calibri" pitchFamily="34" charset="-122"/>
@@ -4654,7 +4654,7 @@
         </p:nvSpPr>
         <p:spPr>
           <a:xfrm>
-            <a:off x="640080" y="5394960"/>
+            <a:off x="640080" y="5449824"/>
             <a:ext cx="10911535" cy="420624"/>
           </a:xfrm>
           <a:prstGeom prst="roundRect">
@@ -4676,7 +4676,7 @@
         </p:nvSpPr>
         <p:spPr>
           <a:xfrm>
-            <a:off x="877824" y="5422392"/>
+            <a:off x="877824" y="5477256"/>
             <a:ext cx="10436047" cy="365760"/>
           </a:xfrm>
           <a:prstGeom prst="rect">
@@ -4733,7 +4733,86 @@
               <a:buNone/>
             </a:pPr>
             <a:r>
-              <a:rPr lang="en-US" sz="750" i="1" dirty="0">
+              <a:rPr lang="en-US" sz="950" dirty="0">
+                <a:solidFill>
+                  <a:srgbClr val="1B2733"/>
+                </a:solidFill>
+                <a:latin typeface="Calibri" pitchFamily="34" charset="0"/>
+                <a:ea typeface="Calibri" pitchFamily="34" charset="-122"/>
+                <a:cs typeface="Calibri" pitchFamily="34" charset="-120"/>
+              </a:rPr>
+              <a:t>The next day it turns out they really do work in that department.</a:t>
+            </a:r>
+            <a:endParaRPr lang="en-US" sz="850" dirty="0"/>
+          </a:p>
+        </p:txBody>
+      </p:sp>
+      <p:sp>
+        <p:nvSpPr>
+          <p:cNvPr id="29" name="Text 26"/>
+          <p:cNvSpPr/>
+          <p:nvPr/>
+        </p:nvSpPr>
+        <p:spPr>
+          <a:xfrm>
+            <a:off x="640080" y="5961888"/>
+            <a:ext cx="10911535" cy="292608"/>
+          </a:xfrm>
+          <a:prstGeom prst="rect">
+            <a:avLst/>
+          </a:prstGeom>
+          <a:noFill/>
+          <a:ln/>
+        </p:spPr>
+        <p:txBody>
+          <a:bodyPr wrap="square" lIns="0" tIns="0" rIns="0" bIns="0" rtlCol="0" anchor="t"/>
+          <a:lstStyle/>
+          <a:p>
+            <a:pPr indent="0" marL="0">
+              <a:lnSpc>
+                <a:spcPct val="88000"/>
+              </a:lnSpc>
+              <a:buNone/>
+            </a:pPr>
+            <a:r>
+              <a:rPr lang="en-US" sz="900" b="1" dirty="0">
+                <a:solidFill>
+                  <a:srgbClr val="0D8A76"/>
+                </a:solidFill>
+                <a:latin typeface="Yu Gothic" pitchFamily="34" charset="0"/>
+                <a:ea typeface="Yu Gothic" pitchFamily="34" charset="-122"/>
+                <a:cs typeface="Yu Gothic" pitchFamily="34" charset="-120"/>
+              </a:rPr>
+              <a:t>Site SOP優先　</a:t>
+            </a:r>
+            <a:pPr indent="0" marL="0">
+              <a:lnSpc>
+                <a:spcPct val="88000"/>
+              </a:lnSpc>
+              <a:buNone/>
+            </a:pPr>
+            <a:r>
+              <a:rPr lang="en-US" sz="900" dirty="0">
+                <a:solidFill>
+                  <a:srgbClr val="1B2733"/>
+                </a:solidFill>
+                <a:latin typeface="Yu Gothic" pitchFamily="34" charset="0"/>
+                <a:ea typeface="Yu Gothic" pitchFamily="34" charset="-122"/>
+                <a:cs typeface="Yu Gothic" pitchFamily="34" charset="-120"/>
+              </a:rPr>
+              <a:t>撮影の可否と、社員による撮影への対応は現場ごとに異なる。Site SOPを確認する。</a:t>
+            </a:r>
+            <a:endParaRPr lang="en-US" sz="900" dirty="0"/>
+          </a:p>
+          <a:p>
+            <a:pPr indent="0" marL="0">
+              <a:lnSpc>
+                <a:spcPct val="88000"/>
+              </a:lnSpc>
+              <a:buNone/>
+            </a:pPr>
+            <a:r>
+              <a:rPr lang="en-US" sz="800" i="1" dirty="0">
                 <a:solidFill>
                   <a:srgbClr val="5F7183"/>
                 </a:solidFill>
@@ -4741,22 +4820,22 @@
                 <a:ea typeface="Calibri" pitchFamily="34" charset="-122"/>
                 <a:cs typeface="Calibri" pitchFamily="34" charset="-120"/>
               </a:rPr>
-              <a:t>The next day it turns out they really do work in that department.</a:t>
-            </a:r>
-            <a:endParaRPr lang="en-US" sz="850" dirty="0"/>
-          </a:p>
-        </p:txBody>
-      </p:sp>
-      <p:sp>
-        <p:nvSpPr>
-          <p:cNvPr id="29" name="Text 26"/>
-          <p:cNvSpPr/>
-          <p:nvPr/>
-        </p:nvSpPr>
-        <p:spPr>
-          <a:xfrm>
-            <a:off x="640080" y="5907024"/>
-            <a:ext cx="10911535" cy="310896"/>
+              <a:t>Whether photography is allowed, and how to handle it by employees, differ by site. Check the Site SOP.</a:t>
+            </a:r>
+            <a:endParaRPr lang="en-US" sz="900" dirty="0"/>
+          </a:p>
+        </p:txBody>
+      </p:sp>
+      <p:sp>
+        <p:nvSpPr>
+          <p:cNvPr id="30" name="Text 27"/>
+          <p:cNvSpPr/>
+          <p:nvPr/>
+        </p:nvSpPr>
+        <p:spPr>
+          <a:xfrm>
+            <a:off x="640080" y="6272784"/>
+            <a:ext cx="9905695" cy="219456"/>
           </a:xfrm>
           <a:prstGeom prst="rect">
             <a:avLst/>
@@ -4769,167 +4848,88 @@
           <a:lstStyle/>
           <a:p>
             <a:pPr indent="0" marL="0">
-              <a:lnSpc>
-                <a:spcPct val="88000"/>
-              </a:lnSpc>
-              <a:buNone/>
-            </a:pPr>
-            <a:r>
-              <a:rPr lang="en-US" sz="900" b="1" dirty="0">
-                <a:solidFill>
-                  <a:srgbClr val="0D8A76"/>
-                </a:solidFill>
-                <a:latin typeface="Yu Gothic" pitchFamily="34" charset="0"/>
-                <a:ea typeface="Yu Gothic" pitchFamily="34" charset="-122"/>
-                <a:cs typeface="Yu Gothic" pitchFamily="34" charset="-120"/>
-              </a:rPr>
-              <a:t>Site SOP優先　</a:t>
-            </a:r>
-            <a:pPr indent="0" marL="0">
-              <a:lnSpc>
-                <a:spcPct val="88000"/>
-              </a:lnSpc>
+              <a:buNone/>
+            </a:pPr>
+            <a:r>
+              <a:rPr lang="en-US" sz="750" b="1" dirty="0">
+                <a:solidFill>
+                  <a:srgbClr val="D6E0E9"/>
+                </a:solidFill>
+                <a:latin typeface="Yu Gothic" pitchFamily="34" charset="0"/>
+                <a:ea typeface="Yu Gothic" pitchFamily="34" charset="-122"/>
+                <a:cs typeface="Yu Gothic" pitchFamily="34" charset="-120"/>
+              </a:rPr>
+              <a:t>ソース　</a:t>
+            </a:r>
+            <a:pPr indent="0" marL="0">
+              <a:buNone/>
+            </a:pPr>
+            <a:r>
+              <a:rPr lang="en-US" sz="750" dirty="0">
+                <a:solidFill>
+                  <a:srgbClr val="5F7183"/>
+                </a:solidFill>
+                <a:latin typeface="Yu Gothic" pitchFamily="34" charset="0"/>
+                <a:ea typeface="Yu Gothic" pitchFamily="34" charset="-122"/>
+                <a:cs typeface="Yu Gothic" pitchFamily="34" charset="-120"/>
+              </a:rPr>
+              <a:t>個人情報保護法、不正競争防止法、経済産業省「営業秘密管理指針」</a:t>
+            </a:r>
+            <a:endParaRPr lang="en-US" sz="750" dirty="0"/>
+          </a:p>
+        </p:txBody>
+      </p:sp>
+      <p:sp>
+        <p:nvSpPr>
+          <p:cNvPr id="31" name="Text 28"/>
+          <p:cNvSpPr/>
+          <p:nvPr/>
+        </p:nvSpPr>
+        <p:spPr>
+          <a:xfrm>
+            <a:off x="640080" y="6492240"/>
+            <a:ext cx="8778240" cy="292608"/>
+          </a:xfrm>
+          <a:prstGeom prst="rect">
+            <a:avLst/>
+          </a:prstGeom>
+          <a:noFill/>
+          <a:ln/>
+        </p:spPr>
+        <p:txBody>
+          <a:bodyPr wrap="square" lIns="0" tIns="0" rIns="0" bIns="0" rtlCol="0" anchor="ctr"/>
+          <a:lstStyle/>
+          <a:p>
+            <a:pPr indent="0" marL="0">
               <a:buNone/>
             </a:pPr>
             <a:r>
               <a:rPr lang="en-US" sz="900" dirty="0">
                 <a:solidFill>
-                  <a:srgbClr val="1B2733"/>
-                </a:solidFill>
-                <a:latin typeface="Yu Gothic" pitchFamily="34" charset="0"/>
-                <a:ea typeface="Yu Gothic" pitchFamily="34" charset="-122"/>
-                <a:cs typeface="Yu Gothic" pitchFamily="34" charset="-120"/>
-              </a:rPr>
-              <a:t>撮影の可否と、社員による撮影への対応は現場ごとに異なる。Site SOPを確認する。</a:t>
+                  <a:srgbClr val="5F7183"/>
+                </a:solidFill>
+                <a:latin typeface="Yu Gothic" pitchFamily="34" charset="0"/>
+                <a:ea typeface="Yu Gothic" pitchFamily="34" charset="-122"/>
+                <a:cs typeface="Yu Gothic" pitchFamily="34" charset="-120"/>
+              </a:rPr>
+              <a:t>第1時限｜基本教育1 警備業務実施の基本原則  </a:t>
+            </a:r>
+            <a:pPr indent="0" marL="0">
+              <a:buNone/>
+            </a:pPr>
+            <a:r>
+              <a:rPr lang="en-US" sz="850" i="1" dirty="0">
+                <a:solidFill>
+                  <a:srgbClr val="D6E0E9"/>
+                </a:solidFill>
+                <a:latin typeface="Calibri" pitchFamily="34" charset="0"/>
+                <a:ea typeface="Calibri" pitchFamily="34" charset="-122"/>
+                <a:cs typeface="Calibri" pitchFamily="34" charset="-120"/>
+              </a:rPr>
+              <a:t>Period 1 | Basic Training 1 — Fundamental Principles</a:t>
             </a:r>
             <a:endParaRPr lang="en-US" sz="900" dirty="0"/>
           </a:p>
-          <a:p>
-            <a:pPr indent="0" marL="0">
-              <a:lnSpc>
-                <a:spcPct val="88000"/>
-              </a:lnSpc>
-              <a:buNone/>
-            </a:pPr>
-            <a:r>
-              <a:rPr lang="en-US" sz="750" i="1" dirty="0">
-                <a:solidFill>
-                  <a:srgbClr val="5F7183"/>
-                </a:solidFill>
-                <a:latin typeface="Calibri" pitchFamily="34" charset="0"/>
-                <a:ea typeface="Calibri" pitchFamily="34" charset="-122"/>
-                <a:cs typeface="Calibri" pitchFamily="34" charset="-120"/>
-              </a:rPr>
-              <a:t>Whether photography is allowed, and how to handle it by employees, differ by site. Check the Site SOP.</a:t>
-            </a:r>
-            <a:endParaRPr lang="en-US" sz="900" dirty="0"/>
-          </a:p>
-        </p:txBody>
-      </p:sp>
-      <p:sp>
-        <p:nvSpPr>
-          <p:cNvPr id="30" name="Text 27"/>
-          <p:cNvSpPr/>
-          <p:nvPr/>
-        </p:nvSpPr>
-        <p:spPr>
-          <a:xfrm>
-            <a:off x="640080" y="6272784"/>
-            <a:ext cx="9905695" cy="237744"/>
-          </a:xfrm>
-          <a:prstGeom prst="rect">
-            <a:avLst/>
-          </a:prstGeom>
-          <a:noFill/>
-          <a:ln/>
-        </p:spPr>
-        <p:txBody>
-          <a:bodyPr wrap="square" lIns="0" tIns="0" rIns="0" bIns="0" rtlCol="0" anchor="t"/>
-          <a:lstStyle/>
-          <a:p>
-            <a:pPr indent="0" marL="0">
-              <a:buNone/>
-            </a:pPr>
-            <a:r>
-              <a:rPr lang="en-US" sz="750" b="1" dirty="0">
-                <a:solidFill>
-                  <a:srgbClr val="D6E0E9"/>
-                </a:solidFill>
-                <a:latin typeface="Yu Gothic" pitchFamily="34" charset="0"/>
-                <a:ea typeface="Yu Gothic" pitchFamily="34" charset="-122"/>
-                <a:cs typeface="Yu Gothic" pitchFamily="34" charset="-120"/>
-              </a:rPr>
-              <a:t>ソース　</a:t>
-            </a:r>
-            <a:pPr indent="0" marL="0">
-              <a:buNone/>
-            </a:pPr>
-            <a:r>
-              <a:rPr lang="en-US" sz="750" dirty="0">
-                <a:solidFill>
-                  <a:srgbClr val="5F7183"/>
-                </a:solidFill>
-                <a:latin typeface="Yu Gothic" pitchFamily="34" charset="0"/>
-                <a:ea typeface="Yu Gothic" pitchFamily="34" charset="-122"/>
-                <a:cs typeface="Yu Gothic" pitchFamily="34" charset="-120"/>
-              </a:rPr>
-              <a:t>個人情報保護法、不正競争防止法、経済産業省「営業秘密管理指針」</a:t>
-            </a:r>
-            <a:endParaRPr lang="en-US" sz="750" dirty="0"/>
-          </a:p>
-        </p:txBody>
-      </p:sp>
-      <p:sp>
-        <p:nvSpPr>
-          <p:cNvPr id="31" name="Text 28"/>
-          <p:cNvSpPr/>
-          <p:nvPr/>
-        </p:nvSpPr>
-        <p:spPr>
-          <a:xfrm>
-            <a:off x="640080" y="6382512"/>
-            <a:ext cx="8778240" cy="292608"/>
-          </a:xfrm>
-          <a:prstGeom prst="rect">
-            <a:avLst/>
-          </a:prstGeom>
-          <a:noFill/>
-          <a:ln/>
-        </p:spPr>
-        <p:txBody>
-          <a:bodyPr wrap="square" lIns="0" tIns="0" rIns="0" bIns="0" rtlCol="0" anchor="ctr"/>
-          <a:lstStyle/>
-          <a:p>
-            <a:pPr indent="0" marL="0">
-              <a:buNone/>
-            </a:pPr>
-            <a:r>
-              <a:rPr lang="en-US" sz="900" dirty="0">
-                <a:solidFill>
-                  <a:srgbClr val="5F7183"/>
-                </a:solidFill>
-                <a:latin typeface="Yu Gothic" pitchFamily="34" charset="0"/>
-                <a:ea typeface="Yu Gothic" pitchFamily="34" charset="-122"/>
-                <a:cs typeface="Yu Gothic" pitchFamily="34" charset="-120"/>
-              </a:rPr>
-              <a:t>第1時限｜基本教育1 警備業務実施の基本原則  </a:t>
-            </a:r>
-            <a:pPr indent="0" marL="0">
-              <a:buNone/>
-            </a:pPr>
-            <a:r>
-              <a:rPr lang="en-US" sz="850" i="1" dirty="0">
-                <a:solidFill>
-                  <a:srgbClr val="D6E0E9"/>
-                </a:solidFill>
-                <a:latin typeface="Calibri" pitchFamily="34" charset="0"/>
-                <a:ea typeface="Calibri" pitchFamily="34" charset="-122"/>
-                <a:cs typeface="Calibri" pitchFamily="34" charset="-120"/>
-              </a:rPr>
-              <a:t>Period 1 | Basic Training 1 — Fundamental Principles</a:t>
-            </a:r>
-            <a:endParaRPr lang="en-US" sz="900" dirty="0"/>
-          </a:p>
         </p:txBody>
       </p:sp>
       <p:sp>
@@ -4940,7 +4940,7 @@
         </p:nvSpPr>
         <p:spPr>
           <a:xfrm>
-            <a:off x="10637215" y="6382512"/>
+            <a:off x="10637215" y="6492240"/>
             <a:ext cx="914400" cy="292608"/>
           </a:xfrm>
           <a:prstGeom prst="rect">
@@ -5035,8 +5035,8 @@
         </p:nvSpPr>
         <p:spPr>
           <a:xfrm>
-            <a:off x="640080" y="384048"/>
-            <a:ext cx="8982151" cy="768096"/>
+            <a:off x="640080" y="365760"/>
+            <a:ext cx="8982151" cy="749808"/>
           </a:xfrm>
           <a:prstGeom prst="rect">
             <a:avLst/>
@@ -5075,7 +5075,7 @@
               <a:buNone/>
             </a:pPr>
             <a:r>
-              <a:rPr lang="en-US" sz="1100" i="1" dirty="0">
+              <a:rPr lang="en-US" sz="1100" dirty="0">
                 <a:solidFill>
                   <a:srgbClr val="12B198"/>
                 </a:solidFill>
@@ -5097,7 +5097,7 @@
         </p:nvSpPr>
         <p:spPr>
           <a:xfrm>
-            <a:off x="9686239" y="438912"/>
+            <a:off x="9686239" y="420624"/>
             <a:ext cx="932688" cy="310896"/>
           </a:xfrm>
           <a:prstGeom prst="roundRect">
@@ -5119,7 +5119,7 @@
         </p:nvSpPr>
         <p:spPr>
           <a:xfrm>
-            <a:off x="9686239" y="438912"/>
+            <a:off x="9686239" y="420624"/>
             <a:ext cx="932688" cy="310896"/>
           </a:xfrm>
           <a:prstGeom prst="rect">
@@ -5158,12 +5158,12 @@
         </p:nvSpPr>
         <p:spPr>
           <a:xfrm>
-            <a:off x="640080" y="1188720"/>
-            <a:ext cx="10911535" cy="825246"/>
+            <a:off x="640080" y="1115568"/>
+            <a:ext cx="10911535" cy="857250"/>
           </a:xfrm>
           <a:prstGeom prst="roundRect">
             <a:avLst>
-              <a:gd name="adj" fmla="val 4432"/>
+              <a:gd name="adj" fmla="val 4267"/>
             </a:avLst>
           </a:prstGeom>
           <a:solidFill>
@@ -5180,7 +5180,7 @@
         </p:nvSpPr>
         <p:spPr>
           <a:xfrm>
-            <a:off x="841248" y="1427607"/>
+            <a:off x="841248" y="1370457"/>
             <a:ext cx="347472" cy="347472"/>
           </a:xfrm>
           <a:prstGeom prst="ellipse">
@@ -5200,7 +5200,7 @@
         </p:nvSpPr>
         <p:spPr>
           <a:xfrm>
-            <a:off x="841248" y="1427607"/>
+            <a:off x="841248" y="1370457"/>
             <a:ext cx="347472" cy="347472"/>
           </a:xfrm>
           <a:prstGeom prst="rect">
@@ -5239,8 +5239,8 @@
         </p:nvSpPr>
         <p:spPr>
           <a:xfrm>
-            <a:off x="1280160" y="1252728"/>
-            <a:ext cx="10033711" cy="697230"/>
+            <a:off x="1280160" y="1179576"/>
+            <a:ext cx="10033711" cy="729234"/>
           </a:xfrm>
           <a:prstGeom prst="rect">
             <a:avLst/>
@@ -5259,7 +5259,7 @@
               <a:buNone/>
             </a:pPr>
             <a:r>
-              <a:rPr lang="en-US" sz="900" dirty="0">
+              <a:rPr lang="en-US" sz="950" dirty="0">
                 <a:solidFill>
                   <a:srgbClr val="5F7183"/>
                 </a:solidFill>
@@ -5269,7 +5269,7 @@
               </a:rPr>
               <a:t>問1　社員証は撮影の根拠になるか</a:t>
             </a:r>
-            <a:endParaRPr lang="en-US" sz="900" dirty="0"/>
+            <a:endParaRPr lang="en-US" sz="950" dirty="0"/>
           </a:p>
           <a:p>
             <a:pPr indent="0" marL="0">
@@ -5289,7 +5289,7 @@
               </a:rPr>
               <a:t>ならない。社員証は入館の資格を示すだけで、撮影の可否とは別の問題。</a:t>
             </a:r>
-            <a:endParaRPr lang="en-US" sz="900" dirty="0"/>
+            <a:endParaRPr lang="en-US" sz="950" dirty="0"/>
           </a:p>
           <a:p>
             <a:pPr indent="0" marL="0">
@@ -5299,9 +5299,9 @@
               <a:buNone/>
             </a:pPr>
             <a:r>
-              <a:rPr lang="en-US" sz="800" i="1" dirty="0">
-                <a:solidFill>
-                  <a:srgbClr val="5F7183"/>
+              <a:rPr lang="en-US" sz="1100" dirty="0">
+                <a:solidFill>
+                  <a:srgbClr val="1B2733"/>
                 </a:solidFill>
                 <a:latin typeface="Calibri" pitchFamily="34" charset="0"/>
                 <a:ea typeface="Calibri" pitchFamily="34" charset="-122"/>
@@ -5309,7 +5309,7 @@
               </a:rPr>
               <a:t>No. A badge shows a right of entry. Whether they may photograph is separate.</a:t>
             </a:r>
-            <a:endParaRPr lang="en-US" sz="900" dirty="0"/>
+            <a:endParaRPr lang="en-US" sz="950" dirty="0"/>
           </a:p>
         </p:txBody>
       </p:sp>
@@ -5321,12 +5321,12 @@
         </p:nvSpPr>
         <p:spPr>
           <a:xfrm>
-            <a:off x="640080" y="2114550"/>
-            <a:ext cx="10911535" cy="825246"/>
+            <a:off x="640080" y="2073402"/>
+            <a:ext cx="10911535" cy="857250"/>
           </a:xfrm>
           <a:prstGeom prst="roundRect">
             <a:avLst>
-              <a:gd name="adj" fmla="val 4432"/>
+              <a:gd name="adj" fmla="val 4267"/>
             </a:avLst>
           </a:prstGeom>
           <a:solidFill>
@@ -5343,7 +5343,7 @@
         </p:nvSpPr>
         <p:spPr>
           <a:xfrm>
-            <a:off x="841248" y="2353437"/>
+            <a:off x="841248" y="2328291"/>
             <a:ext cx="347472" cy="347472"/>
           </a:xfrm>
           <a:prstGeom prst="ellipse">
@@ -5363,7 +5363,7 @@
         </p:nvSpPr>
         <p:spPr>
           <a:xfrm>
-            <a:off x="841248" y="2353437"/>
+            <a:off x="841248" y="2328291"/>
             <a:ext cx="347472" cy="347472"/>
           </a:xfrm>
           <a:prstGeom prst="rect">
@@ -5402,8 +5402,8 @@
         </p:nvSpPr>
         <p:spPr>
           <a:xfrm>
-            <a:off x="1280160" y="2178558"/>
-            <a:ext cx="10033711" cy="697230"/>
+            <a:off x="1280160" y="2137410"/>
+            <a:ext cx="10033711" cy="729234"/>
           </a:xfrm>
           <a:prstGeom prst="rect">
             <a:avLst/>
@@ -5422,7 +5422,7 @@
               <a:buNone/>
             </a:pPr>
             <a:r>
-              <a:rPr lang="en-US" sz="900" dirty="0">
+              <a:rPr lang="en-US" sz="950" dirty="0">
                 <a:solidFill>
                   <a:srgbClr val="5F7183"/>
                 </a:solidFill>
@@ -5432,7 +5432,7 @@
               </a:rPr>
               <a:t>問2　中止を求められるか</a:t>
             </a:r>
-            <a:endParaRPr lang="en-US" sz="900" dirty="0"/>
+            <a:endParaRPr lang="en-US" sz="950" dirty="0"/>
           </a:p>
           <a:p>
             <a:pPr indent="0" marL="0">
@@ -5452,7 +5452,7 @@
               </a:rPr>
               <a:t>求められる。根拠は管理権者から委ねられた撮影禁止の運用。</a:t>
             </a:r>
-            <a:endParaRPr lang="en-US" sz="900" dirty="0"/>
+            <a:endParaRPr lang="en-US" sz="950" dirty="0"/>
           </a:p>
           <a:p>
             <a:pPr indent="0" marL="0">
@@ -5462,9 +5462,9 @@
               <a:buNone/>
             </a:pPr>
             <a:r>
-              <a:rPr lang="en-US" sz="800" i="1" dirty="0">
-                <a:solidFill>
-                  <a:srgbClr val="5F7183"/>
+              <a:rPr lang="en-US" sz="1100" dirty="0">
+                <a:solidFill>
+                  <a:srgbClr val="1B2733"/>
                 </a:solidFill>
                 <a:latin typeface="Calibri" pitchFamily="34" charset="0"/>
                 <a:ea typeface="Calibri" pitchFamily="34" charset="-122"/>
@@ -5472,7 +5472,7 @@
               </a:rPr>
               <a:t>Yes. The basis is the no-photography rule delegated by the site authority.</a:t>
             </a:r>
-            <a:endParaRPr lang="en-US" sz="900" dirty="0"/>
+            <a:endParaRPr lang="en-US" sz="950" dirty="0"/>
           </a:p>
         </p:txBody>
       </p:sp>
@@ -5484,12 +5484,12 @@
         </p:nvSpPr>
         <p:spPr>
           <a:xfrm>
-            <a:off x="640080" y="3040380"/>
-            <a:ext cx="10911535" cy="825246"/>
+            <a:off x="640080" y="3031236"/>
+            <a:ext cx="10911535" cy="857250"/>
           </a:xfrm>
           <a:prstGeom prst="roundRect">
             <a:avLst>
-              <a:gd name="adj" fmla="val 4432"/>
+              <a:gd name="adj" fmla="val 4267"/>
             </a:avLst>
           </a:prstGeom>
           <a:solidFill>
@@ -5506,7 +5506,7 @@
         </p:nvSpPr>
         <p:spPr>
           <a:xfrm>
-            <a:off x="841248" y="3279267"/>
+            <a:off x="841248" y="3286125"/>
             <a:ext cx="347472" cy="347472"/>
           </a:xfrm>
           <a:prstGeom prst="ellipse">
@@ -5526,7 +5526,7 @@
         </p:nvSpPr>
         <p:spPr>
           <a:xfrm>
-            <a:off x="841248" y="3279267"/>
+            <a:off x="841248" y="3286125"/>
             <a:ext cx="347472" cy="347472"/>
           </a:xfrm>
           <a:prstGeom prst="rect">
@@ -5565,8 +5565,8 @@
         </p:nvSpPr>
         <p:spPr>
           <a:xfrm>
-            <a:off x="1280160" y="3104388"/>
-            <a:ext cx="10033711" cy="697230"/>
+            <a:off x="1280160" y="3095244"/>
+            <a:ext cx="10033711" cy="729234"/>
           </a:xfrm>
           <a:prstGeom prst="rect">
             <a:avLst/>
@@ -5585,7 +5585,7 @@
               <a:buNone/>
             </a:pPr>
             <a:r>
-              <a:rPr lang="en-US" sz="900" dirty="0">
+              <a:rPr lang="en-US" sz="950" dirty="0">
                 <a:solidFill>
                   <a:srgbClr val="5F7183"/>
                 </a:solidFill>
@@ -5595,7 +5595,7 @@
               </a:rPr>
               <a:t>問3　削除を求めてよいか</a:t>
             </a:r>
-            <a:endParaRPr lang="en-US" sz="900" dirty="0"/>
+            <a:endParaRPr lang="en-US" sz="950" dirty="0"/>
           </a:p>
           <a:p>
             <a:pPr indent="0" marL="0">
@@ -5615,7 +5615,7 @@
               </a:rPr>
               <a:t>求められない。端末の中身は相手の管理下。応じない場合も引き止めない。</a:t>
             </a:r>
-            <a:endParaRPr lang="en-US" sz="900" dirty="0"/>
+            <a:endParaRPr lang="en-US" sz="950" dirty="0"/>
           </a:p>
           <a:p>
             <a:pPr indent="0" marL="0">
@@ -5625,9 +5625,9 @@
               <a:buNone/>
             </a:pPr>
             <a:r>
-              <a:rPr lang="en-US" sz="800" i="1" dirty="0">
-                <a:solidFill>
-                  <a:srgbClr val="5F7183"/>
+              <a:rPr lang="en-US" sz="1100" dirty="0">
+                <a:solidFill>
+                  <a:srgbClr val="1B2733"/>
                 </a:solidFill>
                 <a:latin typeface="Calibri" pitchFamily="34" charset="0"/>
                 <a:ea typeface="Calibri" pitchFamily="34" charset="-122"/>
@@ -5635,7 +5635,7 @@
               </a:rPr>
               <a:t>No. The device is theirs. If they refuse, do not detain them.</a:t>
             </a:r>
-            <a:endParaRPr lang="en-US" sz="900" dirty="0"/>
+            <a:endParaRPr lang="en-US" sz="950" dirty="0"/>
           </a:p>
         </p:txBody>
       </p:sp>
@@ -5647,12 +5647,12 @@
         </p:nvSpPr>
         <p:spPr>
           <a:xfrm>
-            <a:off x="640080" y="3966210"/>
-            <a:ext cx="10911535" cy="825246"/>
+            <a:off x="640080" y="3989070"/>
+            <a:ext cx="10911535" cy="857250"/>
           </a:xfrm>
           <a:prstGeom prst="roundRect">
             <a:avLst>
-              <a:gd name="adj" fmla="val 4432"/>
+              <a:gd name="adj" fmla="val 4267"/>
             </a:avLst>
           </a:prstGeom>
           <a:solidFill>
@@ -5669,7 +5669,7 @@
         </p:nvSpPr>
         <p:spPr>
           <a:xfrm>
-            <a:off x="841248" y="4205097"/>
+            <a:off x="841248" y="4243959"/>
             <a:ext cx="347472" cy="347472"/>
           </a:xfrm>
           <a:prstGeom prst="ellipse">
@@ -5689,7 +5689,7 @@
         </p:nvSpPr>
         <p:spPr>
           <a:xfrm>
-            <a:off x="841248" y="4205097"/>
+            <a:off x="841248" y="4243959"/>
             <a:ext cx="347472" cy="347472"/>
           </a:xfrm>
           <a:prstGeom prst="rect">
@@ -5728,8 +5728,8 @@
         </p:nvSpPr>
         <p:spPr>
           <a:xfrm>
-            <a:off x="1280160" y="4030218"/>
-            <a:ext cx="10033711" cy="697230"/>
+            <a:off x="1280160" y="4053078"/>
+            <a:ext cx="10033711" cy="729234"/>
           </a:xfrm>
           <a:prstGeom prst="rect">
             <a:avLst/>
@@ -5748,7 +5748,7 @@
               <a:buNone/>
             </a:pPr>
             <a:r>
-              <a:rPr lang="en-US" sz="900" dirty="0">
+              <a:rPr lang="en-US" sz="950" dirty="0">
                 <a:solidFill>
                   <a:srgbClr val="5F7183"/>
                 </a:solidFill>
@@ -5758,7 +5758,7 @@
               </a:rPr>
               <a:t>問4　報告するか。何を書くか</a:t>
             </a:r>
-            <a:endParaRPr lang="en-US" sz="900" dirty="0"/>
+            <a:endParaRPr lang="en-US" sz="950" dirty="0"/>
           </a:p>
           <a:p>
             <a:pPr indent="0" marL="0">
@@ -5778,7 +5778,7 @@
               </a:rPr>
               <a:t>報告する。時刻、場所、撮影対象、社員証の氏名、発言をそのまま記録する。</a:t>
             </a:r>
-            <a:endParaRPr lang="en-US" sz="900" dirty="0"/>
+            <a:endParaRPr lang="en-US" sz="950" dirty="0"/>
           </a:p>
           <a:p>
             <a:pPr indent="0" marL="0">
@@ -5788,9 +5788,9 @@
               <a:buNone/>
             </a:pPr>
             <a:r>
-              <a:rPr lang="en-US" sz="800" i="1" dirty="0">
-                <a:solidFill>
-                  <a:srgbClr val="5F7183"/>
+              <a:rPr lang="en-US" sz="1100" dirty="0">
+                <a:solidFill>
+                  <a:srgbClr val="1B2733"/>
                 </a:solidFill>
                 <a:latin typeface="Calibri" pitchFamily="34" charset="0"/>
                 <a:ea typeface="Calibri" pitchFamily="34" charset="-122"/>
@@ -5798,7 +5798,7 @@
               </a:rPr>
               <a:t>Yes. Record the time, place, what was photographed, the name on the badge, and their words verbatim.</a:t>
             </a:r>
-            <a:endParaRPr lang="en-US" sz="900" dirty="0"/>
+            <a:endParaRPr lang="en-US" sz="950" dirty="0"/>
           </a:p>
         </p:txBody>
       </p:sp>
@@ -5810,7 +5810,7 @@
         </p:nvSpPr>
         <p:spPr>
           <a:xfrm>
-            <a:off x="640080" y="4901184"/>
+            <a:off x="640080" y="4956048"/>
             <a:ext cx="10911535" cy="420624"/>
           </a:xfrm>
           <a:prstGeom prst="roundRect">
@@ -5832,7 +5832,7 @@
         </p:nvSpPr>
         <p:spPr>
           <a:xfrm>
-            <a:off x="859536" y="4928616"/>
+            <a:off x="859536" y="4983480"/>
             <a:ext cx="10472623" cy="365760"/>
           </a:xfrm>
           <a:prstGeom prst="rect">
@@ -5906,9 +5906,9 @@
               <a:buNone/>
             </a:pPr>
             <a:r>
-              <a:rPr lang="en-US" sz="750" i="1" dirty="0">
-                <a:solidFill>
-                  <a:srgbClr val="5F7183"/>
+              <a:rPr lang="en-US" sz="950" dirty="0">
+                <a:solidFill>
+                  <a:srgbClr val="1B2733"/>
                 </a:solidFill>
                 <a:latin typeface="Calibri" pitchFamily="34" charset="0"/>
                 <a:ea typeface="Calibri" pitchFamily="34" charset="-122"/>
@@ -5928,7 +5928,7 @@
         </p:nvSpPr>
         <p:spPr>
           <a:xfrm>
-            <a:off x="640080" y="5394960"/>
+            <a:off x="640080" y="5449824"/>
             <a:ext cx="10911535" cy="420624"/>
           </a:xfrm>
           <a:prstGeom prst="roundRect">
@@ -5950,7 +5950,7 @@
         </p:nvSpPr>
         <p:spPr>
           <a:xfrm>
-            <a:off x="859536" y="5422392"/>
+            <a:off x="859536" y="5477256"/>
             <a:ext cx="10472623" cy="365760"/>
           </a:xfrm>
           <a:prstGeom prst="rect">
@@ -6024,7 +6024,86 @@
               <a:buNone/>
             </a:pPr>
             <a:r>
-              <a:rPr lang="en-US" sz="750" i="1" dirty="0">
+              <a:rPr lang="en-US" sz="950" dirty="0">
+                <a:solidFill>
+                  <a:srgbClr val="1B2733"/>
+                </a:solidFill>
+                <a:latin typeface="Calibri" pitchFamily="34" charset="0"/>
+                <a:ea typeface="Calibri" pitchFamily="34" charset="-122"/>
+                <a:cs typeface="Calibri" pitchFamily="34" charset="-120"/>
+              </a:rPr>
+              <a:t>Your response was not wrong. Verifying is a procedure, not an accusation.</a:t>
+            </a:r>
+            <a:endParaRPr lang="en-US" sz="850" dirty="0"/>
+          </a:p>
+        </p:txBody>
+      </p:sp>
+      <p:sp>
+        <p:nvSpPr>
+          <p:cNvPr id="26" name="Text 23"/>
+          <p:cNvSpPr/>
+          <p:nvPr/>
+        </p:nvSpPr>
+        <p:spPr>
+          <a:xfrm>
+            <a:off x="640080" y="5961888"/>
+            <a:ext cx="10911535" cy="292608"/>
+          </a:xfrm>
+          <a:prstGeom prst="rect">
+            <a:avLst/>
+          </a:prstGeom>
+          <a:noFill/>
+          <a:ln/>
+        </p:spPr>
+        <p:txBody>
+          <a:bodyPr wrap="square" lIns="0" tIns="0" rIns="0" bIns="0" rtlCol="0" anchor="t"/>
+          <a:lstStyle/>
+          <a:p>
+            <a:pPr indent="0" marL="0">
+              <a:lnSpc>
+                <a:spcPct val="88000"/>
+              </a:lnSpc>
+              <a:buNone/>
+            </a:pPr>
+            <a:r>
+              <a:rPr lang="en-US" sz="900" b="1" dirty="0">
+                <a:solidFill>
+                  <a:srgbClr val="0D8A76"/>
+                </a:solidFill>
+                <a:latin typeface="Yu Gothic" pitchFamily="34" charset="0"/>
+                <a:ea typeface="Yu Gothic" pitchFamily="34" charset="-122"/>
+                <a:cs typeface="Yu Gothic" pitchFamily="34" charset="-120"/>
+              </a:rPr>
+              <a:t>注記　</a:t>
+            </a:r>
+            <a:pPr indent="0" marL="0">
+              <a:lnSpc>
+                <a:spcPct val="88000"/>
+              </a:lnSpc>
+              <a:buNone/>
+            </a:pPr>
+            <a:r>
+              <a:rPr lang="en-US" sz="900" dirty="0">
+                <a:solidFill>
+                  <a:srgbClr val="1B2733"/>
+                </a:solidFill>
+                <a:latin typeface="Yu Gothic" pitchFamily="34" charset="0"/>
+                <a:ea typeface="Yu Gothic" pitchFamily="34" charset="-122"/>
+                <a:cs typeface="Yu Gothic" pitchFamily="34" charset="-120"/>
+              </a:rPr>
+              <a:t>模範解答は判断の型を示すものです。実際の手順は各現場のSite SOPと警備指令書が優先します。</a:t>
+            </a:r>
+            <a:endParaRPr lang="en-US" sz="900" dirty="0"/>
+          </a:p>
+          <a:p>
+            <a:pPr indent="0" marL="0">
+              <a:lnSpc>
+                <a:spcPct val="88000"/>
+              </a:lnSpc>
+              <a:buNone/>
+            </a:pPr>
+            <a:r>
+              <a:rPr lang="en-US" sz="800" i="1" dirty="0">
                 <a:solidFill>
                   <a:srgbClr val="5F7183"/>
                 </a:solidFill>
@@ -6032,22 +6111,22 @@
                 <a:ea typeface="Calibri" pitchFamily="34" charset="-122"/>
                 <a:cs typeface="Calibri" pitchFamily="34" charset="-120"/>
               </a:rPr>
-              <a:t>Your response was not wrong. Verifying is a procedure, not an accusation.</a:t>
-            </a:r>
-            <a:endParaRPr lang="en-US" sz="850" dirty="0"/>
-          </a:p>
-        </p:txBody>
-      </p:sp>
-      <p:sp>
-        <p:nvSpPr>
-          <p:cNvPr id="26" name="Text 23"/>
-          <p:cNvSpPr/>
-          <p:nvPr/>
-        </p:nvSpPr>
-        <p:spPr>
-          <a:xfrm>
-            <a:off x="640080" y="5907024"/>
-            <a:ext cx="10911535" cy="310896"/>
+              <a:t>These answers show a pattern of reasoning. The Site SOP and post orders always take precedence.</a:t>
+            </a:r>
+            <a:endParaRPr lang="en-US" sz="900" dirty="0"/>
+          </a:p>
+        </p:txBody>
+      </p:sp>
+      <p:sp>
+        <p:nvSpPr>
+          <p:cNvPr id="27" name="Text 24"/>
+          <p:cNvSpPr/>
+          <p:nvPr/>
+        </p:nvSpPr>
+        <p:spPr>
+          <a:xfrm>
+            <a:off x="640080" y="6272784"/>
+            <a:ext cx="9905695" cy="219456"/>
           </a:xfrm>
           <a:prstGeom prst="rect">
             <a:avLst/>
@@ -6060,167 +6139,88 @@
           <a:lstStyle/>
           <a:p>
             <a:pPr indent="0" marL="0">
-              <a:lnSpc>
-                <a:spcPct val="88000"/>
-              </a:lnSpc>
-              <a:buNone/>
-            </a:pPr>
-            <a:r>
-              <a:rPr lang="en-US" sz="900" b="1" dirty="0">
-                <a:solidFill>
-                  <a:srgbClr val="0D8A76"/>
-                </a:solidFill>
-                <a:latin typeface="Yu Gothic" pitchFamily="34" charset="0"/>
-                <a:ea typeface="Yu Gothic" pitchFamily="34" charset="-122"/>
-                <a:cs typeface="Yu Gothic" pitchFamily="34" charset="-120"/>
-              </a:rPr>
-              <a:t>注記　</a:t>
-            </a:r>
-            <a:pPr indent="0" marL="0">
-              <a:lnSpc>
-                <a:spcPct val="88000"/>
-              </a:lnSpc>
+              <a:buNone/>
+            </a:pPr>
+            <a:r>
+              <a:rPr lang="en-US" sz="750" b="1" dirty="0">
+                <a:solidFill>
+                  <a:srgbClr val="D6E0E9"/>
+                </a:solidFill>
+                <a:latin typeface="Yu Gothic" pitchFamily="34" charset="0"/>
+                <a:ea typeface="Yu Gothic" pitchFamily="34" charset="-122"/>
+                <a:cs typeface="Yu Gothic" pitchFamily="34" charset="-120"/>
+              </a:rPr>
+              <a:t>ソース　</a:t>
+            </a:r>
+            <a:pPr indent="0" marL="0">
+              <a:buNone/>
+            </a:pPr>
+            <a:r>
+              <a:rPr lang="en-US" sz="750" dirty="0">
+                <a:solidFill>
+                  <a:srgbClr val="5F7183"/>
+                </a:solidFill>
+                <a:latin typeface="Yu Gothic" pitchFamily="34" charset="0"/>
+                <a:ea typeface="Yu Gothic" pitchFamily="34" charset="-122"/>
+                <a:cs typeface="Yu Gothic" pitchFamily="34" charset="-120"/>
+              </a:rPr>
+              <a:t>警備業法、個人情報保護法、不正競争防止法</a:t>
+            </a:r>
+            <a:endParaRPr lang="en-US" sz="750" dirty="0"/>
+          </a:p>
+        </p:txBody>
+      </p:sp>
+      <p:sp>
+        <p:nvSpPr>
+          <p:cNvPr id="28" name="Text 25"/>
+          <p:cNvSpPr/>
+          <p:nvPr/>
+        </p:nvSpPr>
+        <p:spPr>
+          <a:xfrm>
+            <a:off x="640080" y="6492240"/>
+            <a:ext cx="8778240" cy="292608"/>
+          </a:xfrm>
+          <a:prstGeom prst="rect">
+            <a:avLst/>
+          </a:prstGeom>
+          <a:noFill/>
+          <a:ln/>
+        </p:spPr>
+        <p:txBody>
+          <a:bodyPr wrap="square" lIns="0" tIns="0" rIns="0" bIns="0" rtlCol="0" anchor="ctr"/>
+          <a:lstStyle/>
+          <a:p>
+            <a:pPr indent="0" marL="0">
               <a:buNone/>
             </a:pPr>
             <a:r>
               <a:rPr lang="en-US" sz="900" dirty="0">
                 <a:solidFill>
-                  <a:srgbClr val="1B2733"/>
-                </a:solidFill>
-                <a:latin typeface="Yu Gothic" pitchFamily="34" charset="0"/>
-                <a:ea typeface="Yu Gothic" pitchFamily="34" charset="-122"/>
-                <a:cs typeface="Yu Gothic" pitchFamily="34" charset="-120"/>
-              </a:rPr>
-              <a:t>模範解答は判断の型を示すものです。実際の手順は各現場のSite SOPと警備指令書が優先します。</a:t>
+                  <a:srgbClr val="5F7183"/>
+                </a:solidFill>
+                <a:latin typeface="Yu Gothic" pitchFamily="34" charset="0"/>
+                <a:ea typeface="Yu Gothic" pitchFamily="34" charset="-122"/>
+                <a:cs typeface="Yu Gothic" pitchFamily="34" charset="-120"/>
+              </a:rPr>
+              <a:t>第1時限｜基本教育1 警備業務実施の基本原則  </a:t>
+            </a:r>
+            <a:pPr indent="0" marL="0">
+              <a:buNone/>
+            </a:pPr>
+            <a:r>
+              <a:rPr lang="en-US" sz="850" i="1" dirty="0">
+                <a:solidFill>
+                  <a:srgbClr val="D6E0E9"/>
+                </a:solidFill>
+                <a:latin typeface="Calibri" pitchFamily="34" charset="0"/>
+                <a:ea typeface="Calibri" pitchFamily="34" charset="-122"/>
+                <a:cs typeface="Calibri" pitchFamily="34" charset="-120"/>
+              </a:rPr>
+              <a:t>Period 1 | Basic Training 1 — Fundamental Principles</a:t>
             </a:r>
             <a:endParaRPr lang="en-US" sz="900" dirty="0"/>
           </a:p>
-          <a:p>
-            <a:pPr indent="0" marL="0">
-              <a:lnSpc>
-                <a:spcPct val="88000"/>
-              </a:lnSpc>
-              <a:buNone/>
-            </a:pPr>
-            <a:r>
-              <a:rPr lang="en-US" sz="750" i="1" dirty="0">
-                <a:solidFill>
-                  <a:srgbClr val="5F7183"/>
-                </a:solidFill>
-                <a:latin typeface="Calibri" pitchFamily="34" charset="0"/>
-                <a:ea typeface="Calibri" pitchFamily="34" charset="-122"/>
-                <a:cs typeface="Calibri" pitchFamily="34" charset="-120"/>
-              </a:rPr>
-              <a:t>These answers show a pattern of reasoning. The Site SOP and post orders always take precedence.</a:t>
-            </a:r>
-            <a:endParaRPr lang="en-US" sz="900" dirty="0"/>
-          </a:p>
-        </p:txBody>
-      </p:sp>
-      <p:sp>
-        <p:nvSpPr>
-          <p:cNvPr id="27" name="Text 24"/>
-          <p:cNvSpPr/>
-          <p:nvPr/>
-        </p:nvSpPr>
-        <p:spPr>
-          <a:xfrm>
-            <a:off x="640080" y="6272784"/>
-            <a:ext cx="9905695" cy="237744"/>
-          </a:xfrm>
-          <a:prstGeom prst="rect">
-            <a:avLst/>
-          </a:prstGeom>
-          <a:noFill/>
-          <a:ln/>
-        </p:spPr>
-        <p:txBody>
-          <a:bodyPr wrap="square" lIns="0" tIns="0" rIns="0" bIns="0" rtlCol="0" anchor="t"/>
-          <a:lstStyle/>
-          <a:p>
-            <a:pPr indent="0" marL="0">
-              <a:buNone/>
-            </a:pPr>
-            <a:r>
-              <a:rPr lang="en-US" sz="750" b="1" dirty="0">
-                <a:solidFill>
-                  <a:srgbClr val="D6E0E9"/>
-                </a:solidFill>
-                <a:latin typeface="Yu Gothic" pitchFamily="34" charset="0"/>
-                <a:ea typeface="Yu Gothic" pitchFamily="34" charset="-122"/>
-                <a:cs typeface="Yu Gothic" pitchFamily="34" charset="-120"/>
-              </a:rPr>
-              <a:t>ソース　</a:t>
-            </a:r>
-            <a:pPr indent="0" marL="0">
-              <a:buNone/>
-            </a:pPr>
-            <a:r>
-              <a:rPr lang="en-US" sz="750" dirty="0">
-                <a:solidFill>
-                  <a:srgbClr val="5F7183"/>
-                </a:solidFill>
-                <a:latin typeface="Yu Gothic" pitchFamily="34" charset="0"/>
-                <a:ea typeface="Yu Gothic" pitchFamily="34" charset="-122"/>
-                <a:cs typeface="Yu Gothic" pitchFamily="34" charset="-120"/>
-              </a:rPr>
-              <a:t>警備業法、個人情報保護法、不正競争防止法</a:t>
-            </a:r>
-            <a:endParaRPr lang="en-US" sz="750" dirty="0"/>
-          </a:p>
-        </p:txBody>
-      </p:sp>
-      <p:sp>
-        <p:nvSpPr>
-          <p:cNvPr id="28" name="Text 25"/>
-          <p:cNvSpPr/>
-          <p:nvPr/>
-        </p:nvSpPr>
-        <p:spPr>
-          <a:xfrm>
-            <a:off x="640080" y="6382512"/>
-            <a:ext cx="8778240" cy="292608"/>
-          </a:xfrm>
-          <a:prstGeom prst="rect">
-            <a:avLst/>
-          </a:prstGeom>
-          <a:noFill/>
-          <a:ln/>
-        </p:spPr>
-        <p:txBody>
-          <a:bodyPr wrap="square" lIns="0" tIns="0" rIns="0" bIns="0" rtlCol="0" anchor="ctr"/>
-          <a:lstStyle/>
-          <a:p>
-            <a:pPr indent="0" marL="0">
-              <a:buNone/>
-            </a:pPr>
-            <a:r>
-              <a:rPr lang="en-US" sz="900" dirty="0">
-                <a:solidFill>
-                  <a:srgbClr val="5F7183"/>
-                </a:solidFill>
-                <a:latin typeface="Yu Gothic" pitchFamily="34" charset="0"/>
-                <a:ea typeface="Yu Gothic" pitchFamily="34" charset="-122"/>
-                <a:cs typeface="Yu Gothic" pitchFamily="34" charset="-120"/>
-              </a:rPr>
-              <a:t>第1時限｜基本教育1 警備業務実施の基本原則  </a:t>
-            </a:r>
-            <a:pPr indent="0" marL="0">
-              <a:buNone/>
-            </a:pPr>
-            <a:r>
-              <a:rPr lang="en-US" sz="850" i="1" dirty="0">
-                <a:solidFill>
-                  <a:srgbClr val="D6E0E9"/>
-                </a:solidFill>
-                <a:latin typeface="Calibri" pitchFamily="34" charset="0"/>
-                <a:ea typeface="Calibri" pitchFamily="34" charset="-122"/>
-                <a:cs typeface="Calibri" pitchFamily="34" charset="-120"/>
-              </a:rPr>
-              <a:t>Period 1 | Basic Training 1 — Fundamental Principles</a:t>
-            </a:r>
-            <a:endParaRPr lang="en-US" sz="900" dirty="0"/>
-          </a:p>
         </p:txBody>
       </p:sp>
       <p:sp>
@@ -6231,7 +6231,7 @@
         </p:nvSpPr>
         <p:spPr>
           <a:xfrm>
-            <a:off x="10637215" y="6382512"/>
+            <a:off x="10637215" y="6492240"/>
             <a:ext cx="914400" cy="292608"/>
           </a:xfrm>
           <a:prstGeom prst="rect">
@@ -6388,7 +6388,7 @@
               <a:buNone/>
             </a:pPr>
             <a:r>
-              <a:rPr lang="en-US" sz="1300" i="1" dirty="0">
+              <a:rPr lang="en-US" sz="1300" dirty="0">
                 <a:solidFill>
                   <a:srgbClr val="9FD8CD"/>
                 </a:solidFill>
@@ -6531,7 +6531,7 @@
               <a:buNone/>
             </a:pPr>
             <a:r>
-              <a:rPr lang="en-US" sz="1050" i="1" dirty="0">
+              <a:rPr lang="en-US" sz="1050" dirty="0">
                 <a:solidFill>
                   <a:srgbClr val="9FB6CB"/>
                 </a:solidFill>
@@ -6674,7 +6674,7 @@
               <a:buNone/>
             </a:pPr>
             <a:r>
-              <a:rPr lang="en-US" sz="1050" i="1" dirty="0">
+              <a:rPr lang="en-US" sz="1050" dirty="0">
                 <a:solidFill>
                   <a:srgbClr val="9FB6CB"/>
                 </a:solidFill>
@@ -6817,7 +6817,7 @@
               <a:buNone/>
             </a:pPr>
             <a:r>
-              <a:rPr lang="en-US" sz="1050" i="1" dirty="0">
+              <a:rPr lang="en-US" sz="1050" dirty="0">
                 <a:solidFill>
                   <a:srgbClr val="9FB6CB"/>
                 </a:solidFill>
@@ -6960,7 +6960,7 @@
               <a:buNone/>
             </a:pPr>
             <a:r>
-              <a:rPr lang="en-US" sz="1050" i="1" dirty="0">
+              <a:rPr lang="en-US" sz="1050" dirty="0">
                 <a:solidFill>
                   <a:srgbClr val="9FB6CB"/>
                 </a:solidFill>
@@ -7016,7 +7016,7 @@
               <a:buNone/>
             </a:pPr>
             <a:r>
-              <a:rPr lang="en-US" sz="950" i="1" dirty="0">
+              <a:rPr lang="en-US" sz="950" dirty="0">
                 <a:solidFill>
                   <a:srgbClr val="8EA3B7"/>
                 </a:solidFill>
@@ -7094,8 +7094,8 @@
         </p:nvSpPr>
         <p:spPr>
           <a:xfrm>
-            <a:off x="640080" y="384048"/>
-            <a:ext cx="8982151" cy="768096"/>
+            <a:off x="640080" y="365760"/>
+            <a:ext cx="8982151" cy="749808"/>
           </a:xfrm>
           <a:prstGeom prst="rect">
             <a:avLst/>
@@ -7134,7 +7134,7 @@
               <a:buNone/>
             </a:pPr>
             <a:r>
-              <a:rPr lang="en-US" sz="1100" i="1" dirty="0">
+              <a:rPr lang="en-US" sz="1100" dirty="0">
                 <a:solidFill>
                   <a:srgbClr val="12B198"/>
                 </a:solidFill>
@@ -7156,7 +7156,7 @@
         </p:nvSpPr>
         <p:spPr>
           <a:xfrm>
-            <a:off x="9686239" y="438912"/>
+            <a:off x="9686239" y="420624"/>
             <a:ext cx="932688" cy="310896"/>
           </a:xfrm>
           <a:prstGeom prst="roundRect">
@@ -7178,7 +7178,7 @@
         </p:nvSpPr>
         <p:spPr>
           <a:xfrm>
-            <a:off x="9686239" y="438912"/>
+            <a:off x="9686239" y="420624"/>
             <a:ext cx="932688" cy="310896"/>
           </a:xfrm>
           <a:prstGeom prst="rect">
@@ -7217,12 +7217,12 @@
         </p:nvSpPr>
         <p:spPr>
           <a:xfrm>
-            <a:off x="640080" y="1188720"/>
-            <a:ext cx="10911535" cy="530352"/>
+            <a:off x="640080" y="1115568"/>
+            <a:ext cx="10911535" cy="585216"/>
           </a:xfrm>
           <a:prstGeom prst="roundRect">
             <a:avLst>
-              <a:gd name="adj" fmla="val 6897"/>
+              <a:gd name="adj" fmla="val 6250"/>
             </a:avLst>
           </a:prstGeom>
           <a:solidFill>
@@ -7239,8 +7239,8 @@
         </p:nvSpPr>
         <p:spPr>
           <a:xfrm>
-            <a:off x="877824" y="1234440"/>
-            <a:ext cx="10436047" cy="438912"/>
+            <a:off x="877824" y="1161288"/>
+            <a:ext cx="10436047" cy="493776"/>
           </a:xfrm>
           <a:prstGeom prst="rect">
             <a:avLst/>
@@ -7276,7 +7276,7 @@
               <a:buNone/>
             </a:pPr>
             <a:r>
-              <a:rPr lang="en-US" sz="800" dirty="0">
+              <a:rPr lang="en-US" sz="900" dirty="0">
                 <a:solidFill>
                   <a:srgbClr val="0D8A76"/>
                 </a:solidFill>
@@ -7313,9 +7313,9 @@
               <a:buNone/>
             </a:pPr>
             <a:r>
-              <a:rPr lang="en-US" sz="850" i="1" dirty="0">
-                <a:solidFill>
-                  <a:srgbClr val="5F7183"/>
+              <a:rPr lang="en-US" sz="1050" dirty="0">
+                <a:solidFill>
+                  <a:srgbClr val="1B2733"/>
                 </a:solidFill>
                 <a:latin typeface="Calibri" pitchFamily="34" charset="0"/>
                 <a:ea typeface="Calibri" pitchFamily="34" charset="-122"/>
@@ -7335,12 +7335,12 @@
         </p:nvSpPr>
         <p:spPr>
           <a:xfrm>
-            <a:off x="640080" y="1810512"/>
-            <a:ext cx="5327752" cy="1920240"/>
+            <a:off x="640080" y="1773936"/>
+            <a:ext cx="5327752" cy="1965960"/>
           </a:xfrm>
           <a:prstGeom prst="roundRect">
             <a:avLst>
-              <a:gd name="adj" fmla="val 1905"/>
+              <a:gd name="adj" fmla="val 1860"/>
             </a:avLst>
           </a:prstGeom>
           <a:solidFill>
@@ -7357,7 +7357,7 @@
         </p:nvSpPr>
         <p:spPr>
           <a:xfrm>
-            <a:off x="822960" y="1975104"/>
+            <a:off x="822960" y="1938528"/>
             <a:ext cx="310896" cy="310896"/>
           </a:xfrm>
           <a:prstGeom prst="ellipse">
@@ -7377,7 +7377,7 @@
         </p:nvSpPr>
         <p:spPr>
           <a:xfrm>
-            <a:off x="822960" y="1975104"/>
+            <a:off x="822960" y="1938528"/>
             <a:ext cx="310896" cy="310896"/>
           </a:xfrm>
           <a:prstGeom prst="rect">
@@ -7416,7 +7416,7 @@
         </p:nvSpPr>
         <p:spPr>
           <a:xfrm>
-            <a:off x="1207008" y="1938528"/>
+            <a:off x="1207008" y="1901952"/>
             <a:ext cx="4559656" cy="512064"/>
           </a:xfrm>
           <a:prstGeom prst="rect">
@@ -7456,7 +7456,7 @@
               <a:buNone/>
             </a:pPr>
             <a:r>
-              <a:rPr lang="en-US" sz="800" i="1" dirty="0">
+              <a:rPr lang="en-US" sz="1050" dirty="0">
                 <a:solidFill>
                   <a:srgbClr val="12B198"/>
                 </a:solidFill>
@@ -7478,8 +7478,8 @@
         </p:nvSpPr>
         <p:spPr>
           <a:xfrm>
-            <a:off x="859536" y="2487168"/>
-            <a:ext cx="4888840" cy="1097280"/>
+            <a:off x="859536" y="2450592"/>
+            <a:ext cx="4888840" cy="1143000"/>
           </a:xfrm>
           <a:prstGeom prst="rect">
             <a:avLst/>
@@ -7524,9 +7524,9 @@
               <a:buNone/>
             </a:pPr>
             <a:r>
-              <a:rPr lang="en-US" sz="750" i="1" dirty="0">
-                <a:solidFill>
-                  <a:srgbClr val="5F7183"/>
+              <a:rPr lang="en-US" sz="950" dirty="0">
+                <a:solidFill>
+                  <a:srgbClr val="1B2733"/>
                 </a:solidFill>
                 <a:latin typeface="Calibri" pitchFamily="34" charset="0"/>
                 <a:ea typeface="Calibri" pitchFamily="34" charset="-122"/>
@@ -7570,9 +7570,9 @@
               <a:buNone/>
             </a:pPr>
             <a:r>
-              <a:rPr lang="en-US" sz="750" i="1" dirty="0">
-                <a:solidFill>
-                  <a:srgbClr val="5F7183"/>
+              <a:rPr lang="en-US" sz="950" dirty="0">
+                <a:solidFill>
+                  <a:srgbClr val="1B2733"/>
                 </a:solidFill>
                 <a:latin typeface="Calibri" pitchFamily="34" charset="0"/>
                 <a:ea typeface="Calibri" pitchFamily="34" charset="-122"/>
@@ -7616,9 +7616,9 @@
               <a:buNone/>
             </a:pPr>
             <a:r>
-              <a:rPr lang="en-US" sz="750" i="1" dirty="0">
-                <a:solidFill>
-                  <a:srgbClr val="5F7183"/>
+              <a:rPr lang="en-US" sz="950" dirty="0">
+                <a:solidFill>
+                  <a:srgbClr val="1B2733"/>
                 </a:solidFill>
                 <a:latin typeface="Calibri" pitchFamily="34" charset="0"/>
                 <a:ea typeface="Calibri" pitchFamily="34" charset="-122"/>
@@ -7662,9 +7662,9 @@
               <a:buNone/>
             </a:pPr>
             <a:r>
-              <a:rPr lang="en-US" sz="750" i="1" dirty="0">
-                <a:solidFill>
-                  <a:srgbClr val="5F7183"/>
+              <a:rPr lang="en-US" sz="950" dirty="0">
+                <a:solidFill>
+                  <a:srgbClr val="1B2733"/>
                 </a:solidFill>
                 <a:latin typeface="Calibri" pitchFamily="34" charset="0"/>
                 <a:ea typeface="Calibri" pitchFamily="34" charset="-122"/>
@@ -7684,12 +7684,12 @@
         </p:nvSpPr>
         <p:spPr>
           <a:xfrm>
-            <a:off x="6223864" y="1810512"/>
-            <a:ext cx="5327752" cy="1920240"/>
+            <a:off x="6223864" y="1773936"/>
+            <a:ext cx="5327752" cy="1965960"/>
           </a:xfrm>
           <a:prstGeom prst="roundRect">
             <a:avLst>
-              <a:gd name="adj" fmla="val 1905"/>
+              <a:gd name="adj" fmla="val 1860"/>
             </a:avLst>
           </a:prstGeom>
           <a:solidFill>
@@ -7706,7 +7706,7 @@
         </p:nvSpPr>
         <p:spPr>
           <a:xfrm>
-            <a:off x="6406744" y="1975104"/>
+            <a:off x="6406744" y="1938528"/>
             <a:ext cx="310896" cy="310896"/>
           </a:xfrm>
           <a:prstGeom prst="ellipse">
@@ -7726,7 +7726,7 @@
         </p:nvSpPr>
         <p:spPr>
           <a:xfrm>
-            <a:off x="6406744" y="1975104"/>
+            <a:off x="6406744" y="1938528"/>
             <a:ext cx="310896" cy="310896"/>
           </a:xfrm>
           <a:prstGeom prst="rect">
@@ -7765,7 +7765,7 @@
         </p:nvSpPr>
         <p:spPr>
           <a:xfrm>
-            <a:off x="6790792" y="1938528"/>
+            <a:off x="6790792" y="1901952"/>
             <a:ext cx="4559656" cy="512064"/>
           </a:xfrm>
           <a:prstGeom prst="rect">
@@ -7805,7 +7805,7 @@
               <a:buNone/>
             </a:pPr>
             <a:r>
-              <a:rPr lang="en-US" sz="800" i="1" dirty="0">
+              <a:rPr lang="en-US" sz="1050" dirty="0">
                 <a:solidFill>
                   <a:srgbClr val="12B198"/>
                 </a:solidFill>
@@ -7827,8 +7827,8 @@
         </p:nvSpPr>
         <p:spPr>
           <a:xfrm>
-            <a:off x="6443320" y="2487168"/>
-            <a:ext cx="4888840" cy="1097280"/>
+            <a:off x="6443320" y="2450592"/>
+            <a:ext cx="4888840" cy="1143000"/>
           </a:xfrm>
           <a:prstGeom prst="rect">
             <a:avLst/>
@@ -7873,9 +7873,9 @@
               <a:buNone/>
             </a:pPr>
             <a:r>
-              <a:rPr lang="en-US" sz="750" i="1" dirty="0">
-                <a:solidFill>
-                  <a:srgbClr val="5F7183"/>
+              <a:rPr lang="en-US" sz="950" dirty="0">
+                <a:solidFill>
+                  <a:srgbClr val="1B2733"/>
                 </a:solidFill>
                 <a:latin typeface="Calibri" pitchFamily="34" charset="0"/>
                 <a:ea typeface="Calibri" pitchFamily="34" charset="-122"/>
@@ -7919,9 +7919,9 @@
               <a:buNone/>
             </a:pPr>
             <a:r>
-              <a:rPr lang="en-US" sz="750" i="1" dirty="0">
-                <a:solidFill>
-                  <a:srgbClr val="5F7183"/>
+              <a:rPr lang="en-US" sz="950" dirty="0">
+                <a:solidFill>
+                  <a:srgbClr val="1B2733"/>
                 </a:solidFill>
                 <a:latin typeface="Calibri" pitchFamily="34" charset="0"/>
                 <a:ea typeface="Calibri" pitchFamily="34" charset="-122"/>
@@ -7965,9 +7965,9 @@
               <a:buNone/>
             </a:pPr>
             <a:r>
-              <a:rPr lang="en-US" sz="750" i="1" dirty="0">
-                <a:solidFill>
-                  <a:srgbClr val="5F7183"/>
+              <a:rPr lang="en-US" sz="950" dirty="0">
+                <a:solidFill>
+                  <a:srgbClr val="1B2733"/>
                 </a:solidFill>
                 <a:latin typeface="Calibri" pitchFamily="34" charset="0"/>
                 <a:ea typeface="Calibri" pitchFamily="34" charset="-122"/>
@@ -8011,9 +8011,9 @@
               <a:buNone/>
             </a:pPr>
             <a:r>
-              <a:rPr lang="en-US" sz="750" i="1" dirty="0">
-                <a:solidFill>
-                  <a:srgbClr val="5F7183"/>
+              <a:rPr lang="en-US" sz="950" dirty="0">
+                <a:solidFill>
+                  <a:srgbClr val="1B2733"/>
                 </a:solidFill>
                 <a:latin typeface="Calibri" pitchFamily="34" charset="0"/>
                 <a:ea typeface="Calibri" pitchFamily="34" charset="-122"/>
@@ -8033,12 +8033,12 @@
         </p:nvSpPr>
         <p:spPr>
           <a:xfrm>
-            <a:off x="640080" y="3931920"/>
-            <a:ext cx="5327752" cy="1920240"/>
+            <a:off x="640080" y="3941064"/>
+            <a:ext cx="5327752" cy="1965960"/>
           </a:xfrm>
           <a:prstGeom prst="roundRect">
             <a:avLst>
-              <a:gd name="adj" fmla="val 1905"/>
+              <a:gd name="adj" fmla="val 1860"/>
             </a:avLst>
           </a:prstGeom>
           <a:solidFill>
@@ -8055,7 +8055,7 @@
         </p:nvSpPr>
         <p:spPr>
           <a:xfrm>
-            <a:off x="822960" y="4096512"/>
+            <a:off x="822960" y="4105656"/>
             <a:ext cx="310896" cy="310896"/>
           </a:xfrm>
           <a:prstGeom prst="ellipse">
@@ -8075,7 +8075,7 @@
         </p:nvSpPr>
         <p:spPr>
           <a:xfrm>
-            <a:off x="822960" y="4096512"/>
+            <a:off x="822960" y="4105656"/>
             <a:ext cx="310896" cy="310896"/>
           </a:xfrm>
           <a:prstGeom prst="rect">
@@ -8114,7 +8114,7 @@
         </p:nvSpPr>
         <p:spPr>
           <a:xfrm>
-            <a:off x="1207008" y="4059936"/>
+            <a:off x="1207008" y="4069080"/>
             <a:ext cx="4559656" cy="512064"/>
           </a:xfrm>
           <a:prstGeom prst="rect">
@@ -8154,7 +8154,7 @@
               <a:buNone/>
             </a:pPr>
             <a:r>
-              <a:rPr lang="en-US" sz="800" i="1" dirty="0">
+              <a:rPr lang="en-US" sz="1050" dirty="0">
                 <a:solidFill>
                   <a:srgbClr val="12B198"/>
                 </a:solidFill>
@@ -8176,8 +8176,8 @@
         </p:nvSpPr>
         <p:spPr>
           <a:xfrm>
-            <a:off x="859536" y="4608576"/>
-            <a:ext cx="4888840" cy="1097280"/>
+            <a:off x="859536" y="4617720"/>
+            <a:ext cx="4888840" cy="1143000"/>
           </a:xfrm>
           <a:prstGeom prst="rect">
             <a:avLst/>
@@ -8222,9 +8222,9 @@
               <a:buNone/>
             </a:pPr>
             <a:r>
-              <a:rPr lang="en-US" sz="750" i="1" dirty="0">
-                <a:solidFill>
-                  <a:srgbClr val="5F7183"/>
+              <a:rPr lang="en-US" sz="950" dirty="0">
+                <a:solidFill>
+                  <a:srgbClr val="1B2733"/>
                 </a:solidFill>
                 <a:latin typeface="Calibri" pitchFamily="34" charset="0"/>
                 <a:ea typeface="Calibri" pitchFamily="34" charset="-122"/>
@@ -8268,9 +8268,9 @@
               <a:buNone/>
             </a:pPr>
             <a:r>
-              <a:rPr lang="en-US" sz="750" i="1" dirty="0">
-                <a:solidFill>
-                  <a:srgbClr val="5F7183"/>
+              <a:rPr lang="en-US" sz="950" dirty="0">
+                <a:solidFill>
+                  <a:srgbClr val="1B2733"/>
                 </a:solidFill>
                 <a:latin typeface="Calibri" pitchFamily="34" charset="0"/>
                 <a:ea typeface="Calibri" pitchFamily="34" charset="-122"/>
@@ -8314,9 +8314,9 @@
               <a:buNone/>
             </a:pPr>
             <a:r>
-              <a:rPr lang="en-US" sz="750" i="1" dirty="0">
-                <a:solidFill>
-                  <a:srgbClr val="5F7183"/>
+              <a:rPr lang="en-US" sz="950" dirty="0">
+                <a:solidFill>
+                  <a:srgbClr val="1B2733"/>
                 </a:solidFill>
                 <a:latin typeface="Calibri" pitchFamily="34" charset="0"/>
                 <a:ea typeface="Calibri" pitchFamily="34" charset="-122"/>
@@ -8360,9 +8360,9 @@
               <a:buNone/>
             </a:pPr>
             <a:r>
-              <a:rPr lang="en-US" sz="750" i="1" dirty="0">
-                <a:solidFill>
-                  <a:srgbClr val="5F7183"/>
+              <a:rPr lang="en-US" sz="950" dirty="0">
+                <a:solidFill>
+                  <a:srgbClr val="1B2733"/>
                 </a:solidFill>
                 <a:latin typeface="Calibri" pitchFamily="34" charset="0"/>
                 <a:ea typeface="Calibri" pitchFamily="34" charset="-122"/>
@@ -8382,12 +8382,12 @@
         </p:nvSpPr>
         <p:spPr>
           <a:xfrm>
-            <a:off x="6223864" y="3931920"/>
-            <a:ext cx="5327752" cy="1920240"/>
+            <a:off x="6223864" y="3941064"/>
+            <a:ext cx="5327752" cy="1965960"/>
           </a:xfrm>
           <a:prstGeom prst="roundRect">
             <a:avLst>
-              <a:gd name="adj" fmla="val 1905"/>
+              <a:gd name="adj" fmla="val 1860"/>
             </a:avLst>
           </a:prstGeom>
           <a:solidFill>
@@ -8404,7 +8404,7 @@
         </p:nvSpPr>
         <p:spPr>
           <a:xfrm>
-            <a:off x="6406744" y="4096512"/>
+            <a:off x="6406744" y="4105656"/>
             <a:ext cx="310896" cy="310896"/>
           </a:xfrm>
           <a:prstGeom prst="ellipse">
@@ -8424,7 +8424,7 @@
         </p:nvSpPr>
         <p:spPr>
           <a:xfrm>
-            <a:off x="6406744" y="4096512"/>
+            <a:off x="6406744" y="4105656"/>
             <a:ext cx="310896" cy="310896"/>
           </a:xfrm>
           <a:prstGeom prst="rect">
@@ -8463,7 +8463,7 @@
         </p:nvSpPr>
         <p:spPr>
           <a:xfrm>
-            <a:off x="6790792" y="4059936"/>
+            <a:off x="6790792" y="4069080"/>
             <a:ext cx="4559656" cy="512064"/>
           </a:xfrm>
           <a:prstGeom prst="rect">
@@ -8503,7 +8503,7 @@
               <a:buNone/>
             </a:pPr>
             <a:r>
-              <a:rPr lang="en-US" sz="800" i="1" dirty="0">
+              <a:rPr lang="en-US" sz="1050" dirty="0">
                 <a:solidFill>
                   <a:srgbClr val="12B198"/>
                 </a:solidFill>
@@ -8525,8 +8525,8 @@
         </p:nvSpPr>
         <p:spPr>
           <a:xfrm>
-            <a:off x="6443320" y="4608576"/>
-            <a:ext cx="4888840" cy="1097280"/>
+            <a:off x="6443320" y="4617720"/>
+            <a:ext cx="4888840" cy="1143000"/>
           </a:xfrm>
           <a:prstGeom prst="rect">
             <a:avLst/>
@@ -8571,9 +8571,9 @@
               <a:buNone/>
             </a:pPr>
             <a:r>
-              <a:rPr lang="en-US" sz="750" i="1" dirty="0">
-                <a:solidFill>
-                  <a:srgbClr val="5F7183"/>
+              <a:rPr lang="en-US" sz="950" dirty="0">
+                <a:solidFill>
+                  <a:srgbClr val="1B2733"/>
                 </a:solidFill>
                 <a:latin typeface="Calibri" pitchFamily="34" charset="0"/>
                 <a:ea typeface="Calibri" pitchFamily="34" charset="-122"/>
@@ -8617,9 +8617,9 @@
               <a:buNone/>
             </a:pPr>
             <a:r>
-              <a:rPr lang="en-US" sz="750" i="1" dirty="0">
-                <a:solidFill>
-                  <a:srgbClr val="5F7183"/>
+              <a:rPr lang="en-US" sz="950" dirty="0">
+                <a:solidFill>
+                  <a:srgbClr val="1B2733"/>
                 </a:solidFill>
                 <a:latin typeface="Calibri" pitchFamily="34" charset="0"/>
                 <a:ea typeface="Calibri" pitchFamily="34" charset="-122"/>
@@ -8663,9 +8663,9 @@
               <a:buNone/>
             </a:pPr>
             <a:r>
-              <a:rPr lang="en-US" sz="750" i="1" dirty="0">
-                <a:solidFill>
-                  <a:srgbClr val="5F7183"/>
+              <a:rPr lang="en-US" sz="950" dirty="0">
+                <a:solidFill>
+                  <a:srgbClr val="1B2733"/>
                 </a:solidFill>
                 <a:latin typeface="Calibri" pitchFamily="34" charset="0"/>
                 <a:ea typeface="Calibri" pitchFamily="34" charset="-122"/>
@@ -8709,7 +8709,86 @@
               <a:buNone/>
             </a:pPr>
             <a:r>
-              <a:rPr lang="en-US" sz="750" i="1" dirty="0">
+              <a:rPr lang="en-US" sz="950" dirty="0">
+                <a:solidFill>
+                  <a:srgbClr val="1B2733"/>
+                </a:solidFill>
+                <a:latin typeface="Calibri" pitchFamily="34" charset="0"/>
+                <a:ea typeface="Calibri" pitchFamily="34" charset="-122"/>
+                <a:cs typeface="Calibri" pitchFamily="34" charset="-120"/>
+              </a:rPr>
+              <a:t>  We use these in every session. State your reasoning, not just your conclusion</a:t>
+            </a:r>
+            <a:endParaRPr lang="en-US" sz="950" dirty="0"/>
+          </a:p>
+        </p:txBody>
+      </p:sp>
+      <p:sp>
+        <p:nvSpPr>
+          <p:cNvPr id="28" name="Text 25"/>
+          <p:cNvSpPr/>
+          <p:nvPr/>
+        </p:nvSpPr>
+        <p:spPr>
+          <a:xfrm>
+            <a:off x="640080" y="5961888"/>
+            <a:ext cx="10911535" cy="292608"/>
+          </a:xfrm>
+          <a:prstGeom prst="rect">
+            <a:avLst/>
+          </a:prstGeom>
+          <a:noFill/>
+          <a:ln/>
+        </p:spPr>
+        <p:txBody>
+          <a:bodyPr wrap="square" lIns="0" tIns="0" rIns="0" bIns="0" rtlCol="0" anchor="t"/>
+          <a:lstStyle/>
+          <a:p>
+            <a:pPr indent="0" marL="0">
+              <a:lnSpc>
+                <a:spcPct val="88000"/>
+              </a:lnSpc>
+              <a:buNone/>
+            </a:pPr>
+            <a:r>
+              <a:rPr lang="en-US" sz="900" b="1" dirty="0">
+                <a:solidFill>
+                  <a:srgbClr val="0D8A76"/>
+                </a:solidFill>
+                <a:latin typeface="Yu Gothic" pitchFamily="34" charset="0"/>
+                <a:ea typeface="Yu Gothic" pitchFamily="34" charset="-122"/>
+                <a:cs typeface="Yu Gothic" pitchFamily="34" charset="-120"/>
+              </a:rPr>
+              <a:t>Site SOP優先　</a:t>
+            </a:r>
+            <a:pPr indent="0" marL="0">
+              <a:lnSpc>
+                <a:spcPct val="88000"/>
+              </a:lnSpc>
+              <a:buNone/>
+            </a:pPr>
+            <a:r>
+              <a:rPr lang="en-US" sz="900" dirty="0">
+                <a:solidFill>
+                  <a:srgbClr val="1B2733"/>
+                </a:solidFill>
+                <a:latin typeface="Yu Gothic" pitchFamily="34" charset="0"/>
+                <a:ea typeface="Yu Gothic" pitchFamily="34" charset="-122"/>
+                <a:cs typeface="Yu Gothic" pitchFamily="34" charset="-120"/>
+              </a:rPr>
+              <a:t>報告ライン、クライアント窓口、常駐時間帯は現場ごとに異なる。Site SOPに従う。</a:t>
+            </a:r>
+            <a:endParaRPr lang="en-US" sz="900" dirty="0"/>
+          </a:p>
+          <a:p>
+            <a:pPr indent="0" marL="0">
+              <a:lnSpc>
+                <a:spcPct val="88000"/>
+              </a:lnSpc>
+              <a:buNone/>
+            </a:pPr>
+            <a:r>
+              <a:rPr lang="en-US" sz="800" i="1" dirty="0">
                 <a:solidFill>
                   <a:srgbClr val="5F7183"/>
                 </a:solidFill>
@@ -8717,22 +8796,22 @@
                 <a:ea typeface="Calibri" pitchFamily="34" charset="-122"/>
                 <a:cs typeface="Calibri" pitchFamily="34" charset="-120"/>
               </a:rPr>
-              <a:t>  We use these in every session. State your reasoning, not just your conclusion</a:t>
-            </a:r>
-            <a:endParaRPr lang="en-US" sz="950" dirty="0"/>
-          </a:p>
-        </p:txBody>
-      </p:sp>
-      <p:sp>
-        <p:nvSpPr>
-          <p:cNvPr id="28" name="Text 25"/>
-          <p:cNvSpPr/>
-          <p:nvPr/>
-        </p:nvSpPr>
-        <p:spPr>
-          <a:xfrm>
-            <a:off x="640080" y="5907024"/>
-            <a:ext cx="10911535" cy="310896"/>
+              <a:t>Reporting lines, client contacts and staffing hours differ by site. Follow the Site SOP.</a:t>
+            </a:r>
+            <a:endParaRPr lang="en-US" sz="900" dirty="0"/>
+          </a:p>
+        </p:txBody>
+      </p:sp>
+      <p:sp>
+        <p:nvSpPr>
+          <p:cNvPr id="29" name="Text 26"/>
+          <p:cNvSpPr/>
+          <p:nvPr/>
+        </p:nvSpPr>
+        <p:spPr>
+          <a:xfrm>
+            <a:off x="640080" y="6272784"/>
+            <a:ext cx="9905695" cy="219456"/>
           </a:xfrm>
           <a:prstGeom prst="rect">
             <a:avLst/>
@@ -8745,167 +8824,88 @@
           <a:lstStyle/>
           <a:p>
             <a:pPr indent="0" marL="0">
-              <a:lnSpc>
-                <a:spcPct val="88000"/>
-              </a:lnSpc>
-              <a:buNone/>
-            </a:pPr>
-            <a:r>
-              <a:rPr lang="en-US" sz="900" b="1" dirty="0">
-                <a:solidFill>
-                  <a:srgbClr val="0D8A76"/>
-                </a:solidFill>
-                <a:latin typeface="Yu Gothic" pitchFamily="34" charset="0"/>
-                <a:ea typeface="Yu Gothic" pitchFamily="34" charset="-122"/>
-                <a:cs typeface="Yu Gothic" pitchFamily="34" charset="-120"/>
-              </a:rPr>
-              <a:t>Site SOP優先　</a:t>
-            </a:r>
-            <a:pPr indent="0" marL="0">
-              <a:lnSpc>
-                <a:spcPct val="88000"/>
-              </a:lnSpc>
+              <a:buNone/>
+            </a:pPr>
+            <a:r>
+              <a:rPr lang="en-US" sz="750" b="1" dirty="0">
+                <a:solidFill>
+                  <a:srgbClr val="D6E0E9"/>
+                </a:solidFill>
+                <a:latin typeface="Yu Gothic" pitchFamily="34" charset="0"/>
+                <a:ea typeface="Yu Gothic" pitchFamily="34" charset="-122"/>
+                <a:cs typeface="Yu Gothic" pitchFamily="34" charset="-120"/>
+              </a:rPr>
+              <a:t>ソース　</a:t>
+            </a:r>
+            <a:pPr indent="0" marL="0">
+              <a:buNone/>
+            </a:pPr>
+            <a:r>
+              <a:rPr lang="en-US" sz="750" dirty="0">
+                <a:solidFill>
+                  <a:srgbClr val="5F7183"/>
+                </a:solidFill>
+                <a:latin typeface="Yu Gothic" pitchFamily="34" charset="0"/>
+                <a:ea typeface="Yu Gothic" pitchFamily="34" charset="-122"/>
+                <a:cs typeface="Yu Gothic" pitchFamily="34" charset="-120"/>
+              </a:rPr>
+              <a:t>警備業法、警察庁「警備員教育」</a:t>
+            </a:r>
+            <a:endParaRPr lang="en-US" sz="750" dirty="0"/>
+          </a:p>
+        </p:txBody>
+      </p:sp>
+      <p:sp>
+        <p:nvSpPr>
+          <p:cNvPr id="30" name="Text 27"/>
+          <p:cNvSpPr/>
+          <p:nvPr/>
+        </p:nvSpPr>
+        <p:spPr>
+          <a:xfrm>
+            <a:off x="640080" y="6492240"/>
+            <a:ext cx="8778240" cy="292608"/>
+          </a:xfrm>
+          <a:prstGeom prst="rect">
+            <a:avLst/>
+          </a:prstGeom>
+          <a:noFill/>
+          <a:ln/>
+        </p:spPr>
+        <p:txBody>
+          <a:bodyPr wrap="square" lIns="0" tIns="0" rIns="0" bIns="0" rtlCol="0" anchor="ctr"/>
+          <a:lstStyle/>
+          <a:p>
+            <a:pPr indent="0" marL="0">
               <a:buNone/>
             </a:pPr>
             <a:r>
               <a:rPr lang="en-US" sz="900" dirty="0">
                 <a:solidFill>
-                  <a:srgbClr val="1B2733"/>
-                </a:solidFill>
-                <a:latin typeface="Yu Gothic" pitchFamily="34" charset="0"/>
-                <a:ea typeface="Yu Gothic" pitchFamily="34" charset="-122"/>
-                <a:cs typeface="Yu Gothic" pitchFamily="34" charset="-120"/>
-              </a:rPr>
-              <a:t>報告ライン、クライアント窓口、常駐時間帯は現場ごとに異なる。Site SOPに従う。</a:t>
+                  <a:srgbClr val="5F7183"/>
+                </a:solidFill>
+                <a:latin typeface="Yu Gothic" pitchFamily="34" charset="0"/>
+                <a:ea typeface="Yu Gothic" pitchFamily="34" charset="-122"/>
+                <a:cs typeface="Yu Gothic" pitchFamily="34" charset="-120"/>
+              </a:rPr>
+              <a:t>第1時限｜基本教育1 警備業務実施の基本原則  </a:t>
+            </a:r>
+            <a:pPr indent="0" marL="0">
+              <a:buNone/>
+            </a:pPr>
+            <a:r>
+              <a:rPr lang="en-US" sz="850" i="1" dirty="0">
+                <a:solidFill>
+                  <a:srgbClr val="D6E0E9"/>
+                </a:solidFill>
+                <a:latin typeface="Calibri" pitchFamily="34" charset="0"/>
+                <a:ea typeface="Calibri" pitchFamily="34" charset="-122"/>
+                <a:cs typeface="Calibri" pitchFamily="34" charset="-120"/>
+              </a:rPr>
+              <a:t>Period 1 | Basic Training 1 — Fundamental Principles</a:t>
             </a:r>
             <a:endParaRPr lang="en-US" sz="900" dirty="0"/>
           </a:p>
-          <a:p>
-            <a:pPr indent="0" marL="0">
-              <a:lnSpc>
-                <a:spcPct val="88000"/>
-              </a:lnSpc>
-              <a:buNone/>
-            </a:pPr>
-            <a:r>
-              <a:rPr lang="en-US" sz="750" i="1" dirty="0">
-                <a:solidFill>
-                  <a:srgbClr val="5F7183"/>
-                </a:solidFill>
-                <a:latin typeface="Calibri" pitchFamily="34" charset="0"/>
-                <a:ea typeface="Calibri" pitchFamily="34" charset="-122"/>
-                <a:cs typeface="Calibri" pitchFamily="34" charset="-120"/>
-              </a:rPr>
-              <a:t>Reporting lines, client contacts and staffing hours differ by site. Follow the Site SOP.</a:t>
-            </a:r>
-            <a:endParaRPr lang="en-US" sz="900" dirty="0"/>
-          </a:p>
-        </p:txBody>
-      </p:sp>
-      <p:sp>
-        <p:nvSpPr>
-          <p:cNvPr id="29" name="Text 26"/>
-          <p:cNvSpPr/>
-          <p:nvPr/>
-        </p:nvSpPr>
-        <p:spPr>
-          <a:xfrm>
-            <a:off x="640080" y="6272784"/>
-            <a:ext cx="9905695" cy="237744"/>
-          </a:xfrm>
-          <a:prstGeom prst="rect">
-            <a:avLst/>
-          </a:prstGeom>
-          <a:noFill/>
-          <a:ln/>
-        </p:spPr>
-        <p:txBody>
-          <a:bodyPr wrap="square" lIns="0" tIns="0" rIns="0" bIns="0" rtlCol="0" anchor="t"/>
-          <a:lstStyle/>
-          <a:p>
-            <a:pPr indent="0" marL="0">
-              <a:buNone/>
-            </a:pPr>
-            <a:r>
-              <a:rPr lang="en-US" sz="750" b="1" dirty="0">
-                <a:solidFill>
-                  <a:srgbClr val="D6E0E9"/>
-                </a:solidFill>
-                <a:latin typeface="Yu Gothic" pitchFamily="34" charset="0"/>
-                <a:ea typeface="Yu Gothic" pitchFamily="34" charset="-122"/>
-                <a:cs typeface="Yu Gothic" pitchFamily="34" charset="-120"/>
-              </a:rPr>
-              <a:t>ソース　</a:t>
-            </a:r>
-            <a:pPr indent="0" marL="0">
-              <a:buNone/>
-            </a:pPr>
-            <a:r>
-              <a:rPr lang="en-US" sz="750" dirty="0">
-                <a:solidFill>
-                  <a:srgbClr val="5F7183"/>
-                </a:solidFill>
-                <a:latin typeface="Yu Gothic" pitchFamily="34" charset="0"/>
-                <a:ea typeface="Yu Gothic" pitchFamily="34" charset="-122"/>
-                <a:cs typeface="Yu Gothic" pitchFamily="34" charset="-120"/>
-              </a:rPr>
-              <a:t>警備業法、警察庁「警備員教育」</a:t>
-            </a:r>
-            <a:endParaRPr lang="en-US" sz="750" dirty="0"/>
-          </a:p>
-        </p:txBody>
-      </p:sp>
-      <p:sp>
-        <p:nvSpPr>
-          <p:cNvPr id="30" name="Text 27"/>
-          <p:cNvSpPr/>
-          <p:nvPr/>
-        </p:nvSpPr>
-        <p:spPr>
-          <a:xfrm>
-            <a:off x="640080" y="6382512"/>
-            <a:ext cx="8778240" cy="292608"/>
-          </a:xfrm>
-          <a:prstGeom prst="rect">
-            <a:avLst/>
-          </a:prstGeom>
-          <a:noFill/>
-          <a:ln/>
-        </p:spPr>
-        <p:txBody>
-          <a:bodyPr wrap="square" lIns="0" tIns="0" rIns="0" bIns="0" rtlCol="0" anchor="ctr"/>
-          <a:lstStyle/>
-          <a:p>
-            <a:pPr indent="0" marL="0">
-              <a:buNone/>
-            </a:pPr>
-            <a:r>
-              <a:rPr lang="en-US" sz="900" dirty="0">
-                <a:solidFill>
-                  <a:srgbClr val="5F7183"/>
-                </a:solidFill>
-                <a:latin typeface="Yu Gothic" pitchFamily="34" charset="0"/>
-                <a:ea typeface="Yu Gothic" pitchFamily="34" charset="-122"/>
-                <a:cs typeface="Yu Gothic" pitchFamily="34" charset="-120"/>
-              </a:rPr>
-              <a:t>第1時限｜基本教育1 警備業務実施の基本原則  </a:t>
-            </a:r>
-            <a:pPr indent="0" marL="0">
-              <a:buNone/>
-            </a:pPr>
-            <a:r>
-              <a:rPr lang="en-US" sz="850" i="1" dirty="0">
-                <a:solidFill>
-                  <a:srgbClr val="D6E0E9"/>
-                </a:solidFill>
-                <a:latin typeface="Calibri" pitchFamily="34" charset="0"/>
-                <a:ea typeface="Calibri" pitchFamily="34" charset="-122"/>
-                <a:cs typeface="Calibri" pitchFamily="34" charset="-120"/>
-              </a:rPr>
-              <a:t>Period 1 | Basic Training 1 — Fundamental Principles</a:t>
-            </a:r>
-            <a:endParaRPr lang="en-US" sz="900" dirty="0"/>
-          </a:p>
         </p:txBody>
       </p:sp>
       <p:sp>
@@ -8916,7 +8916,7 @@
         </p:nvSpPr>
         <p:spPr>
           <a:xfrm>
-            <a:off x="10637215" y="6382512"/>
+            <a:off x="10637215" y="6492240"/>
             <a:ext cx="914400" cy="292608"/>
           </a:xfrm>
           <a:prstGeom prst="rect">
@@ -9011,8 +9011,8 @@
         </p:nvSpPr>
         <p:spPr>
           <a:xfrm>
-            <a:off x="640080" y="384048"/>
-            <a:ext cx="8982151" cy="768096"/>
+            <a:off x="640080" y="365760"/>
+            <a:ext cx="8982151" cy="749808"/>
           </a:xfrm>
           <a:prstGeom prst="rect">
             <a:avLst/>
@@ -9051,7 +9051,7 @@
               <a:buNone/>
             </a:pPr>
             <a:r>
-              <a:rPr lang="en-US" sz="1100" i="1" dirty="0">
+              <a:rPr lang="en-US" sz="1100" dirty="0">
                 <a:solidFill>
                   <a:srgbClr val="12B198"/>
                 </a:solidFill>
@@ -9073,7 +9073,7 @@
         </p:nvSpPr>
         <p:spPr>
           <a:xfrm>
-            <a:off x="9686239" y="438912"/>
+            <a:off x="9686239" y="420624"/>
             <a:ext cx="932688" cy="310896"/>
           </a:xfrm>
           <a:prstGeom prst="roundRect">
@@ -9095,7 +9095,7 @@
         </p:nvSpPr>
         <p:spPr>
           <a:xfrm>
-            <a:off x="9686239" y="438912"/>
+            <a:off x="9686239" y="420624"/>
             <a:ext cx="932688" cy="310896"/>
           </a:xfrm>
           <a:prstGeom prst="rect">
@@ -9134,12 +9134,12 @@
         </p:nvSpPr>
         <p:spPr>
           <a:xfrm>
-            <a:off x="640080" y="1188720"/>
-            <a:ext cx="10911535" cy="530352"/>
+            <a:off x="640080" y="1115568"/>
+            <a:ext cx="10911535" cy="585216"/>
           </a:xfrm>
           <a:prstGeom prst="roundRect">
             <a:avLst>
-              <a:gd name="adj" fmla="val 6897"/>
+              <a:gd name="adj" fmla="val 6250"/>
             </a:avLst>
           </a:prstGeom>
           <a:solidFill>
@@ -9156,8 +9156,8 @@
         </p:nvSpPr>
         <p:spPr>
           <a:xfrm>
-            <a:off x="877824" y="1234440"/>
-            <a:ext cx="10436047" cy="438912"/>
+            <a:off x="877824" y="1161288"/>
+            <a:ext cx="10436047" cy="493776"/>
           </a:xfrm>
           <a:prstGeom prst="rect">
             <a:avLst/>
@@ -9193,7 +9193,7 @@
               <a:buNone/>
             </a:pPr>
             <a:r>
-              <a:rPr lang="en-US" sz="800" dirty="0">
+              <a:rPr lang="en-US" sz="900" dirty="0">
                 <a:solidFill>
                   <a:srgbClr val="0D8A76"/>
                 </a:solidFill>
@@ -9230,9 +9230,9 @@
               <a:buNone/>
             </a:pPr>
             <a:r>
-              <a:rPr lang="en-US" sz="850" i="1" dirty="0">
-                <a:solidFill>
-                  <a:srgbClr val="5F7183"/>
+              <a:rPr lang="en-US" sz="1050" dirty="0">
+                <a:solidFill>
+                  <a:srgbClr val="1B2733"/>
                 </a:solidFill>
                 <a:latin typeface="Calibri" pitchFamily="34" charset="0"/>
                 <a:ea typeface="Calibri" pitchFamily="34" charset="-122"/>
@@ -9252,12 +9252,12 @@
         </p:nvSpPr>
         <p:spPr>
           <a:xfrm>
-            <a:off x="640080" y="1810512"/>
-            <a:ext cx="5327752" cy="1920240"/>
+            <a:off x="640080" y="1773936"/>
+            <a:ext cx="5327752" cy="1965960"/>
           </a:xfrm>
           <a:prstGeom prst="roundRect">
             <a:avLst>
-              <a:gd name="adj" fmla="val 1905"/>
+              <a:gd name="adj" fmla="val 1860"/>
             </a:avLst>
           </a:prstGeom>
           <a:solidFill>
@@ -9274,7 +9274,7 @@
         </p:nvSpPr>
         <p:spPr>
           <a:xfrm>
-            <a:off x="822960" y="1975104"/>
+            <a:off x="822960" y="1938528"/>
             <a:ext cx="310896" cy="310896"/>
           </a:xfrm>
           <a:prstGeom prst="ellipse">
@@ -9294,7 +9294,7 @@
         </p:nvSpPr>
         <p:spPr>
           <a:xfrm>
-            <a:off x="822960" y="1975104"/>
+            <a:off x="822960" y="1938528"/>
             <a:ext cx="310896" cy="310896"/>
           </a:xfrm>
           <a:prstGeom prst="rect">
@@ -9333,7 +9333,7 @@
         </p:nvSpPr>
         <p:spPr>
           <a:xfrm>
-            <a:off x="1207008" y="1938528"/>
+            <a:off x="1207008" y="1901952"/>
             <a:ext cx="4559656" cy="512064"/>
           </a:xfrm>
           <a:prstGeom prst="rect">
@@ -9373,7 +9373,7 @@
               <a:buNone/>
             </a:pPr>
             <a:r>
-              <a:rPr lang="en-US" sz="800" i="1" dirty="0">
+              <a:rPr lang="en-US" sz="1050" dirty="0">
                 <a:solidFill>
                   <a:srgbClr val="12B198"/>
                 </a:solidFill>
@@ -9395,8 +9395,8 @@
         </p:nvSpPr>
         <p:spPr>
           <a:xfrm>
-            <a:off x="859536" y="2487168"/>
-            <a:ext cx="4888840" cy="1097280"/>
+            <a:off x="859536" y="2450592"/>
+            <a:ext cx="4888840" cy="1143000"/>
           </a:xfrm>
           <a:prstGeom prst="rect">
             <a:avLst/>
@@ -9441,9 +9441,9 @@
               <a:buNone/>
             </a:pPr>
             <a:r>
-              <a:rPr lang="en-US" sz="750" i="1" dirty="0">
-                <a:solidFill>
-                  <a:srgbClr val="5F7183"/>
+              <a:rPr lang="en-US" sz="950" dirty="0">
+                <a:solidFill>
+                  <a:srgbClr val="1B2733"/>
                 </a:solidFill>
                 <a:latin typeface="Calibri" pitchFamily="34" charset="0"/>
                 <a:ea typeface="Calibri" pitchFamily="34" charset="-122"/>
@@ -9487,9 +9487,9 @@
               <a:buNone/>
             </a:pPr>
             <a:r>
-              <a:rPr lang="en-US" sz="750" i="1" dirty="0">
-                <a:solidFill>
-                  <a:srgbClr val="5F7183"/>
+              <a:rPr lang="en-US" sz="950" dirty="0">
+                <a:solidFill>
+                  <a:srgbClr val="1B2733"/>
                 </a:solidFill>
                 <a:latin typeface="Calibri" pitchFamily="34" charset="0"/>
                 <a:ea typeface="Calibri" pitchFamily="34" charset="-122"/>
@@ -9533,9 +9533,9 @@
               <a:buNone/>
             </a:pPr>
             <a:r>
-              <a:rPr lang="en-US" sz="750" i="1" dirty="0">
-                <a:solidFill>
-                  <a:srgbClr val="5F7183"/>
+              <a:rPr lang="en-US" sz="950" dirty="0">
+                <a:solidFill>
+                  <a:srgbClr val="1B2733"/>
                 </a:solidFill>
                 <a:latin typeface="Calibri" pitchFamily="34" charset="0"/>
                 <a:ea typeface="Calibri" pitchFamily="34" charset="-122"/>
@@ -9579,9 +9579,9 @@
               <a:buNone/>
             </a:pPr>
             <a:r>
-              <a:rPr lang="en-US" sz="750" i="1" dirty="0">
-                <a:solidFill>
-                  <a:srgbClr val="5F7183"/>
+              <a:rPr lang="en-US" sz="950" dirty="0">
+                <a:solidFill>
+                  <a:srgbClr val="1B2733"/>
                 </a:solidFill>
                 <a:latin typeface="Calibri" pitchFamily="34" charset="0"/>
                 <a:ea typeface="Calibri" pitchFamily="34" charset="-122"/>
@@ -9601,12 +9601,12 @@
         </p:nvSpPr>
         <p:spPr>
           <a:xfrm>
-            <a:off x="6223864" y="1810512"/>
-            <a:ext cx="5327752" cy="1920240"/>
+            <a:off x="6223864" y="1773936"/>
+            <a:ext cx="5327752" cy="1965960"/>
           </a:xfrm>
           <a:prstGeom prst="roundRect">
             <a:avLst>
-              <a:gd name="adj" fmla="val 1905"/>
+              <a:gd name="adj" fmla="val 1860"/>
             </a:avLst>
           </a:prstGeom>
           <a:solidFill>
@@ -9623,7 +9623,7 @@
         </p:nvSpPr>
         <p:spPr>
           <a:xfrm>
-            <a:off x="6406744" y="1975104"/>
+            <a:off x="6406744" y="1938528"/>
             <a:ext cx="310896" cy="310896"/>
           </a:xfrm>
           <a:prstGeom prst="ellipse">
@@ -9643,7 +9643,7 @@
         </p:nvSpPr>
         <p:spPr>
           <a:xfrm>
-            <a:off x="6406744" y="1975104"/>
+            <a:off x="6406744" y="1938528"/>
             <a:ext cx="310896" cy="310896"/>
           </a:xfrm>
           <a:prstGeom prst="rect">
@@ -9682,7 +9682,7 @@
         </p:nvSpPr>
         <p:spPr>
           <a:xfrm>
-            <a:off x="6790792" y="1938528"/>
+            <a:off x="6790792" y="1901952"/>
             <a:ext cx="4559656" cy="512064"/>
           </a:xfrm>
           <a:prstGeom prst="rect">
@@ -9722,7 +9722,7 @@
               <a:buNone/>
             </a:pPr>
             <a:r>
-              <a:rPr lang="en-US" sz="800" i="1" dirty="0">
+              <a:rPr lang="en-US" sz="1050" dirty="0">
                 <a:solidFill>
                   <a:srgbClr val="12B198"/>
                 </a:solidFill>
@@ -9744,8 +9744,8 @@
         </p:nvSpPr>
         <p:spPr>
           <a:xfrm>
-            <a:off x="6443320" y="2487168"/>
-            <a:ext cx="4888840" cy="1097280"/>
+            <a:off x="6443320" y="2450592"/>
+            <a:ext cx="4888840" cy="1143000"/>
           </a:xfrm>
           <a:prstGeom prst="rect">
             <a:avLst/>
@@ -9790,9 +9790,9 @@
               <a:buNone/>
             </a:pPr>
             <a:r>
-              <a:rPr lang="en-US" sz="750" i="1" dirty="0">
-                <a:solidFill>
-                  <a:srgbClr val="5F7183"/>
+              <a:rPr lang="en-US" sz="950" dirty="0">
+                <a:solidFill>
+                  <a:srgbClr val="1B2733"/>
                 </a:solidFill>
                 <a:latin typeface="Calibri" pitchFamily="34" charset="0"/>
                 <a:ea typeface="Calibri" pitchFamily="34" charset="-122"/>
@@ -9836,9 +9836,9 @@
               <a:buNone/>
             </a:pPr>
             <a:r>
-              <a:rPr lang="en-US" sz="750" i="1" dirty="0">
-                <a:solidFill>
-                  <a:srgbClr val="5F7183"/>
+              <a:rPr lang="en-US" sz="950" dirty="0">
+                <a:solidFill>
+                  <a:srgbClr val="1B2733"/>
                 </a:solidFill>
                 <a:latin typeface="Calibri" pitchFamily="34" charset="0"/>
                 <a:ea typeface="Calibri" pitchFamily="34" charset="-122"/>
@@ -9882,9 +9882,9 @@
               <a:buNone/>
             </a:pPr>
             <a:r>
-              <a:rPr lang="en-US" sz="750" i="1" dirty="0">
-                <a:solidFill>
-                  <a:srgbClr val="5F7183"/>
+              <a:rPr lang="en-US" sz="950" dirty="0">
+                <a:solidFill>
+                  <a:srgbClr val="1B2733"/>
                 </a:solidFill>
                 <a:latin typeface="Calibri" pitchFamily="34" charset="0"/>
                 <a:ea typeface="Calibri" pitchFamily="34" charset="-122"/>
@@ -9928,9 +9928,9 @@
               <a:buNone/>
             </a:pPr>
             <a:r>
-              <a:rPr lang="en-US" sz="750" i="1" dirty="0">
-                <a:solidFill>
-                  <a:srgbClr val="5F7183"/>
+              <a:rPr lang="en-US" sz="950" dirty="0">
+                <a:solidFill>
+                  <a:srgbClr val="1B2733"/>
                 </a:solidFill>
                 <a:latin typeface="Calibri" pitchFamily="34" charset="0"/>
                 <a:ea typeface="Calibri" pitchFamily="34" charset="-122"/>
@@ -9950,12 +9950,12 @@
         </p:nvSpPr>
         <p:spPr>
           <a:xfrm>
-            <a:off x="640080" y="3931920"/>
-            <a:ext cx="5327752" cy="1920240"/>
+            <a:off x="640080" y="3941064"/>
+            <a:ext cx="5327752" cy="1965960"/>
           </a:xfrm>
           <a:prstGeom prst="roundRect">
             <a:avLst>
-              <a:gd name="adj" fmla="val 1905"/>
+              <a:gd name="adj" fmla="val 1860"/>
             </a:avLst>
           </a:prstGeom>
           <a:solidFill>
@@ -9972,7 +9972,7 @@
         </p:nvSpPr>
         <p:spPr>
           <a:xfrm>
-            <a:off x="822960" y="4096512"/>
+            <a:off x="822960" y="4105656"/>
             <a:ext cx="310896" cy="310896"/>
           </a:xfrm>
           <a:prstGeom prst="ellipse">
@@ -9992,7 +9992,7 @@
         </p:nvSpPr>
         <p:spPr>
           <a:xfrm>
-            <a:off x="822960" y="4096512"/>
+            <a:off x="822960" y="4105656"/>
             <a:ext cx="310896" cy="310896"/>
           </a:xfrm>
           <a:prstGeom prst="rect">
@@ -10031,7 +10031,7 @@
         </p:nvSpPr>
         <p:spPr>
           <a:xfrm>
-            <a:off x="1207008" y="4059936"/>
+            <a:off x="1207008" y="4069080"/>
             <a:ext cx="4559656" cy="512064"/>
           </a:xfrm>
           <a:prstGeom prst="rect">
@@ -10071,7 +10071,7 @@
               <a:buNone/>
             </a:pPr>
             <a:r>
-              <a:rPr lang="en-US" sz="800" i="1" dirty="0">
+              <a:rPr lang="en-US" sz="1050" dirty="0">
                 <a:solidFill>
                   <a:srgbClr val="12B198"/>
                 </a:solidFill>
@@ -10093,8 +10093,8 @@
         </p:nvSpPr>
         <p:spPr>
           <a:xfrm>
-            <a:off x="859536" y="4608576"/>
-            <a:ext cx="4888840" cy="1097280"/>
+            <a:off x="859536" y="4617720"/>
+            <a:ext cx="4888840" cy="1143000"/>
           </a:xfrm>
           <a:prstGeom prst="rect">
             <a:avLst/>
@@ -10139,9 +10139,9 @@
               <a:buNone/>
             </a:pPr>
             <a:r>
-              <a:rPr lang="en-US" sz="750" i="1" dirty="0">
-                <a:solidFill>
-                  <a:srgbClr val="5F7183"/>
+              <a:rPr lang="en-US" sz="950" dirty="0">
+                <a:solidFill>
+                  <a:srgbClr val="1B2733"/>
                 </a:solidFill>
                 <a:latin typeface="Calibri" pitchFamily="34" charset="0"/>
                 <a:ea typeface="Calibri" pitchFamily="34" charset="-122"/>
@@ -10185,9 +10185,9 @@
               <a:buNone/>
             </a:pPr>
             <a:r>
-              <a:rPr lang="en-US" sz="750" i="1" dirty="0">
-                <a:solidFill>
-                  <a:srgbClr val="5F7183"/>
+              <a:rPr lang="en-US" sz="950" dirty="0">
+                <a:solidFill>
+                  <a:srgbClr val="1B2733"/>
                 </a:solidFill>
                 <a:latin typeface="Calibri" pitchFamily="34" charset="0"/>
                 <a:ea typeface="Calibri" pitchFamily="34" charset="-122"/>
@@ -10231,9 +10231,9 @@
               <a:buNone/>
             </a:pPr>
             <a:r>
-              <a:rPr lang="en-US" sz="750" i="1" dirty="0">
-                <a:solidFill>
-                  <a:srgbClr val="5F7183"/>
+              <a:rPr lang="en-US" sz="950" dirty="0">
+                <a:solidFill>
+                  <a:srgbClr val="1B2733"/>
                 </a:solidFill>
                 <a:latin typeface="Calibri" pitchFamily="34" charset="0"/>
                 <a:ea typeface="Calibri" pitchFamily="34" charset="-122"/>
@@ -10277,9 +10277,9 @@
               <a:buNone/>
             </a:pPr>
             <a:r>
-              <a:rPr lang="en-US" sz="750" i="1" dirty="0">
-                <a:solidFill>
-                  <a:srgbClr val="5F7183"/>
+              <a:rPr lang="en-US" sz="950" dirty="0">
+                <a:solidFill>
+                  <a:srgbClr val="1B2733"/>
                 </a:solidFill>
                 <a:latin typeface="Calibri" pitchFamily="34" charset="0"/>
                 <a:ea typeface="Calibri" pitchFamily="34" charset="-122"/>
@@ -10299,12 +10299,12 @@
         </p:nvSpPr>
         <p:spPr>
           <a:xfrm>
-            <a:off x="6223864" y="3931920"/>
-            <a:ext cx="5327752" cy="1920240"/>
+            <a:off x="6223864" y="3941064"/>
+            <a:ext cx="5327752" cy="1965960"/>
           </a:xfrm>
           <a:prstGeom prst="roundRect">
             <a:avLst>
-              <a:gd name="adj" fmla="val 1905"/>
+              <a:gd name="adj" fmla="val 1860"/>
             </a:avLst>
           </a:prstGeom>
           <a:solidFill>
@@ -10321,7 +10321,7 @@
         </p:nvSpPr>
         <p:spPr>
           <a:xfrm>
-            <a:off x="6406744" y="4096512"/>
+            <a:off x="6406744" y="4105656"/>
             <a:ext cx="310896" cy="310896"/>
           </a:xfrm>
           <a:prstGeom prst="ellipse">
@@ -10341,7 +10341,7 @@
         </p:nvSpPr>
         <p:spPr>
           <a:xfrm>
-            <a:off x="6406744" y="4096512"/>
+            <a:off x="6406744" y="4105656"/>
             <a:ext cx="310896" cy="310896"/>
           </a:xfrm>
           <a:prstGeom prst="rect">
@@ -10380,7 +10380,7 @@
         </p:nvSpPr>
         <p:spPr>
           <a:xfrm>
-            <a:off x="6790792" y="4059936"/>
+            <a:off x="6790792" y="4069080"/>
             <a:ext cx="4559656" cy="512064"/>
           </a:xfrm>
           <a:prstGeom prst="rect">
@@ -10420,7 +10420,7 @@
               <a:buNone/>
             </a:pPr>
             <a:r>
-              <a:rPr lang="en-US" sz="800" i="1" dirty="0">
+              <a:rPr lang="en-US" sz="1050" dirty="0">
                 <a:solidFill>
                   <a:srgbClr val="12B198"/>
                 </a:solidFill>
@@ -10442,8 +10442,8 @@
         </p:nvSpPr>
         <p:spPr>
           <a:xfrm>
-            <a:off x="6443320" y="4608576"/>
-            <a:ext cx="4888840" cy="1097280"/>
+            <a:off x="6443320" y="4617720"/>
+            <a:ext cx="4888840" cy="1143000"/>
           </a:xfrm>
           <a:prstGeom prst="rect">
             <a:avLst/>
@@ -10488,9 +10488,9 @@
               <a:buNone/>
             </a:pPr>
             <a:r>
-              <a:rPr lang="en-US" sz="750" i="1" dirty="0">
-                <a:solidFill>
-                  <a:srgbClr val="5F7183"/>
+              <a:rPr lang="en-US" sz="950" dirty="0">
+                <a:solidFill>
+                  <a:srgbClr val="1B2733"/>
                 </a:solidFill>
                 <a:latin typeface="Calibri" pitchFamily="34" charset="0"/>
                 <a:ea typeface="Calibri" pitchFamily="34" charset="-122"/>
@@ -10534,9 +10534,9 @@
               <a:buNone/>
             </a:pPr>
             <a:r>
-              <a:rPr lang="en-US" sz="750" i="1" dirty="0">
-                <a:solidFill>
-                  <a:srgbClr val="5F7183"/>
+              <a:rPr lang="en-US" sz="950" dirty="0">
+                <a:solidFill>
+                  <a:srgbClr val="1B2733"/>
                 </a:solidFill>
                 <a:latin typeface="Calibri" pitchFamily="34" charset="0"/>
                 <a:ea typeface="Calibri" pitchFamily="34" charset="-122"/>
@@ -10580,9 +10580,9 @@
               <a:buNone/>
             </a:pPr>
             <a:r>
-              <a:rPr lang="en-US" sz="750" i="1" dirty="0">
-                <a:solidFill>
-                  <a:srgbClr val="5F7183"/>
+              <a:rPr lang="en-US" sz="950" dirty="0">
+                <a:solidFill>
+                  <a:srgbClr val="1B2733"/>
                 </a:solidFill>
                 <a:latin typeface="Calibri" pitchFamily="34" charset="0"/>
                 <a:ea typeface="Calibri" pitchFamily="34" charset="-122"/>
@@ -10626,7 +10626,86 @@
               <a:buNone/>
             </a:pPr>
             <a:r>
-              <a:rPr lang="en-US" sz="750" i="1" dirty="0">
+              <a:rPr lang="en-US" sz="950" dirty="0">
+                <a:solidFill>
+                  <a:srgbClr val="1B2733"/>
+                </a:solidFill>
+                <a:latin typeface="Calibri" pitchFamily="34" charset="0"/>
+                <a:ea typeface="Calibri" pitchFamily="34" charset="-122"/>
+                <a:cs typeface="Calibri" pitchFamily="34" charset="-120"/>
+              </a:rPr>
+              <a:t>  If unsure, ask your supervisor whether you may handle it, before you do</a:t>
+            </a:r>
+            <a:endParaRPr lang="en-US" sz="950" dirty="0"/>
+          </a:p>
+        </p:txBody>
+      </p:sp>
+      <p:sp>
+        <p:nvSpPr>
+          <p:cNvPr id="28" name="Text 25"/>
+          <p:cNvSpPr/>
+          <p:nvPr/>
+        </p:nvSpPr>
+        <p:spPr>
+          <a:xfrm>
+            <a:off x="640080" y="5961888"/>
+            <a:ext cx="10911535" cy="292608"/>
+          </a:xfrm>
+          <a:prstGeom prst="rect">
+            <a:avLst/>
+          </a:prstGeom>
+          <a:noFill/>
+          <a:ln/>
+        </p:spPr>
+        <p:txBody>
+          <a:bodyPr wrap="square" lIns="0" tIns="0" rIns="0" bIns="0" rtlCol="0" anchor="t"/>
+          <a:lstStyle/>
+          <a:p>
+            <a:pPr indent="0" marL="0">
+              <a:lnSpc>
+                <a:spcPct val="88000"/>
+              </a:lnSpc>
+              <a:buNone/>
+            </a:pPr>
+            <a:r>
+              <a:rPr lang="en-US" sz="900" b="1" dirty="0">
+                <a:solidFill>
+                  <a:srgbClr val="0D8A76"/>
+                </a:solidFill>
+                <a:latin typeface="Yu Gothic" pitchFamily="34" charset="0"/>
+                <a:ea typeface="Yu Gothic" pitchFamily="34" charset="-122"/>
+                <a:cs typeface="Yu Gothic" pitchFamily="34" charset="-120"/>
+              </a:rPr>
+              <a:t>Site SOP優先　</a:t>
+            </a:r>
+            <a:pPr indent="0" marL="0">
+              <a:lnSpc>
+                <a:spcPct val="88000"/>
+              </a:lnSpc>
+              <a:buNone/>
+            </a:pPr>
+            <a:r>
+              <a:rPr lang="en-US" sz="900" dirty="0">
+                <a:solidFill>
+                  <a:srgbClr val="1B2733"/>
+                </a:solidFill>
+                <a:latin typeface="Yu Gothic" pitchFamily="34" charset="0"/>
+                <a:ea typeface="Yu Gothic" pitchFamily="34" charset="-122"/>
+                <a:cs typeface="Yu Gothic" pitchFamily="34" charset="-120"/>
+              </a:rPr>
+              <a:t>機密書類の取扱フロー、撮影可否、私物端末の持込可否は現場ごとに異なる。Site SOPを確認する。</a:t>
+            </a:r>
+            <a:endParaRPr lang="en-US" sz="900" dirty="0"/>
+          </a:p>
+          <a:p>
+            <a:pPr indent="0" marL="0">
+              <a:lnSpc>
+                <a:spcPct val="88000"/>
+              </a:lnSpc>
+              <a:buNone/>
+            </a:pPr>
+            <a:r>
+              <a:rPr lang="en-US" sz="800" i="1" dirty="0">
                 <a:solidFill>
                   <a:srgbClr val="5F7183"/>
                 </a:solidFill>
@@ -10634,22 +10713,22 @@
                 <a:ea typeface="Calibri" pitchFamily="34" charset="-122"/>
                 <a:cs typeface="Calibri" pitchFamily="34" charset="-120"/>
               </a:rPr>
-              <a:t>  If unsure, ask your supervisor whether you may handle it, before you do</a:t>
-            </a:r>
-            <a:endParaRPr lang="en-US" sz="950" dirty="0"/>
-          </a:p>
-        </p:txBody>
-      </p:sp>
-      <p:sp>
-        <p:nvSpPr>
-          <p:cNvPr id="28" name="Text 25"/>
-          <p:cNvSpPr/>
-          <p:nvPr/>
-        </p:nvSpPr>
-        <p:spPr>
-          <a:xfrm>
-            <a:off x="640080" y="5907024"/>
-            <a:ext cx="10911535" cy="310896"/>
+              <a:t>Handling of confidential documents, photography, and personal devices differ by site. Check the Site SOP.</a:t>
+            </a:r>
+            <a:endParaRPr lang="en-US" sz="900" dirty="0"/>
+          </a:p>
+        </p:txBody>
+      </p:sp>
+      <p:sp>
+        <p:nvSpPr>
+          <p:cNvPr id="29" name="Text 26"/>
+          <p:cNvSpPr/>
+          <p:nvPr/>
+        </p:nvSpPr>
+        <p:spPr>
+          <a:xfrm>
+            <a:off x="640080" y="6272784"/>
+            <a:ext cx="9905695" cy="219456"/>
           </a:xfrm>
           <a:prstGeom prst="rect">
             <a:avLst/>
@@ -10662,167 +10741,88 @@
           <a:lstStyle/>
           <a:p>
             <a:pPr indent="0" marL="0">
-              <a:lnSpc>
-                <a:spcPct val="88000"/>
-              </a:lnSpc>
-              <a:buNone/>
-            </a:pPr>
-            <a:r>
-              <a:rPr lang="en-US" sz="900" b="1" dirty="0">
-                <a:solidFill>
-                  <a:srgbClr val="0D8A76"/>
-                </a:solidFill>
-                <a:latin typeface="Yu Gothic" pitchFamily="34" charset="0"/>
-                <a:ea typeface="Yu Gothic" pitchFamily="34" charset="-122"/>
-                <a:cs typeface="Yu Gothic" pitchFamily="34" charset="-120"/>
-              </a:rPr>
-              <a:t>Site SOP優先　</a:t>
-            </a:r>
-            <a:pPr indent="0" marL="0">
-              <a:lnSpc>
-                <a:spcPct val="88000"/>
-              </a:lnSpc>
+              <a:buNone/>
+            </a:pPr>
+            <a:r>
+              <a:rPr lang="en-US" sz="750" b="1" dirty="0">
+                <a:solidFill>
+                  <a:srgbClr val="D6E0E9"/>
+                </a:solidFill>
+                <a:latin typeface="Yu Gothic" pitchFamily="34" charset="0"/>
+                <a:ea typeface="Yu Gothic" pitchFamily="34" charset="-122"/>
+                <a:cs typeface="Yu Gothic" pitchFamily="34" charset="-120"/>
+              </a:rPr>
+              <a:t>ソース　</a:t>
+            </a:r>
+            <a:pPr indent="0" marL="0">
+              <a:buNone/>
+            </a:pPr>
+            <a:r>
+              <a:rPr lang="en-US" sz="750" dirty="0">
+                <a:solidFill>
+                  <a:srgbClr val="5F7183"/>
+                </a:solidFill>
+                <a:latin typeface="Yu Gothic" pitchFamily="34" charset="0"/>
+                <a:ea typeface="Yu Gothic" pitchFamily="34" charset="-122"/>
+                <a:cs typeface="Yu Gothic" pitchFamily="34" charset="-120"/>
+              </a:rPr>
+              <a:t>個人情報保護法、不正競争防止法、経済産業省「営業秘密管理指針」</a:t>
+            </a:r>
+            <a:endParaRPr lang="en-US" sz="750" dirty="0"/>
+          </a:p>
+        </p:txBody>
+      </p:sp>
+      <p:sp>
+        <p:nvSpPr>
+          <p:cNvPr id="30" name="Text 27"/>
+          <p:cNvSpPr/>
+          <p:nvPr/>
+        </p:nvSpPr>
+        <p:spPr>
+          <a:xfrm>
+            <a:off x="640080" y="6492240"/>
+            <a:ext cx="8778240" cy="292608"/>
+          </a:xfrm>
+          <a:prstGeom prst="rect">
+            <a:avLst/>
+          </a:prstGeom>
+          <a:noFill/>
+          <a:ln/>
+        </p:spPr>
+        <p:txBody>
+          <a:bodyPr wrap="square" lIns="0" tIns="0" rIns="0" bIns="0" rtlCol="0" anchor="ctr"/>
+          <a:lstStyle/>
+          <a:p>
+            <a:pPr indent="0" marL="0">
               <a:buNone/>
             </a:pPr>
             <a:r>
               <a:rPr lang="en-US" sz="900" dirty="0">
                 <a:solidFill>
-                  <a:srgbClr val="1B2733"/>
-                </a:solidFill>
-                <a:latin typeface="Yu Gothic" pitchFamily="34" charset="0"/>
-                <a:ea typeface="Yu Gothic" pitchFamily="34" charset="-122"/>
-                <a:cs typeface="Yu Gothic" pitchFamily="34" charset="-120"/>
-              </a:rPr>
-              <a:t>機密書類の取扱フロー、撮影可否、私物端末の持込可否は現場ごとに異なる。Site SOPを確認する。</a:t>
+                  <a:srgbClr val="5F7183"/>
+                </a:solidFill>
+                <a:latin typeface="Yu Gothic" pitchFamily="34" charset="0"/>
+                <a:ea typeface="Yu Gothic" pitchFamily="34" charset="-122"/>
+                <a:cs typeface="Yu Gothic" pitchFamily="34" charset="-120"/>
+              </a:rPr>
+              <a:t>第1時限｜基本教育1 警備業務実施の基本原則  </a:t>
+            </a:r>
+            <a:pPr indent="0" marL="0">
+              <a:buNone/>
+            </a:pPr>
+            <a:r>
+              <a:rPr lang="en-US" sz="850" i="1" dirty="0">
+                <a:solidFill>
+                  <a:srgbClr val="D6E0E9"/>
+                </a:solidFill>
+                <a:latin typeface="Calibri" pitchFamily="34" charset="0"/>
+                <a:ea typeface="Calibri" pitchFamily="34" charset="-122"/>
+                <a:cs typeface="Calibri" pitchFamily="34" charset="-120"/>
+              </a:rPr>
+              <a:t>Period 1 | Basic Training 1 — Fundamental Principles</a:t>
             </a:r>
             <a:endParaRPr lang="en-US" sz="900" dirty="0"/>
           </a:p>
-          <a:p>
-            <a:pPr indent="0" marL="0">
-              <a:lnSpc>
-                <a:spcPct val="88000"/>
-              </a:lnSpc>
-              <a:buNone/>
-            </a:pPr>
-            <a:r>
-              <a:rPr lang="en-US" sz="750" i="1" dirty="0">
-                <a:solidFill>
-                  <a:srgbClr val="5F7183"/>
-                </a:solidFill>
-                <a:latin typeface="Calibri" pitchFamily="34" charset="0"/>
-                <a:ea typeface="Calibri" pitchFamily="34" charset="-122"/>
-                <a:cs typeface="Calibri" pitchFamily="34" charset="-120"/>
-              </a:rPr>
-              <a:t>Handling of confidential documents, photography, and personal devices differ by site. Check the Site SOP.</a:t>
-            </a:r>
-            <a:endParaRPr lang="en-US" sz="900" dirty="0"/>
-          </a:p>
-        </p:txBody>
-      </p:sp>
-      <p:sp>
-        <p:nvSpPr>
-          <p:cNvPr id="29" name="Text 26"/>
-          <p:cNvSpPr/>
-          <p:nvPr/>
-        </p:nvSpPr>
-        <p:spPr>
-          <a:xfrm>
-            <a:off x="640080" y="6272784"/>
-            <a:ext cx="9905695" cy="237744"/>
-          </a:xfrm>
-          <a:prstGeom prst="rect">
-            <a:avLst/>
-          </a:prstGeom>
-          <a:noFill/>
-          <a:ln/>
-        </p:spPr>
-        <p:txBody>
-          <a:bodyPr wrap="square" lIns="0" tIns="0" rIns="0" bIns="0" rtlCol="0" anchor="t"/>
-          <a:lstStyle/>
-          <a:p>
-            <a:pPr indent="0" marL="0">
-              <a:buNone/>
-            </a:pPr>
-            <a:r>
-              <a:rPr lang="en-US" sz="750" b="1" dirty="0">
-                <a:solidFill>
-                  <a:srgbClr val="D6E0E9"/>
-                </a:solidFill>
-                <a:latin typeface="Yu Gothic" pitchFamily="34" charset="0"/>
-                <a:ea typeface="Yu Gothic" pitchFamily="34" charset="-122"/>
-                <a:cs typeface="Yu Gothic" pitchFamily="34" charset="-120"/>
-              </a:rPr>
-              <a:t>ソース　</a:t>
-            </a:r>
-            <a:pPr indent="0" marL="0">
-              <a:buNone/>
-            </a:pPr>
-            <a:r>
-              <a:rPr lang="en-US" sz="750" dirty="0">
-                <a:solidFill>
-                  <a:srgbClr val="5F7183"/>
-                </a:solidFill>
-                <a:latin typeface="Yu Gothic" pitchFamily="34" charset="0"/>
-                <a:ea typeface="Yu Gothic" pitchFamily="34" charset="-122"/>
-                <a:cs typeface="Yu Gothic" pitchFamily="34" charset="-120"/>
-              </a:rPr>
-              <a:t>個人情報保護法、不正競争防止法、経済産業省「営業秘密管理指針」</a:t>
-            </a:r>
-            <a:endParaRPr lang="en-US" sz="750" dirty="0"/>
-          </a:p>
-        </p:txBody>
-      </p:sp>
-      <p:sp>
-        <p:nvSpPr>
-          <p:cNvPr id="30" name="Text 27"/>
-          <p:cNvSpPr/>
-          <p:nvPr/>
-        </p:nvSpPr>
-        <p:spPr>
-          <a:xfrm>
-            <a:off x="640080" y="6382512"/>
-            <a:ext cx="8778240" cy="292608"/>
-          </a:xfrm>
-          <a:prstGeom prst="rect">
-            <a:avLst/>
-          </a:prstGeom>
-          <a:noFill/>
-          <a:ln/>
-        </p:spPr>
-        <p:txBody>
-          <a:bodyPr wrap="square" lIns="0" tIns="0" rIns="0" bIns="0" rtlCol="0" anchor="ctr"/>
-          <a:lstStyle/>
-          <a:p>
-            <a:pPr indent="0" marL="0">
-              <a:buNone/>
-            </a:pPr>
-            <a:r>
-              <a:rPr lang="en-US" sz="900" dirty="0">
-                <a:solidFill>
-                  <a:srgbClr val="5F7183"/>
-                </a:solidFill>
-                <a:latin typeface="Yu Gothic" pitchFamily="34" charset="0"/>
-                <a:ea typeface="Yu Gothic" pitchFamily="34" charset="-122"/>
-                <a:cs typeface="Yu Gothic" pitchFamily="34" charset="-120"/>
-              </a:rPr>
-              <a:t>第1時限｜基本教育1 警備業務実施の基本原則  </a:t>
-            </a:r>
-            <a:pPr indent="0" marL="0">
-              <a:buNone/>
-            </a:pPr>
-            <a:r>
-              <a:rPr lang="en-US" sz="850" i="1" dirty="0">
-                <a:solidFill>
-                  <a:srgbClr val="D6E0E9"/>
-                </a:solidFill>
-                <a:latin typeface="Calibri" pitchFamily="34" charset="0"/>
-                <a:ea typeface="Calibri" pitchFamily="34" charset="-122"/>
-                <a:cs typeface="Calibri" pitchFamily="34" charset="-120"/>
-              </a:rPr>
-              <a:t>Period 1 | Basic Training 1 — Fundamental Principles</a:t>
-            </a:r>
-            <a:endParaRPr lang="en-US" sz="900" dirty="0"/>
-          </a:p>
         </p:txBody>
       </p:sp>
       <p:sp>
@@ -10833,7 +10833,7 @@
         </p:nvSpPr>
         <p:spPr>
           <a:xfrm>
-            <a:off x="10637215" y="6382512"/>
+            <a:off x="10637215" y="6492240"/>
             <a:ext cx="914400" cy="292608"/>
           </a:xfrm>
           <a:prstGeom prst="rect">
@@ -10968,7 +10968,7 @@
               <a:buNone/>
             </a:pPr>
             <a:r>
-              <a:rPr lang="en-US" sz="1250" i="1" dirty="0">
+              <a:rPr lang="en-US" sz="1350" dirty="0">
                 <a:solidFill>
                   <a:srgbClr val="12B198"/>
                 </a:solidFill>
@@ -11074,9 +11074,9 @@
               <a:buNone/>
             </a:pPr>
             <a:r>
-              <a:rPr lang="en-US" sz="1050" i="1" dirty="0">
-                <a:solidFill>
-                  <a:srgbClr val="9FD8CD"/>
+              <a:rPr lang="en-US" sz="1050" dirty="0">
+                <a:solidFill>
+                  <a:srgbClr val="DCEFEB"/>
                 </a:solidFill>
                 <a:latin typeface="Calibri" pitchFamily="34" charset="0"/>
                 <a:ea typeface="Calibri" pitchFamily="34" charset="-122"/>
@@ -11256,9 +11256,9 @@
               <a:buNone/>
             </a:pPr>
             <a:r>
-              <a:rPr lang="en-US" sz="1000" i="1" dirty="0">
-                <a:solidFill>
-                  <a:srgbClr val="0D8A76"/>
+              <a:rPr lang="en-US" sz="1100" dirty="0">
+                <a:solidFill>
+                  <a:srgbClr val="1B2733"/>
                 </a:solidFill>
                 <a:latin typeface="Calibri" pitchFamily="34" charset="0"/>
                 <a:ea typeface="Calibri" pitchFamily="34" charset="-122"/>
@@ -11278,7 +11278,7 @@
         </p:nvSpPr>
         <p:spPr>
           <a:xfrm>
-            <a:off x="640080" y="6382512"/>
+            <a:off x="640080" y="6492240"/>
             <a:ext cx="8778240" cy="292608"/>
           </a:xfrm>
           <a:prstGeom prst="rect">
@@ -11331,7 +11331,7 @@
         </p:nvSpPr>
         <p:spPr>
           <a:xfrm>
-            <a:off x="10637215" y="6382512"/>
+            <a:off x="10637215" y="6492240"/>
             <a:ext cx="914400" cy="292608"/>
           </a:xfrm>
           <a:prstGeom prst="rect">
@@ -11466,7 +11466,7 @@
               <a:buNone/>
             </a:pPr>
             <a:r>
-              <a:rPr lang="en-US" sz="1250" i="1" dirty="0">
+              <a:rPr lang="en-US" sz="1350" dirty="0">
                 <a:solidFill>
                   <a:srgbClr val="12B198"/>
                 </a:solidFill>
@@ -11528,9 +11528,9 @@
               <a:buNone/>
             </a:pPr>
             <a:r>
-              <a:rPr lang="en-US" sz="1000" i="1" dirty="0">
-                <a:solidFill>
-                  <a:srgbClr val="5F7183"/>
+              <a:rPr lang="en-US" sz="1000" dirty="0">
+                <a:solidFill>
+                  <a:srgbClr val="1B2733"/>
                 </a:solidFill>
                 <a:latin typeface="Calibri" pitchFamily="34" charset="0"/>
                 <a:ea typeface="Calibri" pitchFamily="34" charset="-122"/>
@@ -11612,9 +11612,9 @@
               <a:buNone/>
             </a:pPr>
             <a:r>
-              <a:rPr lang="en-US" sz="1000" i="1" dirty="0">
-                <a:solidFill>
-                  <a:srgbClr val="5F7183"/>
+              <a:rPr lang="en-US" sz="1100" dirty="0">
+                <a:solidFill>
+                  <a:srgbClr val="1B2733"/>
                 </a:solidFill>
                 <a:latin typeface="Calibri" pitchFamily="34" charset="0"/>
                 <a:ea typeface="Calibri" pitchFamily="34" charset="-122"/>
@@ -11680,9 +11680,9 @@
               <a:buNone/>
             </a:pPr>
             <a:r>
-              <a:rPr lang="en-US" sz="950" i="1" dirty="0">
-                <a:solidFill>
-                  <a:srgbClr val="5F7183"/>
+              <a:rPr lang="en-US" sz="1150" dirty="0">
+                <a:solidFill>
+                  <a:srgbClr val="1B2733"/>
                 </a:solidFill>
                 <a:latin typeface="Calibri" pitchFamily="34" charset="0"/>
                 <a:ea typeface="Calibri" pitchFamily="34" charset="-122"/>
@@ -11726,9 +11726,9 @@
               <a:buNone/>
             </a:pPr>
             <a:r>
-              <a:rPr lang="en-US" sz="950" i="1" dirty="0">
-                <a:solidFill>
-                  <a:srgbClr val="5F7183"/>
+              <a:rPr lang="en-US" sz="1150" dirty="0">
+                <a:solidFill>
+                  <a:srgbClr val="1B2733"/>
                 </a:solidFill>
                 <a:latin typeface="Calibri" pitchFamily="34" charset="0"/>
                 <a:ea typeface="Calibri" pitchFamily="34" charset="-122"/>
@@ -11772,9 +11772,9 @@
               <a:buNone/>
             </a:pPr>
             <a:r>
-              <a:rPr lang="en-US" sz="950" i="1" dirty="0">
-                <a:solidFill>
-                  <a:srgbClr val="5F7183"/>
+              <a:rPr lang="en-US" sz="1150" dirty="0">
+                <a:solidFill>
+                  <a:srgbClr val="1B2733"/>
                 </a:solidFill>
                 <a:latin typeface="Calibri" pitchFamily="34" charset="0"/>
                 <a:ea typeface="Calibri" pitchFamily="34" charset="-122"/>
@@ -11818,9 +11818,9 @@
               <a:buNone/>
             </a:pPr>
             <a:r>
-              <a:rPr lang="en-US" sz="950" i="1" dirty="0">
-                <a:solidFill>
-                  <a:srgbClr val="5F7183"/>
+              <a:rPr lang="en-US" sz="1150" dirty="0">
+                <a:solidFill>
+                  <a:srgbClr val="1B2733"/>
                 </a:solidFill>
                 <a:latin typeface="Calibri" pitchFamily="34" charset="0"/>
                 <a:ea typeface="Calibri" pitchFamily="34" charset="-122"/>
@@ -11864,9 +11864,9 @@
               <a:buNone/>
             </a:pPr>
             <a:r>
-              <a:rPr lang="en-US" sz="950" i="1" dirty="0">
-                <a:solidFill>
-                  <a:srgbClr val="5F7183"/>
+              <a:rPr lang="en-US" sz="1150" dirty="0">
+                <a:solidFill>
+                  <a:srgbClr val="1B2733"/>
                 </a:solidFill>
                 <a:latin typeface="Calibri" pitchFamily="34" charset="0"/>
                 <a:ea typeface="Calibri" pitchFamily="34" charset="-122"/>
@@ -11948,9 +11948,9 @@
               <a:buNone/>
             </a:pPr>
             <a:r>
-              <a:rPr lang="en-US" sz="1000" i="1" dirty="0">
-                <a:solidFill>
-                  <a:srgbClr val="5F7183"/>
+              <a:rPr lang="en-US" sz="1100" dirty="0">
+                <a:solidFill>
+                  <a:srgbClr val="1B2733"/>
                 </a:solidFill>
                 <a:latin typeface="Calibri" pitchFamily="34" charset="0"/>
                 <a:ea typeface="Calibri" pitchFamily="34" charset="-122"/>
@@ -12016,9 +12016,9 @@
               <a:buNone/>
             </a:pPr>
             <a:r>
-              <a:rPr lang="en-US" sz="950" i="1" dirty="0">
-                <a:solidFill>
-                  <a:srgbClr val="5F7183"/>
+              <a:rPr lang="en-US" sz="1150" dirty="0">
+                <a:solidFill>
+                  <a:srgbClr val="1B2733"/>
                 </a:solidFill>
                 <a:latin typeface="Calibri" pitchFamily="34" charset="0"/>
                 <a:ea typeface="Calibri" pitchFamily="34" charset="-122"/>
@@ -12062,9 +12062,9 @@
               <a:buNone/>
             </a:pPr>
             <a:r>
-              <a:rPr lang="en-US" sz="950" i="1" dirty="0">
-                <a:solidFill>
-                  <a:srgbClr val="5F7183"/>
+              <a:rPr lang="en-US" sz="1150" dirty="0">
+                <a:solidFill>
+                  <a:srgbClr val="1B2733"/>
                 </a:solidFill>
                 <a:latin typeface="Calibri" pitchFamily="34" charset="0"/>
                 <a:ea typeface="Calibri" pitchFamily="34" charset="-122"/>
@@ -12108,9 +12108,9 @@
               <a:buNone/>
             </a:pPr>
             <a:r>
-              <a:rPr lang="en-US" sz="950" i="1" dirty="0">
-                <a:solidFill>
-                  <a:srgbClr val="5F7183"/>
+              <a:rPr lang="en-US" sz="1150" dirty="0">
+                <a:solidFill>
+                  <a:srgbClr val="1B2733"/>
                 </a:solidFill>
                 <a:latin typeface="Calibri" pitchFamily="34" charset="0"/>
                 <a:ea typeface="Calibri" pitchFamily="34" charset="-122"/>
@@ -12154,9 +12154,9 @@
               <a:buNone/>
             </a:pPr>
             <a:r>
-              <a:rPr lang="en-US" sz="950" i="1" dirty="0">
-                <a:solidFill>
-                  <a:srgbClr val="5F7183"/>
+              <a:rPr lang="en-US" sz="1150" dirty="0">
+                <a:solidFill>
+                  <a:srgbClr val="1B2733"/>
                 </a:solidFill>
                 <a:latin typeface="Calibri" pitchFamily="34" charset="0"/>
                 <a:ea typeface="Calibri" pitchFamily="34" charset="-122"/>
@@ -12200,9 +12200,9 @@
               <a:buNone/>
             </a:pPr>
             <a:r>
-              <a:rPr lang="en-US" sz="950" i="1" dirty="0">
-                <a:solidFill>
-                  <a:srgbClr val="5F7183"/>
+              <a:rPr lang="en-US" sz="1150" dirty="0">
+                <a:solidFill>
+                  <a:srgbClr val="1B2733"/>
                 </a:solidFill>
                 <a:latin typeface="Calibri" pitchFamily="34" charset="0"/>
                 <a:ea typeface="Calibri" pitchFamily="34" charset="-122"/>
@@ -12262,49 +12262,49 @@
               <a:buNone/>
             </a:pPr>
             <a:r>
-              <a:rPr lang="en-US" sz="1000" i="1" dirty="0">
+              <a:rPr lang="en-US" sz="1000" dirty="0">
+                <a:solidFill>
+                  <a:srgbClr val="1B2733"/>
+                </a:solidFill>
+                <a:latin typeface="Calibri" pitchFamily="34" charset="0"/>
+                <a:ea typeface="Calibri" pitchFamily="34" charset="-122"/>
+                <a:cs typeface="Calibri" pitchFamily="34" charset="-120"/>
+              </a:rPr>
+              <a:t>Security Services Act Art. 16 — a guard's uniform must be clearly distinguishable from the uniform of a police officer or other public official.</a:t>
+            </a:r>
+            <a:endParaRPr lang="en-US" sz="1300" dirty="0"/>
+          </a:p>
+        </p:txBody>
+      </p:sp>
+      <p:sp>
+        <p:nvSpPr>
+          <p:cNvPr id="12" name="Text 9"/>
+          <p:cNvSpPr/>
+          <p:nvPr/>
+        </p:nvSpPr>
+        <p:spPr>
+          <a:xfrm>
+            <a:off x="640080" y="6492240"/>
+            <a:ext cx="8778240" cy="292608"/>
+          </a:xfrm>
+          <a:prstGeom prst="rect">
+            <a:avLst/>
+          </a:prstGeom>
+          <a:noFill/>
+          <a:ln/>
+        </p:spPr>
+        <p:txBody>
+          <a:bodyPr wrap="square" lIns="0" tIns="0" rIns="0" bIns="0" rtlCol="0" anchor="ctr"/>
+          <a:lstStyle/>
+          <a:p>
+            <a:pPr indent="0" marL="0">
+              <a:buNone/>
+            </a:pPr>
+            <a:r>
+              <a:rPr lang="en-US" sz="900" dirty="0">
                 <a:solidFill>
                   <a:srgbClr val="5F7183"/>
                 </a:solidFill>
-                <a:latin typeface="Calibri" pitchFamily="34" charset="0"/>
-                <a:ea typeface="Calibri" pitchFamily="34" charset="-122"/>
-                <a:cs typeface="Calibri" pitchFamily="34" charset="-120"/>
-              </a:rPr>
-              <a:t>Security Services Act Art. 16 — a guard's uniform must be clearly distinguishable from the uniform of a police officer or other public official.</a:t>
-            </a:r>
-            <a:endParaRPr lang="en-US" sz="1300" dirty="0"/>
-          </a:p>
-        </p:txBody>
-      </p:sp>
-      <p:sp>
-        <p:nvSpPr>
-          <p:cNvPr id="12" name="Text 9"/>
-          <p:cNvSpPr/>
-          <p:nvPr/>
-        </p:nvSpPr>
-        <p:spPr>
-          <a:xfrm>
-            <a:off x="640080" y="6382512"/>
-            <a:ext cx="8778240" cy="292608"/>
-          </a:xfrm>
-          <a:prstGeom prst="rect">
-            <a:avLst/>
-          </a:prstGeom>
-          <a:noFill/>
-          <a:ln/>
-        </p:spPr>
-        <p:txBody>
-          <a:bodyPr wrap="square" lIns="0" tIns="0" rIns="0" bIns="0" rtlCol="0" anchor="ctr"/>
-          <a:lstStyle/>
-          <a:p>
-            <a:pPr indent="0" marL="0">
-              <a:buNone/>
-            </a:pPr>
-            <a:r>
-              <a:rPr lang="en-US" sz="900" dirty="0">
-                <a:solidFill>
-                  <a:srgbClr val="5F7183"/>
-                </a:solidFill>
                 <a:latin typeface="Yu Gothic" pitchFamily="34" charset="0"/>
                 <a:ea typeface="Yu Gothic" pitchFamily="34" charset="-122"/>
                 <a:cs typeface="Yu Gothic" pitchFamily="34" charset="-120"/>
@@ -12337,7 +12337,7 @@
         </p:nvSpPr>
         <p:spPr>
           <a:xfrm>
-            <a:off x="10637215" y="6382512"/>
+            <a:off x="10637215" y="6492240"/>
             <a:ext cx="914400" cy="292608"/>
           </a:xfrm>
           <a:prstGeom prst="rect">
@@ -12432,8 +12432,8 @@
         </p:nvSpPr>
         <p:spPr>
           <a:xfrm>
-            <a:off x="640080" y="384048"/>
-            <a:ext cx="8982151" cy="768096"/>
+            <a:off x="640080" y="365760"/>
+            <a:ext cx="8982151" cy="749808"/>
           </a:xfrm>
           <a:prstGeom prst="rect">
             <a:avLst/>
@@ -12472,7 +12472,7 @@
               <a:buNone/>
             </a:pPr>
             <a:r>
-              <a:rPr lang="en-US" sz="1100" i="1" dirty="0">
+              <a:rPr lang="en-US" sz="1100" dirty="0">
                 <a:solidFill>
                   <a:srgbClr val="12B198"/>
                 </a:solidFill>
@@ -12494,7 +12494,7 @@
         </p:nvSpPr>
         <p:spPr>
           <a:xfrm>
-            <a:off x="9686239" y="438912"/>
+            <a:off x="9686239" y="420624"/>
             <a:ext cx="932688" cy="310896"/>
           </a:xfrm>
           <a:prstGeom prst="roundRect">
@@ -12516,7 +12516,7 @@
         </p:nvSpPr>
         <p:spPr>
           <a:xfrm>
-            <a:off x="9686239" y="438912"/>
+            <a:off x="9686239" y="420624"/>
             <a:ext cx="932688" cy="310896"/>
           </a:xfrm>
           <a:prstGeom prst="rect">
@@ -12555,12 +12555,12 @@
         </p:nvSpPr>
         <p:spPr>
           <a:xfrm>
-            <a:off x="640080" y="1188720"/>
-            <a:ext cx="10911535" cy="530352"/>
+            <a:off x="640080" y="1115568"/>
+            <a:ext cx="10911535" cy="585216"/>
           </a:xfrm>
           <a:prstGeom prst="roundRect">
             <a:avLst>
-              <a:gd name="adj" fmla="val 6897"/>
+              <a:gd name="adj" fmla="val 6250"/>
             </a:avLst>
           </a:prstGeom>
           <a:solidFill>
@@ -12577,8 +12577,8 @@
         </p:nvSpPr>
         <p:spPr>
           <a:xfrm>
-            <a:off x="877824" y="1234440"/>
-            <a:ext cx="10436047" cy="438912"/>
+            <a:off x="877824" y="1161288"/>
+            <a:ext cx="10436047" cy="493776"/>
           </a:xfrm>
           <a:prstGeom prst="rect">
             <a:avLst/>
@@ -12614,7 +12614,7 @@
               <a:buNone/>
             </a:pPr>
             <a:r>
-              <a:rPr lang="en-US" sz="800" dirty="0">
+              <a:rPr lang="en-US" sz="900" dirty="0">
                 <a:solidFill>
                   <a:srgbClr val="0D8A76"/>
                 </a:solidFill>
@@ -12651,9 +12651,9 @@
               <a:buNone/>
             </a:pPr>
             <a:r>
-              <a:rPr lang="en-US" sz="850" i="1" dirty="0">
-                <a:solidFill>
-                  <a:srgbClr val="5F7183"/>
+              <a:rPr lang="en-US" sz="1050" dirty="0">
+                <a:solidFill>
+                  <a:srgbClr val="1B2733"/>
                 </a:solidFill>
                 <a:latin typeface="Calibri" pitchFamily="34" charset="0"/>
                 <a:ea typeface="Calibri" pitchFamily="34" charset="-122"/>
@@ -12673,12 +12673,12 @@
         </p:nvSpPr>
         <p:spPr>
           <a:xfrm>
-            <a:off x="640080" y="1810512"/>
-            <a:ext cx="5327752" cy="1920240"/>
+            <a:off x="640080" y="1773936"/>
+            <a:ext cx="5327752" cy="1965960"/>
           </a:xfrm>
           <a:prstGeom prst="roundRect">
             <a:avLst>
-              <a:gd name="adj" fmla="val 1905"/>
+              <a:gd name="adj" fmla="val 1860"/>
             </a:avLst>
           </a:prstGeom>
           <a:solidFill>
@@ -12695,7 +12695,7 @@
         </p:nvSpPr>
         <p:spPr>
           <a:xfrm>
-            <a:off x="822960" y="1975104"/>
+            <a:off x="822960" y="1938528"/>
             <a:ext cx="310896" cy="310896"/>
           </a:xfrm>
           <a:prstGeom prst="ellipse">
@@ -12715,7 +12715,7 @@
         </p:nvSpPr>
         <p:spPr>
           <a:xfrm>
-            <a:off x="822960" y="1975104"/>
+            <a:off x="822960" y="1938528"/>
             <a:ext cx="310896" cy="310896"/>
           </a:xfrm>
           <a:prstGeom prst="rect">
@@ -12754,7 +12754,7 @@
         </p:nvSpPr>
         <p:spPr>
           <a:xfrm>
-            <a:off x="1207008" y="1938528"/>
+            <a:off x="1207008" y="1901952"/>
             <a:ext cx="4559656" cy="512064"/>
           </a:xfrm>
           <a:prstGeom prst="rect">
@@ -12794,7 +12794,7 @@
               <a:buNone/>
             </a:pPr>
             <a:r>
-              <a:rPr lang="en-US" sz="800" i="1" dirty="0">
+              <a:rPr lang="en-US" sz="1050" dirty="0">
                 <a:solidFill>
                   <a:srgbClr val="12B198"/>
                 </a:solidFill>
@@ -12816,8 +12816,8 @@
         </p:nvSpPr>
         <p:spPr>
           <a:xfrm>
-            <a:off x="859536" y="2487168"/>
-            <a:ext cx="4888840" cy="1097280"/>
+            <a:off x="859536" y="2450592"/>
+            <a:ext cx="4888840" cy="1143000"/>
           </a:xfrm>
           <a:prstGeom prst="rect">
             <a:avLst/>
@@ -12862,9 +12862,9 @@
               <a:buNone/>
             </a:pPr>
             <a:r>
-              <a:rPr lang="en-US" sz="750" i="1" dirty="0">
-                <a:solidFill>
-                  <a:srgbClr val="5F7183"/>
+              <a:rPr lang="en-US" sz="950" dirty="0">
+                <a:solidFill>
+                  <a:srgbClr val="1B2733"/>
                 </a:solidFill>
                 <a:latin typeface="Calibri" pitchFamily="34" charset="0"/>
                 <a:ea typeface="Calibri" pitchFamily="34" charset="-122"/>
@@ -12908,9 +12908,9 @@
               <a:buNone/>
             </a:pPr>
             <a:r>
-              <a:rPr lang="en-US" sz="750" i="1" dirty="0">
-                <a:solidFill>
-                  <a:srgbClr val="5F7183"/>
+              <a:rPr lang="en-US" sz="950" dirty="0">
+                <a:solidFill>
+                  <a:srgbClr val="1B2733"/>
                 </a:solidFill>
                 <a:latin typeface="Calibri" pitchFamily="34" charset="0"/>
                 <a:ea typeface="Calibri" pitchFamily="34" charset="-122"/>
@@ -12954,9 +12954,9 @@
               <a:buNone/>
             </a:pPr>
             <a:r>
-              <a:rPr lang="en-US" sz="750" i="1" dirty="0">
-                <a:solidFill>
-                  <a:srgbClr val="5F7183"/>
+              <a:rPr lang="en-US" sz="950" dirty="0">
+                <a:solidFill>
+                  <a:srgbClr val="1B2733"/>
                 </a:solidFill>
                 <a:latin typeface="Calibri" pitchFamily="34" charset="0"/>
                 <a:ea typeface="Calibri" pitchFamily="34" charset="-122"/>
@@ -13000,9 +13000,9 @@
               <a:buNone/>
             </a:pPr>
             <a:r>
-              <a:rPr lang="en-US" sz="750" i="1" dirty="0">
-                <a:solidFill>
-                  <a:srgbClr val="5F7183"/>
+              <a:rPr lang="en-US" sz="950" dirty="0">
+                <a:solidFill>
+                  <a:srgbClr val="1B2733"/>
                 </a:solidFill>
                 <a:latin typeface="Calibri" pitchFamily="34" charset="0"/>
                 <a:ea typeface="Calibri" pitchFamily="34" charset="-122"/>
@@ -13022,12 +13022,12 @@
         </p:nvSpPr>
         <p:spPr>
           <a:xfrm>
-            <a:off x="6223864" y="1810512"/>
-            <a:ext cx="5327752" cy="1920240"/>
+            <a:off x="6223864" y="1773936"/>
+            <a:ext cx="5327752" cy="1965960"/>
           </a:xfrm>
           <a:prstGeom prst="roundRect">
             <a:avLst>
-              <a:gd name="adj" fmla="val 1905"/>
+              <a:gd name="adj" fmla="val 1860"/>
             </a:avLst>
           </a:prstGeom>
           <a:solidFill>
@@ -13044,7 +13044,7 @@
         </p:nvSpPr>
         <p:spPr>
           <a:xfrm>
-            <a:off x="6406744" y="1975104"/>
+            <a:off x="6406744" y="1938528"/>
             <a:ext cx="310896" cy="310896"/>
           </a:xfrm>
           <a:prstGeom prst="ellipse">
@@ -13064,7 +13064,7 @@
         </p:nvSpPr>
         <p:spPr>
           <a:xfrm>
-            <a:off x="6406744" y="1975104"/>
+            <a:off x="6406744" y="1938528"/>
             <a:ext cx="310896" cy="310896"/>
           </a:xfrm>
           <a:prstGeom prst="rect">
@@ -13103,7 +13103,7 @@
         </p:nvSpPr>
         <p:spPr>
           <a:xfrm>
-            <a:off x="6790792" y="1938528"/>
+            <a:off x="6790792" y="1901952"/>
             <a:ext cx="4559656" cy="512064"/>
           </a:xfrm>
           <a:prstGeom prst="rect">
@@ -13143,7 +13143,7 @@
               <a:buNone/>
             </a:pPr>
             <a:r>
-              <a:rPr lang="en-US" sz="800" i="1" dirty="0">
+              <a:rPr lang="en-US" sz="1050" dirty="0">
                 <a:solidFill>
                   <a:srgbClr val="12B198"/>
                 </a:solidFill>
@@ -13165,8 +13165,8 @@
         </p:nvSpPr>
         <p:spPr>
           <a:xfrm>
-            <a:off x="6443320" y="2487168"/>
-            <a:ext cx="4888840" cy="1097280"/>
+            <a:off x="6443320" y="2450592"/>
+            <a:ext cx="4888840" cy="1143000"/>
           </a:xfrm>
           <a:prstGeom prst="rect">
             <a:avLst/>
@@ -13211,9 +13211,9 @@
               <a:buNone/>
             </a:pPr>
             <a:r>
-              <a:rPr lang="en-US" sz="750" i="1" dirty="0">
-                <a:solidFill>
-                  <a:srgbClr val="5F7183"/>
+              <a:rPr lang="en-US" sz="950" dirty="0">
+                <a:solidFill>
+                  <a:srgbClr val="1B2733"/>
                 </a:solidFill>
                 <a:latin typeface="Calibri" pitchFamily="34" charset="0"/>
                 <a:ea typeface="Calibri" pitchFamily="34" charset="-122"/>
@@ -13257,9 +13257,9 @@
               <a:buNone/>
             </a:pPr>
             <a:r>
-              <a:rPr lang="en-US" sz="750" i="1" dirty="0">
-                <a:solidFill>
-                  <a:srgbClr val="5F7183"/>
+              <a:rPr lang="en-US" sz="950" dirty="0">
+                <a:solidFill>
+                  <a:srgbClr val="1B2733"/>
                 </a:solidFill>
                 <a:latin typeface="Calibri" pitchFamily="34" charset="0"/>
                 <a:ea typeface="Calibri" pitchFamily="34" charset="-122"/>
@@ -13303,9 +13303,9 @@
               <a:buNone/>
             </a:pPr>
             <a:r>
-              <a:rPr lang="en-US" sz="750" i="1" dirty="0">
-                <a:solidFill>
-                  <a:srgbClr val="5F7183"/>
+              <a:rPr lang="en-US" sz="950" dirty="0">
+                <a:solidFill>
+                  <a:srgbClr val="1B2733"/>
                 </a:solidFill>
                 <a:latin typeface="Calibri" pitchFamily="34" charset="0"/>
                 <a:ea typeface="Calibri" pitchFamily="34" charset="-122"/>
@@ -13349,9 +13349,9 @@
               <a:buNone/>
             </a:pPr>
             <a:r>
-              <a:rPr lang="en-US" sz="750" i="1" dirty="0">
-                <a:solidFill>
-                  <a:srgbClr val="5F7183"/>
+              <a:rPr lang="en-US" sz="950" dirty="0">
+                <a:solidFill>
+                  <a:srgbClr val="1B2733"/>
                 </a:solidFill>
                 <a:latin typeface="Calibri" pitchFamily="34" charset="0"/>
                 <a:ea typeface="Calibri" pitchFamily="34" charset="-122"/>
@@ -13371,12 +13371,12 @@
         </p:nvSpPr>
         <p:spPr>
           <a:xfrm>
-            <a:off x="640080" y="3931920"/>
-            <a:ext cx="5327752" cy="1920240"/>
+            <a:off x="640080" y="3941064"/>
+            <a:ext cx="5327752" cy="1965960"/>
           </a:xfrm>
           <a:prstGeom prst="roundRect">
             <a:avLst>
-              <a:gd name="adj" fmla="val 1905"/>
+              <a:gd name="adj" fmla="val 1860"/>
             </a:avLst>
           </a:prstGeom>
           <a:solidFill>
@@ -13393,7 +13393,7 @@
         </p:nvSpPr>
         <p:spPr>
           <a:xfrm>
-            <a:off x="822960" y="4096512"/>
+            <a:off x="822960" y="4105656"/>
             <a:ext cx="310896" cy="310896"/>
           </a:xfrm>
           <a:prstGeom prst="ellipse">
@@ -13413,7 +13413,7 @@
         </p:nvSpPr>
         <p:spPr>
           <a:xfrm>
-            <a:off x="822960" y="4096512"/>
+            <a:off x="822960" y="4105656"/>
             <a:ext cx="310896" cy="310896"/>
           </a:xfrm>
           <a:prstGeom prst="rect">
@@ -13452,7 +13452,7 @@
         </p:nvSpPr>
         <p:spPr>
           <a:xfrm>
-            <a:off x="1207008" y="4059936"/>
+            <a:off x="1207008" y="4069080"/>
             <a:ext cx="4559656" cy="512064"/>
           </a:xfrm>
           <a:prstGeom prst="rect">
@@ -13492,7 +13492,7 @@
               <a:buNone/>
             </a:pPr>
             <a:r>
-              <a:rPr lang="en-US" sz="800" i="1" dirty="0">
+              <a:rPr lang="en-US" sz="1050" dirty="0">
                 <a:solidFill>
                   <a:srgbClr val="12B198"/>
                 </a:solidFill>
@@ -13514,8 +13514,8 @@
         </p:nvSpPr>
         <p:spPr>
           <a:xfrm>
-            <a:off x="859536" y="4608576"/>
-            <a:ext cx="4888840" cy="1097280"/>
+            <a:off x="859536" y="4617720"/>
+            <a:ext cx="4888840" cy="1143000"/>
           </a:xfrm>
           <a:prstGeom prst="rect">
             <a:avLst/>
@@ -13560,9 +13560,9 @@
               <a:buNone/>
             </a:pPr>
             <a:r>
-              <a:rPr lang="en-US" sz="750" i="1" dirty="0">
-                <a:solidFill>
-                  <a:srgbClr val="5F7183"/>
+              <a:rPr lang="en-US" sz="950" dirty="0">
+                <a:solidFill>
+                  <a:srgbClr val="1B2733"/>
                 </a:solidFill>
                 <a:latin typeface="Calibri" pitchFamily="34" charset="0"/>
                 <a:ea typeface="Calibri" pitchFamily="34" charset="-122"/>
@@ -13606,9 +13606,9 @@
               <a:buNone/>
             </a:pPr>
             <a:r>
-              <a:rPr lang="en-US" sz="750" i="1" dirty="0">
-                <a:solidFill>
-                  <a:srgbClr val="5F7183"/>
+              <a:rPr lang="en-US" sz="950" dirty="0">
+                <a:solidFill>
+                  <a:srgbClr val="1B2733"/>
                 </a:solidFill>
                 <a:latin typeface="Calibri" pitchFamily="34" charset="0"/>
                 <a:ea typeface="Calibri" pitchFamily="34" charset="-122"/>
@@ -13652,9 +13652,9 @@
               <a:buNone/>
             </a:pPr>
             <a:r>
-              <a:rPr lang="en-US" sz="750" i="1" dirty="0">
-                <a:solidFill>
-                  <a:srgbClr val="5F7183"/>
+              <a:rPr lang="en-US" sz="950" dirty="0">
+                <a:solidFill>
+                  <a:srgbClr val="1B2733"/>
                 </a:solidFill>
                 <a:latin typeface="Calibri" pitchFamily="34" charset="0"/>
                 <a:ea typeface="Calibri" pitchFamily="34" charset="-122"/>
@@ -13698,9 +13698,9 @@
               <a:buNone/>
             </a:pPr>
             <a:r>
-              <a:rPr lang="en-US" sz="750" i="1" dirty="0">
-                <a:solidFill>
-                  <a:srgbClr val="5F7183"/>
+              <a:rPr lang="en-US" sz="950" dirty="0">
+                <a:solidFill>
+                  <a:srgbClr val="1B2733"/>
                 </a:solidFill>
                 <a:latin typeface="Calibri" pitchFamily="34" charset="0"/>
                 <a:ea typeface="Calibri" pitchFamily="34" charset="-122"/>
@@ -13720,12 +13720,12 @@
         </p:nvSpPr>
         <p:spPr>
           <a:xfrm>
-            <a:off x="6223864" y="3931920"/>
-            <a:ext cx="5327752" cy="1920240"/>
+            <a:off x="6223864" y="3941064"/>
+            <a:ext cx="5327752" cy="1965960"/>
           </a:xfrm>
           <a:prstGeom prst="roundRect">
             <a:avLst>
-              <a:gd name="adj" fmla="val 1905"/>
+              <a:gd name="adj" fmla="val 1860"/>
             </a:avLst>
           </a:prstGeom>
           <a:solidFill>
@@ -13742,7 +13742,7 @@
         </p:nvSpPr>
         <p:spPr>
           <a:xfrm>
-            <a:off x="6406744" y="4096512"/>
+            <a:off x="6406744" y="4105656"/>
             <a:ext cx="310896" cy="310896"/>
           </a:xfrm>
           <a:prstGeom prst="ellipse">
@@ -13762,7 +13762,7 @@
         </p:nvSpPr>
         <p:spPr>
           <a:xfrm>
-            <a:off x="6406744" y="4096512"/>
+            <a:off x="6406744" y="4105656"/>
             <a:ext cx="310896" cy="310896"/>
           </a:xfrm>
           <a:prstGeom prst="rect">
@@ -13801,7 +13801,7 @@
         </p:nvSpPr>
         <p:spPr>
           <a:xfrm>
-            <a:off x="6790792" y="4059936"/>
+            <a:off x="6790792" y="4069080"/>
             <a:ext cx="4559656" cy="512064"/>
           </a:xfrm>
           <a:prstGeom prst="rect">
@@ -13841,7 +13841,7 @@
               <a:buNone/>
             </a:pPr>
             <a:r>
-              <a:rPr lang="en-US" sz="800" i="1" dirty="0">
+              <a:rPr lang="en-US" sz="1050" dirty="0">
                 <a:solidFill>
                   <a:srgbClr val="12B198"/>
                 </a:solidFill>
@@ -13863,8 +13863,8 @@
         </p:nvSpPr>
         <p:spPr>
           <a:xfrm>
-            <a:off x="6443320" y="4608576"/>
-            <a:ext cx="4888840" cy="1097280"/>
+            <a:off x="6443320" y="4617720"/>
+            <a:ext cx="4888840" cy="1143000"/>
           </a:xfrm>
           <a:prstGeom prst="rect">
             <a:avLst/>
@@ -13909,9 +13909,9 @@
               <a:buNone/>
             </a:pPr>
             <a:r>
-              <a:rPr lang="en-US" sz="750" i="1" dirty="0">
-                <a:solidFill>
-                  <a:srgbClr val="5F7183"/>
+              <a:rPr lang="en-US" sz="950" dirty="0">
+                <a:solidFill>
+                  <a:srgbClr val="1B2733"/>
                 </a:solidFill>
                 <a:latin typeface="Calibri" pitchFamily="34" charset="0"/>
                 <a:ea typeface="Calibri" pitchFamily="34" charset="-122"/>
@@ -13955,9 +13955,9 @@
               <a:buNone/>
             </a:pPr>
             <a:r>
-              <a:rPr lang="en-US" sz="750" i="1" dirty="0">
-                <a:solidFill>
-                  <a:srgbClr val="5F7183"/>
+              <a:rPr lang="en-US" sz="950" dirty="0">
+                <a:solidFill>
+                  <a:srgbClr val="1B2733"/>
                 </a:solidFill>
                 <a:latin typeface="Calibri" pitchFamily="34" charset="0"/>
                 <a:ea typeface="Calibri" pitchFamily="34" charset="-122"/>
@@ -14001,9 +14001,9 @@
               <a:buNone/>
             </a:pPr>
             <a:r>
-              <a:rPr lang="en-US" sz="750" i="1" dirty="0">
-                <a:solidFill>
-                  <a:srgbClr val="5F7183"/>
+              <a:rPr lang="en-US" sz="950" dirty="0">
+                <a:solidFill>
+                  <a:srgbClr val="1B2733"/>
                 </a:solidFill>
                 <a:latin typeface="Calibri" pitchFamily="34" charset="0"/>
                 <a:ea typeface="Calibri" pitchFamily="34" charset="-122"/>
@@ -14047,7 +14047,86 @@
               <a:buNone/>
             </a:pPr>
             <a:r>
-              <a:rPr lang="en-US" sz="750" i="1" dirty="0">
+              <a:rPr lang="en-US" sz="950" dirty="0">
+                <a:solidFill>
+                  <a:srgbClr val="1B2733"/>
+                </a:solidFill>
+                <a:latin typeface="Calibri" pitchFamily="34" charset="0"/>
+                <a:ea typeface="Calibri" pitchFamily="34" charset="-122"/>
+                <a:cs typeface="Calibri" pitchFamily="34" charset="-120"/>
+              </a:rPr>
+              <a:t>  "I meant well" is not a defence</a:t>
+            </a:r>
+            <a:endParaRPr lang="en-US" sz="950" dirty="0"/>
+          </a:p>
+        </p:txBody>
+      </p:sp>
+      <p:sp>
+        <p:nvSpPr>
+          <p:cNvPr id="28" name="Text 25"/>
+          <p:cNvSpPr/>
+          <p:nvPr/>
+        </p:nvSpPr>
+        <p:spPr>
+          <a:xfrm>
+            <a:off x="640080" y="5961888"/>
+            <a:ext cx="10911535" cy="292608"/>
+          </a:xfrm>
+          <a:prstGeom prst="rect">
+            <a:avLst/>
+          </a:prstGeom>
+          <a:noFill/>
+          <a:ln/>
+        </p:spPr>
+        <p:txBody>
+          <a:bodyPr wrap="square" lIns="0" tIns="0" rIns="0" bIns="0" rtlCol="0" anchor="t"/>
+          <a:lstStyle/>
+          <a:p>
+            <a:pPr indent="0" marL="0">
+              <a:lnSpc>
+                <a:spcPct val="88000"/>
+              </a:lnSpc>
+              <a:buNone/>
+            </a:pPr>
+            <a:r>
+              <a:rPr lang="en-US" sz="900" b="1" dirty="0">
+                <a:solidFill>
+                  <a:srgbClr val="0D8A76"/>
+                </a:solidFill>
+                <a:latin typeface="Yu Gothic" pitchFamily="34" charset="0"/>
+                <a:ea typeface="Yu Gothic" pitchFamily="34" charset="-122"/>
+                <a:cs typeface="Yu Gothic" pitchFamily="34" charset="-120"/>
+              </a:rPr>
+              <a:t>Site SOP優先　</a:t>
+            </a:r>
+            <a:pPr indent="0" marL="0">
+              <a:lnSpc>
+                <a:spcPct val="88000"/>
+              </a:lnSpc>
+              <a:buNone/>
+            </a:pPr>
+            <a:r>
+              <a:rPr lang="en-US" sz="900" dirty="0">
+                <a:solidFill>
+                  <a:srgbClr val="1B2733"/>
+                </a:solidFill>
+                <a:latin typeface="Yu Gothic" pitchFamily="34" charset="0"/>
+                <a:ea typeface="Yu Gothic" pitchFamily="34" charset="-122"/>
+                <a:cs typeface="Yu Gothic" pitchFamily="34" charset="-120"/>
+              </a:rPr>
+              <a:t>委ねられた範囲は契約と警備指令書で決まる。範囲を超える指示が出た場合は上長に確認する。</a:t>
+            </a:r>
+            <a:endParaRPr lang="en-US" sz="900" dirty="0"/>
+          </a:p>
+          <a:p>
+            <a:pPr indent="0" marL="0">
+              <a:lnSpc>
+                <a:spcPct val="88000"/>
+              </a:lnSpc>
+              <a:buNone/>
+            </a:pPr>
+            <a:r>
+              <a:rPr lang="en-US" sz="800" i="1" dirty="0">
                 <a:solidFill>
                   <a:srgbClr val="5F7183"/>
                 </a:solidFill>
@@ -14055,22 +14134,22 @@
                 <a:ea typeface="Calibri" pitchFamily="34" charset="-122"/>
                 <a:cs typeface="Calibri" pitchFamily="34" charset="-120"/>
               </a:rPr>
-              <a:t>  "I meant well" is not a defence</a:t>
-            </a:r>
-            <a:endParaRPr lang="en-US" sz="950" dirty="0"/>
-          </a:p>
-        </p:txBody>
-      </p:sp>
-      <p:sp>
-        <p:nvSpPr>
-          <p:cNvPr id="28" name="Text 25"/>
-          <p:cNvSpPr/>
-          <p:nvPr/>
-        </p:nvSpPr>
-        <p:spPr>
-          <a:xfrm>
-            <a:off x="640080" y="5907024"/>
-            <a:ext cx="10911535" cy="310896"/>
+              <a:t>The delegated scope is set by contract and post orders. If an instruction exceeds it, check with your supervisor.</a:t>
+            </a:r>
+            <a:endParaRPr lang="en-US" sz="900" dirty="0"/>
+          </a:p>
+        </p:txBody>
+      </p:sp>
+      <p:sp>
+        <p:nvSpPr>
+          <p:cNvPr id="29" name="Text 26"/>
+          <p:cNvSpPr/>
+          <p:nvPr/>
+        </p:nvSpPr>
+        <p:spPr>
+          <a:xfrm>
+            <a:off x="640080" y="6272784"/>
+            <a:ext cx="9905695" cy="219456"/>
           </a:xfrm>
           <a:prstGeom prst="rect">
             <a:avLst/>
@@ -14083,167 +14162,88 @@
           <a:lstStyle/>
           <a:p>
             <a:pPr indent="0" marL="0">
-              <a:lnSpc>
-                <a:spcPct val="88000"/>
-              </a:lnSpc>
-              <a:buNone/>
-            </a:pPr>
-            <a:r>
-              <a:rPr lang="en-US" sz="900" b="1" dirty="0">
-                <a:solidFill>
-                  <a:srgbClr val="0D8A76"/>
-                </a:solidFill>
-                <a:latin typeface="Yu Gothic" pitchFamily="34" charset="0"/>
-                <a:ea typeface="Yu Gothic" pitchFamily="34" charset="-122"/>
-                <a:cs typeface="Yu Gothic" pitchFamily="34" charset="-120"/>
-              </a:rPr>
-              <a:t>Site SOP優先　</a:t>
-            </a:r>
-            <a:pPr indent="0" marL="0">
-              <a:lnSpc>
-                <a:spcPct val="88000"/>
-              </a:lnSpc>
+              <a:buNone/>
+            </a:pPr>
+            <a:r>
+              <a:rPr lang="en-US" sz="750" b="1" dirty="0">
+                <a:solidFill>
+                  <a:srgbClr val="D6E0E9"/>
+                </a:solidFill>
+                <a:latin typeface="Yu Gothic" pitchFamily="34" charset="0"/>
+                <a:ea typeface="Yu Gothic" pitchFamily="34" charset="-122"/>
+                <a:cs typeface="Yu Gothic" pitchFamily="34" charset="-120"/>
+              </a:rPr>
+              <a:t>ソース　</a:t>
+            </a:r>
+            <a:pPr indent="0" marL="0">
+              <a:buNone/>
+            </a:pPr>
+            <a:r>
+              <a:rPr lang="en-US" sz="750" dirty="0">
+                <a:solidFill>
+                  <a:srgbClr val="5F7183"/>
+                </a:solidFill>
+                <a:latin typeface="Yu Gothic" pitchFamily="34" charset="0"/>
+                <a:ea typeface="Yu Gothic" pitchFamily="34" charset="-122"/>
+                <a:cs typeface="Yu Gothic" pitchFamily="34" charset="-120"/>
+              </a:rPr>
+              <a:t>警備業法、刑法、刑事訴訟法、警察官職務執行法</a:t>
+            </a:r>
+            <a:endParaRPr lang="en-US" sz="750" dirty="0"/>
+          </a:p>
+        </p:txBody>
+      </p:sp>
+      <p:sp>
+        <p:nvSpPr>
+          <p:cNvPr id="30" name="Text 27"/>
+          <p:cNvSpPr/>
+          <p:nvPr/>
+        </p:nvSpPr>
+        <p:spPr>
+          <a:xfrm>
+            <a:off x="640080" y="6492240"/>
+            <a:ext cx="8778240" cy="292608"/>
+          </a:xfrm>
+          <a:prstGeom prst="rect">
+            <a:avLst/>
+          </a:prstGeom>
+          <a:noFill/>
+          <a:ln/>
+        </p:spPr>
+        <p:txBody>
+          <a:bodyPr wrap="square" lIns="0" tIns="0" rIns="0" bIns="0" rtlCol="0" anchor="ctr"/>
+          <a:lstStyle/>
+          <a:p>
+            <a:pPr indent="0" marL="0">
               <a:buNone/>
             </a:pPr>
             <a:r>
               <a:rPr lang="en-US" sz="900" dirty="0">
                 <a:solidFill>
-                  <a:srgbClr val="1B2733"/>
-                </a:solidFill>
-                <a:latin typeface="Yu Gothic" pitchFamily="34" charset="0"/>
-                <a:ea typeface="Yu Gothic" pitchFamily="34" charset="-122"/>
-                <a:cs typeface="Yu Gothic" pitchFamily="34" charset="-120"/>
-              </a:rPr>
-              <a:t>委ねられた範囲は契約と警備指令書で決まる。範囲を超える指示が出た場合は上長に確認する。</a:t>
+                  <a:srgbClr val="5F7183"/>
+                </a:solidFill>
+                <a:latin typeface="Yu Gothic" pitchFamily="34" charset="0"/>
+                <a:ea typeface="Yu Gothic" pitchFamily="34" charset="-122"/>
+                <a:cs typeface="Yu Gothic" pitchFamily="34" charset="-120"/>
+              </a:rPr>
+              <a:t>第1時限｜基本教育1 警備業務実施の基本原則  </a:t>
+            </a:r>
+            <a:pPr indent="0" marL="0">
+              <a:buNone/>
+            </a:pPr>
+            <a:r>
+              <a:rPr lang="en-US" sz="850" i="1" dirty="0">
+                <a:solidFill>
+                  <a:srgbClr val="D6E0E9"/>
+                </a:solidFill>
+                <a:latin typeface="Calibri" pitchFamily="34" charset="0"/>
+                <a:ea typeface="Calibri" pitchFamily="34" charset="-122"/>
+                <a:cs typeface="Calibri" pitchFamily="34" charset="-120"/>
+              </a:rPr>
+              <a:t>Period 1 | Basic Training 1 — Fundamental Principles</a:t>
             </a:r>
             <a:endParaRPr lang="en-US" sz="900" dirty="0"/>
           </a:p>
-          <a:p>
-            <a:pPr indent="0" marL="0">
-              <a:lnSpc>
-                <a:spcPct val="88000"/>
-              </a:lnSpc>
-              <a:buNone/>
-            </a:pPr>
-            <a:r>
-              <a:rPr lang="en-US" sz="750" i="1" dirty="0">
-                <a:solidFill>
-                  <a:srgbClr val="5F7183"/>
-                </a:solidFill>
-                <a:latin typeface="Calibri" pitchFamily="34" charset="0"/>
-                <a:ea typeface="Calibri" pitchFamily="34" charset="-122"/>
-                <a:cs typeface="Calibri" pitchFamily="34" charset="-120"/>
-              </a:rPr>
-              <a:t>The delegated scope is set by contract and post orders. If an instruction exceeds it, check with your supervisor.</a:t>
-            </a:r>
-            <a:endParaRPr lang="en-US" sz="900" dirty="0"/>
-          </a:p>
-        </p:txBody>
-      </p:sp>
-      <p:sp>
-        <p:nvSpPr>
-          <p:cNvPr id="29" name="Text 26"/>
-          <p:cNvSpPr/>
-          <p:nvPr/>
-        </p:nvSpPr>
-        <p:spPr>
-          <a:xfrm>
-            <a:off x="640080" y="6272784"/>
-            <a:ext cx="9905695" cy="237744"/>
-          </a:xfrm>
-          <a:prstGeom prst="rect">
-            <a:avLst/>
-          </a:prstGeom>
-          <a:noFill/>
-          <a:ln/>
-        </p:spPr>
-        <p:txBody>
-          <a:bodyPr wrap="square" lIns="0" tIns="0" rIns="0" bIns="0" rtlCol="0" anchor="t"/>
-          <a:lstStyle/>
-          <a:p>
-            <a:pPr indent="0" marL="0">
-              <a:buNone/>
-            </a:pPr>
-            <a:r>
-              <a:rPr lang="en-US" sz="750" b="1" dirty="0">
-                <a:solidFill>
-                  <a:srgbClr val="D6E0E9"/>
-                </a:solidFill>
-                <a:latin typeface="Yu Gothic" pitchFamily="34" charset="0"/>
-                <a:ea typeface="Yu Gothic" pitchFamily="34" charset="-122"/>
-                <a:cs typeface="Yu Gothic" pitchFamily="34" charset="-120"/>
-              </a:rPr>
-              <a:t>ソース　</a:t>
-            </a:r>
-            <a:pPr indent="0" marL="0">
-              <a:buNone/>
-            </a:pPr>
-            <a:r>
-              <a:rPr lang="en-US" sz="750" dirty="0">
-                <a:solidFill>
-                  <a:srgbClr val="5F7183"/>
-                </a:solidFill>
-                <a:latin typeface="Yu Gothic" pitchFamily="34" charset="0"/>
-                <a:ea typeface="Yu Gothic" pitchFamily="34" charset="-122"/>
-                <a:cs typeface="Yu Gothic" pitchFamily="34" charset="-120"/>
-              </a:rPr>
-              <a:t>警備業法、刑法、刑事訴訟法、警察官職務執行法</a:t>
-            </a:r>
-            <a:endParaRPr lang="en-US" sz="750" dirty="0"/>
-          </a:p>
-        </p:txBody>
-      </p:sp>
-      <p:sp>
-        <p:nvSpPr>
-          <p:cNvPr id="30" name="Text 27"/>
-          <p:cNvSpPr/>
-          <p:nvPr/>
-        </p:nvSpPr>
-        <p:spPr>
-          <a:xfrm>
-            <a:off x="640080" y="6382512"/>
-            <a:ext cx="8778240" cy="292608"/>
-          </a:xfrm>
-          <a:prstGeom prst="rect">
-            <a:avLst/>
-          </a:prstGeom>
-          <a:noFill/>
-          <a:ln/>
-        </p:spPr>
-        <p:txBody>
-          <a:bodyPr wrap="square" lIns="0" tIns="0" rIns="0" bIns="0" rtlCol="0" anchor="ctr"/>
-          <a:lstStyle/>
-          <a:p>
-            <a:pPr indent="0" marL="0">
-              <a:buNone/>
-            </a:pPr>
-            <a:r>
-              <a:rPr lang="en-US" sz="900" dirty="0">
-                <a:solidFill>
-                  <a:srgbClr val="5F7183"/>
-                </a:solidFill>
-                <a:latin typeface="Yu Gothic" pitchFamily="34" charset="0"/>
-                <a:ea typeface="Yu Gothic" pitchFamily="34" charset="-122"/>
-                <a:cs typeface="Yu Gothic" pitchFamily="34" charset="-120"/>
-              </a:rPr>
-              <a:t>第1時限｜基本教育1 警備業務実施の基本原則  </a:t>
-            </a:r>
-            <a:pPr indent="0" marL="0">
-              <a:buNone/>
-            </a:pPr>
-            <a:r>
-              <a:rPr lang="en-US" sz="850" i="1" dirty="0">
-                <a:solidFill>
-                  <a:srgbClr val="D6E0E9"/>
-                </a:solidFill>
-                <a:latin typeface="Calibri" pitchFamily="34" charset="0"/>
-                <a:ea typeface="Calibri" pitchFamily="34" charset="-122"/>
-                <a:cs typeface="Calibri" pitchFamily="34" charset="-120"/>
-              </a:rPr>
-              <a:t>Period 1 | Basic Training 1 — Fundamental Principles</a:t>
-            </a:r>
-            <a:endParaRPr lang="en-US" sz="900" dirty="0"/>
-          </a:p>
         </p:txBody>
       </p:sp>
       <p:sp>
@@ -14254,7 +14254,7 @@
         </p:nvSpPr>
         <p:spPr>
           <a:xfrm>
-            <a:off x="10637215" y="6382512"/>
+            <a:off x="10637215" y="6492240"/>
             <a:ext cx="914400" cy="292608"/>
           </a:xfrm>
           <a:prstGeom prst="rect">
@@ -14389,7 +14389,7 @@
               <a:buNone/>
             </a:pPr>
             <a:r>
-              <a:rPr lang="en-US" sz="1250" i="1" dirty="0">
+              <a:rPr lang="en-US" sz="1350" dirty="0">
                 <a:solidFill>
                   <a:srgbClr val="12B198"/>
                 </a:solidFill>
@@ -14451,9 +14451,9 @@
               <a:buNone/>
             </a:pPr>
             <a:r>
-              <a:rPr lang="en-US" sz="1000" i="1" dirty="0">
-                <a:solidFill>
-                  <a:srgbClr val="5F7183"/>
+              <a:rPr lang="en-US" sz="1000" dirty="0">
+                <a:solidFill>
+                  <a:srgbClr val="1B2733"/>
                 </a:solidFill>
                 <a:latin typeface="Calibri" pitchFamily="34" charset="0"/>
                 <a:ea typeface="Calibri" pitchFamily="34" charset="-122"/>
@@ -14594,9 +14594,9 @@
               <a:buNone/>
             </a:pPr>
             <a:r>
-              <a:rPr lang="en-US" sz="900" i="1" dirty="0">
-                <a:solidFill>
-                  <a:srgbClr val="5F7183"/>
+              <a:rPr lang="en-US" sz="1050" dirty="0">
+                <a:solidFill>
+                  <a:srgbClr val="1B2733"/>
                 </a:solidFill>
                 <a:latin typeface="Calibri" pitchFamily="34" charset="0"/>
                 <a:ea typeface="Calibri" pitchFamily="34" charset="-122"/>
@@ -14737,9 +14737,9 @@
               <a:buNone/>
             </a:pPr>
             <a:r>
-              <a:rPr lang="en-US" sz="900" i="1" dirty="0">
-                <a:solidFill>
-                  <a:srgbClr val="5F7183"/>
+              <a:rPr lang="en-US" sz="1050" dirty="0">
+                <a:solidFill>
+                  <a:srgbClr val="1B2733"/>
                 </a:solidFill>
                 <a:latin typeface="Calibri" pitchFamily="34" charset="0"/>
                 <a:ea typeface="Calibri" pitchFamily="34" charset="-122"/>
@@ -14880,9 +14880,9 @@
               <a:buNone/>
             </a:pPr>
             <a:r>
-              <a:rPr lang="en-US" sz="900" i="1" dirty="0">
-                <a:solidFill>
-                  <a:srgbClr val="5F7183"/>
+              <a:rPr lang="en-US" sz="1050" dirty="0">
+                <a:solidFill>
+                  <a:srgbClr val="1B2733"/>
                 </a:solidFill>
                 <a:latin typeface="Calibri" pitchFamily="34" charset="0"/>
                 <a:ea typeface="Calibri" pitchFamily="34" charset="-122"/>
@@ -15023,9 +15023,9 @@
               <a:buNone/>
             </a:pPr>
             <a:r>
-              <a:rPr lang="en-US" sz="900" i="1" dirty="0">
-                <a:solidFill>
-                  <a:srgbClr val="5F7183"/>
+              <a:rPr lang="en-US" sz="1050" dirty="0">
+                <a:solidFill>
+                  <a:srgbClr val="1B2733"/>
                 </a:solidFill>
                 <a:latin typeface="Calibri" pitchFamily="34" charset="0"/>
                 <a:ea typeface="Calibri" pitchFamily="34" charset="-122"/>
@@ -15166,9 +15166,9 @@
               <a:buNone/>
             </a:pPr>
             <a:r>
-              <a:rPr lang="en-US" sz="900" i="1" dirty="0">
-                <a:solidFill>
-                  <a:srgbClr val="5F7183"/>
+              <a:rPr lang="en-US" sz="1050" dirty="0">
+                <a:solidFill>
+                  <a:srgbClr val="1B2733"/>
                 </a:solidFill>
                 <a:latin typeface="Calibri" pitchFamily="34" charset="0"/>
                 <a:ea typeface="Calibri" pitchFamily="34" charset="-122"/>
@@ -15309,9 +15309,9 @@
               <a:buNone/>
             </a:pPr>
             <a:r>
-              <a:rPr lang="en-US" sz="900" i="1" dirty="0">
-                <a:solidFill>
-                  <a:srgbClr val="5F7183"/>
+              <a:rPr lang="en-US" sz="1050" dirty="0">
+                <a:solidFill>
+                  <a:srgbClr val="1B2733"/>
                 </a:solidFill>
                 <a:latin typeface="Calibri" pitchFamily="34" charset="0"/>
                 <a:ea typeface="Calibri" pitchFamily="34" charset="-122"/>
@@ -15452,9 +15452,9 @@
               <a:buNone/>
             </a:pPr>
             <a:r>
-              <a:rPr lang="en-US" sz="900" i="1" dirty="0">
-                <a:solidFill>
-                  <a:srgbClr val="5F7183"/>
+              <a:rPr lang="en-US" sz="1050" dirty="0">
+                <a:solidFill>
+                  <a:srgbClr val="1B2733"/>
                 </a:solidFill>
                 <a:latin typeface="Calibri" pitchFamily="34" charset="0"/>
                 <a:ea typeface="Calibri" pitchFamily="34" charset="-122"/>
@@ -15595,49 +15595,49 @@
               <a:buNone/>
             </a:pPr>
             <a:r>
-              <a:rPr lang="en-US" sz="900" i="1" dirty="0">
+              <a:rPr lang="en-US" sz="1050" dirty="0">
+                <a:solidFill>
+                  <a:srgbClr val="1B2733"/>
+                </a:solidFill>
+                <a:latin typeface="Calibri" pitchFamily="34" charset="0"/>
+                <a:ea typeface="Calibri" pitchFamily="34" charset="-122"/>
+                <a:cs typeface="Calibri" pitchFamily="34" charset="-120"/>
+              </a:rPr>
+              <a:t>You pick up a confidential document and read the contents.</a:t>
+            </a:r>
+            <a:endParaRPr lang="en-US" sz="1150" dirty="0"/>
+          </a:p>
+        </p:txBody>
+      </p:sp>
+      <p:sp>
+        <p:nvSpPr>
+          <p:cNvPr id="37" name="Text 34"/>
+          <p:cNvSpPr/>
+          <p:nvPr/>
+        </p:nvSpPr>
+        <p:spPr>
+          <a:xfrm>
+            <a:off x="640080" y="6492240"/>
+            <a:ext cx="8778240" cy="292608"/>
+          </a:xfrm>
+          <a:prstGeom prst="rect">
+            <a:avLst/>
+          </a:prstGeom>
+          <a:noFill/>
+          <a:ln/>
+        </p:spPr>
+        <p:txBody>
+          <a:bodyPr wrap="square" lIns="0" tIns="0" rIns="0" bIns="0" rtlCol="0" anchor="ctr"/>
+          <a:lstStyle/>
+          <a:p>
+            <a:pPr indent="0" marL="0">
+              <a:buNone/>
+            </a:pPr>
+            <a:r>
+              <a:rPr lang="en-US" sz="900" dirty="0">
                 <a:solidFill>
                   <a:srgbClr val="5F7183"/>
                 </a:solidFill>
-                <a:latin typeface="Calibri" pitchFamily="34" charset="0"/>
-                <a:ea typeface="Calibri" pitchFamily="34" charset="-122"/>
-                <a:cs typeface="Calibri" pitchFamily="34" charset="-120"/>
-              </a:rPr>
-              <a:t>You pick up a confidential document and read the contents.</a:t>
-            </a:r>
-            <a:endParaRPr lang="en-US" sz="1150" dirty="0"/>
-          </a:p>
-        </p:txBody>
-      </p:sp>
-      <p:sp>
-        <p:nvSpPr>
-          <p:cNvPr id="37" name="Text 34"/>
-          <p:cNvSpPr/>
-          <p:nvPr/>
-        </p:nvSpPr>
-        <p:spPr>
-          <a:xfrm>
-            <a:off x="640080" y="6382512"/>
-            <a:ext cx="8778240" cy="292608"/>
-          </a:xfrm>
-          <a:prstGeom prst="rect">
-            <a:avLst/>
-          </a:prstGeom>
-          <a:noFill/>
-          <a:ln/>
-        </p:spPr>
-        <p:txBody>
-          <a:bodyPr wrap="square" lIns="0" tIns="0" rIns="0" bIns="0" rtlCol="0" anchor="ctr"/>
-          <a:lstStyle/>
-          <a:p>
-            <a:pPr indent="0" marL="0">
-              <a:buNone/>
-            </a:pPr>
-            <a:r>
-              <a:rPr lang="en-US" sz="900" dirty="0">
-                <a:solidFill>
-                  <a:srgbClr val="5F7183"/>
-                </a:solidFill>
                 <a:latin typeface="Yu Gothic" pitchFamily="34" charset="0"/>
                 <a:ea typeface="Yu Gothic" pitchFamily="34" charset="-122"/>
                 <a:cs typeface="Yu Gothic" pitchFamily="34" charset="-120"/>
@@ -15670,7 +15670,7 @@
         </p:nvSpPr>
         <p:spPr>
           <a:xfrm>
-            <a:off x="10637215" y="6382512"/>
+            <a:off x="10637215" y="6492240"/>
             <a:ext cx="914400" cy="292608"/>
           </a:xfrm>
           <a:prstGeom prst="rect">
@@ -15805,7 +15805,7 @@
               <a:buNone/>
             </a:pPr>
             <a:r>
-              <a:rPr lang="en-US" sz="1250" i="1" dirty="0">
+              <a:rPr lang="en-US" sz="1350" dirty="0">
                 <a:solidFill>
                   <a:srgbClr val="12B198"/>
                 </a:solidFill>
@@ -15867,9 +15867,9 @@
               <a:buNone/>
             </a:pPr>
             <a:r>
-              <a:rPr lang="en-US" sz="1000" i="1" dirty="0">
-                <a:solidFill>
-                  <a:srgbClr val="5F7183"/>
+              <a:rPr lang="en-US" sz="1000" dirty="0">
+                <a:solidFill>
+                  <a:srgbClr val="1B2733"/>
                 </a:solidFill>
                 <a:latin typeface="Calibri" pitchFamily="34" charset="0"/>
                 <a:ea typeface="Calibri" pitchFamily="34" charset="-122"/>
@@ -16010,9 +16010,9 @@
               <a:buNone/>
             </a:pPr>
             <a:r>
-              <a:rPr lang="en-US" sz="1050" i="1" dirty="0">
-                <a:solidFill>
-                  <a:srgbClr val="5F7183"/>
+              <a:rPr lang="en-US" sz="1250" dirty="0">
+                <a:solidFill>
+                  <a:srgbClr val="1B2733"/>
                 </a:solidFill>
                 <a:latin typeface="Calibri" pitchFamily="34" charset="0"/>
                 <a:ea typeface="Calibri" pitchFamily="34" charset="-122"/>
@@ -16153,9 +16153,9 @@
               <a:buNone/>
             </a:pPr>
             <a:r>
-              <a:rPr lang="en-US" sz="1050" i="1" dirty="0">
-                <a:solidFill>
-                  <a:srgbClr val="5F7183"/>
+              <a:rPr lang="en-US" sz="1250" dirty="0">
+                <a:solidFill>
+                  <a:srgbClr val="1B2733"/>
                 </a:solidFill>
                 <a:latin typeface="Calibri" pitchFamily="34" charset="0"/>
                 <a:ea typeface="Calibri" pitchFamily="34" charset="-122"/>
@@ -16296,9 +16296,9 @@
               <a:buNone/>
             </a:pPr>
             <a:r>
-              <a:rPr lang="en-US" sz="1050" i="1" dirty="0">
-                <a:solidFill>
-                  <a:srgbClr val="5F7183"/>
+              <a:rPr lang="en-US" sz="1250" dirty="0">
+                <a:solidFill>
+                  <a:srgbClr val="1B2733"/>
                 </a:solidFill>
                 <a:latin typeface="Calibri" pitchFamily="34" charset="0"/>
                 <a:ea typeface="Calibri" pitchFamily="34" charset="-122"/>
@@ -16439,9 +16439,9 @@
               <a:buNone/>
             </a:pPr>
             <a:r>
-              <a:rPr lang="en-US" sz="1050" i="1" dirty="0">
-                <a:solidFill>
-                  <a:srgbClr val="5F7183"/>
+              <a:rPr lang="en-US" sz="1250" dirty="0">
+                <a:solidFill>
+                  <a:srgbClr val="1B2733"/>
                 </a:solidFill>
                 <a:latin typeface="Calibri" pitchFamily="34" charset="0"/>
                 <a:ea typeface="Calibri" pitchFamily="34" charset="-122"/>
@@ -16582,49 +16582,49 @@
               <a:buNone/>
             </a:pPr>
             <a:r>
-              <a:rPr lang="en-US" sz="950" i="1" dirty="0">
+              <a:rPr lang="en-US" sz="1100" dirty="0">
+                <a:solidFill>
+                  <a:srgbClr val="1B2733"/>
+                </a:solidFill>
+                <a:latin typeface="Calibri" pitchFamily="34" charset="0"/>
+                <a:ea typeface="Calibri" pitchFamily="34" charset="-122"/>
+                <a:cs typeface="Calibri" pitchFamily="34" charset="-120"/>
+              </a:rPr>
+              <a:t>State it this way: "As a [citizen / delegated agent], I took [action] for [purpose]."</a:t>
+            </a:r>
+            <a:endParaRPr lang="en-US" sz="1300" dirty="0"/>
+          </a:p>
+        </p:txBody>
+      </p:sp>
+      <p:sp>
+        <p:nvSpPr>
+          <p:cNvPr id="25" name="Text 22"/>
+          <p:cNvSpPr/>
+          <p:nvPr/>
+        </p:nvSpPr>
+        <p:spPr>
+          <a:xfrm>
+            <a:off x="640080" y="6492240"/>
+            <a:ext cx="8778240" cy="292608"/>
+          </a:xfrm>
+          <a:prstGeom prst="rect">
+            <a:avLst/>
+          </a:prstGeom>
+          <a:noFill/>
+          <a:ln/>
+        </p:spPr>
+        <p:txBody>
+          <a:bodyPr wrap="square" lIns="0" tIns="0" rIns="0" bIns="0" rtlCol="0" anchor="ctr"/>
+          <a:lstStyle/>
+          <a:p>
+            <a:pPr indent="0" marL="0">
+              <a:buNone/>
+            </a:pPr>
+            <a:r>
+              <a:rPr lang="en-US" sz="900" dirty="0">
                 <a:solidFill>
                   <a:srgbClr val="5F7183"/>
                 </a:solidFill>
-                <a:latin typeface="Calibri" pitchFamily="34" charset="0"/>
-                <a:ea typeface="Calibri" pitchFamily="34" charset="-122"/>
-                <a:cs typeface="Calibri" pitchFamily="34" charset="-120"/>
-              </a:rPr>
-              <a:t>State it this way: "As a [citizen / delegated agent], I took [action] for [purpose]."</a:t>
-            </a:r>
-            <a:endParaRPr lang="en-US" sz="1300" dirty="0"/>
-          </a:p>
-        </p:txBody>
-      </p:sp>
-      <p:sp>
-        <p:nvSpPr>
-          <p:cNvPr id="25" name="Text 22"/>
-          <p:cNvSpPr/>
-          <p:nvPr/>
-        </p:nvSpPr>
-        <p:spPr>
-          <a:xfrm>
-            <a:off x="640080" y="6382512"/>
-            <a:ext cx="8778240" cy="292608"/>
-          </a:xfrm>
-          <a:prstGeom prst="rect">
-            <a:avLst/>
-          </a:prstGeom>
-          <a:noFill/>
-          <a:ln/>
-        </p:spPr>
-        <p:txBody>
-          <a:bodyPr wrap="square" lIns="0" tIns="0" rIns="0" bIns="0" rtlCol="0" anchor="ctr"/>
-          <a:lstStyle/>
-          <a:p>
-            <a:pPr indent="0" marL="0">
-              <a:buNone/>
-            </a:pPr>
-            <a:r>
-              <a:rPr lang="en-US" sz="900" dirty="0">
-                <a:solidFill>
-                  <a:srgbClr val="5F7183"/>
-                </a:solidFill>
                 <a:latin typeface="Yu Gothic" pitchFamily="34" charset="0"/>
                 <a:ea typeface="Yu Gothic" pitchFamily="34" charset="-122"/>
                 <a:cs typeface="Yu Gothic" pitchFamily="34" charset="-120"/>
@@ -16657,7 +16657,7 @@
         </p:nvSpPr>
         <p:spPr>
           <a:xfrm>
-            <a:off x="10637215" y="6382512"/>
+            <a:off x="10637215" y="6492240"/>
             <a:ext cx="914400" cy="292608"/>
           </a:xfrm>
           <a:prstGeom prst="rect">
@@ -16752,8 +16752,8 @@
         </p:nvSpPr>
         <p:spPr>
           <a:xfrm>
-            <a:off x="640080" y="384048"/>
-            <a:ext cx="8982151" cy="768096"/>
+            <a:off x="640080" y="365760"/>
+            <a:ext cx="8982151" cy="749808"/>
           </a:xfrm>
           <a:prstGeom prst="rect">
             <a:avLst/>
@@ -16792,7 +16792,7 @@
               <a:buNone/>
             </a:pPr>
             <a:r>
-              <a:rPr lang="en-US" sz="1100" i="1" dirty="0">
+              <a:rPr lang="en-US" sz="1100" dirty="0">
                 <a:solidFill>
                   <a:srgbClr val="12B198"/>
                 </a:solidFill>
@@ -16814,7 +16814,7 @@
         </p:nvSpPr>
         <p:spPr>
           <a:xfrm>
-            <a:off x="9686239" y="438912"/>
+            <a:off x="9686239" y="420624"/>
             <a:ext cx="932688" cy="310896"/>
           </a:xfrm>
           <a:prstGeom prst="roundRect">
@@ -16836,7 +16836,7 @@
         </p:nvSpPr>
         <p:spPr>
           <a:xfrm>
-            <a:off x="9686239" y="438912"/>
+            <a:off x="9686239" y="420624"/>
             <a:ext cx="932688" cy="310896"/>
           </a:xfrm>
           <a:prstGeom prst="rect">
@@ -16875,7 +16875,7 @@
         </p:nvSpPr>
         <p:spPr>
           <a:xfrm>
-            <a:off x="640080" y="1188720"/>
+            <a:off x="640080" y="1115568"/>
             <a:ext cx="10911535" cy="1124712"/>
           </a:xfrm>
           <a:prstGeom prst="roundRect">
@@ -16897,7 +16897,7 @@
         </p:nvSpPr>
         <p:spPr>
           <a:xfrm>
-            <a:off x="950976" y="1316736"/>
+            <a:off x="950976" y="1243584"/>
             <a:ext cx="10289743" cy="868680"/>
           </a:xfrm>
           <a:prstGeom prst="rect">
@@ -16974,9 +16974,9 @@
               <a:buNone/>
             </a:pPr>
             <a:r>
-              <a:rPr lang="en-US" sz="800" i="1" dirty="0">
-                <a:solidFill>
-                  <a:srgbClr val="9FD8CD"/>
+              <a:rPr lang="en-US" sz="1000" dirty="0">
+                <a:solidFill>
+                  <a:srgbClr val="DCEFEB"/>
                 </a:solidFill>
                 <a:latin typeface="Calibri" pitchFamily="34" charset="0"/>
                 <a:ea typeface="Calibri" pitchFamily="34" charset="-122"/>
@@ -16996,7 +16996,7 @@
         </p:nvSpPr>
         <p:spPr>
           <a:xfrm>
-            <a:off x="640080" y="2459736"/>
+            <a:off x="640080" y="2386584"/>
             <a:ext cx="10911535" cy="566928"/>
           </a:xfrm>
           <a:prstGeom prst="rect">
@@ -17053,9 +17053,9 @@
               <a:buNone/>
             </a:pPr>
             <a:r>
-              <a:rPr lang="en-US" sz="850" i="1" dirty="0">
-                <a:solidFill>
-                  <a:srgbClr val="5F7183"/>
+              <a:rPr lang="en-US" sz="1050" dirty="0">
+                <a:solidFill>
+                  <a:srgbClr val="1B2733"/>
                 </a:solidFill>
                 <a:latin typeface="Calibri" pitchFamily="34" charset="0"/>
                 <a:ea typeface="Calibri" pitchFamily="34" charset="-122"/>
@@ -17075,12 +17075,12 @@
         </p:nvSpPr>
         <p:spPr>
           <a:xfrm>
-            <a:off x="640080" y="3081528"/>
-            <a:ext cx="5327752" cy="836676"/>
+            <a:off x="640080" y="3008376"/>
+            <a:ext cx="5327752" cy="900684"/>
           </a:xfrm>
           <a:prstGeom prst="roundRect">
             <a:avLst>
-              <a:gd name="adj" fmla="val 4372"/>
+              <a:gd name="adj" fmla="val 4061"/>
             </a:avLst>
           </a:prstGeom>
           <a:solidFill>
@@ -17097,7 +17097,7 @@
         </p:nvSpPr>
         <p:spPr>
           <a:xfrm>
-            <a:off x="804672" y="3353562"/>
+            <a:off x="804672" y="3312414"/>
             <a:ext cx="292608" cy="292608"/>
           </a:xfrm>
           <a:prstGeom prst="ellipse">
@@ -17117,7 +17117,7 @@
         </p:nvSpPr>
         <p:spPr>
           <a:xfrm>
-            <a:off x="804672" y="3353562"/>
+            <a:off x="804672" y="3312414"/>
             <a:ext cx="292608" cy="292608"/>
           </a:xfrm>
           <a:prstGeom prst="rect">
@@ -17156,8 +17156,8 @@
         </p:nvSpPr>
         <p:spPr>
           <a:xfrm>
-            <a:off x="1188720" y="3136392"/>
-            <a:ext cx="4596232" cy="726948"/>
+            <a:off x="1188720" y="3063240"/>
+            <a:ext cx="4596232" cy="790956"/>
           </a:xfrm>
           <a:prstGeom prst="rect">
             <a:avLst/>
@@ -17196,9 +17196,9 @@
               <a:buNone/>
             </a:pPr>
             <a:r>
-              <a:rPr lang="en-US" sz="800" i="1" dirty="0">
-                <a:solidFill>
-                  <a:srgbClr val="5F7183"/>
+              <a:rPr lang="en-US" sz="1050" dirty="0">
+                <a:solidFill>
+                  <a:srgbClr val="1B2733"/>
                 </a:solidFill>
                 <a:latin typeface="Calibri" pitchFamily="34" charset="0"/>
                 <a:ea typeface="Calibri" pitchFamily="34" charset="-122"/>
@@ -17218,12 +17218,12 @@
         </p:nvSpPr>
         <p:spPr>
           <a:xfrm>
-            <a:off x="6223864" y="3081528"/>
-            <a:ext cx="5327752" cy="836676"/>
+            <a:off x="6223864" y="3008376"/>
+            <a:ext cx="5327752" cy="900684"/>
           </a:xfrm>
           <a:prstGeom prst="roundRect">
             <a:avLst>
-              <a:gd name="adj" fmla="val 4372"/>
+              <a:gd name="adj" fmla="val 4061"/>
             </a:avLst>
           </a:prstGeom>
           <a:solidFill>
@@ -17240,7 +17240,7 @@
         </p:nvSpPr>
         <p:spPr>
           <a:xfrm>
-            <a:off x="6388456" y="3353562"/>
+            <a:off x="6388456" y="3312414"/>
             <a:ext cx="292608" cy="292608"/>
           </a:xfrm>
           <a:prstGeom prst="ellipse">
@@ -17260,7 +17260,7 @@
         </p:nvSpPr>
         <p:spPr>
           <a:xfrm>
-            <a:off x="6388456" y="3353562"/>
+            <a:off x="6388456" y="3312414"/>
             <a:ext cx="292608" cy="292608"/>
           </a:xfrm>
           <a:prstGeom prst="rect">
@@ -17299,8 +17299,8 @@
         </p:nvSpPr>
         <p:spPr>
           <a:xfrm>
-            <a:off x="6772504" y="3136392"/>
-            <a:ext cx="4596232" cy="726948"/>
+            <a:off x="6772504" y="3063240"/>
+            <a:ext cx="4596232" cy="790956"/>
           </a:xfrm>
           <a:prstGeom prst="rect">
             <a:avLst/>
@@ -17339,9 +17339,9 @@
               <a:buNone/>
             </a:pPr>
             <a:r>
-              <a:rPr lang="en-US" sz="800" i="1" dirty="0">
-                <a:solidFill>
-                  <a:srgbClr val="5F7183"/>
+              <a:rPr lang="en-US" sz="1050" dirty="0">
+                <a:solidFill>
+                  <a:srgbClr val="1B2733"/>
                 </a:solidFill>
                 <a:latin typeface="Calibri" pitchFamily="34" charset="0"/>
                 <a:ea typeface="Calibri" pitchFamily="34" charset="-122"/>
@@ -17361,12 +17361,12 @@
         </p:nvSpPr>
         <p:spPr>
           <a:xfrm>
-            <a:off x="640080" y="4027932"/>
-            <a:ext cx="5327752" cy="836676"/>
+            <a:off x="640080" y="4018788"/>
+            <a:ext cx="5327752" cy="900684"/>
           </a:xfrm>
           <a:prstGeom prst="roundRect">
             <a:avLst>
-              <a:gd name="adj" fmla="val 4372"/>
+              <a:gd name="adj" fmla="val 4061"/>
             </a:avLst>
           </a:prstGeom>
           <a:solidFill>
@@ -17383,7 +17383,7 @@
         </p:nvSpPr>
         <p:spPr>
           <a:xfrm>
-            <a:off x="804672" y="4299966"/>
+            <a:off x="804672" y="4322826"/>
             <a:ext cx="292608" cy="292608"/>
           </a:xfrm>
           <a:prstGeom prst="ellipse">
@@ -17403,7 +17403,7 @@
         </p:nvSpPr>
         <p:spPr>
           <a:xfrm>
-            <a:off x="804672" y="4299966"/>
+            <a:off x="804672" y="4322826"/>
             <a:ext cx="292608" cy="292608"/>
           </a:xfrm>
           <a:prstGeom prst="rect">
@@ -17442,8 +17442,8 @@
         </p:nvSpPr>
         <p:spPr>
           <a:xfrm>
-            <a:off x="1188720" y="4082796"/>
-            <a:ext cx="4596232" cy="726948"/>
+            <a:off x="1188720" y="4073652"/>
+            <a:ext cx="4596232" cy="790956"/>
           </a:xfrm>
           <a:prstGeom prst="rect">
             <a:avLst/>
@@ -17482,9 +17482,9 @@
               <a:buNone/>
             </a:pPr>
             <a:r>
-              <a:rPr lang="en-US" sz="800" i="1" dirty="0">
-                <a:solidFill>
-                  <a:srgbClr val="5F7183"/>
+              <a:rPr lang="en-US" sz="1050" dirty="0">
+                <a:solidFill>
+                  <a:srgbClr val="1B2733"/>
                 </a:solidFill>
                 <a:latin typeface="Calibri" pitchFamily="34" charset="0"/>
                 <a:ea typeface="Calibri" pitchFamily="34" charset="-122"/>
@@ -17504,12 +17504,12 @@
         </p:nvSpPr>
         <p:spPr>
           <a:xfrm>
-            <a:off x="6223864" y="4027932"/>
-            <a:ext cx="5327752" cy="836676"/>
+            <a:off x="6223864" y="4018788"/>
+            <a:ext cx="5327752" cy="900684"/>
           </a:xfrm>
           <a:prstGeom prst="roundRect">
             <a:avLst>
-              <a:gd name="adj" fmla="val 4372"/>
+              <a:gd name="adj" fmla="val 4061"/>
             </a:avLst>
           </a:prstGeom>
           <a:solidFill>
@@ -17526,7 +17526,7 @@
         </p:nvSpPr>
         <p:spPr>
           <a:xfrm>
-            <a:off x="6388456" y="4299966"/>
+            <a:off x="6388456" y="4322826"/>
             <a:ext cx="292608" cy="292608"/>
           </a:xfrm>
           <a:prstGeom prst="ellipse">
@@ -17546,7 +17546,7 @@
         </p:nvSpPr>
         <p:spPr>
           <a:xfrm>
-            <a:off x="6388456" y="4299966"/>
+            <a:off x="6388456" y="4322826"/>
             <a:ext cx="292608" cy="292608"/>
           </a:xfrm>
           <a:prstGeom prst="rect">
@@ -17585,8 +17585,8 @@
         </p:nvSpPr>
         <p:spPr>
           <a:xfrm>
-            <a:off x="6772504" y="4082796"/>
-            <a:ext cx="4596232" cy="726948"/>
+            <a:off x="6772504" y="4073652"/>
+            <a:ext cx="4596232" cy="790956"/>
           </a:xfrm>
           <a:prstGeom prst="rect">
             <a:avLst/>
@@ -17625,9 +17625,9 @@
               <a:buNone/>
             </a:pPr>
             <a:r>
-              <a:rPr lang="en-US" sz="800" i="1" dirty="0">
-                <a:solidFill>
-                  <a:srgbClr val="5F7183"/>
+              <a:rPr lang="en-US" sz="1050" dirty="0">
+                <a:solidFill>
+                  <a:srgbClr val="1B2733"/>
                 </a:solidFill>
                 <a:latin typeface="Calibri" pitchFamily="34" charset="0"/>
                 <a:ea typeface="Calibri" pitchFamily="34" charset="-122"/>
@@ -17647,7 +17647,7 @@
         </p:nvSpPr>
         <p:spPr>
           <a:xfrm>
-            <a:off x="640080" y="4919472"/>
+            <a:off x="640080" y="4974336"/>
             <a:ext cx="10911535" cy="420624"/>
           </a:xfrm>
           <a:prstGeom prst="roundRect">
@@ -17669,7 +17669,7 @@
         </p:nvSpPr>
         <p:spPr>
           <a:xfrm>
-            <a:off x="877824" y="4946904"/>
+            <a:off x="877824" y="5001768"/>
             <a:ext cx="10436047" cy="365760"/>
           </a:xfrm>
           <a:prstGeom prst="rect">
@@ -17726,9 +17726,9 @@
               <a:buNone/>
             </a:pPr>
             <a:r>
-              <a:rPr lang="en-US" sz="750" i="1" dirty="0">
-                <a:solidFill>
-                  <a:srgbClr val="5F7183"/>
+              <a:rPr lang="en-US" sz="950" dirty="0">
+                <a:solidFill>
+                  <a:srgbClr val="1B2733"/>
                 </a:solidFill>
                 <a:latin typeface="Calibri" pitchFamily="34" charset="0"/>
                 <a:ea typeface="Calibri" pitchFamily="34" charset="-122"/>
@@ -17748,7 +17748,7 @@
         </p:nvSpPr>
         <p:spPr>
           <a:xfrm>
-            <a:off x="640080" y="5394960"/>
+            <a:off x="640080" y="5449824"/>
             <a:ext cx="10911535" cy="420624"/>
           </a:xfrm>
           <a:prstGeom prst="roundRect">
@@ -17770,7 +17770,7 @@
         </p:nvSpPr>
         <p:spPr>
           <a:xfrm>
-            <a:off x="877824" y="5422392"/>
+            <a:off x="877824" y="5477256"/>
             <a:ext cx="10436047" cy="365760"/>
           </a:xfrm>
           <a:prstGeom prst="rect">
@@ -17827,7 +17827,86 @@
               <a:buNone/>
             </a:pPr>
             <a:r>
-              <a:rPr lang="en-US" sz="750" i="1" dirty="0">
+              <a:rPr lang="en-US" sz="950" dirty="0">
+                <a:solidFill>
+                  <a:srgbClr val="1B2733"/>
+                </a:solidFill>
+                <a:latin typeface="Calibri" pitchFamily="34" charset="0"/>
+                <a:ea typeface="Calibri" pitchFamily="34" charset="-122"/>
+                <a:cs typeface="Calibri" pitchFamily="34" charset="-120"/>
+              </a:rPr>
+              <a:t>The next morning a client employee asks whether you saw that document last night.</a:t>
+            </a:r>
+            <a:endParaRPr lang="en-US" sz="850" dirty="0"/>
+          </a:p>
+        </p:txBody>
+      </p:sp>
+      <p:sp>
+        <p:nvSpPr>
+          <p:cNvPr id="29" name="Text 26"/>
+          <p:cNvSpPr/>
+          <p:nvPr/>
+        </p:nvSpPr>
+        <p:spPr>
+          <a:xfrm>
+            <a:off x="640080" y="5961888"/>
+            <a:ext cx="10911535" cy="292608"/>
+          </a:xfrm>
+          <a:prstGeom prst="rect">
+            <a:avLst/>
+          </a:prstGeom>
+          <a:noFill/>
+          <a:ln/>
+        </p:spPr>
+        <p:txBody>
+          <a:bodyPr wrap="square" lIns="0" tIns="0" rIns="0" bIns="0" rtlCol="0" anchor="t"/>
+          <a:lstStyle/>
+          <a:p>
+            <a:pPr indent="0" marL="0">
+              <a:lnSpc>
+                <a:spcPct val="88000"/>
+              </a:lnSpc>
+              <a:buNone/>
+            </a:pPr>
+            <a:r>
+              <a:rPr lang="en-US" sz="900" b="1" dirty="0">
+                <a:solidFill>
+                  <a:srgbClr val="0D8A76"/>
+                </a:solidFill>
+                <a:latin typeface="Yu Gothic" pitchFamily="34" charset="0"/>
+                <a:ea typeface="Yu Gothic" pitchFamily="34" charset="-122"/>
+                <a:cs typeface="Yu Gothic" pitchFamily="34" charset="-120"/>
+              </a:rPr>
+              <a:t>Site SOP優先　</a:t>
+            </a:r>
+            <a:pPr indent="0" marL="0">
+              <a:lnSpc>
+                <a:spcPct val="88000"/>
+              </a:lnSpc>
+              <a:buNone/>
+            </a:pPr>
+            <a:r>
+              <a:rPr lang="en-US" sz="900" dirty="0">
+                <a:solidFill>
+                  <a:srgbClr val="1B2733"/>
+                </a:solidFill>
+                <a:latin typeface="Yu Gothic" pitchFamily="34" charset="0"/>
+                <a:ea typeface="Yu Gothic" pitchFamily="34" charset="-122"/>
+                <a:cs typeface="Yu Gothic" pitchFamily="34" charset="-120"/>
+              </a:rPr>
+              <a:t>機密書類の取扱フローは現場ごとに異なる。Site SOPを必ず確認する。</a:t>
+            </a:r>
+            <a:endParaRPr lang="en-US" sz="900" dirty="0"/>
+          </a:p>
+          <a:p>
+            <a:pPr indent="0" marL="0">
+              <a:lnSpc>
+                <a:spcPct val="88000"/>
+              </a:lnSpc>
+              <a:buNone/>
+            </a:pPr>
+            <a:r>
+              <a:rPr lang="en-US" sz="800" i="1" dirty="0">
                 <a:solidFill>
                   <a:srgbClr val="5F7183"/>
                 </a:solidFill>
@@ -17835,22 +17914,22 @@
                 <a:ea typeface="Calibri" pitchFamily="34" charset="-122"/>
                 <a:cs typeface="Calibri" pitchFamily="34" charset="-120"/>
               </a:rPr>
-              <a:t>The next morning a client employee asks whether you saw that document last night.</a:t>
-            </a:r>
-            <a:endParaRPr lang="en-US" sz="850" dirty="0"/>
-          </a:p>
-        </p:txBody>
-      </p:sp>
-      <p:sp>
-        <p:nvSpPr>
-          <p:cNvPr id="29" name="Text 26"/>
-          <p:cNvSpPr/>
-          <p:nvPr/>
-        </p:nvSpPr>
-        <p:spPr>
-          <a:xfrm>
-            <a:off x="640080" y="5907024"/>
-            <a:ext cx="10911535" cy="310896"/>
+              <a:t>Procedures for handling confidential documents differ by site. Always check the Site SOP.</a:t>
+            </a:r>
+            <a:endParaRPr lang="en-US" sz="900" dirty="0"/>
+          </a:p>
+        </p:txBody>
+      </p:sp>
+      <p:sp>
+        <p:nvSpPr>
+          <p:cNvPr id="30" name="Text 27"/>
+          <p:cNvSpPr/>
+          <p:nvPr/>
+        </p:nvSpPr>
+        <p:spPr>
+          <a:xfrm>
+            <a:off x="640080" y="6272784"/>
+            <a:ext cx="9905695" cy="219456"/>
           </a:xfrm>
           <a:prstGeom prst="rect">
             <a:avLst/>
@@ -17863,167 +17942,88 @@
           <a:lstStyle/>
           <a:p>
             <a:pPr indent="0" marL="0">
-              <a:lnSpc>
-                <a:spcPct val="88000"/>
-              </a:lnSpc>
-              <a:buNone/>
-            </a:pPr>
-            <a:r>
-              <a:rPr lang="en-US" sz="900" b="1" dirty="0">
-                <a:solidFill>
-                  <a:srgbClr val="0D8A76"/>
-                </a:solidFill>
-                <a:latin typeface="Yu Gothic" pitchFamily="34" charset="0"/>
-                <a:ea typeface="Yu Gothic" pitchFamily="34" charset="-122"/>
-                <a:cs typeface="Yu Gothic" pitchFamily="34" charset="-120"/>
-              </a:rPr>
-              <a:t>Site SOP優先　</a:t>
-            </a:r>
-            <a:pPr indent="0" marL="0">
-              <a:lnSpc>
-                <a:spcPct val="88000"/>
-              </a:lnSpc>
+              <a:buNone/>
+            </a:pPr>
+            <a:r>
+              <a:rPr lang="en-US" sz="750" b="1" dirty="0">
+                <a:solidFill>
+                  <a:srgbClr val="D6E0E9"/>
+                </a:solidFill>
+                <a:latin typeface="Yu Gothic" pitchFamily="34" charset="0"/>
+                <a:ea typeface="Yu Gothic" pitchFamily="34" charset="-122"/>
+                <a:cs typeface="Yu Gothic" pitchFamily="34" charset="-120"/>
+              </a:rPr>
+              <a:t>ソース　</a:t>
+            </a:r>
+            <a:pPr indent="0" marL="0">
+              <a:buNone/>
+            </a:pPr>
+            <a:r>
+              <a:rPr lang="en-US" sz="750" dirty="0">
+                <a:solidFill>
+                  <a:srgbClr val="5F7183"/>
+                </a:solidFill>
+                <a:latin typeface="Yu Gothic" pitchFamily="34" charset="0"/>
+                <a:ea typeface="Yu Gothic" pitchFamily="34" charset="-122"/>
+                <a:cs typeface="Yu Gothic" pitchFamily="34" charset="-120"/>
+              </a:rPr>
+              <a:t>個人情報保護法、不正競争防止法、経済産業省「営業秘密管理指針」</a:t>
+            </a:r>
+            <a:endParaRPr lang="en-US" sz="750" dirty="0"/>
+          </a:p>
+        </p:txBody>
+      </p:sp>
+      <p:sp>
+        <p:nvSpPr>
+          <p:cNvPr id="31" name="Text 28"/>
+          <p:cNvSpPr/>
+          <p:nvPr/>
+        </p:nvSpPr>
+        <p:spPr>
+          <a:xfrm>
+            <a:off x="640080" y="6492240"/>
+            <a:ext cx="8778240" cy="292608"/>
+          </a:xfrm>
+          <a:prstGeom prst="rect">
+            <a:avLst/>
+          </a:prstGeom>
+          <a:noFill/>
+          <a:ln/>
+        </p:spPr>
+        <p:txBody>
+          <a:bodyPr wrap="square" lIns="0" tIns="0" rIns="0" bIns="0" rtlCol="0" anchor="ctr"/>
+          <a:lstStyle/>
+          <a:p>
+            <a:pPr indent="0" marL="0">
               <a:buNone/>
             </a:pPr>
             <a:r>
               <a:rPr lang="en-US" sz="900" dirty="0">
                 <a:solidFill>
-                  <a:srgbClr val="1B2733"/>
-                </a:solidFill>
-                <a:latin typeface="Yu Gothic" pitchFamily="34" charset="0"/>
-                <a:ea typeface="Yu Gothic" pitchFamily="34" charset="-122"/>
-                <a:cs typeface="Yu Gothic" pitchFamily="34" charset="-120"/>
-              </a:rPr>
-              <a:t>機密書類の取扱フローは現場ごとに異なる。Site SOPを必ず確認する。</a:t>
+                  <a:srgbClr val="5F7183"/>
+                </a:solidFill>
+                <a:latin typeface="Yu Gothic" pitchFamily="34" charset="0"/>
+                <a:ea typeface="Yu Gothic" pitchFamily="34" charset="-122"/>
+                <a:cs typeface="Yu Gothic" pitchFamily="34" charset="-120"/>
+              </a:rPr>
+              <a:t>第1時限｜基本教育1 警備業務実施の基本原則  </a:t>
+            </a:r>
+            <a:pPr indent="0" marL="0">
+              <a:buNone/>
+            </a:pPr>
+            <a:r>
+              <a:rPr lang="en-US" sz="850" i="1" dirty="0">
+                <a:solidFill>
+                  <a:srgbClr val="D6E0E9"/>
+                </a:solidFill>
+                <a:latin typeface="Calibri" pitchFamily="34" charset="0"/>
+                <a:ea typeface="Calibri" pitchFamily="34" charset="-122"/>
+                <a:cs typeface="Calibri" pitchFamily="34" charset="-120"/>
+              </a:rPr>
+              <a:t>Period 1 | Basic Training 1 — Fundamental Principles</a:t>
             </a:r>
             <a:endParaRPr lang="en-US" sz="900" dirty="0"/>
           </a:p>
-          <a:p>
-            <a:pPr indent="0" marL="0">
-              <a:lnSpc>
-                <a:spcPct val="88000"/>
-              </a:lnSpc>
-              <a:buNone/>
-            </a:pPr>
-            <a:r>
-              <a:rPr lang="en-US" sz="750" i="1" dirty="0">
-                <a:solidFill>
-                  <a:srgbClr val="5F7183"/>
-                </a:solidFill>
-                <a:latin typeface="Calibri" pitchFamily="34" charset="0"/>
-                <a:ea typeface="Calibri" pitchFamily="34" charset="-122"/>
-                <a:cs typeface="Calibri" pitchFamily="34" charset="-120"/>
-              </a:rPr>
-              <a:t>Procedures for handling confidential documents differ by site. Always check the Site SOP.</a:t>
-            </a:r>
-            <a:endParaRPr lang="en-US" sz="900" dirty="0"/>
-          </a:p>
-        </p:txBody>
-      </p:sp>
-      <p:sp>
-        <p:nvSpPr>
-          <p:cNvPr id="30" name="Text 27"/>
-          <p:cNvSpPr/>
-          <p:nvPr/>
-        </p:nvSpPr>
-        <p:spPr>
-          <a:xfrm>
-            <a:off x="640080" y="6272784"/>
-            <a:ext cx="9905695" cy="237744"/>
-          </a:xfrm>
-          <a:prstGeom prst="rect">
-            <a:avLst/>
-          </a:prstGeom>
-          <a:noFill/>
-          <a:ln/>
-        </p:spPr>
-        <p:txBody>
-          <a:bodyPr wrap="square" lIns="0" tIns="0" rIns="0" bIns="0" rtlCol="0" anchor="t"/>
-          <a:lstStyle/>
-          <a:p>
-            <a:pPr indent="0" marL="0">
-              <a:buNone/>
-            </a:pPr>
-            <a:r>
-              <a:rPr lang="en-US" sz="750" b="1" dirty="0">
-                <a:solidFill>
-                  <a:srgbClr val="D6E0E9"/>
-                </a:solidFill>
-                <a:latin typeface="Yu Gothic" pitchFamily="34" charset="0"/>
-                <a:ea typeface="Yu Gothic" pitchFamily="34" charset="-122"/>
-                <a:cs typeface="Yu Gothic" pitchFamily="34" charset="-120"/>
-              </a:rPr>
-              <a:t>ソース　</a:t>
-            </a:r>
-            <a:pPr indent="0" marL="0">
-              <a:buNone/>
-            </a:pPr>
-            <a:r>
-              <a:rPr lang="en-US" sz="750" dirty="0">
-                <a:solidFill>
-                  <a:srgbClr val="5F7183"/>
-                </a:solidFill>
-                <a:latin typeface="Yu Gothic" pitchFamily="34" charset="0"/>
-                <a:ea typeface="Yu Gothic" pitchFamily="34" charset="-122"/>
-                <a:cs typeface="Yu Gothic" pitchFamily="34" charset="-120"/>
-              </a:rPr>
-              <a:t>個人情報保護法、不正競争防止法、経済産業省「営業秘密管理指針」</a:t>
-            </a:r>
-            <a:endParaRPr lang="en-US" sz="750" dirty="0"/>
-          </a:p>
-        </p:txBody>
-      </p:sp>
-      <p:sp>
-        <p:nvSpPr>
-          <p:cNvPr id="31" name="Text 28"/>
-          <p:cNvSpPr/>
-          <p:nvPr/>
-        </p:nvSpPr>
-        <p:spPr>
-          <a:xfrm>
-            <a:off x="640080" y="6382512"/>
-            <a:ext cx="8778240" cy="292608"/>
-          </a:xfrm>
-          <a:prstGeom prst="rect">
-            <a:avLst/>
-          </a:prstGeom>
-          <a:noFill/>
-          <a:ln/>
-        </p:spPr>
-        <p:txBody>
-          <a:bodyPr wrap="square" lIns="0" tIns="0" rIns="0" bIns="0" rtlCol="0" anchor="ctr"/>
-          <a:lstStyle/>
-          <a:p>
-            <a:pPr indent="0" marL="0">
-              <a:buNone/>
-            </a:pPr>
-            <a:r>
-              <a:rPr lang="en-US" sz="900" dirty="0">
-                <a:solidFill>
-                  <a:srgbClr val="5F7183"/>
-                </a:solidFill>
-                <a:latin typeface="Yu Gothic" pitchFamily="34" charset="0"/>
-                <a:ea typeface="Yu Gothic" pitchFamily="34" charset="-122"/>
-                <a:cs typeface="Yu Gothic" pitchFamily="34" charset="-120"/>
-              </a:rPr>
-              <a:t>第1時限｜基本教育1 警備業務実施の基本原則  </a:t>
-            </a:r>
-            <a:pPr indent="0" marL="0">
-              <a:buNone/>
-            </a:pPr>
-            <a:r>
-              <a:rPr lang="en-US" sz="850" i="1" dirty="0">
-                <a:solidFill>
-                  <a:srgbClr val="D6E0E9"/>
-                </a:solidFill>
-                <a:latin typeface="Calibri" pitchFamily="34" charset="0"/>
-                <a:ea typeface="Calibri" pitchFamily="34" charset="-122"/>
-                <a:cs typeface="Calibri" pitchFamily="34" charset="-120"/>
-              </a:rPr>
-              <a:t>Period 1 | Basic Training 1 — Fundamental Principles</a:t>
-            </a:r>
-            <a:endParaRPr lang="en-US" sz="900" dirty="0"/>
-          </a:p>
         </p:txBody>
       </p:sp>
       <p:sp>
@@ -18034,7 +18034,7 @@
         </p:nvSpPr>
         <p:spPr>
           <a:xfrm>
-            <a:off x="10637215" y="6382512"/>
+            <a:off x="10637215" y="6492240"/>
             <a:ext cx="914400" cy="292608"/>
           </a:xfrm>
           <a:prstGeom prst="rect">

--- a/decks/01_1限_基本原則.pptx
+++ b/decks/01_1限_基本原則.pptx
@@ -2867,7 +2867,7 @@
               <a:buNone/>
             </a:pPr>
             <a:r>
-              <a:rPr lang="en-US" sz="1400" dirty="0">
+              <a:rPr lang="en-US" sz="1500" dirty="0">
                 <a:solidFill>
                   <a:srgbClr val="1B2733"/>
                 </a:solidFill>
@@ -3010,7 +3010,7 @@
               <a:buNone/>
             </a:pPr>
             <a:r>
-              <a:rPr lang="en-US" sz="1400" dirty="0">
+              <a:rPr lang="en-US" sz="1500" dirty="0">
                 <a:solidFill>
                   <a:srgbClr val="1B2733"/>
                 </a:solidFill>
@@ -3153,7 +3153,7 @@
               <a:buNone/>
             </a:pPr>
             <a:r>
-              <a:rPr lang="en-US" sz="1400" dirty="0">
+              <a:rPr lang="en-US" sz="1500" dirty="0">
                 <a:solidFill>
                   <a:srgbClr val="1B2733"/>
                 </a:solidFill>
@@ -3296,7 +3296,7 @@
               <a:buNone/>
             </a:pPr>
             <a:r>
-              <a:rPr lang="en-US" sz="1400" dirty="0">
+              <a:rPr lang="en-US" sz="1500" dirty="0">
                 <a:solidFill>
                   <a:srgbClr val="1B2733"/>
                 </a:solidFill>
@@ -3649,7 +3649,7 @@
               <a:buNone/>
             </a:pPr>
             <a:r>
-              <a:rPr lang="en-US" sz="1400" dirty="0">
+              <a:rPr lang="en-US" sz="1500" dirty="0">
                 <a:solidFill>
                   <a:srgbClr val="1B2733"/>
                 </a:solidFill>
@@ -3792,7 +3792,7 @@
               <a:buNone/>
             </a:pPr>
             <a:r>
-              <a:rPr lang="en-US" sz="1400" dirty="0">
+              <a:rPr lang="en-US" sz="1500" dirty="0">
                 <a:solidFill>
                   <a:srgbClr val="1B2733"/>
                 </a:solidFill>
@@ -3935,7 +3935,7 @@
               <a:buNone/>
             </a:pPr>
             <a:r>
-              <a:rPr lang="en-US" sz="1400" dirty="0">
+              <a:rPr lang="en-US" sz="1500" dirty="0">
                 <a:solidFill>
                   <a:srgbClr val="1B2733"/>
                 </a:solidFill>
@@ -4078,7 +4078,7 @@
               <a:buNone/>
             </a:pPr>
             <a:r>
-              <a:rPr lang="en-US" sz="1400" dirty="0">
+              <a:rPr lang="en-US" sz="1500" dirty="0">
                 <a:solidFill>
                   <a:srgbClr val="1B2733"/>
                 </a:solidFill>
@@ -4493,7 +4493,7 @@
               <a:buNone/>
             </a:pPr>
             <a:r>
-              <a:rPr lang="en-US" sz="1500" dirty="0">
+              <a:rPr lang="en-US" sz="1600" dirty="0">
                 <a:solidFill>
                   <a:srgbClr val="1B2733"/>
                 </a:solidFill>
@@ -4636,7 +4636,7 @@
               <a:buNone/>
             </a:pPr>
             <a:r>
-              <a:rPr lang="en-US" sz="1500" dirty="0">
+              <a:rPr lang="en-US" sz="1600" dirty="0">
                 <a:solidFill>
                   <a:srgbClr val="1B2733"/>
                 </a:solidFill>
@@ -4779,7 +4779,7 @@
               <a:buNone/>
             </a:pPr>
             <a:r>
-              <a:rPr lang="en-US" sz="1500" dirty="0">
+              <a:rPr lang="en-US" sz="1600" dirty="0">
                 <a:solidFill>
                   <a:srgbClr val="1B2733"/>
                 </a:solidFill>
@@ -4922,7 +4922,7 @@
               <a:buNone/>
             </a:pPr>
             <a:r>
-              <a:rPr lang="en-US" sz="1500" dirty="0">
+              <a:rPr lang="en-US" sz="1600" dirty="0">
                 <a:solidFill>
                   <a:srgbClr val="1B2733"/>
                 </a:solidFill>
@@ -5065,7 +5065,7 @@
               <a:buNone/>
             </a:pPr>
             <a:r>
-              <a:rPr lang="en-US" sz="1350" dirty="0">
+              <a:rPr lang="en-US" sz="1500" dirty="0">
                 <a:solidFill>
                   <a:srgbClr val="1B2733"/>
                 </a:solidFill>
@@ -5457,7 +5457,7 @@
               <a:buNone/>
             </a:pPr>
             <a:r>
-              <a:rPr lang="en-US" sz="1350" dirty="0">
+              <a:rPr lang="en-US" sz="1450" dirty="0">
                 <a:solidFill>
                   <a:srgbClr val="DCEFEB"/>
                 </a:solidFill>
@@ -5536,7 +5536,7 @@
               <a:buNone/>
             </a:pPr>
             <a:r>
-              <a:rPr lang="en-US" sz="1350" dirty="0">
+              <a:rPr lang="en-US" sz="1500" dirty="0">
                 <a:solidFill>
                   <a:srgbClr val="1B2733"/>
                 </a:solidFill>
@@ -5679,7 +5679,7 @@
               <a:buNone/>
             </a:pPr>
             <a:r>
-              <a:rPr lang="en-US" sz="1350" dirty="0">
+              <a:rPr lang="en-US" sz="1400" dirty="0">
                 <a:solidFill>
                   <a:srgbClr val="1B2733"/>
                 </a:solidFill>
@@ -5822,7 +5822,7 @@
               <a:buNone/>
             </a:pPr>
             <a:r>
-              <a:rPr lang="en-US" sz="1350" dirty="0">
+              <a:rPr lang="en-US" sz="1400" dirty="0">
                 <a:solidFill>
                   <a:srgbClr val="1B2733"/>
                 </a:solidFill>
@@ -5965,7 +5965,7 @@
               <a:buNone/>
             </a:pPr>
             <a:r>
-              <a:rPr lang="en-US" sz="1350" dirty="0">
+              <a:rPr lang="en-US" sz="1400" dirty="0">
                 <a:solidFill>
                   <a:srgbClr val="1B2733"/>
                 </a:solidFill>
@@ -6108,7 +6108,7 @@
               <a:buNone/>
             </a:pPr>
             <a:r>
-              <a:rPr lang="en-US" sz="1350" dirty="0">
+              <a:rPr lang="en-US" sz="1400" dirty="0">
                 <a:solidFill>
                   <a:srgbClr val="1B2733"/>
                 </a:solidFill>
@@ -6209,7 +6209,7 @@
               <a:buNone/>
             </a:pPr>
             <a:r>
-              <a:rPr lang="en-US" sz="1250" dirty="0">
+              <a:rPr lang="en-US" sz="1350" dirty="0">
                 <a:solidFill>
                   <a:srgbClr val="1B2733"/>
                 </a:solidFill>
@@ -6310,7 +6310,7 @@
               <a:buNone/>
             </a:pPr>
             <a:r>
-              <a:rPr lang="en-US" sz="1250" dirty="0">
+              <a:rPr lang="en-US" sz="1350" dirty="0">
                 <a:solidFill>
                   <a:srgbClr val="1B2733"/>
                 </a:solidFill>
@@ -6736,11 +6736,11 @@
         <p:spPr>
           <a:xfrm>
             <a:off x="640080" y="1115568"/>
-            <a:ext cx="10911535" cy="715518"/>
+            <a:ext cx="10911535" cy="669119"/>
           </a:xfrm>
           <a:prstGeom prst="roundRect">
             <a:avLst>
-              <a:gd name="adj" fmla="val 5112"/>
+              <a:gd name="adj" fmla="val 5466"/>
             </a:avLst>
           </a:prstGeom>
           <a:solidFill>
@@ -6757,7 +6757,7 @@
         </p:nvSpPr>
         <p:spPr>
           <a:xfrm>
-            <a:off x="841248" y="1299591"/>
+            <a:off x="841248" y="1276392"/>
             <a:ext cx="347472" cy="347472"/>
           </a:xfrm>
           <a:prstGeom prst="ellipse">
@@ -6777,7 +6777,7 @@
         </p:nvSpPr>
         <p:spPr>
           <a:xfrm>
-            <a:off x="841248" y="1299591"/>
+            <a:off x="841248" y="1276392"/>
             <a:ext cx="347472" cy="347472"/>
           </a:xfrm>
           <a:prstGeom prst="rect">
@@ -6817,7 +6817,7 @@
         <p:spPr>
           <a:xfrm>
             <a:off x="1280160" y="1179576"/>
-            <a:ext cx="10033711" cy="587502"/>
+            <a:ext cx="10033711" cy="541103"/>
           </a:xfrm>
           <a:prstGeom prst="rect">
             <a:avLst/>
@@ -6876,7 +6876,7 @@
               <a:buNone/>
             </a:pPr>
             <a:r>
-              <a:rPr lang="en-US" sz="1400" dirty="0">
+              <a:rPr lang="en-US" sz="1500" dirty="0">
                 <a:solidFill>
                   <a:srgbClr val="1B2733"/>
                 </a:solidFill>
@@ -6898,12 +6898,12 @@
         </p:nvSpPr>
         <p:spPr>
           <a:xfrm>
-            <a:off x="640080" y="1931670"/>
-            <a:ext cx="10911535" cy="715518"/>
+            <a:off x="640080" y="1885271"/>
+            <a:ext cx="10911535" cy="669119"/>
           </a:xfrm>
           <a:prstGeom prst="roundRect">
             <a:avLst>
-              <a:gd name="adj" fmla="val 5112"/>
+              <a:gd name="adj" fmla="val 5466"/>
             </a:avLst>
           </a:prstGeom>
           <a:solidFill>
@@ -6920,7 +6920,7 @@
         </p:nvSpPr>
         <p:spPr>
           <a:xfrm>
-            <a:off x="841248" y="2115693"/>
+            <a:off x="841248" y="2046095"/>
             <a:ext cx="347472" cy="347472"/>
           </a:xfrm>
           <a:prstGeom prst="ellipse">
@@ -6940,7 +6940,7 @@
         </p:nvSpPr>
         <p:spPr>
           <a:xfrm>
-            <a:off x="841248" y="2115693"/>
+            <a:off x="841248" y="2046095"/>
             <a:ext cx="347472" cy="347472"/>
           </a:xfrm>
           <a:prstGeom prst="rect">
@@ -6979,8 +6979,8 @@
         </p:nvSpPr>
         <p:spPr>
           <a:xfrm>
-            <a:off x="1280160" y="1995678"/>
-            <a:ext cx="10033711" cy="587502"/>
+            <a:off x="1280160" y="1949279"/>
+            <a:ext cx="10033711" cy="541103"/>
           </a:xfrm>
           <a:prstGeom prst="rect">
             <a:avLst/>
@@ -7039,7 +7039,7 @@
               <a:buNone/>
             </a:pPr>
             <a:r>
-              <a:rPr lang="en-US" sz="1400" dirty="0">
+              <a:rPr lang="en-US" sz="1500" dirty="0">
                 <a:solidFill>
                   <a:srgbClr val="1B2733"/>
                 </a:solidFill>
@@ -7061,12 +7061,12 @@
         </p:nvSpPr>
         <p:spPr>
           <a:xfrm>
-            <a:off x="640080" y="2747772"/>
-            <a:ext cx="10911535" cy="715518"/>
+            <a:off x="640080" y="2654974"/>
+            <a:ext cx="10911535" cy="854714"/>
           </a:xfrm>
           <a:prstGeom prst="roundRect">
             <a:avLst>
-              <a:gd name="adj" fmla="val 5112"/>
+              <a:gd name="adj" fmla="val 4279"/>
             </a:avLst>
           </a:prstGeom>
           <a:solidFill>
@@ -7083,7 +7083,7 @@
         </p:nvSpPr>
         <p:spPr>
           <a:xfrm>
-            <a:off x="841248" y="2931795"/>
+            <a:off x="841248" y="2908596"/>
             <a:ext cx="347472" cy="347472"/>
           </a:xfrm>
           <a:prstGeom prst="ellipse">
@@ -7103,7 +7103,7 @@
         </p:nvSpPr>
         <p:spPr>
           <a:xfrm>
-            <a:off x="841248" y="2931795"/>
+            <a:off x="841248" y="2908596"/>
             <a:ext cx="347472" cy="347472"/>
           </a:xfrm>
           <a:prstGeom prst="rect">
@@ -7142,8 +7142,8 @@
         </p:nvSpPr>
         <p:spPr>
           <a:xfrm>
-            <a:off x="1280160" y="2811780"/>
-            <a:ext cx="10033711" cy="587502"/>
+            <a:off x="1280160" y="2718982"/>
+            <a:ext cx="10033711" cy="726698"/>
           </a:xfrm>
           <a:prstGeom prst="rect">
             <a:avLst/>
@@ -7202,7 +7202,7 @@
               <a:buNone/>
             </a:pPr>
             <a:r>
-              <a:rPr lang="en-US" sz="1400" dirty="0">
+              <a:rPr lang="en-US" sz="1500" dirty="0">
                 <a:solidFill>
                   <a:srgbClr val="1B2733"/>
                 </a:solidFill>
@@ -7224,12 +7224,12 @@
         </p:nvSpPr>
         <p:spPr>
           <a:xfrm>
-            <a:off x="640080" y="3563874"/>
-            <a:ext cx="10911535" cy="715518"/>
+            <a:off x="640080" y="3610273"/>
+            <a:ext cx="10911535" cy="669119"/>
           </a:xfrm>
           <a:prstGeom prst="roundRect">
             <a:avLst>
-              <a:gd name="adj" fmla="val 5112"/>
+              <a:gd name="adj" fmla="val 5466"/>
             </a:avLst>
           </a:prstGeom>
           <a:solidFill>
@@ -7246,7 +7246,7 @@
         </p:nvSpPr>
         <p:spPr>
           <a:xfrm>
-            <a:off x="841248" y="3747897"/>
+            <a:off x="841248" y="3771096"/>
             <a:ext cx="347472" cy="347472"/>
           </a:xfrm>
           <a:prstGeom prst="ellipse">
@@ -7266,7 +7266,7 @@
         </p:nvSpPr>
         <p:spPr>
           <a:xfrm>
-            <a:off x="841248" y="3747897"/>
+            <a:off x="841248" y="3771096"/>
             <a:ext cx="347472" cy="347472"/>
           </a:xfrm>
           <a:prstGeom prst="rect">
@@ -7305,8 +7305,8 @@
         </p:nvSpPr>
         <p:spPr>
           <a:xfrm>
-            <a:off x="1280160" y="3627882"/>
-            <a:ext cx="10033711" cy="587502"/>
+            <a:off x="1280160" y="3674281"/>
+            <a:ext cx="10033711" cy="541103"/>
           </a:xfrm>
           <a:prstGeom prst="rect">
             <a:avLst/>
@@ -7365,7 +7365,7 @@
               <a:buNone/>
             </a:pPr>
             <a:r>
-              <a:rPr lang="en-US" sz="1400" dirty="0">
+              <a:rPr lang="en-US" sz="1500" dirty="0">
                 <a:solidFill>
                   <a:srgbClr val="1B2733"/>
                 </a:solidFill>
@@ -7483,7 +7483,7 @@
               <a:buNone/>
             </a:pPr>
             <a:r>
-              <a:rPr lang="en-US" sz="1250" dirty="0">
+              <a:rPr lang="en-US" sz="1350" dirty="0">
                 <a:solidFill>
                   <a:srgbClr val="1B2733"/>
                 </a:solidFill>
@@ -7601,7 +7601,7 @@
               <a:buNone/>
             </a:pPr>
             <a:r>
-              <a:rPr lang="en-US" sz="1250" dirty="0">
+              <a:rPr lang="en-US" sz="1350" dirty="0">
                 <a:solidFill>
                   <a:srgbClr val="1B2733"/>
                 </a:solidFill>
@@ -7702,7 +7702,7 @@
               <a:buNone/>
             </a:pPr>
             <a:r>
-              <a:rPr lang="en-US" sz="1200" dirty="0">
+              <a:rPr lang="en-US" sz="1300" dirty="0">
                 <a:solidFill>
                   <a:srgbClr val="DCEFEB"/>
                 </a:solidFill>
@@ -8226,7 +8226,7 @@
               <a:buNone/>
             </a:pPr>
             <a:r>
-              <a:rPr lang="en-US" sz="1350" dirty="0">
+              <a:rPr lang="en-US" sz="1450" dirty="0">
                 <a:solidFill>
                   <a:srgbClr val="DCEFEB"/>
                 </a:solidFill>
@@ -8305,7 +8305,7 @@
               <a:buNone/>
             </a:pPr>
             <a:r>
-              <a:rPr lang="en-US" sz="1350" dirty="0">
+              <a:rPr lang="en-US" sz="1500" dirty="0">
                 <a:solidFill>
                   <a:srgbClr val="1B2733"/>
                 </a:solidFill>
@@ -8448,7 +8448,7 @@
               <a:buNone/>
             </a:pPr>
             <a:r>
-              <a:rPr lang="en-US" sz="1350" dirty="0">
+              <a:rPr lang="en-US" sz="1400" dirty="0">
                 <a:solidFill>
                   <a:srgbClr val="1B2733"/>
                 </a:solidFill>
@@ -8591,7 +8591,7 @@
               <a:buNone/>
             </a:pPr>
             <a:r>
-              <a:rPr lang="en-US" sz="1350" dirty="0">
+              <a:rPr lang="en-US" sz="1400" dirty="0">
                 <a:solidFill>
                   <a:srgbClr val="1B2733"/>
                 </a:solidFill>
@@ -8734,7 +8734,7 @@
               <a:buNone/>
             </a:pPr>
             <a:r>
-              <a:rPr lang="en-US" sz="1350" dirty="0">
+              <a:rPr lang="en-US" sz="1400" dirty="0">
                 <a:solidFill>
                   <a:srgbClr val="1B2733"/>
                 </a:solidFill>
@@ -8877,7 +8877,7 @@
               <a:buNone/>
             </a:pPr>
             <a:r>
-              <a:rPr lang="en-US" sz="1350" dirty="0">
+              <a:rPr lang="en-US" sz="1400" dirty="0">
                 <a:solidFill>
                   <a:srgbClr val="1B2733"/>
                 </a:solidFill>
@@ -8978,7 +8978,7 @@
               <a:buNone/>
             </a:pPr>
             <a:r>
-              <a:rPr lang="en-US" sz="1250" dirty="0">
+              <a:rPr lang="en-US" sz="1350" dirty="0">
                 <a:solidFill>
                   <a:srgbClr val="1B2733"/>
                 </a:solidFill>
@@ -9079,7 +9079,7 @@
               <a:buNone/>
             </a:pPr>
             <a:r>
-              <a:rPr lang="en-US" sz="1250" dirty="0">
+              <a:rPr lang="en-US" sz="1350" dirty="0">
                 <a:solidFill>
                   <a:srgbClr val="1B2733"/>
                 </a:solidFill>
@@ -9645,7 +9645,7 @@
               <a:buNone/>
             </a:pPr>
             <a:r>
-              <a:rPr lang="en-US" sz="1400" dirty="0">
+              <a:rPr lang="en-US" sz="1500" dirty="0">
                 <a:solidFill>
                   <a:srgbClr val="1B2733"/>
                 </a:solidFill>
@@ -9808,7 +9808,7 @@
               <a:buNone/>
             </a:pPr>
             <a:r>
-              <a:rPr lang="en-US" sz="1400" dirty="0">
+              <a:rPr lang="en-US" sz="1500" dirty="0">
                 <a:solidFill>
                   <a:srgbClr val="1B2733"/>
                 </a:solidFill>
@@ -9971,7 +9971,7 @@
               <a:buNone/>
             </a:pPr>
             <a:r>
-              <a:rPr lang="en-US" sz="1400" dirty="0">
+              <a:rPr lang="en-US" sz="1500" dirty="0">
                 <a:solidFill>
                   <a:srgbClr val="1B2733"/>
                 </a:solidFill>
@@ -10134,7 +10134,7 @@
               <a:buNone/>
             </a:pPr>
             <a:r>
-              <a:rPr lang="en-US" sz="1400" dirty="0">
+              <a:rPr lang="en-US" sz="1500" dirty="0">
                 <a:solidFill>
                   <a:srgbClr val="1B2733"/>
                 </a:solidFill>
@@ -10252,7 +10252,7 @@
               <a:buNone/>
             </a:pPr>
             <a:r>
-              <a:rPr lang="en-US" sz="1250" dirty="0">
+              <a:rPr lang="en-US" sz="1350" dirty="0">
                 <a:solidFill>
                   <a:srgbClr val="1B2733"/>
                 </a:solidFill>
@@ -10370,7 +10370,7 @@
               <a:buNone/>
             </a:pPr>
             <a:r>
-              <a:rPr lang="en-US" sz="1250" dirty="0">
+              <a:rPr lang="en-US" sz="1350" dirty="0">
                 <a:solidFill>
                   <a:srgbClr val="1B2733"/>
                 </a:solidFill>
@@ -11630,7 +11630,7 @@
                 <a:ea typeface="Calibri" pitchFamily="34" charset="-122"/>
                 <a:cs typeface="Calibri" pitchFamily="34" charset="-120"/>
               </a:rPr>
-              <a:t>What You'll Learn　</a:t>
+              <a:t>What You'll Learn  </a:t>
             </a:r>
             <a:pPr indent="0" marL="0">
               <a:lnSpc>
@@ -11659,7 +11659,7 @@
               <a:buNone/>
             </a:pPr>
             <a:r>
-              <a:rPr lang="en-US" sz="1250" dirty="0">
+              <a:rPr lang="en-US" sz="1300" dirty="0">
                 <a:solidFill>
                   <a:srgbClr val="1B2733"/>
                 </a:solidFill>
@@ -11802,7 +11802,7 @@
               <a:buNone/>
             </a:pPr>
             <a:r>
-              <a:rPr lang="en-US" sz="1400" dirty="0">
+              <a:rPr lang="en-US" sz="1500" dirty="0">
                 <a:solidFill>
                   <a:srgbClr val="12B198"/>
                 </a:solidFill>
@@ -11870,7 +11870,7 @@
               <a:buNone/>
             </a:pPr>
             <a:r>
-              <a:rPr lang="en-US" sz="1350" dirty="0">
+              <a:rPr lang="en-US" sz="1400" dirty="0">
                 <a:solidFill>
                   <a:srgbClr val="1B2733"/>
                 </a:solidFill>
@@ -11916,7 +11916,7 @@
               <a:buNone/>
             </a:pPr>
             <a:r>
-              <a:rPr lang="en-US" sz="1350" dirty="0">
+              <a:rPr lang="en-US" sz="1400" dirty="0">
                 <a:solidFill>
                   <a:srgbClr val="1B2733"/>
                 </a:solidFill>
@@ -11962,7 +11962,7 @@
               <a:buNone/>
             </a:pPr>
             <a:r>
-              <a:rPr lang="en-US" sz="1350" dirty="0">
+              <a:rPr lang="en-US" sz="1400" dirty="0">
                 <a:solidFill>
                   <a:srgbClr val="1B2733"/>
                 </a:solidFill>
@@ -12008,7 +12008,7 @@
               <a:buNone/>
             </a:pPr>
             <a:r>
-              <a:rPr lang="en-US" sz="1350" dirty="0">
+              <a:rPr lang="en-US" sz="1400" dirty="0">
                 <a:solidFill>
                   <a:srgbClr val="1B2733"/>
                 </a:solidFill>
@@ -12151,7 +12151,7 @@
               <a:buNone/>
             </a:pPr>
             <a:r>
-              <a:rPr lang="en-US" sz="1400" dirty="0">
+              <a:rPr lang="en-US" sz="1500" dirty="0">
                 <a:solidFill>
                   <a:srgbClr val="12B198"/>
                 </a:solidFill>
@@ -12219,7 +12219,7 @@
               <a:buNone/>
             </a:pPr>
             <a:r>
-              <a:rPr lang="en-US" sz="1350" dirty="0">
+              <a:rPr lang="en-US" sz="1400" dirty="0">
                 <a:solidFill>
                   <a:srgbClr val="1B2733"/>
                 </a:solidFill>
@@ -12265,7 +12265,7 @@
               <a:buNone/>
             </a:pPr>
             <a:r>
-              <a:rPr lang="en-US" sz="1350" dirty="0">
+              <a:rPr lang="en-US" sz="1400" dirty="0">
                 <a:solidFill>
                   <a:srgbClr val="1B2733"/>
                 </a:solidFill>
@@ -12311,7 +12311,7 @@
               <a:buNone/>
             </a:pPr>
             <a:r>
-              <a:rPr lang="en-US" sz="1350" dirty="0">
+              <a:rPr lang="en-US" sz="1400" dirty="0">
                 <a:solidFill>
                   <a:srgbClr val="1B2733"/>
                 </a:solidFill>
@@ -12357,7 +12357,7 @@
               <a:buNone/>
             </a:pPr>
             <a:r>
-              <a:rPr lang="en-US" sz="1350" dirty="0">
+              <a:rPr lang="en-US" sz="1400" dirty="0">
                 <a:solidFill>
                   <a:srgbClr val="1B2733"/>
                 </a:solidFill>
@@ -12903,7 +12903,7 @@
               <a:buNone/>
             </a:pPr>
             <a:r>
-              <a:rPr lang="en-US" sz="1400" dirty="0">
+              <a:rPr lang="en-US" sz="1500" dirty="0">
                 <a:solidFill>
                   <a:srgbClr val="12B198"/>
                 </a:solidFill>
@@ -12971,7 +12971,7 @@
               <a:buNone/>
             </a:pPr>
             <a:r>
-              <a:rPr lang="en-US" sz="1350" dirty="0">
+              <a:rPr lang="en-US" sz="1400" dirty="0">
                 <a:solidFill>
                   <a:srgbClr val="1B2733"/>
                 </a:solidFill>
@@ -13017,7 +13017,7 @@
               <a:buNone/>
             </a:pPr>
             <a:r>
-              <a:rPr lang="en-US" sz="1350" dirty="0">
+              <a:rPr lang="en-US" sz="1400" dirty="0">
                 <a:solidFill>
                   <a:srgbClr val="1B2733"/>
                 </a:solidFill>
@@ -13063,7 +13063,7 @@
               <a:buNone/>
             </a:pPr>
             <a:r>
-              <a:rPr lang="en-US" sz="1350" dirty="0">
+              <a:rPr lang="en-US" sz="1400" dirty="0">
                 <a:solidFill>
                   <a:srgbClr val="1B2733"/>
                 </a:solidFill>
@@ -13109,7 +13109,7 @@
               <a:buNone/>
             </a:pPr>
             <a:r>
-              <a:rPr lang="en-US" sz="1350" dirty="0">
+              <a:rPr lang="en-US" sz="1400" dirty="0">
                 <a:solidFill>
                   <a:srgbClr val="1B2733"/>
                 </a:solidFill>
@@ -13252,7 +13252,7 @@
               <a:buNone/>
             </a:pPr>
             <a:r>
-              <a:rPr lang="en-US" sz="1400" dirty="0">
+              <a:rPr lang="en-US" sz="1500" dirty="0">
                 <a:solidFill>
                   <a:srgbClr val="12B198"/>
                 </a:solidFill>
@@ -13320,7 +13320,7 @@
               <a:buNone/>
             </a:pPr>
             <a:r>
-              <a:rPr lang="en-US" sz="1350" dirty="0">
+              <a:rPr lang="en-US" sz="1400" dirty="0">
                 <a:solidFill>
                   <a:srgbClr val="1B2733"/>
                 </a:solidFill>
@@ -13366,7 +13366,7 @@
               <a:buNone/>
             </a:pPr>
             <a:r>
-              <a:rPr lang="en-US" sz="1350" dirty="0">
+              <a:rPr lang="en-US" sz="1400" dirty="0">
                 <a:solidFill>
                   <a:srgbClr val="1B2733"/>
                 </a:solidFill>
@@ -13412,7 +13412,7 @@
               <a:buNone/>
             </a:pPr>
             <a:r>
-              <a:rPr lang="en-US" sz="1350" dirty="0">
+              <a:rPr lang="en-US" sz="1400" dirty="0">
                 <a:solidFill>
                   <a:srgbClr val="1B2733"/>
                 </a:solidFill>
@@ -13458,7 +13458,7 @@
               <a:buNone/>
             </a:pPr>
             <a:r>
-              <a:rPr lang="en-US" sz="1350" dirty="0">
+              <a:rPr lang="en-US" sz="1400" dirty="0">
                 <a:solidFill>
                   <a:srgbClr val="1B2733"/>
                 </a:solidFill>
@@ -13950,7 +13950,7 @@
                 <a:ea typeface="Calibri" pitchFamily="34" charset="-122"/>
                 <a:cs typeface="Calibri" pitchFamily="34" charset="-120"/>
               </a:rPr>
-              <a:t>What You'll Learn　</a:t>
+              <a:t>What You'll Learn  </a:t>
             </a:r>
             <a:pPr indent="0" marL="0">
               <a:lnSpc>
@@ -13979,7 +13979,7 @@
               <a:buNone/>
             </a:pPr>
             <a:r>
-              <a:rPr lang="en-US" sz="1250" dirty="0">
+              <a:rPr lang="en-US" sz="1300" dirty="0">
                 <a:solidFill>
                   <a:srgbClr val="1B2733"/>
                 </a:solidFill>
@@ -14122,7 +14122,7 @@
               <a:buNone/>
             </a:pPr>
             <a:r>
-              <a:rPr lang="en-US" sz="1400" dirty="0">
+              <a:rPr lang="en-US" sz="1500" dirty="0">
                 <a:solidFill>
                   <a:srgbClr val="12B198"/>
                 </a:solidFill>
@@ -14190,7 +14190,7 @@
               <a:buNone/>
             </a:pPr>
             <a:r>
-              <a:rPr lang="en-US" sz="1350" dirty="0">
+              <a:rPr lang="en-US" sz="1400" dirty="0">
                 <a:solidFill>
                   <a:srgbClr val="1B2733"/>
                 </a:solidFill>
@@ -14236,7 +14236,7 @@
               <a:buNone/>
             </a:pPr>
             <a:r>
-              <a:rPr lang="en-US" sz="1350" dirty="0">
+              <a:rPr lang="en-US" sz="1400" dirty="0">
                 <a:solidFill>
                   <a:srgbClr val="1B2733"/>
                 </a:solidFill>
@@ -14282,7 +14282,7 @@
               <a:buNone/>
             </a:pPr>
             <a:r>
-              <a:rPr lang="en-US" sz="1350" dirty="0">
+              <a:rPr lang="en-US" sz="1400" dirty="0">
                 <a:solidFill>
                   <a:srgbClr val="1B2733"/>
                 </a:solidFill>
@@ -14328,7 +14328,7 @@
               <a:buNone/>
             </a:pPr>
             <a:r>
-              <a:rPr lang="en-US" sz="1350" dirty="0">
+              <a:rPr lang="en-US" sz="1400" dirty="0">
                 <a:solidFill>
                   <a:srgbClr val="1B2733"/>
                 </a:solidFill>
@@ -14471,7 +14471,7 @@
               <a:buNone/>
             </a:pPr>
             <a:r>
-              <a:rPr lang="en-US" sz="1400" dirty="0">
+              <a:rPr lang="en-US" sz="1500" dirty="0">
                 <a:solidFill>
                   <a:srgbClr val="12B198"/>
                 </a:solidFill>
@@ -14539,7 +14539,7 @@
               <a:buNone/>
             </a:pPr>
             <a:r>
-              <a:rPr lang="en-US" sz="1350" dirty="0">
+              <a:rPr lang="en-US" sz="1400" dirty="0">
                 <a:solidFill>
                   <a:srgbClr val="1B2733"/>
                 </a:solidFill>
@@ -14585,7 +14585,7 @@
               <a:buNone/>
             </a:pPr>
             <a:r>
-              <a:rPr lang="en-US" sz="1350" dirty="0">
+              <a:rPr lang="en-US" sz="1400" dirty="0">
                 <a:solidFill>
                   <a:srgbClr val="1B2733"/>
                 </a:solidFill>
@@ -14631,7 +14631,7 @@
               <a:buNone/>
             </a:pPr>
             <a:r>
-              <a:rPr lang="en-US" sz="1350" dirty="0">
+              <a:rPr lang="en-US" sz="1400" dirty="0">
                 <a:solidFill>
                   <a:srgbClr val="1B2733"/>
                 </a:solidFill>
@@ -14677,7 +14677,7 @@
               <a:buNone/>
             </a:pPr>
             <a:r>
-              <a:rPr lang="en-US" sz="1350" dirty="0">
+              <a:rPr lang="en-US" sz="1400" dirty="0">
                 <a:solidFill>
                   <a:srgbClr val="1B2733"/>
                 </a:solidFill>
@@ -15223,7 +15223,7 @@
               <a:buNone/>
             </a:pPr>
             <a:r>
-              <a:rPr lang="en-US" sz="1400" dirty="0">
+              <a:rPr lang="en-US" sz="1500" dirty="0">
                 <a:solidFill>
                   <a:srgbClr val="12B198"/>
                 </a:solidFill>
@@ -15291,7 +15291,7 @@
               <a:buNone/>
             </a:pPr>
             <a:r>
-              <a:rPr lang="en-US" sz="1350" dirty="0">
+              <a:rPr lang="en-US" sz="1400" dirty="0">
                 <a:solidFill>
                   <a:srgbClr val="1B2733"/>
                 </a:solidFill>
@@ -15337,7 +15337,7 @@
               <a:buNone/>
             </a:pPr>
             <a:r>
-              <a:rPr lang="en-US" sz="1350" dirty="0">
+              <a:rPr lang="en-US" sz="1400" dirty="0">
                 <a:solidFill>
                   <a:srgbClr val="1B2733"/>
                 </a:solidFill>
@@ -15383,7 +15383,7 @@
               <a:buNone/>
             </a:pPr>
             <a:r>
-              <a:rPr lang="en-US" sz="1350" dirty="0">
+              <a:rPr lang="en-US" sz="1400" dirty="0">
                 <a:solidFill>
                   <a:srgbClr val="1B2733"/>
                 </a:solidFill>
@@ -15429,7 +15429,7 @@
               <a:buNone/>
             </a:pPr>
             <a:r>
-              <a:rPr lang="en-US" sz="1350" dirty="0">
+              <a:rPr lang="en-US" sz="1400" dirty="0">
                 <a:solidFill>
                   <a:srgbClr val="1B2733"/>
                 </a:solidFill>
@@ -15572,7 +15572,7 @@
               <a:buNone/>
             </a:pPr>
             <a:r>
-              <a:rPr lang="en-US" sz="1400" dirty="0">
+              <a:rPr lang="en-US" sz="1500" dirty="0">
                 <a:solidFill>
                   <a:srgbClr val="12B198"/>
                 </a:solidFill>
@@ -15640,7 +15640,7 @@
               <a:buNone/>
             </a:pPr>
             <a:r>
-              <a:rPr lang="en-US" sz="1350" dirty="0">
+              <a:rPr lang="en-US" sz="1400" dirty="0">
                 <a:solidFill>
                   <a:srgbClr val="1B2733"/>
                 </a:solidFill>
@@ -15686,7 +15686,7 @@
               <a:buNone/>
             </a:pPr>
             <a:r>
-              <a:rPr lang="en-US" sz="1350" dirty="0">
+              <a:rPr lang="en-US" sz="1400" dirty="0">
                 <a:solidFill>
                   <a:srgbClr val="1B2733"/>
                 </a:solidFill>
@@ -15732,7 +15732,7 @@
               <a:buNone/>
             </a:pPr>
             <a:r>
-              <a:rPr lang="en-US" sz="1350" dirty="0">
+              <a:rPr lang="en-US" sz="1400" dirty="0">
                 <a:solidFill>
                   <a:srgbClr val="1B2733"/>
                 </a:solidFill>
@@ -15778,7 +15778,7 @@
               <a:buNone/>
             </a:pPr>
             <a:r>
-              <a:rPr lang="en-US" sz="1350" dirty="0">
+              <a:rPr lang="en-US" sz="1400" dirty="0">
                 <a:solidFill>
                   <a:srgbClr val="1B2733"/>
                 </a:solidFill>
@@ -16408,7 +16408,7 @@
               <a:buNone/>
             </a:pPr>
             <a:r>
-              <a:rPr lang="en-US" sz="1400" dirty="0">
+              <a:rPr lang="en-US" sz="1500" dirty="0">
                 <a:solidFill>
                   <a:srgbClr val="1B2733"/>
                 </a:solidFill>
@@ -16832,7 +16832,7 @@
               <a:buNone/>
             </a:pPr>
             <a:r>
-              <a:rPr lang="en-US" sz="1400" dirty="0">
+              <a:rPr lang="en-US" sz="1500" dirty="0">
                 <a:solidFill>
                   <a:srgbClr val="1B2733"/>
                 </a:solidFill>
@@ -16878,7 +16878,7 @@
               <a:buNone/>
             </a:pPr>
             <a:r>
-              <a:rPr lang="en-US" sz="1400" dirty="0">
+              <a:rPr lang="en-US" sz="1500" dirty="0">
                 <a:solidFill>
                   <a:srgbClr val="1B2733"/>
                 </a:solidFill>
@@ -16924,7 +16924,7 @@
               <a:buNone/>
             </a:pPr>
             <a:r>
-              <a:rPr lang="en-US" sz="1400" dirty="0">
+              <a:rPr lang="en-US" sz="1500" dirty="0">
                 <a:solidFill>
                   <a:srgbClr val="1B2733"/>
                 </a:solidFill>
@@ -16970,7 +16970,7 @@
               <a:buNone/>
             </a:pPr>
             <a:r>
-              <a:rPr lang="en-US" sz="1400" dirty="0">
+              <a:rPr lang="en-US" sz="1500" dirty="0">
                 <a:solidFill>
                   <a:srgbClr val="1B2733"/>
                 </a:solidFill>
@@ -17016,7 +17016,7 @@
               <a:buNone/>
             </a:pPr>
             <a:r>
-              <a:rPr lang="en-US" sz="1400" dirty="0">
+              <a:rPr lang="en-US" sz="1500" dirty="0">
                 <a:solidFill>
                   <a:srgbClr val="1B2733"/>
                 </a:solidFill>
@@ -17168,7 +17168,7 @@
               <a:buNone/>
             </a:pPr>
             <a:r>
-              <a:rPr lang="en-US" sz="1400" dirty="0">
+              <a:rPr lang="en-US" sz="1500" dirty="0">
                 <a:solidFill>
                   <a:srgbClr val="1B2733"/>
                 </a:solidFill>
@@ -17214,7 +17214,7 @@
               <a:buNone/>
             </a:pPr>
             <a:r>
-              <a:rPr lang="en-US" sz="1400" dirty="0">
+              <a:rPr lang="en-US" sz="1500" dirty="0">
                 <a:solidFill>
                   <a:srgbClr val="1B2733"/>
                 </a:solidFill>
@@ -17260,7 +17260,7 @@
               <a:buNone/>
             </a:pPr>
             <a:r>
-              <a:rPr lang="en-US" sz="1400" dirty="0">
+              <a:rPr lang="en-US" sz="1500" dirty="0">
                 <a:solidFill>
                   <a:srgbClr val="1B2733"/>
                 </a:solidFill>
@@ -17306,7 +17306,7 @@
               <a:buNone/>
             </a:pPr>
             <a:r>
-              <a:rPr lang="en-US" sz="1400" dirty="0">
+              <a:rPr lang="en-US" sz="1500" dirty="0">
                 <a:solidFill>
                   <a:srgbClr val="1B2733"/>
                 </a:solidFill>
@@ -17352,7 +17352,7 @@
               <a:buNone/>
             </a:pPr>
             <a:r>
-              <a:rPr lang="en-US" sz="1400" dirty="0">
+              <a:rPr lang="en-US" sz="1500" dirty="0">
                 <a:solidFill>
                   <a:srgbClr val="1B2733"/>
                 </a:solidFill>
@@ -17774,7 +17774,7 @@
                 <a:ea typeface="Calibri" pitchFamily="34" charset="-122"/>
                 <a:cs typeface="Calibri" pitchFamily="34" charset="-120"/>
               </a:rPr>
-              <a:t>What You'll Learn　</a:t>
+              <a:t>What You'll Learn  </a:t>
             </a:r>
             <a:pPr indent="0" marL="0">
               <a:lnSpc>
@@ -17803,7 +17803,7 @@
               <a:buNone/>
             </a:pPr>
             <a:r>
-              <a:rPr lang="en-US" sz="1250" dirty="0">
+              <a:rPr lang="en-US" sz="1300" dirty="0">
                 <a:solidFill>
                   <a:srgbClr val="1B2733"/>
                 </a:solidFill>
@@ -17946,7 +17946,7 @@
               <a:buNone/>
             </a:pPr>
             <a:r>
-              <a:rPr lang="en-US" sz="1400" dirty="0">
+              <a:rPr lang="en-US" sz="1500" dirty="0">
                 <a:solidFill>
                   <a:srgbClr val="12B198"/>
                 </a:solidFill>
@@ -18014,7 +18014,7 @@
               <a:buNone/>
             </a:pPr>
             <a:r>
-              <a:rPr lang="en-US" sz="1350" dirty="0">
+              <a:rPr lang="en-US" sz="1400" dirty="0">
                 <a:solidFill>
                   <a:srgbClr val="1B2733"/>
                 </a:solidFill>
@@ -18060,7 +18060,7 @@
               <a:buNone/>
             </a:pPr>
             <a:r>
-              <a:rPr lang="en-US" sz="1350" dirty="0">
+              <a:rPr lang="en-US" sz="1400" dirty="0">
                 <a:solidFill>
                   <a:srgbClr val="1B2733"/>
                 </a:solidFill>
@@ -18106,7 +18106,7 @@
               <a:buNone/>
             </a:pPr>
             <a:r>
-              <a:rPr lang="en-US" sz="1350" dirty="0">
+              <a:rPr lang="en-US" sz="1400" dirty="0">
                 <a:solidFill>
                   <a:srgbClr val="1B2733"/>
                 </a:solidFill>
@@ -18152,7 +18152,7 @@
               <a:buNone/>
             </a:pPr>
             <a:r>
-              <a:rPr lang="en-US" sz="1350" dirty="0">
+              <a:rPr lang="en-US" sz="1400" dirty="0">
                 <a:solidFill>
                   <a:srgbClr val="1B2733"/>
                 </a:solidFill>
@@ -18295,7 +18295,7 @@
               <a:buNone/>
             </a:pPr>
             <a:r>
-              <a:rPr lang="en-US" sz="1400" dirty="0">
+              <a:rPr lang="en-US" sz="1500" dirty="0">
                 <a:solidFill>
                   <a:srgbClr val="12B198"/>
                 </a:solidFill>
@@ -18363,7 +18363,7 @@
               <a:buNone/>
             </a:pPr>
             <a:r>
-              <a:rPr lang="en-US" sz="1350" dirty="0">
+              <a:rPr lang="en-US" sz="1400" dirty="0">
                 <a:solidFill>
                   <a:srgbClr val="1B2733"/>
                 </a:solidFill>
@@ -18409,7 +18409,7 @@
               <a:buNone/>
             </a:pPr>
             <a:r>
-              <a:rPr lang="en-US" sz="1350" dirty="0">
+              <a:rPr lang="en-US" sz="1400" dirty="0">
                 <a:solidFill>
                   <a:srgbClr val="1B2733"/>
                 </a:solidFill>
@@ -18455,7 +18455,7 @@
               <a:buNone/>
             </a:pPr>
             <a:r>
-              <a:rPr lang="en-US" sz="1350" dirty="0">
+              <a:rPr lang="en-US" sz="1400" dirty="0">
                 <a:solidFill>
                   <a:srgbClr val="1B2733"/>
                 </a:solidFill>
@@ -18501,7 +18501,7 @@
               <a:buNone/>
             </a:pPr>
             <a:r>
-              <a:rPr lang="en-US" sz="1350" dirty="0">
+              <a:rPr lang="en-US" sz="1400" dirty="0">
                 <a:solidFill>
                   <a:srgbClr val="1B2733"/>
                 </a:solidFill>
@@ -19047,7 +19047,7 @@
               <a:buNone/>
             </a:pPr>
             <a:r>
-              <a:rPr lang="en-US" sz="1400" dirty="0">
+              <a:rPr lang="en-US" sz="1500" dirty="0">
                 <a:solidFill>
                   <a:srgbClr val="12B198"/>
                 </a:solidFill>
@@ -19115,7 +19115,7 @@
               <a:buNone/>
             </a:pPr>
             <a:r>
-              <a:rPr lang="en-US" sz="1350" dirty="0">
+              <a:rPr lang="en-US" sz="1400" dirty="0">
                 <a:solidFill>
                   <a:srgbClr val="1B2733"/>
                 </a:solidFill>
@@ -19161,7 +19161,7 @@
               <a:buNone/>
             </a:pPr>
             <a:r>
-              <a:rPr lang="en-US" sz="1350" dirty="0">
+              <a:rPr lang="en-US" sz="1400" dirty="0">
                 <a:solidFill>
                   <a:srgbClr val="1B2733"/>
                 </a:solidFill>
@@ -19207,7 +19207,7 @@
               <a:buNone/>
             </a:pPr>
             <a:r>
-              <a:rPr lang="en-US" sz="1350" dirty="0">
+              <a:rPr lang="en-US" sz="1400" dirty="0">
                 <a:solidFill>
                   <a:srgbClr val="1B2733"/>
                 </a:solidFill>
@@ -19253,7 +19253,7 @@
               <a:buNone/>
             </a:pPr>
             <a:r>
-              <a:rPr lang="en-US" sz="1350" dirty="0">
+              <a:rPr lang="en-US" sz="1400" dirty="0">
                 <a:solidFill>
                   <a:srgbClr val="1B2733"/>
                 </a:solidFill>
@@ -19396,7 +19396,7 @@
               <a:buNone/>
             </a:pPr>
             <a:r>
-              <a:rPr lang="en-US" sz="1400" dirty="0">
+              <a:rPr lang="en-US" sz="1500" dirty="0">
                 <a:solidFill>
                   <a:srgbClr val="12B198"/>
                 </a:solidFill>
@@ -19464,7 +19464,7 @@
               <a:buNone/>
             </a:pPr>
             <a:r>
-              <a:rPr lang="en-US" sz="1350" dirty="0">
+              <a:rPr lang="en-US" sz="1400" dirty="0">
                 <a:solidFill>
                   <a:srgbClr val="1B2733"/>
                 </a:solidFill>
@@ -19510,7 +19510,7 @@
               <a:buNone/>
             </a:pPr>
             <a:r>
-              <a:rPr lang="en-US" sz="1350" dirty="0">
+              <a:rPr lang="en-US" sz="1400" dirty="0">
                 <a:solidFill>
                   <a:srgbClr val="1B2733"/>
                 </a:solidFill>
@@ -19556,7 +19556,7 @@
               <a:buNone/>
             </a:pPr>
             <a:r>
-              <a:rPr lang="en-US" sz="1350" dirty="0">
+              <a:rPr lang="en-US" sz="1400" dirty="0">
                 <a:solidFill>
                   <a:srgbClr val="1B2733"/>
                 </a:solidFill>
@@ -19602,7 +19602,7 @@
               <a:buNone/>
             </a:pPr>
             <a:r>
-              <a:rPr lang="en-US" sz="1350" dirty="0">
+              <a:rPr lang="en-US" sz="1400" dirty="0">
                 <a:solidFill>
                   <a:srgbClr val="1B2733"/>
                 </a:solidFill>
